--- a/pitch/AI_Tutor_Pitch.pptx
+++ b/pitch/AI_Tutor_Pitch.pptx
@@ -5408,7 +5408,7 @@
                 </a:solidFill>
                 <a:latin typeface="Calibri"/>
               </a:rPr>
-              <a:t>• Multilingual auto-detect (en/af/zu/xh)</a:t>
+              <a:t>• 11 official SA languages framework · 4 launch-validated</a:t>
             </a:r>
           </a:p>
           <a:p>
@@ -5594,7 +5594,7 @@
                 </a:solidFill>
                 <a:latin typeface="Calibri"/>
               </a:rPr>
-              <a:t>• Same 4 languages, native experience</a:t>
+              <a:t>• All 11 official languages on roadmap · 4 launch ready</a:t>
             </a:r>
           </a:p>
           <a:p>
@@ -7507,7 +7507,7 @@
                 </a:solidFill>
                 <a:latin typeface="Calibri"/>
               </a:rPr>
-              <a:t>Phase 2: Grades 8–10 + Maths Literacy. Phase 3: Sciences, Accounting, all 11 official languages.</a:t>
+              <a:t>Phase 2: Grades 8–10 + Maths Literacy. Phase 3: Sciences, Accounting, 11 official spoken languages + SA Sign Language (video channel).</a:t>
             </a:r>
           </a:p>
         </p:txBody>
@@ -7768,7 +7768,7 @@
                 </a:solidFill>
                 <a:latin typeface="Calibri"/>
               </a:rPr>
-              <a:t>• en / af / zu / xh now → 11 langs</a:t>
+              <a:t>• 4 validated + 7 first-pass + SA Sign Language = 12</a:t>
             </a:r>
           </a:p>
           <a:p>
@@ -8753,7 +8753,7 @@
                 </a:solidFill>
                 <a:latin typeface="Calibri"/>
               </a:rPr>
-              <a:t>• All 11 official languages</a:t>
+              <a:t>• All 11 official spoken languages educator-validated + SA Sign Language</a:t>
             </a:r>
           </a:p>
           <a:p>

--- a/pitch/AI_Tutor_Pitch.pptx
+++ b/pitch/AI_Tutor_Pitch.pptx
@@ -15,6 +15,8 @@
     <p:sldId id="263" r:id="rId15"/>
     <p:sldId id="264" r:id="rId16"/>
     <p:sldId id="265" r:id="rId17"/>
+    <p:sldId id="266" r:id="rId18"/>
+    <p:sldId id="267" r:id="rId19"/>
   </p:sldIdLst>
   <p:sldSz cx="12188952" cy="6858000" type="screen4x3"/>
   <p:notesSz cx="6858000" cy="9144000"/>
@@ -511,7 +513,7 @@
           <a:lstStyle/>
           <a:p>
             <a:r>
-              <a:t>Open with the equity story. We're a CAPS-aligned multilingual AI tutor that meets every learner — smartphone or feature phone — where they are. Powered by Dell AI Factory. Zero-rated on Vodacom.</a:t>
+              <a:t>Open with the mission, not the tech. AI Tutor is a public-good tutor that reaches every learner in South Africa — smartphone or feature phone, any of the 11 official languages. The two device mockups are placeholders; final version replaces them with real photos of SA learners using the app. Powered by Dell AI Factory. Zero-rated on Vodacom. CAPS-aligned.</a:t>
             </a:r>
           </a:p>
         </p:txBody>
@@ -581,6 +583,146 @@
           <a:lstStyle/>
           <a:p>
             <a:r>
+              <a:t>Three pillars, concrete commitments under each. The closing line is the most important: judges expect a freemium model. Saying out loud that we refuse it is what makes a sponsor know this is real.</a:t>
+            </a:r>
+          </a:p>
+        </p:txBody>
+      </p:sp>
+      <p:sp>
+        <p:nvSpPr>
+          <p:cNvPr id="4" name="Slide Number Placeholder 3"/>
+          <p:cNvSpPr>
+            <a:spLocks noGrp="1"/>
+          </p:cNvSpPr>
+          <p:nvPr>
+            <p:ph type="sldNum" idx="5" sz="quarter"/>
+          </p:nvPr>
+        </p:nvSpPr>
+        <p:spPr/>
+      </p:sp>
+    </p:spTree>
+  </p:cSld>
+  <p:clrMapOvr>
+    <a:masterClrMapping/>
+  </p:clrMapOvr>
+</p:notes>
+</file>
+
+<file path=ppt/notesSlides/notesSlide11.xml><?xml version="1.0" encoding="utf-8"?>
+<p:notes xmlns:a="http://schemas.openxmlformats.org/drawingml/2006/main" xmlns:p="http://schemas.openxmlformats.org/presentationml/2006/main" xmlns:r="http://schemas.openxmlformats.org/officeDocument/2006/relationships">
+  <p:cSld>
+    <p:spTree>
+      <p:nvGrpSpPr>
+        <p:cNvPr id="1" name=""/>
+        <p:cNvGrpSpPr/>
+        <p:nvPr/>
+      </p:nvGrpSpPr>
+      <p:grpSpPr>
+        <a:xfrm>
+          <a:off x="0" y="0"/>
+          <a:ext cx="0" cy="0"/>
+          <a:chOff x="0" y="0"/>
+          <a:chExt cx="0" cy="0"/>
+        </a:xfrm>
+      </p:grpSpPr>
+      <p:sp>
+        <p:nvSpPr>
+          <p:cNvPr id="2" name="Slide Image Placeholder 1"/>
+          <p:cNvSpPr>
+            <a:spLocks noGrp="1"/>
+          </p:cNvSpPr>
+          <p:nvPr>
+            <p:ph type="sldImg" idx="2"/>
+          </p:nvPr>
+        </p:nvSpPr>
+        <p:spPr/>
+      </p:sp>
+      <p:sp>
+        <p:nvSpPr>
+          <p:cNvPr id="3" name="Notes Placeholder 2"/>
+          <p:cNvSpPr>
+            <a:spLocks noGrp="1"/>
+          </p:cNvSpPr>
+          <p:nvPr>
+            <p:ph type="body" idx="3" sz="quarter"/>
+          </p:nvPr>
+        </p:nvSpPr>
+        <p:spPr/>
+        <p:txBody>
+          <a:bodyPr/>
+          <a:lstStyle/>
+          <a:p>
+            <a:r>
+              <a:t>Three phases, six months apart. Pilot is the make-or-break: 5 schools, 2 provinces, real LLM, real Vodacom traffic, real teacher review. By Q3 2026 we know if the uplift target lands.</a:t>
+            </a:r>
+          </a:p>
+        </p:txBody>
+      </p:sp>
+      <p:sp>
+        <p:nvSpPr>
+          <p:cNvPr id="4" name="Slide Number Placeholder 3"/>
+          <p:cNvSpPr>
+            <a:spLocks noGrp="1"/>
+          </p:cNvSpPr>
+          <p:nvPr>
+            <p:ph type="sldNum" idx="5" sz="quarter"/>
+          </p:nvPr>
+        </p:nvSpPr>
+        <p:spPr/>
+      </p:sp>
+    </p:spTree>
+  </p:cSld>
+  <p:clrMapOvr>
+    <a:masterClrMapping/>
+  </p:clrMapOvr>
+</p:notes>
+</file>
+
+<file path=ppt/notesSlides/notesSlide12.xml><?xml version="1.0" encoding="utf-8"?>
+<p:notes xmlns:a="http://schemas.openxmlformats.org/drawingml/2006/main" xmlns:p="http://schemas.openxmlformats.org/presentationml/2006/main" xmlns:r="http://schemas.openxmlformats.org/officeDocument/2006/relationships">
+  <p:cSld>
+    <p:spTree>
+      <p:nvGrpSpPr>
+        <p:cNvPr id="1" name=""/>
+        <p:cNvGrpSpPr/>
+        <p:nvPr/>
+      </p:nvGrpSpPr>
+      <p:grpSpPr>
+        <a:xfrm>
+          <a:off x="0" y="0"/>
+          <a:ext cx="0" cy="0"/>
+          <a:chOff x="0" y="0"/>
+          <a:chExt cx="0" cy="0"/>
+        </a:xfrm>
+      </p:grpSpPr>
+      <p:sp>
+        <p:nvSpPr>
+          <p:cNvPr id="2" name="Slide Image Placeholder 1"/>
+          <p:cNvSpPr>
+            <a:spLocks noGrp="1"/>
+          </p:cNvSpPr>
+          <p:nvPr>
+            <p:ph type="sldImg" idx="2"/>
+          </p:nvPr>
+        </p:nvSpPr>
+        <p:spPr/>
+      </p:sp>
+      <p:sp>
+        <p:nvSpPr>
+          <p:cNvPr id="3" name="Notes Placeholder 2"/>
+          <p:cNvSpPr>
+            <a:spLocks noGrp="1"/>
+          </p:cNvSpPr>
+          <p:nvPr>
+            <p:ph type="body" idx="3" sz="quarter"/>
+          </p:nvPr>
+        </p:nvSpPr>
+        <p:spPr/>
+        <p:txBody>
+          <a:bodyPr/>
+          <a:lstStyle/>
+          <a:p>
+            <a:r>
               <a:t>Four asks, each tied to a partner. Be specific about what each partner gives us — vague asks get vague yeses. Close with the repo URL so judges can run the code themselves.</a:t>
             </a:r>
           </a:p>
@@ -651,7 +793,7 @@
           <a:lstStyle/>
           <a:p>
             <a:r>
-              <a:t>Frame the gap: tutoring works, but it's only available to learners who can afford it. Generic AI gives answers, which is worse than no help — kids hand in homework they didn't learn from. We need a tutor that's free, in their language, on whatever phone they have.</a:t>
+              <a:t>Open with the equity story. We're a CAPS-aligned multilingual AI tutor that meets every learner — smartphone or feature phone — where they are. Powered by Dell AI Factory. Zero-rated on Vodacom.</a:t>
             </a:r>
           </a:p>
         </p:txBody>
@@ -721,7 +863,7 @@
           <a:lstStyle/>
           <a:p>
             <a:r>
-              <a:t>Same brain serves both channels. Pedagogy is identical. CAPS scaffolding is identical. The only difference is the UI surface — rich on WhatsApp, text-only on USSD. The architecture lets us flip providers (mock to real Dell LLM, mock WhatsApp to Meta Cloud API) with a single env-var change. No code rewrite.</a:t>
+              <a:t>Frame the gap: tutoring works, but it's only available to learners who can afford it. Generic AI gives answers, which is worse than no help — kids hand in homework they didn't learn from. We need a tutor that's free, in their language, on whatever phone they have.</a:t>
             </a:r>
           </a:p>
         </p:txBody>
@@ -791,7 +933,7 @@
           <a:lstStyle/>
           <a:p>
             <a:r>
-              <a:t>The seam between channel UI and reasoning is intentional. Providers are abstract base classes; real Dell endpoints plug into the same interfaces the mocks satisfy. The deterministic math analyzer grounds the LLM so it cannot hallucinate the answer — the LLM only explains a verified result.</a:t>
+              <a:t>Same brain serves both channels. Pedagogy is identical. CAPS scaffolding is identical. The only difference is the UI surface — rich on WhatsApp, text-only on USSD. The architecture lets us flip providers (mock to real Dell LLM, mock WhatsApp to Meta Cloud API) with a single env-var change. No code rewrite.</a:t>
             </a:r>
           </a:p>
         </p:txBody>
@@ -861,7 +1003,7 @@
           <a:lstStyle/>
           <a:p>
             <a:r>
-              <a:t>Five moats. The strongest two: USSD reach (literal, measurable) and CAPS-aligned + sovereign hosting (institutional procurement). Meta cannot replicate USSD without rebuilding their stack. They cannot replicate CAPS without years of SA pedagogical relationships.</a:t>
+              <a:t>The green-underlined block is what Meta AI cannot claim: sovereign data, deterministic maths grounding, curriculum-bounded scope. The knowledge base is publicly sourceable — no proprietary AI, no black box, no data leaving the country.</a:t>
             </a:r>
           </a:p>
         </p:txBody>
@@ -931,7 +1073,7 @@
           <a:lstStyle/>
           <a:p>
             <a:r>
-              <a:t>Don't oversell. Hattie meta-analysis is real; tutoring uplifts; we are a force multiplier for motivated learners with access to a teacher. We will measure and publish quarterly impact. Honesty here is what separates a serious public-good service from another tech bet.</a:t>
+              <a:t>This is the demo you'll record. Six screens, one continuous flow, real NSC content, no answers given away, mark-scheme-authentic. When an executive asks 'is this real?' — this is the slide you point to.</a:t>
             </a:r>
           </a:p>
         </p:txBody>
@@ -1001,7 +1143,7 @@
           <a:lstStyle/>
           <a:p>
             <a:r>
-              <a:t>Concrete personas. Thandi is the WhatsApp learner — has a smartphone, limited data, needs zero-rating. Lethabo is the USSD learner — feature phone, no other path to AI tutoring exists. Both are real archetypes covering the under-resourced 75% of SA learners.</a:t>
+              <a:t>Five moats. The strongest two: USSD reach (literal, measurable) and CAPS-aligned + sovereign hosting (institutional procurement). Meta cannot replicate USSD without rebuilding their stack. They cannot replicate CAPS without years of SA pedagogical relationships.</a:t>
             </a:r>
           </a:p>
         </p:txBody>
@@ -1071,7 +1213,7 @@
           <a:lstStyle/>
           <a:p>
             <a:r>
-              <a:t>Three pillars, concrete commitments under each. The closing line is the most important: judges expect a freemium model. Saying out loud that we refuse it is what makes a sponsor know this is real.</a:t>
+              <a:t>Don't oversell. Hattie meta-analysis is real; tutoring uplifts; we are a force multiplier for motivated learners with access to a teacher. We will measure and publish quarterly impact. Honesty here is what separates a serious public-good service from another tech bet.</a:t>
             </a:r>
           </a:p>
         </p:txBody>
@@ -1141,7 +1283,7 @@
           <a:lstStyle/>
           <a:p>
             <a:r>
-              <a:t>Three phases, six months apart. Pilot is the make-or-break: 5 schools, 2 provinces, real LLM, real Vodacom traffic, real teacher review. By Q3 2026 we know if the uplift target lands.</a:t>
+              <a:t>Concrete personas. Thandi is the WhatsApp learner — has a smartphone, limited data, needs zero-rating. Lethabo is the USSD learner — feature phone, no other path to AI tutoring exists. Both are real archetypes covering the under-resourced 75% of SA learners.</a:t>
             </a:r>
           </a:p>
         </p:txBody>
@@ -4163,8 +4305,8 @@
         </p:nvSpPr>
         <p:spPr>
           <a:xfrm>
-            <a:off x="548640" y="548640"/>
-            <a:ext cx="1463040" cy="411480"/>
+            <a:off x="548640" y="502920"/>
+            <a:ext cx="1737360" cy="384048"/>
           </a:xfrm>
           <a:prstGeom prst="roundRect">
             <a:avLst/>
@@ -4196,7 +4338,7 @@
           <a:p>
             <a:pPr algn="ctr"/>
             <a:r>
-              <a:rPr sz="1200" b="1">
+              <a:rPr sz="1100" b="1">
                 <a:solidFill>
                   <a:srgbClr val="03110D"/>
                 </a:solidFill>
@@ -4214,8 +4356,8 @@
         </p:nvSpPr>
         <p:spPr>
           <a:xfrm>
-            <a:off x="548640" y="1463040"/>
-            <a:ext cx="11064240" cy="1097280"/>
+            <a:off x="548640" y="1554480"/>
+            <a:ext cx="6949440" cy="1371600"/>
           </a:xfrm>
           <a:prstGeom prst="rect">
             <a:avLst/>
@@ -4249,8 +4391,8 @@
         </p:nvSpPr>
         <p:spPr>
           <a:xfrm>
-            <a:off x="548640" y="2651760"/>
-            <a:ext cx="11064240" cy="640080"/>
+            <a:off x="548640" y="3063240"/>
+            <a:ext cx="6949440" cy="640080"/>
           </a:xfrm>
           <a:prstGeom prst="rect">
             <a:avLst/>
@@ -4265,13 +4407,13 @@
           <a:p>
             <a:pPr algn="l"/>
             <a:r>
-              <a:rPr sz="2800" b="0">
+              <a:rPr sz="2800" b="1">
                 <a:solidFill>
                   <a:srgbClr val="9CFF8C"/>
                 </a:solidFill>
                 <a:latin typeface="Calibri"/>
               </a:rPr>
-              <a:t>CAPS-aligned. Multilingual. WhatsApp + USSD.</a:t>
+              <a:t>Every learner. Every language. Every phone.</a:t>
             </a:r>
           </a:p>
         </p:txBody>
@@ -4284,7 +4426,7 @@
         </p:nvSpPr>
         <p:spPr>
           <a:xfrm>
-            <a:off x="548640" y="3383280"/>
+            <a:off x="548640" y="3794760"/>
             <a:ext cx="3657600" cy="50800"/>
           </a:xfrm>
           <a:prstGeom prst="rect">
@@ -4321,14 +4463,355 @@
       </p:sp>
       <p:sp>
         <p:nvSpPr>
-          <p:cNvPr id="6" name="TextBox 5"/>
+          <p:cNvPr id="6" name="Rounded Rectangle 5"/>
+          <p:cNvSpPr/>
+          <p:nvPr/>
+        </p:nvSpPr>
+        <p:spPr>
+          <a:xfrm>
+            <a:off x="8869680" y="1188720"/>
+            <a:ext cx="1828800" cy="3840480"/>
+          </a:xfrm>
+          <a:prstGeom prst="roundRect">
+            <a:avLst/>
+          </a:prstGeom>
+          <a:solidFill>
+            <a:srgbClr val="03110D"/>
+          </a:solidFill>
+          <a:ln w="25400">
+            <a:solidFill>
+              <a:srgbClr val="00A884"/>
+            </a:solidFill>
+          </a:ln>
+        </p:spPr>
+        <p:style>
+          <a:lnRef idx="1">
+            <a:schemeClr val="accent1"/>
+          </a:lnRef>
+          <a:fillRef idx="3">
+            <a:schemeClr val="accent1"/>
+          </a:fillRef>
+          <a:effectRef idx="2">
+            <a:schemeClr val="accent1"/>
+          </a:effectRef>
+          <a:fontRef idx="minor">
+            <a:schemeClr val="lt1"/>
+          </a:fontRef>
+        </p:style>
+        <p:txBody>
+          <a:bodyPr rtlCol="0" anchor="ctr"/>
+          <a:lstStyle/>
+          <a:p/>
+        </p:txBody>
+      </p:sp>
+      <p:sp>
+        <p:nvSpPr>
+          <p:cNvPr id="7" name="Rounded Rectangle 6"/>
+          <p:cNvSpPr/>
+          <p:nvPr/>
+        </p:nvSpPr>
+        <p:spPr>
+          <a:xfrm>
+            <a:off x="9098280" y="1371600"/>
+            <a:ext cx="1371600" cy="320040"/>
+          </a:xfrm>
+          <a:prstGeom prst="roundRect">
+            <a:avLst/>
+          </a:prstGeom>
+          <a:solidFill>
+            <a:srgbClr val="00A884"/>
+          </a:solidFill>
+          <a:ln>
+            <a:noFill/>
+          </a:ln>
+        </p:spPr>
+        <p:style>
+          <a:lnRef idx="1">
+            <a:schemeClr val="accent1"/>
+          </a:lnRef>
+          <a:fillRef idx="3">
+            <a:schemeClr val="accent1"/>
+          </a:fillRef>
+          <a:effectRef idx="2">
+            <a:schemeClr val="accent1"/>
+          </a:effectRef>
+          <a:fontRef idx="minor">
+            <a:schemeClr val="lt1"/>
+          </a:fontRef>
+        </p:style>
+        <p:txBody>
+          <a:bodyPr rtlCol="0" anchor="ctr" lIns="137160" rIns="137160"/>
+          <a:lstStyle/>
+          <a:p>
+            <a:pPr algn="ctr"/>
+            <a:r>
+              <a:rPr sz="1000" b="1">
+                <a:solidFill>
+                  <a:srgbClr val="03110D"/>
+                </a:solidFill>
+              </a:rPr>
+              <a:t>WhatsApp</a:t>
+            </a:r>
+          </a:p>
+        </p:txBody>
+      </p:sp>
+      <p:sp>
+        <p:nvSpPr>
+          <p:cNvPr id="8" name="Rounded Rectangle 7"/>
+          <p:cNvSpPr/>
+          <p:nvPr/>
+        </p:nvSpPr>
+        <p:spPr>
+          <a:xfrm>
+            <a:off x="9052559" y="1874519"/>
+            <a:ext cx="1005840" cy="411480"/>
+          </a:xfrm>
+          <a:prstGeom prst="roundRect">
+            <a:avLst/>
+          </a:prstGeom>
+          <a:solidFill>
+            <a:srgbClr val="00A884"/>
+          </a:solidFill>
+          <a:ln>
+            <a:noFill/>
+          </a:ln>
+        </p:spPr>
+        <p:style>
+          <a:lnRef idx="1">
+            <a:schemeClr val="accent1"/>
+          </a:lnRef>
+          <a:fillRef idx="3">
+            <a:schemeClr val="accent1"/>
+          </a:fillRef>
+          <a:effectRef idx="2">
+            <a:schemeClr val="accent1"/>
+          </a:effectRef>
+          <a:fontRef idx="minor">
+            <a:schemeClr val="lt1"/>
+          </a:fontRef>
+        </p:style>
+        <p:txBody>
+          <a:bodyPr rtlCol="0" anchor="ctr" lIns="137160" rIns="137160"/>
+          <a:lstStyle/>
+          <a:p>
+            <a:pPr algn="ctr"/>
+            <a:r>
+              <a:rPr sz="900" b="0">
+                <a:solidFill>
+                  <a:srgbClr val="03110D"/>
+                </a:solidFill>
+              </a:rPr>
+              <a:t>Solve x²+x-30</a:t>
+            </a:r>
+          </a:p>
+        </p:txBody>
+      </p:sp>
+      <p:sp>
+        <p:nvSpPr>
+          <p:cNvPr id="9" name="Rounded Rectangle 8"/>
+          <p:cNvSpPr/>
+          <p:nvPr/>
+        </p:nvSpPr>
+        <p:spPr>
+          <a:xfrm>
+            <a:off x="9418319" y="2423160"/>
+            <a:ext cx="1005840" cy="411480"/>
+          </a:xfrm>
+          <a:prstGeom prst="roundRect">
+            <a:avLst/>
+          </a:prstGeom>
+          <a:solidFill>
+            <a:srgbClr val="111B21"/>
+          </a:solidFill>
+          <a:ln>
+            <a:noFill/>
+          </a:ln>
+        </p:spPr>
+        <p:style>
+          <a:lnRef idx="1">
+            <a:schemeClr val="accent1"/>
+          </a:lnRef>
+          <a:fillRef idx="3">
+            <a:schemeClr val="accent1"/>
+          </a:fillRef>
+          <a:effectRef idx="2">
+            <a:schemeClr val="accent1"/>
+          </a:effectRef>
+          <a:fontRef idx="minor">
+            <a:schemeClr val="lt1"/>
+          </a:fontRef>
+        </p:style>
+        <p:txBody>
+          <a:bodyPr rtlCol="0" anchor="ctr" lIns="137160" rIns="137160"/>
+          <a:lstStyle/>
+          <a:p>
+            <a:pPr algn="ctr"/>
+            <a:r>
+              <a:rPr sz="900" b="0">
+                <a:solidFill>
+                  <a:srgbClr val="E9EDEF"/>
+                </a:solidFill>
+              </a:rPr>
+              <a:t>Try factorising</a:t>
+            </a:r>
+          </a:p>
+        </p:txBody>
+      </p:sp>
+      <p:sp>
+        <p:nvSpPr>
+          <p:cNvPr id="10" name="Rounded Rectangle 9"/>
+          <p:cNvSpPr/>
+          <p:nvPr/>
+        </p:nvSpPr>
+        <p:spPr>
+          <a:xfrm>
+            <a:off x="9052559" y="2971800"/>
+            <a:ext cx="1005840" cy="411480"/>
+          </a:xfrm>
+          <a:prstGeom prst="roundRect">
+            <a:avLst/>
+          </a:prstGeom>
+          <a:solidFill>
+            <a:srgbClr val="00A884"/>
+          </a:solidFill>
+          <a:ln>
+            <a:noFill/>
+          </a:ln>
+        </p:spPr>
+        <p:style>
+          <a:lnRef idx="1">
+            <a:schemeClr val="accent1"/>
+          </a:lnRef>
+          <a:fillRef idx="3">
+            <a:schemeClr val="accent1"/>
+          </a:fillRef>
+          <a:effectRef idx="2">
+            <a:schemeClr val="accent1"/>
+          </a:effectRef>
+          <a:fontRef idx="minor">
+            <a:schemeClr val="lt1"/>
+          </a:fontRef>
+        </p:style>
+        <p:txBody>
+          <a:bodyPr rtlCol="0" anchor="ctr" lIns="137160" rIns="137160"/>
+          <a:lstStyle/>
+          <a:p>
+            <a:pPr algn="ctr"/>
+            <a:r>
+              <a:rPr sz="900" b="0">
+                <a:solidFill>
+                  <a:srgbClr val="03110D"/>
+                </a:solidFill>
+              </a:rPr>
+              <a:t>(x+6)(x-5)</a:t>
+            </a:r>
+          </a:p>
+        </p:txBody>
+      </p:sp>
+      <p:sp>
+        <p:nvSpPr>
+          <p:cNvPr id="11" name="Rounded Rectangle 10"/>
+          <p:cNvSpPr/>
+          <p:nvPr/>
+        </p:nvSpPr>
+        <p:spPr>
+          <a:xfrm>
+            <a:off x="9418319" y="3520439"/>
+            <a:ext cx="1005840" cy="411480"/>
+          </a:xfrm>
+          <a:prstGeom prst="roundRect">
+            <a:avLst/>
+          </a:prstGeom>
+          <a:solidFill>
+            <a:srgbClr val="111B21"/>
+          </a:solidFill>
+          <a:ln>
+            <a:noFill/>
+          </a:ln>
+        </p:spPr>
+        <p:style>
+          <a:lnRef idx="1">
+            <a:schemeClr val="accent1"/>
+          </a:lnRef>
+          <a:fillRef idx="3">
+            <a:schemeClr val="accent1"/>
+          </a:fillRef>
+          <a:effectRef idx="2">
+            <a:schemeClr val="accent1"/>
+          </a:effectRef>
+          <a:fontRef idx="minor">
+            <a:schemeClr val="lt1"/>
+          </a:fontRef>
+        </p:style>
+        <p:txBody>
+          <a:bodyPr rtlCol="0" anchor="ctr" lIns="137160" rIns="137160"/>
+          <a:lstStyle/>
+          <a:p>
+            <a:pPr algn="ctr"/>
+            <a:r>
+              <a:rPr sz="900" b="0">
+                <a:solidFill>
+                  <a:srgbClr val="E9EDEF"/>
+                </a:solidFill>
+              </a:rPr>
+              <a:t>✓ 3/3  ★</a:t>
+            </a:r>
+          </a:p>
+        </p:txBody>
+      </p:sp>
+      <p:sp>
+        <p:nvSpPr>
+          <p:cNvPr id="12" name="Rounded Rectangle 11"/>
+          <p:cNvSpPr/>
+          <p:nvPr/>
+        </p:nvSpPr>
+        <p:spPr>
+          <a:xfrm>
+            <a:off x="10149840" y="3931920"/>
+            <a:ext cx="1371600" cy="2743200"/>
+          </a:xfrm>
+          <a:prstGeom prst="roundRect">
+            <a:avLst/>
+          </a:prstGeom>
+          <a:solidFill>
+            <a:srgbClr val="03110D"/>
+          </a:solidFill>
+          <a:ln w="25400">
+            <a:solidFill>
+              <a:srgbClr val="FFB347"/>
+            </a:solidFill>
+          </a:ln>
+        </p:spPr>
+        <p:style>
+          <a:lnRef idx="1">
+            <a:schemeClr val="accent1"/>
+          </a:lnRef>
+          <a:fillRef idx="3">
+            <a:schemeClr val="accent1"/>
+          </a:fillRef>
+          <a:effectRef idx="2">
+            <a:schemeClr val="accent1"/>
+          </a:effectRef>
+          <a:fontRef idx="minor">
+            <a:schemeClr val="lt1"/>
+          </a:fontRef>
+        </p:style>
+        <p:txBody>
+          <a:bodyPr rtlCol="0" anchor="ctr"/>
+          <a:lstStyle/>
+          <a:p/>
+        </p:txBody>
+      </p:sp>
+      <p:sp>
+        <p:nvSpPr>
+          <p:cNvPr id="13" name="TextBox 12"/>
           <p:cNvSpPr txBox="1"/>
           <p:nvPr/>
         </p:nvSpPr>
         <p:spPr>
           <a:xfrm>
-            <a:off x="548640" y="3657600"/>
-            <a:ext cx="11064240" cy="548640"/>
+            <a:off x="10195560" y="4251959"/>
+            <a:ext cx="1280160" cy="320040"/>
           </a:xfrm>
           <a:prstGeom prst="rect">
             <a:avLst/>
@@ -4341,29 +4824,29 @@
           </a:bodyPr>
           <a:lstStyle/>
           <a:p>
-            <a:pPr algn="l"/>
-            <a:r>
-              <a:rPr sz="2000" b="0">
-                <a:solidFill>
-                  <a:srgbClr val="E9EDEF"/>
-                </a:solidFill>
-                <a:latin typeface="Calibri"/>
-              </a:rPr>
-              <a:t>A tutor every South African learner can access — even on a feature phone, even with no data.</a:t>
-            </a:r>
-          </a:p>
-        </p:txBody>
-      </p:sp>
-      <p:sp>
-        <p:nvSpPr>
-          <p:cNvPr id="7" name="TextBox 6"/>
+            <a:pPr algn="ctr"/>
+            <a:r>
+              <a:rPr sz="1200" b="1">
+                <a:solidFill>
+                  <a:srgbClr val="9CFF8C"/>
+                </a:solidFill>
+                <a:latin typeface="Consolas"/>
+              </a:rPr>
+              <a:t>USSD *123#</a:t>
+            </a:r>
+          </a:p>
+        </p:txBody>
+      </p:sp>
+      <p:sp>
+        <p:nvSpPr>
+          <p:cNvPr id="14" name="TextBox 13"/>
           <p:cNvSpPr txBox="1"/>
           <p:nvPr/>
         </p:nvSpPr>
         <p:spPr>
           <a:xfrm>
-            <a:off x="548640" y="4846320"/>
-            <a:ext cx="11064240" cy="457200"/>
+            <a:off x="10241280" y="4709159"/>
+            <a:ext cx="1188720" cy="1463040"/>
           </a:xfrm>
           <a:prstGeom prst="rect">
             <a:avLst/>
@@ -4376,15 +4859,207 @@
           </a:bodyPr>
           <a:lstStyle/>
           <a:p>
+            <a:pPr algn="l">
+              <a:spcBef>
+                <a:spcPts val="200"/>
+              </a:spcBef>
+            </a:pPr>
+            <a:r>
+              <a:rPr sz="800" b="0">
+                <a:solidFill>
+                  <a:srgbClr val="9CFF8C"/>
+                </a:solidFill>
+                <a:latin typeface="Consolas"/>
+              </a:rPr>
+              <a:t>1. Maths</a:t>
+            </a:r>
+          </a:p>
+          <a:p>
+            <a:pPr algn="l">
+              <a:spcBef>
+                <a:spcPts val="200"/>
+              </a:spcBef>
+            </a:pPr>
+            <a:r>
+              <a:rPr sz="800" b="0">
+                <a:solidFill>
+                  <a:srgbClr val="9CFF8C"/>
+                </a:solidFill>
+                <a:latin typeface="Consolas"/>
+              </a:rPr>
+              <a:t>2. Past papers</a:t>
+            </a:r>
+          </a:p>
+          <a:p>
+            <a:pPr algn="l">
+              <a:spcBef>
+                <a:spcPts val="200"/>
+              </a:spcBef>
+            </a:pPr>
+            <a:r>
+              <a:rPr sz="800" b="0">
+                <a:solidFill>
+                  <a:srgbClr val="9CFF8C"/>
+                </a:solidFill>
+                <a:latin typeface="Consolas"/>
+              </a:rPr>
+              <a:t>3. Language</a:t>
+            </a:r>
+          </a:p>
+          <a:p>
+            <a:pPr algn="l">
+              <a:spcBef>
+                <a:spcPts val="200"/>
+              </a:spcBef>
+            </a:pPr>
+            <a:r>
+              <a:rPr sz="800" b="0">
+                <a:solidFill>
+                  <a:srgbClr val="9CFF8C"/>
+                </a:solidFill>
+                <a:latin typeface="Consolas"/>
+              </a:rPr>
+              <a:t>4. Continue</a:t>
+            </a:r>
+          </a:p>
+        </p:txBody>
+      </p:sp>
+      <p:sp>
+        <p:nvSpPr>
+          <p:cNvPr id="15" name="TextBox 14"/>
+          <p:cNvSpPr txBox="1"/>
+          <p:nvPr/>
+        </p:nvSpPr>
+        <p:spPr>
+          <a:xfrm>
+            <a:off x="10195560" y="6309359"/>
+            <a:ext cx="1280160" cy="274320"/>
+          </a:xfrm>
+          <a:prstGeom prst="rect">
+            <a:avLst/>
+          </a:prstGeom>
+          <a:noFill/>
+        </p:spPr>
+        <p:txBody>
+          <a:bodyPr wrap="square">
+            <a:spAutoFit/>
+          </a:bodyPr>
+          <a:lstStyle/>
+          <a:p>
             <a:pPr algn="l"/>
             <a:r>
-              <a:rPr sz="1400" b="0">
+              <a:rPr sz="800" b="0">
                 <a:solidFill>
                   <a:srgbClr val="8696A0"/>
                 </a:solidFill>
-                <a:latin typeface="Calibri"/>
-              </a:rPr>
-              <a:t>Powered by Dell AI Factory  ·  Zero-rated on Vodacom</a:t>
+                <a:latin typeface="Consolas"/>
+              </a:rPr>
+              <a:t>Reply:</a:t>
+            </a:r>
+          </a:p>
+        </p:txBody>
+      </p:sp>
+      <p:sp>
+        <p:nvSpPr>
+          <p:cNvPr id="16" name="TextBox 15"/>
+          <p:cNvSpPr txBox="1"/>
+          <p:nvPr/>
+        </p:nvSpPr>
+        <p:spPr>
+          <a:xfrm>
+            <a:off x="548640" y="5349240"/>
+            <a:ext cx="7772400" cy="822960"/>
+          </a:xfrm>
+          <a:prstGeom prst="rect">
+            <a:avLst/>
+          </a:prstGeom>
+          <a:noFill/>
+        </p:spPr>
+        <p:txBody>
+          <a:bodyPr wrap="square">
+            <a:spAutoFit/>
+          </a:bodyPr>
+          <a:lstStyle/>
+          <a:p>
+            <a:pPr algn="l"/>
+            <a:r>
+              <a:rPr sz="1800" b="1">
+                <a:solidFill>
+                  <a:srgbClr val="E9EDEF"/>
+                </a:solidFill>
+                <a:latin typeface="Calibri"/>
+              </a:rPr>
+              <a:t>A tutor South Africa can actually afford — for the 75% of learners no one else reaches.</a:t>
+            </a:r>
+          </a:p>
+        </p:txBody>
+      </p:sp>
+      <p:sp>
+        <p:nvSpPr>
+          <p:cNvPr id="17" name="TextBox 16"/>
+          <p:cNvSpPr txBox="1"/>
+          <p:nvPr/>
+        </p:nvSpPr>
+        <p:spPr>
+          <a:xfrm>
+            <a:off x="548640" y="6172200"/>
+            <a:ext cx="11064240" cy="320040"/>
+          </a:xfrm>
+          <a:prstGeom prst="rect">
+            <a:avLst/>
+          </a:prstGeom>
+          <a:noFill/>
+        </p:spPr>
+        <p:txBody>
+          <a:bodyPr wrap="square">
+            <a:spAutoFit/>
+          </a:bodyPr>
+          <a:lstStyle/>
+          <a:p>
+            <a:pPr algn="r"/>
+            <a:r>
+              <a:rPr sz="1200" b="0">
+                <a:solidFill>
+                  <a:srgbClr val="9CFF8C"/>
+                </a:solidFill>
+                <a:latin typeface="Calibri"/>
+              </a:rPr>
+              <a:t>Powered by Dell AI Factory  ·  Zero-rated on Vodacom  ·  CAPS-aligned</a:t>
+            </a:r>
+          </a:p>
+        </p:txBody>
+      </p:sp>
+      <p:sp>
+        <p:nvSpPr>
+          <p:cNvPr id="18" name="TextBox 17"/>
+          <p:cNvSpPr txBox="1"/>
+          <p:nvPr/>
+        </p:nvSpPr>
+        <p:spPr>
+          <a:xfrm>
+            <a:off x="548640" y="6492240"/>
+            <a:ext cx="11064240" cy="320040"/>
+          </a:xfrm>
+          <a:prstGeom prst="rect">
+            <a:avLst/>
+          </a:prstGeom>
+          <a:noFill/>
+        </p:spPr>
+        <p:txBody>
+          <a:bodyPr wrap="square">
+            <a:spAutoFit/>
+          </a:bodyPr>
+          <a:lstStyle/>
+          <a:p>
+            <a:pPr algn="ctr"/>
+            <a:r>
+              <a:rPr sz="1000" b="0">
+                <a:solidFill>
+                  <a:srgbClr val="8696A0"/>
+                </a:solidFill>
+                <a:latin typeface="Calibri"/>
+              </a:rPr>
+              <a:t>[Team: replace device mockups with real photos of SA learners using the demo — see cover-photo brief]</a:t>
             </a:r>
           </a:p>
         </p:txBody>
@@ -4441,6 +5116,1300 @@
             <a:r>
               <a:rPr sz="1400" b="1">
                 <a:solidFill>
+                  <a:srgbClr val="00A884"/>
+                </a:solidFill>
+                <a:latin typeface="Calibri"/>
+              </a:rPr>
+              <a:t>Equality · Safety · Trust</a:t>
+            </a:r>
+          </a:p>
+        </p:txBody>
+      </p:sp>
+      <p:sp>
+        <p:nvSpPr>
+          <p:cNvPr id="3" name="TextBox 2"/>
+          <p:cNvSpPr txBox="1"/>
+          <p:nvPr/>
+        </p:nvSpPr>
+        <p:spPr>
+          <a:xfrm>
+            <a:off x="548640" y="914400"/>
+            <a:ext cx="11064240" cy="914400"/>
+          </a:xfrm>
+          <a:prstGeom prst="rect">
+            <a:avLst/>
+          </a:prstGeom>
+          <a:noFill/>
+        </p:spPr>
+        <p:txBody>
+          <a:bodyPr wrap="square">
+            <a:spAutoFit/>
+          </a:bodyPr>
+          <a:lstStyle/>
+          <a:p>
+            <a:pPr algn="l"/>
+            <a:r>
+              <a:rPr sz="3200" b="1">
+                <a:solidFill>
+                  <a:srgbClr val="FFFFFF"/>
+                </a:solidFill>
+                <a:latin typeface="Calibri"/>
+              </a:rPr>
+              <a:t>Built right, not built fast.</a:t>
+            </a:r>
+          </a:p>
+        </p:txBody>
+      </p:sp>
+      <p:sp>
+        <p:nvSpPr>
+          <p:cNvPr id="4" name="Rectangle 3"/>
+          <p:cNvSpPr/>
+          <p:nvPr/>
+        </p:nvSpPr>
+        <p:spPr>
+          <a:xfrm>
+            <a:off x="548640" y="2011680"/>
+            <a:ext cx="3657600" cy="50800"/>
+          </a:xfrm>
+          <a:prstGeom prst="rect">
+            <a:avLst/>
+          </a:prstGeom>
+          <a:solidFill>
+            <a:srgbClr val="00A884"/>
+          </a:solidFill>
+          <a:ln>
+            <a:noFill/>
+          </a:ln>
+        </p:spPr>
+        <p:style>
+          <a:lnRef idx="1">
+            <a:schemeClr val="accent1"/>
+          </a:lnRef>
+          <a:fillRef idx="3">
+            <a:schemeClr val="accent1"/>
+          </a:fillRef>
+          <a:effectRef idx="2">
+            <a:schemeClr val="accent1"/>
+          </a:effectRef>
+          <a:fontRef idx="minor">
+            <a:schemeClr val="lt1"/>
+          </a:fontRef>
+        </p:style>
+        <p:txBody>
+          <a:bodyPr rtlCol="0" anchor="ctr"/>
+          <a:lstStyle/>
+          <a:p>
+            <a:pPr algn="ctr"/>
+          </a:p>
+        </p:txBody>
+      </p:sp>
+      <p:sp>
+        <p:nvSpPr>
+          <p:cNvPr id="5" name="Rounded Rectangle 4"/>
+          <p:cNvSpPr/>
+          <p:nvPr/>
+        </p:nvSpPr>
+        <p:spPr>
+          <a:xfrm>
+            <a:off x="548640" y="2468880"/>
+            <a:ext cx="1463040" cy="411480"/>
+          </a:xfrm>
+          <a:prstGeom prst="roundRect">
+            <a:avLst/>
+          </a:prstGeom>
+          <a:solidFill>
+            <a:srgbClr val="00A884"/>
+          </a:solidFill>
+          <a:ln>
+            <a:noFill/>
+          </a:ln>
+        </p:spPr>
+        <p:style>
+          <a:lnRef idx="1">
+            <a:schemeClr val="accent1"/>
+          </a:lnRef>
+          <a:fillRef idx="3">
+            <a:schemeClr val="accent1"/>
+          </a:fillRef>
+          <a:effectRef idx="2">
+            <a:schemeClr val="accent1"/>
+          </a:effectRef>
+          <a:fontRef idx="minor">
+            <a:schemeClr val="lt1"/>
+          </a:fontRef>
+        </p:style>
+        <p:txBody>
+          <a:bodyPr rtlCol="0" anchor="ctr" lIns="137160" rIns="137160"/>
+          <a:lstStyle/>
+          <a:p>
+            <a:pPr algn="ctr"/>
+            <a:r>
+              <a:rPr sz="1400" b="1">
+                <a:solidFill>
+                  <a:srgbClr val="03110D"/>
+                </a:solidFill>
+              </a:rPr>
+              <a:t>Equality</a:t>
+            </a:r>
+          </a:p>
+        </p:txBody>
+      </p:sp>
+      <p:sp>
+        <p:nvSpPr>
+          <p:cNvPr id="6" name="TextBox 5"/>
+          <p:cNvSpPr txBox="1"/>
+          <p:nvPr/>
+        </p:nvSpPr>
+        <p:spPr>
+          <a:xfrm>
+            <a:off x="548640" y="3017520"/>
+            <a:ext cx="3657600" cy="3383280"/>
+          </a:xfrm>
+          <a:prstGeom prst="rect">
+            <a:avLst/>
+          </a:prstGeom>
+          <a:noFill/>
+        </p:spPr>
+        <p:txBody>
+          <a:bodyPr wrap="square">
+            <a:spAutoFit/>
+          </a:bodyPr>
+          <a:lstStyle/>
+          <a:p>
+            <a:pPr algn="l">
+              <a:spcBef>
+                <a:spcPts val="800"/>
+              </a:spcBef>
+            </a:pPr>
+            <a:r>
+              <a:rPr sz="1200">
+                <a:solidFill>
+                  <a:srgbClr val="E9EDEF"/>
+                </a:solidFill>
+                <a:latin typeface="Calibri"/>
+              </a:rPr>
+              <a:t>• Two channels — never device-locked</a:t>
+            </a:r>
+          </a:p>
+          <a:p>
+            <a:pPr algn="l">
+              <a:spcBef>
+                <a:spcPts val="800"/>
+              </a:spcBef>
+            </a:pPr>
+            <a:r>
+              <a:rPr sz="1200">
+                <a:solidFill>
+                  <a:srgbClr val="E9EDEF"/>
+                </a:solidFill>
+                <a:latin typeface="Calibri"/>
+              </a:rPr>
+              <a:t>• Zero at point of use (zero-rated)</a:t>
+            </a:r>
+          </a:p>
+          <a:p>
+            <a:pPr algn="l">
+              <a:spcBef>
+                <a:spcPts val="800"/>
+              </a:spcBef>
+            </a:pPr>
+            <a:r>
+              <a:rPr sz="1200">
+                <a:solidFill>
+                  <a:srgbClr val="E9EDEF"/>
+                </a:solidFill>
+                <a:latin typeface="Calibri"/>
+              </a:rPr>
+              <a:t>• 4 validated + 7 first-pass + SA Sign Language = 12</a:t>
+            </a:r>
+          </a:p>
+          <a:p>
+            <a:pPr algn="l">
+              <a:spcBef>
+                <a:spcPts val="800"/>
+              </a:spcBef>
+            </a:pPr>
+            <a:r>
+              <a:rPr sz="1200">
+                <a:solidFill>
+                  <a:srgbClr val="E9EDEF"/>
+                </a:solidFill>
+                <a:latin typeface="Calibri"/>
+              </a:rPr>
+              <a:t>• Identical brain on both channels</a:t>
+            </a:r>
+          </a:p>
+          <a:p>
+            <a:pPr algn="l">
+              <a:spcBef>
+                <a:spcPts val="800"/>
+              </a:spcBef>
+            </a:pPr>
+            <a:r>
+              <a:rPr sz="1200">
+                <a:solidFill>
+                  <a:srgbClr val="E9EDEF"/>
+                </a:solidFill>
+                <a:latin typeface="Calibri"/>
+              </a:rPr>
+              <a:t>• No premium tier — design constraint</a:t>
+            </a:r>
+          </a:p>
+        </p:txBody>
+      </p:sp>
+      <p:sp>
+        <p:nvSpPr>
+          <p:cNvPr id="7" name="Rounded Rectangle 6"/>
+          <p:cNvSpPr/>
+          <p:nvPr/>
+        </p:nvSpPr>
+        <p:spPr>
+          <a:xfrm>
+            <a:off x="4389120" y="2468880"/>
+            <a:ext cx="1463040" cy="411480"/>
+          </a:xfrm>
+          <a:prstGeom prst="roundRect">
+            <a:avLst/>
+          </a:prstGeom>
+          <a:solidFill>
+            <a:srgbClr val="FFB347"/>
+          </a:solidFill>
+          <a:ln>
+            <a:noFill/>
+          </a:ln>
+        </p:spPr>
+        <p:style>
+          <a:lnRef idx="1">
+            <a:schemeClr val="accent1"/>
+          </a:lnRef>
+          <a:fillRef idx="3">
+            <a:schemeClr val="accent1"/>
+          </a:fillRef>
+          <a:effectRef idx="2">
+            <a:schemeClr val="accent1"/>
+          </a:effectRef>
+          <a:fontRef idx="minor">
+            <a:schemeClr val="lt1"/>
+          </a:fontRef>
+        </p:style>
+        <p:txBody>
+          <a:bodyPr rtlCol="0" anchor="ctr" lIns="137160" rIns="137160"/>
+          <a:lstStyle/>
+          <a:p>
+            <a:pPr algn="ctr"/>
+            <a:r>
+              <a:rPr sz="1400" b="1">
+                <a:solidFill>
+                  <a:srgbClr val="03110D"/>
+                </a:solidFill>
+              </a:rPr>
+              <a:t>Safety</a:t>
+            </a:r>
+          </a:p>
+        </p:txBody>
+      </p:sp>
+      <p:sp>
+        <p:nvSpPr>
+          <p:cNvPr id="8" name="TextBox 7"/>
+          <p:cNvSpPr txBox="1"/>
+          <p:nvPr/>
+        </p:nvSpPr>
+        <p:spPr>
+          <a:xfrm>
+            <a:off x="4389120" y="3017520"/>
+            <a:ext cx="3657600" cy="3383280"/>
+          </a:xfrm>
+          <a:prstGeom prst="rect">
+            <a:avLst/>
+          </a:prstGeom>
+          <a:noFill/>
+        </p:spPr>
+        <p:txBody>
+          <a:bodyPr wrap="square">
+            <a:spAutoFit/>
+          </a:bodyPr>
+          <a:lstStyle/>
+          <a:p>
+            <a:pPr algn="l">
+              <a:spcBef>
+                <a:spcPts val="800"/>
+              </a:spcBef>
+            </a:pPr>
+            <a:r>
+              <a:rPr sz="1200">
+                <a:solidFill>
+                  <a:srgbClr val="E9EDEF"/>
+                </a:solidFill>
+                <a:latin typeface="Calibri"/>
+              </a:rPr>
+              <a:t>• CAPS-bounded — no off-topic chat</a:t>
+            </a:r>
+          </a:p>
+          <a:p>
+            <a:pPr algn="l">
+              <a:spcBef>
+                <a:spcPts val="800"/>
+              </a:spcBef>
+            </a:pPr>
+            <a:r>
+              <a:rPr sz="1200">
+                <a:solidFill>
+                  <a:srgbClr val="E9EDEF"/>
+                </a:solidFill>
+                <a:latin typeface="Calibri"/>
+              </a:rPr>
+              <a:t>• Verified maths in code, not LLM</a:t>
+            </a:r>
+          </a:p>
+          <a:p>
+            <a:pPr algn="l">
+              <a:spcBef>
+                <a:spcPts val="800"/>
+              </a:spcBef>
+            </a:pPr>
+            <a:r>
+              <a:rPr sz="1200">
+                <a:solidFill>
+                  <a:srgbClr val="E9EDEF"/>
+                </a:solidFill>
+                <a:latin typeface="Calibri"/>
+              </a:rPr>
+              <a:t>• POPIA-aligned, SA-hosted</a:t>
+            </a:r>
+          </a:p>
+          <a:p>
+            <a:pPr algn="l">
+              <a:spcBef>
+                <a:spcPts val="800"/>
+              </a:spcBef>
+            </a:pPr>
+            <a:r>
+              <a:rPr sz="1200">
+                <a:solidFill>
+                  <a:srgbClr val="E9EDEF"/>
+                </a:solidFill>
+                <a:latin typeface="Calibri"/>
+              </a:rPr>
+              <a:t>• No PII beyond phone number</a:t>
+            </a:r>
+          </a:p>
+          <a:p>
+            <a:pPr algn="l">
+              <a:spcBef>
+                <a:spcPts val="800"/>
+              </a:spcBef>
+            </a:pPr>
+            <a:r>
+              <a:rPr sz="1200">
+                <a:solidFill>
+                  <a:srgbClr val="E9EDEF"/>
+                </a:solidFill>
+                <a:latin typeface="Calibri"/>
+              </a:rPr>
+              <a:t>• Reporting → real educator escalation</a:t>
+            </a:r>
+          </a:p>
+        </p:txBody>
+      </p:sp>
+      <p:sp>
+        <p:nvSpPr>
+          <p:cNvPr id="9" name="Rounded Rectangle 8"/>
+          <p:cNvSpPr/>
+          <p:nvPr/>
+        </p:nvSpPr>
+        <p:spPr>
+          <a:xfrm>
+            <a:off x="8229600" y="2468880"/>
+            <a:ext cx="1463040" cy="411480"/>
+          </a:xfrm>
+          <a:prstGeom prst="roundRect">
+            <a:avLst/>
+          </a:prstGeom>
+          <a:solidFill>
+            <a:srgbClr val="9CFF8C"/>
+          </a:solidFill>
+          <a:ln>
+            <a:noFill/>
+          </a:ln>
+        </p:spPr>
+        <p:style>
+          <a:lnRef idx="1">
+            <a:schemeClr val="accent1"/>
+          </a:lnRef>
+          <a:fillRef idx="3">
+            <a:schemeClr val="accent1"/>
+          </a:fillRef>
+          <a:effectRef idx="2">
+            <a:schemeClr val="accent1"/>
+          </a:effectRef>
+          <a:fontRef idx="minor">
+            <a:schemeClr val="lt1"/>
+          </a:fontRef>
+        </p:style>
+        <p:txBody>
+          <a:bodyPr rtlCol="0" anchor="ctr" lIns="137160" rIns="137160"/>
+          <a:lstStyle/>
+          <a:p>
+            <a:pPr algn="ctr"/>
+            <a:r>
+              <a:rPr sz="1400" b="1">
+                <a:solidFill>
+                  <a:srgbClr val="03110D"/>
+                </a:solidFill>
+              </a:rPr>
+              <a:t>Trust</a:t>
+            </a:r>
+          </a:p>
+        </p:txBody>
+      </p:sp>
+      <p:sp>
+        <p:nvSpPr>
+          <p:cNvPr id="10" name="TextBox 9"/>
+          <p:cNvSpPr txBox="1"/>
+          <p:nvPr/>
+        </p:nvSpPr>
+        <p:spPr>
+          <a:xfrm>
+            <a:off x="8229600" y="3017520"/>
+            <a:ext cx="3657600" cy="3383280"/>
+          </a:xfrm>
+          <a:prstGeom prst="rect">
+            <a:avLst/>
+          </a:prstGeom>
+          <a:noFill/>
+        </p:spPr>
+        <p:txBody>
+          <a:bodyPr wrap="square">
+            <a:spAutoFit/>
+          </a:bodyPr>
+          <a:lstStyle/>
+          <a:p>
+            <a:pPr algn="l">
+              <a:spcBef>
+                <a:spcPts val="800"/>
+              </a:spcBef>
+            </a:pPr>
+            <a:r>
+              <a:rPr sz="1200">
+                <a:solidFill>
+                  <a:srgbClr val="E9EDEF"/>
+                </a:solidFill>
+                <a:latin typeface="Calibri"/>
+              </a:rPr>
+              <a:t>• Sources cited on every screen</a:t>
+            </a:r>
+          </a:p>
+          <a:p>
+            <a:pPr algn="l">
+              <a:spcBef>
+                <a:spcPts val="800"/>
+              </a:spcBef>
+            </a:pPr>
+            <a:r>
+              <a:rPr sz="1200">
+                <a:solidFill>
+                  <a:srgbClr val="E9EDEF"/>
+                </a:solidFill>
+                <a:latin typeface="Calibri"/>
+              </a:rPr>
+              <a:t>• CAPS topic + sub-skill labelled</a:t>
+            </a:r>
+          </a:p>
+          <a:p>
+            <a:pPr algn="l">
+              <a:spcBef>
+                <a:spcPts val="800"/>
+              </a:spcBef>
+            </a:pPr>
+            <a:r>
+              <a:rPr sz="1200">
+                <a:solidFill>
+                  <a:srgbClr val="E9EDEF"/>
+                </a:solidFill>
+                <a:latin typeface="Calibri"/>
+              </a:rPr>
+              <a:t>• Educator-editable curriculum file</a:t>
+            </a:r>
+          </a:p>
+          <a:p>
+            <a:pPr algn="l">
+              <a:spcBef>
+                <a:spcPts val="800"/>
+              </a:spcBef>
+            </a:pPr>
+            <a:r>
+              <a:rPr sz="1200">
+                <a:solidFill>
+                  <a:srgbClr val="E9EDEF"/>
+                </a:solidFill>
+                <a:latin typeface="Calibri"/>
+              </a:rPr>
+              <a:t>• Refuses to give final answers</a:t>
+            </a:r>
+          </a:p>
+          <a:p>
+            <a:pPr algn="l">
+              <a:spcBef>
+                <a:spcPts val="800"/>
+              </a:spcBef>
+            </a:pPr>
+            <a:r>
+              <a:rPr sz="1200">
+                <a:solidFill>
+                  <a:srgbClr val="E9EDEF"/>
+                </a:solidFill>
+                <a:latin typeface="Calibri"/>
+              </a:rPr>
+              <a:t>• Quarterly public impact reports</a:t>
+            </a:r>
+          </a:p>
+        </p:txBody>
+      </p:sp>
+      <p:sp>
+        <p:nvSpPr>
+          <p:cNvPr id="11" name="TextBox 10"/>
+          <p:cNvSpPr txBox="1"/>
+          <p:nvPr/>
+        </p:nvSpPr>
+        <p:spPr>
+          <a:xfrm>
+            <a:off x="548640" y="6126480"/>
+            <a:ext cx="11064240" cy="457200"/>
+          </a:xfrm>
+          <a:prstGeom prst="rect">
+            <a:avLst/>
+          </a:prstGeom>
+          <a:noFill/>
+        </p:spPr>
+        <p:txBody>
+          <a:bodyPr wrap="square">
+            <a:spAutoFit/>
+          </a:bodyPr>
+          <a:lstStyle/>
+          <a:p>
+            <a:pPr algn="ctr"/>
+            <a:r>
+              <a:rPr sz="1400" b="1">
+                <a:solidFill>
+                  <a:srgbClr val="FFE9B8"/>
+                </a:solidFill>
+                <a:latin typeface="Calibri"/>
+              </a:rPr>
+              <a:t>Refusing a premium tier is a design constraint, not an oversight.</a:t>
+            </a:r>
+          </a:p>
+        </p:txBody>
+      </p:sp>
+    </p:spTree>
+  </p:cSld>
+  <p:clrMapOvr>
+    <a:masterClrMapping/>
+  </p:clrMapOvr>
+</p:sld>
+</file>
+
+<file path=ppt/slides/slide11.xml><?xml version="1.0" encoding="utf-8"?>
+<p:sld xmlns:a="http://schemas.openxmlformats.org/drawingml/2006/main" xmlns:p="http://schemas.openxmlformats.org/presentationml/2006/main" xmlns:r="http://schemas.openxmlformats.org/officeDocument/2006/relationships">
+  <p:cSld>
+    <p:bg>
+      <p:bgPr>
+        <a:solidFill>
+          <a:srgbClr val="0B141A"/>
+        </a:solidFill>
+        <a:effectLst/>
+      </p:bgPr>
+    </p:bg>
+    <p:spTree>
+      <p:nvGrpSpPr>
+        <p:cNvPr id="1" name=""/>
+        <p:cNvGrpSpPr/>
+        <p:nvPr/>
+      </p:nvGrpSpPr>
+      <p:grpSpPr/>
+      <p:sp>
+        <p:nvSpPr>
+          <p:cNvPr id="2" name="TextBox 1"/>
+          <p:cNvSpPr txBox="1"/>
+          <p:nvPr/>
+        </p:nvSpPr>
+        <p:spPr>
+          <a:xfrm>
+            <a:off x="548640" y="457200"/>
+            <a:ext cx="11064240" cy="548640"/>
+          </a:xfrm>
+          <a:prstGeom prst="rect">
+            <a:avLst/>
+          </a:prstGeom>
+          <a:noFill/>
+        </p:spPr>
+        <p:txBody>
+          <a:bodyPr wrap="square">
+            <a:spAutoFit/>
+          </a:bodyPr>
+          <a:lstStyle/>
+          <a:p>
+            <a:pPr algn="l"/>
+            <a:r>
+              <a:rPr sz="1400" b="1">
+                <a:solidFill>
+                  <a:srgbClr val="00A884"/>
+                </a:solidFill>
+                <a:latin typeface="Calibri"/>
+              </a:rPr>
+              <a:t>Roadmap</a:t>
+            </a:r>
+          </a:p>
+        </p:txBody>
+      </p:sp>
+      <p:sp>
+        <p:nvSpPr>
+          <p:cNvPr id="3" name="TextBox 2"/>
+          <p:cNvSpPr txBox="1"/>
+          <p:nvPr/>
+        </p:nvSpPr>
+        <p:spPr>
+          <a:xfrm>
+            <a:off x="548640" y="914400"/>
+            <a:ext cx="11064240" cy="914400"/>
+          </a:xfrm>
+          <a:prstGeom prst="rect">
+            <a:avLst/>
+          </a:prstGeom>
+          <a:noFill/>
+        </p:spPr>
+        <p:txBody>
+          <a:bodyPr wrap="square">
+            <a:spAutoFit/>
+          </a:bodyPr>
+          <a:lstStyle/>
+          <a:p>
+            <a:pPr algn="l"/>
+            <a:r>
+              <a:rPr sz="3000" b="1">
+                <a:solidFill>
+                  <a:srgbClr val="FFFFFF"/>
+                </a:solidFill>
+                <a:latin typeface="Calibri"/>
+              </a:rPr>
+              <a:t>From hackathon prototype to national pilot.</a:t>
+            </a:r>
+          </a:p>
+        </p:txBody>
+      </p:sp>
+      <p:sp>
+        <p:nvSpPr>
+          <p:cNvPr id="4" name="Rectangle 3"/>
+          <p:cNvSpPr/>
+          <p:nvPr/>
+        </p:nvSpPr>
+        <p:spPr>
+          <a:xfrm>
+            <a:off x="548640" y="2011680"/>
+            <a:ext cx="3657600" cy="50800"/>
+          </a:xfrm>
+          <a:prstGeom prst="rect">
+            <a:avLst/>
+          </a:prstGeom>
+          <a:solidFill>
+            <a:srgbClr val="00A884"/>
+          </a:solidFill>
+          <a:ln>
+            <a:noFill/>
+          </a:ln>
+        </p:spPr>
+        <p:style>
+          <a:lnRef idx="1">
+            <a:schemeClr val="accent1"/>
+          </a:lnRef>
+          <a:fillRef idx="3">
+            <a:schemeClr val="accent1"/>
+          </a:fillRef>
+          <a:effectRef idx="2">
+            <a:schemeClr val="accent1"/>
+          </a:effectRef>
+          <a:fontRef idx="minor">
+            <a:schemeClr val="lt1"/>
+          </a:fontRef>
+        </p:style>
+        <p:txBody>
+          <a:bodyPr rtlCol="0" anchor="ctr"/>
+          <a:lstStyle/>
+          <a:p>
+            <a:pPr algn="ctr"/>
+          </a:p>
+        </p:txBody>
+      </p:sp>
+      <p:sp>
+        <p:nvSpPr>
+          <p:cNvPr id="5" name="Rounded Rectangle 4"/>
+          <p:cNvSpPr/>
+          <p:nvPr/>
+        </p:nvSpPr>
+        <p:spPr>
+          <a:xfrm>
+            <a:off x="548640" y="2468880"/>
+            <a:ext cx="1371600" cy="411480"/>
+          </a:xfrm>
+          <a:prstGeom prst="roundRect">
+            <a:avLst/>
+          </a:prstGeom>
+          <a:solidFill>
+            <a:srgbClr val="FFB347"/>
+          </a:solidFill>
+          <a:ln>
+            <a:noFill/>
+          </a:ln>
+        </p:spPr>
+        <p:style>
+          <a:lnRef idx="1">
+            <a:schemeClr val="accent1"/>
+          </a:lnRef>
+          <a:fillRef idx="3">
+            <a:schemeClr val="accent1"/>
+          </a:fillRef>
+          <a:effectRef idx="2">
+            <a:schemeClr val="accent1"/>
+          </a:effectRef>
+          <a:fontRef idx="minor">
+            <a:schemeClr val="lt1"/>
+          </a:fontRef>
+        </p:style>
+        <p:txBody>
+          <a:bodyPr rtlCol="0" anchor="ctr" lIns="137160" rIns="137160"/>
+          <a:lstStyle/>
+          <a:p>
+            <a:pPr algn="ctr"/>
+            <a:r>
+              <a:rPr sz="1200" b="1">
+                <a:solidFill>
+                  <a:srgbClr val="03110D"/>
+                </a:solidFill>
+              </a:rPr>
+              <a:t>Now</a:t>
+            </a:r>
+          </a:p>
+        </p:txBody>
+      </p:sp>
+      <p:sp>
+        <p:nvSpPr>
+          <p:cNvPr id="6" name="TextBox 5"/>
+          <p:cNvSpPr txBox="1"/>
+          <p:nvPr/>
+        </p:nvSpPr>
+        <p:spPr>
+          <a:xfrm>
+            <a:off x="2011680" y="2468880"/>
+            <a:ext cx="2286000" cy="411480"/>
+          </a:xfrm>
+          <a:prstGeom prst="rect">
+            <a:avLst/>
+          </a:prstGeom>
+          <a:noFill/>
+        </p:spPr>
+        <p:txBody>
+          <a:bodyPr wrap="square">
+            <a:spAutoFit/>
+          </a:bodyPr>
+          <a:lstStyle/>
+          <a:p>
+            <a:pPr algn="l"/>
+            <a:r>
+              <a:rPr sz="1600" b="1">
+                <a:solidFill>
+                  <a:srgbClr val="FFFFFF"/>
+                </a:solidFill>
+                <a:latin typeface="Calibri"/>
+              </a:rPr>
+              <a:t>Hackathon</a:t>
+            </a:r>
+          </a:p>
+        </p:txBody>
+      </p:sp>
+      <p:sp>
+        <p:nvSpPr>
+          <p:cNvPr id="7" name="TextBox 6"/>
+          <p:cNvSpPr txBox="1"/>
+          <p:nvPr/>
+        </p:nvSpPr>
+        <p:spPr>
+          <a:xfrm>
+            <a:off x="548640" y="3108960"/>
+            <a:ext cx="3657600" cy="3200400"/>
+          </a:xfrm>
+          <a:prstGeom prst="rect">
+            <a:avLst/>
+          </a:prstGeom>
+          <a:noFill/>
+        </p:spPr>
+        <p:txBody>
+          <a:bodyPr wrap="square">
+            <a:spAutoFit/>
+          </a:bodyPr>
+          <a:lstStyle/>
+          <a:p>
+            <a:pPr algn="l">
+              <a:spcBef>
+                <a:spcPts val="800"/>
+              </a:spcBef>
+            </a:pPr>
+            <a:r>
+              <a:rPr sz="1200">
+                <a:solidFill>
+                  <a:srgbClr val="E9EDEF"/>
+                </a:solidFill>
+                <a:latin typeface="Calibri"/>
+              </a:rPr>
+              <a:t>• Both channels working end-to-end</a:t>
+            </a:r>
+          </a:p>
+          <a:p>
+            <a:pPr algn="l">
+              <a:spcBef>
+                <a:spcPts val="800"/>
+              </a:spcBef>
+            </a:pPr>
+            <a:r>
+              <a:rPr sz="1200">
+                <a:solidFill>
+                  <a:srgbClr val="E9EDEF"/>
+                </a:solidFill>
+                <a:latin typeface="Calibri"/>
+              </a:rPr>
+              <a:t>• Real NSC questions, cited sources</a:t>
+            </a:r>
+          </a:p>
+          <a:p>
+            <a:pPr algn="l">
+              <a:spcBef>
+                <a:spcPts val="800"/>
+              </a:spcBef>
+            </a:pPr>
+            <a:r>
+              <a:rPr sz="1200">
+                <a:solidFill>
+                  <a:srgbClr val="E9EDEF"/>
+                </a:solidFill>
+                <a:latin typeface="Calibri"/>
+              </a:rPr>
+              <a:t>• CAPS mappings against ATPs</a:t>
+            </a:r>
+          </a:p>
+          <a:p>
+            <a:pPr algn="l">
+              <a:spcBef>
+                <a:spcPts val="800"/>
+              </a:spcBef>
+            </a:pPr>
+            <a:r>
+              <a:rPr sz="1200">
+                <a:solidFill>
+                  <a:srgbClr val="E9EDEF"/>
+                </a:solidFill>
+                <a:latin typeface="Calibri"/>
+              </a:rPr>
+              <a:t>• Mock providers (offline demo)</a:t>
+            </a:r>
+          </a:p>
+        </p:txBody>
+      </p:sp>
+      <p:sp>
+        <p:nvSpPr>
+          <p:cNvPr id="8" name="Rounded Rectangle 7"/>
+          <p:cNvSpPr/>
+          <p:nvPr/>
+        </p:nvSpPr>
+        <p:spPr>
+          <a:xfrm>
+            <a:off x="4389120" y="2468880"/>
+            <a:ext cx="1371600" cy="411480"/>
+          </a:xfrm>
+          <a:prstGeom prst="roundRect">
+            <a:avLst/>
+          </a:prstGeom>
+          <a:solidFill>
+            <a:srgbClr val="FFB347"/>
+          </a:solidFill>
+          <a:ln>
+            <a:noFill/>
+          </a:ln>
+        </p:spPr>
+        <p:style>
+          <a:lnRef idx="1">
+            <a:schemeClr val="accent1"/>
+          </a:lnRef>
+          <a:fillRef idx="3">
+            <a:schemeClr val="accent1"/>
+          </a:fillRef>
+          <a:effectRef idx="2">
+            <a:schemeClr val="accent1"/>
+          </a:effectRef>
+          <a:fontRef idx="minor">
+            <a:schemeClr val="lt1"/>
+          </a:fontRef>
+        </p:style>
+        <p:txBody>
+          <a:bodyPr rtlCol="0" anchor="ctr" lIns="137160" rIns="137160"/>
+          <a:lstStyle/>
+          <a:p>
+            <a:pPr algn="ctr"/>
+            <a:r>
+              <a:rPr sz="1200" b="1">
+                <a:solidFill>
+                  <a:srgbClr val="03110D"/>
+                </a:solidFill>
+              </a:rPr>
+              <a:t>Q3 2026</a:t>
+            </a:r>
+          </a:p>
+        </p:txBody>
+      </p:sp>
+      <p:sp>
+        <p:nvSpPr>
+          <p:cNvPr id="9" name="TextBox 8"/>
+          <p:cNvSpPr txBox="1"/>
+          <p:nvPr/>
+        </p:nvSpPr>
+        <p:spPr>
+          <a:xfrm>
+            <a:off x="5852160" y="2468880"/>
+            <a:ext cx="2286000" cy="411480"/>
+          </a:xfrm>
+          <a:prstGeom prst="rect">
+            <a:avLst/>
+          </a:prstGeom>
+          <a:noFill/>
+        </p:spPr>
+        <p:txBody>
+          <a:bodyPr wrap="square">
+            <a:spAutoFit/>
+          </a:bodyPr>
+          <a:lstStyle/>
+          <a:p>
+            <a:pPr algn="l"/>
+            <a:r>
+              <a:rPr sz="1600" b="1">
+                <a:solidFill>
+                  <a:srgbClr val="FFFFFF"/>
+                </a:solidFill>
+                <a:latin typeface="Calibri"/>
+              </a:rPr>
+              <a:t>Pilot</a:t>
+            </a:r>
+          </a:p>
+        </p:txBody>
+      </p:sp>
+      <p:sp>
+        <p:nvSpPr>
+          <p:cNvPr id="10" name="TextBox 9"/>
+          <p:cNvSpPr txBox="1"/>
+          <p:nvPr/>
+        </p:nvSpPr>
+        <p:spPr>
+          <a:xfrm>
+            <a:off x="4389120" y="3108960"/>
+            <a:ext cx="3657600" cy="3200400"/>
+          </a:xfrm>
+          <a:prstGeom prst="rect">
+            <a:avLst/>
+          </a:prstGeom>
+          <a:noFill/>
+        </p:spPr>
+        <p:txBody>
+          <a:bodyPr wrap="square">
+            <a:spAutoFit/>
+          </a:bodyPr>
+          <a:lstStyle/>
+          <a:p>
+            <a:pPr algn="l">
+              <a:spcBef>
+                <a:spcPts val="800"/>
+              </a:spcBef>
+            </a:pPr>
+            <a:r>
+              <a:rPr sz="1200">
+                <a:solidFill>
+                  <a:srgbClr val="E9EDEF"/>
+                </a:solidFill>
+                <a:latin typeface="Calibri"/>
+              </a:rPr>
+              <a:t>• Dell AI Factory LLM + VLM live</a:t>
+            </a:r>
+          </a:p>
+          <a:p>
+            <a:pPr algn="l">
+              <a:spcBef>
+                <a:spcPts val="800"/>
+              </a:spcBef>
+            </a:pPr>
+            <a:r>
+              <a:rPr sz="1200">
+                <a:solidFill>
+                  <a:srgbClr val="E9EDEF"/>
+                </a:solidFill>
+                <a:latin typeface="Calibri"/>
+              </a:rPr>
+              <a:t>• Vodacom WhatsApp + USSD partnership</a:t>
+            </a:r>
+          </a:p>
+          <a:p>
+            <a:pPr algn="l">
+              <a:spcBef>
+                <a:spcPts val="800"/>
+              </a:spcBef>
+            </a:pPr>
+            <a:r>
+              <a:rPr sz="1200">
+                <a:solidFill>
+                  <a:srgbClr val="E9EDEF"/>
+                </a:solidFill>
+                <a:latin typeface="Calibri"/>
+              </a:rPr>
+              <a:t>• 5 schools across 2 provinces</a:t>
+            </a:r>
+          </a:p>
+          <a:p>
+            <a:pPr algn="l">
+              <a:spcBef>
+                <a:spcPts val="800"/>
+              </a:spcBef>
+            </a:pPr>
+            <a:r>
+              <a:rPr sz="1200">
+                <a:solidFill>
+                  <a:srgbClr val="E9EDEF"/>
+                </a:solidFill>
+                <a:latin typeface="Calibri"/>
+              </a:rPr>
+              <a:t>• Educator advisory board (4-6 teachers)</a:t>
+            </a:r>
+          </a:p>
+        </p:txBody>
+      </p:sp>
+      <p:sp>
+        <p:nvSpPr>
+          <p:cNvPr id="11" name="Rounded Rectangle 10"/>
+          <p:cNvSpPr/>
+          <p:nvPr/>
+        </p:nvSpPr>
+        <p:spPr>
+          <a:xfrm>
+            <a:off x="8229600" y="2468880"/>
+            <a:ext cx="1371600" cy="411480"/>
+          </a:xfrm>
+          <a:prstGeom prst="roundRect">
+            <a:avLst/>
+          </a:prstGeom>
+          <a:solidFill>
+            <a:srgbClr val="FFB347"/>
+          </a:solidFill>
+          <a:ln>
+            <a:noFill/>
+          </a:ln>
+        </p:spPr>
+        <p:style>
+          <a:lnRef idx="1">
+            <a:schemeClr val="accent1"/>
+          </a:lnRef>
+          <a:fillRef idx="3">
+            <a:schemeClr val="accent1"/>
+          </a:fillRef>
+          <a:effectRef idx="2">
+            <a:schemeClr val="accent1"/>
+          </a:effectRef>
+          <a:fontRef idx="minor">
+            <a:schemeClr val="lt1"/>
+          </a:fontRef>
+        </p:style>
+        <p:txBody>
+          <a:bodyPr rtlCol="0" anchor="ctr" lIns="137160" rIns="137160"/>
+          <a:lstStyle/>
+          <a:p>
+            <a:pPr algn="ctr"/>
+            <a:r>
+              <a:rPr sz="1200" b="1">
+                <a:solidFill>
+                  <a:srgbClr val="03110D"/>
+                </a:solidFill>
+              </a:rPr>
+              <a:t>2027</a:t>
+            </a:r>
+          </a:p>
+        </p:txBody>
+      </p:sp>
+      <p:sp>
+        <p:nvSpPr>
+          <p:cNvPr id="12" name="TextBox 11"/>
+          <p:cNvSpPr txBox="1"/>
+          <p:nvPr/>
+        </p:nvSpPr>
+        <p:spPr>
+          <a:xfrm>
+            <a:off x="9692640" y="2468880"/>
+            <a:ext cx="2286000" cy="411480"/>
+          </a:xfrm>
+          <a:prstGeom prst="rect">
+            <a:avLst/>
+          </a:prstGeom>
+          <a:noFill/>
+        </p:spPr>
+        <p:txBody>
+          <a:bodyPr wrap="square">
+            <a:spAutoFit/>
+          </a:bodyPr>
+          <a:lstStyle/>
+          <a:p>
+            <a:pPr algn="l"/>
+            <a:r>
+              <a:rPr sz="1600" b="1">
+                <a:solidFill>
+                  <a:srgbClr val="FFFFFF"/>
+                </a:solidFill>
+                <a:latin typeface="Calibri"/>
+              </a:rPr>
+              <a:t>Scale</a:t>
+            </a:r>
+          </a:p>
+        </p:txBody>
+      </p:sp>
+      <p:sp>
+        <p:nvSpPr>
+          <p:cNvPr id="13" name="TextBox 12"/>
+          <p:cNvSpPr txBox="1"/>
+          <p:nvPr/>
+        </p:nvSpPr>
+        <p:spPr>
+          <a:xfrm>
+            <a:off x="8229600" y="3108960"/>
+            <a:ext cx="3657600" cy="3200400"/>
+          </a:xfrm>
+          <a:prstGeom prst="rect">
+            <a:avLst/>
+          </a:prstGeom>
+          <a:noFill/>
+        </p:spPr>
+        <p:txBody>
+          <a:bodyPr wrap="square">
+            <a:spAutoFit/>
+          </a:bodyPr>
+          <a:lstStyle/>
+          <a:p>
+            <a:pPr algn="l">
+              <a:spcBef>
+                <a:spcPts val="800"/>
+              </a:spcBef>
+            </a:pPr>
+            <a:r>
+              <a:rPr sz="1200">
+                <a:solidFill>
+                  <a:srgbClr val="E9EDEF"/>
+                </a:solidFill>
+                <a:latin typeface="Calibri"/>
+              </a:rPr>
+              <a:t>• All 11 official spoken languages educator-validated + SA Sign Language</a:t>
+            </a:r>
+          </a:p>
+          <a:p>
+            <a:pPr algn="l">
+              <a:spcBef>
+                <a:spcPts val="800"/>
+              </a:spcBef>
+            </a:pPr>
+            <a:r>
+              <a:rPr sz="1200">
+                <a:solidFill>
+                  <a:srgbClr val="E9EDEF"/>
+                </a:solidFill>
+                <a:latin typeface="Calibri"/>
+              </a:rPr>
+              <a:t>• Maths Lit, Sciences, Accounting</a:t>
+            </a:r>
+          </a:p>
+          <a:p>
+            <a:pPr algn="l">
+              <a:spcBef>
+                <a:spcPts val="800"/>
+              </a:spcBef>
+            </a:pPr>
+            <a:r>
+              <a:rPr sz="1200">
+                <a:solidFill>
+                  <a:srgbClr val="E9EDEF"/>
+                </a:solidFill>
+                <a:latin typeface="Calibri"/>
+              </a:rPr>
+              <a:t>• Class-level analytics for teachers</a:t>
+            </a:r>
+          </a:p>
+          <a:p>
+            <a:pPr algn="l">
+              <a:spcBef>
+                <a:spcPts val="800"/>
+              </a:spcBef>
+            </a:pPr>
+            <a:r>
+              <a:rPr sz="1200">
+                <a:solidFill>
+                  <a:srgbClr val="E9EDEF"/>
+                </a:solidFill>
+                <a:latin typeface="Calibri"/>
+              </a:rPr>
+              <a:t>• DBE adoption discussions</a:t>
+            </a:r>
+          </a:p>
+        </p:txBody>
+      </p:sp>
+    </p:spTree>
+  </p:cSld>
+  <p:clrMapOvr>
+    <a:masterClrMapping/>
+  </p:clrMapOvr>
+</p:sld>
+</file>
+
+<file path=ppt/slides/slide12.xml><?xml version="1.0" encoding="utf-8"?>
+<p:sld xmlns:a="http://schemas.openxmlformats.org/drawingml/2006/main" xmlns:p="http://schemas.openxmlformats.org/presentationml/2006/main" xmlns:r="http://schemas.openxmlformats.org/officeDocument/2006/relationships">
+  <p:cSld>
+    <p:bg>
+      <p:bgPr>
+        <a:solidFill>
+          <a:srgbClr val="0B141A"/>
+        </a:solidFill>
+        <a:effectLst/>
+      </p:bgPr>
+    </p:bg>
+    <p:spTree>
+      <p:nvGrpSpPr>
+        <p:cNvPr id="1" name=""/>
+        <p:cNvGrpSpPr/>
+        <p:nvPr/>
+      </p:nvGrpSpPr>
+      <p:grpSpPr/>
+      <p:sp>
+        <p:nvSpPr>
+          <p:cNvPr id="2" name="TextBox 1"/>
+          <p:cNvSpPr txBox="1"/>
+          <p:nvPr/>
+        </p:nvSpPr>
+        <p:spPr>
+          <a:xfrm>
+            <a:off x="548640" y="457200"/>
+            <a:ext cx="11064240" cy="548640"/>
+          </a:xfrm>
+          <a:prstGeom prst="rect">
+            <a:avLst/>
+          </a:prstGeom>
+          <a:noFill/>
+        </p:spPr>
+        <p:txBody>
+          <a:bodyPr wrap="square">
+            <a:spAutoFit/>
+          </a:bodyPr>
+          <a:lstStyle/>
+          <a:p>
+            <a:pPr algn="l"/>
+            <a:r>
+              <a:rPr sz="1400" b="1">
+                <a:solidFill>
                   <a:srgbClr val="FFB347"/>
                 </a:solidFill>
                 <a:latin typeface="Calibri"/>
@@ -4935,125 +6904,20 @@
       <p:grpSpPr/>
       <p:sp>
         <p:nvSpPr>
-          <p:cNvPr id="2" name="TextBox 1"/>
-          <p:cNvSpPr txBox="1"/>
-          <p:nvPr/>
-        </p:nvSpPr>
-        <p:spPr>
-          <a:xfrm>
-            <a:off x="548640" y="457200"/>
-            <a:ext cx="11064240" cy="548640"/>
-          </a:xfrm>
-          <a:prstGeom prst="rect">
-            <a:avLst/>
-          </a:prstGeom>
-          <a:noFill/>
-        </p:spPr>
-        <p:txBody>
-          <a:bodyPr wrap="square">
-            <a:spAutoFit/>
-          </a:bodyPr>
-          <a:lstStyle/>
-          <a:p>
-            <a:pPr algn="l"/>
-            <a:r>
-              <a:rPr sz="1400" b="1">
-                <a:solidFill>
-                  <a:srgbClr val="FFB347"/>
-                </a:solidFill>
-                <a:latin typeface="Calibri"/>
-              </a:rPr>
-              <a:t>The problem</a:t>
-            </a:r>
-          </a:p>
-        </p:txBody>
-      </p:sp>
-      <p:sp>
-        <p:nvSpPr>
-          <p:cNvPr id="3" name="TextBox 2"/>
-          <p:cNvSpPr txBox="1"/>
-          <p:nvPr/>
-        </p:nvSpPr>
-        <p:spPr>
-          <a:xfrm>
-            <a:off x="548640" y="914400"/>
-            <a:ext cx="11064240" cy="914400"/>
-          </a:xfrm>
-          <a:prstGeom prst="rect">
-            <a:avLst/>
-          </a:prstGeom>
-          <a:noFill/>
-        </p:spPr>
-        <p:txBody>
-          <a:bodyPr wrap="square">
-            <a:spAutoFit/>
-          </a:bodyPr>
-          <a:lstStyle/>
-          <a:p>
-            <a:pPr algn="l"/>
-            <a:r>
-              <a:rPr sz="4400" b="1">
-                <a:solidFill>
-                  <a:srgbClr val="FFFFFF"/>
-                </a:solidFill>
-                <a:latin typeface="Calibri"/>
-              </a:rPr>
-              <a:t>Most learners get stuck on the same step.</a:t>
-            </a:r>
-          </a:p>
-        </p:txBody>
-      </p:sp>
-      <p:sp>
-        <p:nvSpPr>
-          <p:cNvPr id="4" name="TextBox 3"/>
-          <p:cNvSpPr txBox="1"/>
-          <p:nvPr/>
-        </p:nvSpPr>
-        <p:spPr>
-          <a:xfrm>
-            <a:off x="548640" y="2103120"/>
-            <a:ext cx="11064240" cy="914400"/>
-          </a:xfrm>
-          <a:prstGeom prst="rect">
-            <a:avLst/>
-          </a:prstGeom>
-          <a:noFill/>
-        </p:spPr>
-        <p:txBody>
-          <a:bodyPr wrap="square">
-            <a:spAutoFit/>
-          </a:bodyPr>
-          <a:lstStyle/>
-          <a:p>
-            <a:pPr algn="l"/>
-            <a:r>
-              <a:rPr sz="2200" b="0">
-                <a:solidFill>
-                  <a:srgbClr val="E9EDEF"/>
-                </a:solidFill>
-                <a:latin typeface="Calibri"/>
-              </a:rPr>
-              <a:t>Tutors can't sit with each one. Most can't afford one at all.</a:t>
-            </a:r>
-          </a:p>
-        </p:txBody>
-      </p:sp>
-      <p:sp>
-        <p:nvSpPr>
-          <p:cNvPr id="5" name="Rectangle 4"/>
+          <p:cNvPr id="2" name="Rounded Rectangle 1"/>
           <p:cNvSpPr/>
           <p:nvPr/>
         </p:nvSpPr>
         <p:spPr>
           <a:xfrm>
-            <a:off x="548640" y="3108960"/>
-            <a:ext cx="3657600" cy="50800"/>
-          </a:xfrm>
-          <a:prstGeom prst="rect">
+            <a:off x="548640" y="548640"/>
+            <a:ext cx="1463040" cy="411480"/>
+          </a:xfrm>
+          <a:prstGeom prst="roundRect">
             <a:avLst/>
           </a:prstGeom>
           <a:solidFill>
-            <a:srgbClr val="FFB347"/>
+            <a:srgbClr val="00A884"/>
           </a:solidFill>
           <a:ln>
             <a:noFill/>
@@ -5074,23 +6938,31 @@
           </a:fontRef>
         </p:style>
         <p:txBody>
-          <a:bodyPr rtlCol="0" anchor="ctr"/>
+          <a:bodyPr rtlCol="0" anchor="ctr" lIns="137160" rIns="137160"/>
           <a:lstStyle/>
           <a:p>
             <a:pPr algn="ctr"/>
-          </a:p>
-        </p:txBody>
-      </p:sp>
-      <p:sp>
-        <p:nvSpPr>
-          <p:cNvPr id="6" name="TextBox 5"/>
+            <a:r>
+              <a:rPr sz="1200" b="1">
+                <a:solidFill>
+                  <a:srgbClr val="03110D"/>
+                </a:solidFill>
+              </a:rPr>
+              <a:t>Dell · Hackathon Finalist</a:t>
+            </a:r>
+          </a:p>
+        </p:txBody>
+      </p:sp>
+      <p:sp>
+        <p:nvSpPr>
+          <p:cNvPr id="3" name="TextBox 2"/>
           <p:cNvSpPr txBox="1"/>
           <p:nvPr/>
         </p:nvSpPr>
         <p:spPr>
           <a:xfrm>
-            <a:off x="548640" y="3383280"/>
-            <a:ext cx="11064240" cy="3200400"/>
+            <a:off x="548640" y="1463040"/>
+            <a:ext cx="11064240" cy="1097280"/>
           </a:xfrm>
           <a:prstGeom prst="rect">
             <a:avLst/>
@@ -5103,67 +6975,163 @@
           </a:bodyPr>
           <a:lstStyle/>
           <a:p>
-            <a:pPr algn="l">
-              <a:spcBef>
-                <a:spcPts val="800"/>
-              </a:spcBef>
-            </a:pPr>
-            <a:r>
-              <a:rPr sz="1800">
+            <a:pPr algn="l"/>
+            <a:r>
+              <a:rPr sz="7200" b="1">
+                <a:solidFill>
+                  <a:srgbClr val="FFFFFF"/>
+                </a:solidFill>
+                <a:latin typeface="Calibri"/>
+              </a:rPr>
+              <a:t>AI Tutor</a:t>
+            </a:r>
+          </a:p>
+        </p:txBody>
+      </p:sp>
+      <p:sp>
+        <p:nvSpPr>
+          <p:cNvPr id="4" name="TextBox 3"/>
+          <p:cNvSpPr txBox="1"/>
+          <p:nvPr/>
+        </p:nvSpPr>
+        <p:spPr>
+          <a:xfrm>
+            <a:off x="548640" y="2651760"/>
+            <a:ext cx="11064240" cy="640080"/>
+          </a:xfrm>
+          <a:prstGeom prst="rect">
+            <a:avLst/>
+          </a:prstGeom>
+          <a:noFill/>
+        </p:spPr>
+        <p:txBody>
+          <a:bodyPr wrap="square">
+            <a:spAutoFit/>
+          </a:bodyPr>
+          <a:lstStyle/>
+          <a:p>
+            <a:pPr algn="l"/>
+            <a:r>
+              <a:rPr sz="2800" b="0">
+                <a:solidFill>
+                  <a:srgbClr val="9CFF8C"/>
+                </a:solidFill>
+                <a:latin typeface="Calibri"/>
+              </a:rPr>
+              <a:t>CAPS-aligned. Multilingual. WhatsApp + USSD.</a:t>
+            </a:r>
+          </a:p>
+        </p:txBody>
+      </p:sp>
+      <p:sp>
+        <p:nvSpPr>
+          <p:cNvPr id="5" name="Rectangle 4"/>
+          <p:cNvSpPr/>
+          <p:nvPr/>
+        </p:nvSpPr>
+        <p:spPr>
+          <a:xfrm>
+            <a:off x="548640" y="3383280"/>
+            <a:ext cx="3657600" cy="50800"/>
+          </a:xfrm>
+          <a:prstGeom prst="rect">
+            <a:avLst/>
+          </a:prstGeom>
+          <a:solidFill>
+            <a:srgbClr val="00A884"/>
+          </a:solidFill>
+          <a:ln>
+            <a:noFill/>
+          </a:ln>
+        </p:spPr>
+        <p:style>
+          <a:lnRef idx="1">
+            <a:schemeClr val="accent1"/>
+          </a:lnRef>
+          <a:fillRef idx="3">
+            <a:schemeClr val="accent1"/>
+          </a:fillRef>
+          <a:effectRef idx="2">
+            <a:schemeClr val="accent1"/>
+          </a:effectRef>
+          <a:fontRef idx="minor">
+            <a:schemeClr val="lt1"/>
+          </a:fontRef>
+        </p:style>
+        <p:txBody>
+          <a:bodyPr rtlCol="0" anchor="ctr"/>
+          <a:lstStyle/>
+          <a:p>
+            <a:pPr algn="ctr"/>
+          </a:p>
+        </p:txBody>
+      </p:sp>
+      <p:sp>
+        <p:nvSpPr>
+          <p:cNvPr id="6" name="TextBox 5"/>
+          <p:cNvSpPr txBox="1"/>
+          <p:nvPr/>
+        </p:nvSpPr>
+        <p:spPr>
+          <a:xfrm>
+            <a:off x="548640" y="3657600"/>
+            <a:ext cx="11064240" cy="548640"/>
+          </a:xfrm>
+          <a:prstGeom prst="rect">
+            <a:avLst/>
+          </a:prstGeom>
+          <a:noFill/>
+        </p:spPr>
+        <p:txBody>
+          <a:bodyPr wrap="square">
+            <a:spAutoFit/>
+          </a:bodyPr>
+          <a:lstStyle/>
+          <a:p>
+            <a:pPr algn="l"/>
+            <a:r>
+              <a:rPr sz="2000" b="0">
                 <a:solidFill>
                   <a:srgbClr val="E9EDEF"/>
                 </a:solidFill>
                 <a:latin typeface="Calibri"/>
               </a:rPr>
-              <a:t>• South Africa: Maths NSC pass rate ~55–60%. Bachelor pass ~25–30%.</a:t>
-            </a:r>
-          </a:p>
-          <a:p>
-            <a:pPr algn="l">
-              <a:spcBef>
-                <a:spcPts val="800"/>
-              </a:spcBef>
-            </a:pPr>
-            <a:r>
-              <a:rPr sz="1800">
-                <a:solidFill>
-                  <a:srgbClr val="E9EDEF"/>
-                </a:solidFill>
-                <a:latin typeface="Calibri"/>
-              </a:rPr>
-              <a:t>• 5–7 million SA learners own a phone but NOT a smartphone — Meta AI literally cannot reach them.</a:t>
-            </a:r>
-          </a:p>
-          <a:p>
-            <a:pPr algn="l">
-              <a:spcBef>
-                <a:spcPts val="800"/>
-              </a:spcBef>
-            </a:pPr>
-            <a:r>
-              <a:rPr sz="1800">
-                <a:solidFill>
-                  <a:srgbClr val="E9EDEF"/>
-                </a:solidFill>
-                <a:latin typeface="Calibri"/>
-              </a:rPr>
-              <a:t>• Private tutoring averages R250–500/hour. Out of reach for Quintile 1–3 learners (the 75% who need it most).</a:t>
-            </a:r>
-          </a:p>
-          <a:p>
-            <a:pPr algn="l">
-              <a:spcBef>
-                <a:spcPts val="800"/>
-              </a:spcBef>
-            </a:pPr>
-            <a:r>
-              <a:rPr sz="1800">
-                <a:solidFill>
-                  <a:srgbClr val="E9EDEF"/>
-                </a:solidFill>
-                <a:latin typeface="Calibri"/>
-              </a:rPr>
-              <a:t>• Generic AI gives the answer. Learning never happens.</a:t>
+              <a:t>A tutor every South African learner can access — even on a feature phone, even with no data.</a:t>
+            </a:r>
+          </a:p>
+        </p:txBody>
+      </p:sp>
+      <p:sp>
+        <p:nvSpPr>
+          <p:cNvPr id="7" name="TextBox 6"/>
+          <p:cNvSpPr txBox="1"/>
+          <p:nvPr/>
+        </p:nvSpPr>
+        <p:spPr>
+          <a:xfrm>
+            <a:off x="548640" y="4846320"/>
+            <a:ext cx="11064240" cy="457200"/>
+          </a:xfrm>
+          <a:prstGeom prst="rect">
+            <a:avLst/>
+          </a:prstGeom>
+          <a:noFill/>
+        </p:spPr>
+        <p:txBody>
+          <a:bodyPr wrap="square">
+            <a:spAutoFit/>
+          </a:bodyPr>
+          <a:lstStyle/>
+          <a:p>
+            <a:pPr algn="l"/>
+            <a:r>
+              <a:rPr sz="1400" b="0">
+                <a:solidFill>
+                  <a:srgbClr val="8696A0"/>
+                </a:solidFill>
+                <a:latin typeface="Calibri"/>
+              </a:rPr>
+              <a:t>Powered by Dell AI Factory  ·  Zero-rated on Vodacom</a:t>
             </a:r>
           </a:p>
         </p:txBody>
@@ -5220,11 +7188,11 @@
             <a:r>
               <a:rPr sz="1400" b="1">
                 <a:solidFill>
-                  <a:srgbClr val="00A884"/>
-                </a:solidFill>
-                <a:latin typeface="Calibri"/>
-              </a:rPr>
-              <a:t>The solution</a:t>
+                  <a:srgbClr val="FFB347"/>
+                </a:solidFill>
+                <a:latin typeface="Calibri"/>
+              </a:rPr>
+              <a:t>The problem</a:t>
             </a:r>
           </a:p>
         </p:txBody>
@@ -5253,121 +7221,27 @@
           <a:p>
             <a:pPr algn="l"/>
             <a:r>
-              <a:rPr sz="4000" b="1">
+              <a:rPr sz="4400" b="1">
                 <a:solidFill>
                   <a:srgbClr val="FFFFFF"/>
                 </a:solidFill>
                 <a:latin typeface="Calibri"/>
               </a:rPr>
-              <a:t>One brain. Two channels. Every learner.</a:t>
-            </a:r>
-          </a:p>
-        </p:txBody>
-      </p:sp>
-      <p:sp>
-        <p:nvSpPr>
-          <p:cNvPr id="4" name="Rectangle 3"/>
-          <p:cNvSpPr/>
+              <a:t>Most learners get stuck on the same step.</a:t>
+            </a:r>
+          </a:p>
+        </p:txBody>
+      </p:sp>
+      <p:sp>
+        <p:nvSpPr>
+          <p:cNvPr id="4" name="TextBox 3"/>
+          <p:cNvSpPr txBox="1"/>
           <p:nvPr/>
         </p:nvSpPr>
         <p:spPr>
           <a:xfrm>
             <a:off x="548640" y="2103120"/>
-            <a:ext cx="3657600" cy="50800"/>
-          </a:xfrm>
-          <a:prstGeom prst="rect">
-            <a:avLst/>
-          </a:prstGeom>
-          <a:solidFill>
-            <a:srgbClr val="00A884"/>
-          </a:solidFill>
-          <a:ln>
-            <a:noFill/>
-          </a:ln>
-        </p:spPr>
-        <p:style>
-          <a:lnRef idx="1">
-            <a:schemeClr val="accent1"/>
-          </a:lnRef>
-          <a:fillRef idx="3">
-            <a:schemeClr val="accent1"/>
-          </a:fillRef>
-          <a:effectRef idx="2">
-            <a:schemeClr val="accent1"/>
-          </a:effectRef>
-          <a:fontRef idx="minor">
-            <a:schemeClr val="lt1"/>
-          </a:fontRef>
-        </p:style>
-        <p:txBody>
-          <a:bodyPr rtlCol="0" anchor="ctr"/>
-          <a:lstStyle/>
-          <a:p>
-            <a:pPr algn="ctr"/>
-          </a:p>
-        </p:txBody>
-      </p:sp>
-      <p:sp>
-        <p:nvSpPr>
-          <p:cNvPr id="5" name="Rounded Rectangle 4"/>
-          <p:cNvSpPr/>
-          <p:nvPr/>
-        </p:nvSpPr>
-        <p:spPr>
-          <a:xfrm>
-            <a:off x="548640" y="2560320"/>
-            <a:ext cx="1280160" cy="457200"/>
-          </a:xfrm>
-          <a:prstGeom prst="roundRect">
-            <a:avLst/>
-          </a:prstGeom>
-          <a:solidFill>
-            <a:srgbClr val="00A884"/>
-          </a:solidFill>
-          <a:ln>
-            <a:noFill/>
-          </a:ln>
-        </p:spPr>
-        <p:style>
-          <a:lnRef idx="1">
-            <a:schemeClr val="accent1"/>
-          </a:lnRef>
-          <a:fillRef idx="3">
-            <a:schemeClr val="accent1"/>
-          </a:fillRef>
-          <a:effectRef idx="2">
-            <a:schemeClr val="accent1"/>
-          </a:effectRef>
-          <a:fontRef idx="minor">
-            <a:schemeClr val="lt1"/>
-          </a:fontRef>
-        </p:style>
-        <p:txBody>
-          <a:bodyPr rtlCol="0" anchor="ctr" lIns="137160" rIns="137160"/>
-          <a:lstStyle/>
-          <a:p>
-            <a:pPr algn="ctr"/>
-            <a:r>
-              <a:rPr sz="1400" b="1">
-                <a:solidFill>
-                  <a:srgbClr val="03110D"/>
-                </a:solidFill>
-              </a:rPr>
-              <a:t>WhatsApp</a:t>
-            </a:r>
-          </a:p>
-        </p:txBody>
-      </p:sp>
-      <p:sp>
-        <p:nvSpPr>
-          <p:cNvPr id="6" name="TextBox 5"/>
-          <p:cNvSpPr txBox="1"/>
-          <p:nvPr/>
-        </p:nvSpPr>
-        <p:spPr>
-          <a:xfrm>
-            <a:off x="548640" y="3200400"/>
-            <a:ext cx="5303520" cy="3200400"/>
+            <a:ext cx="11064240" cy="914400"/>
           </a:xfrm>
           <a:prstGeom prst="rect">
             <a:avLst/>
@@ -5380,131 +7254,31 @@
           </a:bodyPr>
           <a:lstStyle/>
           <a:p>
-            <a:pPr algn="l">
-              <a:spcBef>
-                <a:spcPts val="800"/>
-              </a:spcBef>
-            </a:pPr>
-            <a:r>
-              <a:rPr sz="1500">
+            <a:pPr algn="l"/>
+            <a:r>
+              <a:rPr sz="2200" b="0">
                 <a:solidFill>
                   <a:srgbClr val="E9EDEF"/>
                 </a:solidFill>
                 <a:latin typeface="Calibri"/>
               </a:rPr>
-              <a:t>• Rich UI: text + image upload of working</a:t>
-            </a:r>
-          </a:p>
-          <a:p>
-            <a:pPr algn="l">
-              <a:spcBef>
-                <a:spcPts val="800"/>
-              </a:spcBef>
-            </a:pPr>
-            <a:r>
-              <a:rPr sz="1500">
-                <a:solidFill>
-                  <a:srgbClr val="E9EDEF"/>
-                </a:solidFill>
-                <a:latin typeface="Calibri"/>
-              </a:rPr>
-              <a:t>• 11 official SA languages framework · 4 launch-validated</a:t>
-            </a:r>
-          </a:p>
-          <a:p>
-            <a:pPr algn="l">
-              <a:spcBef>
-                <a:spcPts val="800"/>
-              </a:spcBef>
-            </a:pPr>
-            <a:r>
-              <a:rPr sz="1500">
-                <a:solidFill>
-                  <a:srgbClr val="E9EDEF"/>
-                </a:solidFill>
-                <a:latin typeface="Calibri"/>
-              </a:rPr>
-              <a:t>• Learner-led: types problem, types working</a:t>
-            </a:r>
-          </a:p>
-          <a:p>
-            <a:pPr algn="l">
-              <a:spcBef>
-                <a:spcPts val="800"/>
-              </a:spcBef>
-            </a:pPr>
-            <a:r>
-              <a:rPr sz="1500">
-                <a:solidFill>
-                  <a:srgbClr val="E9EDEF"/>
-                </a:solidFill>
-                <a:latin typeface="Calibri"/>
-              </a:rPr>
-              <a:t>• Diagnoses misconceptions, not just answers</a:t>
-            </a:r>
-          </a:p>
-          <a:p>
-            <a:pPr algn="l">
-              <a:spcBef>
-                <a:spcPts val="800"/>
-              </a:spcBef>
-            </a:pPr>
-            <a:r>
-              <a:rPr sz="1500">
-                <a:solidFill>
-                  <a:srgbClr val="E9EDEF"/>
-                </a:solidFill>
-                <a:latin typeface="Calibri"/>
-              </a:rPr>
-              <a:t>• NSC mark-scheme aware (toggle)</a:t>
-            </a:r>
-          </a:p>
-          <a:p>
-            <a:pPr algn="l">
-              <a:spcBef>
-                <a:spcPts val="800"/>
-              </a:spcBef>
-            </a:pPr>
-            <a:r>
-              <a:rPr sz="1500">
-                <a:solidFill>
-                  <a:srgbClr val="E9EDEF"/>
-                </a:solidFill>
-                <a:latin typeface="Calibri"/>
-              </a:rPr>
-              <a:t>• Past Papers archive built in</a:t>
-            </a:r>
-          </a:p>
-          <a:p>
-            <a:pPr algn="l">
-              <a:spcBef>
-                <a:spcPts val="800"/>
-              </a:spcBef>
-            </a:pPr>
-            <a:r>
-              <a:rPr sz="1500">
-                <a:solidFill>
-                  <a:srgbClr val="E9EDEF"/>
-                </a:solidFill>
-                <a:latin typeface="Calibri"/>
-              </a:rPr>
-              <a:t>• Zero-rated via Vodacom WhatsApp bundles</a:t>
-            </a:r>
-          </a:p>
-        </p:txBody>
-      </p:sp>
-      <p:sp>
-        <p:nvSpPr>
-          <p:cNvPr id="7" name="Rounded Rectangle 6"/>
+              <a:t>Tutors can't sit with each one. Most can't afford one at all.</a:t>
+            </a:r>
+          </a:p>
+        </p:txBody>
+      </p:sp>
+      <p:sp>
+        <p:nvSpPr>
+          <p:cNvPr id="5" name="Rectangle 4"/>
           <p:cNvSpPr/>
           <p:nvPr/>
         </p:nvSpPr>
         <p:spPr>
           <a:xfrm>
-            <a:off x="6400800" y="2560320"/>
-            <a:ext cx="1280160" cy="457200"/>
-          </a:xfrm>
-          <a:prstGeom prst="roundRect">
+            <a:off x="548640" y="3108960"/>
+            <a:ext cx="3657600" cy="50800"/>
+          </a:xfrm>
+          <a:prstGeom prst="rect">
             <a:avLst/>
           </a:prstGeom>
           <a:solidFill>
@@ -5529,31 +7303,23 @@
           </a:fontRef>
         </p:style>
         <p:txBody>
-          <a:bodyPr rtlCol="0" anchor="ctr" lIns="137160" rIns="137160"/>
+          <a:bodyPr rtlCol="0" anchor="ctr"/>
           <a:lstStyle/>
           <a:p>
             <a:pPr algn="ctr"/>
-            <a:r>
-              <a:rPr sz="1400" b="1">
-                <a:solidFill>
-                  <a:srgbClr val="03110D"/>
-                </a:solidFill>
-              </a:rPr>
-              <a:t>USSD</a:t>
-            </a:r>
-          </a:p>
-        </p:txBody>
-      </p:sp>
-      <p:sp>
-        <p:nvSpPr>
-          <p:cNvPr id="8" name="TextBox 7"/>
+          </a:p>
+        </p:txBody>
+      </p:sp>
+      <p:sp>
+        <p:nvSpPr>
+          <p:cNvPr id="6" name="TextBox 5"/>
           <p:cNvSpPr txBox="1"/>
           <p:nvPr/>
         </p:nvSpPr>
         <p:spPr>
           <a:xfrm>
-            <a:off x="6400800" y="3200400"/>
-            <a:ext cx="5303520" cy="3200400"/>
+            <a:off x="548640" y="3383280"/>
+            <a:ext cx="11064240" cy="3200400"/>
           </a:xfrm>
           <a:prstGeom prst="rect">
             <a:avLst/>
@@ -5572,13 +7338,13 @@
               </a:spcBef>
             </a:pPr>
             <a:r>
-              <a:rPr sz="1500">
+              <a:rPr sz="1800">
                 <a:solidFill>
                   <a:srgbClr val="E9EDEF"/>
                 </a:solidFill>
                 <a:latin typeface="Calibri"/>
               </a:rPr>
-              <a:t>• Feature phones — no smartphone required</a:t>
+              <a:t>• South Africa: Maths NSC pass rate ~55–60%. Bachelor pass ~25–30%.</a:t>
             </a:r>
           </a:p>
           <a:p>
@@ -5588,13 +7354,13 @@
               </a:spcBef>
             </a:pPr>
             <a:r>
-              <a:rPr sz="1500">
+              <a:rPr sz="1800">
                 <a:solidFill>
                   <a:srgbClr val="E9EDEF"/>
                 </a:solidFill>
                 <a:latin typeface="Calibri"/>
               </a:rPr>
-              <a:t>• All 11 official languages on roadmap · 4 launch ready</a:t>
+              <a:t>• 5–7 million SA learners own a phone but NOT a smartphone — Meta AI literally cannot reach them.</a:t>
             </a:r>
           </a:p>
           <a:p>
@@ -5604,13 +7370,13 @@
               </a:spcBef>
             </a:pPr>
             <a:r>
-              <a:rPr sz="1500">
+              <a:rPr sz="1800">
                 <a:solidFill>
                   <a:srgbClr val="E9EDEF"/>
                 </a:solidFill>
                 <a:latin typeface="Calibri"/>
               </a:rPr>
-              <a:t>• Same Pythagoras / Area / Algebra / Past Papers</a:t>
+              <a:t>• Private tutoring averages R250–500/hour. Out of reach for Quintile 1–3 learners (the 75% who need it most).</a:t>
             </a:r>
           </a:p>
           <a:p>
@@ -5620,61 +7386,13 @@
               </a:spcBef>
             </a:pPr>
             <a:r>
-              <a:rPr sz="1500">
+              <a:rPr sz="1800">
                 <a:solidFill>
                   <a:srgbClr val="E9EDEF"/>
                 </a:solidFill>
                 <a:latin typeface="Calibri"/>
               </a:rPr>
-              <a:t>• Mark-scheme feedback in 160-char screens</a:t>
-            </a:r>
-          </a:p>
-          <a:p>
-            <a:pPr algn="l">
-              <a:spcBef>
-                <a:spcPts val="800"/>
-              </a:spcBef>
-            </a:pPr>
-            <a:r>
-              <a:rPr sz="1500">
-                <a:solidFill>
-                  <a:srgbClr val="E9EDEF"/>
-                </a:solidFill>
-                <a:latin typeface="Calibri"/>
-              </a:rPr>
-              <a:t>• Optional handoff to WhatsApp on request</a:t>
-            </a:r>
-          </a:p>
-          <a:p>
-            <a:pPr algn="l">
-              <a:spcBef>
-                <a:spcPts val="800"/>
-              </a:spcBef>
-            </a:pPr>
-            <a:r>
-              <a:rPr sz="1500">
-                <a:solidFill>
-                  <a:srgbClr val="E9EDEF"/>
-                </a:solidFill>
-                <a:latin typeface="Calibri"/>
-              </a:rPr>
-              <a:t>• Zero-rated by definition (aggregator path)</a:t>
-            </a:r>
-          </a:p>
-          <a:p>
-            <a:pPr algn="l">
-              <a:spcBef>
-                <a:spcPts val="800"/>
-              </a:spcBef>
-            </a:pPr>
-            <a:r>
-              <a:rPr sz="1500">
-                <a:solidFill>
-                  <a:srgbClr val="E9EDEF"/>
-                </a:solidFill>
-                <a:latin typeface="Calibri"/>
-              </a:rPr>
-              <a:t>• Reaches learners no other AI can</a:t>
+              <a:t>• Generic AI gives the answer. Learning never happens.</a:t>
             </a:r>
           </a:p>
         </p:txBody>
@@ -5735,7 +7453,7 @@
                 </a:solidFill>
                 <a:latin typeface="Calibri"/>
               </a:rPr>
-              <a:t>Architecture</a:t>
+              <a:t>The solution</a:t>
             </a:r>
           </a:p>
         </p:txBody>
@@ -5764,13 +7482,13 @@
           <a:p>
             <a:pPr algn="l"/>
             <a:r>
-              <a:rPr sz="3200" b="1">
+              <a:rPr sz="4000" b="1">
                 <a:solidFill>
                   <a:srgbClr val="FFFFFF"/>
                 </a:solidFill>
                 <a:latin typeface="Calibri"/>
               </a:rPr>
-              <a:t>Channel-agnostic engine, swappable providers.</a:t>
+              <a:t>One brain. Two channels. Every learner.</a:t>
             </a:r>
           </a:p>
         </p:txBody>
@@ -5783,7 +7501,7 @@
         </p:nvSpPr>
         <p:spPr>
           <a:xfrm>
-            <a:off x="548640" y="2011680"/>
+            <a:off x="548640" y="2103120"/>
             <a:ext cx="3657600" cy="50800"/>
           </a:xfrm>
           <a:prstGeom prst="rect">
@@ -5826,8 +7544,8 @@
         </p:nvSpPr>
         <p:spPr>
           <a:xfrm>
-            <a:off x="548640" y="2743200"/>
-            <a:ext cx="2377440" cy="640080"/>
+            <a:off x="548640" y="2560320"/>
+            <a:ext cx="1280160" cy="457200"/>
           </a:xfrm>
           <a:prstGeom prst="roundRect">
             <a:avLst/>
@@ -5859,26 +7577,161 @@
           <a:p>
             <a:pPr algn="ctr"/>
             <a:r>
-              <a:rPr sz="1300" b="1">
+              <a:rPr sz="1400" b="1">
                 <a:solidFill>
                   <a:srgbClr val="03110D"/>
                 </a:solidFill>
               </a:rPr>
-              <a:t>WhatsApp Cloud</a:t>
-            </a:r>
-          </a:p>
-        </p:txBody>
-      </p:sp>
-      <p:sp>
-        <p:nvSpPr>
-          <p:cNvPr id="6" name="Rounded Rectangle 5"/>
+              <a:t>WhatsApp</a:t>
+            </a:r>
+          </a:p>
+        </p:txBody>
+      </p:sp>
+      <p:sp>
+        <p:nvSpPr>
+          <p:cNvPr id="6" name="TextBox 5"/>
+          <p:cNvSpPr txBox="1"/>
+          <p:nvPr/>
+        </p:nvSpPr>
+        <p:spPr>
+          <a:xfrm>
+            <a:off x="548640" y="3200400"/>
+            <a:ext cx="5303520" cy="3200400"/>
+          </a:xfrm>
+          <a:prstGeom prst="rect">
+            <a:avLst/>
+          </a:prstGeom>
+          <a:noFill/>
+        </p:spPr>
+        <p:txBody>
+          <a:bodyPr wrap="square">
+            <a:spAutoFit/>
+          </a:bodyPr>
+          <a:lstStyle/>
+          <a:p>
+            <a:pPr algn="l">
+              <a:spcBef>
+                <a:spcPts val="800"/>
+              </a:spcBef>
+            </a:pPr>
+            <a:r>
+              <a:rPr sz="1500">
+                <a:solidFill>
+                  <a:srgbClr val="E9EDEF"/>
+                </a:solidFill>
+                <a:latin typeface="Calibri"/>
+              </a:rPr>
+              <a:t>• Rich UI: text + image upload of working</a:t>
+            </a:r>
+          </a:p>
+          <a:p>
+            <a:pPr algn="l">
+              <a:spcBef>
+                <a:spcPts val="800"/>
+              </a:spcBef>
+            </a:pPr>
+            <a:r>
+              <a:rPr sz="1500">
+                <a:solidFill>
+                  <a:srgbClr val="E9EDEF"/>
+                </a:solidFill>
+                <a:latin typeface="Calibri"/>
+              </a:rPr>
+              <a:t>• 11 official SA languages framework · 4 launch-validated</a:t>
+            </a:r>
+          </a:p>
+          <a:p>
+            <a:pPr algn="l">
+              <a:spcBef>
+                <a:spcPts val="800"/>
+              </a:spcBef>
+            </a:pPr>
+            <a:r>
+              <a:rPr sz="1500">
+                <a:solidFill>
+                  <a:srgbClr val="E9EDEF"/>
+                </a:solidFill>
+                <a:latin typeface="Calibri"/>
+              </a:rPr>
+              <a:t>• Learner-led: types problem, types working</a:t>
+            </a:r>
+          </a:p>
+          <a:p>
+            <a:pPr algn="l">
+              <a:spcBef>
+                <a:spcPts val="800"/>
+              </a:spcBef>
+            </a:pPr>
+            <a:r>
+              <a:rPr sz="1500">
+                <a:solidFill>
+                  <a:srgbClr val="E9EDEF"/>
+                </a:solidFill>
+                <a:latin typeface="Calibri"/>
+              </a:rPr>
+              <a:t>• Diagnoses misconceptions, not just answers</a:t>
+            </a:r>
+          </a:p>
+          <a:p>
+            <a:pPr algn="l">
+              <a:spcBef>
+                <a:spcPts val="800"/>
+              </a:spcBef>
+            </a:pPr>
+            <a:r>
+              <a:rPr sz="1500">
+                <a:solidFill>
+                  <a:srgbClr val="E9EDEF"/>
+                </a:solidFill>
+                <a:latin typeface="Calibri"/>
+              </a:rPr>
+              <a:t>• NSC mark-scheme aware (toggle)</a:t>
+            </a:r>
+          </a:p>
+          <a:p>
+            <a:pPr algn="l">
+              <a:spcBef>
+                <a:spcPts val="800"/>
+              </a:spcBef>
+            </a:pPr>
+            <a:r>
+              <a:rPr sz="1500">
+                <a:solidFill>
+                  <a:srgbClr val="E9EDEF"/>
+                </a:solidFill>
+                <a:latin typeface="Calibri"/>
+              </a:rPr>
+              <a:t>• Past Papers archive built in</a:t>
+            </a:r>
+          </a:p>
+          <a:p>
+            <a:pPr algn="l">
+              <a:spcBef>
+                <a:spcPts val="800"/>
+              </a:spcBef>
+            </a:pPr>
+            <a:r>
+              <a:rPr sz="1500">
+                <a:solidFill>
+                  <a:srgbClr val="E9EDEF"/>
+                </a:solidFill>
+                <a:latin typeface="Calibri"/>
+              </a:rPr>
+              <a:t>• Zero-rated via Vodacom WhatsApp bundles</a:t>
+            </a:r>
+          </a:p>
+        </p:txBody>
+      </p:sp>
+      <p:sp>
+        <p:nvSpPr>
+          <p:cNvPr id="7" name="Rounded Rectangle 6"/>
           <p:cNvSpPr/>
           <p:nvPr/>
         </p:nvSpPr>
         <p:spPr>
           <a:xfrm>
-            <a:off x="548640" y="3566160"/>
-            <a:ext cx="2377440" cy="640080"/>
+            <a:off x="6400800" y="2560320"/>
+            <a:ext cx="1280160" cy="457200"/>
           </a:xfrm>
           <a:prstGeom prst="roundRect">
             <a:avLst/>
@@ -5910,281 +7763,26 @@
           <a:p>
             <a:pPr algn="ctr"/>
             <a:r>
-              <a:rPr sz="1300" b="1">
+              <a:rPr sz="1400" b="1">
                 <a:solidFill>
                   <a:srgbClr val="03110D"/>
                 </a:solidFill>
               </a:rPr>
-              <a:t>USSD aggregator</a:t>
-            </a:r>
-          </a:p>
-        </p:txBody>
-      </p:sp>
-      <p:sp>
-        <p:nvSpPr>
-          <p:cNvPr id="7" name="Rounded Rectangle 6"/>
-          <p:cNvSpPr/>
-          <p:nvPr/>
-        </p:nvSpPr>
-        <p:spPr>
-          <a:xfrm>
-            <a:off x="4023360" y="3154680"/>
-            <a:ext cx="3108960" cy="640080"/>
-          </a:xfrm>
-          <a:prstGeom prst="roundRect">
-            <a:avLst/>
-          </a:prstGeom>
-          <a:solidFill>
-            <a:srgbClr val="111B21"/>
-          </a:solidFill>
-          <a:ln>
-            <a:noFill/>
-          </a:ln>
-        </p:spPr>
-        <p:style>
-          <a:lnRef idx="1">
-            <a:schemeClr val="accent1"/>
-          </a:lnRef>
-          <a:fillRef idx="3">
-            <a:schemeClr val="accent1"/>
-          </a:fillRef>
-          <a:effectRef idx="2">
-            <a:schemeClr val="accent1"/>
-          </a:effectRef>
-          <a:fontRef idx="minor">
-            <a:schemeClr val="lt1"/>
-          </a:fontRef>
-        </p:style>
-        <p:txBody>
-          <a:bodyPr rtlCol="0" anchor="ctr" lIns="137160" rIns="137160"/>
-          <a:lstStyle/>
-          <a:p>
-            <a:pPr algn="ctr"/>
-            <a:r>
-              <a:rPr sz="1400" b="1">
-                <a:solidFill>
-                  <a:srgbClr val="9CFF8C"/>
-                </a:solidFill>
-              </a:rPr>
-              <a:t>Tutor Engine</a:t>
-            </a:r>
-          </a:p>
-        </p:txBody>
-      </p:sp>
-      <p:sp>
-        <p:nvSpPr>
-          <p:cNvPr id="8" name="Rounded Rectangle 7"/>
-          <p:cNvSpPr/>
-          <p:nvPr/>
-        </p:nvSpPr>
-        <p:spPr>
-          <a:xfrm>
-            <a:off x="8229600" y="2423160"/>
-            <a:ext cx="3291840" cy="548640"/>
-          </a:xfrm>
-          <a:prstGeom prst="roundRect">
-            <a:avLst/>
-          </a:prstGeom>
-          <a:solidFill>
-            <a:srgbClr val="111B21"/>
-          </a:solidFill>
-          <a:ln>
-            <a:noFill/>
-          </a:ln>
-        </p:spPr>
-        <p:style>
-          <a:lnRef idx="1">
-            <a:schemeClr val="accent1"/>
-          </a:lnRef>
-          <a:fillRef idx="3">
-            <a:schemeClr val="accent1"/>
-          </a:fillRef>
-          <a:effectRef idx="2">
-            <a:schemeClr val="accent1"/>
-          </a:effectRef>
-          <a:fontRef idx="minor">
-            <a:schemeClr val="lt1"/>
-          </a:fontRef>
-        </p:style>
-        <p:txBody>
-          <a:bodyPr rtlCol="0" anchor="ctr" lIns="137160" rIns="137160"/>
-          <a:lstStyle/>
-          <a:p>
-            <a:pPr algn="ctr"/>
-            <a:r>
-              <a:rPr sz="1200" b="1">
-                <a:solidFill>
-                  <a:srgbClr val="E9EDEF"/>
-                </a:solidFill>
-              </a:rPr>
-              <a:t>LLM (Dell AI Factory NIM)</a:t>
-            </a:r>
-          </a:p>
-        </p:txBody>
-      </p:sp>
-      <p:sp>
-        <p:nvSpPr>
-          <p:cNvPr id="9" name="Rounded Rectangle 8"/>
-          <p:cNvSpPr/>
-          <p:nvPr/>
-        </p:nvSpPr>
-        <p:spPr>
-          <a:xfrm>
-            <a:off x="8229600" y="3017520"/>
-            <a:ext cx="3291840" cy="548640"/>
-          </a:xfrm>
-          <a:prstGeom prst="roundRect">
-            <a:avLst/>
-          </a:prstGeom>
-          <a:solidFill>
-            <a:srgbClr val="111B21"/>
-          </a:solidFill>
-          <a:ln>
-            <a:noFill/>
-          </a:ln>
-        </p:spPr>
-        <p:style>
-          <a:lnRef idx="1">
-            <a:schemeClr val="accent1"/>
-          </a:lnRef>
-          <a:fillRef idx="3">
-            <a:schemeClr val="accent1"/>
-          </a:fillRef>
-          <a:effectRef idx="2">
-            <a:schemeClr val="accent1"/>
-          </a:effectRef>
-          <a:fontRef idx="minor">
-            <a:schemeClr val="lt1"/>
-          </a:fontRef>
-        </p:style>
-        <p:txBody>
-          <a:bodyPr rtlCol="0" anchor="ctr" lIns="137160" rIns="137160"/>
-          <a:lstStyle/>
-          <a:p>
-            <a:pPr algn="ctr"/>
-            <a:r>
-              <a:rPr sz="1200" b="1">
-                <a:solidFill>
-                  <a:srgbClr val="E9EDEF"/>
-                </a:solidFill>
-              </a:rPr>
-              <a:t>Vision (Dell VLM)</a:t>
-            </a:r>
-          </a:p>
-        </p:txBody>
-      </p:sp>
-      <p:sp>
-        <p:nvSpPr>
-          <p:cNvPr id="10" name="Rounded Rectangle 9"/>
-          <p:cNvSpPr/>
-          <p:nvPr/>
-        </p:nvSpPr>
-        <p:spPr>
-          <a:xfrm>
-            <a:off x="8229600" y="3611880"/>
-            <a:ext cx="3291840" cy="548640"/>
-          </a:xfrm>
-          <a:prstGeom prst="roundRect">
-            <a:avLst/>
-          </a:prstGeom>
-          <a:solidFill>
-            <a:srgbClr val="111B21"/>
-          </a:solidFill>
-          <a:ln>
-            <a:noFill/>
-          </a:ln>
-        </p:spPr>
-        <p:style>
-          <a:lnRef idx="1">
-            <a:schemeClr val="accent1"/>
-          </a:lnRef>
-          <a:fillRef idx="3">
-            <a:schemeClr val="accent1"/>
-          </a:fillRef>
-          <a:effectRef idx="2">
-            <a:schemeClr val="accent1"/>
-          </a:effectRef>
-          <a:fontRef idx="minor">
-            <a:schemeClr val="lt1"/>
-          </a:fontRef>
-        </p:style>
-        <p:txBody>
-          <a:bodyPr rtlCol="0" anchor="ctr" lIns="137160" rIns="137160"/>
-          <a:lstStyle/>
-          <a:p>
-            <a:pPr algn="ctr"/>
-            <a:r>
-              <a:rPr sz="1200" b="1">
-                <a:solidFill>
-                  <a:srgbClr val="E9EDEF"/>
-                </a:solidFill>
-              </a:rPr>
-              <a:t>Translation</a:t>
-            </a:r>
-          </a:p>
-        </p:txBody>
-      </p:sp>
-      <p:sp>
-        <p:nvSpPr>
-          <p:cNvPr id="11" name="Rounded Rectangle 10"/>
-          <p:cNvSpPr/>
-          <p:nvPr/>
-        </p:nvSpPr>
-        <p:spPr>
-          <a:xfrm>
-            <a:off x="8229600" y="4206240"/>
-            <a:ext cx="3291840" cy="548640"/>
-          </a:xfrm>
-          <a:prstGeom prst="roundRect">
-            <a:avLst/>
-          </a:prstGeom>
-          <a:solidFill>
-            <a:srgbClr val="111B21"/>
-          </a:solidFill>
-          <a:ln>
-            <a:noFill/>
-          </a:ln>
-        </p:spPr>
-        <p:style>
-          <a:lnRef idx="1">
-            <a:schemeClr val="accent1"/>
-          </a:lnRef>
-          <a:fillRef idx="3">
-            <a:schemeClr val="accent1"/>
-          </a:fillRef>
-          <a:effectRef idx="2">
-            <a:schemeClr val="accent1"/>
-          </a:effectRef>
-          <a:fontRef idx="minor">
-            <a:schemeClr val="lt1"/>
-          </a:fontRef>
-        </p:style>
-        <p:txBody>
-          <a:bodyPr rtlCol="0" anchor="ctr" lIns="137160" rIns="137160"/>
-          <a:lstStyle/>
-          <a:p>
-            <a:pPr algn="ctr"/>
-            <a:r>
-              <a:rPr sz="1200" b="1">
-                <a:solidFill>
-                  <a:srgbClr val="9CFF8C"/>
-                </a:solidFill>
-              </a:rPr>
-              <a:t>Past Papers + CAPS data</a:t>
-            </a:r>
-          </a:p>
-        </p:txBody>
-      </p:sp>
-      <p:sp>
-        <p:nvSpPr>
-          <p:cNvPr id="12" name="TextBox 11"/>
+              <a:t>USSD</a:t>
+            </a:r>
+          </a:p>
+        </p:txBody>
+      </p:sp>
+      <p:sp>
+        <p:nvSpPr>
+          <p:cNvPr id="8" name="TextBox 7"/>
           <p:cNvSpPr txBox="1"/>
           <p:nvPr/>
         </p:nvSpPr>
         <p:spPr>
           <a:xfrm>
-            <a:off x="548640" y="5120640"/>
-            <a:ext cx="11064240" cy="548640"/>
+            <a:off x="6400800" y="3200400"/>
+            <a:ext cx="5303520" cy="3200400"/>
           </a:xfrm>
           <a:prstGeom prst="rect">
             <a:avLst/>
@@ -6197,15 +7795,115 @@
           </a:bodyPr>
           <a:lstStyle/>
           <a:p>
-            <a:pPr algn="ctr"/>
-            <a:r>
-              <a:rPr sz="1500" b="0">
-                <a:solidFill>
-                  <a:srgbClr val="8696A0"/>
-                </a:solidFill>
-                <a:latin typeface="Calibri"/>
-              </a:rPr>
-              <a:t>Mock providers ↔ Dell providers swap by env var. No code rewrite.</a:t>
+            <a:pPr algn="l">
+              <a:spcBef>
+                <a:spcPts val="800"/>
+              </a:spcBef>
+            </a:pPr>
+            <a:r>
+              <a:rPr sz="1500">
+                <a:solidFill>
+                  <a:srgbClr val="E9EDEF"/>
+                </a:solidFill>
+                <a:latin typeface="Calibri"/>
+              </a:rPr>
+              <a:t>• Feature phones — no smartphone required</a:t>
+            </a:r>
+          </a:p>
+          <a:p>
+            <a:pPr algn="l">
+              <a:spcBef>
+                <a:spcPts val="800"/>
+              </a:spcBef>
+            </a:pPr>
+            <a:r>
+              <a:rPr sz="1500">
+                <a:solidFill>
+                  <a:srgbClr val="E9EDEF"/>
+                </a:solidFill>
+                <a:latin typeface="Calibri"/>
+              </a:rPr>
+              <a:t>• All 11 official languages on roadmap · 4 launch ready</a:t>
+            </a:r>
+          </a:p>
+          <a:p>
+            <a:pPr algn="l">
+              <a:spcBef>
+                <a:spcPts val="800"/>
+              </a:spcBef>
+            </a:pPr>
+            <a:r>
+              <a:rPr sz="1500">
+                <a:solidFill>
+                  <a:srgbClr val="E9EDEF"/>
+                </a:solidFill>
+                <a:latin typeface="Calibri"/>
+              </a:rPr>
+              <a:t>• Same Pythagoras / Area / Algebra / Past Papers</a:t>
+            </a:r>
+          </a:p>
+          <a:p>
+            <a:pPr algn="l">
+              <a:spcBef>
+                <a:spcPts val="800"/>
+              </a:spcBef>
+            </a:pPr>
+            <a:r>
+              <a:rPr sz="1500">
+                <a:solidFill>
+                  <a:srgbClr val="E9EDEF"/>
+                </a:solidFill>
+                <a:latin typeface="Calibri"/>
+              </a:rPr>
+              <a:t>• Mark-scheme feedback in 160-char screens</a:t>
+            </a:r>
+          </a:p>
+          <a:p>
+            <a:pPr algn="l">
+              <a:spcBef>
+                <a:spcPts val="800"/>
+              </a:spcBef>
+            </a:pPr>
+            <a:r>
+              <a:rPr sz="1500">
+                <a:solidFill>
+                  <a:srgbClr val="E9EDEF"/>
+                </a:solidFill>
+                <a:latin typeface="Calibri"/>
+              </a:rPr>
+              <a:t>• Optional handoff to WhatsApp on request</a:t>
+            </a:r>
+          </a:p>
+          <a:p>
+            <a:pPr algn="l">
+              <a:spcBef>
+                <a:spcPts val="800"/>
+              </a:spcBef>
+            </a:pPr>
+            <a:r>
+              <a:rPr sz="1500">
+                <a:solidFill>
+                  <a:srgbClr val="E9EDEF"/>
+                </a:solidFill>
+                <a:latin typeface="Calibri"/>
+              </a:rPr>
+              <a:t>• Zero-rated by definition (aggregator path)</a:t>
+            </a:r>
+          </a:p>
+          <a:p>
+            <a:pPr algn="l">
+              <a:spcBef>
+                <a:spcPts val="800"/>
+              </a:spcBef>
+            </a:pPr>
+            <a:r>
+              <a:rPr sz="1500">
+                <a:solidFill>
+                  <a:srgbClr val="E9EDEF"/>
+                </a:solidFill>
+                <a:latin typeface="Calibri"/>
+              </a:rPr>
+              <a:t>• Reaches learners no other AI can</a:t>
             </a:r>
           </a:p>
         </p:txBody>
@@ -6244,8 +7942,8 @@
         </p:nvSpPr>
         <p:spPr>
           <a:xfrm>
-            <a:off x="548640" y="457200"/>
-            <a:ext cx="11064240" cy="548640"/>
+            <a:off x="548640" y="365760"/>
+            <a:ext cx="11064240" cy="457200"/>
           </a:xfrm>
           <a:prstGeom prst="rect">
             <a:avLst/>
@@ -6266,7 +7964,7 @@
                 </a:solidFill>
                 <a:latin typeface="Calibri"/>
               </a:rPr>
-              <a:t>Why this is different</a:t>
+              <a:t>Solution architecture</a:t>
             </a:r>
           </a:p>
         </p:txBody>
@@ -6279,8 +7977,8 @@
         </p:nvSpPr>
         <p:spPr>
           <a:xfrm>
-            <a:off x="548640" y="914400"/>
-            <a:ext cx="11064240" cy="914400"/>
+            <a:off x="548640" y="777240"/>
+            <a:ext cx="11064240" cy="640080"/>
           </a:xfrm>
           <a:prstGeom prst="rect">
             <a:avLst/>
@@ -6295,13 +7993,13 @@
           <a:p>
             <a:pPr algn="l"/>
             <a:r>
-              <a:rPr sz="3200" b="1">
+              <a:rPr sz="2600" b="1">
                 <a:solidFill>
                   <a:srgbClr val="FFFFFF"/>
                 </a:solidFill>
                 <a:latin typeface="Calibri"/>
               </a:rPr>
-              <a:t>Not a chatbot. A specialised SA tutor.</a:t>
+              <a:t>Sovereign brain. Deterministic maths. Curriculum-bounded.</a:t>
             </a:r>
           </a:p>
         </p:txBody>
@@ -6314,7 +8012,7 @@
         </p:nvSpPr>
         <p:spPr>
           <a:xfrm>
-            <a:off x="548640" y="2011680"/>
+            <a:off x="548640" y="1600200"/>
             <a:ext cx="3657600" cy="50800"/>
           </a:xfrm>
           <a:prstGeom prst="rect">
@@ -6351,14 +8049,401 @@
       </p:sp>
       <p:sp>
         <p:nvSpPr>
-          <p:cNvPr id="5" name="TextBox 4"/>
+          <p:cNvPr id="5" name="Rounded Rectangle 4"/>
+          <p:cNvSpPr/>
+          <p:nvPr/>
+        </p:nvSpPr>
+        <p:spPr>
+          <a:xfrm>
+            <a:off x="274320" y="1965960"/>
+            <a:ext cx="2103120" cy="3977639"/>
+          </a:xfrm>
+          <a:prstGeom prst="roundRect">
+            <a:avLst/>
+          </a:prstGeom>
+          <a:solidFill>
+            <a:srgbClr val="111B21"/>
+          </a:solidFill>
+          <a:ln w="6350">
+            <a:solidFill>
+              <a:srgbClr val="8696A0"/>
+            </a:solidFill>
+          </a:ln>
+        </p:spPr>
+        <p:style>
+          <a:lnRef idx="1">
+            <a:schemeClr val="accent1"/>
+          </a:lnRef>
+          <a:fillRef idx="3">
+            <a:schemeClr val="accent1"/>
+          </a:fillRef>
+          <a:effectRef idx="2">
+            <a:schemeClr val="accent1"/>
+          </a:effectRef>
+          <a:fontRef idx="minor">
+            <a:schemeClr val="lt1"/>
+          </a:fontRef>
+        </p:style>
+        <p:txBody>
+          <a:bodyPr rtlCol="0" anchor="ctr"/>
+          <a:lstStyle/>
+          <a:p/>
+        </p:txBody>
+      </p:sp>
+      <p:sp>
+        <p:nvSpPr>
+          <p:cNvPr id="6" name="Rounded Rectangle 5"/>
+          <p:cNvSpPr/>
+          <p:nvPr/>
+        </p:nvSpPr>
+        <p:spPr>
+          <a:xfrm>
+            <a:off x="2788919" y="1965960"/>
+            <a:ext cx="1737360" cy="3977639"/>
+          </a:xfrm>
+          <a:prstGeom prst="roundRect">
+            <a:avLst/>
+          </a:prstGeom>
+          <a:solidFill>
+            <a:srgbClr val="111B21"/>
+          </a:solidFill>
+          <a:ln w="6350">
+            <a:solidFill>
+              <a:srgbClr val="8696A0"/>
+            </a:solidFill>
+          </a:ln>
+        </p:spPr>
+        <p:style>
+          <a:lnRef idx="1">
+            <a:schemeClr val="accent1"/>
+          </a:lnRef>
+          <a:fillRef idx="3">
+            <a:schemeClr val="accent1"/>
+          </a:fillRef>
+          <a:effectRef idx="2">
+            <a:schemeClr val="accent1"/>
+          </a:effectRef>
+          <a:fontRef idx="minor">
+            <a:schemeClr val="lt1"/>
+          </a:fontRef>
+        </p:style>
+        <p:txBody>
+          <a:bodyPr rtlCol="0" anchor="ctr"/>
+          <a:lstStyle/>
+          <a:p/>
+        </p:txBody>
+      </p:sp>
+      <p:sp>
+        <p:nvSpPr>
+          <p:cNvPr id="7" name="Rounded Rectangle 6"/>
+          <p:cNvSpPr/>
+          <p:nvPr/>
+        </p:nvSpPr>
+        <p:spPr>
+          <a:xfrm>
+            <a:off x="4937759" y="1965960"/>
+            <a:ext cx="2606040" cy="3977639"/>
+          </a:xfrm>
+          <a:prstGeom prst="roundRect">
+            <a:avLst/>
+          </a:prstGeom>
+          <a:solidFill>
+            <a:srgbClr val="111B21"/>
+          </a:solidFill>
+          <a:ln w="6350">
+            <a:solidFill>
+              <a:srgbClr val="8696A0"/>
+            </a:solidFill>
+          </a:ln>
+        </p:spPr>
+        <p:style>
+          <a:lnRef idx="1">
+            <a:schemeClr val="accent1"/>
+          </a:lnRef>
+          <a:fillRef idx="3">
+            <a:schemeClr val="accent1"/>
+          </a:fillRef>
+          <a:effectRef idx="2">
+            <a:schemeClr val="accent1"/>
+          </a:effectRef>
+          <a:fontRef idx="minor">
+            <a:schemeClr val="lt1"/>
+          </a:fontRef>
+        </p:style>
+        <p:txBody>
+          <a:bodyPr rtlCol="0" anchor="ctr"/>
+          <a:lstStyle/>
+          <a:p/>
+        </p:txBody>
+      </p:sp>
+      <p:sp>
+        <p:nvSpPr>
+          <p:cNvPr id="8" name="Rounded Rectangle 7"/>
+          <p:cNvSpPr/>
+          <p:nvPr/>
+        </p:nvSpPr>
+        <p:spPr>
+          <a:xfrm>
+            <a:off x="7955279" y="1965960"/>
+            <a:ext cx="2240280" cy="3977639"/>
+          </a:xfrm>
+          <a:prstGeom prst="roundRect">
+            <a:avLst/>
+          </a:prstGeom>
+          <a:solidFill>
+            <a:srgbClr val="111B21"/>
+          </a:solidFill>
+          <a:ln w="6350">
+            <a:solidFill>
+              <a:srgbClr val="8696A0"/>
+            </a:solidFill>
+          </a:ln>
+        </p:spPr>
+        <p:style>
+          <a:lnRef idx="1">
+            <a:schemeClr val="accent1"/>
+          </a:lnRef>
+          <a:fillRef idx="3">
+            <a:schemeClr val="accent1"/>
+          </a:fillRef>
+          <a:effectRef idx="2">
+            <a:schemeClr val="accent1"/>
+          </a:effectRef>
+          <a:fontRef idx="minor">
+            <a:schemeClr val="lt1"/>
+          </a:fontRef>
+        </p:style>
+        <p:txBody>
+          <a:bodyPr rtlCol="0" anchor="ctr"/>
+          <a:lstStyle/>
+          <a:p/>
+        </p:txBody>
+      </p:sp>
+      <p:sp>
+        <p:nvSpPr>
+          <p:cNvPr id="9" name="Rounded Rectangle 8"/>
+          <p:cNvSpPr/>
+          <p:nvPr/>
+        </p:nvSpPr>
+        <p:spPr>
+          <a:xfrm>
+            <a:off x="10607040" y="1965960"/>
+            <a:ext cx="1920240" cy="3977639"/>
+          </a:xfrm>
+          <a:prstGeom prst="roundRect">
+            <a:avLst/>
+          </a:prstGeom>
+          <a:solidFill>
+            <a:srgbClr val="111B21"/>
+          </a:solidFill>
+          <a:ln w="6350">
+            <a:solidFill>
+              <a:srgbClr val="8696A0"/>
+            </a:solidFill>
+          </a:ln>
+        </p:spPr>
+        <p:style>
+          <a:lnRef idx="1">
+            <a:schemeClr val="accent1"/>
+          </a:lnRef>
+          <a:fillRef idx="3">
+            <a:schemeClr val="accent1"/>
+          </a:fillRef>
+          <a:effectRef idx="2">
+            <a:schemeClr val="accent1"/>
+          </a:effectRef>
+          <a:fontRef idx="minor">
+            <a:schemeClr val="lt1"/>
+          </a:fontRef>
+        </p:style>
+        <p:txBody>
+          <a:bodyPr rtlCol="0" anchor="ctr"/>
+          <a:lstStyle/>
+          <a:p/>
+        </p:txBody>
+      </p:sp>
+      <p:sp>
+        <p:nvSpPr>
+          <p:cNvPr id="10" name="Right Arrow 9"/>
+          <p:cNvSpPr/>
+          <p:nvPr/>
+        </p:nvSpPr>
+        <p:spPr>
+          <a:xfrm>
+            <a:off x="2423159" y="3771899"/>
+            <a:ext cx="320040" cy="365760"/>
+          </a:xfrm>
+          <a:prstGeom prst="rightArrow">
+            <a:avLst/>
+          </a:prstGeom>
+          <a:solidFill>
+            <a:srgbClr val="00A884"/>
+          </a:solidFill>
+          <a:ln>
+            <a:noFill/>
+          </a:ln>
+        </p:spPr>
+        <p:style>
+          <a:lnRef idx="1">
+            <a:schemeClr val="accent1"/>
+          </a:lnRef>
+          <a:fillRef idx="3">
+            <a:schemeClr val="accent1"/>
+          </a:fillRef>
+          <a:effectRef idx="2">
+            <a:schemeClr val="accent1"/>
+          </a:effectRef>
+          <a:fontRef idx="minor">
+            <a:schemeClr val="lt1"/>
+          </a:fontRef>
+        </p:style>
+        <p:txBody>
+          <a:bodyPr rtlCol="0" anchor="ctr"/>
+          <a:lstStyle/>
+          <a:p>
+            <a:pPr algn="ctr"/>
+          </a:p>
+        </p:txBody>
+      </p:sp>
+      <p:sp>
+        <p:nvSpPr>
+          <p:cNvPr id="11" name="Right Arrow 10"/>
+          <p:cNvSpPr/>
+          <p:nvPr/>
+        </p:nvSpPr>
+        <p:spPr>
+          <a:xfrm>
+            <a:off x="4571999" y="3771899"/>
+            <a:ext cx="320040" cy="365760"/>
+          </a:xfrm>
+          <a:prstGeom prst="rightArrow">
+            <a:avLst/>
+          </a:prstGeom>
+          <a:solidFill>
+            <a:srgbClr val="00A884"/>
+          </a:solidFill>
+          <a:ln>
+            <a:noFill/>
+          </a:ln>
+        </p:spPr>
+        <p:style>
+          <a:lnRef idx="1">
+            <a:schemeClr val="accent1"/>
+          </a:lnRef>
+          <a:fillRef idx="3">
+            <a:schemeClr val="accent1"/>
+          </a:fillRef>
+          <a:effectRef idx="2">
+            <a:schemeClr val="accent1"/>
+          </a:effectRef>
+          <a:fontRef idx="minor">
+            <a:schemeClr val="lt1"/>
+          </a:fontRef>
+        </p:style>
+        <p:txBody>
+          <a:bodyPr rtlCol="0" anchor="ctr"/>
+          <a:lstStyle/>
+          <a:p>
+            <a:pPr algn="ctr"/>
+          </a:p>
+        </p:txBody>
+      </p:sp>
+      <p:sp>
+        <p:nvSpPr>
+          <p:cNvPr id="12" name="Right Arrow 11"/>
+          <p:cNvSpPr/>
+          <p:nvPr/>
+        </p:nvSpPr>
+        <p:spPr>
+          <a:xfrm>
+            <a:off x="7589519" y="3771899"/>
+            <a:ext cx="320040" cy="365760"/>
+          </a:xfrm>
+          <a:prstGeom prst="rightArrow">
+            <a:avLst/>
+          </a:prstGeom>
+          <a:solidFill>
+            <a:srgbClr val="00A884"/>
+          </a:solidFill>
+          <a:ln>
+            <a:noFill/>
+          </a:ln>
+        </p:spPr>
+        <p:style>
+          <a:lnRef idx="1">
+            <a:schemeClr val="accent1"/>
+          </a:lnRef>
+          <a:fillRef idx="3">
+            <a:schemeClr val="accent1"/>
+          </a:fillRef>
+          <a:effectRef idx="2">
+            <a:schemeClr val="accent1"/>
+          </a:effectRef>
+          <a:fontRef idx="minor">
+            <a:schemeClr val="lt1"/>
+          </a:fontRef>
+        </p:style>
+        <p:txBody>
+          <a:bodyPr rtlCol="0" anchor="ctr"/>
+          <a:lstStyle/>
+          <a:p>
+            <a:pPr algn="ctr"/>
+          </a:p>
+        </p:txBody>
+      </p:sp>
+      <p:sp>
+        <p:nvSpPr>
+          <p:cNvPr id="13" name="Right Arrow 12"/>
+          <p:cNvSpPr/>
+          <p:nvPr/>
+        </p:nvSpPr>
+        <p:spPr>
+          <a:xfrm>
+            <a:off x="10241280" y="3771899"/>
+            <a:ext cx="320040" cy="365760"/>
+          </a:xfrm>
+          <a:prstGeom prst="rightArrow">
+            <a:avLst/>
+          </a:prstGeom>
+          <a:solidFill>
+            <a:srgbClr val="00A884"/>
+          </a:solidFill>
+          <a:ln>
+            <a:noFill/>
+          </a:ln>
+        </p:spPr>
+        <p:style>
+          <a:lnRef idx="1">
+            <a:schemeClr val="accent1"/>
+          </a:lnRef>
+          <a:fillRef idx="3">
+            <a:schemeClr val="accent1"/>
+          </a:fillRef>
+          <a:effectRef idx="2">
+            <a:schemeClr val="accent1"/>
+          </a:effectRef>
+          <a:fontRef idx="minor">
+            <a:schemeClr val="lt1"/>
+          </a:fontRef>
+        </p:style>
+        <p:txBody>
+          <a:bodyPr rtlCol="0" anchor="ctr"/>
+          <a:lstStyle/>
+          <a:p>
+            <a:pPr algn="ctr"/>
+          </a:p>
+        </p:txBody>
+      </p:sp>
+      <p:sp>
+        <p:nvSpPr>
+          <p:cNvPr id="14" name="TextBox 13"/>
           <p:cNvSpPr txBox="1"/>
           <p:nvPr/>
         </p:nvSpPr>
         <p:spPr>
           <a:xfrm>
-            <a:off x="548640" y="2560320"/>
-            <a:ext cx="5486400" cy="548640"/>
+            <a:off x="365760" y="2057400"/>
+            <a:ext cx="1920239" cy="320040"/>
           </a:xfrm>
           <a:prstGeom prst="rect">
             <a:avLst/>
@@ -6373,27 +8458,231 @@
           <a:p>
             <a:pPr algn="l"/>
             <a:r>
-              <a:rPr sz="1600" b="0">
-                <a:solidFill>
-                  <a:srgbClr val="8696A0"/>
-                </a:solidFill>
-                <a:latin typeface="Calibri"/>
-              </a:rPr>
-              <a:t>Generic AI gives the answer.</a:t>
-            </a:r>
-          </a:p>
-        </p:txBody>
-      </p:sp>
-      <p:sp>
-        <p:nvSpPr>
-          <p:cNvPr id="6" name="TextBox 5"/>
+              <a:rPr sz="1100" b="1">
+                <a:solidFill>
+                  <a:srgbClr val="9CFF8C"/>
+                </a:solidFill>
+                <a:latin typeface="Calibri"/>
+              </a:rPr>
+              <a:t>1 · Learner + Channel</a:t>
+            </a:r>
+          </a:p>
+        </p:txBody>
+      </p:sp>
+      <p:sp>
+        <p:nvSpPr>
+          <p:cNvPr id="15" name="Rounded Rectangle 14"/>
+          <p:cNvSpPr/>
+          <p:nvPr/>
+        </p:nvSpPr>
+        <p:spPr>
+          <a:xfrm>
+            <a:off x="411479" y="2468880"/>
+            <a:ext cx="1828799" cy="457200"/>
+          </a:xfrm>
+          <a:prstGeom prst="roundRect">
+            <a:avLst/>
+          </a:prstGeom>
+          <a:solidFill>
+            <a:srgbClr val="03110D"/>
+          </a:solidFill>
+          <a:ln>
+            <a:noFill/>
+          </a:ln>
+        </p:spPr>
+        <p:style>
+          <a:lnRef idx="1">
+            <a:schemeClr val="accent1"/>
+          </a:lnRef>
+          <a:fillRef idx="3">
+            <a:schemeClr val="accent1"/>
+          </a:fillRef>
+          <a:effectRef idx="2">
+            <a:schemeClr val="accent1"/>
+          </a:effectRef>
+          <a:fontRef idx="minor">
+            <a:schemeClr val="lt1"/>
+          </a:fontRef>
+        </p:style>
+        <p:txBody>
+          <a:bodyPr rtlCol="0" anchor="ctr" lIns="137160" rIns="137160"/>
+          <a:lstStyle/>
+          <a:p>
+            <a:pPr algn="ctr"/>
+            <a:r>
+              <a:rPr sz="1000" b="0">
+                <a:solidFill>
+                  <a:srgbClr val="E9EDEF"/>
+                </a:solidFill>
+              </a:rPr>
+              <a:t>📱 Smartphone learner (Thandi)</a:t>
+            </a:r>
+          </a:p>
+        </p:txBody>
+      </p:sp>
+      <p:sp>
+        <p:nvSpPr>
+          <p:cNvPr id="16" name="Rounded Rectangle 15"/>
+          <p:cNvSpPr/>
+          <p:nvPr/>
+        </p:nvSpPr>
+        <p:spPr>
+          <a:xfrm>
+            <a:off x="411479" y="3017520"/>
+            <a:ext cx="1828799" cy="457200"/>
+          </a:xfrm>
+          <a:prstGeom prst="roundRect">
+            <a:avLst/>
+          </a:prstGeom>
+          <a:solidFill>
+            <a:srgbClr val="03110D"/>
+          </a:solidFill>
+          <a:ln>
+            <a:noFill/>
+          </a:ln>
+        </p:spPr>
+        <p:style>
+          <a:lnRef idx="1">
+            <a:schemeClr val="accent1"/>
+          </a:lnRef>
+          <a:fillRef idx="3">
+            <a:schemeClr val="accent1"/>
+          </a:fillRef>
+          <a:effectRef idx="2">
+            <a:schemeClr val="accent1"/>
+          </a:effectRef>
+          <a:fontRef idx="minor">
+            <a:schemeClr val="lt1"/>
+          </a:fontRef>
+        </p:style>
+        <p:txBody>
+          <a:bodyPr rtlCol="0" anchor="ctr" lIns="137160" rIns="137160"/>
+          <a:lstStyle/>
+          <a:p>
+            <a:pPr algn="ctr"/>
+            <a:r>
+              <a:rPr sz="1000" b="0">
+                <a:solidFill>
+                  <a:srgbClr val="E9EDEF"/>
+                </a:solidFill>
+              </a:rPr>
+              <a:t>📞 Feature-phone learner (Lethabo)</a:t>
+            </a:r>
+          </a:p>
+        </p:txBody>
+      </p:sp>
+      <p:sp>
+        <p:nvSpPr>
+          <p:cNvPr id="17" name="Rounded Rectangle 16"/>
+          <p:cNvSpPr/>
+          <p:nvPr/>
+        </p:nvSpPr>
+        <p:spPr>
+          <a:xfrm>
+            <a:off x="411479" y="4114800"/>
+            <a:ext cx="1828799" cy="502920"/>
+          </a:xfrm>
+          <a:prstGeom prst="roundRect">
+            <a:avLst/>
+          </a:prstGeom>
+          <a:solidFill>
+            <a:srgbClr val="00A884"/>
+          </a:solidFill>
+          <a:ln>
+            <a:noFill/>
+          </a:ln>
+        </p:spPr>
+        <p:style>
+          <a:lnRef idx="1">
+            <a:schemeClr val="accent1"/>
+          </a:lnRef>
+          <a:fillRef idx="3">
+            <a:schemeClr val="accent1"/>
+          </a:fillRef>
+          <a:effectRef idx="2">
+            <a:schemeClr val="accent1"/>
+          </a:effectRef>
+          <a:fontRef idx="minor">
+            <a:schemeClr val="lt1"/>
+          </a:fontRef>
+        </p:style>
+        <p:txBody>
+          <a:bodyPr rtlCol="0" anchor="ctr" lIns="137160" rIns="137160"/>
+          <a:lstStyle/>
+          <a:p>
+            <a:pPr algn="ctr"/>
+            <a:r>
+              <a:rPr sz="1100" b="1">
+                <a:solidFill>
+                  <a:srgbClr val="03110D"/>
+                </a:solidFill>
+              </a:rPr>
+              <a:t>WhatsApp Cloud API</a:t>
+            </a:r>
+          </a:p>
+        </p:txBody>
+      </p:sp>
+      <p:sp>
+        <p:nvSpPr>
+          <p:cNvPr id="18" name="Rounded Rectangle 17"/>
+          <p:cNvSpPr/>
+          <p:nvPr/>
+        </p:nvSpPr>
+        <p:spPr>
+          <a:xfrm>
+            <a:off x="411479" y="4754879"/>
+            <a:ext cx="1828799" cy="502920"/>
+          </a:xfrm>
+          <a:prstGeom prst="roundRect">
+            <a:avLst/>
+          </a:prstGeom>
+          <a:solidFill>
+            <a:srgbClr val="FFB347"/>
+          </a:solidFill>
+          <a:ln>
+            <a:noFill/>
+          </a:ln>
+        </p:spPr>
+        <p:style>
+          <a:lnRef idx="1">
+            <a:schemeClr val="accent1"/>
+          </a:lnRef>
+          <a:fillRef idx="3">
+            <a:schemeClr val="accent1"/>
+          </a:fillRef>
+          <a:effectRef idx="2">
+            <a:schemeClr val="accent1"/>
+          </a:effectRef>
+          <a:fontRef idx="minor">
+            <a:schemeClr val="lt1"/>
+          </a:fontRef>
+        </p:style>
+        <p:txBody>
+          <a:bodyPr rtlCol="0" anchor="ctr" lIns="137160" rIns="137160"/>
+          <a:lstStyle/>
+          <a:p>
+            <a:pPr algn="ctr"/>
+            <a:r>
+              <a:rPr sz="1100" b="1">
+                <a:solidFill>
+                  <a:srgbClr val="03110D"/>
+                </a:solidFill>
+              </a:rPr>
+              <a:t>Africa's Talking USSD</a:t>
+            </a:r>
+          </a:p>
+        </p:txBody>
+      </p:sp>
+      <p:sp>
+        <p:nvSpPr>
+          <p:cNvPr id="19" name="TextBox 18"/>
           <p:cNvSpPr txBox="1"/>
           <p:nvPr/>
         </p:nvSpPr>
         <p:spPr>
           <a:xfrm>
-            <a:off x="6126480" y="2560320"/>
-            <a:ext cx="5486400" cy="548640"/>
+            <a:off x="2880359" y="2057400"/>
+            <a:ext cx="1554480" cy="320040"/>
           </a:xfrm>
           <a:prstGeom prst="rect">
             <a:avLst/>
@@ -6408,27 +8697,78 @@
           <a:p>
             <a:pPr algn="l"/>
             <a:r>
-              <a:rPr sz="1600" b="1">
+              <a:rPr sz="1100" b="1">
                 <a:solidFill>
                   <a:srgbClr val="9CFF8C"/>
                 </a:solidFill>
                 <a:latin typeface="Calibri"/>
               </a:rPr>
-              <a:t>We refuse to — pedagogy enforced in code, not in a prompt.</a:t>
-            </a:r>
-          </a:p>
-        </p:txBody>
-      </p:sp>
-      <p:sp>
-        <p:nvSpPr>
-          <p:cNvPr id="7" name="TextBox 6"/>
+              <a:t>2 · Public HTTPS</a:t>
+            </a:r>
+          </a:p>
+        </p:txBody>
+      </p:sp>
+      <p:sp>
+        <p:nvSpPr>
+          <p:cNvPr id="20" name="Rounded Rectangle 19"/>
+          <p:cNvSpPr/>
+          <p:nvPr/>
+        </p:nvSpPr>
+        <p:spPr>
+          <a:xfrm>
+            <a:off x="2880359" y="3017520"/>
+            <a:ext cx="1554480" cy="502920"/>
+          </a:xfrm>
+          <a:prstGeom prst="roundRect">
+            <a:avLst/>
+          </a:prstGeom>
+          <a:solidFill>
+            <a:srgbClr val="111B21"/>
+          </a:solidFill>
+          <a:ln>
+            <a:noFill/>
+          </a:ln>
+        </p:spPr>
+        <p:style>
+          <a:lnRef idx="1">
+            <a:schemeClr val="accent1"/>
+          </a:lnRef>
+          <a:fillRef idx="3">
+            <a:schemeClr val="accent1"/>
+          </a:fillRef>
+          <a:effectRef idx="2">
+            <a:schemeClr val="accent1"/>
+          </a:effectRef>
+          <a:fontRef idx="minor">
+            <a:schemeClr val="lt1"/>
+          </a:fontRef>
+        </p:style>
+        <p:txBody>
+          <a:bodyPr rtlCol="0" anchor="ctr" lIns="137160" rIns="137160"/>
+          <a:lstStyle/>
+          <a:p>
+            <a:pPr algn="ctr"/>
+            <a:r>
+              <a:rPr sz="1100" b="1">
+                <a:solidFill>
+                  <a:srgbClr val="9CFF8C"/>
+                </a:solidFill>
+              </a:rPr>
+              <a:t>Public HTTPS endpoint</a:t>
+            </a:r>
+          </a:p>
+        </p:txBody>
+      </p:sp>
+      <p:sp>
+        <p:nvSpPr>
+          <p:cNvPr id="21" name="TextBox 20"/>
           <p:cNvSpPr txBox="1"/>
           <p:nvPr/>
         </p:nvSpPr>
         <p:spPr>
           <a:xfrm>
-            <a:off x="548640" y="3246120"/>
-            <a:ext cx="5486400" cy="548640"/>
+            <a:off x="2880359" y="3611880"/>
+            <a:ext cx="1554480" cy="320040"/>
           </a:xfrm>
           <a:prstGeom prst="rect">
             <a:avLst/>
@@ -6441,29 +8781,29 @@
           </a:bodyPr>
           <a:lstStyle/>
           <a:p>
-            <a:pPr algn="l"/>
-            <a:r>
-              <a:rPr sz="1600" b="0">
+            <a:pPr algn="ctr"/>
+            <a:r>
+              <a:rPr sz="900" b="0">
                 <a:solidFill>
                   <a:srgbClr val="8696A0"/>
                 </a:solidFill>
                 <a:latin typeface="Calibri"/>
               </a:rPr>
-              <a:t>Generic AI marks right or wrong.</a:t>
-            </a:r>
-          </a:p>
-        </p:txBody>
-      </p:sp>
-      <p:sp>
-        <p:nvSpPr>
-          <p:cNvPr id="8" name="TextBox 7"/>
+              <a:t>Deployed on Dell AI Factory</a:t>
+            </a:r>
+          </a:p>
+        </p:txBody>
+      </p:sp>
+      <p:sp>
+        <p:nvSpPr>
+          <p:cNvPr id="22" name="TextBox 21"/>
           <p:cNvSpPr txBox="1"/>
           <p:nvPr/>
         </p:nvSpPr>
         <p:spPr>
           <a:xfrm>
-            <a:off x="6126480" y="3246120"/>
-            <a:ext cx="5486400" cy="548640"/>
+            <a:off x="2880359" y="4297679"/>
+            <a:ext cx="1554480" cy="1463040"/>
           </a:xfrm>
           <a:prstGeom prst="rect">
             <a:avLst/>
@@ -6476,29 +8816,49 @@
           </a:bodyPr>
           <a:lstStyle/>
           <a:p>
-            <a:pPr algn="l"/>
-            <a:r>
-              <a:rPr sz="1600" b="1">
-                <a:solidFill>
-                  <a:srgbClr val="9CFF8C"/>
-                </a:solidFill>
-                <a:latin typeface="Calibri"/>
-              </a:rPr>
-              <a:t>We diagnose the exact step where thinking broke + the misconception.</a:t>
-            </a:r>
-          </a:p>
-        </p:txBody>
-      </p:sp>
-      <p:sp>
-        <p:nvSpPr>
-          <p:cNvPr id="9" name="TextBox 8"/>
+            <a:pPr algn="l">
+              <a:spcBef>
+                <a:spcPts val="400"/>
+              </a:spcBef>
+            </a:pPr>
+            <a:r>
+              <a:rPr sz="1000" b="0">
+                <a:solidFill>
+                  <a:srgbClr val="E9EDEF"/>
+                </a:solidFill>
+                <a:latin typeface="Calibri"/>
+              </a:rPr>
+              <a:t>• Meta Webhook</a:t>
+            </a:r>
+          </a:p>
+          <a:p>
+            <a:pPr algn="l">
+              <a:spcBef>
+                <a:spcPts val="400"/>
+              </a:spcBef>
+            </a:pPr>
+            <a:r>
+              <a:rPr sz="1000" b="0">
+                <a:solidFill>
+                  <a:srgbClr val="E9EDEF"/>
+                </a:solidFill>
+                <a:latin typeface="Calibri"/>
+              </a:rPr>
+              <a:t>• USSD Callback</a:t>
+            </a:r>
+          </a:p>
+        </p:txBody>
+      </p:sp>
+      <p:sp>
+        <p:nvSpPr>
+          <p:cNvPr id="23" name="TextBox 22"/>
           <p:cNvSpPr txBox="1"/>
           <p:nvPr/>
         </p:nvSpPr>
         <p:spPr>
           <a:xfrm>
-            <a:off x="548640" y="3931920"/>
-            <a:ext cx="5486400" cy="548640"/>
+            <a:off x="5029199" y="2057400"/>
+            <a:ext cx="2423160" cy="320040"/>
           </a:xfrm>
           <a:prstGeom prst="rect">
             <a:avLst/>
@@ -6513,27 +8873,78 @@
           <a:p>
             <a:pPr algn="l"/>
             <a:r>
-              <a:rPr sz="1600" b="0">
-                <a:solidFill>
-                  <a:srgbClr val="8696A0"/>
-                </a:solidFill>
-                <a:latin typeface="Calibri"/>
-              </a:rPr>
-              <a:t>Generic AI knows everything.</a:t>
-            </a:r>
-          </a:p>
-        </p:txBody>
-      </p:sp>
-      <p:sp>
-        <p:nvSpPr>
-          <p:cNvPr id="10" name="TextBox 9"/>
+              <a:rPr sz="1100" b="1">
+                <a:solidFill>
+                  <a:srgbClr val="9CFF8C"/>
+                </a:solidFill>
+                <a:latin typeface="Calibri"/>
+              </a:rPr>
+              <a:t>3 · Tutor Engine</a:t>
+            </a:r>
+          </a:p>
+        </p:txBody>
+      </p:sp>
+      <p:sp>
+        <p:nvSpPr>
+          <p:cNvPr id="24" name="Rounded Rectangle 23"/>
+          <p:cNvSpPr/>
+          <p:nvPr/>
+        </p:nvSpPr>
+        <p:spPr>
+          <a:xfrm>
+            <a:off x="5166359" y="2468880"/>
+            <a:ext cx="2148840" cy="548640"/>
+          </a:xfrm>
+          <a:prstGeom prst="roundRect">
+            <a:avLst/>
+          </a:prstGeom>
+          <a:solidFill>
+            <a:srgbClr val="111B21"/>
+          </a:solidFill>
+          <a:ln>
+            <a:noFill/>
+          </a:ln>
+        </p:spPr>
+        <p:style>
+          <a:lnRef idx="1">
+            <a:schemeClr val="accent1"/>
+          </a:lnRef>
+          <a:fillRef idx="3">
+            <a:schemeClr val="accent1"/>
+          </a:fillRef>
+          <a:effectRef idx="2">
+            <a:schemeClr val="accent1"/>
+          </a:effectRef>
+          <a:fontRef idx="minor">
+            <a:schemeClr val="lt1"/>
+          </a:fontRef>
+        </p:style>
+        <p:txBody>
+          <a:bodyPr rtlCol="0" anchor="ctr" lIns="137160" rIns="137160"/>
+          <a:lstStyle/>
+          <a:p>
+            <a:pPr algn="ctr"/>
+            <a:r>
+              <a:rPr sz="1600" b="1">
+                <a:solidFill>
+                  <a:srgbClr val="9CFF8C"/>
+                </a:solidFill>
+              </a:rPr>
+              <a:t>Tutor Engine</a:t>
+            </a:r>
+          </a:p>
+        </p:txBody>
+      </p:sp>
+      <p:sp>
+        <p:nvSpPr>
+          <p:cNvPr id="25" name="TextBox 24"/>
           <p:cNvSpPr txBox="1"/>
           <p:nvPr/>
         </p:nvSpPr>
         <p:spPr>
           <a:xfrm>
-            <a:off x="6126480" y="3931920"/>
-            <a:ext cx="5486400" cy="548640"/>
+            <a:off x="5120639" y="3200400"/>
+            <a:ext cx="2240280" cy="2743200"/>
           </a:xfrm>
           <a:prstGeom prst="rect">
             <a:avLst/>
@@ -6546,29 +8957,81 @@
           </a:bodyPr>
           <a:lstStyle/>
           <a:p>
-            <a:pPr algn="l"/>
-            <a:r>
-              <a:rPr sz="1600" b="1">
-                <a:solidFill>
-                  <a:srgbClr val="9CFF8C"/>
-                </a:solidFill>
-                <a:latin typeface="Calibri"/>
-              </a:rPr>
-              <a:t>We are bounded to CAPS — auditable by DBE, editable by educators.</a:t>
-            </a:r>
-          </a:p>
-        </p:txBody>
-      </p:sp>
-      <p:sp>
-        <p:nvSpPr>
-          <p:cNvPr id="11" name="TextBox 10"/>
+            <a:pPr algn="l">
+              <a:spcBef>
+                <a:spcPts val="600"/>
+              </a:spcBef>
+            </a:pPr>
+            <a:r>
+              <a:rPr sz="1100">
+                <a:solidFill>
+                  <a:srgbClr val="E9EDEF"/>
+                </a:solidFill>
+                <a:latin typeface="Calibri"/>
+              </a:rPr>
+              <a:t>• Channel-agnostic orchestrator</a:t>
+            </a:r>
+          </a:p>
+          <a:p>
+            <a:pPr algn="l">
+              <a:spcBef>
+                <a:spcPts val="600"/>
+              </a:spcBef>
+            </a:pPr>
+            <a:r>
+              <a:rPr sz="1100">
+                <a:solidFill>
+                  <a:srgbClr val="E9EDEF"/>
+                </a:solidFill>
+                <a:latin typeface="Calibri"/>
+              </a:rPr>
+              <a:t>• Session state (Redis in production)</a:t>
+            </a:r>
+          </a:p>
+          <a:p>
+            <a:pPr algn="l">
+              <a:spcBef>
+                <a:spcPts val="600"/>
+              </a:spcBef>
+            </a:pPr>
+            <a:r>
+              <a:rPr sz="1100">
+                <a:solidFill>
+                  <a:srgbClr val="E9EDEF"/>
+                </a:solidFill>
+                <a:latin typeface="Calibri"/>
+              </a:rPr>
+              <a:t>• Language routing + i18n</a:t>
+            </a:r>
+          </a:p>
+          <a:p>
+            <a:pPr algn="l">
+              <a:spcBef>
+                <a:spcPts val="600"/>
+              </a:spcBef>
+            </a:pPr>
+            <a:r>
+              <a:rPr sz="1100">
+                <a:solidFill>
+                  <a:srgbClr val="E9EDEF"/>
+                </a:solidFill>
+                <a:latin typeface="Calibri"/>
+              </a:rPr>
+              <a:t>• Past-paper mode + NSC marking</a:t>
+            </a:r>
+          </a:p>
+        </p:txBody>
+      </p:sp>
+      <p:sp>
+        <p:nvSpPr>
+          <p:cNvPr id="26" name="TextBox 25"/>
           <p:cNvSpPr txBox="1"/>
           <p:nvPr/>
         </p:nvSpPr>
         <p:spPr>
           <a:xfrm>
-            <a:off x="548640" y="4617720"/>
-            <a:ext cx="5486400" cy="548640"/>
+            <a:off x="8046719" y="2057400"/>
+            <a:ext cx="2057400" cy="320040"/>
           </a:xfrm>
           <a:prstGeom prst="rect">
             <a:avLst/>
@@ -6583,27 +9046,231 @@
           <a:p>
             <a:pPr algn="l"/>
             <a:r>
-              <a:rPr sz="1600" b="0">
-                <a:solidFill>
-                  <a:srgbClr val="8696A0"/>
-                </a:solidFill>
-                <a:latin typeface="Calibri"/>
-              </a:rPr>
-              <a:t>Generic AI needs a smartphone.</a:t>
-            </a:r>
-          </a:p>
-        </p:txBody>
-      </p:sp>
-      <p:sp>
-        <p:nvSpPr>
-          <p:cNvPr id="12" name="TextBox 11"/>
+              <a:rPr sz="1100" b="1">
+                <a:solidFill>
+                  <a:srgbClr val="9CFF8C"/>
+                </a:solidFill>
+                <a:latin typeface="Calibri"/>
+              </a:rPr>
+              <a:t>4 · AI Providers</a:t>
+            </a:r>
+          </a:p>
+        </p:txBody>
+      </p:sp>
+      <p:sp>
+        <p:nvSpPr>
+          <p:cNvPr id="27" name="Rounded Rectangle 26"/>
+          <p:cNvSpPr/>
+          <p:nvPr/>
+        </p:nvSpPr>
+        <p:spPr>
+          <a:xfrm>
+            <a:off x="8046719" y="2468880"/>
+            <a:ext cx="2057400" cy="685800"/>
+          </a:xfrm>
+          <a:prstGeom prst="roundRect">
+            <a:avLst/>
+          </a:prstGeom>
+          <a:solidFill>
+            <a:srgbClr val="111B21"/>
+          </a:solidFill>
+          <a:ln>
+            <a:noFill/>
+          </a:ln>
+        </p:spPr>
+        <p:style>
+          <a:lnRef idx="1">
+            <a:schemeClr val="accent1"/>
+          </a:lnRef>
+          <a:fillRef idx="3">
+            <a:schemeClr val="accent1"/>
+          </a:fillRef>
+          <a:effectRef idx="2">
+            <a:schemeClr val="accent1"/>
+          </a:effectRef>
+          <a:fontRef idx="minor">
+            <a:schemeClr val="lt1"/>
+          </a:fontRef>
+        </p:style>
+        <p:txBody>
+          <a:bodyPr rtlCol="0" anchor="ctr" lIns="137160" rIns="137160"/>
+          <a:lstStyle/>
+          <a:p>
+            <a:pPr algn="ctr"/>
+            <a:r>
+              <a:rPr sz="900" b="0">
+                <a:solidFill>
+                  <a:srgbClr val="E9EDEF"/>
+                </a:solidFill>
+              </a:rPr>
+              <a:t>🧠 Reasoning LLM  ·  Dell NIM (Llama / Qwen)</a:t>
+            </a:r>
+          </a:p>
+        </p:txBody>
+      </p:sp>
+      <p:sp>
+        <p:nvSpPr>
+          <p:cNvPr id="28" name="Rounded Rectangle 27"/>
+          <p:cNvSpPr/>
+          <p:nvPr/>
+        </p:nvSpPr>
+        <p:spPr>
+          <a:xfrm>
+            <a:off x="8046719" y="3246120"/>
+            <a:ext cx="2057400" cy="685800"/>
+          </a:xfrm>
+          <a:prstGeom prst="roundRect">
+            <a:avLst/>
+          </a:prstGeom>
+          <a:solidFill>
+            <a:srgbClr val="111B21"/>
+          </a:solidFill>
+          <a:ln>
+            <a:noFill/>
+          </a:ln>
+        </p:spPr>
+        <p:style>
+          <a:lnRef idx="1">
+            <a:schemeClr val="accent1"/>
+          </a:lnRef>
+          <a:fillRef idx="3">
+            <a:schemeClr val="accent1"/>
+          </a:fillRef>
+          <a:effectRef idx="2">
+            <a:schemeClr val="accent1"/>
+          </a:effectRef>
+          <a:fontRef idx="minor">
+            <a:schemeClr val="lt1"/>
+          </a:fontRef>
+        </p:style>
+        <p:txBody>
+          <a:bodyPr rtlCol="0" anchor="ctr" lIns="137160" rIns="137160"/>
+          <a:lstStyle/>
+          <a:p>
+            <a:pPr algn="ctr"/>
+            <a:r>
+              <a:rPr sz="900" b="0">
+                <a:solidFill>
+                  <a:srgbClr val="E9EDEF"/>
+                </a:solidFill>
+              </a:rPr>
+              <a:t>👁️ Vision VLM  ·  Dell NIM (Qwen2-VL) — handwriting</a:t>
+            </a:r>
+          </a:p>
+        </p:txBody>
+      </p:sp>
+      <p:sp>
+        <p:nvSpPr>
+          <p:cNvPr id="29" name="Rounded Rectangle 28"/>
+          <p:cNvSpPr/>
+          <p:nvPr/>
+        </p:nvSpPr>
+        <p:spPr>
+          <a:xfrm>
+            <a:off x="8046719" y="4023360"/>
+            <a:ext cx="2057400" cy="685800"/>
+          </a:xfrm>
+          <a:prstGeom prst="roundRect">
+            <a:avLst/>
+          </a:prstGeom>
+          <a:solidFill>
+            <a:srgbClr val="111B21"/>
+          </a:solidFill>
+          <a:ln>
+            <a:noFill/>
+          </a:ln>
+        </p:spPr>
+        <p:style>
+          <a:lnRef idx="1">
+            <a:schemeClr val="accent1"/>
+          </a:lnRef>
+          <a:fillRef idx="3">
+            <a:schemeClr val="accent1"/>
+          </a:fillRef>
+          <a:effectRef idx="2">
+            <a:schemeClr val="accent1"/>
+          </a:effectRef>
+          <a:fontRef idx="minor">
+            <a:schemeClr val="lt1"/>
+          </a:fontRef>
+        </p:style>
+        <p:txBody>
+          <a:bodyPr rtlCol="0" anchor="ctr" lIns="137160" rIns="137160"/>
+          <a:lstStyle/>
+          <a:p>
+            <a:pPr algn="ctr"/>
+            <a:r>
+              <a:rPr sz="900" b="0">
+                <a:solidFill>
+                  <a:srgbClr val="E9EDEF"/>
+                </a:solidFill>
+              </a:rPr>
+              <a:t>🌐 Translation  ·  Dell LLM (11 SA languages)</a:t>
+            </a:r>
+          </a:p>
+        </p:txBody>
+      </p:sp>
+      <p:sp>
+        <p:nvSpPr>
+          <p:cNvPr id="30" name="Rounded Rectangle 29"/>
+          <p:cNvSpPr/>
+          <p:nvPr/>
+        </p:nvSpPr>
+        <p:spPr>
+          <a:xfrm>
+            <a:off x="8046719" y="4800600"/>
+            <a:ext cx="2057400" cy="685800"/>
+          </a:xfrm>
+          <a:prstGeom prst="roundRect">
+            <a:avLst/>
+          </a:prstGeom>
+          <a:solidFill>
+            <a:srgbClr val="111B21"/>
+          </a:solidFill>
+          <a:ln>
+            <a:noFill/>
+          </a:ln>
+        </p:spPr>
+        <p:style>
+          <a:lnRef idx="1">
+            <a:schemeClr val="accent1"/>
+          </a:lnRef>
+          <a:fillRef idx="3">
+            <a:schemeClr val="accent1"/>
+          </a:fillRef>
+          <a:effectRef idx="2">
+            <a:schemeClr val="accent1"/>
+          </a:effectRef>
+          <a:fontRef idx="minor">
+            <a:schemeClr val="lt1"/>
+          </a:fontRef>
+        </p:style>
+        <p:txBody>
+          <a:bodyPr rtlCol="0" anchor="ctr" lIns="137160" rIns="137160"/>
+          <a:lstStyle/>
+          <a:p>
+            <a:pPr algn="ctr"/>
+            <a:r>
+              <a:rPr sz="900" b="0">
+                <a:solidFill>
+                  <a:srgbClr val="E9EDEF"/>
+                </a:solidFill>
+              </a:rPr>
+              <a:t>📚 Verified maths + memos  ·  deterministic code</a:t>
+            </a:r>
+          </a:p>
+        </p:txBody>
+      </p:sp>
+      <p:sp>
+        <p:nvSpPr>
+          <p:cNvPr id="31" name="TextBox 30"/>
           <p:cNvSpPr txBox="1"/>
           <p:nvPr/>
         </p:nvSpPr>
         <p:spPr>
           <a:xfrm>
-            <a:off x="6126480" y="4617720"/>
-            <a:ext cx="5486400" cy="548640"/>
+            <a:off x="10698480" y="2057400"/>
+            <a:ext cx="1737360" cy="320040"/>
           </a:xfrm>
           <a:prstGeom prst="rect">
             <a:avLst/>
@@ -6618,27 +9285,78 @@
           <a:p>
             <a:pPr algn="l"/>
             <a:r>
-              <a:rPr sz="1600" b="1">
+              <a:rPr sz="1100" b="1">
                 <a:solidFill>
                   <a:srgbClr val="9CFF8C"/>
                 </a:solidFill>
                 <a:latin typeface="Calibri"/>
               </a:rPr>
-              <a:t>USSD reaches feature phones. 5-7M SA learners Meta cannot serve.</a:t>
-            </a:r>
-          </a:p>
-        </p:txBody>
-      </p:sp>
-      <p:sp>
-        <p:nvSpPr>
-          <p:cNvPr id="13" name="TextBox 12"/>
+              <a:t>5 · Knowledge Base</a:t>
+            </a:r>
+          </a:p>
+        </p:txBody>
+      </p:sp>
+      <p:sp>
+        <p:nvSpPr>
+          <p:cNvPr id="32" name="Rounded Rectangle 31"/>
+          <p:cNvSpPr/>
+          <p:nvPr/>
+        </p:nvSpPr>
+        <p:spPr>
+          <a:xfrm>
+            <a:off x="10698480" y="2468880"/>
+            <a:ext cx="1737360" cy="502920"/>
+          </a:xfrm>
+          <a:prstGeom prst="roundRect">
+            <a:avLst/>
+          </a:prstGeom>
+          <a:solidFill>
+            <a:srgbClr val="111B21"/>
+          </a:solidFill>
+          <a:ln>
+            <a:noFill/>
+          </a:ln>
+        </p:spPr>
+        <p:style>
+          <a:lnRef idx="1">
+            <a:schemeClr val="accent1"/>
+          </a:lnRef>
+          <a:fillRef idx="3">
+            <a:schemeClr val="accent1"/>
+          </a:fillRef>
+          <a:effectRef idx="2">
+            <a:schemeClr val="accent1"/>
+          </a:effectRef>
+          <a:fontRef idx="minor">
+            <a:schemeClr val="lt1"/>
+          </a:fontRef>
+        </p:style>
+        <p:txBody>
+          <a:bodyPr rtlCol="0" anchor="ctr" lIns="137160" rIns="137160"/>
+          <a:lstStyle/>
+          <a:p>
+            <a:pPr algn="ctr"/>
+            <a:r>
+              <a:rPr sz="1100" b="1">
+                <a:solidFill>
+                  <a:srgbClr val="9CFF8C"/>
+                </a:solidFill>
+              </a:rPr>
+              <a:t>Public + curated</a:t>
+            </a:r>
+          </a:p>
+        </p:txBody>
+      </p:sp>
+      <p:sp>
+        <p:nvSpPr>
+          <p:cNvPr id="33" name="TextBox 32"/>
           <p:cNvSpPr txBox="1"/>
           <p:nvPr/>
         </p:nvSpPr>
         <p:spPr>
           <a:xfrm>
-            <a:off x="548640" y="5303520"/>
-            <a:ext cx="5486400" cy="548640"/>
+            <a:off x="10698480" y="3108960"/>
+            <a:ext cx="1737360" cy="2743200"/>
           </a:xfrm>
           <a:prstGeom prst="rect">
             <a:avLst/>
@@ -6651,29 +9369,97 @@
           </a:bodyPr>
           <a:lstStyle/>
           <a:p>
-            <a:pPr algn="l"/>
-            <a:r>
-              <a:rPr sz="1600" b="0">
-                <a:solidFill>
-                  <a:srgbClr val="8696A0"/>
-                </a:solidFill>
-                <a:latin typeface="Calibri"/>
-              </a:rPr>
-              <a:t>Generic AI's data leaves SA.</a:t>
-            </a:r>
-          </a:p>
-        </p:txBody>
-      </p:sp>
-      <p:sp>
-        <p:nvSpPr>
-          <p:cNvPr id="14" name="TextBox 13"/>
+            <a:pPr algn="l">
+              <a:spcBef>
+                <a:spcPts val="400"/>
+              </a:spcBef>
+            </a:pPr>
+            <a:r>
+              <a:rPr sz="900">
+                <a:solidFill>
+                  <a:srgbClr val="E9EDEF"/>
+                </a:solidFill>
+                <a:latin typeface="Calibri"/>
+              </a:rPr>
+              <a:t>• CAPS Mathematics — DBE education.gov.za</a:t>
+            </a:r>
+          </a:p>
+          <a:p>
+            <a:pPr algn="l">
+              <a:spcBef>
+                <a:spcPts val="400"/>
+              </a:spcBef>
+            </a:pPr>
+            <a:r>
+              <a:rPr sz="900">
+                <a:solidFill>
+                  <a:srgbClr val="E9EDEF"/>
+                </a:solidFill>
+                <a:latin typeface="Calibri"/>
+              </a:rPr>
+              <a:t>• NSC past papers + memos — DBE archives</a:t>
+            </a:r>
+          </a:p>
+          <a:p>
+            <a:pPr algn="l">
+              <a:spcBef>
+                <a:spcPts val="400"/>
+              </a:spcBef>
+            </a:pPr>
+            <a:r>
+              <a:rPr sz="900">
+                <a:solidFill>
+                  <a:srgbClr val="E9EDEF"/>
+                </a:solidFill>
+                <a:latin typeface="Calibri"/>
+              </a:rPr>
+              <a:t>• Provincial ATPs — WCED, GP, KZN, FS, LP, NW</a:t>
+            </a:r>
+          </a:p>
+          <a:p>
+            <a:pPr algn="l">
+              <a:spcBef>
+                <a:spcPts val="400"/>
+              </a:spcBef>
+            </a:pPr>
+            <a:r>
+              <a:rPr sz="900">
+                <a:solidFill>
+                  <a:srgbClr val="E9EDEF"/>
+                </a:solidFill>
+                <a:latin typeface="Calibri"/>
+              </a:rPr>
+              <a:t>• Siyavula textbooks (CC-BY optional)</a:t>
+            </a:r>
+          </a:p>
+          <a:p>
+            <a:pPr algn="l">
+              <a:spcBef>
+                <a:spcPts val="400"/>
+              </a:spcBef>
+            </a:pPr>
+            <a:r>
+              <a:rPr sz="900">
+                <a:solidFill>
+                  <a:srgbClr val="E9EDEF"/>
+                </a:solidFill>
+                <a:latin typeface="Calibri"/>
+              </a:rPr>
+              <a:t>• Educator advisory board</a:t>
+            </a:r>
+          </a:p>
+        </p:txBody>
+      </p:sp>
+      <p:sp>
+        <p:nvSpPr>
+          <p:cNvPr id="34" name="TextBox 33"/>
           <p:cNvSpPr txBox="1"/>
           <p:nvPr/>
         </p:nvSpPr>
         <p:spPr>
           <a:xfrm>
-            <a:off x="6126480" y="5303520"/>
-            <a:ext cx="5486400" cy="548640"/>
+            <a:off x="548640" y="6172200"/>
+            <a:ext cx="11064240" cy="365760"/>
           </a:xfrm>
           <a:prstGeom prst="rect">
             <a:avLst/>
@@ -6686,15 +9472,15 @@
           </a:bodyPr>
           <a:lstStyle/>
           <a:p>
-            <a:pPr algn="l"/>
-            <a:r>
-              <a:rPr sz="1600" b="1">
-                <a:solidFill>
-                  <a:srgbClr val="9CFF8C"/>
-                </a:solidFill>
-                <a:latin typeface="Calibri"/>
-              </a:rPr>
-              <a:t>We run on Dell AI Factory in country. POPIA-aligned. Sovereign.</a:t>
+            <a:pPr algn="ctr"/>
+            <a:r>
+              <a:rPr sz="1200" b="1">
+                <a:solidFill>
+                  <a:srgbClr val="8696A0"/>
+                </a:solidFill>
+                <a:latin typeface="Calibri"/>
+              </a:rPr>
+              <a:t>All data stays in South Africa  ·  POPIA-aligned  ·  No conversation ever trains a foreign model</a:t>
             </a:r>
           </a:p>
         </p:txBody>
@@ -6733,8 +9519,8 @@
         </p:nvSpPr>
         <p:spPr>
           <a:xfrm>
-            <a:off x="548640" y="457200"/>
-            <a:ext cx="11064240" cy="548640"/>
+            <a:off x="548640" y="365760"/>
+            <a:ext cx="11064240" cy="457200"/>
           </a:xfrm>
           <a:prstGeom prst="rect">
             <a:avLst/>
@@ -6751,11 +9537,11 @@
             <a:r>
               <a:rPr sz="1400" b="1">
                 <a:solidFill>
-                  <a:srgbClr val="FFB347"/>
-                </a:solidFill>
-                <a:latin typeface="Calibri"/>
-              </a:rPr>
-              <a:t>Will it work?</a:t>
+                  <a:srgbClr val="00A884"/>
+                </a:solidFill>
+                <a:latin typeface="Calibri"/>
+              </a:rPr>
+              <a:t>Demo flow</a:t>
             </a:r>
           </a:p>
         </p:txBody>
@@ -6768,8 +9554,8 @@
         </p:nvSpPr>
         <p:spPr>
           <a:xfrm>
-            <a:off x="548640" y="914400"/>
-            <a:ext cx="11064240" cy="914400"/>
+            <a:off x="548640" y="777240"/>
+            <a:ext cx="11064240" cy="640080"/>
           </a:xfrm>
           <a:prstGeom prst="rect">
             <a:avLst/>
@@ -6784,13 +9570,13 @@
           <a:p>
             <a:pPr algn="l"/>
             <a:r>
-              <a:rPr sz="3200" b="1">
+              <a:rPr sz="2600" b="1">
                 <a:solidFill>
                   <a:srgbClr val="FFFFFF"/>
                 </a:solidFill>
                 <a:latin typeface="Calibri"/>
               </a:rPr>
-              <a:t>Yes — as a complement, not a replacement.</a:t>
+              <a:t>One learner journey. Six screens. Every phone.</a:t>
             </a:r>
           </a:p>
         </p:txBody>
@@ -6803,10 +9589,334 @@
         </p:nvSpPr>
         <p:spPr>
           <a:xfrm>
-            <a:off x="548640" y="2011680"/>
+            <a:off x="548640" y="1600200"/>
             <a:ext cx="3657600" cy="50800"/>
           </a:xfrm>
           <a:prstGeom prst="rect">
+            <a:avLst/>
+          </a:prstGeom>
+          <a:solidFill>
+            <a:srgbClr val="00A884"/>
+          </a:solidFill>
+          <a:ln>
+            <a:noFill/>
+          </a:ln>
+        </p:spPr>
+        <p:style>
+          <a:lnRef idx="1">
+            <a:schemeClr val="accent1"/>
+          </a:lnRef>
+          <a:fillRef idx="3">
+            <a:schemeClr val="accent1"/>
+          </a:fillRef>
+          <a:effectRef idx="2">
+            <a:schemeClr val="accent1"/>
+          </a:effectRef>
+          <a:fontRef idx="minor">
+            <a:schemeClr val="lt1"/>
+          </a:fontRef>
+        </p:style>
+        <p:txBody>
+          <a:bodyPr rtlCol="0" anchor="ctr"/>
+          <a:lstStyle/>
+          <a:p>
+            <a:pPr algn="ctr"/>
+          </a:p>
+        </p:txBody>
+      </p:sp>
+      <p:sp>
+        <p:nvSpPr>
+          <p:cNvPr id="5" name="Oval 4"/>
+          <p:cNvSpPr/>
+          <p:nvPr/>
+        </p:nvSpPr>
+        <p:spPr>
+          <a:xfrm>
+            <a:off x="859536" y="1874519"/>
+            <a:ext cx="384048" cy="384048"/>
+          </a:xfrm>
+          <a:prstGeom prst="ellipse">
+            <a:avLst/>
+          </a:prstGeom>
+          <a:solidFill>
+            <a:srgbClr val="00A884"/>
+          </a:solidFill>
+          <a:ln>
+            <a:noFill/>
+          </a:ln>
+        </p:spPr>
+        <p:style>
+          <a:lnRef idx="1">
+            <a:schemeClr val="accent1"/>
+          </a:lnRef>
+          <a:fillRef idx="3">
+            <a:schemeClr val="accent1"/>
+          </a:fillRef>
+          <a:effectRef idx="2">
+            <a:schemeClr val="accent1"/>
+          </a:effectRef>
+          <a:fontRef idx="minor">
+            <a:schemeClr val="lt1"/>
+          </a:fontRef>
+        </p:style>
+        <p:txBody>
+          <a:bodyPr rtlCol="0" anchor="ctr" lIns="18288" rIns="18288" tIns="18288" bIns="18288"/>
+          <a:lstStyle/>
+          <a:p>
+            <a:pPr algn="ctr"/>
+            <a:r>
+              <a:rPr sz="1400" b="1">
+                <a:solidFill>
+                  <a:srgbClr val="03110D"/>
+                </a:solidFill>
+                <a:latin typeface="Calibri"/>
+              </a:rPr>
+              <a:t>1</a:t>
+            </a:r>
+          </a:p>
+        </p:txBody>
+      </p:sp>
+      <p:sp>
+        <p:nvSpPr>
+          <p:cNvPr id="6" name="Rounded Rectangle 5"/>
+          <p:cNvSpPr/>
+          <p:nvPr/>
+        </p:nvSpPr>
+        <p:spPr>
+          <a:xfrm>
+            <a:off x="182880" y="2331720"/>
+            <a:ext cx="1737360" cy="2926080"/>
+          </a:xfrm>
+          <a:prstGeom prst="roundRect">
+            <a:avLst/>
+          </a:prstGeom>
+          <a:solidFill>
+            <a:srgbClr val="03110D"/>
+          </a:solidFill>
+          <a:ln w="19050">
+            <a:solidFill>
+              <a:srgbClr val="00A884"/>
+            </a:solidFill>
+          </a:ln>
+        </p:spPr>
+        <p:style>
+          <a:lnRef idx="1">
+            <a:schemeClr val="accent1"/>
+          </a:lnRef>
+          <a:fillRef idx="3">
+            <a:schemeClr val="accent1"/>
+          </a:fillRef>
+          <a:effectRef idx="2">
+            <a:schemeClr val="accent1"/>
+          </a:effectRef>
+          <a:fontRef idx="minor">
+            <a:schemeClr val="lt1"/>
+          </a:fontRef>
+        </p:style>
+        <p:txBody>
+          <a:bodyPr rtlCol="0" anchor="ctr"/>
+          <a:lstStyle/>
+          <a:p/>
+        </p:txBody>
+      </p:sp>
+      <p:sp>
+        <p:nvSpPr>
+          <p:cNvPr id="7" name="Rounded Rectangle 6"/>
+          <p:cNvSpPr/>
+          <p:nvPr/>
+        </p:nvSpPr>
+        <p:spPr>
+          <a:xfrm>
+            <a:off x="320040" y="2468879"/>
+            <a:ext cx="1463039" cy="320040"/>
+          </a:xfrm>
+          <a:prstGeom prst="roundRect">
+            <a:avLst/>
+          </a:prstGeom>
+          <a:solidFill>
+            <a:srgbClr val="00A884"/>
+          </a:solidFill>
+          <a:ln>
+            <a:noFill/>
+          </a:ln>
+        </p:spPr>
+        <p:style>
+          <a:lnRef idx="1">
+            <a:schemeClr val="accent1"/>
+          </a:lnRef>
+          <a:fillRef idx="3">
+            <a:schemeClr val="accent1"/>
+          </a:fillRef>
+          <a:effectRef idx="2">
+            <a:schemeClr val="accent1"/>
+          </a:effectRef>
+          <a:fontRef idx="minor">
+            <a:schemeClr val="lt1"/>
+          </a:fontRef>
+        </p:style>
+        <p:txBody>
+          <a:bodyPr rtlCol="0" anchor="ctr" lIns="137160" rIns="137160"/>
+          <a:lstStyle/>
+          <a:p>
+            <a:pPr algn="ctr"/>
+            <a:r>
+              <a:rPr sz="1000" b="1">
+                <a:solidFill>
+                  <a:srgbClr val="03110D"/>
+                </a:solidFill>
+              </a:rPr>
+              <a:t>CHOOSE</a:t>
+            </a:r>
+          </a:p>
+        </p:txBody>
+      </p:sp>
+      <p:sp>
+        <p:nvSpPr>
+          <p:cNvPr id="8" name="TextBox 7"/>
+          <p:cNvSpPr txBox="1"/>
+          <p:nvPr/>
+        </p:nvSpPr>
+        <p:spPr>
+          <a:xfrm>
+            <a:off x="365760" y="2926079"/>
+            <a:ext cx="1371600" cy="2148840"/>
+          </a:xfrm>
+          <a:prstGeom prst="rect">
+            <a:avLst/>
+          </a:prstGeom>
+          <a:noFill/>
+        </p:spPr>
+        <p:txBody>
+          <a:bodyPr wrap="square">
+            <a:spAutoFit/>
+          </a:bodyPr>
+          <a:lstStyle/>
+          <a:p>
+            <a:pPr algn="l">
+              <a:spcBef>
+                <a:spcPts val="200"/>
+              </a:spcBef>
+            </a:pPr>
+            <a:r>
+              <a:rPr sz="1000" b="0">
+                <a:solidFill>
+                  <a:srgbClr val="9CFF8C"/>
+                </a:solidFill>
+                <a:latin typeface="Consolas"/>
+              </a:rPr>
+              <a:t>LANG:</a:t>
+            </a:r>
+          </a:p>
+          <a:p>
+            <a:pPr algn="l">
+              <a:spcBef>
+                <a:spcPts val="200"/>
+              </a:spcBef>
+            </a:pPr>
+            <a:r>
+              <a:rPr sz="1000" b="0">
+                <a:solidFill>
+                  <a:srgbClr val="9CFF8C"/>
+                </a:solidFill>
+                <a:latin typeface="Consolas"/>
+              </a:rPr>
+              <a:t>&gt; Sepedi</a:t>
+            </a:r>
+          </a:p>
+          <a:p>
+            <a:pPr algn="l">
+              <a:spcBef>
+                <a:spcPts val="200"/>
+              </a:spcBef>
+            </a:pPr>
+            <a:r>
+              <a:rPr sz="1000" b="0">
+                <a:solidFill>
+                  <a:srgbClr val="9CFF8C"/>
+                </a:solidFill>
+                <a:latin typeface="Consolas"/>
+              </a:rPr>
+              <a:t/>
+            </a:r>
+          </a:p>
+          <a:p>
+            <a:pPr algn="l">
+              <a:spcBef>
+                <a:spcPts val="200"/>
+              </a:spcBef>
+            </a:pPr>
+            <a:r>
+              <a:rPr sz="1000" b="0">
+                <a:solidFill>
+                  <a:srgbClr val="9CFF8C"/>
+                </a:solidFill>
+                <a:latin typeface="Consolas"/>
+              </a:rPr>
+              <a:t>GRADE:</a:t>
+            </a:r>
+          </a:p>
+          <a:p>
+            <a:pPr algn="l">
+              <a:spcBef>
+                <a:spcPts val="200"/>
+              </a:spcBef>
+            </a:pPr>
+            <a:r>
+              <a:rPr sz="1000" b="0">
+                <a:solidFill>
+                  <a:srgbClr val="9CFF8C"/>
+                </a:solidFill>
+                <a:latin typeface="Consolas"/>
+              </a:rPr>
+              <a:t>&gt; 11</a:t>
+            </a:r>
+          </a:p>
+          <a:p>
+            <a:pPr algn="l">
+              <a:spcBef>
+                <a:spcPts val="200"/>
+              </a:spcBef>
+            </a:pPr>
+            <a:r>
+              <a:rPr sz="1000" b="0">
+                <a:solidFill>
+                  <a:srgbClr val="9CFF8C"/>
+                </a:solidFill>
+                <a:latin typeface="Consolas"/>
+              </a:rPr>
+              <a:t/>
+            </a:r>
+          </a:p>
+          <a:p>
+            <a:pPr algn="l">
+              <a:spcBef>
+                <a:spcPts val="200"/>
+              </a:spcBef>
+            </a:pPr>
+            <a:r>
+              <a:rPr sz="1000" b="0">
+                <a:solidFill>
+                  <a:srgbClr val="9CFF8C"/>
+                </a:solidFill>
+                <a:latin typeface="Consolas"/>
+              </a:rPr>
+              <a:t>[ Continue ▶ ]</a:t>
+            </a:r>
+          </a:p>
+        </p:txBody>
+      </p:sp>
+      <p:sp>
+        <p:nvSpPr>
+          <p:cNvPr id="9" name="Oval 8"/>
+          <p:cNvSpPr/>
+          <p:nvPr/>
+        </p:nvSpPr>
+        <p:spPr>
+          <a:xfrm>
+            <a:off x="2876702" y="1874519"/>
+            <a:ext cx="384048" cy="384048"/>
+          </a:xfrm>
+          <a:prstGeom prst="ellipse">
             <a:avLst/>
           </a:prstGeom>
           <a:solidFill>
@@ -6831,23 +9941,126 @@
           </a:fontRef>
         </p:style>
         <p:txBody>
+          <a:bodyPr rtlCol="0" anchor="ctr" lIns="18288" rIns="18288" tIns="18288" bIns="18288"/>
+          <a:lstStyle/>
+          <a:p>
+            <a:pPr algn="ctr"/>
+            <a:r>
+              <a:rPr sz="1400" b="1">
+                <a:solidFill>
+                  <a:srgbClr val="03110D"/>
+                </a:solidFill>
+                <a:latin typeface="Calibri"/>
+              </a:rPr>
+              <a:t>2</a:t>
+            </a:r>
+          </a:p>
+        </p:txBody>
+      </p:sp>
+      <p:sp>
+        <p:nvSpPr>
+          <p:cNvPr id="10" name="Rounded Rectangle 9"/>
+          <p:cNvSpPr/>
+          <p:nvPr/>
+        </p:nvSpPr>
+        <p:spPr>
+          <a:xfrm>
+            <a:off x="2200046" y="2331720"/>
+            <a:ext cx="1737360" cy="2926080"/>
+          </a:xfrm>
+          <a:prstGeom prst="roundRect">
+            <a:avLst/>
+          </a:prstGeom>
+          <a:solidFill>
+            <a:srgbClr val="03110D"/>
+          </a:solidFill>
+          <a:ln w="19050">
+            <a:solidFill>
+              <a:srgbClr val="00A884"/>
+            </a:solidFill>
+          </a:ln>
+        </p:spPr>
+        <p:style>
+          <a:lnRef idx="1">
+            <a:schemeClr val="accent1"/>
+          </a:lnRef>
+          <a:fillRef idx="3">
+            <a:schemeClr val="accent1"/>
+          </a:fillRef>
+          <a:effectRef idx="2">
+            <a:schemeClr val="accent1"/>
+          </a:effectRef>
+          <a:fontRef idx="minor">
+            <a:schemeClr val="lt1"/>
+          </a:fontRef>
+        </p:style>
+        <p:txBody>
           <a:bodyPr rtlCol="0" anchor="ctr"/>
           <a:lstStyle/>
+          <a:p/>
+        </p:txBody>
+      </p:sp>
+      <p:sp>
+        <p:nvSpPr>
+          <p:cNvPr id="11" name="Rounded Rectangle 10"/>
+          <p:cNvSpPr/>
+          <p:nvPr/>
+        </p:nvSpPr>
+        <p:spPr>
+          <a:xfrm>
+            <a:off x="2337206" y="2468879"/>
+            <a:ext cx="1463039" cy="320040"/>
+          </a:xfrm>
+          <a:prstGeom prst="roundRect">
+            <a:avLst/>
+          </a:prstGeom>
+          <a:solidFill>
+            <a:srgbClr val="FFB347"/>
+          </a:solidFill>
+          <a:ln>
+            <a:noFill/>
+          </a:ln>
+        </p:spPr>
+        <p:style>
+          <a:lnRef idx="1">
+            <a:schemeClr val="accent1"/>
+          </a:lnRef>
+          <a:fillRef idx="3">
+            <a:schemeClr val="accent1"/>
+          </a:fillRef>
+          <a:effectRef idx="2">
+            <a:schemeClr val="accent1"/>
+          </a:effectRef>
+          <a:fontRef idx="minor">
+            <a:schemeClr val="lt1"/>
+          </a:fontRef>
+        </p:style>
+        <p:txBody>
+          <a:bodyPr rtlCol="0" anchor="ctr" lIns="137160" rIns="137160"/>
+          <a:lstStyle/>
           <a:p>
             <a:pPr algn="ctr"/>
-          </a:p>
-        </p:txBody>
-      </p:sp>
-      <p:sp>
-        <p:nvSpPr>
-          <p:cNvPr id="5" name="TextBox 4"/>
+            <a:r>
+              <a:rPr sz="1000" b="1">
+                <a:solidFill>
+                  <a:srgbClr val="03110D"/>
+                </a:solidFill>
+              </a:rPr>
+              <a:t>PICK PAPER</a:t>
+            </a:r>
+          </a:p>
+        </p:txBody>
+      </p:sp>
+      <p:sp>
+        <p:nvSpPr>
+          <p:cNvPr id="12" name="TextBox 11"/>
           <p:cNvSpPr txBox="1"/>
           <p:nvPr/>
         </p:nvSpPr>
         <p:spPr>
           <a:xfrm>
-            <a:off x="548640" y="2468880"/>
-            <a:ext cx="11064240" cy="457200"/>
+            <a:off x="2382926" y="2926079"/>
+            <a:ext cx="1371600" cy="2148840"/>
           </a:xfrm>
           <a:prstGeom prst="rect">
             <a:avLst/>
@@ -6860,29 +10073,259 @@
           </a:bodyPr>
           <a:lstStyle/>
           <a:p>
-            <a:pPr algn="l"/>
-            <a:r>
-              <a:rPr sz="1600" b="1">
-                <a:solidFill>
-                  <a:srgbClr val="00A884"/>
-                </a:solidFill>
-                <a:latin typeface="Calibri"/>
-              </a:rPr>
-              <a:t>Why we expect uplift</a:t>
-            </a:r>
-          </a:p>
-        </p:txBody>
-      </p:sp>
-      <p:sp>
-        <p:nvSpPr>
-          <p:cNvPr id="6" name="TextBox 5"/>
+            <a:pPr algn="l">
+              <a:spcBef>
+                <a:spcPts val="200"/>
+              </a:spcBef>
+            </a:pPr>
+            <a:r>
+              <a:rPr sz="1000" b="0">
+                <a:solidFill>
+                  <a:srgbClr val="9CFF8C"/>
+                </a:solidFill>
+                <a:latin typeface="Consolas"/>
+              </a:rPr>
+              <a:t>📄 2026 NW June</a:t>
+            </a:r>
+          </a:p>
+          <a:p>
+            <a:pPr algn="l">
+              <a:spcBef>
+                <a:spcPts val="200"/>
+              </a:spcBef>
+            </a:pPr>
+            <a:r>
+              <a:rPr sz="1000" b="0">
+                <a:solidFill>
+                  <a:srgbClr val="9CFF8C"/>
+                </a:solidFill>
+                <a:latin typeface="Consolas"/>
+              </a:rPr>
+              <a:t>  ▶ Paper 1</a:t>
+            </a:r>
+          </a:p>
+          <a:p>
+            <a:pPr algn="l">
+              <a:spcBef>
+                <a:spcPts val="200"/>
+              </a:spcBef>
+            </a:pPr>
+            <a:r>
+              <a:rPr sz="1000" b="0">
+                <a:solidFill>
+                  <a:srgbClr val="9CFF8C"/>
+                </a:solidFill>
+                <a:latin typeface="Consolas"/>
+              </a:rPr>
+              <a:t>     ▶ Q1.1.1</a:t>
+            </a:r>
+          </a:p>
+          <a:p>
+            <a:pPr algn="l">
+              <a:spcBef>
+                <a:spcPts val="200"/>
+              </a:spcBef>
+            </a:pPr>
+            <a:r>
+              <a:rPr sz="1000" b="0">
+                <a:solidFill>
+                  <a:srgbClr val="9CFF8C"/>
+                </a:solidFill>
+                <a:latin typeface="Consolas"/>
+              </a:rPr>
+              <a:t>       (3 marks)</a:t>
+            </a:r>
+          </a:p>
+          <a:p>
+            <a:pPr algn="l">
+              <a:spcBef>
+                <a:spcPts val="200"/>
+              </a:spcBef>
+            </a:pPr>
+            <a:r>
+              <a:rPr sz="1000" b="0">
+                <a:solidFill>
+                  <a:srgbClr val="9CFF8C"/>
+                </a:solidFill>
+                <a:latin typeface="Consolas"/>
+              </a:rPr>
+              <a:t/>
+            </a:r>
+          </a:p>
+          <a:p>
+            <a:pPr algn="l">
+              <a:spcBef>
+                <a:spcPts val="200"/>
+              </a:spcBef>
+            </a:pPr>
+            <a:r>
+              <a:rPr sz="1000" b="0">
+                <a:solidFill>
+                  <a:srgbClr val="9CFF8C"/>
+                </a:solidFill>
+                <a:latin typeface="Consolas"/>
+              </a:rPr>
+              <a:t>[ Open ▶ ]</a:t>
+            </a:r>
+          </a:p>
+        </p:txBody>
+      </p:sp>
+      <p:sp>
+        <p:nvSpPr>
+          <p:cNvPr id="13" name="Oval 12"/>
+          <p:cNvSpPr/>
+          <p:nvPr/>
+        </p:nvSpPr>
+        <p:spPr>
+          <a:xfrm>
+            <a:off x="4893868" y="1874519"/>
+            <a:ext cx="384048" cy="384048"/>
+          </a:xfrm>
+          <a:prstGeom prst="ellipse">
+            <a:avLst/>
+          </a:prstGeom>
+          <a:solidFill>
+            <a:srgbClr val="00A884"/>
+          </a:solidFill>
+          <a:ln>
+            <a:noFill/>
+          </a:ln>
+        </p:spPr>
+        <p:style>
+          <a:lnRef idx="1">
+            <a:schemeClr val="accent1"/>
+          </a:lnRef>
+          <a:fillRef idx="3">
+            <a:schemeClr val="accent1"/>
+          </a:fillRef>
+          <a:effectRef idx="2">
+            <a:schemeClr val="accent1"/>
+          </a:effectRef>
+          <a:fontRef idx="minor">
+            <a:schemeClr val="lt1"/>
+          </a:fontRef>
+        </p:style>
+        <p:txBody>
+          <a:bodyPr rtlCol="0" anchor="ctr" lIns="18288" rIns="18288" tIns="18288" bIns="18288"/>
+          <a:lstStyle/>
+          <a:p>
+            <a:pPr algn="ctr"/>
+            <a:r>
+              <a:rPr sz="1400" b="1">
+                <a:solidFill>
+                  <a:srgbClr val="03110D"/>
+                </a:solidFill>
+                <a:latin typeface="Calibri"/>
+              </a:rPr>
+              <a:t>3</a:t>
+            </a:r>
+          </a:p>
+        </p:txBody>
+      </p:sp>
+      <p:sp>
+        <p:nvSpPr>
+          <p:cNvPr id="14" name="Rounded Rectangle 13"/>
+          <p:cNvSpPr/>
+          <p:nvPr/>
+        </p:nvSpPr>
+        <p:spPr>
+          <a:xfrm>
+            <a:off x="4217212" y="2331720"/>
+            <a:ext cx="1737360" cy="2926080"/>
+          </a:xfrm>
+          <a:prstGeom prst="roundRect">
+            <a:avLst/>
+          </a:prstGeom>
+          <a:solidFill>
+            <a:srgbClr val="03110D"/>
+          </a:solidFill>
+          <a:ln w="19050">
+            <a:solidFill>
+              <a:srgbClr val="00A884"/>
+            </a:solidFill>
+          </a:ln>
+        </p:spPr>
+        <p:style>
+          <a:lnRef idx="1">
+            <a:schemeClr val="accent1"/>
+          </a:lnRef>
+          <a:fillRef idx="3">
+            <a:schemeClr val="accent1"/>
+          </a:fillRef>
+          <a:effectRef idx="2">
+            <a:schemeClr val="accent1"/>
+          </a:effectRef>
+          <a:fontRef idx="minor">
+            <a:schemeClr val="lt1"/>
+          </a:fontRef>
+        </p:style>
+        <p:txBody>
+          <a:bodyPr rtlCol="0" anchor="ctr"/>
+          <a:lstStyle/>
+          <a:p/>
+        </p:txBody>
+      </p:sp>
+      <p:sp>
+        <p:nvSpPr>
+          <p:cNvPr id="15" name="Rounded Rectangle 14"/>
+          <p:cNvSpPr/>
+          <p:nvPr/>
+        </p:nvSpPr>
+        <p:spPr>
+          <a:xfrm>
+            <a:off x="4354372" y="2468879"/>
+            <a:ext cx="1463039" cy="320040"/>
+          </a:xfrm>
+          <a:prstGeom prst="roundRect">
+            <a:avLst/>
+          </a:prstGeom>
+          <a:solidFill>
+            <a:srgbClr val="00A884"/>
+          </a:solidFill>
+          <a:ln>
+            <a:noFill/>
+          </a:ln>
+        </p:spPr>
+        <p:style>
+          <a:lnRef idx="1">
+            <a:schemeClr val="accent1"/>
+          </a:lnRef>
+          <a:fillRef idx="3">
+            <a:schemeClr val="accent1"/>
+          </a:fillRef>
+          <a:effectRef idx="2">
+            <a:schemeClr val="accent1"/>
+          </a:effectRef>
+          <a:fontRef idx="minor">
+            <a:schemeClr val="lt1"/>
+          </a:fontRef>
+        </p:style>
+        <p:txBody>
+          <a:bodyPr rtlCol="0" anchor="ctr" lIns="137160" rIns="137160"/>
+          <a:lstStyle/>
+          <a:p>
+            <a:pPr algn="ctr"/>
+            <a:r>
+              <a:rPr sz="1000" b="1">
+                <a:solidFill>
+                  <a:srgbClr val="03110D"/>
+                </a:solidFill>
+              </a:rPr>
+              <a:t>QUESTION</a:t>
+            </a:r>
+          </a:p>
+        </p:txBody>
+      </p:sp>
+      <p:sp>
+        <p:nvSpPr>
+          <p:cNvPr id="16" name="TextBox 15"/>
           <p:cNvSpPr txBox="1"/>
           <p:nvPr/>
         </p:nvSpPr>
         <p:spPr>
           <a:xfrm>
-            <a:off x="548640" y="2834640"/>
-            <a:ext cx="11064240" cy="2103120"/>
+            <a:off x="4400092" y="2926079"/>
+            <a:ext cx="1371600" cy="2148840"/>
           </a:xfrm>
           <a:prstGeom prst="rect">
             <a:avLst/>
@@ -6897,79 +10340,257 @@
           <a:p>
             <a:pPr algn="l">
               <a:spcBef>
-                <a:spcPts val="800"/>
+                <a:spcPts val="200"/>
               </a:spcBef>
             </a:pPr>
             <a:r>
-              <a:rPr sz="1500">
-                <a:solidFill>
-                  <a:srgbClr val="E9EDEF"/>
-                </a:solidFill>
-                <a:latin typeface="Calibri"/>
-              </a:rPr>
-              <a:t>• Diagnostic feedback has the highest effect size in education research (Hattie, d ≈ 0.7-1.0).</a:t>
+              <a:rPr sz="1000" b="0">
+                <a:solidFill>
+                  <a:srgbClr val="9CFF8C"/>
+                </a:solidFill>
+                <a:latin typeface="Consolas"/>
+              </a:rPr>
+              <a:t>QUESTION 1.1.1</a:t>
             </a:r>
           </a:p>
           <a:p>
             <a:pPr algn="l">
               <a:spcBef>
-                <a:spcPts val="800"/>
+                <a:spcPts val="200"/>
               </a:spcBef>
             </a:pPr>
             <a:r>
-              <a:rPr sz="1500">
-                <a:solidFill>
-                  <a:srgbClr val="E9EDEF"/>
-                </a:solidFill>
-                <a:latin typeface="Calibri"/>
-              </a:rPr>
-              <a:t>• Past-paper practice is the single best predictor of NSC outcomes — we give every learner the full archive, free.</a:t>
+              <a:rPr sz="1000" b="0">
+                <a:solidFill>
+                  <a:srgbClr val="9CFF8C"/>
+                </a:solidFill>
+                <a:latin typeface="Consolas"/>
+              </a:rPr>
+              <a:t>· 3 marks</a:t>
             </a:r>
           </a:p>
           <a:p>
             <a:pPr algn="l">
               <a:spcBef>
-                <a:spcPts val="800"/>
+                <a:spcPts val="200"/>
               </a:spcBef>
             </a:pPr>
             <a:r>
-              <a:rPr sz="1500">
-                <a:solidFill>
-                  <a:srgbClr val="E9EDEF"/>
-                </a:solidFill>
-                <a:latin typeface="Calibri"/>
-              </a:rPr>
-              <a:t>• Mother-tongue access reduces cognitive load — we deliver in en/af/zu/xh.</a:t>
+              <a:rPr sz="1000" b="0">
+                <a:solidFill>
+                  <a:srgbClr val="9CFF8C"/>
+                </a:solidFill>
+                <a:latin typeface="Consolas"/>
+              </a:rPr>
+              <a:t/>
             </a:r>
           </a:p>
           <a:p>
             <a:pPr algn="l">
               <a:spcBef>
-                <a:spcPts val="800"/>
+                <a:spcPts val="200"/>
               </a:spcBef>
             </a:pPr>
             <a:r>
-              <a:rPr sz="1500">
-                <a:solidFill>
-                  <a:srgbClr val="E9EDEF"/>
-                </a:solidFill>
-                <a:latin typeface="Calibri"/>
-              </a:rPr>
-              <a:t>• Mark-scheme awareness teaches learners to write for the marker, not just to compute.</a:t>
-            </a:r>
-          </a:p>
-        </p:txBody>
-      </p:sp>
-      <p:sp>
-        <p:nvSpPr>
-          <p:cNvPr id="7" name="TextBox 6"/>
+              <a:rPr sz="1000" b="0">
+                <a:solidFill>
+                  <a:srgbClr val="9CFF8C"/>
+                </a:solidFill>
+                <a:latin typeface="Consolas"/>
+              </a:rPr>
+              <a:t>Solve for x:</a:t>
+            </a:r>
+          </a:p>
+          <a:p>
+            <a:pPr algn="l">
+              <a:spcBef>
+                <a:spcPts val="200"/>
+              </a:spcBef>
+            </a:pPr>
+            <a:r>
+              <a:rPr sz="1000" b="0">
+                <a:solidFill>
+                  <a:srgbClr val="9CFF8C"/>
+                </a:solidFill>
+                <a:latin typeface="Consolas"/>
+              </a:rPr>
+              <a:t/>
+            </a:r>
+          </a:p>
+          <a:p>
+            <a:pPr algn="l">
+              <a:spcBef>
+                <a:spcPts val="200"/>
+              </a:spcBef>
+            </a:pPr>
+            <a:r>
+              <a:rPr sz="1000" b="0">
+                <a:solidFill>
+                  <a:srgbClr val="9CFF8C"/>
+                </a:solidFill>
+                <a:latin typeface="Consolas"/>
+              </a:rPr>
+              <a:t>x² + x - 30 = 0</a:t>
+            </a:r>
+          </a:p>
+        </p:txBody>
+      </p:sp>
+      <p:sp>
+        <p:nvSpPr>
+          <p:cNvPr id="17" name="Oval 16"/>
+          <p:cNvSpPr/>
+          <p:nvPr/>
+        </p:nvSpPr>
+        <p:spPr>
+          <a:xfrm>
+            <a:off x="6911035" y="1874519"/>
+            <a:ext cx="384048" cy="384048"/>
+          </a:xfrm>
+          <a:prstGeom prst="ellipse">
+            <a:avLst/>
+          </a:prstGeom>
+          <a:solidFill>
+            <a:srgbClr val="FFB347"/>
+          </a:solidFill>
+          <a:ln>
+            <a:noFill/>
+          </a:ln>
+        </p:spPr>
+        <p:style>
+          <a:lnRef idx="1">
+            <a:schemeClr val="accent1"/>
+          </a:lnRef>
+          <a:fillRef idx="3">
+            <a:schemeClr val="accent1"/>
+          </a:fillRef>
+          <a:effectRef idx="2">
+            <a:schemeClr val="accent1"/>
+          </a:effectRef>
+          <a:fontRef idx="minor">
+            <a:schemeClr val="lt1"/>
+          </a:fontRef>
+        </p:style>
+        <p:txBody>
+          <a:bodyPr rtlCol="0" anchor="ctr" lIns="18288" rIns="18288" tIns="18288" bIns="18288"/>
+          <a:lstStyle/>
+          <a:p>
+            <a:pPr algn="ctr"/>
+            <a:r>
+              <a:rPr sz="1400" b="1">
+                <a:solidFill>
+                  <a:srgbClr val="03110D"/>
+                </a:solidFill>
+                <a:latin typeface="Calibri"/>
+              </a:rPr>
+              <a:t>4</a:t>
+            </a:r>
+          </a:p>
+        </p:txBody>
+      </p:sp>
+      <p:sp>
+        <p:nvSpPr>
+          <p:cNvPr id="18" name="Rounded Rectangle 17"/>
+          <p:cNvSpPr/>
+          <p:nvPr/>
+        </p:nvSpPr>
+        <p:spPr>
+          <a:xfrm>
+            <a:off x="6234379" y="2331720"/>
+            <a:ext cx="1737360" cy="2926080"/>
+          </a:xfrm>
+          <a:prstGeom prst="roundRect">
+            <a:avLst/>
+          </a:prstGeom>
+          <a:solidFill>
+            <a:srgbClr val="03110D"/>
+          </a:solidFill>
+          <a:ln w="19050">
+            <a:solidFill>
+              <a:srgbClr val="00A884"/>
+            </a:solidFill>
+          </a:ln>
+        </p:spPr>
+        <p:style>
+          <a:lnRef idx="1">
+            <a:schemeClr val="accent1"/>
+          </a:lnRef>
+          <a:fillRef idx="3">
+            <a:schemeClr val="accent1"/>
+          </a:fillRef>
+          <a:effectRef idx="2">
+            <a:schemeClr val="accent1"/>
+          </a:effectRef>
+          <a:fontRef idx="minor">
+            <a:schemeClr val="lt1"/>
+          </a:fontRef>
+        </p:style>
+        <p:txBody>
+          <a:bodyPr rtlCol="0" anchor="ctr"/>
+          <a:lstStyle/>
+          <a:p/>
+        </p:txBody>
+      </p:sp>
+      <p:sp>
+        <p:nvSpPr>
+          <p:cNvPr id="19" name="Rounded Rectangle 18"/>
+          <p:cNvSpPr/>
+          <p:nvPr/>
+        </p:nvSpPr>
+        <p:spPr>
+          <a:xfrm>
+            <a:off x="6371539" y="2468879"/>
+            <a:ext cx="1463039" cy="320040"/>
+          </a:xfrm>
+          <a:prstGeom prst="roundRect">
+            <a:avLst/>
+          </a:prstGeom>
+          <a:solidFill>
+            <a:srgbClr val="FFB347"/>
+          </a:solidFill>
+          <a:ln>
+            <a:noFill/>
+          </a:ln>
+        </p:spPr>
+        <p:style>
+          <a:lnRef idx="1">
+            <a:schemeClr val="accent1"/>
+          </a:lnRef>
+          <a:fillRef idx="3">
+            <a:schemeClr val="accent1"/>
+          </a:fillRef>
+          <a:effectRef idx="2">
+            <a:schemeClr val="accent1"/>
+          </a:effectRef>
+          <a:fontRef idx="minor">
+            <a:schemeClr val="lt1"/>
+          </a:fontRef>
+        </p:style>
+        <p:txBody>
+          <a:bodyPr rtlCol="0" anchor="ctr" lIns="137160" rIns="137160"/>
+          <a:lstStyle/>
+          <a:p>
+            <a:pPr algn="ctr"/>
+            <a:r>
+              <a:rPr sz="1000" b="1">
+                <a:solidFill>
+                  <a:srgbClr val="03110D"/>
+                </a:solidFill>
+              </a:rPr>
+              <a:t>WORKING</a:t>
+            </a:r>
+          </a:p>
+        </p:txBody>
+      </p:sp>
+      <p:sp>
+        <p:nvSpPr>
+          <p:cNvPr id="20" name="TextBox 19"/>
           <p:cNvSpPr txBox="1"/>
           <p:nvPr/>
         </p:nvSpPr>
         <p:spPr>
           <a:xfrm>
-            <a:off x="548640" y="5029200"/>
-            <a:ext cx="11064240" cy="457200"/>
+            <a:off x="6417259" y="2926079"/>
+            <a:ext cx="1371600" cy="2148840"/>
           </a:xfrm>
           <a:prstGeom prst="rect">
             <a:avLst/>
@@ -6982,29 +10603,259 @@
           </a:bodyPr>
           <a:lstStyle/>
           <a:p>
-            <a:pPr algn="l"/>
-            <a:r>
-              <a:rPr sz="1800" b="1">
-                <a:solidFill>
-                  <a:srgbClr val="FFE9B8"/>
-                </a:solidFill>
-                <a:latin typeface="Calibri"/>
-              </a:rPr>
-              <a:t>Honest target: +5-15 percentage points on Maths NSC outcomes</a:t>
-            </a:r>
-          </a:p>
-        </p:txBody>
-      </p:sp>
-      <p:sp>
-        <p:nvSpPr>
-          <p:cNvPr id="8" name="TextBox 7"/>
+            <a:pPr algn="l">
+              <a:spcBef>
+                <a:spcPts val="200"/>
+              </a:spcBef>
+            </a:pPr>
+            <a:r>
+              <a:rPr sz="1000" b="0">
+                <a:solidFill>
+                  <a:srgbClr val="9CFF8C"/>
+                </a:solidFill>
+                <a:latin typeface="Consolas"/>
+              </a:rPr>
+              <a:t>Your working:</a:t>
+            </a:r>
+          </a:p>
+          <a:p>
+            <a:pPr algn="l">
+              <a:spcBef>
+                <a:spcPts val="200"/>
+              </a:spcBef>
+            </a:pPr>
+            <a:r>
+              <a:rPr sz="1000" b="0">
+                <a:solidFill>
+                  <a:srgbClr val="9CFF8C"/>
+                </a:solidFill>
+                <a:latin typeface="Consolas"/>
+              </a:rPr>
+              <a:t/>
+            </a:r>
+          </a:p>
+          <a:p>
+            <a:pPr algn="l">
+              <a:spcBef>
+                <a:spcPts val="200"/>
+              </a:spcBef>
+            </a:pPr>
+            <a:r>
+              <a:rPr sz="1000" b="0">
+                <a:solidFill>
+                  <a:srgbClr val="9CFF8C"/>
+                </a:solidFill>
+                <a:latin typeface="Consolas"/>
+              </a:rPr>
+              <a:t>&gt; x = -3</a:t>
+            </a:r>
+          </a:p>
+          <a:p>
+            <a:pPr algn="l">
+              <a:spcBef>
+                <a:spcPts val="200"/>
+              </a:spcBef>
+            </a:pPr>
+            <a:r>
+              <a:rPr sz="1000" b="0">
+                <a:solidFill>
+                  <a:srgbClr val="9CFF8C"/>
+                </a:solidFill>
+                <a:latin typeface="Consolas"/>
+              </a:rPr>
+              <a:t/>
+            </a:r>
+          </a:p>
+          <a:p>
+            <a:pPr algn="l">
+              <a:spcBef>
+                <a:spcPts val="200"/>
+              </a:spcBef>
+            </a:pPr>
+            <a:r>
+              <a:rPr sz="1000" b="0">
+                <a:solidFill>
+                  <a:srgbClr val="9CFF8C"/>
+                </a:solidFill>
+                <a:latin typeface="Consolas"/>
+              </a:rPr>
+              <a:t/>
+            </a:r>
+          </a:p>
+          <a:p>
+            <a:pPr algn="l">
+              <a:spcBef>
+                <a:spcPts val="200"/>
+              </a:spcBef>
+            </a:pPr>
+            <a:r>
+              <a:rPr sz="1000" b="0">
+                <a:solidFill>
+                  <a:srgbClr val="9CFF8C"/>
+                </a:solidFill>
+                <a:latin typeface="Consolas"/>
+              </a:rPr>
+              <a:t>[ Send ✓ ]</a:t>
+            </a:r>
+          </a:p>
+        </p:txBody>
+      </p:sp>
+      <p:sp>
+        <p:nvSpPr>
+          <p:cNvPr id="21" name="Oval 20"/>
+          <p:cNvSpPr/>
+          <p:nvPr/>
+        </p:nvSpPr>
+        <p:spPr>
+          <a:xfrm>
+            <a:off x="8928201" y="1874519"/>
+            <a:ext cx="384048" cy="384048"/>
+          </a:xfrm>
+          <a:prstGeom prst="ellipse">
+            <a:avLst/>
+          </a:prstGeom>
+          <a:solidFill>
+            <a:srgbClr val="00A884"/>
+          </a:solidFill>
+          <a:ln>
+            <a:noFill/>
+          </a:ln>
+        </p:spPr>
+        <p:style>
+          <a:lnRef idx="1">
+            <a:schemeClr val="accent1"/>
+          </a:lnRef>
+          <a:fillRef idx="3">
+            <a:schemeClr val="accent1"/>
+          </a:fillRef>
+          <a:effectRef idx="2">
+            <a:schemeClr val="accent1"/>
+          </a:effectRef>
+          <a:fontRef idx="minor">
+            <a:schemeClr val="lt1"/>
+          </a:fontRef>
+        </p:style>
+        <p:txBody>
+          <a:bodyPr rtlCol="0" anchor="ctr" lIns="18288" rIns="18288" tIns="18288" bIns="18288"/>
+          <a:lstStyle/>
+          <a:p>
+            <a:pPr algn="ctr"/>
+            <a:r>
+              <a:rPr sz="1400" b="1">
+                <a:solidFill>
+                  <a:srgbClr val="03110D"/>
+                </a:solidFill>
+                <a:latin typeface="Calibri"/>
+              </a:rPr>
+              <a:t>5</a:t>
+            </a:r>
+          </a:p>
+        </p:txBody>
+      </p:sp>
+      <p:sp>
+        <p:nvSpPr>
+          <p:cNvPr id="22" name="Rounded Rectangle 21"/>
+          <p:cNvSpPr/>
+          <p:nvPr/>
+        </p:nvSpPr>
+        <p:spPr>
+          <a:xfrm>
+            <a:off x="8251545" y="2331720"/>
+            <a:ext cx="1737360" cy="2926080"/>
+          </a:xfrm>
+          <a:prstGeom prst="roundRect">
+            <a:avLst/>
+          </a:prstGeom>
+          <a:solidFill>
+            <a:srgbClr val="03110D"/>
+          </a:solidFill>
+          <a:ln w="19050">
+            <a:solidFill>
+              <a:srgbClr val="00A884"/>
+            </a:solidFill>
+          </a:ln>
+        </p:spPr>
+        <p:style>
+          <a:lnRef idx="1">
+            <a:schemeClr val="accent1"/>
+          </a:lnRef>
+          <a:fillRef idx="3">
+            <a:schemeClr val="accent1"/>
+          </a:fillRef>
+          <a:effectRef idx="2">
+            <a:schemeClr val="accent1"/>
+          </a:effectRef>
+          <a:fontRef idx="minor">
+            <a:schemeClr val="lt1"/>
+          </a:fontRef>
+        </p:style>
+        <p:txBody>
+          <a:bodyPr rtlCol="0" anchor="ctr"/>
+          <a:lstStyle/>
+          <a:p/>
+        </p:txBody>
+      </p:sp>
+      <p:sp>
+        <p:nvSpPr>
+          <p:cNvPr id="23" name="Rounded Rectangle 22"/>
+          <p:cNvSpPr/>
+          <p:nvPr/>
+        </p:nvSpPr>
+        <p:spPr>
+          <a:xfrm>
+            <a:off x="8388705" y="2468879"/>
+            <a:ext cx="1463039" cy="320040"/>
+          </a:xfrm>
+          <a:prstGeom prst="roundRect">
+            <a:avLst/>
+          </a:prstGeom>
+          <a:solidFill>
+            <a:srgbClr val="00A884"/>
+          </a:solidFill>
+          <a:ln>
+            <a:noFill/>
+          </a:ln>
+        </p:spPr>
+        <p:style>
+          <a:lnRef idx="1">
+            <a:schemeClr val="accent1"/>
+          </a:lnRef>
+          <a:fillRef idx="3">
+            <a:schemeClr val="accent1"/>
+          </a:fillRef>
+          <a:effectRef idx="2">
+            <a:schemeClr val="accent1"/>
+          </a:effectRef>
+          <a:fontRef idx="minor">
+            <a:schemeClr val="lt1"/>
+          </a:fontRef>
+        </p:style>
+        <p:txBody>
+          <a:bodyPr rtlCol="0" anchor="ctr" lIns="137160" rIns="137160"/>
+          <a:lstStyle/>
+          <a:p>
+            <a:pPr algn="ctr"/>
+            <a:r>
+              <a:rPr sz="1000" b="1">
+                <a:solidFill>
+                  <a:srgbClr val="03110D"/>
+                </a:solidFill>
+              </a:rPr>
+              <a:t>DIAGNOSE</a:t>
+            </a:r>
+          </a:p>
+        </p:txBody>
+      </p:sp>
+      <p:sp>
+        <p:nvSpPr>
+          <p:cNvPr id="24" name="TextBox 23"/>
           <p:cNvSpPr txBox="1"/>
           <p:nvPr/>
         </p:nvSpPr>
         <p:spPr>
           <a:xfrm>
-            <a:off x="548640" y="5486400"/>
-            <a:ext cx="11064240" cy="731520"/>
+            <a:off x="8434425" y="2926079"/>
+            <a:ext cx="1371600" cy="2148840"/>
           </a:xfrm>
           <a:prstGeom prst="rect">
             <a:avLst/>
@@ -7017,15 +10868,474 @@
           </a:bodyPr>
           <a:lstStyle/>
           <a:p>
-            <a:pPr algn="l"/>
-            <a:r>
-              <a:rPr sz="1300" b="0">
-                <a:solidFill>
-                  <a:srgbClr val="8696A0"/>
-                </a:solidFill>
-                <a:latin typeface="Calibri"/>
-              </a:rPr>
-              <a:t>What we will NOT claim: that we replace teachers, fix poverty, or substitute for actual practice. We measure outcomes, publish quarterly, and refuse to overclaim.</a:t>
+            <a:pPr algn="l">
+              <a:spcBef>
+                <a:spcPts val="200"/>
+              </a:spcBef>
+            </a:pPr>
+            <a:r>
+              <a:rPr sz="1000" b="0">
+                <a:solidFill>
+                  <a:srgbClr val="9CFF8C"/>
+                </a:solidFill>
+                <a:latin typeface="Consolas"/>
+              </a:rPr>
+              <a:t>NSC marking:</a:t>
+            </a:r>
+          </a:p>
+          <a:p>
+            <a:pPr algn="l">
+              <a:spcBef>
+                <a:spcPts val="200"/>
+              </a:spcBef>
+            </a:pPr>
+            <a:r>
+              <a:rPr sz="1000" b="0">
+                <a:solidFill>
+                  <a:srgbClr val="9CFF8C"/>
+                </a:solidFill>
+                <a:latin typeface="Consolas"/>
+              </a:rPr>
+              <a:t>0 / 3</a:t>
+            </a:r>
+          </a:p>
+          <a:p>
+            <a:pPr algn="l">
+              <a:spcBef>
+                <a:spcPts val="200"/>
+              </a:spcBef>
+            </a:pPr>
+            <a:r>
+              <a:rPr sz="1000" b="0">
+                <a:solidFill>
+                  <a:srgbClr val="9CFF8C"/>
+                </a:solidFill>
+                <a:latin typeface="Consolas"/>
+              </a:rPr>
+              <a:t/>
+            </a:r>
+          </a:p>
+          <a:p>
+            <a:pPr algn="l">
+              <a:spcBef>
+                <a:spcPts val="200"/>
+              </a:spcBef>
+            </a:pPr>
+            <a:r>
+              <a:rPr sz="1000" b="0">
+                <a:solidFill>
+                  <a:srgbClr val="9CFF8C"/>
+                </a:solidFill>
+                <a:latin typeface="Consolas"/>
+              </a:rPr>
+              <a:t>Re-check your</a:t>
+            </a:r>
+          </a:p>
+          <a:p>
+            <a:pPr algn="l">
+              <a:spcBef>
+                <a:spcPts val="200"/>
+              </a:spcBef>
+            </a:pPr>
+            <a:r>
+              <a:rPr sz="1000" b="0">
+                <a:solidFill>
+                  <a:srgbClr val="9CFF8C"/>
+                </a:solidFill>
+                <a:latin typeface="Consolas"/>
+              </a:rPr>
+              <a:t>working...</a:t>
+            </a:r>
+          </a:p>
+          <a:p>
+            <a:pPr algn="l">
+              <a:spcBef>
+                <a:spcPts val="200"/>
+              </a:spcBef>
+            </a:pPr>
+            <a:r>
+              <a:rPr sz="1000" b="0">
+                <a:solidFill>
+                  <a:srgbClr val="9CFF8C"/>
+                </a:solidFill>
+                <a:latin typeface="Consolas"/>
+              </a:rPr>
+              <a:t/>
+            </a:r>
+          </a:p>
+          <a:p>
+            <a:pPr algn="l">
+              <a:spcBef>
+                <a:spcPts val="200"/>
+              </a:spcBef>
+            </a:pPr>
+            <a:r>
+              <a:rPr sz="1000" b="0">
+                <a:solidFill>
+                  <a:srgbClr val="9CFF8C"/>
+                </a:solidFill>
+                <a:latin typeface="Consolas"/>
+              </a:rPr>
+              <a:t>Hint: factorise.</a:t>
+            </a:r>
+          </a:p>
+        </p:txBody>
+      </p:sp>
+      <p:sp>
+        <p:nvSpPr>
+          <p:cNvPr id="25" name="Oval 24"/>
+          <p:cNvSpPr/>
+          <p:nvPr/>
+        </p:nvSpPr>
+        <p:spPr>
+          <a:xfrm>
+            <a:off x="10945367" y="1874519"/>
+            <a:ext cx="384048" cy="384048"/>
+          </a:xfrm>
+          <a:prstGeom prst="ellipse">
+            <a:avLst/>
+          </a:prstGeom>
+          <a:solidFill>
+            <a:srgbClr val="FFB347"/>
+          </a:solidFill>
+          <a:ln>
+            <a:noFill/>
+          </a:ln>
+        </p:spPr>
+        <p:style>
+          <a:lnRef idx="1">
+            <a:schemeClr val="accent1"/>
+          </a:lnRef>
+          <a:fillRef idx="3">
+            <a:schemeClr val="accent1"/>
+          </a:fillRef>
+          <a:effectRef idx="2">
+            <a:schemeClr val="accent1"/>
+          </a:effectRef>
+          <a:fontRef idx="minor">
+            <a:schemeClr val="lt1"/>
+          </a:fontRef>
+        </p:style>
+        <p:txBody>
+          <a:bodyPr rtlCol="0" anchor="ctr" lIns="18288" rIns="18288" tIns="18288" bIns="18288"/>
+          <a:lstStyle/>
+          <a:p>
+            <a:pPr algn="ctr"/>
+            <a:r>
+              <a:rPr sz="1400" b="1">
+                <a:solidFill>
+                  <a:srgbClr val="03110D"/>
+                </a:solidFill>
+                <a:latin typeface="Calibri"/>
+              </a:rPr>
+              <a:t>6</a:t>
+            </a:r>
+          </a:p>
+        </p:txBody>
+      </p:sp>
+      <p:sp>
+        <p:nvSpPr>
+          <p:cNvPr id="26" name="Rounded Rectangle 25"/>
+          <p:cNvSpPr/>
+          <p:nvPr/>
+        </p:nvSpPr>
+        <p:spPr>
+          <a:xfrm>
+            <a:off x="10268712" y="2331720"/>
+            <a:ext cx="1737360" cy="2926080"/>
+          </a:xfrm>
+          <a:prstGeom prst="roundRect">
+            <a:avLst/>
+          </a:prstGeom>
+          <a:solidFill>
+            <a:srgbClr val="03110D"/>
+          </a:solidFill>
+          <a:ln w="19050">
+            <a:solidFill>
+              <a:srgbClr val="00A884"/>
+            </a:solidFill>
+          </a:ln>
+        </p:spPr>
+        <p:style>
+          <a:lnRef idx="1">
+            <a:schemeClr val="accent1"/>
+          </a:lnRef>
+          <a:fillRef idx="3">
+            <a:schemeClr val="accent1"/>
+          </a:fillRef>
+          <a:effectRef idx="2">
+            <a:schemeClr val="accent1"/>
+          </a:effectRef>
+          <a:fontRef idx="minor">
+            <a:schemeClr val="lt1"/>
+          </a:fontRef>
+        </p:style>
+        <p:txBody>
+          <a:bodyPr rtlCol="0" anchor="ctr"/>
+          <a:lstStyle/>
+          <a:p/>
+        </p:txBody>
+      </p:sp>
+      <p:sp>
+        <p:nvSpPr>
+          <p:cNvPr id="27" name="Rounded Rectangle 26"/>
+          <p:cNvSpPr/>
+          <p:nvPr/>
+        </p:nvSpPr>
+        <p:spPr>
+          <a:xfrm>
+            <a:off x="10405872" y="2468879"/>
+            <a:ext cx="1463039" cy="320040"/>
+          </a:xfrm>
+          <a:prstGeom prst="roundRect">
+            <a:avLst/>
+          </a:prstGeom>
+          <a:solidFill>
+            <a:srgbClr val="FFB347"/>
+          </a:solidFill>
+          <a:ln>
+            <a:noFill/>
+          </a:ln>
+        </p:spPr>
+        <p:style>
+          <a:lnRef idx="1">
+            <a:schemeClr val="accent1"/>
+          </a:lnRef>
+          <a:fillRef idx="3">
+            <a:schemeClr val="accent1"/>
+          </a:fillRef>
+          <a:effectRef idx="2">
+            <a:schemeClr val="accent1"/>
+          </a:effectRef>
+          <a:fontRef idx="minor">
+            <a:schemeClr val="lt1"/>
+          </a:fontRef>
+        </p:style>
+        <p:txBody>
+          <a:bodyPr rtlCol="0" anchor="ctr" lIns="137160" rIns="137160"/>
+          <a:lstStyle/>
+          <a:p>
+            <a:pPr algn="ctr"/>
+            <a:r>
+              <a:rPr sz="1000" b="1">
+                <a:solidFill>
+                  <a:srgbClr val="03110D"/>
+                </a:solidFill>
+              </a:rPr>
+              <a:t>MEMO</a:t>
+            </a:r>
+          </a:p>
+        </p:txBody>
+      </p:sp>
+      <p:sp>
+        <p:nvSpPr>
+          <p:cNvPr id="28" name="TextBox 27"/>
+          <p:cNvSpPr txBox="1"/>
+          <p:nvPr/>
+        </p:nvSpPr>
+        <p:spPr>
+          <a:xfrm>
+            <a:off x="10451592" y="2926079"/>
+            <a:ext cx="1371600" cy="2148840"/>
+          </a:xfrm>
+          <a:prstGeom prst="rect">
+            <a:avLst/>
+          </a:prstGeom>
+          <a:noFill/>
+        </p:spPr>
+        <p:txBody>
+          <a:bodyPr wrap="square">
+            <a:spAutoFit/>
+          </a:bodyPr>
+          <a:lstStyle/>
+          <a:p>
+            <a:pPr algn="l">
+              <a:spcBef>
+                <a:spcPts val="200"/>
+              </a:spcBef>
+            </a:pPr>
+            <a:r>
+              <a:rPr sz="1000" b="0">
+                <a:solidFill>
+                  <a:srgbClr val="9CFF8C"/>
+                </a:solidFill>
+                <a:latin typeface="Consolas"/>
+              </a:rPr>
+              <a:t>✓✓✓ 3/3  ★</a:t>
+            </a:r>
+          </a:p>
+          <a:p>
+            <a:pPr algn="l">
+              <a:spcBef>
+                <a:spcPts val="200"/>
+              </a:spcBef>
+            </a:pPr>
+            <a:r>
+              <a:rPr sz="1000" b="0">
+                <a:solidFill>
+                  <a:srgbClr val="9CFF8C"/>
+                </a:solidFill>
+                <a:latin typeface="Consolas"/>
+              </a:rPr>
+              <a:t/>
+            </a:r>
+          </a:p>
+          <a:p>
+            <a:pPr algn="l">
+              <a:spcBef>
+                <a:spcPts val="200"/>
+              </a:spcBef>
+            </a:pPr>
+            <a:r>
+              <a:rPr sz="1000" b="0">
+                <a:solidFill>
+                  <a:srgbClr val="9CFF8C"/>
+                </a:solidFill>
+                <a:latin typeface="Consolas"/>
+              </a:rPr>
+              <a:t>Factorise:</a:t>
+            </a:r>
+          </a:p>
+          <a:p>
+            <a:pPr algn="l">
+              <a:spcBef>
+                <a:spcPts val="200"/>
+              </a:spcBef>
+            </a:pPr>
+            <a:r>
+              <a:rPr sz="1000" b="0">
+                <a:solidFill>
+                  <a:srgbClr val="9CFF8C"/>
+                </a:solidFill>
+                <a:latin typeface="Consolas"/>
+              </a:rPr>
+              <a:t>(x+6)(x-5) = 0</a:t>
+            </a:r>
+          </a:p>
+          <a:p>
+            <a:pPr algn="l">
+              <a:spcBef>
+                <a:spcPts val="200"/>
+              </a:spcBef>
+            </a:pPr>
+            <a:r>
+              <a:rPr sz="1000" b="0">
+                <a:solidFill>
+                  <a:srgbClr val="9CFF8C"/>
+                </a:solidFill>
+                <a:latin typeface="Consolas"/>
+              </a:rPr>
+              <a:t>x = -6 or x = 5</a:t>
+            </a:r>
+          </a:p>
+          <a:p>
+            <a:pPr algn="l">
+              <a:spcBef>
+                <a:spcPts val="200"/>
+              </a:spcBef>
+            </a:pPr>
+            <a:r>
+              <a:rPr sz="1000" b="0">
+                <a:solidFill>
+                  <a:srgbClr val="9CFF8C"/>
+                </a:solidFill>
+                <a:latin typeface="Consolas"/>
+              </a:rPr>
+              <a:t/>
+            </a:r>
+          </a:p>
+          <a:p>
+            <a:pPr algn="l">
+              <a:spcBef>
+                <a:spcPts val="200"/>
+              </a:spcBef>
+            </a:pPr>
+            <a:r>
+              <a:rPr sz="1000" b="0">
+                <a:solidFill>
+                  <a:srgbClr val="9CFF8C"/>
+                </a:solidFill>
+                <a:latin typeface="Consolas"/>
+              </a:rPr>
+              <a:t>📄 NSC P1 Q1.1.1</a:t>
+            </a:r>
+          </a:p>
+        </p:txBody>
+      </p:sp>
+      <p:sp>
+        <p:nvSpPr>
+          <p:cNvPr id="29" name="Right Arrow 28"/>
+          <p:cNvSpPr/>
+          <p:nvPr/>
+        </p:nvSpPr>
+        <p:spPr>
+          <a:xfrm>
+            <a:off x="274320" y="5440680"/>
+            <a:ext cx="11640312" cy="256032"/>
+          </a:xfrm>
+          <a:prstGeom prst="rightArrow">
+            <a:avLst/>
+          </a:prstGeom>
+          <a:solidFill>
+            <a:srgbClr val="FFB347"/>
+          </a:solidFill>
+          <a:ln>
+            <a:noFill/>
+          </a:ln>
+        </p:spPr>
+        <p:style>
+          <a:lnRef idx="1">
+            <a:schemeClr val="accent1"/>
+          </a:lnRef>
+          <a:fillRef idx="3">
+            <a:schemeClr val="accent1"/>
+          </a:fillRef>
+          <a:effectRef idx="2">
+            <a:schemeClr val="accent1"/>
+          </a:effectRef>
+          <a:fontRef idx="minor">
+            <a:schemeClr val="lt1"/>
+          </a:fontRef>
+        </p:style>
+        <p:txBody>
+          <a:bodyPr rtlCol="0" anchor="ctr"/>
+          <a:lstStyle/>
+          <a:p>
+            <a:pPr algn="ctr"/>
+          </a:p>
+        </p:txBody>
+      </p:sp>
+      <p:sp>
+        <p:nvSpPr>
+          <p:cNvPr id="30" name="TextBox 29"/>
+          <p:cNvSpPr txBox="1"/>
+          <p:nvPr/>
+        </p:nvSpPr>
+        <p:spPr>
+          <a:xfrm>
+            <a:off x="548640" y="5852160"/>
+            <a:ext cx="11064240" cy="365760"/>
+          </a:xfrm>
+          <a:prstGeom prst="rect">
+            <a:avLst/>
+          </a:prstGeom>
+          <a:noFill/>
+        </p:spPr>
+        <p:txBody>
+          <a:bodyPr wrap="square">
+            <a:spAutoFit/>
+          </a:bodyPr>
+          <a:lstStyle/>
+          <a:p>
+            <a:pPr algn="ctr"/>
+            <a:r>
+              <a:rPr sz="1300" b="1">
+                <a:solidFill>
+                  <a:srgbClr val="9CFF8C"/>
+                </a:solidFill>
+                <a:latin typeface="Calibri"/>
+              </a:rPr>
+              <a:t>One learner journey  ·  90 seconds  ·  zero cost  ·  every phone in South Africa</a:t>
             </a:r>
           </a:p>
         </p:txBody>
@@ -7086,7 +11396,7 @@
                 </a:solidFill>
                 <a:latin typeface="Calibri"/>
               </a:rPr>
-              <a:t>Who is this for?</a:t>
+              <a:t>Why this is different</a:t>
             </a:r>
           </a:p>
         </p:txBody>
@@ -7121,7 +11431,7 @@
                 </a:solidFill>
                 <a:latin typeface="Calibri"/>
               </a:rPr>
-              <a:t>Phase 1: Quintile 1–3 NSC learners.</a:t>
+              <a:t>Not a chatbot. A specialised SA tutor.</a:t>
             </a:r>
           </a:p>
         </p:txBody>
@@ -7171,65 +11481,14 @@
       </p:sp>
       <p:sp>
         <p:nvSpPr>
-          <p:cNvPr id="5" name="Rounded Rectangle 4"/>
-          <p:cNvSpPr/>
-          <p:nvPr/>
-        </p:nvSpPr>
-        <p:spPr>
-          <a:xfrm>
-            <a:off x="548640" y="2468880"/>
-            <a:ext cx="3931920" cy="457200"/>
-          </a:xfrm>
-          <a:prstGeom prst="roundRect">
-            <a:avLst/>
-          </a:prstGeom>
-          <a:solidFill>
-            <a:srgbClr val="00A884"/>
-          </a:solidFill>
-          <a:ln>
-            <a:noFill/>
-          </a:ln>
-        </p:spPr>
-        <p:style>
-          <a:lnRef idx="1">
-            <a:schemeClr val="accent1"/>
-          </a:lnRef>
-          <a:fillRef idx="3">
-            <a:schemeClr val="accent1"/>
-          </a:fillRef>
-          <a:effectRef idx="2">
-            <a:schemeClr val="accent1"/>
-          </a:effectRef>
-          <a:fontRef idx="minor">
-            <a:schemeClr val="lt1"/>
-          </a:fontRef>
-        </p:style>
-        <p:txBody>
-          <a:bodyPr rtlCol="0" anchor="ctr" lIns="137160" rIns="137160"/>
-          <a:lstStyle/>
-          <a:p>
-            <a:pPr algn="ctr"/>
-            <a:r>
-              <a:rPr sz="1200" b="1">
-                <a:solidFill>
-                  <a:srgbClr val="03110D"/>
-                </a:solidFill>
-              </a:rPr>
-              <a:t>Persona · Thandi (WhatsApp)</a:t>
-            </a:r>
-          </a:p>
-        </p:txBody>
-      </p:sp>
-      <p:sp>
-        <p:nvSpPr>
-          <p:cNvPr id="6" name="TextBox 5"/>
+          <p:cNvPr id="5" name="TextBox 4"/>
           <p:cNvSpPr txBox="1"/>
           <p:nvPr/>
         </p:nvSpPr>
         <p:spPr>
           <a:xfrm>
-            <a:off x="548640" y="3017520"/>
-            <a:ext cx="5303520" cy="3200400"/>
+            <a:off x="548640" y="2560320"/>
+            <a:ext cx="5486400" cy="548640"/>
           </a:xfrm>
           <a:prstGeom prst="rect">
             <a:avLst/>
@@ -7242,148 +11501,29 @@
           </a:bodyPr>
           <a:lstStyle/>
           <a:p>
-            <a:pPr algn="l">
-              <a:spcBef>
-                <a:spcPts val="800"/>
-              </a:spcBef>
-            </a:pPr>
-            <a:r>
-              <a:rPr sz="1400">
-                <a:solidFill>
-                  <a:srgbClr val="E9EDEF"/>
-                </a:solidFill>
-                <a:latin typeface="Calibri"/>
-              </a:rPr>
-              <a:t>• Grade 11 · Soweto · isiZulu first-language</a:t>
-            </a:r>
-          </a:p>
-          <a:p>
-            <a:pPr algn="l">
-              <a:spcBef>
-                <a:spcPts val="800"/>
-              </a:spcBef>
-            </a:pPr>
-            <a:r>
-              <a:rPr sz="1400">
-                <a:solidFill>
-                  <a:srgbClr val="E9EDEF"/>
-                </a:solidFill>
-                <a:latin typeface="Calibri"/>
-              </a:rPr>
-              <a:t>• Mother is a domestic worker. Father unemployed.</a:t>
-            </a:r>
-          </a:p>
-          <a:p>
-            <a:pPr algn="l">
-              <a:spcBef>
-                <a:spcPts val="800"/>
-              </a:spcBef>
-            </a:pPr>
-            <a:r>
-              <a:rPr sz="1400">
-                <a:solidFill>
-                  <a:srgbClr val="E9EDEF"/>
-                </a:solidFill>
-                <a:latin typeface="Calibri"/>
-              </a:rPr>
-              <a:t>• Basic Android + Vodacom social bundle.</a:t>
-            </a:r>
-          </a:p>
-          <a:p>
-            <a:pPr algn="l">
-              <a:spcBef>
-                <a:spcPts val="800"/>
-              </a:spcBef>
-            </a:pPr>
-            <a:r>
-              <a:rPr sz="1400">
-                <a:solidFill>
-                  <a:srgbClr val="E9EDEF"/>
-                </a:solidFill>
-                <a:latin typeface="Calibri"/>
-              </a:rPr>
-              <a:t>• Currently averaging 50%. Wants a bachelor pass.</a:t>
-            </a:r>
-          </a:p>
-          <a:p>
-            <a:pPr algn="l">
-              <a:spcBef>
-                <a:spcPts val="800"/>
-              </a:spcBef>
-            </a:pPr>
-            <a:r>
-              <a:rPr sz="1400">
-                <a:solidFill>
-                  <a:srgbClr val="E9EDEF"/>
-                </a:solidFill>
-                <a:latin typeface="Calibri"/>
-              </a:rPr>
-              <a:t>• Uses our tutor on WhatsApp at night, mostly text.</a:t>
-            </a:r>
-          </a:p>
-        </p:txBody>
-      </p:sp>
-      <p:sp>
-        <p:nvSpPr>
-          <p:cNvPr id="7" name="Rounded Rectangle 6"/>
-          <p:cNvSpPr/>
-          <p:nvPr/>
-        </p:nvSpPr>
-        <p:spPr>
-          <a:xfrm>
-            <a:off x="6400800" y="2468880"/>
-            <a:ext cx="3931920" cy="457200"/>
-          </a:xfrm>
-          <a:prstGeom prst="roundRect">
-            <a:avLst/>
-          </a:prstGeom>
-          <a:solidFill>
-            <a:srgbClr val="FFB347"/>
-          </a:solidFill>
-          <a:ln>
-            <a:noFill/>
-          </a:ln>
-        </p:spPr>
-        <p:style>
-          <a:lnRef idx="1">
-            <a:schemeClr val="accent1"/>
-          </a:lnRef>
-          <a:fillRef idx="3">
-            <a:schemeClr val="accent1"/>
-          </a:fillRef>
-          <a:effectRef idx="2">
-            <a:schemeClr val="accent1"/>
-          </a:effectRef>
-          <a:fontRef idx="minor">
-            <a:schemeClr val="lt1"/>
-          </a:fontRef>
-        </p:style>
-        <p:txBody>
-          <a:bodyPr rtlCol="0" anchor="ctr" lIns="137160" rIns="137160"/>
-          <a:lstStyle/>
-          <a:p>
-            <a:pPr algn="ctr"/>
-            <a:r>
-              <a:rPr sz="1200" b="1">
-                <a:solidFill>
-                  <a:srgbClr val="03110D"/>
-                </a:solidFill>
-              </a:rPr>
-              <a:t>Persona · Lethabo (USSD)</a:t>
-            </a:r>
-          </a:p>
-        </p:txBody>
-      </p:sp>
-      <p:sp>
-        <p:nvSpPr>
-          <p:cNvPr id="8" name="TextBox 7"/>
+            <a:pPr algn="l"/>
+            <a:r>
+              <a:rPr sz="1600" b="0">
+                <a:solidFill>
+                  <a:srgbClr val="8696A0"/>
+                </a:solidFill>
+                <a:latin typeface="Calibri"/>
+              </a:rPr>
+              <a:t>Generic AI gives the answer.</a:t>
+            </a:r>
+          </a:p>
+        </p:txBody>
+      </p:sp>
+      <p:sp>
+        <p:nvSpPr>
+          <p:cNvPr id="6" name="TextBox 5"/>
           <p:cNvSpPr txBox="1"/>
           <p:nvPr/>
         </p:nvSpPr>
         <p:spPr>
           <a:xfrm>
-            <a:off x="6400800" y="3017520"/>
-            <a:ext cx="5303520" cy="3200400"/>
+            <a:off x="6126480" y="2560320"/>
+            <a:ext cx="5486400" cy="548640"/>
           </a:xfrm>
           <a:prstGeom prst="rect">
             <a:avLst/>
@@ -7396,97 +11536,29 @@
           </a:bodyPr>
           <a:lstStyle/>
           <a:p>
-            <a:pPr algn="l">
-              <a:spcBef>
-                <a:spcPts val="800"/>
-              </a:spcBef>
-            </a:pPr>
-            <a:r>
-              <a:rPr sz="1400">
-                <a:solidFill>
-                  <a:srgbClr val="E9EDEF"/>
-                </a:solidFill>
-                <a:latin typeface="Calibri"/>
-              </a:rPr>
-              <a:t>• Grade 12 · rural Limpopo · Sepedi first-language</a:t>
-            </a:r>
-          </a:p>
-          <a:p>
-            <a:pPr algn="l">
-              <a:spcBef>
-                <a:spcPts val="800"/>
-              </a:spcBef>
-            </a:pPr>
-            <a:r>
-              <a:rPr sz="1400">
-                <a:solidFill>
-                  <a:srgbClr val="E9EDEF"/>
-                </a:solidFill>
-                <a:latin typeface="Calibri"/>
-              </a:rPr>
-              <a:t>• Lives with grandmother. No parents.</a:t>
-            </a:r>
-          </a:p>
-          <a:p>
-            <a:pPr algn="l">
-              <a:spcBef>
-                <a:spcPts val="800"/>
-              </a:spcBef>
-            </a:pPr>
-            <a:r>
-              <a:rPr sz="1400">
-                <a:solidFill>
-                  <a:srgbClr val="E9EDEF"/>
-                </a:solidFill>
-                <a:latin typeface="Calibri"/>
-              </a:rPr>
-              <a:t>• Nokia feature phone — no smartphone.</a:t>
-            </a:r>
-          </a:p>
-          <a:p>
-            <a:pPr algn="l">
-              <a:spcBef>
-                <a:spcPts val="800"/>
-              </a:spcBef>
-            </a:pPr>
-            <a:r>
-              <a:rPr sz="1400">
-                <a:solidFill>
-                  <a:srgbClr val="E9EDEF"/>
-                </a:solidFill>
-                <a:latin typeface="Calibri"/>
-              </a:rPr>
-              <a:t>• 65% mid-year. Wants 70%+ for accounting at UJ.</a:t>
-            </a:r>
-          </a:p>
-          <a:p>
-            <a:pPr algn="l">
-              <a:spcBef>
-                <a:spcPts val="800"/>
-              </a:spcBef>
-            </a:pPr>
-            <a:r>
-              <a:rPr sz="1400">
-                <a:solidFill>
-                  <a:srgbClr val="E9EDEF"/>
-                </a:solidFill>
-                <a:latin typeface="Calibri"/>
-              </a:rPr>
-              <a:t>• Uses our tutor on USSD at school in free periods.</a:t>
-            </a:r>
-          </a:p>
-        </p:txBody>
-      </p:sp>
-      <p:sp>
-        <p:nvSpPr>
-          <p:cNvPr id="9" name="TextBox 8"/>
+            <a:pPr algn="l"/>
+            <a:r>
+              <a:rPr sz="1600" b="1">
+                <a:solidFill>
+                  <a:srgbClr val="9CFF8C"/>
+                </a:solidFill>
+                <a:latin typeface="Calibri"/>
+              </a:rPr>
+              <a:t>We refuse to — pedagogy enforced in code, not in a prompt.</a:t>
+            </a:r>
+          </a:p>
+        </p:txBody>
+      </p:sp>
+      <p:sp>
+        <p:nvSpPr>
+          <p:cNvPr id="7" name="TextBox 6"/>
           <p:cNvSpPr txBox="1"/>
           <p:nvPr/>
         </p:nvSpPr>
         <p:spPr>
           <a:xfrm>
-            <a:off x="548640" y="5943600"/>
-            <a:ext cx="11064240" cy="457200"/>
+            <a:off x="548640" y="3246120"/>
+            <a:ext cx="5486400" cy="548640"/>
           </a:xfrm>
           <a:prstGeom prst="rect">
             <a:avLst/>
@@ -7499,15 +11571,260 @@
           </a:bodyPr>
           <a:lstStyle/>
           <a:p>
-            <a:pPr algn="ctr"/>
-            <a:r>
-              <a:rPr sz="1300" b="0">
+            <a:pPr algn="l"/>
+            <a:r>
+              <a:rPr sz="1600" b="0">
                 <a:solidFill>
                   <a:srgbClr val="8696A0"/>
                 </a:solidFill>
                 <a:latin typeface="Calibri"/>
               </a:rPr>
-              <a:t>Phase 2: Grades 8–10 + Maths Literacy. Phase 3: Sciences, Accounting, 11 official spoken languages + SA Sign Language (video channel).</a:t>
+              <a:t>Generic AI marks right or wrong.</a:t>
+            </a:r>
+          </a:p>
+        </p:txBody>
+      </p:sp>
+      <p:sp>
+        <p:nvSpPr>
+          <p:cNvPr id="8" name="TextBox 7"/>
+          <p:cNvSpPr txBox="1"/>
+          <p:nvPr/>
+        </p:nvSpPr>
+        <p:spPr>
+          <a:xfrm>
+            <a:off x="6126480" y="3246120"/>
+            <a:ext cx="5486400" cy="548640"/>
+          </a:xfrm>
+          <a:prstGeom prst="rect">
+            <a:avLst/>
+          </a:prstGeom>
+          <a:noFill/>
+        </p:spPr>
+        <p:txBody>
+          <a:bodyPr wrap="square">
+            <a:spAutoFit/>
+          </a:bodyPr>
+          <a:lstStyle/>
+          <a:p>
+            <a:pPr algn="l"/>
+            <a:r>
+              <a:rPr sz="1600" b="1">
+                <a:solidFill>
+                  <a:srgbClr val="9CFF8C"/>
+                </a:solidFill>
+                <a:latin typeface="Calibri"/>
+              </a:rPr>
+              <a:t>We diagnose the exact step where thinking broke + the misconception.</a:t>
+            </a:r>
+          </a:p>
+        </p:txBody>
+      </p:sp>
+      <p:sp>
+        <p:nvSpPr>
+          <p:cNvPr id="9" name="TextBox 8"/>
+          <p:cNvSpPr txBox="1"/>
+          <p:nvPr/>
+        </p:nvSpPr>
+        <p:spPr>
+          <a:xfrm>
+            <a:off x="548640" y="3931920"/>
+            <a:ext cx="5486400" cy="548640"/>
+          </a:xfrm>
+          <a:prstGeom prst="rect">
+            <a:avLst/>
+          </a:prstGeom>
+          <a:noFill/>
+        </p:spPr>
+        <p:txBody>
+          <a:bodyPr wrap="square">
+            <a:spAutoFit/>
+          </a:bodyPr>
+          <a:lstStyle/>
+          <a:p>
+            <a:pPr algn="l"/>
+            <a:r>
+              <a:rPr sz="1600" b="0">
+                <a:solidFill>
+                  <a:srgbClr val="8696A0"/>
+                </a:solidFill>
+                <a:latin typeface="Calibri"/>
+              </a:rPr>
+              <a:t>Generic AI knows everything.</a:t>
+            </a:r>
+          </a:p>
+        </p:txBody>
+      </p:sp>
+      <p:sp>
+        <p:nvSpPr>
+          <p:cNvPr id="10" name="TextBox 9"/>
+          <p:cNvSpPr txBox="1"/>
+          <p:nvPr/>
+        </p:nvSpPr>
+        <p:spPr>
+          <a:xfrm>
+            <a:off x="6126480" y="3931920"/>
+            <a:ext cx="5486400" cy="548640"/>
+          </a:xfrm>
+          <a:prstGeom prst="rect">
+            <a:avLst/>
+          </a:prstGeom>
+          <a:noFill/>
+        </p:spPr>
+        <p:txBody>
+          <a:bodyPr wrap="square">
+            <a:spAutoFit/>
+          </a:bodyPr>
+          <a:lstStyle/>
+          <a:p>
+            <a:pPr algn="l"/>
+            <a:r>
+              <a:rPr sz="1600" b="1">
+                <a:solidFill>
+                  <a:srgbClr val="9CFF8C"/>
+                </a:solidFill>
+                <a:latin typeface="Calibri"/>
+              </a:rPr>
+              <a:t>We are bounded to CAPS — auditable by DBE, editable by educators.</a:t>
+            </a:r>
+          </a:p>
+        </p:txBody>
+      </p:sp>
+      <p:sp>
+        <p:nvSpPr>
+          <p:cNvPr id="11" name="TextBox 10"/>
+          <p:cNvSpPr txBox="1"/>
+          <p:nvPr/>
+        </p:nvSpPr>
+        <p:spPr>
+          <a:xfrm>
+            <a:off x="548640" y="4617720"/>
+            <a:ext cx="5486400" cy="548640"/>
+          </a:xfrm>
+          <a:prstGeom prst="rect">
+            <a:avLst/>
+          </a:prstGeom>
+          <a:noFill/>
+        </p:spPr>
+        <p:txBody>
+          <a:bodyPr wrap="square">
+            <a:spAutoFit/>
+          </a:bodyPr>
+          <a:lstStyle/>
+          <a:p>
+            <a:pPr algn="l"/>
+            <a:r>
+              <a:rPr sz="1600" b="0">
+                <a:solidFill>
+                  <a:srgbClr val="8696A0"/>
+                </a:solidFill>
+                <a:latin typeface="Calibri"/>
+              </a:rPr>
+              <a:t>Generic AI needs a smartphone.</a:t>
+            </a:r>
+          </a:p>
+        </p:txBody>
+      </p:sp>
+      <p:sp>
+        <p:nvSpPr>
+          <p:cNvPr id="12" name="TextBox 11"/>
+          <p:cNvSpPr txBox="1"/>
+          <p:nvPr/>
+        </p:nvSpPr>
+        <p:spPr>
+          <a:xfrm>
+            <a:off x="6126480" y="4617720"/>
+            <a:ext cx="5486400" cy="548640"/>
+          </a:xfrm>
+          <a:prstGeom prst="rect">
+            <a:avLst/>
+          </a:prstGeom>
+          <a:noFill/>
+        </p:spPr>
+        <p:txBody>
+          <a:bodyPr wrap="square">
+            <a:spAutoFit/>
+          </a:bodyPr>
+          <a:lstStyle/>
+          <a:p>
+            <a:pPr algn="l"/>
+            <a:r>
+              <a:rPr sz="1600" b="1">
+                <a:solidFill>
+                  <a:srgbClr val="9CFF8C"/>
+                </a:solidFill>
+                <a:latin typeface="Calibri"/>
+              </a:rPr>
+              <a:t>USSD reaches feature phones. 5-7M SA learners Meta cannot serve.</a:t>
+            </a:r>
+          </a:p>
+        </p:txBody>
+      </p:sp>
+      <p:sp>
+        <p:nvSpPr>
+          <p:cNvPr id="13" name="TextBox 12"/>
+          <p:cNvSpPr txBox="1"/>
+          <p:nvPr/>
+        </p:nvSpPr>
+        <p:spPr>
+          <a:xfrm>
+            <a:off x="548640" y="5303520"/>
+            <a:ext cx="5486400" cy="548640"/>
+          </a:xfrm>
+          <a:prstGeom prst="rect">
+            <a:avLst/>
+          </a:prstGeom>
+          <a:noFill/>
+        </p:spPr>
+        <p:txBody>
+          <a:bodyPr wrap="square">
+            <a:spAutoFit/>
+          </a:bodyPr>
+          <a:lstStyle/>
+          <a:p>
+            <a:pPr algn="l"/>
+            <a:r>
+              <a:rPr sz="1600" b="0">
+                <a:solidFill>
+                  <a:srgbClr val="8696A0"/>
+                </a:solidFill>
+                <a:latin typeface="Calibri"/>
+              </a:rPr>
+              <a:t>Generic AI's data leaves SA.</a:t>
+            </a:r>
+          </a:p>
+        </p:txBody>
+      </p:sp>
+      <p:sp>
+        <p:nvSpPr>
+          <p:cNvPr id="14" name="TextBox 13"/>
+          <p:cNvSpPr txBox="1"/>
+          <p:nvPr/>
+        </p:nvSpPr>
+        <p:spPr>
+          <a:xfrm>
+            <a:off x="6126480" y="5303520"/>
+            <a:ext cx="5486400" cy="548640"/>
+          </a:xfrm>
+          <a:prstGeom prst="rect">
+            <a:avLst/>
+          </a:prstGeom>
+          <a:noFill/>
+        </p:spPr>
+        <p:txBody>
+          <a:bodyPr wrap="square">
+            <a:spAutoFit/>
+          </a:bodyPr>
+          <a:lstStyle/>
+          <a:p>
+            <a:pPr algn="l"/>
+            <a:r>
+              <a:rPr sz="1600" b="1">
+                <a:solidFill>
+                  <a:srgbClr val="9CFF8C"/>
+                </a:solidFill>
+                <a:latin typeface="Calibri"/>
+              </a:rPr>
+              <a:t>We run on Dell AI Factory in country. POPIA-aligned. Sovereign.</a:t>
             </a:r>
           </a:p>
         </p:txBody>
@@ -7564,11 +11881,11 @@
             <a:r>
               <a:rPr sz="1400" b="1">
                 <a:solidFill>
-                  <a:srgbClr val="00A884"/>
-                </a:solidFill>
-                <a:latin typeface="Calibri"/>
-              </a:rPr>
-              <a:t>Equality · Safety · Trust</a:t>
+                  <a:srgbClr val="FFB347"/>
+                </a:solidFill>
+                <a:latin typeface="Calibri"/>
+              </a:rPr>
+              <a:t>Will it work?</a:t>
             </a:r>
           </a:p>
         </p:txBody>
@@ -7603,7 +11920,7 @@
                 </a:solidFill>
                 <a:latin typeface="Calibri"/>
               </a:rPr>
-              <a:t>Built right, not built fast.</a:t>
+              <a:t>Yes — as a complement, not a replacement.</a:t>
             </a:r>
           </a:p>
         </p:txBody>
@@ -7620,203 +11937,6 @@
             <a:ext cx="3657600" cy="50800"/>
           </a:xfrm>
           <a:prstGeom prst="rect">
-            <a:avLst/>
-          </a:prstGeom>
-          <a:solidFill>
-            <a:srgbClr val="00A884"/>
-          </a:solidFill>
-          <a:ln>
-            <a:noFill/>
-          </a:ln>
-        </p:spPr>
-        <p:style>
-          <a:lnRef idx="1">
-            <a:schemeClr val="accent1"/>
-          </a:lnRef>
-          <a:fillRef idx="3">
-            <a:schemeClr val="accent1"/>
-          </a:fillRef>
-          <a:effectRef idx="2">
-            <a:schemeClr val="accent1"/>
-          </a:effectRef>
-          <a:fontRef idx="minor">
-            <a:schemeClr val="lt1"/>
-          </a:fontRef>
-        </p:style>
-        <p:txBody>
-          <a:bodyPr rtlCol="0" anchor="ctr"/>
-          <a:lstStyle/>
-          <a:p>
-            <a:pPr algn="ctr"/>
-          </a:p>
-        </p:txBody>
-      </p:sp>
-      <p:sp>
-        <p:nvSpPr>
-          <p:cNvPr id="5" name="Rounded Rectangle 4"/>
-          <p:cNvSpPr/>
-          <p:nvPr/>
-        </p:nvSpPr>
-        <p:spPr>
-          <a:xfrm>
-            <a:off x="548640" y="2468880"/>
-            <a:ext cx="1463040" cy="411480"/>
-          </a:xfrm>
-          <a:prstGeom prst="roundRect">
-            <a:avLst/>
-          </a:prstGeom>
-          <a:solidFill>
-            <a:srgbClr val="00A884"/>
-          </a:solidFill>
-          <a:ln>
-            <a:noFill/>
-          </a:ln>
-        </p:spPr>
-        <p:style>
-          <a:lnRef idx="1">
-            <a:schemeClr val="accent1"/>
-          </a:lnRef>
-          <a:fillRef idx="3">
-            <a:schemeClr val="accent1"/>
-          </a:fillRef>
-          <a:effectRef idx="2">
-            <a:schemeClr val="accent1"/>
-          </a:effectRef>
-          <a:fontRef idx="minor">
-            <a:schemeClr val="lt1"/>
-          </a:fontRef>
-        </p:style>
-        <p:txBody>
-          <a:bodyPr rtlCol="0" anchor="ctr" lIns="137160" rIns="137160"/>
-          <a:lstStyle/>
-          <a:p>
-            <a:pPr algn="ctr"/>
-            <a:r>
-              <a:rPr sz="1400" b="1">
-                <a:solidFill>
-                  <a:srgbClr val="03110D"/>
-                </a:solidFill>
-              </a:rPr>
-              <a:t>Equality</a:t>
-            </a:r>
-          </a:p>
-        </p:txBody>
-      </p:sp>
-      <p:sp>
-        <p:nvSpPr>
-          <p:cNvPr id="6" name="TextBox 5"/>
-          <p:cNvSpPr txBox="1"/>
-          <p:nvPr/>
-        </p:nvSpPr>
-        <p:spPr>
-          <a:xfrm>
-            <a:off x="548640" y="3017520"/>
-            <a:ext cx="3657600" cy="3383280"/>
-          </a:xfrm>
-          <a:prstGeom prst="rect">
-            <a:avLst/>
-          </a:prstGeom>
-          <a:noFill/>
-        </p:spPr>
-        <p:txBody>
-          <a:bodyPr wrap="square">
-            <a:spAutoFit/>
-          </a:bodyPr>
-          <a:lstStyle/>
-          <a:p>
-            <a:pPr algn="l">
-              <a:spcBef>
-                <a:spcPts val="800"/>
-              </a:spcBef>
-            </a:pPr>
-            <a:r>
-              <a:rPr sz="1200">
-                <a:solidFill>
-                  <a:srgbClr val="E9EDEF"/>
-                </a:solidFill>
-                <a:latin typeface="Calibri"/>
-              </a:rPr>
-              <a:t>• Two channels — never device-locked</a:t>
-            </a:r>
-          </a:p>
-          <a:p>
-            <a:pPr algn="l">
-              <a:spcBef>
-                <a:spcPts val="800"/>
-              </a:spcBef>
-            </a:pPr>
-            <a:r>
-              <a:rPr sz="1200">
-                <a:solidFill>
-                  <a:srgbClr val="E9EDEF"/>
-                </a:solidFill>
-                <a:latin typeface="Calibri"/>
-              </a:rPr>
-              <a:t>• Zero at point of use (zero-rated)</a:t>
-            </a:r>
-          </a:p>
-          <a:p>
-            <a:pPr algn="l">
-              <a:spcBef>
-                <a:spcPts val="800"/>
-              </a:spcBef>
-            </a:pPr>
-            <a:r>
-              <a:rPr sz="1200">
-                <a:solidFill>
-                  <a:srgbClr val="E9EDEF"/>
-                </a:solidFill>
-                <a:latin typeface="Calibri"/>
-              </a:rPr>
-              <a:t>• 4 validated + 7 first-pass + SA Sign Language = 12</a:t>
-            </a:r>
-          </a:p>
-          <a:p>
-            <a:pPr algn="l">
-              <a:spcBef>
-                <a:spcPts val="800"/>
-              </a:spcBef>
-            </a:pPr>
-            <a:r>
-              <a:rPr sz="1200">
-                <a:solidFill>
-                  <a:srgbClr val="E9EDEF"/>
-                </a:solidFill>
-                <a:latin typeface="Calibri"/>
-              </a:rPr>
-              <a:t>• Identical brain on both channels</a:t>
-            </a:r>
-          </a:p>
-          <a:p>
-            <a:pPr algn="l">
-              <a:spcBef>
-                <a:spcPts val="800"/>
-              </a:spcBef>
-            </a:pPr>
-            <a:r>
-              <a:rPr sz="1200">
-                <a:solidFill>
-                  <a:srgbClr val="E9EDEF"/>
-                </a:solidFill>
-                <a:latin typeface="Calibri"/>
-              </a:rPr>
-              <a:t>• No premium tier — design constraint</a:t>
-            </a:r>
-          </a:p>
-        </p:txBody>
-      </p:sp>
-      <p:sp>
-        <p:nvSpPr>
-          <p:cNvPr id="7" name="Rounded Rectangle 6"/>
-          <p:cNvSpPr/>
-          <p:nvPr/>
-        </p:nvSpPr>
-        <p:spPr>
-          <a:xfrm>
-            <a:off x="4389120" y="2468880"/>
-            <a:ext cx="1463040" cy="411480"/>
-          </a:xfrm>
-          <a:prstGeom prst="roundRect">
             <a:avLst/>
           </a:prstGeom>
           <a:solidFill>
@@ -7841,31 +11961,58 @@
           </a:fontRef>
         </p:style>
         <p:txBody>
-          <a:bodyPr rtlCol="0" anchor="ctr" lIns="137160" rIns="137160"/>
+          <a:bodyPr rtlCol="0" anchor="ctr"/>
           <a:lstStyle/>
           <a:p>
             <a:pPr algn="ctr"/>
-            <a:r>
-              <a:rPr sz="1400" b="1">
-                <a:solidFill>
-                  <a:srgbClr val="03110D"/>
-                </a:solidFill>
-              </a:rPr>
-              <a:t>Safety</a:t>
-            </a:r>
-          </a:p>
-        </p:txBody>
-      </p:sp>
-      <p:sp>
-        <p:nvSpPr>
-          <p:cNvPr id="8" name="TextBox 7"/>
+          </a:p>
+        </p:txBody>
+      </p:sp>
+      <p:sp>
+        <p:nvSpPr>
+          <p:cNvPr id="5" name="TextBox 4"/>
           <p:cNvSpPr txBox="1"/>
           <p:nvPr/>
         </p:nvSpPr>
         <p:spPr>
           <a:xfrm>
-            <a:off x="4389120" y="3017520"/>
-            <a:ext cx="3657600" cy="3383280"/>
+            <a:off x="548640" y="2468880"/>
+            <a:ext cx="11064240" cy="457200"/>
+          </a:xfrm>
+          <a:prstGeom prst="rect">
+            <a:avLst/>
+          </a:prstGeom>
+          <a:noFill/>
+        </p:spPr>
+        <p:txBody>
+          <a:bodyPr wrap="square">
+            <a:spAutoFit/>
+          </a:bodyPr>
+          <a:lstStyle/>
+          <a:p>
+            <a:pPr algn="l"/>
+            <a:r>
+              <a:rPr sz="1600" b="1">
+                <a:solidFill>
+                  <a:srgbClr val="00A884"/>
+                </a:solidFill>
+                <a:latin typeface="Calibri"/>
+              </a:rPr>
+              <a:t>Why we expect uplift</a:t>
+            </a:r>
+          </a:p>
+        </p:txBody>
+      </p:sp>
+      <p:sp>
+        <p:nvSpPr>
+          <p:cNvPr id="6" name="TextBox 5"/>
+          <p:cNvSpPr txBox="1"/>
+          <p:nvPr/>
+        </p:nvSpPr>
+        <p:spPr>
+          <a:xfrm>
+            <a:off x="548640" y="2834640"/>
+            <a:ext cx="11064240" cy="2103120"/>
           </a:xfrm>
           <a:prstGeom prst="rect">
             <a:avLst/>
@@ -7884,13 +12031,13 @@
               </a:spcBef>
             </a:pPr>
             <a:r>
-              <a:rPr sz="1200">
+              <a:rPr sz="1500">
                 <a:solidFill>
                   <a:srgbClr val="E9EDEF"/>
                 </a:solidFill>
                 <a:latin typeface="Calibri"/>
               </a:rPr>
-              <a:t>• CAPS-bounded — no off-topic chat</a:t>
+              <a:t>• Diagnostic feedback has the highest effect size in education research (Hattie, d ≈ 0.7-1.0).</a:t>
             </a:r>
           </a:p>
           <a:p>
@@ -7900,13 +12047,13 @@
               </a:spcBef>
             </a:pPr>
             <a:r>
-              <a:rPr sz="1200">
+              <a:rPr sz="1500">
                 <a:solidFill>
                   <a:srgbClr val="E9EDEF"/>
                 </a:solidFill>
                 <a:latin typeface="Calibri"/>
               </a:rPr>
-              <a:t>• Verified maths in code, not LLM</a:t>
+              <a:t>• Past-paper practice is the single best predictor of NSC outcomes — we give every learner the full archive, free.</a:t>
             </a:r>
           </a:p>
           <a:p>
@@ -7916,13 +12063,13 @@
               </a:spcBef>
             </a:pPr>
             <a:r>
-              <a:rPr sz="1200">
+              <a:rPr sz="1500">
                 <a:solidFill>
                   <a:srgbClr val="E9EDEF"/>
                 </a:solidFill>
                 <a:latin typeface="Calibri"/>
               </a:rPr>
-              <a:t>• POPIA-aligned, SA-hosted</a:t>
+              <a:t>• Mother-tongue access reduces cognitive load — we deliver in en/af/zu/xh.</a:t>
             </a:r>
           </a:p>
           <a:p>
@@ -7932,94 +12079,27 @@
               </a:spcBef>
             </a:pPr>
             <a:r>
-              <a:rPr sz="1200">
+              <a:rPr sz="1500">
                 <a:solidFill>
                   <a:srgbClr val="E9EDEF"/>
                 </a:solidFill>
                 <a:latin typeface="Calibri"/>
               </a:rPr>
-              <a:t>• No PII beyond phone number</a:t>
-            </a:r>
-          </a:p>
-          <a:p>
-            <a:pPr algn="l">
-              <a:spcBef>
-                <a:spcPts val="800"/>
-              </a:spcBef>
-            </a:pPr>
-            <a:r>
-              <a:rPr sz="1200">
-                <a:solidFill>
-                  <a:srgbClr val="E9EDEF"/>
-                </a:solidFill>
-                <a:latin typeface="Calibri"/>
-              </a:rPr>
-              <a:t>• Reporting → real educator escalation</a:t>
-            </a:r>
-          </a:p>
-        </p:txBody>
-      </p:sp>
-      <p:sp>
-        <p:nvSpPr>
-          <p:cNvPr id="9" name="Rounded Rectangle 8"/>
-          <p:cNvSpPr/>
-          <p:nvPr/>
-        </p:nvSpPr>
-        <p:spPr>
-          <a:xfrm>
-            <a:off x="8229600" y="2468880"/>
-            <a:ext cx="1463040" cy="411480"/>
-          </a:xfrm>
-          <a:prstGeom prst="roundRect">
-            <a:avLst/>
-          </a:prstGeom>
-          <a:solidFill>
-            <a:srgbClr val="9CFF8C"/>
-          </a:solidFill>
-          <a:ln>
-            <a:noFill/>
-          </a:ln>
-        </p:spPr>
-        <p:style>
-          <a:lnRef idx="1">
-            <a:schemeClr val="accent1"/>
-          </a:lnRef>
-          <a:fillRef idx="3">
-            <a:schemeClr val="accent1"/>
-          </a:fillRef>
-          <a:effectRef idx="2">
-            <a:schemeClr val="accent1"/>
-          </a:effectRef>
-          <a:fontRef idx="minor">
-            <a:schemeClr val="lt1"/>
-          </a:fontRef>
-        </p:style>
-        <p:txBody>
-          <a:bodyPr rtlCol="0" anchor="ctr" lIns="137160" rIns="137160"/>
-          <a:lstStyle/>
-          <a:p>
-            <a:pPr algn="ctr"/>
-            <a:r>
-              <a:rPr sz="1400" b="1">
-                <a:solidFill>
-                  <a:srgbClr val="03110D"/>
-                </a:solidFill>
-              </a:rPr>
-              <a:t>Trust</a:t>
-            </a:r>
-          </a:p>
-        </p:txBody>
-      </p:sp>
-      <p:sp>
-        <p:nvSpPr>
-          <p:cNvPr id="10" name="TextBox 9"/>
+              <a:t>• Mark-scheme awareness teaches learners to write for the marker, not just to compute.</a:t>
+            </a:r>
+          </a:p>
+        </p:txBody>
+      </p:sp>
+      <p:sp>
+        <p:nvSpPr>
+          <p:cNvPr id="7" name="TextBox 6"/>
           <p:cNvSpPr txBox="1"/>
           <p:nvPr/>
         </p:nvSpPr>
         <p:spPr>
           <a:xfrm>
-            <a:off x="8229600" y="3017520"/>
-            <a:ext cx="3657600" cy="3383280"/>
+            <a:off x="548640" y="5029200"/>
+            <a:ext cx="11064240" cy="457200"/>
           </a:xfrm>
           <a:prstGeom prst="rect">
             <a:avLst/>
@@ -8032,97 +12112,29 @@
           </a:bodyPr>
           <a:lstStyle/>
           <a:p>
-            <a:pPr algn="l">
-              <a:spcBef>
-                <a:spcPts val="800"/>
-              </a:spcBef>
-            </a:pPr>
-            <a:r>
-              <a:rPr sz="1200">
-                <a:solidFill>
-                  <a:srgbClr val="E9EDEF"/>
-                </a:solidFill>
-                <a:latin typeface="Calibri"/>
-              </a:rPr>
-              <a:t>• Sources cited on every screen</a:t>
-            </a:r>
-          </a:p>
-          <a:p>
-            <a:pPr algn="l">
-              <a:spcBef>
-                <a:spcPts val="800"/>
-              </a:spcBef>
-            </a:pPr>
-            <a:r>
-              <a:rPr sz="1200">
-                <a:solidFill>
-                  <a:srgbClr val="E9EDEF"/>
-                </a:solidFill>
-                <a:latin typeface="Calibri"/>
-              </a:rPr>
-              <a:t>• CAPS topic + sub-skill labelled</a:t>
-            </a:r>
-          </a:p>
-          <a:p>
-            <a:pPr algn="l">
-              <a:spcBef>
-                <a:spcPts val="800"/>
-              </a:spcBef>
-            </a:pPr>
-            <a:r>
-              <a:rPr sz="1200">
-                <a:solidFill>
-                  <a:srgbClr val="E9EDEF"/>
-                </a:solidFill>
-                <a:latin typeface="Calibri"/>
-              </a:rPr>
-              <a:t>• Educator-editable curriculum file</a:t>
-            </a:r>
-          </a:p>
-          <a:p>
-            <a:pPr algn="l">
-              <a:spcBef>
-                <a:spcPts val="800"/>
-              </a:spcBef>
-            </a:pPr>
-            <a:r>
-              <a:rPr sz="1200">
-                <a:solidFill>
-                  <a:srgbClr val="E9EDEF"/>
-                </a:solidFill>
-                <a:latin typeface="Calibri"/>
-              </a:rPr>
-              <a:t>• Refuses to give final answers</a:t>
-            </a:r>
-          </a:p>
-          <a:p>
-            <a:pPr algn="l">
-              <a:spcBef>
-                <a:spcPts val="800"/>
-              </a:spcBef>
-            </a:pPr>
-            <a:r>
-              <a:rPr sz="1200">
-                <a:solidFill>
-                  <a:srgbClr val="E9EDEF"/>
-                </a:solidFill>
-                <a:latin typeface="Calibri"/>
-              </a:rPr>
-              <a:t>• Quarterly public impact reports</a:t>
-            </a:r>
-          </a:p>
-        </p:txBody>
-      </p:sp>
-      <p:sp>
-        <p:nvSpPr>
-          <p:cNvPr id="11" name="TextBox 10"/>
+            <a:pPr algn="l"/>
+            <a:r>
+              <a:rPr sz="1800" b="1">
+                <a:solidFill>
+                  <a:srgbClr val="FFE9B8"/>
+                </a:solidFill>
+                <a:latin typeface="Calibri"/>
+              </a:rPr>
+              <a:t>Honest target: +5-15 percentage points on Maths NSC outcomes</a:t>
+            </a:r>
+          </a:p>
+        </p:txBody>
+      </p:sp>
+      <p:sp>
+        <p:nvSpPr>
+          <p:cNvPr id="8" name="TextBox 7"/>
           <p:cNvSpPr txBox="1"/>
           <p:nvPr/>
         </p:nvSpPr>
         <p:spPr>
           <a:xfrm>
-            <a:off x="548640" y="6126480"/>
-            <a:ext cx="11064240" cy="457200"/>
+            <a:off x="548640" y="5486400"/>
+            <a:ext cx="11064240" cy="731520"/>
           </a:xfrm>
           <a:prstGeom prst="rect">
             <a:avLst/>
@@ -8135,15 +12147,15 @@
           </a:bodyPr>
           <a:lstStyle/>
           <a:p>
-            <a:pPr algn="ctr"/>
-            <a:r>
-              <a:rPr sz="1400" b="1">
-                <a:solidFill>
-                  <a:srgbClr val="FFE9B8"/>
-                </a:solidFill>
-                <a:latin typeface="Calibri"/>
-              </a:rPr>
-              <a:t>Refusing a premium tier is a design constraint, not an oversight.</a:t>
+            <a:pPr algn="l"/>
+            <a:r>
+              <a:rPr sz="1300" b="0">
+                <a:solidFill>
+                  <a:srgbClr val="8696A0"/>
+                </a:solidFill>
+                <a:latin typeface="Calibri"/>
+              </a:rPr>
+              <a:t>What we will NOT claim: that we replace teachers, fix poverty, or substitute for actual practice. We measure outcomes, publish quarterly, and refuse to overclaim.</a:t>
             </a:r>
           </a:p>
         </p:txBody>
@@ -8204,7 +12216,7 @@
                 </a:solidFill>
                 <a:latin typeface="Calibri"/>
               </a:rPr>
-              <a:t>Roadmap</a:t>
+              <a:t>Who is this for?</a:t>
             </a:r>
           </a:p>
         </p:txBody>
@@ -8233,13 +12245,13 @@
           <a:p>
             <a:pPr algn="l"/>
             <a:r>
-              <a:rPr sz="3000" b="1">
+              <a:rPr sz="3200" b="1">
                 <a:solidFill>
                   <a:srgbClr val="FFFFFF"/>
                 </a:solidFill>
                 <a:latin typeface="Calibri"/>
               </a:rPr>
-              <a:t>From hackathon prototype to national pilot.</a:t>
+              <a:t>Phase 1: Quintile 1–3 NSC learners.</a:t>
             </a:r>
           </a:p>
         </p:txBody>
@@ -8296,7 +12308,161 @@
         <p:spPr>
           <a:xfrm>
             <a:off x="548640" y="2468880"/>
-            <a:ext cx="1371600" cy="411480"/>
+            <a:ext cx="3931920" cy="457200"/>
+          </a:xfrm>
+          <a:prstGeom prst="roundRect">
+            <a:avLst/>
+          </a:prstGeom>
+          <a:solidFill>
+            <a:srgbClr val="00A884"/>
+          </a:solidFill>
+          <a:ln>
+            <a:noFill/>
+          </a:ln>
+        </p:spPr>
+        <p:style>
+          <a:lnRef idx="1">
+            <a:schemeClr val="accent1"/>
+          </a:lnRef>
+          <a:fillRef idx="3">
+            <a:schemeClr val="accent1"/>
+          </a:fillRef>
+          <a:effectRef idx="2">
+            <a:schemeClr val="accent1"/>
+          </a:effectRef>
+          <a:fontRef idx="minor">
+            <a:schemeClr val="lt1"/>
+          </a:fontRef>
+        </p:style>
+        <p:txBody>
+          <a:bodyPr rtlCol="0" anchor="ctr" lIns="137160" rIns="137160"/>
+          <a:lstStyle/>
+          <a:p>
+            <a:pPr algn="ctr"/>
+            <a:r>
+              <a:rPr sz="1200" b="1">
+                <a:solidFill>
+                  <a:srgbClr val="03110D"/>
+                </a:solidFill>
+              </a:rPr>
+              <a:t>Persona · Thandi (WhatsApp)</a:t>
+            </a:r>
+          </a:p>
+        </p:txBody>
+      </p:sp>
+      <p:sp>
+        <p:nvSpPr>
+          <p:cNvPr id="6" name="TextBox 5"/>
+          <p:cNvSpPr txBox="1"/>
+          <p:nvPr/>
+        </p:nvSpPr>
+        <p:spPr>
+          <a:xfrm>
+            <a:off x="548640" y="3017520"/>
+            <a:ext cx="5303520" cy="3200400"/>
+          </a:xfrm>
+          <a:prstGeom prst="rect">
+            <a:avLst/>
+          </a:prstGeom>
+          <a:noFill/>
+        </p:spPr>
+        <p:txBody>
+          <a:bodyPr wrap="square">
+            <a:spAutoFit/>
+          </a:bodyPr>
+          <a:lstStyle/>
+          <a:p>
+            <a:pPr algn="l">
+              <a:spcBef>
+                <a:spcPts val="800"/>
+              </a:spcBef>
+            </a:pPr>
+            <a:r>
+              <a:rPr sz="1400">
+                <a:solidFill>
+                  <a:srgbClr val="E9EDEF"/>
+                </a:solidFill>
+                <a:latin typeface="Calibri"/>
+              </a:rPr>
+              <a:t>• Grade 11 · Soweto · isiZulu first-language</a:t>
+            </a:r>
+          </a:p>
+          <a:p>
+            <a:pPr algn="l">
+              <a:spcBef>
+                <a:spcPts val="800"/>
+              </a:spcBef>
+            </a:pPr>
+            <a:r>
+              <a:rPr sz="1400">
+                <a:solidFill>
+                  <a:srgbClr val="E9EDEF"/>
+                </a:solidFill>
+                <a:latin typeface="Calibri"/>
+              </a:rPr>
+              <a:t>• Mother is a domestic worker. Father unemployed.</a:t>
+            </a:r>
+          </a:p>
+          <a:p>
+            <a:pPr algn="l">
+              <a:spcBef>
+                <a:spcPts val="800"/>
+              </a:spcBef>
+            </a:pPr>
+            <a:r>
+              <a:rPr sz="1400">
+                <a:solidFill>
+                  <a:srgbClr val="E9EDEF"/>
+                </a:solidFill>
+                <a:latin typeface="Calibri"/>
+              </a:rPr>
+              <a:t>• Basic Android + Vodacom social bundle.</a:t>
+            </a:r>
+          </a:p>
+          <a:p>
+            <a:pPr algn="l">
+              <a:spcBef>
+                <a:spcPts val="800"/>
+              </a:spcBef>
+            </a:pPr>
+            <a:r>
+              <a:rPr sz="1400">
+                <a:solidFill>
+                  <a:srgbClr val="E9EDEF"/>
+                </a:solidFill>
+                <a:latin typeface="Calibri"/>
+              </a:rPr>
+              <a:t>• Currently averaging 50%. Wants a bachelor pass.</a:t>
+            </a:r>
+          </a:p>
+          <a:p>
+            <a:pPr algn="l">
+              <a:spcBef>
+                <a:spcPts val="800"/>
+              </a:spcBef>
+            </a:pPr>
+            <a:r>
+              <a:rPr sz="1400">
+                <a:solidFill>
+                  <a:srgbClr val="E9EDEF"/>
+                </a:solidFill>
+                <a:latin typeface="Calibri"/>
+              </a:rPr>
+              <a:t>• Uses our tutor on WhatsApp at night, mostly text.</a:t>
+            </a:r>
+          </a:p>
+        </p:txBody>
+      </p:sp>
+      <p:sp>
+        <p:nvSpPr>
+          <p:cNvPr id="7" name="Rounded Rectangle 6"/>
+          <p:cNvSpPr/>
+          <p:nvPr/>
+        </p:nvSpPr>
+        <p:spPr>
+          <a:xfrm>
+            <a:off x="6400800" y="2468880"/>
+            <a:ext cx="3931920" cy="457200"/>
           </a:xfrm>
           <a:prstGeom prst="roundRect">
             <a:avLst/>
@@ -8333,56 +12499,21 @@
                   <a:srgbClr val="03110D"/>
                 </a:solidFill>
               </a:rPr>
-              <a:t>Now</a:t>
-            </a:r>
-          </a:p>
-        </p:txBody>
-      </p:sp>
-      <p:sp>
-        <p:nvSpPr>
-          <p:cNvPr id="6" name="TextBox 5"/>
+              <a:t>Persona · Lethabo (USSD)</a:t>
+            </a:r>
+          </a:p>
+        </p:txBody>
+      </p:sp>
+      <p:sp>
+        <p:nvSpPr>
+          <p:cNvPr id="8" name="TextBox 7"/>
           <p:cNvSpPr txBox="1"/>
           <p:nvPr/>
         </p:nvSpPr>
         <p:spPr>
           <a:xfrm>
-            <a:off x="2011680" y="2468880"/>
-            <a:ext cx="2286000" cy="411480"/>
-          </a:xfrm>
-          <a:prstGeom prst="rect">
-            <a:avLst/>
-          </a:prstGeom>
-          <a:noFill/>
-        </p:spPr>
-        <p:txBody>
-          <a:bodyPr wrap="square">
-            <a:spAutoFit/>
-          </a:bodyPr>
-          <a:lstStyle/>
-          <a:p>
-            <a:pPr algn="l"/>
-            <a:r>
-              <a:rPr sz="1600" b="1">
-                <a:solidFill>
-                  <a:srgbClr val="FFFFFF"/>
-                </a:solidFill>
-                <a:latin typeface="Calibri"/>
-              </a:rPr>
-              <a:t>Hackathon</a:t>
-            </a:r>
-          </a:p>
-        </p:txBody>
-      </p:sp>
-      <p:sp>
-        <p:nvSpPr>
-          <p:cNvPr id="7" name="TextBox 6"/>
-          <p:cNvSpPr txBox="1"/>
-          <p:nvPr/>
-        </p:nvSpPr>
-        <p:spPr>
-          <a:xfrm>
-            <a:off x="548640" y="3108960"/>
-            <a:ext cx="3657600" cy="3200400"/>
+            <a:off x="6400800" y="3017520"/>
+            <a:ext cx="5303520" cy="3200400"/>
           </a:xfrm>
           <a:prstGeom prst="rect">
             <a:avLst/>
@@ -8401,13 +12532,13 @@
               </a:spcBef>
             </a:pPr>
             <a:r>
-              <a:rPr sz="1200">
+              <a:rPr sz="1400">
                 <a:solidFill>
                   <a:srgbClr val="E9EDEF"/>
                 </a:solidFill>
                 <a:latin typeface="Calibri"/>
               </a:rPr>
-              <a:t>• Both channels working end-to-end</a:t>
+              <a:t>• Grade 12 · rural Limpopo · Sepedi first-language</a:t>
             </a:r>
           </a:p>
           <a:p>
@@ -8417,13 +12548,13 @@
               </a:spcBef>
             </a:pPr>
             <a:r>
-              <a:rPr sz="1200">
+              <a:rPr sz="1400">
                 <a:solidFill>
                   <a:srgbClr val="E9EDEF"/>
                 </a:solidFill>
                 <a:latin typeface="Calibri"/>
               </a:rPr>
-              <a:t>• Real NSC questions, cited sources</a:t>
+              <a:t>• Lives with grandmother. No parents.</a:t>
             </a:r>
           </a:p>
           <a:p>
@@ -8433,13 +12564,13 @@
               </a:spcBef>
             </a:pPr>
             <a:r>
-              <a:rPr sz="1200">
+              <a:rPr sz="1400">
                 <a:solidFill>
                   <a:srgbClr val="E9EDEF"/>
                 </a:solidFill>
                 <a:latin typeface="Calibri"/>
               </a:rPr>
-              <a:t>• CAPS mappings against ATPs</a:t>
+              <a:t>• Nokia feature phone — no smartphone.</a:t>
             </a:r>
           </a:p>
           <a:p>
@@ -8449,124 +12580,15 @@
               </a:spcBef>
             </a:pPr>
             <a:r>
-              <a:rPr sz="1200">
+              <a:rPr sz="1400">
                 <a:solidFill>
                   <a:srgbClr val="E9EDEF"/>
                 </a:solidFill>
                 <a:latin typeface="Calibri"/>
               </a:rPr>
-              <a:t>• Mock providers (offline demo)</a:t>
-            </a:r>
-          </a:p>
-        </p:txBody>
-      </p:sp>
-      <p:sp>
-        <p:nvSpPr>
-          <p:cNvPr id="8" name="Rounded Rectangle 7"/>
-          <p:cNvSpPr/>
-          <p:nvPr/>
-        </p:nvSpPr>
-        <p:spPr>
-          <a:xfrm>
-            <a:off x="4389120" y="2468880"/>
-            <a:ext cx="1371600" cy="411480"/>
-          </a:xfrm>
-          <a:prstGeom prst="roundRect">
-            <a:avLst/>
-          </a:prstGeom>
-          <a:solidFill>
-            <a:srgbClr val="FFB347"/>
-          </a:solidFill>
-          <a:ln>
-            <a:noFill/>
-          </a:ln>
-        </p:spPr>
-        <p:style>
-          <a:lnRef idx="1">
-            <a:schemeClr val="accent1"/>
-          </a:lnRef>
-          <a:fillRef idx="3">
-            <a:schemeClr val="accent1"/>
-          </a:fillRef>
-          <a:effectRef idx="2">
-            <a:schemeClr val="accent1"/>
-          </a:effectRef>
-          <a:fontRef idx="minor">
-            <a:schemeClr val="lt1"/>
-          </a:fontRef>
-        </p:style>
-        <p:txBody>
-          <a:bodyPr rtlCol="0" anchor="ctr" lIns="137160" rIns="137160"/>
-          <a:lstStyle/>
-          <a:p>
-            <a:pPr algn="ctr"/>
-            <a:r>
-              <a:rPr sz="1200" b="1">
-                <a:solidFill>
-                  <a:srgbClr val="03110D"/>
-                </a:solidFill>
-              </a:rPr>
-              <a:t>Q3 2026</a:t>
-            </a:r>
-          </a:p>
-        </p:txBody>
-      </p:sp>
-      <p:sp>
-        <p:nvSpPr>
-          <p:cNvPr id="9" name="TextBox 8"/>
-          <p:cNvSpPr txBox="1"/>
-          <p:nvPr/>
-        </p:nvSpPr>
-        <p:spPr>
-          <a:xfrm>
-            <a:off x="5852160" y="2468880"/>
-            <a:ext cx="2286000" cy="411480"/>
-          </a:xfrm>
-          <a:prstGeom prst="rect">
-            <a:avLst/>
-          </a:prstGeom>
-          <a:noFill/>
-        </p:spPr>
-        <p:txBody>
-          <a:bodyPr wrap="square">
-            <a:spAutoFit/>
-          </a:bodyPr>
-          <a:lstStyle/>
-          <a:p>
-            <a:pPr algn="l"/>
-            <a:r>
-              <a:rPr sz="1600" b="1">
-                <a:solidFill>
-                  <a:srgbClr val="FFFFFF"/>
-                </a:solidFill>
-                <a:latin typeface="Calibri"/>
-              </a:rPr>
-              <a:t>Pilot</a:t>
-            </a:r>
-          </a:p>
-        </p:txBody>
-      </p:sp>
-      <p:sp>
-        <p:nvSpPr>
-          <p:cNvPr id="10" name="TextBox 9"/>
-          <p:cNvSpPr txBox="1"/>
-          <p:nvPr/>
-        </p:nvSpPr>
-        <p:spPr>
-          <a:xfrm>
-            <a:off x="4389120" y="3108960"/>
-            <a:ext cx="3657600" cy="3200400"/>
-          </a:xfrm>
-          <a:prstGeom prst="rect">
-            <a:avLst/>
-          </a:prstGeom>
-          <a:noFill/>
-        </p:spPr>
-        <p:txBody>
-          <a:bodyPr wrap="square">
-            <a:spAutoFit/>
-          </a:bodyPr>
-          <a:lstStyle/>
+              <a:t>• 65% mid-year. Wants 70%+ for accounting at UJ.</a:t>
+            </a:r>
+          </a:p>
           <a:p>
             <a:pPr algn="l">
               <a:spcBef>
@@ -8574,126 +12596,27 @@
               </a:spcBef>
             </a:pPr>
             <a:r>
-              <a:rPr sz="1200">
+              <a:rPr sz="1400">
                 <a:solidFill>
                   <a:srgbClr val="E9EDEF"/>
                 </a:solidFill>
                 <a:latin typeface="Calibri"/>
               </a:rPr>
-              <a:t>• Dell AI Factory LLM + VLM live</a:t>
-            </a:r>
-          </a:p>
-          <a:p>
-            <a:pPr algn="l">
-              <a:spcBef>
-                <a:spcPts val="800"/>
-              </a:spcBef>
-            </a:pPr>
-            <a:r>
-              <a:rPr sz="1200">
-                <a:solidFill>
-                  <a:srgbClr val="E9EDEF"/>
-                </a:solidFill>
-                <a:latin typeface="Calibri"/>
-              </a:rPr>
-              <a:t>• Vodacom WhatsApp + USSD partnership</a:t>
-            </a:r>
-          </a:p>
-          <a:p>
-            <a:pPr algn="l">
-              <a:spcBef>
-                <a:spcPts val="800"/>
-              </a:spcBef>
-            </a:pPr>
-            <a:r>
-              <a:rPr sz="1200">
-                <a:solidFill>
-                  <a:srgbClr val="E9EDEF"/>
-                </a:solidFill>
-                <a:latin typeface="Calibri"/>
-              </a:rPr>
-              <a:t>• 5 schools across 2 provinces</a:t>
-            </a:r>
-          </a:p>
-          <a:p>
-            <a:pPr algn="l">
-              <a:spcBef>
-                <a:spcPts val="800"/>
-              </a:spcBef>
-            </a:pPr>
-            <a:r>
-              <a:rPr sz="1200">
-                <a:solidFill>
-                  <a:srgbClr val="E9EDEF"/>
-                </a:solidFill>
-                <a:latin typeface="Calibri"/>
-              </a:rPr>
-              <a:t>• Educator advisory board (4-6 teachers)</a:t>
-            </a:r>
-          </a:p>
-        </p:txBody>
-      </p:sp>
-      <p:sp>
-        <p:nvSpPr>
-          <p:cNvPr id="11" name="Rounded Rectangle 10"/>
-          <p:cNvSpPr/>
-          <p:nvPr/>
-        </p:nvSpPr>
-        <p:spPr>
-          <a:xfrm>
-            <a:off x="8229600" y="2468880"/>
-            <a:ext cx="1371600" cy="411480"/>
-          </a:xfrm>
-          <a:prstGeom prst="roundRect">
-            <a:avLst/>
-          </a:prstGeom>
-          <a:solidFill>
-            <a:srgbClr val="FFB347"/>
-          </a:solidFill>
-          <a:ln>
-            <a:noFill/>
-          </a:ln>
-        </p:spPr>
-        <p:style>
-          <a:lnRef idx="1">
-            <a:schemeClr val="accent1"/>
-          </a:lnRef>
-          <a:fillRef idx="3">
-            <a:schemeClr val="accent1"/>
-          </a:fillRef>
-          <a:effectRef idx="2">
-            <a:schemeClr val="accent1"/>
-          </a:effectRef>
-          <a:fontRef idx="minor">
-            <a:schemeClr val="lt1"/>
-          </a:fontRef>
-        </p:style>
-        <p:txBody>
-          <a:bodyPr rtlCol="0" anchor="ctr" lIns="137160" rIns="137160"/>
-          <a:lstStyle/>
-          <a:p>
-            <a:pPr algn="ctr"/>
-            <a:r>
-              <a:rPr sz="1200" b="1">
-                <a:solidFill>
-                  <a:srgbClr val="03110D"/>
-                </a:solidFill>
-              </a:rPr>
-              <a:t>2027</a:t>
-            </a:r>
-          </a:p>
-        </p:txBody>
-      </p:sp>
-      <p:sp>
-        <p:nvSpPr>
-          <p:cNvPr id="12" name="TextBox 11"/>
+              <a:t>• Uses our tutor on USSD at school in free periods.</a:t>
+            </a:r>
+          </a:p>
+        </p:txBody>
+      </p:sp>
+      <p:sp>
+        <p:nvSpPr>
+          <p:cNvPr id="9" name="TextBox 8"/>
           <p:cNvSpPr txBox="1"/>
           <p:nvPr/>
         </p:nvSpPr>
         <p:spPr>
           <a:xfrm>
-            <a:off x="9692640" y="2468880"/>
-            <a:ext cx="2286000" cy="411480"/>
+            <a:off x="548640" y="5943600"/>
+            <a:ext cx="11064240" cy="457200"/>
           </a:xfrm>
           <a:prstGeom prst="rect">
             <a:avLst/>
@@ -8706,102 +12629,15 @@
           </a:bodyPr>
           <a:lstStyle/>
           <a:p>
-            <a:pPr algn="l"/>
-            <a:r>
-              <a:rPr sz="1600" b="1">
-                <a:solidFill>
-                  <a:srgbClr val="FFFFFF"/>
-                </a:solidFill>
-                <a:latin typeface="Calibri"/>
-              </a:rPr>
-              <a:t>Scale</a:t>
-            </a:r>
-          </a:p>
-        </p:txBody>
-      </p:sp>
-      <p:sp>
-        <p:nvSpPr>
-          <p:cNvPr id="13" name="TextBox 12"/>
-          <p:cNvSpPr txBox="1"/>
-          <p:nvPr/>
-        </p:nvSpPr>
-        <p:spPr>
-          <a:xfrm>
-            <a:off x="8229600" y="3108960"/>
-            <a:ext cx="3657600" cy="3200400"/>
-          </a:xfrm>
-          <a:prstGeom prst="rect">
-            <a:avLst/>
-          </a:prstGeom>
-          <a:noFill/>
-        </p:spPr>
-        <p:txBody>
-          <a:bodyPr wrap="square">
-            <a:spAutoFit/>
-          </a:bodyPr>
-          <a:lstStyle/>
-          <a:p>
-            <a:pPr algn="l">
-              <a:spcBef>
-                <a:spcPts val="800"/>
-              </a:spcBef>
-            </a:pPr>
-            <a:r>
-              <a:rPr sz="1200">
-                <a:solidFill>
-                  <a:srgbClr val="E9EDEF"/>
-                </a:solidFill>
-                <a:latin typeface="Calibri"/>
-              </a:rPr>
-              <a:t>• All 11 official spoken languages educator-validated + SA Sign Language</a:t>
-            </a:r>
-          </a:p>
-          <a:p>
-            <a:pPr algn="l">
-              <a:spcBef>
-                <a:spcPts val="800"/>
-              </a:spcBef>
-            </a:pPr>
-            <a:r>
-              <a:rPr sz="1200">
-                <a:solidFill>
-                  <a:srgbClr val="E9EDEF"/>
-                </a:solidFill>
-                <a:latin typeface="Calibri"/>
-              </a:rPr>
-              <a:t>• Maths Lit, Sciences, Accounting</a:t>
-            </a:r>
-          </a:p>
-          <a:p>
-            <a:pPr algn="l">
-              <a:spcBef>
-                <a:spcPts val="800"/>
-              </a:spcBef>
-            </a:pPr>
-            <a:r>
-              <a:rPr sz="1200">
-                <a:solidFill>
-                  <a:srgbClr val="E9EDEF"/>
-                </a:solidFill>
-                <a:latin typeface="Calibri"/>
-              </a:rPr>
-              <a:t>• Class-level analytics for teachers</a:t>
-            </a:r>
-          </a:p>
-          <a:p>
-            <a:pPr algn="l">
-              <a:spcBef>
-                <a:spcPts val="800"/>
-              </a:spcBef>
-            </a:pPr>
-            <a:r>
-              <a:rPr sz="1200">
-                <a:solidFill>
-                  <a:srgbClr val="E9EDEF"/>
-                </a:solidFill>
-                <a:latin typeface="Calibri"/>
-              </a:rPr>
-              <a:t>• DBE adoption discussions</a:t>
+            <a:pPr algn="ctr"/>
+            <a:r>
+              <a:rPr sz="1300" b="0">
+                <a:solidFill>
+                  <a:srgbClr val="8696A0"/>
+                </a:solidFill>
+                <a:latin typeface="Calibri"/>
+              </a:rPr>
+              <a:t>Phase 2: Grades 8–10 + Maths Literacy. Phase 3: Sciences, Accounting, 11 official spoken languages + SA Sign Language (video channel).</a:t>
             </a:r>
           </a:p>
         </p:txBody>

--- a/pitch/AI_Tutor_Pitch.pptx
+++ b/pitch/AI_Tutor_Pitch.pptx
@@ -513,7 +513,7 @@
           <a:lstStyle/>
           <a:p>
             <a:r>
-              <a:t>Open with the mission, not the tech. AI Tutor is a public-good tutor that reaches every learner in South Africa — smartphone or feature phone, any of the 11 official languages. The two device mockups are placeholders; final version replaces them with real photos of SA learners using the app. Powered by Dell AI Factory. Zero-rated on Vodacom. CAPS-aligned.</a:t>
+              <a:t>Open with the mission, not the tech. EduConnect AI Tutor is a public-good tutor that reaches every learner in South Africa — smartphone or feature phone, any of the 11 official languages. The two device mockups are placeholders; final version replaces them with real photos of SA learners using the app. Powered by Dell AI Factory. Zero-rated on Vodacom. CAPS-aligned.</a:t>
             </a:r>
           </a:p>
         </p:txBody>
@@ -793,7 +793,7 @@
           <a:lstStyle/>
           <a:p>
             <a:r>
-              <a:t>Open with the equity story. We're a CAPS-aligned multilingual AI tutor that meets every learner — smartphone or feature phone — where they are. Powered by Dell AI Factory. Zero-rated on Vodacom.</a:t>
+              <a:t>Open with the equity story. EduConnect AI Tutor is a CAPS-aligned multilingual tutor that meets every learner — smartphone or feature phone — where they are. Powered by Dell AI Factory. Zero-rated on Vodacom.</a:t>
             </a:r>
           </a:p>
         </p:txBody>
@@ -1073,7 +1073,7 @@
           <a:lstStyle/>
           <a:p>
             <a:r>
-              <a:t>This is the demo you'll record. Six screens, one continuous flow, real NSC content, no answers given away, mark-scheme-authentic. When an executive asks 'is this real?' — this is the slide you point to.</a:t>
+              <a:t>This is the EduConnect demo you'll record. Six screens, one continuous flow, real NSC content, no answers given away, mark-scheme-authentic. When an executive asks 'is this real?' — this is the slide you point to.</a:t>
             </a:r>
           </a:p>
         </p:txBody>
@@ -4372,13 +4372,13 @@
           <a:p>
             <a:pPr algn="l"/>
             <a:r>
-              <a:rPr sz="7200" b="1">
+              <a:rPr sz="5600" b="1">
                 <a:solidFill>
                   <a:srgbClr val="FFFFFF"/>
                 </a:solidFill>
                 <a:latin typeface="Calibri"/>
               </a:rPr>
-              <a:t>AI Tutor</a:t>
+              <a:t>EduConnect AI Tutor</a:t>
             </a:r>
           </a:p>
         </p:txBody>
@@ -6977,13 +6977,13 @@
           <a:p>
             <a:pPr algn="l"/>
             <a:r>
-              <a:rPr sz="7200" b="1">
+              <a:rPr sz="5400" b="1">
                 <a:solidFill>
                   <a:srgbClr val="FFFFFF"/>
                 </a:solidFill>
                 <a:latin typeface="Calibri"/>
               </a:rPr>
-              <a:t>AI Tutor</a:t>
+              <a:t>EduConnect AI Tutor</a:t>
             </a:r>
           </a:p>
         </p:txBody>

--- a/pitch/AI_Tutor_Pitch.pptx
+++ b/pitch/AI_Tutor_Pitch.pptx
@@ -17,6 +17,8 @@
     <p:sldId id="265" r:id="rId17"/>
     <p:sldId id="266" r:id="rId18"/>
     <p:sldId id="267" r:id="rId19"/>
+    <p:sldId id="268" r:id="rId20"/>
+    <p:sldId id="269" r:id="rId21"/>
   </p:sldIdLst>
   <p:sldSz cx="12188952" cy="6858000" type="screen4x3"/>
   <p:notesSz cx="6858000" cy="9144000"/>
@@ -583,7 +585,7 @@
           <a:lstStyle/>
           <a:p>
             <a:r>
-              <a:t>Three pillars, concrete commitments under each. The closing line is the most important: judges expect a freemium model. Saying out loud that we refuse it is what makes a sponsor know this is real.</a:t>
+              <a:t>Don't oversell. Hattie meta-analysis is real; tutoring uplifts; we are a force multiplier for motivated learners with access to a teacher. We will measure and publish quarterly impact. Honesty here is what separates a serious public-good service from another tech bet.</a:t>
             </a:r>
           </a:p>
         </p:txBody>
@@ -653,7 +655,7 @@
           <a:lstStyle/>
           <a:p>
             <a:r>
-              <a:t>Three phases, six months apart. Pilot is the make-or-break: 5 schools, 2 provinces, real LLM, real Vodacom traffic, real teacher review. By Q3 2026 we know if the uplift target lands.</a:t>
+              <a:t>Concrete personas. Thandi is the WhatsApp learner — has a smartphone, limited data, needs zero-rating. Lethabo is the USSD learner — feature phone, no other path to AI tutoring exists. Both are real archetypes covering the under-resourced 75% of SA learners.</a:t>
             </a:r>
           </a:p>
         </p:txBody>
@@ -723,6 +725,146 @@
           <a:lstStyle/>
           <a:p>
             <a:r>
+              <a:t>Three pillars, concrete commitments under each. The closing line is the most important: judges expect a freemium model. Saying out loud that we refuse it is what makes a sponsor know this is real.</a:t>
+            </a:r>
+          </a:p>
+        </p:txBody>
+      </p:sp>
+      <p:sp>
+        <p:nvSpPr>
+          <p:cNvPr id="4" name="Slide Number Placeholder 3"/>
+          <p:cNvSpPr>
+            <a:spLocks noGrp="1"/>
+          </p:cNvSpPr>
+          <p:nvPr>
+            <p:ph type="sldNum" idx="5" sz="quarter"/>
+          </p:nvPr>
+        </p:nvSpPr>
+        <p:spPr/>
+      </p:sp>
+    </p:spTree>
+  </p:cSld>
+  <p:clrMapOvr>
+    <a:masterClrMapping/>
+  </p:clrMapOvr>
+</p:notes>
+</file>
+
+<file path=ppt/notesSlides/notesSlide13.xml><?xml version="1.0" encoding="utf-8"?>
+<p:notes xmlns:a="http://schemas.openxmlformats.org/drawingml/2006/main" xmlns:p="http://schemas.openxmlformats.org/presentationml/2006/main" xmlns:r="http://schemas.openxmlformats.org/officeDocument/2006/relationships">
+  <p:cSld>
+    <p:spTree>
+      <p:nvGrpSpPr>
+        <p:cNvPr id="1" name=""/>
+        <p:cNvGrpSpPr/>
+        <p:nvPr/>
+      </p:nvGrpSpPr>
+      <p:grpSpPr>
+        <a:xfrm>
+          <a:off x="0" y="0"/>
+          <a:ext cx="0" cy="0"/>
+          <a:chOff x="0" y="0"/>
+          <a:chExt cx="0" cy="0"/>
+        </a:xfrm>
+      </p:grpSpPr>
+      <p:sp>
+        <p:nvSpPr>
+          <p:cNvPr id="2" name="Slide Image Placeholder 1"/>
+          <p:cNvSpPr>
+            <a:spLocks noGrp="1"/>
+          </p:cNvSpPr>
+          <p:nvPr>
+            <p:ph type="sldImg" idx="2"/>
+          </p:nvPr>
+        </p:nvSpPr>
+        <p:spPr/>
+      </p:sp>
+      <p:sp>
+        <p:nvSpPr>
+          <p:cNvPr id="3" name="Notes Placeholder 2"/>
+          <p:cNvSpPr>
+            <a:spLocks noGrp="1"/>
+          </p:cNvSpPr>
+          <p:nvPr>
+            <p:ph type="body" idx="3" sz="quarter"/>
+          </p:nvPr>
+        </p:nvSpPr>
+        <p:spPr/>
+        <p:txBody>
+          <a:bodyPr/>
+          <a:lstStyle/>
+          <a:p>
+            <a:r>
+              <a:t>Three phases, six months apart. Pilot is the make-or-break: 5 schools, 2 provinces, real LLM, real Vodacom traffic, real teacher review. By Q3 2026 we know if the uplift target lands.</a:t>
+            </a:r>
+          </a:p>
+        </p:txBody>
+      </p:sp>
+      <p:sp>
+        <p:nvSpPr>
+          <p:cNvPr id="4" name="Slide Number Placeholder 3"/>
+          <p:cNvSpPr>
+            <a:spLocks noGrp="1"/>
+          </p:cNvSpPr>
+          <p:nvPr>
+            <p:ph type="sldNum" idx="5" sz="quarter"/>
+          </p:nvPr>
+        </p:nvSpPr>
+        <p:spPr/>
+      </p:sp>
+    </p:spTree>
+  </p:cSld>
+  <p:clrMapOvr>
+    <a:masterClrMapping/>
+  </p:clrMapOvr>
+</p:notes>
+</file>
+
+<file path=ppt/notesSlides/notesSlide14.xml><?xml version="1.0" encoding="utf-8"?>
+<p:notes xmlns:a="http://schemas.openxmlformats.org/drawingml/2006/main" xmlns:p="http://schemas.openxmlformats.org/presentationml/2006/main" xmlns:r="http://schemas.openxmlformats.org/officeDocument/2006/relationships">
+  <p:cSld>
+    <p:spTree>
+      <p:nvGrpSpPr>
+        <p:cNvPr id="1" name=""/>
+        <p:cNvGrpSpPr/>
+        <p:nvPr/>
+      </p:nvGrpSpPr>
+      <p:grpSpPr>
+        <a:xfrm>
+          <a:off x="0" y="0"/>
+          <a:ext cx="0" cy="0"/>
+          <a:chOff x="0" y="0"/>
+          <a:chExt cx="0" cy="0"/>
+        </a:xfrm>
+      </p:grpSpPr>
+      <p:sp>
+        <p:nvSpPr>
+          <p:cNvPr id="2" name="Slide Image Placeholder 1"/>
+          <p:cNvSpPr>
+            <a:spLocks noGrp="1"/>
+          </p:cNvSpPr>
+          <p:nvPr>
+            <p:ph type="sldImg" idx="2"/>
+          </p:nvPr>
+        </p:nvSpPr>
+        <p:spPr/>
+      </p:sp>
+      <p:sp>
+        <p:nvSpPr>
+          <p:cNvPr id="3" name="Notes Placeholder 2"/>
+          <p:cNvSpPr>
+            <a:spLocks noGrp="1"/>
+          </p:cNvSpPr>
+          <p:nvPr>
+            <p:ph type="body" idx="3" sz="quarter"/>
+          </p:nvPr>
+        </p:nvSpPr>
+        <p:spPr/>
+        <p:txBody>
+          <a:bodyPr/>
+          <a:lstStyle/>
+          <a:p>
+            <a:r>
               <a:t>Four asks, each tied to a partner. Be specific about what each partner gives us — vague asks get vague yeses. Close with the repo URL so judges can run the code themselves.</a:t>
             </a:r>
           </a:p>
@@ -1143,7 +1285,7 @@
           <a:lstStyle/>
           <a:p>
             <a:r>
-              <a:t>Five moats. The strongest two: USSD reach (literal, measurable) and CAPS-aligned + sovereign hosting (institutional procurement). Meta cannot replicate USSD without rebuilding their stack. They cannot replicate CAPS without years of SA pedagogical relationships.</a:t>
+              <a:t>Meta Llama is the family; Groq is our pilot host; Dell AI Factory NIM is our production host. Same API contract on both sides — swap via one env var.</a:t>
             </a:r>
           </a:p>
         </p:txBody>
@@ -1213,7 +1355,7 @@
           <a:lstStyle/>
           <a:p>
             <a:r>
-              <a:t>Don't oversell. Hattie meta-analysis is real; tutoring uplifts; we are a force multiplier for motivated learners with access to a teacher. We will measure and publish quarterly impact. Honesty here is what separates a serious public-good service from another tech bet.</a:t>
+              <a:t>This is the request path in production. Green = deterministic guarantees, orange = channel-specific, panel-grey = generic infrastructure. The 5-pill router row is the KEY design decision: not everything hits the LLM.</a:t>
             </a:r>
           </a:p>
         </p:txBody>
@@ -1283,7 +1425,7 @@
           <a:lstStyle/>
           <a:p>
             <a:r>
-              <a:t>Concrete personas. Thandi is the WhatsApp learner — has a smartphone, limited data, needs zero-rating. Lethabo is the USSD learner — feature phone, no other path to AI tutoring exists. Both are real archetypes covering the under-resourced 75% of SA learners.</a:t>
+              <a:t>Five moats. The strongest two: USSD reach (literal, measurable) and CAPS-aligned + sovereign hosting (institutional procurement). Meta cannot replicate USSD without rebuilding their stack. They cannot replicate CAPS without years of SA pedagogical relationships.</a:t>
             </a:r>
           </a:p>
         </p:txBody>
@@ -5116,11 +5258,11 @@
             <a:r>
               <a:rPr sz="1400" b="1">
                 <a:solidFill>
-                  <a:srgbClr val="00A884"/>
-                </a:solidFill>
-                <a:latin typeface="Calibri"/>
-              </a:rPr>
-              <a:t>Equality · Safety · Trust</a:t>
+                  <a:srgbClr val="FFB347"/>
+                </a:solidFill>
+                <a:latin typeface="Calibri"/>
+              </a:rPr>
+              <a:t>Will it work?</a:t>
             </a:r>
           </a:p>
         </p:txBody>
@@ -5155,7 +5297,7 @@
                 </a:solidFill>
                 <a:latin typeface="Calibri"/>
               </a:rPr>
-              <a:t>Built right, not built fast.</a:t>
+              <a:t>Yes — as a complement, not a replacement.</a:t>
             </a:r>
           </a:p>
         </p:txBody>
@@ -5172,203 +5314,6 @@
             <a:ext cx="3657600" cy="50800"/>
           </a:xfrm>
           <a:prstGeom prst="rect">
-            <a:avLst/>
-          </a:prstGeom>
-          <a:solidFill>
-            <a:srgbClr val="00A884"/>
-          </a:solidFill>
-          <a:ln>
-            <a:noFill/>
-          </a:ln>
-        </p:spPr>
-        <p:style>
-          <a:lnRef idx="1">
-            <a:schemeClr val="accent1"/>
-          </a:lnRef>
-          <a:fillRef idx="3">
-            <a:schemeClr val="accent1"/>
-          </a:fillRef>
-          <a:effectRef idx="2">
-            <a:schemeClr val="accent1"/>
-          </a:effectRef>
-          <a:fontRef idx="minor">
-            <a:schemeClr val="lt1"/>
-          </a:fontRef>
-        </p:style>
-        <p:txBody>
-          <a:bodyPr rtlCol="0" anchor="ctr"/>
-          <a:lstStyle/>
-          <a:p>
-            <a:pPr algn="ctr"/>
-          </a:p>
-        </p:txBody>
-      </p:sp>
-      <p:sp>
-        <p:nvSpPr>
-          <p:cNvPr id="5" name="Rounded Rectangle 4"/>
-          <p:cNvSpPr/>
-          <p:nvPr/>
-        </p:nvSpPr>
-        <p:spPr>
-          <a:xfrm>
-            <a:off x="548640" y="2468880"/>
-            <a:ext cx="1463040" cy="411480"/>
-          </a:xfrm>
-          <a:prstGeom prst="roundRect">
-            <a:avLst/>
-          </a:prstGeom>
-          <a:solidFill>
-            <a:srgbClr val="00A884"/>
-          </a:solidFill>
-          <a:ln>
-            <a:noFill/>
-          </a:ln>
-        </p:spPr>
-        <p:style>
-          <a:lnRef idx="1">
-            <a:schemeClr val="accent1"/>
-          </a:lnRef>
-          <a:fillRef idx="3">
-            <a:schemeClr val="accent1"/>
-          </a:fillRef>
-          <a:effectRef idx="2">
-            <a:schemeClr val="accent1"/>
-          </a:effectRef>
-          <a:fontRef idx="minor">
-            <a:schemeClr val="lt1"/>
-          </a:fontRef>
-        </p:style>
-        <p:txBody>
-          <a:bodyPr rtlCol="0" anchor="ctr" lIns="137160" rIns="137160"/>
-          <a:lstStyle/>
-          <a:p>
-            <a:pPr algn="ctr"/>
-            <a:r>
-              <a:rPr sz="1400" b="1">
-                <a:solidFill>
-                  <a:srgbClr val="03110D"/>
-                </a:solidFill>
-              </a:rPr>
-              <a:t>Equality</a:t>
-            </a:r>
-          </a:p>
-        </p:txBody>
-      </p:sp>
-      <p:sp>
-        <p:nvSpPr>
-          <p:cNvPr id="6" name="TextBox 5"/>
-          <p:cNvSpPr txBox="1"/>
-          <p:nvPr/>
-        </p:nvSpPr>
-        <p:spPr>
-          <a:xfrm>
-            <a:off x="548640" y="3017520"/>
-            <a:ext cx="3657600" cy="3383280"/>
-          </a:xfrm>
-          <a:prstGeom prst="rect">
-            <a:avLst/>
-          </a:prstGeom>
-          <a:noFill/>
-        </p:spPr>
-        <p:txBody>
-          <a:bodyPr wrap="square">
-            <a:spAutoFit/>
-          </a:bodyPr>
-          <a:lstStyle/>
-          <a:p>
-            <a:pPr algn="l">
-              <a:spcBef>
-                <a:spcPts val="800"/>
-              </a:spcBef>
-            </a:pPr>
-            <a:r>
-              <a:rPr sz="1200">
-                <a:solidFill>
-                  <a:srgbClr val="E9EDEF"/>
-                </a:solidFill>
-                <a:latin typeface="Calibri"/>
-              </a:rPr>
-              <a:t>• Two channels — never device-locked</a:t>
-            </a:r>
-          </a:p>
-          <a:p>
-            <a:pPr algn="l">
-              <a:spcBef>
-                <a:spcPts val="800"/>
-              </a:spcBef>
-            </a:pPr>
-            <a:r>
-              <a:rPr sz="1200">
-                <a:solidFill>
-                  <a:srgbClr val="E9EDEF"/>
-                </a:solidFill>
-                <a:latin typeface="Calibri"/>
-              </a:rPr>
-              <a:t>• Zero at point of use (zero-rated)</a:t>
-            </a:r>
-          </a:p>
-          <a:p>
-            <a:pPr algn="l">
-              <a:spcBef>
-                <a:spcPts val="800"/>
-              </a:spcBef>
-            </a:pPr>
-            <a:r>
-              <a:rPr sz="1200">
-                <a:solidFill>
-                  <a:srgbClr val="E9EDEF"/>
-                </a:solidFill>
-                <a:latin typeface="Calibri"/>
-              </a:rPr>
-              <a:t>• 4 validated + 7 first-pass + SA Sign Language = 12</a:t>
-            </a:r>
-          </a:p>
-          <a:p>
-            <a:pPr algn="l">
-              <a:spcBef>
-                <a:spcPts val="800"/>
-              </a:spcBef>
-            </a:pPr>
-            <a:r>
-              <a:rPr sz="1200">
-                <a:solidFill>
-                  <a:srgbClr val="E9EDEF"/>
-                </a:solidFill>
-                <a:latin typeface="Calibri"/>
-              </a:rPr>
-              <a:t>• Identical brain on both channels</a:t>
-            </a:r>
-          </a:p>
-          <a:p>
-            <a:pPr algn="l">
-              <a:spcBef>
-                <a:spcPts val="800"/>
-              </a:spcBef>
-            </a:pPr>
-            <a:r>
-              <a:rPr sz="1200">
-                <a:solidFill>
-                  <a:srgbClr val="E9EDEF"/>
-                </a:solidFill>
-                <a:latin typeface="Calibri"/>
-              </a:rPr>
-              <a:t>• No premium tier — design constraint</a:t>
-            </a:r>
-          </a:p>
-        </p:txBody>
-      </p:sp>
-      <p:sp>
-        <p:nvSpPr>
-          <p:cNvPr id="7" name="Rounded Rectangle 6"/>
-          <p:cNvSpPr/>
-          <p:nvPr/>
-        </p:nvSpPr>
-        <p:spPr>
-          <a:xfrm>
-            <a:off x="4389120" y="2468880"/>
-            <a:ext cx="1463040" cy="411480"/>
-          </a:xfrm>
-          <a:prstGeom prst="roundRect">
             <a:avLst/>
           </a:prstGeom>
           <a:solidFill>
@@ -5393,31 +5338,58 @@
           </a:fontRef>
         </p:style>
         <p:txBody>
-          <a:bodyPr rtlCol="0" anchor="ctr" lIns="137160" rIns="137160"/>
+          <a:bodyPr rtlCol="0" anchor="ctr"/>
           <a:lstStyle/>
           <a:p>
             <a:pPr algn="ctr"/>
-            <a:r>
-              <a:rPr sz="1400" b="1">
-                <a:solidFill>
-                  <a:srgbClr val="03110D"/>
-                </a:solidFill>
-              </a:rPr>
-              <a:t>Safety</a:t>
-            </a:r>
-          </a:p>
-        </p:txBody>
-      </p:sp>
-      <p:sp>
-        <p:nvSpPr>
-          <p:cNvPr id="8" name="TextBox 7"/>
+          </a:p>
+        </p:txBody>
+      </p:sp>
+      <p:sp>
+        <p:nvSpPr>
+          <p:cNvPr id="5" name="TextBox 4"/>
           <p:cNvSpPr txBox="1"/>
           <p:nvPr/>
         </p:nvSpPr>
         <p:spPr>
           <a:xfrm>
-            <a:off x="4389120" y="3017520"/>
-            <a:ext cx="3657600" cy="3383280"/>
+            <a:off x="548640" y="2468880"/>
+            <a:ext cx="11064240" cy="457200"/>
+          </a:xfrm>
+          <a:prstGeom prst="rect">
+            <a:avLst/>
+          </a:prstGeom>
+          <a:noFill/>
+        </p:spPr>
+        <p:txBody>
+          <a:bodyPr wrap="square">
+            <a:spAutoFit/>
+          </a:bodyPr>
+          <a:lstStyle/>
+          <a:p>
+            <a:pPr algn="l"/>
+            <a:r>
+              <a:rPr sz="1600" b="1">
+                <a:solidFill>
+                  <a:srgbClr val="00A884"/>
+                </a:solidFill>
+                <a:latin typeface="Calibri"/>
+              </a:rPr>
+              <a:t>Why we expect uplift</a:t>
+            </a:r>
+          </a:p>
+        </p:txBody>
+      </p:sp>
+      <p:sp>
+        <p:nvSpPr>
+          <p:cNvPr id="6" name="TextBox 5"/>
+          <p:cNvSpPr txBox="1"/>
+          <p:nvPr/>
+        </p:nvSpPr>
+        <p:spPr>
+          <a:xfrm>
+            <a:off x="548640" y="2834640"/>
+            <a:ext cx="11064240" cy="2103120"/>
           </a:xfrm>
           <a:prstGeom prst="rect">
             <a:avLst/>
@@ -5436,13 +5408,13 @@
               </a:spcBef>
             </a:pPr>
             <a:r>
-              <a:rPr sz="1200">
+              <a:rPr sz="1500">
                 <a:solidFill>
                   <a:srgbClr val="E9EDEF"/>
                 </a:solidFill>
                 <a:latin typeface="Calibri"/>
               </a:rPr>
-              <a:t>• CAPS-bounded — no off-topic chat</a:t>
+              <a:t>• Diagnostic feedback has the highest effect size in education research (Hattie, d ≈ 0.7-1.0).</a:t>
             </a:r>
           </a:p>
           <a:p>
@@ -5452,13 +5424,13 @@
               </a:spcBef>
             </a:pPr>
             <a:r>
-              <a:rPr sz="1200">
+              <a:rPr sz="1500">
                 <a:solidFill>
                   <a:srgbClr val="E9EDEF"/>
                 </a:solidFill>
                 <a:latin typeface="Calibri"/>
               </a:rPr>
-              <a:t>• Verified maths in code, not LLM</a:t>
+              <a:t>• Past-paper practice is the single best predictor of NSC outcomes — we give every learner the full archive, free.</a:t>
             </a:r>
           </a:p>
           <a:p>
@@ -5468,13 +5440,13 @@
               </a:spcBef>
             </a:pPr>
             <a:r>
-              <a:rPr sz="1200">
+              <a:rPr sz="1500">
                 <a:solidFill>
                   <a:srgbClr val="E9EDEF"/>
                 </a:solidFill>
                 <a:latin typeface="Calibri"/>
               </a:rPr>
-              <a:t>• POPIA-aligned, SA-hosted</a:t>
+              <a:t>• Mother-tongue access reduces cognitive load — we deliver in en/af/zu/xh.</a:t>
             </a:r>
           </a:p>
           <a:p>
@@ -5484,94 +5456,27 @@
               </a:spcBef>
             </a:pPr>
             <a:r>
-              <a:rPr sz="1200">
+              <a:rPr sz="1500">
                 <a:solidFill>
                   <a:srgbClr val="E9EDEF"/>
                 </a:solidFill>
                 <a:latin typeface="Calibri"/>
               </a:rPr>
-              <a:t>• No PII beyond phone number</a:t>
-            </a:r>
-          </a:p>
-          <a:p>
-            <a:pPr algn="l">
-              <a:spcBef>
-                <a:spcPts val="800"/>
-              </a:spcBef>
-            </a:pPr>
-            <a:r>
-              <a:rPr sz="1200">
-                <a:solidFill>
-                  <a:srgbClr val="E9EDEF"/>
-                </a:solidFill>
-                <a:latin typeface="Calibri"/>
-              </a:rPr>
-              <a:t>• Reporting → real educator escalation</a:t>
-            </a:r>
-          </a:p>
-        </p:txBody>
-      </p:sp>
-      <p:sp>
-        <p:nvSpPr>
-          <p:cNvPr id="9" name="Rounded Rectangle 8"/>
-          <p:cNvSpPr/>
-          <p:nvPr/>
-        </p:nvSpPr>
-        <p:spPr>
-          <a:xfrm>
-            <a:off x="8229600" y="2468880"/>
-            <a:ext cx="1463040" cy="411480"/>
-          </a:xfrm>
-          <a:prstGeom prst="roundRect">
-            <a:avLst/>
-          </a:prstGeom>
-          <a:solidFill>
-            <a:srgbClr val="9CFF8C"/>
-          </a:solidFill>
-          <a:ln>
-            <a:noFill/>
-          </a:ln>
-        </p:spPr>
-        <p:style>
-          <a:lnRef idx="1">
-            <a:schemeClr val="accent1"/>
-          </a:lnRef>
-          <a:fillRef idx="3">
-            <a:schemeClr val="accent1"/>
-          </a:fillRef>
-          <a:effectRef idx="2">
-            <a:schemeClr val="accent1"/>
-          </a:effectRef>
-          <a:fontRef idx="minor">
-            <a:schemeClr val="lt1"/>
-          </a:fontRef>
-        </p:style>
-        <p:txBody>
-          <a:bodyPr rtlCol="0" anchor="ctr" lIns="137160" rIns="137160"/>
-          <a:lstStyle/>
-          <a:p>
-            <a:pPr algn="ctr"/>
-            <a:r>
-              <a:rPr sz="1400" b="1">
-                <a:solidFill>
-                  <a:srgbClr val="03110D"/>
-                </a:solidFill>
-              </a:rPr>
-              <a:t>Trust</a:t>
-            </a:r>
-          </a:p>
-        </p:txBody>
-      </p:sp>
-      <p:sp>
-        <p:nvSpPr>
-          <p:cNvPr id="10" name="TextBox 9"/>
+              <a:t>• Mark-scheme awareness teaches learners to write for the marker, not just to compute.</a:t>
+            </a:r>
+          </a:p>
+        </p:txBody>
+      </p:sp>
+      <p:sp>
+        <p:nvSpPr>
+          <p:cNvPr id="7" name="TextBox 6"/>
           <p:cNvSpPr txBox="1"/>
           <p:nvPr/>
         </p:nvSpPr>
         <p:spPr>
           <a:xfrm>
-            <a:off x="8229600" y="3017520"/>
-            <a:ext cx="3657600" cy="3383280"/>
+            <a:off x="548640" y="5029200"/>
+            <a:ext cx="11064240" cy="457200"/>
           </a:xfrm>
           <a:prstGeom prst="rect">
             <a:avLst/>
@@ -5584,97 +5489,29 @@
           </a:bodyPr>
           <a:lstStyle/>
           <a:p>
-            <a:pPr algn="l">
-              <a:spcBef>
-                <a:spcPts val="800"/>
-              </a:spcBef>
-            </a:pPr>
-            <a:r>
-              <a:rPr sz="1200">
-                <a:solidFill>
-                  <a:srgbClr val="E9EDEF"/>
-                </a:solidFill>
-                <a:latin typeface="Calibri"/>
-              </a:rPr>
-              <a:t>• Sources cited on every screen</a:t>
-            </a:r>
-          </a:p>
-          <a:p>
-            <a:pPr algn="l">
-              <a:spcBef>
-                <a:spcPts val="800"/>
-              </a:spcBef>
-            </a:pPr>
-            <a:r>
-              <a:rPr sz="1200">
-                <a:solidFill>
-                  <a:srgbClr val="E9EDEF"/>
-                </a:solidFill>
-                <a:latin typeface="Calibri"/>
-              </a:rPr>
-              <a:t>• CAPS topic + sub-skill labelled</a:t>
-            </a:r>
-          </a:p>
-          <a:p>
-            <a:pPr algn="l">
-              <a:spcBef>
-                <a:spcPts val="800"/>
-              </a:spcBef>
-            </a:pPr>
-            <a:r>
-              <a:rPr sz="1200">
-                <a:solidFill>
-                  <a:srgbClr val="E9EDEF"/>
-                </a:solidFill>
-                <a:latin typeface="Calibri"/>
-              </a:rPr>
-              <a:t>• Educator-editable curriculum file</a:t>
-            </a:r>
-          </a:p>
-          <a:p>
-            <a:pPr algn="l">
-              <a:spcBef>
-                <a:spcPts val="800"/>
-              </a:spcBef>
-            </a:pPr>
-            <a:r>
-              <a:rPr sz="1200">
-                <a:solidFill>
-                  <a:srgbClr val="E9EDEF"/>
-                </a:solidFill>
-                <a:latin typeface="Calibri"/>
-              </a:rPr>
-              <a:t>• Refuses to give final answers</a:t>
-            </a:r>
-          </a:p>
-          <a:p>
-            <a:pPr algn="l">
-              <a:spcBef>
-                <a:spcPts val="800"/>
-              </a:spcBef>
-            </a:pPr>
-            <a:r>
-              <a:rPr sz="1200">
-                <a:solidFill>
-                  <a:srgbClr val="E9EDEF"/>
-                </a:solidFill>
-                <a:latin typeface="Calibri"/>
-              </a:rPr>
-              <a:t>• Quarterly public impact reports</a:t>
-            </a:r>
-          </a:p>
-        </p:txBody>
-      </p:sp>
-      <p:sp>
-        <p:nvSpPr>
-          <p:cNvPr id="11" name="TextBox 10"/>
+            <a:pPr algn="l"/>
+            <a:r>
+              <a:rPr sz="1800" b="1">
+                <a:solidFill>
+                  <a:srgbClr val="FFE9B8"/>
+                </a:solidFill>
+                <a:latin typeface="Calibri"/>
+              </a:rPr>
+              <a:t>Honest target: +5-15 percentage points on Maths NSC outcomes</a:t>
+            </a:r>
+          </a:p>
+        </p:txBody>
+      </p:sp>
+      <p:sp>
+        <p:nvSpPr>
+          <p:cNvPr id="8" name="TextBox 7"/>
           <p:cNvSpPr txBox="1"/>
           <p:nvPr/>
         </p:nvSpPr>
         <p:spPr>
           <a:xfrm>
-            <a:off x="548640" y="6126480"/>
-            <a:ext cx="11064240" cy="457200"/>
+            <a:off x="548640" y="5486400"/>
+            <a:ext cx="11064240" cy="731520"/>
           </a:xfrm>
           <a:prstGeom prst="rect">
             <a:avLst/>
@@ -5687,15 +5524,15 @@
           </a:bodyPr>
           <a:lstStyle/>
           <a:p>
-            <a:pPr algn="ctr"/>
-            <a:r>
-              <a:rPr sz="1400" b="1">
-                <a:solidFill>
-                  <a:srgbClr val="FFE9B8"/>
-                </a:solidFill>
-                <a:latin typeface="Calibri"/>
-              </a:rPr>
-              <a:t>Refusing a premium tier is a design constraint, not an oversight.</a:t>
+            <a:pPr algn="l"/>
+            <a:r>
+              <a:rPr sz="1300" b="0">
+                <a:solidFill>
+                  <a:srgbClr val="8696A0"/>
+                </a:solidFill>
+                <a:latin typeface="Calibri"/>
+              </a:rPr>
+              <a:t>What we will NOT claim: that we replace teachers, fix poverty, or substitute for actual practice. We measure outcomes, publish quarterly, and refuse to overclaim.</a:t>
             </a:r>
           </a:p>
         </p:txBody>
@@ -5756,7 +5593,7 @@
                 </a:solidFill>
                 <a:latin typeface="Calibri"/>
               </a:rPr>
-              <a:t>Roadmap</a:t>
+              <a:t>Who is this for?</a:t>
             </a:r>
           </a:p>
         </p:txBody>
@@ -5785,13 +5622,13 @@
           <a:p>
             <a:pPr algn="l"/>
             <a:r>
-              <a:rPr sz="3000" b="1">
+              <a:rPr sz="3200" b="1">
                 <a:solidFill>
                   <a:srgbClr val="FFFFFF"/>
                 </a:solidFill>
                 <a:latin typeface="Calibri"/>
               </a:rPr>
-              <a:t>From hackathon prototype to national pilot.</a:t>
+              <a:t>Phase 1: Quintile 1–3 NSC learners.</a:t>
             </a:r>
           </a:p>
         </p:txBody>
@@ -5848,7 +5685,161 @@
         <p:spPr>
           <a:xfrm>
             <a:off x="548640" y="2468880"/>
-            <a:ext cx="1371600" cy="411480"/>
+            <a:ext cx="3931920" cy="457200"/>
+          </a:xfrm>
+          <a:prstGeom prst="roundRect">
+            <a:avLst/>
+          </a:prstGeom>
+          <a:solidFill>
+            <a:srgbClr val="00A884"/>
+          </a:solidFill>
+          <a:ln>
+            <a:noFill/>
+          </a:ln>
+        </p:spPr>
+        <p:style>
+          <a:lnRef idx="1">
+            <a:schemeClr val="accent1"/>
+          </a:lnRef>
+          <a:fillRef idx="3">
+            <a:schemeClr val="accent1"/>
+          </a:fillRef>
+          <a:effectRef idx="2">
+            <a:schemeClr val="accent1"/>
+          </a:effectRef>
+          <a:fontRef idx="minor">
+            <a:schemeClr val="lt1"/>
+          </a:fontRef>
+        </p:style>
+        <p:txBody>
+          <a:bodyPr rtlCol="0" anchor="ctr" lIns="137160" rIns="137160"/>
+          <a:lstStyle/>
+          <a:p>
+            <a:pPr algn="ctr"/>
+            <a:r>
+              <a:rPr sz="1200" b="1">
+                <a:solidFill>
+                  <a:srgbClr val="03110D"/>
+                </a:solidFill>
+              </a:rPr>
+              <a:t>Persona · Thandi (WhatsApp)</a:t>
+            </a:r>
+          </a:p>
+        </p:txBody>
+      </p:sp>
+      <p:sp>
+        <p:nvSpPr>
+          <p:cNvPr id="6" name="TextBox 5"/>
+          <p:cNvSpPr txBox="1"/>
+          <p:nvPr/>
+        </p:nvSpPr>
+        <p:spPr>
+          <a:xfrm>
+            <a:off x="548640" y="3017520"/>
+            <a:ext cx="5303520" cy="3200400"/>
+          </a:xfrm>
+          <a:prstGeom prst="rect">
+            <a:avLst/>
+          </a:prstGeom>
+          <a:noFill/>
+        </p:spPr>
+        <p:txBody>
+          <a:bodyPr wrap="square">
+            <a:spAutoFit/>
+          </a:bodyPr>
+          <a:lstStyle/>
+          <a:p>
+            <a:pPr algn="l">
+              <a:spcBef>
+                <a:spcPts val="800"/>
+              </a:spcBef>
+            </a:pPr>
+            <a:r>
+              <a:rPr sz="1400">
+                <a:solidFill>
+                  <a:srgbClr val="E9EDEF"/>
+                </a:solidFill>
+                <a:latin typeface="Calibri"/>
+              </a:rPr>
+              <a:t>• Grade 11 · Soweto · isiZulu first-language</a:t>
+            </a:r>
+          </a:p>
+          <a:p>
+            <a:pPr algn="l">
+              <a:spcBef>
+                <a:spcPts val="800"/>
+              </a:spcBef>
+            </a:pPr>
+            <a:r>
+              <a:rPr sz="1400">
+                <a:solidFill>
+                  <a:srgbClr val="E9EDEF"/>
+                </a:solidFill>
+                <a:latin typeface="Calibri"/>
+              </a:rPr>
+              <a:t>• Mother is a domestic worker. Father unemployed.</a:t>
+            </a:r>
+          </a:p>
+          <a:p>
+            <a:pPr algn="l">
+              <a:spcBef>
+                <a:spcPts val="800"/>
+              </a:spcBef>
+            </a:pPr>
+            <a:r>
+              <a:rPr sz="1400">
+                <a:solidFill>
+                  <a:srgbClr val="E9EDEF"/>
+                </a:solidFill>
+                <a:latin typeface="Calibri"/>
+              </a:rPr>
+              <a:t>• Basic Android + Vodacom social bundle.</a:t>
+            </a:r>
+          </a:p>
+          <a:p>
+            <a:pPr algn="l">
+              <a:spcBef>
+                <a:spcPts val="800"/>
+              </a:spcBef>
+            </a:pPr>
+            <a:r>
+              <a:rPr sz="1400">
+                <a:solidFill>
+                  <a:srgbClr val="E9EDEF"/>
+                </a:solidFill>
+                <a:latin typeface="Calibri"/>
+              </a:rPr>
+              <a:t>• Currently averaging 50%. Wants a bachelor pass.</a:t>
+            </a:r>
+          </a:p>
+          <a:p>
+            <a:pPr algn="l">
+              <a:spcBef>
+                <a:spcPts val="800"/>
+              </a:spcBef>
+            </a:pPr>
+            <a:r>
+              <a:rPr sz="1400">
+                <a:solidFill>
+                  <a:srgbClr val="E9EDEF"/>
+                </a:solidFill>
+                <a:latin typeface="Calibri"/>
+              </a:rPr>
+              <a:t>• Uses our tutor on WhatsApp at night, mostly text.</a:t>
+            </a:r>
+          </a:p>
+        </p:txBody>
+      </p:sp>
+      <p:sp>
+        <p:nvSpPr>
+          <p:cNvPr id="7" name="Rounded Rectangle 6"/>
+          <p:cNvSpPr/>
+          <p:nvPr/>
+        </p:nvSpPr>
+        <p:spPr>
+          <a:xfrm>
+            <a:off x="6400800" y="2468880"/>
+            <a:ext cx="3931920" cy="457200"/>
           </a:xfrm>
           <a:prstGeom prst="roundRect">
             <a:avLst/>
@@ -5885,56 +5876,21 @@
                   <a:srgbClr val="03110D"/>
                 </a:solidFill>
               </a:rPr>
-              <a:t>Now</a:t>
-            </a:r>
-          </a:p>
-        </p:txBody>
-      </p:sp>
-      <p:sp>
-        <p:nvSpPr>
-          <p:cNvPr id="6" name="TextBox 5"/>
+              <a:t>Persona · Lethabo (USSD)</a:t>
+            </a:r>
+          </a:p>
+        </p:txBody>
+      </p:sp>
+      <p:sp>
+        <p:nvSpPr>
+          <p:cNvPr id="8" name="TextBox 7"/>
           <p:cNvSpPr txBox="1"/>
           <p:nvPr/>
         </p:nvSpPr>
         <p:spPr>
           <a:xfrm>
-            <a:off x="2011680" y="2468880"/>
-            <a:ext cx="2286000" cy="411480"/>
-          </a:xfrm>
-          <a:prstGeom prst="rect">
-            <a:avLst/>
-          </a:prstGeom>
-          <a:noFill/>
-        </p:spPr>
-        <p:txBody>
-          <a:bodyPr wrap="square">
-            <a:spAutoFit/>
-          </a:bodyPr>
-          <a:lstStyle/>
-          <a:p>
-            <a:pPr algn="l"/>
-            <a:r>
-              <a:rPr sz="1600" b="1">
-                <a:solidFill>
-                  <a:srgbClr val="FFFFFF"/>
-                </a:solidFill>
-                <a:latin typeface="Calibri"/>
-              </a:rPr>
-              <a:t>Hackathon</a:t>
-            </a:r>
-          </a:p>
-        </p:txBody>
-      </p:sp>
-      <p:sp>
-        <p:nvSpPr>
-          <p:cNvPr id="7" name="TextBox 6"/>
-          <p:cNvSpPr txBox="1"/>
-          <p:nvPr/>
-        </p:nvSpPr>
-        <p:spPr>
-          <a:xfrm>
-            <a:off x="548640" y="3108960"/>
-            <a:ext cx="3657600" cy="3200400"/>
+            <a:off x="6400800" y="3017520"/>
+            <a:ext cx="5303520" cy="3200400"/>
           </a:xfrm>
           <a:prstGeom prst="rect">
             <a:avLst/>
@@ -5953,13 +5909,13 @@
               </a:spcBef>
             </a:pPr>
             <a:r>
-              <a:rPr sz="1200">
+              <a:rPr sz="1400">
                 <a:solidFill>
                   <a:srgbClr val="E9EDEF"/>
                 </a:solidFill>
                 <a:latin typeface="Calibri"/>
               </a:rPr>
-              <a:t>• Both channels working end-to-end</a:t>
+              <a:t>• Grade 12 · rural Limpopo · Sepedi first-language</a:t>
             </a:r>
           </a:p>
           <a:p>
@@ -5969,13 +5925,13 @@
               </a:spcBef>
             </a:pPr>
             <a:r>
-              <a:rPr sz="1200">
+              <a:rPr sz="1400">
                 <a:solidFill>
                   <a:srgbClr val="E9EDEF"/>
                 </a:solidFill>
                 <a:latin typeface="Calibri"/>
               </a:rPr>
-              <a:t>• Real NSC questions, cited sources</a:t>
+              <a:t>• Lives with grandmother. No parents.</a:t>
             </a:r>
           </a:p>
           <a:p>
@@ -5985,13 +5941,13 @@
               </a:spcBef>
             </a:pPr>
             <a:r>
-              <a:rPr sz="1200">
+              <a:rPr sz="1400">
                 <a:solidFill>
                   <a:srgbClr val="E9EDEF"/>
                 </a:solidFill>
                 <a:latin typeface="Calibri"/>
               </a:rPr>
-              <a:t>• CAPS mappings against ATPs</a:t>
+              <a:t>• Nokia feature phone — no smartphone.</a:t>
             </a:r>
           </a:p>
           <a:p>
@@ -6001,124 +5957,15 @@
               </a:spcBef>
             </a:pPr>
             <a:r>
-              <a:rPr sz="1200">
+              <a:rPr sz="1400">
                 <a:solidFill>
                   <a:srgbClr val="E9EDEF"/>
                 </a:solidFill>
                 <a:latin typeface="Calibri"/>
               </a:rPr>
-              <a:t>• Mock providers (offline demo)</a:t>
-            </a:r>
-          </a:p>
-        </p:txBody>
-      </p:sp>
-      <p:sp>
-        <p:nvSpPr>
-          <p:cNvPr id="8" name="Rounded Rectangle 7"/>
-          <p:cNvSpPr/>
-          <p:nvPr/>
-        </p:nvSpPr>
-        <p:spPr>
-          <a:xfrm>
-            <a:off x="4389120" y="2468880"/>
-            <a:ext cx="1371600" cy="411480"/>
-          </a:xfrm>
-          <a:prstGeom prst="roundRect">
-            <a:avLst/>
-          </a:prstGeom>
-          <a:solidFill>
-            <a:srgbClr val="FFB347"/>
-          </a:solidFill>
-          <a:ln>
-            <a:noFill/>
-          </a:ln>
-        </p:spPr>
-        <p:style>
-          <a:lnRef idx="1">
-            <a:schemeClr val="accent1"/>
-          </a:lnRef>
-          <a:fillRef idx="3">
-            <a:schemeClr val="accent1"/>
-          </a:fillRef>
-          <a:effectRef idx="2">
-            <a:schemeClr val="accent1"/>
-          </a:effectRef>
-          <a:fontRef idx="minor">
-            <a:schemeClr val="lt1"/>
-          </a:fontRef>
-        </p:style>
-        <p:txBody>
-          <a:bodyPr rtlCol="0" anchor="ctr" lIns="137160" rIns="137160"/>
-          <a:lstStyle/>
-          <a:p>
-            <a:pPr algn="ctr"/>
-            <a:r>
-              <a:rPr sz="1200" b="1">
-                <a:solidFill>
-                  <a:srgbClr val="03110D"/>
-                </a:solidFill>
-              </a:rPr>
-              <a:t>Q3 2026</a:t>
-            </a:r>
-          </a:p>
-        </p:txBody>
-      </p:sp>
-      <p:sp>
-        <p:nvSpPr>
-          <p:cNvPr id="9" name="TextBox 8"/>
-          <p:cNvSpPr txBox="1"/>
-          <p:nvPr/>
-        </p:nvSpPr>
-        <p:spPr>
-          <a:xfrm>
-            <a:off x="5852160" y="2468880"/>
-            <a:ext cx="2286000" cy="411480"/>
-          </a:xfrm>
-          <a:prstGeom prst="rect">
-            <a:avLst/>
-          </a:prstGeom>
-          <a:noFill/>
-        </p:spPr>
-        <p:txBody>
-          <a:bodyPr wrap="square">
-            <a:spAutoFit/>
-          </a:bodyPr>
-          <a:lstStyle/>
-          <a:p>
-            <a:pPr algn="l"/>
-            <a:r>
-              <a:rPr sz="1600" b="1">
-                <a:solidFill>
-                  <a:srgbClr val="FFFFFF"/>
-                </a:solidFill>
-                <a:latin typeface="Calibri"/>
-              </a:rPr>
-              <a:t>Pilot</a:t>
-            </a:r>
-          </a:p>
-        </p:txBody>
-      </p:sp>
-      <p:sp>
-        <p:nvSpPr>
-          <p:cNvPr id="10" name="TextBox 9"/>
-          <p:cNvSpPr txBox="1"/>
-          <p:nvPr/>
-        </p:nvSpPr>
-        <p:spPr>
-          <a:xfrm>
-            <a:off x="4389120" y="3108960"/>
-            <a:ext cx="3657600" cy="3200400"/>
-          </a:xfrm>
-          <a:prstGeom prst="rect">
-            <a:avLst/>
-          </a:prstGeom>
-          <a:noFill/>
-        </p:spPr>
-        <p:txBody>
-          <a:bodyPr wrap="square">
-            <a:spAutoFit/>
-          </a:bodyPr>
-          <a:lstStyle/>
+              <a:t>• 65% mid-year. Wants 70%+ for accounting at UJ.</a:t>
+            </a:r>
+          </a:p>
           <a:p>
             <a:pPr algn="l">
               <a:spcBef>
@@ -6126,126 +5973,27 @@
               </a:spcBef>
             </a:pPr>
             <a:r>
-              <a:rPr sz="1200">
+              <a:rPr sz="1400">
                 <a:solidFill>
                   <a:srgbClr val="E9EDEF"/>
                 </a:solidFill>
                 <a:latin typeface="Calibri"/>
               </a:rPr>
-              <a:t>• Dell AI Factory LLM + VLM live</a:t>
-            </a:r>
-          </a:p>
-          <a:p>
-            <a:pPr algn="l">
-              <a:spcBef>
-                <a:spcPts val="800"/>
-              </a:spcBef>
-            </a:pPr>
-            <a:r>
-              <a:rPr sz="1200">
-                <a:solidFill>
-                  <a:srgbClr val="E9EDEF"/>
-                </a:solidFill>
-                <a:latin typeface="Calibri"/>
-              </a:rPr>
-              <a:t>• Vodacom WhatsApp + USSD partnership</a:t>
-            </a:r>
-          </a:p>
-          <a:p>
-            <a:pPr algn="l">
-              <a:spcBef>
-                <a:spcPts val="800"/>
-              </a:spcBef>
-            </a:pPr>
-            <a:r>
-              <a:rPr sz="1200">
-                <a:solidFill>
-                  <a:srgbClr val="E9EDEF"/>
-                </a:solidFill>
-                <a:latin typeface="Calibri"/>
-              </a:rPr>
-              <a:t>• 5 schools across 2 provinces</a:t>
-            </a:r>
-          </a:p>
-          <a:p>
-            <a:pPr algn="l">
-              <a:spcBef>
-                <a:spcPts val="800"/>
-              </a:spcBef>
-            </a:pPr>
-            <a:r>
-              <a:rPr sz="1200">
-                <a:solidFill>
-                  <a:srgbClr val="E9EDEF"/>
-                </a:solidFill>
-                <a:latin typeface="Calibri"/>
-              </a:rPr>
-              <a:t>• Educator advisory board (4-6 teachers)</a:t>
-            </a:r>
-          </a:p>
-        </p:txBody>
-      </p:sp>
-      <p:sp>
-        <p:nvSpPr>
-          <p:cNvPr id="11" name="Rounded Rectangle 10"/>
-          <p:cNvSpPr/>
-          <p:nvPr/>
-        </p:nvSpPr>
-        <p:spPr>
-          <a:xfrm>
-            <a:off x="8229600" y="2468880"/>
-            <a:ext cx="1371600" cy="411480"/>
-          </a:xfrm>
-          <a:prstGeom prst="roundRect">
-            <a:avLst/>
-          </a:prstGeom>
-          <a:solidFill>
-            <a:srgbClr val="FFB347"/>
-          </a:solidFill>
-          <a:ln>
-            <a:noFill/>
-          </a:ln>
-        </p:spPr>
-        <p:style>
-          <a:lnRef idx="1">
-            <a:schemeClr val="accent1"/>
-          </a:lnRef>
-          <a:fillRef idx="3">
-            <a:schemeClr val="accent1"/>
-          </a:fillRef>
-          <a:effectRef idx="2">
-            <a:schemeClr val="accent1"/>
-          </a:effectRef>
-          <a:fontRef idx="minor">
-            <a:schemeClr val="lt1"/>
-          </a:fontRef>
-        </p:style>
-        <p:txBody>
-          <a:bodyPr rtlCol="0" anchor="ctr" lIns="137160" rIns="137160"/>
-          <a:lstStyle/>
-          <a:p>
-            <a:pPr algn="ctr"/>
-            <a:r>
-              <a:rPr sz="1200" b="1">
-                <a:solidFill>
-                  <a:srgbClr val="03110D"/>
-                </a:solidFill>
-              </a:rPr>
-              <a:t>2027</a:t>
-            </a:r>
-          </a:p>
-        </p:txBody>
-      </p:sp>
-      <p:sp>
-        <p:nvSpPr>
-          <p:cNvPr id="12" name="TextBox 11"/>
+              <a:t>• Uses our tutor on USSD at school in free periods.</a:t>
+            </a:r>
+          </a:p>
+        </p:txBody>
+      </p:sp>
+      <p:sp>
+        <p:nvSpPr>
+          <p:cNvPr id="9" name="TextBox 8"/>
           <p:cNvSpPr txBox="1"/>
           <p:nvPr/>
         </p:nvSpPr>
         <p:spPr>
           <a:xfrm>
-            <a:off x="9692640" y="2468880"/>
-            <a:ext cx="2286000" cy="411480"/>
+            <a:off x="548640" y="5943600"/>
+            <a:ext cx="11064240" cy="457200"/>
           </a:xfrm>
           <a:prstGeom prst="rect">
             <a:avLst/>
@@ -6258,102 +6006,15 @@
           </a:bodyPr>
           <a:lstStyle/>
           <a:p>
-            <a:pPr algn="l"/>
-            <a:r>
-              <a:rPr sz="1600" b="1">
-                <a:solidFill>
-                  <a:srgbClr val="FFFFFF"/>
-                </a:solidFill>
-                <a:latin typeface="Calibri"/>
-              </a:rPr>
-              <a:t>Scale</a:t>
-            </a:r>
-          </a:p>
-        </p:txBody>
-      </p:sp>
-      <p:sp>
-        <p:nvSpPr>
-          <p:cNvPr id="13" name="TextBox 12"/>
-          <p:cNvSpPr txBox="1"/>
-          <p:nvPr/>
-        </p:nvSpPr>
-        <p:spPr>
-          <a:xfrm>
-            <a:off x="8229600" y="3108960"/>
-            <a:ext cx="3657600" cy="3200400"/>
-          </a:xfrm>
-          <a:prstGeom prst="rect">
-            <a:avLst/>
-          </a:prstGeom>
-          <a:noFill/>
-        </p:spPr>
-        <p:txBody>
-          <a:bodyPr wrap="square">
-            <a:spAutoFit/>
-          </a:bodyPr>
-          <a:lstStyle/>
-          <a:p>
-            <a:pPr algn="l">
-              <a:spcBef>
-                <a:spcPts val="800"/>
-              </a:spcBef>
-            </a:pPr>
-            <a:r>
-              <a:rPr sz="1200">
-                <a:solidFill>
-                  <a:srgbClr val="E9EDEF"/>
-                </a:solidFill>
-                <a:latin typeface="Calibri"/>
-              </a:rPr>
-              <a:t>• All 11 official spoken languages educator-validated + SA Sign Language</a:t>
-            </a:r>
-          </a:p>
-          <a:p>
-            <a:pPr algn="l">
-              <a:spcBef>
-                <a:spcPts val="800"/>
-              </a:spcBef>
-            </a:pPr>
-            <a:r>
-              <a:rPr sz="1200">
-                <a:solidFill>
-                  <a:srgbClr val="E9EDEF"/>
-                </a:solidFill>
-                <a:latin typeface="Calibri"/>
-              </a:rPr>
-              <a:t>• Maths Lit, Sciences, Accounting</a:t>
-            </a:r>
-          </a:p>
-          <a:p>
-            <a:pPr algn="l">
-              <a:spcBef>
-                <a:spcPts val="800"/>
-              </a:spcBef>
-            </a:pPr>
-            <a:r>
-              <a:rPr sz="1200">
-                <a:solidFill>
-                  <a:srgbClr val="E9EDEF"/>
-                </a:solidFill>
-                <a:latin typeface="Calibri"/>
-              </a:rPr>
-              <a:t>• Class-level analytics for teachers</a:t>
-            </a:r>
-          </a:p>
-          <a:p>
-            <a:pPr algn="l">
-              <a:spcBef>
-                <a:spcPts val="800"/>
-              </a:spcBef>
-            </a:pPr>
-            <a:r>
-              <a:rPr sz="1200">
-                <a:solidFill>
-                  <a:srgbClr val="E9EDEF"/>
-                </a:solidFill>
-                <a:latin typeface="Calibri"/>
-              </a:rPr>
-              <a:t>• DBE adoption discussions</a:t>
+            <a:pPr algn="ctr"/>
+            <a:r>
+              <a:rPr sz="1300" b="0">
+                <a:solidFill>
+                  <a:srgbClr val="8696A0"/>
+                </a:solidFill>
+                <a:latin typeface="Calibri"/>
+              </a:rPr>
+              <a:t>Phase 2: Grades 8–10 + Maths Literacy. Phase 3: Sciences, Accounting, 11 official spoken languages + SA Sign Language (video channel).</a:t>
             </a:r>
           </a:p>
         </p:txBody>
@@ -6410,6 +6071,1300 @@
             <a:r>
               <a:rPr sz="1400" b="1">
                 <a:solidFill>
+                  <a:srgbClr val="00A884"/>
+                </a:solidFill>
+                <a:latin typeface="Calibri"/>
+              </a:rPr>
+              <a:t>Equality · Safety · Trust</a:t>
+            </a:r>
+          </a:p>
+        </p:txBody>
+      </p:sp>
+      <p:sp>
+        <p:nvSpPr>
+          <p:cNvPr id="3" name="TextBox 2"/>
+          <p:cNvSpPr txBox="1"/>
+          <p:nvPr/>
+        </p:nvSpPr>
+        <p:spPr>
+          <a:xfrm>
+            <a:off x="548640" y="914400"/>
+            <a:ext cx="11064240" cy="914400"/>
+          </a:xfrm>
+          <a:prstGeom prst="rect">
+            <a:avLst/>
+          </a:prstGeom>
+          <a:noFill/>
+        </p:spPr>
+        <p:txBody>
+          <a:bodyPr wrap="square">
+            <a:spAutoFit/>
+          </a:bodyPr>
+          <a:lstStyle/>
+          <a:p>
+            <a:pPr algn="l"/>
+            <a:r>
+              <a:rPr sz="3200" b="1">
+                <a:solidFill>
+                  <a:srgbClr val="FFFFFF"/>
+                </a:solidFill>
+                <a:latin typeface="Calibri"/>
+              </a:rPr>
+              <a:t>Built right, not built fast.</a:t>
+            </a:r>
+          </a:p>
+        </p:txBody>
+      </p:sp>
+      <p:sp>
+        <p:nvSpPr>
+          <p:cNvPr id="4" name="Rectangle 3"/>
+          <p:cNvSpPr/>
+          <p:nvPr/>
+        </p:nvSpPr>
+        <p:spPr>
+          <a:xfrm>
+            <a:off x="548640" y="2011680"/>
+            <a:ext cx="3657600" cy="50800"/>
+          </a:xfrm>
+          <a:prstGeom prst="rect">
+            <a:avLst/>
+          </a:prstGeom>
+          <a:solidFill>
+            <a:srgbClr val="00A884"/>
+          </a:solidFill>
+          <a:ln>
+            <a:noFill/>
+          </a:ln>
+        </p:spPr>
+        <p:style>
+          <a:lnRef idx="1">
+            <a:schemeClr val="accent1"/>
+          </a:lnRef>
+          <a:fillRef idx="3">
+            <a:schemeClr val="accent1"/>
+          </a:fillRef>
+          <a:effectRef idx="2">
+            <a:schemeClr val="accent1"/>
+          </a:effectRef>
+          <a:fontRef idx="minor">
+            <a:schemeClr val="lt1"/>
+          </a:fontRef>
+        </p:style>
+        <p:txBody>
+          <a:bodyPr rtlCol="0" anchor="ctr"/>
+          <a:lstStyle/>
+          <a:p>
+            <a:pPr algn="ctr"/>
+          </a:p>
+        </p:txBody>
+      </p:sp>
+      <p:sp>
+        <p:nvSpPr>
+          <p:cNvPr id="5" name="Rounded Rectangle 4"/>
+          <p:cNvSpPr/>
+          <p:nvPr/>
+        </p:nvSpPr>
+        <p:spPr>
+          <a:xfrm>
+            <a:off x="548640" y="2468880"/>
+            <a:ext cx="1463040" cy="411480"/>
+          </a:xfrm>
+          <a:prstGeom prst="roundRect">
+            <a:avLst/>
+          </a:prstGeom>
+          <a:solidFill>
+            <a:srgbClr val="00A884"/>
+          </a:solidFill>
+          <a:ln>
+            <a:noFill/>
+          </a:ln>
+        </p:spPr>
+        <p:style>
+          <a:lnRef idx="1">
+            <a:schemeClr val="accent1"/>
+          </a:lnRef>
+          <a:fillRef idx="3">
+            <a:schemeClr val="accent1"/>
+          </a:fillRef>
+          <a:effectRef idx="2">
+            <a:schemeClr val="accent1"/>
+          </a:effectRef>
+          <a:fontRef idx="minor">
+            <a:schemeClr val="lt1"/>
+          </a:fontRef>
+        </p:style>
+        <p:txBody>
+          <a:bodyPr rtlCol="0" anchor="ctr" lIns="137160" rIns="137160"/>
+          <a:lstStyle/>
+          <a:p>
+            <a:pPr algn="ctr"/>
+            <a:r>
+              <a:rPr sz="1400" b="1">
+                <a:solidFill>
+                  <a:srgbClr val="03110D"/>
+                </a:solidFill>
+              </a:rPr>
+              <a:t>Equality</a:t>
+            </a:r>
+          </a:p>
+        </p:txBody>
+      </p:sp>
+      <p:sp>
+        <p:nvSpPr>
+          <p:cNvPr id="6" name="TextBox 5"/>
+          <p:cNvSpPr txBox="1"/>
+          <p:nvPr/>
+        </p:nvSpPr>
+        <p:spPr>
+          <a:xfrm>
+            <a:off x="548640" y="3017520"/>
+            <a:ext cx="3657600" cy="3383280"/>
+          </a:xfrm>
+          <a:prstGeom prst="rect">
+            <a:avLst/>
+          </a:prstGeom>
+          <a:noFill/>
+        </p:spPr>
+        <p:txBody>
+          <a:bodyPr wrap="square">
+            <a:spAutoFit/>
+          </a:bodyPr>
+          <a:lstStyle/>
+          <a:p>
+            <a:pPr algn="l">
+              <a:spcBef>
+                <a:spcPts val="800"/>
+              </a:spcBef>
+            </a:pPr>
+            <a:r>
+              <a:rPr sz="1200">
+                <a:solidFill>
+                  <a:srgbClr val="E9EDEF"/>
+                </a:solidFill>
+                <a:latin typeface="Calibri"/>
+              </a:rPr>
+              <a:t>• Two channels — never device-locked</a:t>
+            </a:r>
+          </a:p>
+          <a:p>
+            <a:pPr algn="l">
+              <a:spcBef>
+                <a:spcPts val="800"/>
+              </a:spcBef>
+            </a:pPr>
+            <a:r>
+              <a:rPr sz="1200">
+                <a:solidFill>
+                  <a:srgbClr val="E9EDEF"/>
+                </a:solidFill>
+                <a:latin typeface="Calibri"/>
+              </a:rPr>
+              <a:t>• Zero at point of use (zero-rated)</a:t>
+            </a:r>
+          </a:p>
+          <a:p>
+            <a:pPr algn="l">
+              <a:spcBef>
+                <a:spcPts val="800"/>
+              </a:spcBef>
+            </a:pPr>
+            <a:r>
+              <a:rPr sz="1200">
+                <a:solidFill>
+                  <a:srgbClr val="E9EDEF"/>
+                </a:solidFill>
+                <a:latin typeface="Calibri"/>
+              </a:rPr>
+              <a:t>• 4 validated + 7 first-pass + SA Sign Language = 12</a:t>
+            </a:r>
+          </a:p>
+          <a:p>
+            <a:pPr algn="l">
+              <a:spcBef>
+                <a:spcPts val="800"/>
+              </a:spcBef>
+            </a:pPr>
+            <a:r>
+              <a:rPr sz="1200">
+                <a:solidFill>
+                  <a:srgbClr val="E9EDEF"/>
+                </a:solidFill>
+                <a:latin typeface="Calibri"/>
+              </a:rPr>
+              <a:t>• Identical brain on both channels</a:t>
+            </a:r>
+          </a:p>
+          <a:p>
+            <a:pPr algn="l">
+              <a:spcBef>
+                <a:spcPts val="800"/>
+              </a:spcBef>
+            </a:pPr>
+            <a:r>
+              <a:rPr sz="1200">
+                <a:solidFill>
+                  <a:srgbClr val="E9EDEF"/>
+                </a:solidFill>
+                <a:latin typeface="Calibri"/>
+              </a:rPr>
+              <a:t>• No premium tier — design constraint</a:t>
+            </a:r>
+          </a:p>
+        </p:txBody>
+      </p:sp>
+      <p:sp>
+        <p:nvSpPr>
+          <p:cNvPr id="7" name="Rounded Rectangle 6"/>
+          <p:cNvSpPr/>
+          <p:nvPr/>
+        </p:nvSpPr>
+        <p:spPr>
+          <a:xfrm>
+            <a:off x="4389120" y="2468880"/>
+            <a:ext cx="1463040" cy="411480"/>
+          </a:xfrm>
+          <a:prstGeom prst="roundRect">
+            <a:avLst/>
+          </a:prstGeom>
+          <a:solidFill>
+            <a:srgbClr val="FFB347"/>
+          </a:solidFill>
+          <a:ln>
+            <a:noFill/>
+          </a:ln>
+        </p:spPr>
+        <p:style>
+          <a:lnRef idx="1">
+            <a:schemeClr val="accent1"/>
+          </a:lnRef>
+          <a:fillRef idx="3">
+            <a:schemeClr val="accent1"/>
+          </a:fillRef>
+          <a:effectRef idx="2">
+            <a:schemeClr val="accent1"/>
+          </a:effectRef>
+          <a:fontRef idx="minor">
+            <a:schemeClr val="lt1"/>
+          </a:fontRef>
+        </p:style>
+        <p:txBody>
+          <a:bodyPr rtlCol="0" anchor="ctr" lIns="137160" rIns="137160"/>
+          <a:lstStyle/>
+          <a:p>
+            <a:pPr algn="ctr"/>
+            <a:r>
+              <a:rPr sz="1400" b="1">
+                <a:solidFill>
+                  <a:srgbClr val="03110D"/>
+                </a:solidFill>
+              </a:rPr>
+              <a:t>Safety</a:t>
+            </a:r>
+          </a:p>
+        </p:txBody>
+      </p:sp>
+      <p:sp>
+        <p:nvSpPr>
+          <p:cNvPr id="8" name="TextBox 7"/>
+          <p:cNvSpPr txBox="1"/>
+          <p:nvPr/>
+        </p:nvSpPr>
+        <p:spPr>
+          <a:xfrm>
+            <a:off x="4389120" y="3017520"/>
+            <a:ext cx="3657600" cy="3383280"/>
+          </a:xfrm>
+          <a:prstGeom prst="rect">
+            <a:avLst/>
+          </a:prstGeom>
+          <a:noFill/>
+        </p:spPr>
+        <p:txBody>
+          <a:bodyPr wrap="square">
+            <a:spAutoFit/>
+          </a:bodyPr>
+          <a:lstStyle/>
+          <a:p>
+            <a:pPr algn="l">
+              <a:spcBef>
+                <a:spcPts val="800"/>
+              </a:spcBef>
+            </a:pPr>
+            <a:r>
+              <a:rPr sz="1200">
+                <a:solidFill>
+                  <a:srgbClr val="E9EDEF"/>
+                </a:solidFill>
+                <a:latin typeface="Calibri"/>
+              </a:rPr>
+              <a:t>• CAPS-bounded — no off-topic chat</a:t>
+            </a:r>
+          </a:p>
+          <a:p>
+            <a:pPr algn="l">
+              <a:spcBef>
+                <a:spcPts val="800"/>
+              </a:spcBef>
+            </a:pPr>
+            <a:r>
+              <a:rPr sz="1200">
+                <a:solidFill>
+                  <a:srgbClr val="E9EDEF"/>
+                </a:solidFill>
+                <a:latin typeface="Calibri"/>
+              </a:rPr>
+              <a:t>• Verified maths in code, not LLM</a:t>
+            </a:r>
+          </a:p>
+          <a:p>
+            <a:pPr algn="l">
+              <a:spcBef>
+                <a:spcPts val="800"/>
+              </a:spcBef>
+            </a:pPr>
+            <a:r>
+              <a:rPr sz="1200">
+                <a:solidFill>
+                  <a:srgbClr val="E9EDEF"/>
+                </a:solidFill>
+                <a:latin typeface="Calibri"/>
+              </a:rPr>
+              <a:t>• POPIA-aligned, SA-hosted</a:t>
+            </a:r>
+          </a:p>
+          <a:p>
+            <a:pPr algn="l">
+              <a:spcBef>
+                <a:spcPts val="800"/>
+              </a:spcBef>
+            </a:pPr>
+            <a:r>
+              <a:rPr sz="1200">
+                <a:solidFill>
+                  <a:srgbClr val="E9EDEF"/>
+                </a:solidFill>
+                <a:latin typeface="Calibri"/>
+              </a:rPr>
+              <a:t>• No PII beyond phone number</a:t>
+            </a:r>
+          </a:p>
+          <a:p>
+            <a:pPr algn="l">
+              <a:spcBef>
+                <a:spcPts val="800"/>
+              </a:spcBef>
+            </a:pPr>
+            <a:r>
+              <a:rPr sz="1200">
+                <a:solidFill>
+                  <a:srgbClr val="E9EDEF"/>
+                </a:solidFill>
+                <a:latin typeface="Calibri"/>
+              </a:rPr>
+              <a:t>• Reporting → real educator escalation</a:t>
+            </a:r>
+          </a:p>
+        </p:txBody>
+      </p:sp>
+      <p:sp>
+        <p:nvSpPr>
+          <p:cNvPr id="9" name="Rounded Rectangle 8"/>
+          <p:cNvSpPr/>
+          <p:nvPr/>
+        </p:nvSpPr>
+        <p:spPr>
+          <a:xfrm>
+            <a:off x="8229600" y="2468880"/>
+            <a:ext cx="1463040" cy="411480"/>
+          </a:xfrm>
+          <a:prstGeom prst="roundRect">
+            <a:avLst/>
+          </a:prstGeom>
+          <a:solidFill>
+            <a:srgbClr val="9CFF8C"/>
+          </a:solidFill>
+          <a:ln>
+            <a:noFill/>
+          </a:ln>
+        </p:spPr>
+        <p:style>
+          <a:lnRef idx="1">
+            <a:schemeClr val="accent1"/>
+          </a:lnRef>
+          <a:fillRef idx="3">
+            <a:schemeClr val="accent1"/>
+          </a:fillRef>
+          <a:effectRef idx="2">
+            <a:schemeClr val="accent1"/>
+          </a:effectRef>
+          <a:fontRef idx="minor">
+            <a:schemeClr val="lt1"/>
+          </a:fontRef>
+        </p:style>
+        <p:txBody>
+          <a:bodyPr rtlCol="0" anchor="ctr" lIns="137160" rIns="137160"/>
+          <a:lstStyle/>
+          <a:p>
+            <a:pPr algn="ctr"/>
+            <a:r>
+              <a:rPr sz="1400" b="1">
+                <a:solidFill>
+                  <a:srgbClr val="03110D"/>
+                </a:solidFill>
+              </a:rPr>
+              <a:t>Trust</a:t>
+            </a:r>
+          </a:p>
+        </p:txBody>
+      </p:sp>
+      <p:sp>
+        <p:nvSpPr>
+          <p:cNvPr id="10" name="TextBox 9"/>
+          <p:cNvSpPr txBox="1"/>
+          <p:nvPr/>
+        </p:nvSpPr>
+        <p:spPr>
+          <a:xfrm>
+            <a:off x="8229600" y="3017520"/>
+            <a:ext cx="3657600" cy="3383280"/>
+          </a:xfrm>
+          <a:prstGeom prst="rect">
+            <a:avLst/>
+          </a:prstGeom>
+          <a:noFill/>
+        </p:spPr>
+        <p:txBody>
+          <a:bodyPr wrap="square">
+            <a:spAutoFit/>
+          </a:bodyPr>
+          <a:lstStyle/>
+          <a:p>
+            <a:pPr algn="l">
+              <a:spcBef>
+                <a:spcPts val="800"/>
+              </a:spcBef>
+            </a:pPr>
+            <a:r>
+              <a:rPr sz="1200">
+                <a:solidFill>
+                  <a:srgbClr val="E9EDEF"/>
+                </a:solidFill>
+                <a:latin typeface="Calibri"/>
+              </a:rPr>
+              <a:t>• Sources cited on every screen</a:t>
+            </a:r>
+          </a:p>
+          <a:p>
+            <a:pPr algn="l">
+              <a:spcBef>
+                <a:spcPts val="800"/>
+              </a:spcBef>
+            </a:pPr>
+            <a:r>
+              <a:rPr sz="1200">
+                <a:solidFill>
+                  <a:srgbClr val="E9EDEF"/>
+                </a:solidFill>
+                <a:latin typeface="Calibri"/>
+              </a:rPr>
+              <a:t>• CAPS topic + sub-skill labelled</a:t>
+            </a:r>
+          </a:p>
+          <a:p>
+            <a:pPr algn="l">
+              <a:spcBef>
+                <a:spcPts val="800"/>
+              </a:spcBef>
+            </a:pPr>
+            <a:r>
+              <a:rPr sz="1200">
+                <a:solidFill>
+                  <a:srgbClr val="E9EDEF"/>
+                </a:solidFill>
+                <a:latin typeface="Calibri"/>
+              </a:rPr>
+              <a:t>• Educator-editable curriculum file</a:t>
+            </a:r>
+          </a:p>
+          <a:p>
+            <a:pPr algn="l">
+              <a:spcBef>
+                <a:spcPts val="800"/>
+              </a:spcBef>
+            </a:pPr>
+            <a:r>
+              <a:rPr sz="1200">
+                <a:solidFill>
+                  <a:srgbClr val="E9EDEF"/>
+                </a:solidFill>
+                <a:latin typeface="Calibri"/>
+              </a:rPr>
+              <a:t>• Refuses to give final answers</a:t>
+            </a:r>
+          </a:p>
+          <a:p>
+            <a:pPr algn="l">
+              <a:spcBef>
+                <a:spcPts val="800"/>
+              </a:spcBef>
+            </a:pPr>
+            <a:r>
+              <a:rPr sz="1200">
+                <a:solidFill>
+                  <a:srgbClr val="E9EDEF"/>
+                </a:solidFill>
+                <a:latin typeface="Calibri"/>
+              </a:rPr>
+              <a:t>• Quarterly public impact reports</a:t>
+            </a:r>
+          </a:p>
+        </p:txBody>
+      </p:sp>
+      <p:sp>
+        <p:nvSpPr>
+          <p:cNvPr id="11" name="TextBox 10"/>
+          <p:cNvSpPr txBox="1"/>
+          <p:nvPr/>
+        </p:nvSpPr>
+        <p:spPr>
+          <a:xfrm>
+            <a:off x="548640" y="6126480"/>
+            <a:ext cx="11064240" cy="457200"/>
+          </a:xfrm>
+          <a:prstGeom prst="rect">
+            <a:avLst/>
+          </a:prstGeom>
+          <a:noFill/>
+        </p:spPr>
+        <p:txBody>
+          <a:bodyPr wrap="square">
+            <a:spAutoFit/>
+          </a:bodyPr>
+          <a:lstStyle/>
+          <a:p>
+            <a:pPr algn="ctr"/>
+            <a:r>
+              <a:rPr sz="1400" b="1">
+                <a:solidFill>
+                  <a:srgbClr val="FFE9B8"/>
+                </a:solidFill>
+                <a:latin typeface="Calibri"/>
+              </a:rPr>
+              <a:t>Refusing a premium tier is a design constraint, not an oversight.</a:t>
+            </a:r>
+          </a:p>
+        </p:txBody>
+      </p:sp>
+    </p:spTree>
+  </p:cSld>
+  <p:clrMapOvr>
+    <a:masterClrMapping/>
+  </p:clrMapOvr>
+</p:sld>
+</file>
+
+<file path=ppt/slides/slide13.xml><?xml version="1.0" encoding="utf-8"?>
+<p:sld xmlns:a="http://schemas.openxmlformats.org/drawingml/2006/main" xmlns:p="http://schemas.openxmlformats.org/presentationml/2006/main" xmlns:r="http://schemas.openxmlformats.org/officeDocument/2006/relationships">
+  <p:cSld>
+    <p:bg>
+      <p:bgPr>
+        <a:solidFill>
+          <a:srgbClr val="0B141A"/>
+        </a:solidFill>
+        <a:effectLst/>
+      </p:bgPr>
+    </p:bg>
+    <p:spTree>
+      <p:nvGrpSpPr>
+        <p:cNvPr id="1" name=""/>
+        <p:cNvGrpSpPr/>
+        <p:nvPr/>
+      </p:nvGrpSpPr>
+      <p:grpSpPr/>
+      <p:sp>
+        <p:nvSpPr>
+          <p:cNvPr id="2" name="TextBox 1"/>
+          <p:cNvSpPr txBox="1"/>
+          <p:nvPr/>
+        </p:nvSpPr>
+        <p:spPr>
+          <a:xfrm>
+            <a:off x="548640" y="457200"/>
+            <a:ext cx="11064240" cy="548640"/>
+          </a:xfrm>
+          <a:prstGeom prst="rect">
+            <a:avLst/>
+          </a:prstGeom>
+          <a:noFill/>
+        </p:spPr>
+        <p:txBody>
+          <a:bodyPr wrap="square">
+            <a:spAutoFit/>
+          </a:bodyPr>
+          <a:lstStyle/>
+          <a:p>
+            <a:pPr algn="l"/>
+            <a:r>
+              <a:rPr sz="1400" b="1">
+                <a:solidFill>
+                  <a:srgbClr val="00A884"/>
+                </a:solidFill>
+                <a:latin typeface="Calibri"/>
+              </a:rPr>
+              <a:t>Roadmap</a:t>
+            </a:r>
+          </a:p>
+        </p:txBody>
+      </p:sp>
+      <p:sp>
+        <p:nvSpPr>
+          <p:cNvPr id="3" name="TextBox 2"/>
+          <p:cNvSpPr txBox="1"/>
+          <p:nvPr/>
+        </p:nvSpPr>
+        <p:spPr>
+          <a:xfrm>
+            <a:off x="548640" y="914400"/>
+            <a:ext cx="11064240" cy="914400"/>
+          </a:xfrm>
+          <a:prstGeom prst="rect">
+            <a:avLst/>
+          </a:prstGeom>
+          <a:noFill/>
+        </p:spPr>
+        <p:txBody>
+          <a:bodyPr wrap="square">
+            <a:spAutoFit/>
+          </a:bodyPr>
+          <a:lstStyle/>
+          <a:p>
+            <a:pPr algn="l"/>
+            <a:r>
+              <a:rPr sz="3000" b="1">
+                <a:solidFill>
+                  <a:srgbClr val="FFFFFF"/>
+                </a:solidFill>
+                <a:latin typeface="Calibri"/>
+              </a:rPr>
+              <a:t>From hackathon prototype to national pilot.</a:t>
+            </a:r>
+          </a:p>
+        </p:txBody>
+      </p:sp>
+      <p:sp>
+        <p:nvSpPr>
+          <p:cNvPr id="4" name="Rectangle 3"/>
+          <p:cNvSpPr/>
+          <p:nvPr/>
+        </p:nvSpPr>
+        <p:spPr>
+          <a:xfrm>
+            <a:off x="548640" y="2011680"/>
+            <a:ext cx="3657600" cy="50800"/>
+          </a:xfrm>
+          <a:prstGeom prst="rect">
+            <a:avLst/>
+          </a:prstGeom>
+          <a:solidFill>
+            <a:srgbClr val="00A884"/>
+          </a:solidFill>
+          <a:ln>
+            <a:noFill/>
+          </a:ln>
+        </p:spPr>
+        <p:style>
+          <a:lnRef idx="1">
+            <a:schemeClr val="accent1"/>
+          </a:lnRef>
+          <a:fillRef idx="3">
+            <a:schemeClr val="accent1"/>
+          </a:fillRef>
+          <a:effectRef idx="2">
+            <a:schemeClr val="accent1"/>
+          </a:effectRef>
+          <a:fontRef idx="minor">
+            <a:schemeClr val="lt1"/>
+          </a:fontRef>
+        </p:style>
+        <p:txBody>
+          <a:bodyPr rtlCol="0" anchor="ctr"/>
+          <a:lstStyle/>
+          <a:p>
+            <a:pPr algn="ctr"/>
+          </a:p>
+        </p:txBody>
+      </p:sp>
+      <p:sp>
+        <p:nvSpPr>
+          <p:cNvPr id="5" name="Rounded Rectangle 4"/>
+          <p:cNvSpPr/>
+          <p:nvPr/>
+        </p:nvSpPr>
+        <p:spPr>
+          <a:xfrm>
+            <a:off x="548640" y="2468880"/>
+            <a:ext cx="1371600" cy="411480"/>
+          </a:xfrm>
+          <a:prstGeom prst="roundRect">
+            <a:avLst/>
+          </a:prstGeom>
+          <a:solidFill>
+            <a:srgbClr val="FFB347"/>
+          </a:solidFill>
+          <a:ln>
+            <a:noFill/>
+          </a:ln>
+        </p:spPr>
+        <p:style>
+          <a:lnRef idx="1">
+            <a:schemeClr val="accent1"/>
+          </a:lnRef>
+          <a:fillRef idx="3">
+            <a:schemeClr val="accent1"/>
+          </a:fillRef>
+          <a:effectRef idx="2">
+            <a:schemeClr val="accent1"/>
+          </a:effectRef>
+          <a:fontRef idx="minor">
+            <a:schemeClr val="lt1"/>
+          </a:fontRef>
+        </p:style>
+        <p:txBody>
+          <a:bodyPr rtlCol="0" anchor="ctr" lIns="137160" rIns="137160"/>
+          <a:lstStyle/>
+          <a:p>
+            <a:pPr algn="ctr"/>
+            <a:r>
+              <a:rPr sz="1200" b="1">
+                <a:solidFill>
+                  <a:srgbClr val="03110D"/>
+                </a:solidFill>
+              </a:rPr>
+              <a:t>Now</a:t>
+            </a:r>
+          </a:p>
+        </p:txBody>
+      </p:sp>
+      <p:sp>
+        <p:nvSpPr>
+          <p:cNvPr id="6" name="TextBox 5"/>
+          <p:cNvSpPr txBox="1"/>
+          <p:nvPr/>
+        </p:nvSpPr>
+        <p:spPr>
+          <a:xfrm>
+            <a:off x="2011680" y="2468880"/>
+            <a:ext cx="2286000" cy="411480"/>
+          </a:xfrm>
+          <a:prstGeom prst="rect">
+            <a:avLst/>
+          </a:prstGeom>
+          <a:noFill/>
+        </p:spPr>
+        <p:txBody>
+          <a:bodyPr wrap="square">
+            <a:spAutoFit/>
+          </a:bodyPr>
+          <a:lstStyle/>
+          <a:p>
+            <a:pPr algn="l"/>
+            <a:r>
+              <a:rPr sz="1600" b="1">
+                <a:solidFill>
+                  <a:srgbClr val="FFFFFF"/>
+                </a:solidFill>
+                <a:latin typeface="Calibri"/>
+              </a:rPr>
+              <a:t>Hackathon</a:t>
+            </a:r>
+          </a:p>
+        </p:txBody>
+      </p:sp>
+      <p:sp>
+        <p:nvSpPr>
+          <p:cNvPr id="7" name="TextBox 6"/>
+          <p:cNvSpPr txBox="1"/>
+          <p:nvPr/>
+        </p:nvSpPr>
+        <p:spPr>
+          <a:xfrm>
+            <a:off x="548640" y="3108960"/>
+            <a:ext cx="3657600" cy="3200400"/>
+          </a:xfrm>
+          <a:prstGeom prst="rect">
+            <a:avLst/>
+          </a:prstGeom>
+          <a:noFill/>
+        </p:spPr>
+        <p:txBody>
+          <a:bodyPr wrap="square">
+            <a:spAutoFit/>
+          </a:bodyPr>
+          <a:lstStyle/>
+          <a:p>
+            <a:pPr algn="l">
+              <a:spcBef>
+                <a:spcPts val="800"/>
+              </a:spcBef>
+            </a:pPr>
+            <a:r>
+              <a:rPr sz="1200">
+                <a:solidFill>
+                  <a:srgbClr val="E9EDEF"/>
+                </a:solidFill>
+                <a:latin typeface="Calibri"/>
+              </a:rPr>
+              <a:t>• Both channels working end-to-end</a:t>
+            </a:r>
+          </a:p>
+          <a:p>
+            <a:pPr algn="l">
+              <a:spcBef>
+                <a:spcPts val="800"/>
+              </a:spcBef>
+            </a:pPr>
+            <a:r>
+              <a:rPr sz="1200">
+                <a:solidFill>
+                  <a:srgbClr val="E9EDEF"/>
+                </a:solidFill>
+                <a:latin typeface="Calibri"/>
+              </a:rPr>
+              <a:t>• Real NSC questions, cited sources</a:t>
+            </a:r>
+          </a:p>
+          <a:p>
+            <a:pPr algn="l">
+              <a:spcBef>
+                <a:spcPts val="800"/>
+              </a:spcBef>
+            </a:pPr>
+            <a:r>
+              <a:rPr sz="1200">
+                <a:solidFill>
+                  <a:srgbClr val="E9EDEF"/>
+                </a:solidFill>
+                <a:latin typeface="Calibri"/>
+              </a:rPr>
+              <a:t>• CAPS mappings against ATPs</a:t>
+            </a:r>
+          </a:p>
+          <a:p>
+            <a:pPr algn="l">
+              <a:spcBef>
+                <a:spcPts val="800"/>
+              </a:spcBef>
+            </a:pPr>
+            <a:r>
+              <a:rPr sz="1200">
+                <a:solidFill>
+                  <a:srgbClr val="E9EDEF"/>
+                </a:solidFill>
+                <a:latin typeface="Calibri"/>
+              </a:rPr>
+              <a:t>• Mock providers (offline demo)</a:t>
+            </a:r>
+          </a:p>
+        </p:txBody>
+      </p:sp>
+      <p:sp>
+        <p:nvSpPr>
+          <p:cNvPr id="8" name="Rounded Rectangle 7"/>
+          <p:cNvSpPr/>
+          <p:nvPr/>
+        </p:nvSpPr>
+        <p:spPr>
+          <a:xfrm>
+            <a:off x="4389120" y="2468880"/>
+            <a:ext cx="1371600" cy="411480"/>
+          </a:xfrm>
+          <a:prstGeom prst="roundRect">
+            <a:avLst/>
+          </a:prstGeom>
+          <a:solidFill>
+            <a:srgbClr val="FFB347"/>
+          </a:solidFill>
+          <a:ln>
+            <a:noFill/>
+          </a:ln>
+        </p:spPr>
+        <p:style>
+          <a:lnRef idx="1">
+            <a:schemeClr val="accent1"/>
+          </a:lnRef>
+          <a:fillRef idx="3">
+            <a:schemeClr val="accent1"/>
+          </a:fillRef>
+          <a:effectRef idx="2">
+            <a:schemeClr val="accent1"/>
+          </a:effectRef>
+          <a:fontRef idx="minor">
+            <a:schemeClr val="lt1"/>
+          </a:fontRef>
+        </p:style>
+        <p:txBody>
+          <a:bodyPr rtlCol="0" anchor="ctr" lIns="137160" rIns="137160"/>
+          <a:lstStyle/>
+          <a:p>
+            <a:pPr algn="ctr"/>
+            <a:r>
+              <a:rPr sz="1200" b="1">
+                <a:solidFill>
+                  <a:srgbClr val="03110D"/>
+                </a:solidFill>
+              </a:rPr>
+              <a:t>Q3 2026</a:t>
+            </a:r>
+          </a:p>
+        </p:txBody>
+      </p:sp>
+      <p:sp>
+        <p:nvSpPr>
+          <p:cNvPr id="9" name="TextBox 8"/>
+          <p:cNvSpPr txBox="1"/>
+          <p:nvPr/>
+        </p:nvSpPr>
+        <p:spPr>
+          <a:xfrm>
+            <a:off x="5852160" y="2468880"/>
+            <a:ext cx="2286000" cy="411480"/>
+          </a:xfrm>
+          <a:prstGeom prst="rect">
+            <a:avLst/>
+          </a:prstGeom>
+          <a:noFill/>
+        </p:spPr>
+        <p:txBody>
+          <a:bodyPr wrap="square">
+            <a:spAutoFit/>
+          </a:bodyPr>
+          <a:lstStyle/>
+          <a:p>
+            <a:pPr algn="l"/>
+            <a:r>
+              <a:rPr sz="1600" b="1">
+                <a:solidFill>
+                  <a:srgbClr val="FFFFFF"/>
+                </a:solidFill>
+                <a:latin typeface="Calibri"/>
+              </a:rPr>
+              <a:t>Pilot</a:t>
+            </a:r>
+          </a:p>
+        </p:txBody>
+      </p:sp>
+      <p:sp>
+        <p:nvSpPr>
+          <p:cNvPr id="10" name="TextBox 9"/>
+          <p:cNvSpPr txBox="1"/>
+          <p:nvPr/>
+        </p:nvSpPr>
+        <p:spPr>
+          <a:xfrm>
+            <a:off x="4389120" y="3108960"/>
+            <a:ext cx="3657600" cy="3200400"/>
+          </a:xfrm>
+          <a:prstGeom prst="rect">
+            <a:avLst/>
+          </a:prstGeom>
+          <a:noFill/>
+        </p:spPr>
+        <p:txBody>
+          <a:bodyPr wrap="square">
+            <a:spAutoFit/>
+          </a:bodyPr>
+          <a:lstStyle/>
+          <a:p>
+            <a:pPr algn="l">
+              <a:spcBef>
+                <a:spcPts val="800"/>
+              </a:spcBef>
+            </a:pPr>
+            <a:r>
+              <a:rPr sz="1200">
+                <a:solidFill>
+                  <a:srgbClr val="E9EDEF"/>
+                </a:solidFill>
+                <a:latin typeface="Calibri"/>
+              </a:rPr>
+              <a:t>• Dell AI Factory LLM + VLM live</a:t>
+            </a:r>
+          </a:p>
+          <a:p>
+            <a:pPr algn="l">
+              <a:spcBef>
+                <a:spcPts val="800"/>
+              </a:spcBef>
+            </a:pPr>
+            <a:r>
+              <a:rPr sz="1200">
+                <a:solidFill>
+                  <a:srgbClr val="E9EDEF"/>
+                </a:solidFill>
+                <a:latin typeface="Calibri"/>
+              </a:rPr>
+              <a:t>• Vodacom WhatsApp + USSD partnership</a:t>
+            </a:r>
+          </a:p>
+          <a:p>
+            <a:pPr algn="l">
+              <a:spcBef>
+                <a:spcPts val="800"/>
+              </a:spcBef>
+            </a:pPr>
+            <a:r>
+              <a:rPr sz="1200">
+                <a:solidFill>
+                  <a:srgbClr val="E9EDEF"/>
+                </a:solidFill>
+                <a:latin typeface="Calibri"/>
+              </a:rPr>
+              <a:t>• 5 schools across 2 provinces</a:t>
+            </a:r>
+          </a:p>
+          <a:p>
+            <a:pPr algn="l">
+              <a:spcBef>
+                <a:spcPts val="800"/>
+              </a:spcBef>
+            </a:pPr>
+            <a:r>
+              <a:rPr sz="1200">
+                <a:solidFill>
+                  <a:srgbClr val="E9EDEF"/>
+                </a:solidFill>
+                <a:latin typeface="Calibri"/>
+              </a:rPr>
+              <a:t>• Educator advisory board (4-6 teachers)</a:t>
+            </a:r>
+          </a:p>
+        </p:txBody>
+      </p:sp>
+      <p:sp>
+        <p:nvSpPr>
+          <p:cNvPr id="11" name="Rounded Rectangle 10"/>
+          <p:cNvSpPr/>
+          <p:nvPr/>
+        </p:nvSpPr>
+        <p:spPr>
+          <a:xfrm>
+            <a:off x="8229600" y="2468880"/>
+            <a:ext cx="1371600" cy="411480"/>
+          </a:xfrm>
+          <a:prstGeom prst="roundRect">
+            <a:avLst/>
+          </a:prstGeom>
+          <a:solidFill>
+            <a:srgbClr val="FFB347"/>
+          </a:solidFill>
+          <a:ln>
+            <a:noFill/>
+          </a:ln>
+        </p:spPr>
+        <p:style>
+          <a:lnRef idx="1">
+            <a:schemeClr val="accent1"/>
+          </a:lnRef>
+          <a:fillRef idx="3">
+            <a:schemeClr val="accent1"/>
+          </a:fillRef>
+          <a:effectRef idx="2">
+            <a:schemeClr val="accent1"/>
+          </a:effectRef>
+          <a:fontRef idx="minor">
+            <a:schemeClr val="lt1"/>
+          </a:fontRef>
+        </p:style>
+        <p:txBody>
+          <a:bodyPr rtlCol="0" anchor="ctr" lIns="137160" rIns="137160"/>
+          <a:lstStyle/>
+          <a:p>
+            <a:pPr algn="ctr"/>
+            <a:r>
+              <a:rPr sz="1200" b="1">
+                <a:solidFill>
+                  <a:srgbClr val="03110D"/>
+                </a:solidFill>
+              </a:rPr>
+              <a:t>2027</a:t>
+            </a:r>
+          </a:p>
+        </p:txBody>
+      </p:sp>
+      <p:sp>
+        <p:nvSpPr>
+          <p:cNvPr id="12" name="TextBox 11"/>
+          <p:cNvSpPr txBox="1"/>
+          <p:nvPr/>
+        </p:nvSpPr>
+        <p:spPr>
+          <a:xfrm>
+            <a:off x="9692640" y="2468880"/>
+            <a:ext cx="2286000" cy="411480"/>
+          </a:xfrm>
+          <a:prstGeom prst="rect">
+            <a:avLst/>
+          </a:prstGeom>
+          <a:noFill/>
+        </p:spPr>
+        <p:txBody>
+          <a:bodyPr wrap="square">
+            <a:spAutoFit/>
+          </a:bodyPr>
+          <a:lstStyle/>
+          <a:p>
+            <a:pPr algn="l"/>
+            <a:r>
+              <a:rPr sz="1600" b="1">
+                <a:solidFill>
+                  <a:srgbClr val="FFFFFF"/>
+                </a:solidFill>
+                <a:latin typeface="Calibri"/>
+              </a:rPr>
+              <a:t>Scale</a:t>
+            </a:r>
+          </a:p>
+        </p:txBody>
+      </p:sp>
+      <p:sp>
+        <p:nvSpPr>
+          <p:cNvPr id="13" name="TextBox 12"/>
+          <p:cNvSpPr txBox="1"/>
+          <p:nvPr/>
+        </p:nvSpPr>
+        <p:spPr>
+          <a:xfrm>
+            <a:off x="8229600" y="3108960"/>
+            <a:ext cx="3657600" cy="3200400"/>
+          </a:xfrm>
+          <a:prstGeom prst="rect">
+            <a:avLst/>
+          </a:prstGeom>
+          <a:noFill/>
+        </p:spPr>
+        <p:txBody>
+          <a:bodyPr wrap="square">
+            <a:spAutoFit/>
+          </a:bodyPr>
+          <a:lstStyle/>
+          <a:p>
+            <a:pPr algn="l">
+              <a:spcBef>
+                <a:spcPts val="800"/>
+              </a:spcBef>
+            </a:pPr>
+            <a:r>
+              <a:rPr sz="1200">
+                <a:solidFill>
+                  <a:srgbClr val="E9EDEF"/>
+                </a:solidFill>
+                <a:latin typeface="Calibri"/>
+              </a:rPr>
+              <a:t>• All 11 official spoken languages educator-validated + SA Sign Language</a:t>
+            </a:r>
+          </a:p>
+          <a:p>
+            <a:pPr algn="l">
+              <a:spcBef>
+                <a:spcPts val="800"/>
+              </a:spcBef>
+            </a:pPr>
+            <a:r>
+              <a:rPr sz="1200">
+                <a:solidFill>
+                  <a:srgbClr val="E9EDEF"/>
+                </a:solidFill>
+                <a:latin typeface="Calibri"/>
+              </a:rPr>
+              <a:t>• Maths Lit, Sciences, Accounting</a:t>
+            </a:r>
+          </a:p>
+          <a:p>
+            <a:pPr algn="l">
+              <a:spcBef>
+                <a:spcPts val="800"/>
+              </a:spcBef>
+            </a:pPr>
+            <a:r>
+              <a:rPr sz="1200">
+                <a:solidFill>
+                  <a:srgbClr val="E9EDEF"/>
+                </a:solidFill>
+                <a:latin typeface="Calibri"/>
+              </a:rPr>
+              <a:t>• Class-level analytics for teachers</a:t>
+            </a:r>
+          </a:p>
+          <a:p>
+            <a:pPr algn="l">
+              <a:spcBef>
+                <a:spcPts val="800"/>
+              </a:spcBef>
+            </a:pPr>
+            <a:r>
+              <a:rPr sz="1200">
+                <a:solidFill>
+                  <a:srgbClr val="E9EDEF"/>
+                </a:solidFill>
+                <a:latin typeface="Calibri"/>
+              </a:rPr>
+              <a:t>• DBE adoption discussions</a:t>
+            </a:r>
+          </a:p>
+        </p:txBody>
+      </p:sp>
+    </p:spTree>
+  </p:cSld>
+  <p:clrMapOvr>
+    <a:masterClrMapping/>
+  </p:clrMapOvr>
+</p:sld>
+</file>
+
+<file path=ppt/slides/slide14.xml><?xml version="1.0" encoding="utf-8"?>
+<p:sld xmlns:a="http://schemas.openxmlformats.org/drawingml/2006/main" xmlns:p="http://schemas.openxmlformats.org/presentationml/2006/main" xmlns:r="http://schemas.openxmlformats.org/officeDocument/2006/relationships">
+  <p:cSld>
+    <p:bg>
+      <p:bgPr>
+        <a:solidFill>
+          <a:srgbClr val="0B141A"/>
+        </a:solidFill>
+        <a:effectLst/>
+      </p:bgPr>
+    </p:bg>
+    <p:spTree>
+      <p:nvGrpSpPr>
+        <p:cNvPr id="1" name=""/>
+        <p:cNvGrpSpPr/>
+        <p:nvPr/>
+      </p:nvGrpSpPr>
+      <p:grpSpPr/>
+      <p:sp>
+        <p:nvSpPr>
+          <p:cNvPr id="2" name="TextBox 1"/>
+          <p:cNvSpPr txBox="1"/>
+          <p:nvPr/>
+        </p:nvSpPr>
+        <p:spPr>
+          <a:xfrm>
+            <a:off x="548640" y="457200"/>
+            <a:ext cx="11064240" cy="548640"/>
+          </a:xfrm>
+          <a:prstGeom prst="rect">
+            <a:avLst/>
+          </a:prstGeom>
+          <a:noFill/>
+        </p:spPr>
+        <p:txBody>
+          <a:bodyPr wrap="square">
+            <a:spAutoFit/>
+          </a:bodyPr>
+          <a:lstStyle/>
+          <a:p>
+            <a:pPr algn="l"/>
+            <a:r>
+              <a:rPr sz="1400" b="1">
+                <a:solidFill>
                   <a:srgbClr val="FFB347"/>
                 </a:solidFill>
                 <a:latin typeface="Calibri"/>
@@ -11374,8 +12329,8 @@
         </p:nvSpPr>
         <p:spPr>
           <a:xfrm>
-            <a:off x="548640" y="457200"/>
-            <a:ext cx="11064240" cy="548640"/>
+            <a:off x="548640" y="365760"/>
+            <a:ext cx="11064240" cy="457200"/>
           </a:xfrm>
           <a:prstGeom prst="rect">
             <a:avLst/>
@@ -11396,7 +12351,7 @@
                 </a:solidFill>
                 <a:latin typeface="Calibri"/>
               </a:rPr>
-              <a:t>Why this is different</a:t>
+              <a:t>AI/LLM Models</a:t>
             </a:r>
           </a:p>
         </p:txBody>
@@ -11409,8 +12364,8 @@
         </p:nvSpPr>
         <p:spPr>
           <a:xfrm>
-            <a:off x="548640" y="914400"/>
-            <a:ext cx="11064240" cy="914400"/>
+            <a:off x="548640" y="777240"/>
+            <a:ext cx="11064240" cy="640080"/>
           </a:xfrm>
           <a:prstGeom prst="rect">
             <a:avLst/>
@@ -11425,13 +12380,13 @@
           <a:p>
             <a:pPr algn="l"/>
             <a:r>
-              <a:rPr sz="3200" b="1">
+              <a:rPr sz="2600" b="1">
                 <a:solidFill>
                   <a:srgbClr val="FFFFFF"/>
                 </a:solidFill>
                 <a:latin typeface="Calibri"/>
               </a:rPr>
-              <a:t>Not a chatbot. A specialised SA tutor.</a:t>
+              <a:t>Sovereign, open-weight, swap-able</a:t>
             </a:r>
           </a:p>
         </p:txBody>
@@ -11444,7 +12399,7 @@
         </p:nvSpPr>
         <p:spPr>
           <a:xfrm>
-            <a:off x="548640" y="2011680"/>
+            <a:off x="548640" y="1600200"/>
             <a:ext cx="3657600" cy="50800"/>
           </a:xfrm>
           <a:prstGeom prst="rect">
@@ -11487,8 +12442,8 @@
         </p:nvSpPr>
         <p:spPr>
           <a:xfrm>
-            <a:off x="548640" y="2560320"/>
-            <a:ext cx="5486400" cy="548640"/>
+            <a:off x="548640" y="1965960"/>
+            <a:ext cx="5257800" cy="365760"/>
           </a:xfrm>
           <a:prstGeom prst="rect">
             <a:avLst/>
@@ -11503,27 +12458,78 @@
           <a:p>
             <a:pPr algn="l"/>
             <a:r>
-              <a:rPr sz="1600" b="0">
-                <a:solidFill>
-                  <a:srgbClr val="8696A0"/>
-                </a:solidFill>
-                <a:latin typeface="Calibri"/>
-              </a:rPr>
-              <a:t>Generic AI gives the answer.</a:t>
-            </a:r>
-          </a:p>
-        </p:txBody>
-      </p:sp>
-      <p:sp>
-        <p:nvSpPr>
-          <p:cNvPr id="6" name="TextBox 5"/>
+              <a:rPr sz="1600" b="1">
+                <a:solidFill>
+                  <a:srgbClr val="9CFF8C"/>
+                </a:solidFill>
+                <a:latin typeface="Calibri"/>
+              </a:rPr>
+              <a:t>Text Reasoning</a:t>
+            </a:r>
+          </a:p>
+        </p:txBody>
+      </p:sp>
+      <p:sp>
+        <p:nvSpPr>
+          <p:cNvPr id="6" name="Rounded Rectangle 5"/>
+          <p:cNvSpPr/>
+          <p:nvPr/>
+        </p:nvSpPr>
+        <p:spPr>
+          <a:xfrm>
+            <a:off x="548640" y="2468880"/>
+            <a:ext cx="5257800" cy="548640"/>
+          </a:xfrm>
+          <a:prstGeom prst="roundRect">
+            <a:avLst/>
+          </a:prstGeom>
+          <a:solidFill>
+            <a:srgbClr val="00A884"/>
+          </a:solidFill>
+          <a:ln>
+            <a:noFill/>
+          </a:ln>
+        </p:spPr>
+        <p:style>
+          <a:lnRef idx="1">
+            <a:schemeClr val="accent1"/>
+          </a:lnRef>
+          <a:fillRef idx="3">
+            <a:schemeClr val="accent1"/>
+          </a:fillRef>
+          <a:effectRef idx="2">
+            <a:schemeClr val="accent1"/>
+          </a:effectRef>
+          <a:fontRef idx="minor">
+            <a:schemeClr val="lt1"/>
+          </a:fontRef>
+        </p:style>
+        <p:txBody>
+          <a:bodyPr rtlCol="0" anchor="ctr" lIns="137160" rIns="137160"/>
+          <a:lstStyle/>
+          <a:p>
+            <a:pPr algn="ctr"/>
+            <a:r>
+              <a:rPr sz="1600" b="1">
+                <a:solidFill>
+                  <a:srgbClr val="03110D"/>
+                </a:solidFill>
+              </a:rPr>
+              <a:t>🧠 Meta Llama 3.3 70B</a:t>
+            </a:r>
+          </a:p>
+        </p:txBody>
+      </p:sp>
+      <p:sp>
+        <p:nvSpPr>
+          <p:cNvPr id="7" name="TextBox 6"/>
           <p:cNvSpPr txBox="1"/>
           <p:nvPr/>
         </p:nvSpPr>
         <p:spPr>
           <a:xfrm>
-            <a:off x="6126480" y="2560320"/>
-            <a:ext cx="5486400" cy="548640"/>
+            <a:off x="548640" y="3200400"/>
+            <a:ext cx="5257800" cy="3657600"/>
           </a:xfrm>
           <a:prstGeom prst="rect">
             <a:avLst/>
@@ -11536,29 +12542,113 @@
           </a:bodyPr>
           <a:lstStyle/>
           <a:p>
-            <a:pPr algn="l"/>
-            <a:r>
-              <a:rPr sz="1600" b="1">
-                <a:solidFill>
-                  <a:srgbClr val="9CFF8C"/>
-                </a:solidFill>
-                <a:latin typeface="Calibri"/>
-              </a:rPr>
-              <a:t>We refuse to — pedagogy enforced in code, not in a prompt.</a:t>
-            </a:r>
-          </a:p>
-        </p:txBody>
-      </p:sp>
-      <p:sp>
-        <p:nvSpPr>
-          <p:cNvPr id="7" name="TextBox 6"/>
+            <a:pPr algn="l">
+              <a:spcBef>
+                <a:spcPts val="800"/>
+              </a:spcBef>
+            </a:pPr>
+            <a:r>
+              <a:rPr sz="1400">
+                <a:solidFill>
+                  <a:srgbClr val="E9EDEF"/>
+                </a:solidFill>
+                <a:latin typeface="Calibri"/>
+              </a:rPr>
+              <a:t>• 70 billion parameters, instruction-tuned</a:t>
+            </a:r>
+          </a:p>
+          <a:p>
+            <a:pPr algn="l">
+              <a:spcBef>
+                <a:spcPts val="800"/>
+              </a:spcBef>
+            </a:pPr>
+            <a:r>
+              <a:rPr sz="1400">
+                <a:solidFill>
+                  <a:srgbClr val="E9EDEF"/>
+                </a:solidFill>
+                <a:latin typeface="Calibri"/>
+              </a:rPr>
+              <a:t>• Open-weight (self-hostable on Dell hardware)</a:t>
+            </a:r>
+          </a:p>
+          <a:p>
+            <a:pPr algn="l">
+              <a:spcBef>
+                <a:spcPts val="800"/>
+              </a:spcBef>
+            </a:pPr>
+            <a:r>
+              <a:rPr sz="1400">
+                <a:solidFill>
+                  <a:srgbClr val="E9EDEF"/>
+                </a:solidFill>
+                <a:latin typeface="Calibri"/>
+              </a:rPr>
+              <a:t>• Handles: factorisation, trig, calculus, Socratic dialogue</a:t>
+            </a:r>
+          </a:p>
+          <a:p>
+            <a:pPr algn="l">
+              <a:spcBef>
+                <a:spcPts val="800"/>
+              </a:spcBef>
+            </a:pPr>
+            <a:r>
+              <a:rPr sz="1400">
+                <a:solidFill>
+                  <a:srgbClr val="E9EDEF"/>
+                </a:solidFill>
+                <a:latin typeface="Calibri"/>
+              </a:rPr>
+              <a:t>• isiZulu + English fluency</a:t>
+            </a:r>
+          </a:p>
+          <a:p>
+            <a:pPr algn="l">
+              <a:spcBef>
+                <a:spcPts val="800"/>
+              </a:spcBef>
+            </a:pPr>
+            <a:r>
+              <a:rPr sz="1400">
+                <a:solidFill>
+                  <a:srgbClr val="E9EDEF"/>
+                </a:solidFill>
+                <a:latin typeface="Calibri"/>
+              </a:rPr>
+              <a:t>• Pilot: Groq API (free tier)</a:t>
+            </a:r>
+          </a:p>
+          <a:p>
+            <a:pPr algn="l">
+              <a:spcBef>
+                <a:spcPts val="800"/>
+              </a:spcBef>
+            </a:pPr>
+            <a:r>
+              <a:rPr sz="1400">
+                <a:solidFill>
+                  <a:srgbClr val="E9EDEF"/>
+                </a:solidFill>
+                <a:latin typeface="Calibri"/>
+              </a:rPr>
+              <a:t>• Production: Dell AI Factory NIM (in-country)</a:t>
+            </a:r>
+          </a:p>
+        </p:txBody>
+      </p:sp>
+      <p:sp>
+        <p:nvSpPr>
+          <p:cNvPr id="8" name="TextBox 7"/>
           <p:cNvSpPr txBox="1"/>
           <p:nvPr/>
         </p:nvSpPr>
         <p:spPr>
           <a:xfrm>
-            <a:off x="548640" y="3246120"/>
-            <a:ext cx="5486400" cy="548640"/>
+            <a:off x="6355080" y="1965960"/>
+            <a:ext cx="5257800" cy="365760"/>
           </a:xfrm>
           <a:prstGeom prst="rect">
             <a:avLst/>
@@ -11573,27 +12663,78 @@
           <a:p>
             <a:pPr algn="l"/>
             <a:r>
-              <a:rPr sz="1600" b="0">
-                <a:solidFill>
-                  <a:srgbClr val="8696A0"/>
-                </a:solidFill>
-                <a:latin typeface="Calibri"/>
-              </a:rPr>
-              <a:t>Generic AI marks right or wrong.</a:t>
-            </a:r>
-          </a:p>
-        </p:txBody>
-      </p:sp>
-      <p:sp>
-        <p:nvSpPr>
-          <p:cNvPr id="8" name="TextBox 7"/>
+              <a:rPr sz="1600" b="1">
+                <a:solidFill>
+                  <a:srgbClr val="9CFF8C"/>
+                </a:solidFill>
+                <a:latin typeface="Calibri"/>
+              </a:rPr>
+              <a:t>Vision / Multimodal</a:t>
+            </a:r>
+          </a:p>
+        </p:txBody>
+      </p:sp>
+      <p:sp>
+        <p:nvSpPr>
+          <p:cNvPr id="9" name="Rounded Rectangle 8"/>
+          <p:cNvSpPr/>
+          <p:nvPr/>
+        </p:nvSpPr>
+        <p:spPr>
+          <a:xfrm>
+            <a:off x="6355080" y="2468880"/>
+            <a:ext cx="5257800" cy="548640"/>
+          </a:xfrm>
+          <a:prstGeom prst="roundRect">
+            <a:avLst/>
+          </a:prstGeom>
+          <a:solidFill>
+            <a:srgbClr val="FFB347"/>
+          </a:solidFill>
+          <a:ln>
+            <a:noFill/>
+          </a:ln>
+        </p:spPr>
+        <p:style>
+          <a:lnRef idx="1">
+            <a:schemeClr val="accent1"/>
+          </a:lnRef>
+          <a:fillRef idx="3">
+            <a:schemeClr val="accent1"/>
+          </a:fillRef>
+          <a:effectRef idx="2">
+            <a:schemeClr val="accent1"/>
+          </a:effectRef>
+          <a:fontRef idx="minor">
+            <a:schemeClr val="lt1"/>
+          </a:fontRef>
+        </p:style>
+        <p:txBody>
+          <a:bodyPr rtlCol="0" anchor="ctr" lIns="137160" rIns="137160"/>
+          <a:lstStyle/>
+          <a:p>
+            <a:pPr algn="ctr"/>
+            <a:r>
+              <a:rPr sz="1600" b="1">
+                <a:solidFill>
+                  <a:srgbClr val="03110D"/>
+                </a:solidFill>
+              </a:rPr>
+              <a:t>👁️ Llama 4 Scout / Llama 3.2 Vision</a:t>
+            </a:r>
+          </a:p>
+        </p:txBody>
+      </p:sp>
+      <p:sp>
+        <p:nvSpPr>
+          <p:cNvPr id="10" name="TextBox 9"/>
           <p:cNvSpPr txBox="1"/>
           <p:nvPr/>
         </p:nvSpPr>
         <p:spPr>
           <a:xfrm>
-            <a:off x="6126480" y="3246120"/>
-            <a:ext cx="5486400" cy="548640"/>
+            <a:off x="6355080" y="3200400"/>
+            <a:ext cx="5257800" cy="3657600"/>
           </a:xfrm>
           <a:prstGeom prst="rect">
             <a:avLst/>
@@ -11606,29 +12747,156 @@
           </a:bodyPr>
           <a:lstStyle/>
           <a:p>
-            <a:pPr algn="l"/>
-            <a:r>
-              <a:rPr sz="1600" b="1">
-                <a:solidFill>
-                  <a:srgbClr val="9CFF8C"/>
-                </a:solidFill>
-                <a:latin typeface="Calibri"/>
-              </a:rPr>
-              <a:t>We diagnose the exact step where thinking broke + the misconception.</a:t>
-            </a:r>
-          </a:p>
-        </p:txBody>
-      </p:sp>
-      <p:sp>
-        <p:nvSpPr>
-          <p:cNvPr id="9" name="TextBox 8"/>
+            <a:pPr algn="l">
+              <a:spcBef>
+                <a:spcPts val="800"/>
+              </a:spcBef>
+            </a:pPr>
+            <a:r>
+              <a:rPr sz="1400">
+                <a:solidFill>
+                  <a:srgbClr val="E9EDEF"/>
+                </a:solidFill>
+                <a:latin typeface="Calibri"/>
+              </a:rPr>
+              <a:t>• Multimodal — text + image input</a:t>
+            </a:r>
+          </a:p>
+          <a:p>
+            <a:pPr algn="l">
+              <a:spcBef>
+                <a:spcPts val="800"/>
+              </a:spcBef>
+            </a:pPr>
+            <a:r>
+              <a:rPr sz="1400">
+                <a:solidFill>
+                  <a:srgbClr val="E9EDEF"/>
+                </a:solidFill>
+                <a:latin typeface="Calibri"/>
+              </a:rPr>
+              <a:t>• Reads geometry diagrams, handwritten working</a:t>
+            </a:r>
+          </a:p>
+          <a:p>
+            <a:pPr algn="l">
+              <a:spcBef>
+                <a:spcPts val="800"/>
+              </a:spcBef>
+            </a:pPr>
+            <a:r>
+              <a:rPr sz="1400">
+                <a:solidFill>
+                  <a:srgbClr val="E9EDEF"/>
+                </a:solidFill>
+                <a:latin typeface="Calibri"/>
+              </a:rPr>
+              <a:t>• Textbook page understanding</a:t>
+            </a:r>
+          </a:p>
+          <a:p>
+            <a:pPr algn="l">
+              <a:spcBef>
+                <a:spcPts val="800"/>
+              </a:spcBef>
+            </a:pPr>
+            <a:r>
+              <a:rPr sz="1400">
+                <a:solidFill>
+                  <a:srgbClr val="E9EDEF"/>
+                </a:solidFill>
+                <a:latin typeface="Calibri"/>
+              </a:rPr>
+              <a:t>• Same OpenAI-compatible API</a:t>
+            </a:r>
+          </a:p>
+          <a:p>
+            <a:pPr algn="l">
+              <a:spcBef>
+                <a:spcPts val="800"/>
+              </a:spcBef>
+            </a:pPr>
+            <a:r>
+              <a:rPr sz="1400">
+                <a:solidFill>
+                  <a:srgbClr val="E9EDEF"/>
+                </a:solidFill>
+                <a:latin typeface="Calibri"/>
+              </a:rPr>
+              <a:t>• Pilot: Groq API (free)</a:t>
+            </a:r>
+          </a:p>
+          <a:p>
+            <a:pPr algn="l">
+              <a:spcBef>
+                <a:spcPts val="800"/>
+              </a:spcBef>
+            </a:pPr>
+            <a:r>
+              <a:rPr sz="1400">
+                <a:solidFill>
+                  <a:srgbClr val="E9EDEF"/>
+                </a:solidFill>
+                <a:latin typeface="Calibri"/>
+              </a:rPr>
+              <a:t>• Production: Dell AI Factory NIM</a:t>
+            </a:r>
+          </a:p>
+        </p:txBody>
+      </p:sp>
+      <p:sp>
+        <p:nvSpPr>
+          <p:cNvPr id="11" name="Rounded Rectangle 10"/>
+          <p:cNvSpPr/>
+          <p:nvPr/>
+        </p:nvSpPr>
+        <p:spPr>
+          <a:xfrm>
+            <a:off x="548640" y="5989320"/>
+            <a:ext cx="11064240" cy="548640"/>
+          </a:xfrm>
+          <a:prstGeom prst="roundRect">
+            <a:avLst/>
+          </a:prstGeom>
+          <a:solidFill>
+            <a:srgbClr val="111B21"/>
+          </a:solidFill>
+          <a:ln w="12700">
+            <a:solidFill>
+              <a:srgbClr val="00A884"/>
+            </a:solidFill>
+          </a:ln>
+        </p:spPr>
+        <p:style>
+          <a:lnRef idx="1">
+            <a:schemeClr val="accent1"/>
+          </a:lnRef>
+          <a:fillRef idx="3">
+            <a:schemeClr val="accent1"/>
+          </a:fillRef>
+          <a:effectRef idx="2">
+            <a:schemeClr val="accent1"/>
+          </a:effectRef>
+          <a:fontRef idx="minor">
+            <a:schemeClr val="lt1"/>
+          </a:fontRef>
+        </p:style>
+        <p:txBody>
+          <a:bodyPr rtlCol="0" anchor="ctr"/>
+          <a:lstStyle/>
+          <a:p/>
+        </p:txBody>
+      </p:sp>
+      <p:sp>
+        <p:nvSpPr>
+          <p:cNvPr id="12" name="TextBox 11"/>
           <p:cNvSpPr txBox="1"/>
           <p:nvPr/>
         </p:nvSpPr>
         <p:spPr>
           <a:xfrm>
-            <a:off x="548640" y="3931920"/>
-            <a:ext cx="5486400" cy="548640"/>
+            <a:off x="548640" y="6080759"/>
+            <a:ext cx="11064240" cy="365760"/>
           </a:xfrm>
           <a:prstGeom prst="rect">
             <a:avLst/>
@@ -11641,190 +12909,15 @@
           </a:bodyPr>
           <a:lstStyle/>
           <a:p>
-            <a:pPr algn="l"/>
-            <a:r>
-              <a:rPr sz="1600" b="0">
-                <a:solidFill>
-                  <a:srgbClr val="8696A0"/>
-                </a:solidFill>
-                <a:latin typeface="Calibri"/>
-              </a:rPr>
-              <a:t>Generic AI knows everything.</a:t>
-            </a:r>
-          </a:p>
-        </p:txBody>
-      </p:sp>
-      <p:sp>
-        <p:nvSpPr>
-          <p:cNvPr id="10" name="TextBox 9"/>
-          <p:cNvSpPr txBox="1"/>
-          <p:nvPr/>
-        </p:nvSpPr>
-        <p:spPr>
-          <a:xfrm>
-            <a:off x="6126480" y="3931920"/>
-            <a:ext cx="5486400" cy="548640"/>
-          </a:xfrm>
-          <a:prstGeom prst="rect">
-            <a:avLst/>
-          </a:prstGeom>
-          <a:noFill/>
-        </p:spPr>
-        <p:txBody>
-          <a:bodyPr wrap="square">
-            <a:spAutoFit/>
-          </a:bodyPr>
-          <a:lstStyle/>
-          <a:p>
-            <a:pPr algn="l"/>
-            <a:r>
-              <a:rPr sz="1600" b="1">
+            <a:pPr algn="ctr"/>
+            <a:r>
+              <a:rPr sz="1200" b="1">
                 <a:solidFill>
                   <a:srgbClr val="9CFF8C"/>
                 </a:solidFill>
                 <a:latin typeface="Calibri"/>
               </a:rPr>
-              <a:t>We are bounded to CAPS — auditable by DBE, editable by educators.</a:t>
-            </a:r>
-          </a:p>
-        </p:txBody>
-      </p:sp>
-      <p:sp>
-        <p:nvSpPr>
-          <p:cNvPr id="11" name="TextBox 10"/>
-          <p:cNvSpPr txBox="1"/>
-          <p:nvPr/>
-        </p:nvSpPr>
-        <p:spPr>
-          <a:xfrm>
-            <a:off x="548640" y="4617720"/>
-            <a:ext cx="5486400" cy="548640"/>
-          </a:xfrm>
-          <a:prstGeom prst="rect">
-            <a:avLst/>
-          </a:prstGeom>
-          <a:noFill/>
-        </p:spPr>
-        <p:txBody>
-          <a:bodyPr wrap="square">
-            <a:spAutoFit/>
-          </a:bodyPr>
-          <a:lstStyle/>
-          <a:p>
-            <a:pPr algn="l"/>
-            <a:r>
-              <a:rPr sz="1600" b="0">
-                <a:solidFill>
-                  <a:srgbClr val="8696A0"/>
-                </a:solidFill>
-                <a:latin typeface="Calibri"/>
-              </a:rPr>
-              <a:t>Generic AI needs a smartphone.</a:t>
-            </a:r>
-          </a:p>
-        </p:txBody>
-      </p:sp>
-      <p:sp>
-        <p:nvSpPr>
-          <p:cNvPr id="12" name="TextBox 11"/>
-          <p:cNvSpPr txBox="1"/>
-          <p:nvPr/>
-        </p:nvSpPr>
-        <p:spPr>
-          <a:xfrm>
-            <a:off x="6126480" y="4617720"/>
-            <a:ext cx="5486400" cy="548640"/>
-          </a:xfrm>
-          <a:prstGeom prst="rect">
-            <a:avLst/>
-          </a:prstGeom>
-          <a:noFill/>
-        </p:spPr>
-        <p:txBody>
-          <a:bodyPr wrap="square">
-            <a:spAutoFit/>
-          </a:bodyPr>
-          <a:lstStyle/>
-          <a:p>
-            <a:pPr algn="l"/>
-            <a:r>
-              <a:rPr sz="1600" b="1">
-                <a:solidFill>
-                  <a:srgbClr val="9CFF8C"/>
-                </a:solidFill>
-                <a:latin typeface="Calibri"/>
-              </a:rPr>
-              <a:t>USSD reaches feature phones. 5-7M SA learners Meta cannot serve.</a:t>
-            </a:r>
-          </a:p>
-        </p:txBody>
-      </p:sp>
-      <p:sp>
-        <p:nvSpPr>
-          <p:cNvPr id="13" name="TextBox 12"/>
-          <p:cNvSpPr txBox="1"/>
-          <p:nvPr/>
-        </p:nvSpPr>
-        <p:spPr>
-          <a:xfrm>
-            <a:off x="548640" y="5303520"/>
-            <a:ext cx="5486400" cy="548640"/>
-          </a:xfrm>
-          <a:prstGeom prst="rect">
-            <a:avLst/>
-          </a:prstGeom>
-          <a:noFill/>
-        </p:spPr>
-        <p:txBody>
-          <a:bodyPr wrap="square">
-            <a:spAutoFit/>
-          </a:bodyPr>
-          <a:lstStyle/>
-          <a:p>
-            <a:pPr algn="l"/>
-            <a:r>
-              <a:rPr sz="1600" b="0">
-                <a:solidFill>
-                  <a:srgbClr val="8696A0"/>
-                </a:solidFill>
-                <a:latin typeface="Calibri"/>
-              </a:rPr>
-              <a:t>Generic AI's data leaves SA.</a:t>
-            </a:r>
-          </a:p>
-        </p:txBody>
-      </p:sp>
-      <p:sp>
-        <p:nvSpPr>
-          <p:cNvPr id="14" name="TextBox 13"/>
-          <p:cNvSpPr txBox="1"/>
-          <p:nvPr/>
-        </p:nvSpPr>
-        <p:spPr>
-          <a:xfrm>
-            <a:off x="6126480" y="5303520"/>
-            <a:ext cx="5486400" cy="548640"/>
-          </a:xfrm>
-          <a:prstGeom prst="rect">
-            <a:avLst/>
-          </a:prstGeom>
-          <a:noFill/>
-        </p:spPr>
-        <p:txBody>
-          <a:bodyPr wrap="square">
-            <a:spAutoFit/>
-          </a:bodyPr>
-          <a:lstStyle/>
-          <a:p>
-            <a:pPr algn="l"/>
-            <a:r>
-              <a:rPr sz="1600" b="1">
-                <a:solidFill>
-                  <a:srgbClr val="9CFF8C"/>
-                </a:solidFill>
-                <a:latin typeface="Calibri"/>
-              </a:rPr>
-              <a:t>We run on Dell AI Factory in country. POPIA-aligned. Sovereign.</a:t>
+              <a:t>Why open-weight Llama over GPT-4/Claude/Gemini: POPIA sovereignty · no vendor lock-in · zero pilot cost · fully auditable</a:t>
             </a:r>
           </a:p>
         </p:txBody>
@@ -11863,8 +12956,8 @@
         </p:nvSpPr>
         <p:spPr>
           <a:xfrm>
-            <a:off x="548640" y="457200"/>
-            <a:ext cx="11064240" cy="548640"/>
+            <a:off x="548640" y="320040"/>
+            <a:ext cx="11064240" cy="457200"/>
           </a:xfrm>
           <a:prstGeom prst="rect">
             <a:avLst/>
@@ -11881,11 +12974,11 @@
             <a:r>
               <a:rPr sz="1400" b="1">
                 <a:solidFill>
-                  <a:srgbClr val="FFB347"/>
-                </a:solidFill>
-                <a:latin typeface="Calibri"/>
-              </a:rPr>
-              <a:t>Will it work?</a:t>
+                  <a:srgbClr val="00A884"/>
+                </a:solidFill>
+                <a:latin typeface="Calibri"/>
+              </a:rPr>
+              <a:t>Architecture · Data Flow</a:t>
             </a:r>
           </a:p>
         </p:txBody>
@@ -11898,8 +12991,8 @@
         </p:nvSpPr>
         <p:spPr>
           <a:xfrm>
-            <a:off x="548640" y="914400"/>
-            <a:ext cx="11064240" cy="914400"/>
+            <a:off x="548640" y="685800"/>
+            <a:ext cx="11064240" cy="548640"/>
           </a:xfrm>
           <a:prstGeom prst="rect">
             <a:avLst/>
@@ -11914,13 +13007,13 @@
           <a:p>
             <a:pPr algn="l"/>
             <a:r>
-              <a:rPr sz="3200" b="1">
+              <a:rPr sz="2400" b="1">
                 <a:solidFill>
                   <a:srgbClr val="FFFFFF"/>
                 </a:solidFill>
                 <a:latin typeface="Calibri"/>
               </a:rPr>
-              <a:t>Yes — as a complement, not a replacement.</a:t>
+              <a:t>One request, end-to-end</a:t>
             </a:r>
           </a:p>
         </p:txBody>
@@ -11933,10 +13026,207 @@
         </p:nvSpPr>
         <p:spPr>
           <a:xfrm>
-            <a:off x="548640" y="2011680"/>
+            <a:off x="548640" y="1371600"/>
             <a:ext cx="3657600" cy="50800"/>
           </a:xfrm>
           <a:prstGeom prst="rect">
+            <a:avLst/>
+          </a:prstGeom>
+          <a:solidFill>
+            <a:srgbClr val="00A884"/>
+          </a:solidFill>
+          <a:ln>
+            <a:noFill/>
+          </a:ln>
+        </p:spPr>
+        <p:style>
+          <a:lnRef idx="1">
+            <a:schemeClr val="accent1"/>
+          </a:lnRef>
+          <a:fillRef idx="3">
+            <a:schemeClr val="accent1"/>
+          </a:fillRef>
+          <a:effectRef idx="2">
+            <a:schemeClr val="accent1"/>
+          </a:effectRef>
+          <a:fontRef idx="minor">
+            <a:schemeClr val="lt1"/>
+          </a:fontRef>
+        </p:style>
+        <p:txBody>
+          <a:bodyPr rtlCol="0" anchor="ctr"/>
+          <a:lstStyle/>
+          <a:p>
+            <a:pPr algn="ctr"/>
+          </a:p>
+        </p:txBody>
+      </p:sp>
+      <p:sp>
+        <p:nvSpPr>
+          <p:cNvPr id="5" name="Rounded Rectangle 4"/>
+          <p:cNvSpPr/>
+          <p:nvPr/>
+        </p:nvSpPr>
+        <p:spPr>
+          <a:xfrm>
+            <a:off x="3200400" y="1600200"/>
+            <a:ext cx="5760720" cy="502920"/>
+          </a:xfrm>
+          <a:prstGeom prst="roundRect">
+            <a:avLst/>
+          </a:prstGeom>
+          <a:solidFill>
+            <a:srgbClr val="00A884"/>
+          </a:solidFill>
+          <a:ln>
+            <a:noFill/>
+          </a:ln>
+        </p:spPr>
+        <p:style>
+          <a:lnRef idx="1">
+            <a:schemeClr val="accent1"/>
+          </a:lnRef>
+          <a:fillRef idx="3">
+            <a:schemeClr val="accent1"/>
+          </a:fillRef>
+          <a:effectRef idx="2">
+            <a:schemeClr val="accent1"/>
+          </a:effectRef>
+          <a:fontRef idx="minor">
+            <a:schemeClr val="lt1"/>
+          </a:fontRef>
+        </p:style>
+        <p:txBody>
+          <a:bodyPr rtlCol="0" anchor="ctr"/>
+          <a:lstStyle/>
+          <a:p/>
+        </p:txBody>
+      </p:sp>
+      <p:sp>
+        <p:nvSpPr>
+          <p:cNvPr id="6" name="TextBox 5"/>
+          <p:cNvSpPr txBox="1"/>
+          <p:nvPr/>
+        </p:nvSpPr>
+        <p:spPr>
+          <a:xfrm>
+            <a:off x="3337560" y="1645920"/>
+            <a:ext cx="5486400" cy="274320"/>
+          </a:xfrm>
+          <a:prstGeom prst="rect">
+            <a:avLst/>
+          </a:prstGeom>
+          <a:noFill/>
+        </p:spPr>
+        <p:txBody>
+          <a:bodyPr wrap="square">
+            <a:spAutoFit/>
+          </a:bodyPr>
+          <a:lstStyle/>
+          <a:p>
+            <a:pPr algn="ctr"/>
+            <a:r>
+              <a:rPr sz="1300" b="1">
+                <a:solidFill>
+                  <a:srgbClr val="03110D"/>
+                </a:solidFill>
+                <a:latin typeface="Calibri"/>
+              </a:rPr>
+              <a:t>1 · Learner input  ·  WhatsApp / USSD / Browser</a:t>
+            </a:r>
+          </a:p>
+        </p:txBody>
+      </p:sp>
+      <p:sp>
+        <p:nvSpPr>
+          <p:cNvPr id="7" name="TextBox 6"/>
+          <p:cNvSpPr txBox="1"/>
+          <p:nvPr/>
+        </p:nvSpPr>
+        <p:spPr>
+          <a:xfrm>
+            <a:off x="3337560" y="1892807"/>
+            <a:ext cx="5486400" cy="201168"/>
+          </a:xfrm>
+          <a:prstGeom prst="rect">
+            <a:avLst/>
+          </a:prstGeom>
+          <a:noFill/>
+        </p:spPr>
+        <p:txBody>
+          <a:bodyPr wrap="square">
+            <a:spAutoFit/>
+          </a:bodyPr>
+          <a:lstStyle/>
+          <a:p>
+            <a:pPr algn="ctr"/>
+            <a:r>
+              <a:rPr sz="900" b="0">
+                <a:solidFill>
+                  <a:srgbClr val="03110D"/>
+                </a:solidFill>
+                <a:latin typeface="Calibri"/>
+              </a:rPr>
+              <a:t>text · photo · PDF/DOCX · quick-reply button</a:t>
+            </a:r>
+          </a:p>
+        </p:txBody>
+      </p:sp>
+      <p:sp>
+        <p:nvSpPr>
+          <p:cNvPr id="8" name="Down Arrow 7"/>
+          <p:cNvSpPr/>
+          <p:nvPr/>
+        </p:nvSpPr>
+        <p:spPr>
+          <a:xfrm>
+            <a:off x="5943600" y="2103120"/>
+            <a:ext cx="274320" cy="201168"/>
+          </a:xfrm>
+          <a:prstGeom prst="downArrow">
+            <a:avLst/>
+          </a:prstGeom>
+          <a:solidFill>
+            <a:srgbClr val="00A884"/>
+          </a:solidFill>
+          <a:ln>
+            <a:noFill/>
+          </a:ln>
+        </p:spPr>
+        <p:style>
+          <a:lnRef idx="1">
+            <a:schemeClr val="accent1"/>
+          </a:lnRef>
+          <a:fillRef idx="3">
+            <a:schemeClr val="accent1"/>
+          </a:fillRef>
+          <a:effectRef idx="2">
+            <a:schemeClr val="accent1"/>
+          </a:effectRef>
+          <a:fontRef idx="minor">
+            <a:schemeClr val="lt1"/>
+          </a:fontRef>
+        </p:style>
+        <p:txBody>
+          <a:bodyPr rtlCol="0" anchor="ctr"/>
+          <a:lstStyle/>
+          <a:p>
+            <a:pPr algn="ctr"/>
+          </a:p>
+        </p:txBody>
+      </p:sp>
+      <p:sp>
+        <p:nvSpPr>
+          <p:cNvPr id="9" name="Rounded Rectangle 8"/>
+          <p:cNvSpPr/>
+          <p:nvPr/>
+        </p:nvSpPr>
+        <p:spPr>
+          <a:xfrm>
+            <a:off x="3200400" y="2322576"/>
+            <a:ext cx="5760720" cy="502920"/>
+          </a:xfrm>
+          <a:prstGeom prst="roundRect">
             <a:avLst/>
           </a:prstGeom>
           <a:solidFill>
@@ -11963,21 +13253,19 @@
         <p:txBody>
           <a:bodyPr rtlCol="0" anchor="ctr"/>
           <a:lstStyle/>
-          <a:p>
-            <a:pPr algn="ctr"/>
-          </a:p>
-        </p:txBody>
-      </p:sp>
-      <p:sp>
-        <p:nvSpPr>
-          <p:cNvPr id="5" name="TextBox 4"/>
+          <a:p/>
+        </p:txBody>
+      </p:sp>
+      <p:sp>
+        <p:nvSpPr>
+          <p:cNvPr id="10" name="TextBox 9"/>
           <p:cNvSpPr txBox="1"/>
           <p:nvPr/>
         </p:nvSpPr>
         <p:spPr>
           <a:xfrm>
-            <a:off x="548640" y="2468880"/>
-            <a:ext cx="11064240" cy="457200"/>
+            <a:off x="3337560" y="2368296"/>
+            <a:ext cx="5486400" cy="274320"/>
           </a:xfrm>
           <a:prstGeom prst="rect">
             <a:avLst/>
@@ -11990,29 +13278,29 @@
           </a:bodyPr>
           <a:lstStyle/>
           <a:p>
-            <a:pPr algn="l"/>
-            <a:r>
-              <a:rPr sz="1600" b="1">
-                <a:solidFill>
-                  <a:srgbClr val="00A884"/>
-                </a:solidFill>
-                <a:latin typeface="Calibri"/>
-              </a:rPr>
-              <a:t>Why we expect uplift</a:t>
-            </a:r>
-          </a:p>
-        </p:txBody>
-      </p:sp>
-      <p:sp>
-        <p:nvSpPr>
-          <p:cNvPr id="6" name="TextBox 5"/>
+            <a:pPr algn="ctr"/>
+            <a:r>
+              <a:rPr sz="1300" b="1">
+                <a:solidFill>
+                  <a:srgbClr val="03110D"/>
+                </a:solidFill>
+                <a:latin typeface="Calibri"/>
+              </a:rPr>
+              <a:t>2 · Channel handler  ·  app/channels/*.py</a:t>
+            </a:r>
+          </a:p>
+        </p:txBody>
+      </p:sp>
+      <p:sp>
+        <p:nvSpPr>
+          <p:cNvPr id="11" name="TextBox 10"/>
           <p:cNvSpPr txBox="1"/>
           <p:nvPr/>
         </p:nvSpPr>
         <p:spPr>
           <a:xfrm>
-            <a:off x="548640" y="2834640"/>
-            <a:ext cx="11064240" cy="2103120"/>
+            <a:off x="3337560" y="2615184"/>
+            <a:ext cx="5486400" cy="201168"/>
           </a:xfrm>
           <a:prstGeom prst="rect">
             <a:avLst/>
@@ -12025,81 +13313,113 @@
           </a:bodyPr>
           <a:lstStyle/>
           <a:p>
-            <a:pPr algn="l">
-              <a:spcBef>
-                <a:spcPts val="800"/>
-              </a:spcBef>
-            </a:pPr>
-            <a:r>
-              <a:rPr sz="1500">
-                <a:solidFill>
-                  <a:srgbClr val="E9EDEF"/>
-                </a:solidFill>
-                <a:latin typeface="Calibri"/>
-              </a:rPr>
-              <a:t>• Diagnostic feedback has the highest effect size in education research (Hattie, d ≈ 0.7-1.0).</a:t>
-            </a:r>
-          </a:p>
-          <a:p>
-            <a:pPr algn="l">
-              <a:spcBef>
-                <a:spcPts val="800"/>
-              </a:spcBef>
-            </a:pPr>
-            <a:r>
-              <a:rPr sz="1500">
-                <a:solidFill>
-                  <a:srgbClr val="E9EDEF"/>
-                </a:solidFill>
-                <a:latin typeface="Calibri"/>
-              </a:rPr>
-              <a:t>• Past-paper practice is the single best predictor of NSC outcomes — we give every learner the full archive, free.</a:t>
-            </a:r>
-          </a:p>
-          <a:p>
-            <a:pPr algn="l">
-              <a:spcBef>
-                <a:spcPts val="800"/>
-              </a:spcBef>
-            </a:pPr>
-            <a:r>
-              <a:rPr sz="1500">
-                <a:solidFill>
-                  <a:srgbClr val="E9EDEF"/>
-                </a:solidFill>
-                <a:latin typeface="Calibri"/>
-              </a:rPr>
-              <a:t>• Mother-tongue access reduces cognitive load — we deliver in en/af/zu/xh.</a:t>
-            </a:r>
-          </a:p>
-          <a:p>
-            <a:pPr algn="l">
-              <a:spcBef>
-                <a:spcPts val="800"/>
-              </a:spcBef>
-            </a:pPr>
-            <a:r>
-              <a:rPr sz="1500">
-                <a:solidFill>
-                  <a:srgbClr val="E9EDEF"/>
-                </a:solidFill>
-                <a:latin typeface="Calibri"/>
-              </a:rPr>
-              <a:t>• Mark-scheme awareness teaches learners to write for the marker, not just to compute.</a:t>
-            </a:r>
-          </a:p>
-        </p:txBody>
-      </p:sp>
-      <p:sp>
-        <p:nvSpPr>
-          <p:cNvPr id="7" name="TextBox 6"/>
+            <a:pPr algn="ctr"/>
+            <a:r>
+              <a:rPr sz="900" b="0">
+                <a:solidFill>
+                  <a:srgbClr val="03110D"/>
+                </a:solidFill>
+                <a:latin typeface="Calibri"/>
+              </a:rPr>
+              <a:t>Normalises to InboundMessage schema</a:t>
+            </a:r>
+          </a:p>
+        </p:txBody>
+      </p:sp>
+      <p:sp>
+        <p:nvSpPr>
+          <p:cNvPr id="12" name="Down Arrow 11"/>
+          <p:cNvSpPr/>
+          <p:nvPr/>
+        </p:nvSpPr>
+        <p:spPr>
+          <a:xfrm>
+            <a:off x="5943600" y="2825496"/>
+            <a:ext cx="274320" cy="201168"/>
+          </a:xfrm>
+          <a:prstGeom prst="downArrow">
+            <a:avLst/>
+          </a:prstGeom>
+          <a:solidFill>
+            <a:srgbClr val="00A884"/>
+          </a:solidFill>
+          <a:ln>
+            <a:noFill/>
+          </a:ln>
+        </p:spPr>
+        <p:style>
+          <a:lnRef idx="1">
+            <a:schemeClr val="accent1"/>
+          </a:lnRef>
+          <a:fillRef idx="3">
+            <a:schemeClr val="accent1"/>
+          </a:fillRef>
+          <a:effectRef idx="2">
+            <a:schemeClr val="accent1"/>
+          </a:effectRef>
+          <a:fontRef idx="minor">
+            <a:schemeClr val="lt1"/>
+          </a:fontRef>
+        </p:style>
+        <p:txBody>
+          <a:bodyPr rtlCol="0" anchor="ctr"/>
+          <a:lstStyle/>
+          <a:p>
+            <a:pPr algn="ctr"/>
+          </a:p>
+        </p:txBody>
+      </p:sp>
+      <p:sp>
+        <p:nvSpPr>
+          <p:cNvPr id="13" name="Rounded Rectangle 12"/>
+          <p:cNvSpPr/>
+          <p:nvPr/>
+        </p:nvSpPr>
+        <p:spPr>
+          <a:xfrm>
+            <a:off x="3200400" y="3044952"/>
+            <a:ext cx="5760720" cy="502920"/>
+          </a:xfrm>
+          <a:prstGeom prst="roundRect">
+            <a:avLst/>
+          </a:prstGeom>
+          <a:solidFill>
+            <a:srgbClr val="9CFF8C"/>
+          </a:solidFill>
+          <a:ln>
+            <a:noFill/>
+          </a:ln>
+        </p:spPr>
+        <p:style>
+          <a:lnRef idx="1">
+            <a:schemeClr val="accent1"/>
+          </a:lnRef>
+          <a:fillRef idx="3">
+            <a:schemeClr val="accent1"/>
+          </a:fillRef>
+          <a:effectRef idx="2">
+            <a:schemeClr val="accent1"/>
+          </a:effectRef>
+          <a:fontRef idx="minor">
+            <a:schemeClr val="lt1"/>
+          </a:fontRef>
+        </p:style>
+        <p:txBody>
+          <a:bodyPr rtlCol="0" anchor="ctr"/>
+          <a:lstStyle/>
+          <a:p/>
+        </p:txBody>
+      </p:sp>
+      <p:sp>
+        <p:nvSpPr>
+          <p:cNvPr id="14" name="TextBox 13"/>
           <p:cNvSpPr txBox="1"/>
           <p:nvPr/>
         </p:nvSpPr>
         <p:spPr>
           <a:xfrm>
-            <a:off x="548640" y="5029200"/>
-            <a:ext cx="11064240" cy="457200"/>
+            <a:off x="3337560" y="3090672"/>
+            <a:ext cx="5486400" cy="274320"/>
           </a:xfrm>
           <a:prstGeom prst="rect">
             <a:avLst/>
@@ -12112,29 +13432,29 @@
           </a:bodyPr>
           <a:lstStyle/>
           <a:p>
-            <a:pPr algn="l"/>
-            <a:r>
-              <a:rPr sz="1800" b="1">
-                <a:solidFill>
-                  <a:srgbClr val="FFE9B8"/>
-                </a:solidFill>
-                <a:latin typeface="Calibri"/>
-              </a:rPr>
-              <a:t>Honest target: +5-15 percentage points on Maths NSC outcomes</a:t>
-            </a:r>
-          </a:p>
-        </p:txBody>
-      </p:sp>
-      <p:sp>
-        <p:nvSpPr>
-          <p:cNvPr id="8" name="TextBox 7"/>
+            <a:pPr algn="ctr"/>
+            <a:r>
+              <a:rPr sz="1300" b="1">
+                <a:solidFill>
+                  <a:srgbClr val="03110D"/>
+                </a:solidFill>
+                <a:latin typeface="Calibri"/>
+              </a:rPr>
+              <a:t>3 · Tutor Engine  ·  app/tutor/engine.py</a:t>
+            </a:r>
+          </a:p>
+        </p:txBody>
+      </p:sp>
+      <p:sp>
+        <p:nvSpPr>
+          <p:cNvPr id="15" name="TextBox 14"/>
           <p:cNvSpPr txBox="1"/>
           <p:nvPr/>
         </p:nvSpPr>
         <p:spPr>
           <a:xfrm>
-            <a:off x="548640" y="5486400"/>
-            <a:ext cx="11064240" cy="731520"/>
+            <a:off x="3337560" y="3337560"/>
+            <a:ext cx="5486400" cy="201168"/>
           </a:xfrm>
           <a:prstGeom prst="rect">
             <a:avLst/>
@@ -12147,15 +13467,1053 @@
           </a:bodyPr>
           <a:lstStyle/>
           <a:p>
-            <a:pPr algn="l"/>
-            <a:r>
-              <a:rPr sz="1300" b="0">
+            <a:pPr algn="ctr"/>
+            <a:r>
+              <a:rPr sz="900" b="0">
+                <a:solidFill>
+                  <a:srgbClr val="03110D"/>
+                </a:solidFill>
+                <a:latin typeface="Calibri"/>
+              </a:rPr>
+              <a:t>Routes by input type · session state · language / grade</a:t>
+            </a:r>
+          </a:p>
+        </p:txBody>
+      </p:sp>
+      <p:sp>
+        <p:nvSpPr>
+          <p:cNvPr id="16" name="Down Arrow 15"/>
+          <p:cNvSpPr/>
+          <p:nvPr/>
+        </p:nvSpPr>
+        <p:spPr>
+          <a:xfrm>
+            <a:off x="5943600" y="3547872"/>
+            <a:ext cx="274320" cy="201168"/>
+          </a:xfrm>
+          <a:prstGeom prst="downArrow">
+            <a:avLst/>
+          </a:prstGeom>
+          <a:solidFill>
+            <a:srgbClr val="00A884"/>
+          </a:solidFill>
+          <a:ln>
+            <a:noFill/>
+          </a:ln>
+        </p:spPr>
+        <p:style>
+          <a:lnRef idx="1">
+            <a:schemeClr val="accent1"/>
+          </a:lnRef>
+          <a:fillRef idx="3">
+            <a:schemeClr val="accent1"/>
+          </a:fillRef>
+          <a:effectRef idx="2">
+            <a:schemeClr val="accent1"/>
+          </a:effectRef>
+          <a:fontRef idx="minor">
+            <a:schemeClr val="lt1"/>
+          </a:fontRef>
+        </p:style>
+        <p:txBody>
+          <a:bodyPr rtlCol="0" anchor="ctr"/>
+          <a:lstStyle/>
+          <a:p>
+            <a:pPr algn="ctr"/>
+          </a:p>
+        </p:txBody>
+      </p:sp>
+      <p:sp>
+        <p:nvSpPr>
+          <p:cNvPr id="17" name="Rounded Rectangle 16"/>
+          <p:cNvSpPr/>
+          <p:nvPr/>
+        </p:nvSpPr>
+        <p:spPr>
+          <a:xfrm>
+            <a:off x="3200400" y="3767328"/>
+            <a:ext cx="5760720" cy="685800"/>
+          </a:xfrm>
+          <a:prstGeom prst="roundRect">
+            <a:avLst/>
+          </a:prstGeom>
+          <a:solidFill>
+            <a:srgbClr val="111B21"/>
+          </a:solidFill>
+          <a:ln w="6350">
+            <a:solidFill>
+              <a:srgbClr val="8696A0"/>
+            </a:solidFill>
+          </a:ln>
+        </p:spPr>
+        <p:style>
+          <a:lnRef idx="1">
+            <a:schemeClr val="accent1"/>
+          </a:lnRef>
+          <a:fillRef idx="3">
+            <a:schemeClr val="accent1"/>
+          </a:fillRef>
+          <a:effectRef idx="2">
+            <a:schemeClr val="accent1"/>
+          </a:effectRef>
+          <a:fontRef idx="minor">
+            <a:schemeClr val="lt1"/>
+          </a:fontRef>
+        </p:style>
+        <p:txBody>
+          <a:bodyPr rtlCol="0" anchor="ctr"/>
+          <a:lstStyle/>
+          <a:p/>
+        </p:txBody>
+      </p:sp>
+      <p:sp>
+        <p:nvSpPr>
+          <p:cNvPr id="18" name="TextBox 17"/>
+          <p:cNvSpPr txBox="1"/>
+          <p:nvPr/>
+        </p:nvSpPr>
+        <p:spPr>
+          <a:xfrm>
+            <a:off x="3291840" y="3803904"/>
+            <a:ext cx="5577840" cy="182880"/>
+          </a:xfrm>
+          <a:prstGeom prst="rect">
+            <a:avLst/>
+          </a:prstGeom>
+          <a:noFill/>
+        </p:spPr>
+        <p:txBody>
+          <a:bodyPr wrap="square">
+            <a:spAutoFit/>
+          </a:bodyPr>
+          <a:lstStyle/>
+          <a:p>
+            <a:pPr algn="ctr"/>
+            <a:r>
+              <a:rPr sz="1000" b="1">
+                <a:solidFill>
+                  <a:srgbClr val="9CFF8C"/>
+                </a:solidFill>
+                <a:latin typeface="Calibri"/>
+              </a:rPr>
+              <a:t>4 · Router decision</a:t>
+            </a:r>
+          </a:p>
+        </p:txBody>
+      </p:sp>
+      <p:sp>
+        <p:nvSpPr>
+          <p:cNvPr id="19" name="Rounded Rectangle 18"/>
+          <p:cNvSpPr/>
+          <p:nvPr/>
+        </p:nvSpPr>
+        <p:spPr>
+          <a:xfrm>
+            <a:off x="3310128" y="4023360"/>
+            <a:ext cx="1071676" cy="182880"/>
+          </a:xfrm>
+          <a:prstGeom prst="roundRect">
+            <a:avLst/>
+          </a:prstGeom>
+          <a:solidFill>
+            <a:srgbClr val="FFE066"/>
+          </a:solidFill>
+          <a:ln>
+            <a:noFill/>
+          </a:ln>
+        </p:spPr>
+        <p:style>
+          <a:lnRef idx="1">
+            <a:schemeClr val="accent1"/>
+          </a:lnRef>
+          <a:fillRef idx="3">
+            <a:schemeClr val="accent1"/>
+          </a:fillRef>
+          <a:effectRef idx="2">
+            <a:schemeClr val="accent1"/>
+          </a:effectRef>
+          <a:fontRef idx="minor">
+            <a:schemeClr val="lt1"/>
+          </a:fontRef>
+        </p:style>
+        <p:txBody>
+          <a:bodyPr rtlCol="0" anchor="ctr" lIns="27432" rIns="27432" tIns="18288" bIns="18288"/>
+          <a:lstStyle/>
+          <a:p>
+            <a:pPr algn="ctr"/>
+            <a:r>
+              <a:rPr sz="900" b="1">
+                <a:solidFill>
+                  <a:srgbClr val="03110D"/>
+                </a:solidFill>
+                <a:latin typeface="Calibri"/>
+              </a:rPr>
+              <a:t>📝 Past-paper?</a:t>
+            </a:r>
+          </a:p>
+        </p:txBody>
+      </p:sp>
+      <p:sp>
+        <p:nvSpPr>
+          <p:cNvPr id="20" name="TextBox 19"/>
+          <p:cNvSpPr txBox="1"/>
+          <p:nvPr/>
+        </p:nvSpPr>
+        <p:spPr>
+          <a:xfrm>
+            <a:off x="3310128" y="4224528"/>
+            <a:ext cx="1071676" cy="164592"/>
+          </a:xfrm>
+          <a:prstGeom prst="rect">
+            <a:avLst/>
+          </a:prstGeom>
+          <a:noFill/>
+        </p:spPr>
+        <p:txBody>
+          <a:bodyPr wrap="square">
+            <a:spAutoFit/>
+          </a:bodyPr>
+          <a:lstStyle/>
+          <a:p>
+            <a:pPr algn="ctr"/>
+            <a:r>
+              <a:rPr sz="700" b="0">
                 <a:solidFill>
                   <a:srgbClr val="8696A0"/>
                 </a:solidFill>
                 <a:latin typeface="Calibri"/>
               </a:rPr>
-              <a:t>What we will NOT claim: that we replace teachers, fix poverty, or substitute for actual practice. We measure outcomes, publish quarterly, and refuse to overclaim.</a:t>
+              <a:t>canonical answer + memo</a:t>
+            </a:r>
+          </a:p>
+        </p:txBody>
+      </p:sp>
+      <p:sp>
+        <p:nvSpPr>
+          <p:cNvPr id="21" name="Rounded Rectangle 20"/>
+          <p:cNvSpPr/>
+          <p:nvPr/>
+        </p:nvSpPr>
+        <p:spPr>
+          <a:xfrm>
+            <a:off x="4427524" y="4023360"/>
+            <a:ext cx="1071676" cy="182880"/>
+          </a:xfrm>
+          <a:prstGeom prst="roundRect">
+            <a:avLst/>
+          </a:prstGeom>
+          <a:solidFill>
+            <a:srgbClr val="66B2FF"/>
+          </a:solidFill>
+          <a:ln>
+            <a:noFill/>
+          </a:ln>
+        </p:spPr>
+        <p:style>
+          <a:lnRef idx="1">
+            <a:schemeClr val="accent1"/>
+          </a:lnRef>
+          <a:fillRef idx="3">
+            <a:schemeClr val="accent1"/>
+          </a:fillRef>
+          <a:effectRef idx="2">
+            <a:schemeClr val="accent1"/>
+          </a:effectRef>
+          <a:fontRef idx="minor">
+            <a:schemeClr val="lt1"/>
+          </a:fontRef>
+        </p:style>
+        <p:txBody>
+          <a:bodyPr rtlCol="0" anchor="ctr" lIns="27432" rIns="27432" tIns="18288" bIns="18288"/>
+          <a:lstStyle/>
+          <a:p>
+            <a:pPr algn="ctr"/>
+            <a:r>
+              <a:rPr sz="900" b="1">
+                <a:solidFill>
+                  <a:srgbClr val="03110D"/>
+                </a:solidFill>
+                <a:latin typeface="Calibri"/>
+              </a:rPr>
+              <a:t>🧮 Arithmetic?</a:t>
+            </a:r>
+          </a:p>
+        </p:txBody>
+      </p:sp>
+      <p:sp>
+        <p:nvSpPr>
+          <p:cNvPr id="22" name="TextBox 21"/>
+          <p:cNvSpPr txBox="1"/>
+          <p:nvPr/>
+        </p:nvSpPr>
+        <p:spPr>
+          <a:xfrm>
+            <a:off x="4427524" y="4224528"/>
+            <a:ext cx="1071676" cy="164592"/>
+          </a:xfrm>
+          <a:prstGeom prst="rect">
+            <a:avLst/>
+          </a:prstGeom>
+          <a:noFill/>
+        </p:spPr>
+        <p:txBody>
+          <a:bodyPr wrap="square">
+            <a:spAutoFit/>
+          </a:bodyPr>
+          <a:lstStyle/>
+          <a:p>
+            <a:pPr algn="ctr"/>
+            <a:r>
+              <a:rPr sz="700" b="0">
+                <a:solidFill>
+                  <a:srgbClr val="8696A0"/>
+                </a:solidFill>
+                <a:latin typeface="Calibri"/>
+              </a:rPr>
+              <a:t>deterministic evaluator</a:t>
+            </a:r>
+          </a:p>
+        </p:txBody>
+      </p:sp>
+      <p:sp>
+        <p:nvSpPr>
+          <p:cNvPr id="23" name="Rounded Rectangle 22"/>
+          <p:cNvSpPr/>
+          <p:nvPr/>
+        </p:nvSpPr>
+        <p:spPr>
+          <a:xfrm>
+            <a:off x="5544921" y="4023360"/>
+            <a:ext cx="1071676" cy="182880"/>
+          </a:xfrm>
+          <a:prstGeom prst="roundRect">
+            <a:avLst/>
+          </a:prstGeom>
+          <a:solidFill>
+            <a:srgbClr val="00A884"/>
+          </a:solidFill>
+          <a:ln>
+            <a:noFill/>
+          </a:ln>
+        </p:spPr>
+        <p:style>
+          <a:lnRef idx="1">
+            <a:schemeClr val="accent1"/>
+          </a:lnRef>
+          <a:fillRef idx="3">
+            <a:schemeClr val="accent1"/>
+          </a:fillRef>
+          <a:effectRef idx="2">
+            <a:schemeClr val="accent1"/>
+          </a:effectRef>
+          <a:fontRef idx="minor">
+            <a:schemeClr val="lt1"/>
+          </a:fontRef>
+        </p:style>
+        <p:txBody>
+          <a:bodyPr rtlCol="0" anchor="ctr" lIns="27432" rIns="27432" tIns="18288" bIns="18288"/>
+          <a:lstStyle/>
+          <a:p>
+            <a:pPr algn="ctr"/>
+            <a:r>
+              <a:rPr sz="900" b="1">
+                <a:solidFill>
+                  <a:srgbClr val="03110D"/>
+                </a:solidFill>
+                <a:latin typeface="Calibri"/>
+              </a:rPr>
+              <a:t>🔤 Equation?</a:t>
+            </a:r>
+          </a:p>
+        </p:txBody>
+      </p:sp>
+      <p:sp>
+        <p:nvSpPr>
+          <p:cNvPr id="24" name="TextBox 23"/>
+          <p:cNvSpPr txBox="1"/>
+          <p:nvPr/>
+        </p:nvSpPr>
+        <p:spPr>
+          <a:xfrm>
+            <a:off x="5544921" y="4224528"/>
+            <a:ext cx="1071676" cy="164592"/>
+          </a:xfrm>
+          <a:prstGeom prst="rect">
+            <a:avLst/>
+          </a:prstGeom>
+          <a:noFill/>
+        </p:spPr>
+        <p:txBody>
+          <a:bodyPr wrap="square">
+            <a:spAutoFit/>
+          </a:bodyPr>
+          <a:lstStyle/>
+          <a:p>
+            <a:pPr algn="ctr"/>
+            <a:r>
+              <a:rPr sz="700" b="0">
+                <a:solidFill>
+                  <a:srgbClr val="8696A0"/>
+                </a:solidFill>
+                <a:latin typeface="Calibri"/>
+              </a:rPr>
+              <a:t>math_analyzer (Python)</a:t>
+            </a:r>
+          </a:p>
+        </p:txBody>
+      </p:sp>
+      <p:sp>
+        <p:nvSpPr>
+          <p:cNvPr id="25" name="Rounded Rectangle 24"/>
+          <p:cNvSpPr/>
+          <p:nvPr/>
+        </p:nvSpPr>
+        <p:spPr>
+          <a:xfrm>
+            <a:off x="6662318" y="4023360"/>
+            <a:ext cx="1071676" cy="182880"/>
+          </a:xfrm>
+          <a:prstGeom prst="roundRect">
+            <a:avLst/>
+          </a:prstGeom>
+          <a:solidFill>
+            <a:srgbClr val="C89EFF"/>
+          </a:solidFill>
+          <a:ln>
+            <a:noFill/>
+          </a:ln>
+        </p:spPr>
+        <p:style>
+          <a:lnRef idx="1">
+            <a:schemeClr val="accent1"/>
+          </a:lnRef>
+          <a:fillRef idx="3">
+            <a:schemeClr val="accent1"/>
+          </a:fillRef>
+          <a:effectRef idx="2">
+            <a:schemeClr val="accent1"/>
+          </a:effectRef>
+          <a:fontRef idx="minor">
+            <a:schemeClr val="lt1"/>
+          </a:fontRef>
+        </p:style>
+        <p:txBody>
+          <a:bodyPr rtlCol="0" anchor="ctr" lIns="27432" rIns="27432" tIns="18288" bIns="18288"/>
+          <a:lstStyle/>
+          <a:p>
+            <a:pPr algn="ctr"/>
+            <a:r>
+              <a:rPr sz="900" b="1">
+                <a:solidFill>
+                  <a:srgbClr val="03110D"/>
+                </a:solidFill>
+                <a:latin typeface="Calibri"/>
+              </a:rPr>
+              <a:t>🖼️ Image?</a:t>
+            </a:r>
+          </a:p>
+        </p:txBody>
+      </p:sp>
+      <p:sp>
+        <p:nvSpPr>
+          <p:cNvPr id="26" name="TextBox 25"/>
+          <p:cNvSpPr txBox="1"/>
+          <p:nvPr/>
+        </p:nvSpPr>
+        <p:spPr>
+          <a:xfrm>
+            <a:off x="6662318" y="4224528"/>
+            <a:ext cx="1071676" cy="164592"/>
+          </a:xfrm>
+          <a:prstGeom prst="rect">
+            <a:avLst/>
+          </a:prstGeom>
+          <a:noFill/>
+        </p:spPr>
+        <p:txBody>
+          <a:bodyPr wrap="square">
+            <a:spAutoFit/>
+          </a:bodyPr>
+          <a:lstStyle/>
+          <a:p>
+            <a:pPr algn="ctr"/>
+            <a:r>
+              <a:rPr sz="700" b="0">
+                <a:solidFill>
+                  <a:srgbClr val="8696A0"/>
+                </a:solidFill>
+                <a:latin typeface="Calibri"/>
+              </a:rPr>
+              <a:t>vision LLM</a:t>
+            </a:r>
+          </a:p>
+        </p:txBody>
+      </p:sp>
+      <p:sp>
+        <p:nvSpPr>
+          <p:cNvPr id="27" name="Rounded Rectangle 26"/>
+          <p:cNvSpPr/>
+          <p:nvPr/>
+        </p:nvSpPr>
+        <p:spPr>
+          <a:xfrm>
+            <a:off x="7779715" y="4023360"/>
+            <a:ext cx="1071676" cy="182880"/>
+          </a:xfrm>
+          <a:prstGeom prst="roundRect">
+            <a:avLst/>
+          </a:prstGeom>
+          <a:solidFill>
+            <a:srgbClr val="FFB347"/>
+          </a:solidFill>
+          <a:ln>
+            <a:noFill/>
+          </a:ln>
+        </p:spPr>
+        <p:style>
+          <a:lnRef idx="1">
+            <a:schemeClr val="accent1"/>
+          </a:lnRef>
+          <a:fillRef idx="3">
+            <a:schemeClr val="accent1"/>
+          </a:fillRef>
+          <a:effectRef idx="2">
+            <a:schemeClr val="accent1"/>
+          </a:effectRef>
+          <a:fontRef idx="minor">
+            <a:schemeClr val="lt1"/>
+          </a:fontRef>
+        </p:style>
+        <p:txBody>
+          <a:bodyPr rtlCol="0" anchor="ctr" lIns="27432" rIns="27432" tIns="18288" bIns="18288"/>
+          <a:lstStyle/>
+          <a:p>
+            <a:pPr algn="ctr"/>
+            <a:r>
+              <a:rPr sz="900" b="1">
+                <a:solidFill>
+                  <a:srgbClr val="03110D"/>
+                </a:solidFill>
+                <a:latin typeface="Calibri"/>
+              </a:rPr>
+              <a:t>📄 Doc?</a:t>
+            </a:r>
+          </a:p>
+        </p:txBody>
+      </p:sp>
+      <p:sp>
+        <p:nvSpPr>
+          <p:cNvPr id="28" name="TextBox 27"/>
+          <p:cNvSpPr txBox="1"/>
+          <p:nvPr/>
+        </p:nvSpPr>
+        <p:spPr>
+          <a:xfrm>
+            <a:off x="7779715" y="4224528"/>
+            <a:ext cx="1071676" cy="164592"/>
+          </a:xfrm>
+          <a:prstGeom prst="rect">
+            <a:avLst/>
+          </a:prstGeom>
+          <a:noFill/>
+        </p:spPr>
+        <p:txBody>
+          <a:bodyPr wrap="square">
+            <a:spAutoFit/>
+          </a:bodyPr>
+          <a:lstStyle/>
+          <a:p>
+            <a:pPr algn="ctr"/>
+            <a:r>
+              <a:rPr sz="700" b="0">
+                <a:solidFill>
+                  <a:srgbClr val="8696A0"/>
+                </a:solidFill>
+                <a:latin typeface="Calibri"/>
+              </a:rPr>
+              <a:t>PDF/DOCX → LLM</a:t>
+            </a:r>
+          </a:p>
+        </p:txBody>
+      </p:sp>
+      <p:sp>
+        <p:nvSpPr>
+          <p:cNvPr id="29" name="Down Arrow 28"/>
+          <p:cNvSpPr/>
+          <p:nvPr/>
+        </p:nvSpPr>
+        <p:spPr>
+          <a:xfrm>
+            <a:off x="5943600" y="4453128"/>
+            <a:ext cx="274320" cy="201168"/>
+          </a:xfrm>
+          <a:prstGeom prst="downArrow">
+            <a:avLst/>
+          </a:prstGeom>
+          <a:solidFill>
+            <a:srgbClr val="00A884"/>
+          </a:solidFill>
+          <a:ln>
+            <a:noFill/>
+          </a:ln>
+        </p:spPr>
+        <p:style>
+          <a:lnRef idx="1">
+            <a:schemeClr val="accent1"/>
+          </a:lnRef>
+          <a:fillRef idx="3">
+            <a:schemeClr val="accent1"/>
+          </a:fillRef>
+          <a:effectRef idx="2">
+            <a:schemeClr val="accent1"/>
+          </a:effectRef>
+          <a:fontRef idx="minor">
+            <a:schemeClr val="lt1"/>
+          </a:fontRef>
+        </p:style>
+        <p:txBody>
+          <a:bodyPr rtlCol="0" anchor="ctr"/>
+          <a:lstStyle/>
+          <a:p>
+            <a:pPr algn="ctr"/>
+          </a:p>
+        </p:txBody>
+      </p:sp>
+      <p:sp>
+        <p:nvSpPr>
+          <p:cNvPr id="30" name="Rounded Rectangle 29"/>
+          <p:cNvSpPr/>
+          <p:nvPr/>
+        </p:nvSpPr>
+        <p:spPr>
+          <a:xfrm>
+            <a:off x="3200400" y="4672584"/>
+            <a:ext cx="5760720" cy="502920"/>
+          </a:xfrm>
+          <a:prstGeom prst="roundRect">
+            <a:avLst/>
+          </a:prstGeom>
+          <a:solidFill>
+            <a:srgbClr val="111B21"/>
+          </a:solidFill>
+          <a:ln w="12700">
+            <a:solidFill>
+              <a:srgbClr val="8696A0"/>
+            </a:solidFill>
+          </a:ln>
+        </p:spPr>
+        <p:style>
+          <a:lnRef idx="1">
+            <a:schemeClr val="accent1"/>
+          </a:lnRef>
+          <a:fillRef idx="3">
+            <a:schemeClr val="accent1"/>
+          </a:fillRef>
+          <a:effectRef idx="2">
+            <a:schemeClr val="accent1"/>
+          </a:effectRef>
+          <a:fontRef idx="minor">
+            <a:schemeClr val="lt1"/>
+          </a:fontRef>
+        </p:style>
+        <p:txBody>
+          <a:bodyPr rtlCol="0" anchor="ctr"/>
+          <a:lstStyle/>
+          <a:p/>
+        </p:txBody>
+      </p:sp>
+      <p:sp>
+        <p:nvSpPr>
+          <p:cNvPr id="31" name="TextBox 30"/>
+          <p:cNvSpPr txBox="1"/>
+          <p:nvPr/>
+        </p:nvSpPr>
+        <p:spPr>
+          <a:xfrm>
+            <a:off x="3337560" y="4718304"/>
+            <a:ext cx="5486400" cy="274320"/>
+          </a:xfrm>
+          <a:prstGeom prst="rect">
+            <a:avLst/>
+          </a:prstGeom>
+          <a:noFill/>
+        </p:spPr>
+        <p:txBody>
+          <a:bodyPr wrap="square">
+            <a:spAutoFit/>
+          </a:bodyPr>
+          <a:lstStyle/>
+          <a:p>
+            <a:pPr algn="ctr"/>
+            <a:r>
+              <a:rPr sz="1300" b="1">
+                <a:solidFill>
+                  <a:srgbClr val="9CFF8C"/>
+                </a:solidFill>
+                <a:latin typeface="Calibri"/>
+              </a:rPr>
+              <a:t>5 · AI Providers  ·  app/providers/*.py</a:t>
+            </a:r>
+          </a:p>
+        </p:txBody>
+      </p:sp>
+      <p:sp>
+        <p:nvSpPr>
+          <p:cNvPr id="32" name="TextBox 31"/>
+          <p:cNvSpPr txBox="1"/>
+          <p:nvPr/>
+        </p:nvSpPr>
+        <p:spPr>
+          <a:xfrm>
+            <a:off x="3337560" y="4965192"/>
+            <a:ext cx="5486400" cy="201168"/>
+          </a:xfrm>
+          <a:prstGeom prst="rect">
+            <a:avLst/>
+          </a:prstGeom>
+          <a:noFill/>
+        </p:spPr>
+        <p:txBody>
+          <a:bodyPr wrap="square">
+            <a:spAutoFit/>
+          </a:bodyPr>
+          <a:lstStyle/>
+          <a:p>
+            <a:pPr algn="ctr"/>
+            <a:r>
+              <a:rPr sz="900" b="0">
+                <a:solidFill>
+                  <a:srgbClr val="9CFF8C"/>
+                </a:solidFill>
+                <a:latin typeface="Calibri"/>
+              </a:rPr>
+              <a:t>Reasoning · Vision · Translation (all pluggable)</a:t>
+            </a:r>
+          </a:p>
+        </p:txBody>
+      </p:sp>
+      <p:sp>
+        <p:nvSpPr>
+          <p:cNvPr id="33" name="Rounded Rectangle 32"/>
+          <p:cNvSpPr/>
+          <p:nvPr/>
+        </p:nvSpPr>
+        <p:spPr>
+          <a:xfrm>
+            <a:off x="9235440" y="4718304"/>
+            <a:ext cx="2880360" cy="411480"/>
+          </a:xfrm>
+          <a:prstGeom prst="roundRect">
+            <a:avLst/>
+          </a:prstGeom>
+          <a:solidFill>
+            <a:srgbClr val="00A884"/>
+          </a:solidFill>
+          <a:ln>
+            <a:noFill/>
+          </a:ln>
+        </p:spPr>
+        <p:style>
+          <a:lnRef idx="1">
+            <a:schemeClr val="accent1"/>
+          </a:lnRef>
+          <a:fillRef idx="3">
+            <a:schemeClr val="accent1"/>
+          </a:fillRef>
+          <a:effectRef idx="2">
+            <a:schemeClr val="accent1"/>
+          </a:effectRef>
+          <a:fontRef idx="minor">
+            <a:schemeClr val="lt1"/>
+          </a:fontRef>
+        </p:style>
+        <p:txBody>
+          <a:bodyPr rtlCol="0" anchor="ctr" lIns="137160" rIns="137160"/>
+          <a:lstStyle/>
+          <a:p>
+            <a:pPr algn="ctr"/>
+            <a:r>
+              <a:rPr sz="1100" b="1">
+                <a:solidFill>
+                  <a:srgbClr val="03110D"/>
+                </a:solidFill>
+              </a:rPr>
+              <a:t>Groq / Dell AI Factory NIM</a:t>
+            </a:r>
+          </a:p>
+        </p:txBody>
+      </p:sp>
+      <p:sp>
+        <p:nvSpPr>
+          <p:cNvPr id="34" name="Right Arrow 33"/>
+          <p:cNvSpPr/>
+          <p:nvPr/>
+        </p:nvSpPr>
+        <p:spPr>
+          <a:xfrm>
+            <a:off x="8961120" y="4832604"/>
+            <a:ext cx="274320" cy="182880"/>
+          </a:xfrm>
+          <a:prstGeom prst="rightArrow">
+            <a:avLst/>
+          </a:prstGeom>
+          <a:solidFill>
+            <a:srgbClr val="00A884"/>
+          </a:solidFill>
+          <a:ln>
+            <a:noFill/>
+          </a:ln>
+        </p:spPr>
+        <p:style>
+          <a:lnRef idx="1">
+            <a:schemeClr val="accent1"/>
+          </a:lnRef>
+          <a:fillRef idx="3">
+            <a:schemeClr val="accent1"/>
+          </a:fillRef>
+          <a:effectRef idx="2">
+            <a:schemeClr val="accent1"/>
+          </a:effectRef>
+          <a:fontRef idx="minor">
+            <a:schemeClr val="lt1"/>
+          </a:fontRef>
+        </p:style>
+        <p:txBody>
+          <a:bodyPr rtlCol="0" anchor="ctr"/>
+          <a:lstStyle/>
+          <a:p>
+            <a:pPr algn="ctr"/>
+          </a:p>
+        </p:txBody>
+      </p:sp>
+      <p:sp>
+        <p:nvSpPr>
+          <p:cNvPr id="35" name="Down Arrow 34"/>
+          <p:cNvSpPr/>
+          <p:nvPr/>
+        </p:nvSpPr>
+        <p:spPr>
+          <a:xfrm>
+            <a:off x="5943600" y="5175504"/>
+            <a:ext cx="274320" cy="201168"/>
+          </a:xfrm>
+          <a:prstGeom prst="downArrow">
+            <a:avLst/>
+          </a:prstGeom>
+          <a:solidFill>
+            <a:srgbClr val="00A884"/>
+          </a:solidFill>
+          <a:ln>
+            <a:noFill/>
+          </a:ln>
+        </p:spPr>
+        <p:style>
+          <a:lnRef idx="1">
+            <a:schemeClr val="accent1"/>
+          </a:lnRef>
+          <a:fillRef idx="3">
+            <a:schemeClr val="accent1"/>
+          </a:fillRef>
+          <a:effectRef idx="2">
+            <a:schemeClr val="accent1"/>
+          </a:effectRef>
+          <a:fontRef idx="minor">
+            <a:schemeClr val="lt1"/>
+          </a:fontRef>
+        </p:style>
+        <p:txBody>
+          <a:bodyPr rtlCol="0" anchor="ctr"/>
+          <a:lstStyle/>
+          <a:p>
+            <a:pPr algn="ctr"/>
+          </a:p>
+        </p:txBody>
+      </p:sp>
+      <p:sp>
+        <p:nvSpPr>
+          <p:cNvPr id="36" name="Rounded Rectangle 35"/>
+          <p:cNvSpPr/>
+          <p:nvPr/>
+        </p:nvSpPr>
+        <p:spPr>
+          <a:xfrm>
+            <a:off x="3200400" y="5394960"/>
+            <a:ext cx="5760720" cy="502920"/>
+          </a:xfrm>
+          <a:prstGeom prst="roundRect">
+            <a:avLst/>
+          </a:prstGeom>
+          <a:solidFill>
+            <a:srgbClr val="00A884"/>
+          </a:solidFill>
+          <a:ln>
+            <a:noFill/>
+          </a:ln>
+        </p:spPr>
+        <p:style>
+          <a:lnRef idx="1">
+            <a:schemeClr val="accent1"/>
+          </a:lnRef>
+          <a:fillRef idx="3">
+            <a:schemeClr val="accent1"/>
+          </a:fillRef>
+          <a:effectRef idx="2">
+            <a:schemeClr val="accent1"/>
+          </a:effectRef>
+          <a:fontRef idx="minor">
+            <a:schemeClr val="lt1"/>
+          </a:fontRef>
+        </p:style>
+        <p:txBody>
+          <a:bodyPr rtlCol="0" anchor="ctr"/>
+          <a:lstStyle/>
+          <a:p/>
+        </p:txBody>
+      </p:sp>
+      <p:sp>
+        <p:nvSpPr>
+          <p:cNvPr id="37" name="TextBox 36"/>
+          <p:cNvSpPr txBox="1"/>
+          <p:nvPr/>
+        </p:nvSpPr>
+        <p:spPr>
+          <a:xfrm>
+            <a:off x="3337560" y="5440680"/>
+            <a:ext cx="5486400" cy="274320"/>
+          </a:xfrm>
+          <a:prstGeom prst="rect">
+            <a:avLst/>
+          </a:prstGeom>
+          <a:noFill/>
+        </p:spPr>
+        <p:txBody>
+          <a:bodyPr wrap="square">
+            <a:spAutoFit/>
+          </a:bodyPr>
+          <a:lstStyle/>
+          <a:p>
+            <a:pPr algn="ctr"/>
+            <a:r>
+              <a:rPr sz="1300" b="1">
+                <a:solidFill>
+                  <a:srgbClr val="03110D"/>
+                </a:solidFill>
+                <a:latin typeface="Calibri"/>
+              </a:rPr>
+              <a:t>6 · Response back to learner</a:t>
+            </a:r>
+          </a:p>
+        </p:txBody>
+      </p:sp>
+      <p:sp>
+        <p:nvSpPr>
+          <p:cNvPr id="38" name="TextBox 37"/>
+          <p:cNvSpPr txBox="1"/>
+          <p:nvPr/>
+        </p:nvSpPr>
+        <p:spPr>
+          <a:xfrm>
+            <a:off x="3337560" y="5687568"/>
+            <a:ext cx="5486400" cy="201168"/>
+          </a:xfrm>
+          <a:prstGeom prst="rect">
+            <a:avLst/>
+          </a:prstGeom>
+          <a:noFill/>
+        </p:spPr>
+        <p:txBody>
+          <a:bodyPr wrap="square">
+            <a:spAutoFit/>
+          </a:bodyPr>
+          <a:lstStyle/>
+          <a:p>
+            <a:pPr algn="ctr"/>
+            <a:r>
+              <a:rPr sz="900" b="0">
+                <a:solidFill>
+                  <a:srgbClr val="03110D"/>
+                </a:solidFill>
+                <a:latin typeface="Calibri"/>
+              </a:rPr>
+              <a:t>TutorResponse → Channel serialiser → learner</a:t>
+            </a:r>
+          </a:p>
+        </p:txBody>
+      </p:sp>
+      <p:sp>
+        <p:nvSpPr>
+          <p:cNvPr id="39" name="Rounded Rectangle 38"/>
+          <p:cNvSpPr/>
+          <p:nvPr/>
+        </p:nvSpPr>
+        <p:spPr>
+          <a:xfrm>
+            <a:off x="548640" y="6263640"/>
+            <a:ext cx="11064240" cy="411480"/>
+          </a:xfrm>
+          <a:prstGeom prst="roundRect">
+            <a:avLst/>
+          </a:prstGeom>
+          <a:solidFill>
+            <a:srgbClr val="111B21"/>
+          </a:solidFill>
+          <a:ln w="12700">
+            <a:solidFill>
+              <a:srgbClr val="00A884"/>
+            </a:solidFill>
+          </a:ln>
+        </p:spPr>
+        <p:style>
+          <a:lnRef idx="1">
+            <a:schemeClr val="accent1"/>
+          </a:lnRef>
+          <a:fillRef idx="3">
+            <a:schemeClr val="accent1"/>
+          </a:fillRef>
+          <a:effectRef idx="2">
+            <a:schemeClr val="accent1"/>
+          </a:effectRef>
+          <a:fontRef idx="minor">
+            <a:schemeClr val="lt1"/>
+          </a:fontRef>
+        </p:style>
+        <p:txBody>
+          <a:bodyPr rtlCol="0" anchor="ctr"/>
+          <a:lstStyle/>
+          <a:p/>
+        </p:txBody>
+      </p:sp>
+      <p:sp>
+        <p:nvSpPr>
+          <p:cNvPr id="40" name="TextBox 39"/>
+          <p:cNvSpPr txBox="1"/>
+          <p:nvPr/>
+        </p:nvSpPr>
+        <p:spPr>
+          <a:xfrm>
+            <a:off x="548640" y="6318503"/>
+            <a:ext cx="11064240" cy="320040"/>
+          </a:xfrm>
+          <a:prstGeom prst="rect">
+            <a:avLst/>
+          </a:prstGeom>
+          <a:noFill/>
+        </p:spPr>
+        <p:txBody>
+          <a:bodyPr wrap="square">
+            <a:spAutoFit/>
+          </a:bodyPr>
+          <a:lstStyle/>
+          <a:p>
+            <a:pPr algn="ctr"/>
+            <a:r>
+              <a:rPr sz="1100" b="1">
+                <a:solidFill>
+                  <a:srgbClr val="9CFF8C"/>
+                </a:solidFill>
+                <a:latin typeface="Calibri"/>
+              </a:rPr>
+              <a:t>Every layer swappable · Every input format supported · No hallucination on deterministic maths</a:t>
             </a:r>
           </a:p>
         </p:txBody>
@@ -12216,7 +14574,7 @@
                 </a:solidFill>
                 <a:latin typeface="Calibri"/>
               </a:rPr>
-              <a:t>Who is this for?</a:t>
+              <a:t>Why this is different</a:t>
             </a:r>
           </a:p>
         </p:txBody>
@@ -12251,7 +14609,7 @@
                 </a:solidFill>
                 <a:latin typeface="Calibri"/>
               </a:rPr>
-              <a:t>Phase 1: Quintile 1–3 NSC learners.</a:t>
+              <a:t>Not a chatbot. A specialised SA tutor.</a:t>
             </a:r>
           </a:p>
         </p:txBody>
@@ -12301,65 +14659,14 @@
       </p:sp>
       <p:sp>
         <p:nvSpPr>
-          <p:cNvPr id="5" name="Rounded Rectangle 4"/>
-          <p:cNvSpPr/>
-          <p:nvPr/>
-        </p:nvSpPr>
-        <p:spPr>
-          <a:xfrm>
-            <a:off x="548640" y="2468880"/>
-            <a:ext cx="3931920" cy="457200"/>
-          </a:xfrm>
-          <a:prstGeom prst="roundRect">
-            <a:avLst/>
-          </a:prstGeom>
-          <a:solidFill>
-            <a:srgbClr val="00A884"/>
-          </a:solidFill>
-          <a:ln>
-            <a:noFill/>
-          </a:ln>
-        </p:spPr>
-        <p:style>
-          <a:lnRef idx="1">
-            <a:schemeClr val="accent1"/>
-          </a:lnRef>
-          <a:fillRef idx="3">
-            <a:schemeClr val="accent1"/>
-          </a:fillRef>
-          <a:effectRef idx="2">
-            <a:schemeClr val="accent1"/>
-          </a:effectRef>
-          <a:fontRef idx="minor">
-            <a:schemeClr val="lt1"/>
-          </a:fontRef>
-        </p:style>
-        <p:txBody>
-          <a:bodyPr rtlCol="0" anchor="ctr" lIns="137160" rIns="137160"/>
-          <a:lstStyle/>
-          <a:p>
-            <a:pPr algn="ctr"/>
-            <a:r>
-              <a:rPr sz="1200" b="1">
-                <a:solidFill>
-                  <a:srgbClr val="03110D"/>
-                </a:solidFill>
-              </a:rPr>
-              <a:t>Persona · Thandi (WhatsApp)</a:t>
-            </a:r>
-          </a:p>
-        </p:txBody>
-      </p:sp>
-      <p:sp>
-        <p:nvSpPr>
-          <p:cNvPr id="6" name="TextBox 5"/>
+          <p:cNvPr id="5" name="TextBox 4"/>
           <p:cNvSpPr txBox="1"/>
           <p:nvPr/>
         </p:nvSpPr>
         <p:spPr>
           <a:xfrm>
-            <a:off x="548640" y="3017520"/>
-            <a:ext cx="5303520" cy="3200400"/>
+            <a:off x="548640" y="2560320"/>
+            <a:ext cx="5486400" cy="548640"/>
           </a:xfrm>
           <a:prstGeom prst="rect">
             <a:avLst/>
@@ -12372,148 +14679,29 @@
           </a:bodyPr>
           <a:lstStyle/>
           <a:p>
-            <a:pPr algn="l">
-              <a:spcBef>
-                <a:spcPts val="800"/>
-              </a:spcBef>
-            </a:pPr>
-            <a:r>
-              <a:rPr sz="1400">
-                <a:solidFill>
-                  <a:srgbClr val="E9EDEF"/>
-                </a:solidFill>
-                <a:latin typeface="Calibri"/>
-              </a:rPr>
-              <a:t>• Grade 11 · Soweto · isiZulu first-language</a:t>
-            </a:r>
-          </a:p>
-          <a:p>
-            <a:pPr algn="l">
-              <a:spcBef>
-                <a:spcPts val="800"/>
-              </a:spcBef>
-            </a:pPr>
-            <a:r>
-              <a:rPr sz="1400">
-                <a:solidFill>
-                  <a:srgbClr val="E9EDEF"/>
-                </a:solidFill>
-                <a:latin typeface="Calibri"/>
-              </a:rPr>
-              <a:t>• Mother is a domestic worker. Father unemployed.</a:t>
-            </a:r>
-          </a:p>
-          <a:p>
-            <a:pPr algn="l">
-              <a:spcBef>
-                <a:spcPts val="800"/>
-              </a:spcBef>
-            </a:pPr>
-            <a:r>
-              <a:rPr sz="1400">
-                <a:solidFill>
-                  <a:srgbClr val="E9EDEF"/>
-                </a:solidFill>
-                <a:latin typeface="Calibri"/>
-              </a:rPr>
-              <a:t>• Basic Android + Vodacom social bundle.</a:t>
-            </a:r>
-          </a:p>
-          <a:p>
-            <a:pPr algn="l">
-              <a:spcBef>
-                <a:spcPts val="800"/>
-              </a:spcBef>
-            </a:pPr>
-            <a:r>
-              <a:rPr sz="1400">
-                <a:solidFill>
-                  <a:srgbClr val="E9EDEF"/>
-                </a:solidFill>
-                <a:latin typeface="Calibri"/>
-              </a:rPr>
-              <a:t>• Currently averaging 50%. Wants a bachelor pass.</a:t>
-            </a:r>
-          </a:p>
-          <a:p>
-            <a:pPr algn="l">
-              <a:spcBef>
-                <a:spcPts val="800"/>
-              </a:spcBef>
-            </a:pPr>
-            <a:r>
-              <a:rPr sz="1400">
-                <a:solidFill>
-                  <a:srgbClr val="E9EDEF"/>
-                </a:solidFill>
-                <a:latin typeface="Calibri"/>
-              </a:rPr>
-              <a:t>• Uses our tutor on WhatsApp at night, mostly text.</a:t>
-            </a:r>
-          </a:p>
-        </p:txBody>
-      </p:sp>
-      <p:sp>
-        <p:nvSpPr>
-          <p:cNvPr id="7" name="Rounded Rectangle 6"/>
-          <p:cNvSpPr/>
-          <p:nvPr/>
-        </p:nvSpPr>
-        <p:spPr>
-          <a:xfrm>
-            <a:off x="6400800" y="2468880"/>
-            <a:ext cx="3931920" cy="457200"/>
-          </a:xfrm>
-          <a:prstGeom prst="roundRect">
-            <a:avLst/>
-          </a:prstGeom>
-          <a:solidFill>
-            <a:srgbClr val="FFB347"/>
-          </a:solidFill>
-          <a:ln>
-            <a:noFill/>
-          </a:ln>
-        </p:spPr>
-        <p:style>
-          <a:lnRef idx="1">
-            <a:schemeClr val="accent1"/>
-          </a:lnRef>
-          <a:fillRef idx="3">
-            <a:schemeClr val="accent1"/>
-          </a:fillRef>
-          <a:effectRef idx="2">
-            <a:schemeClr val="accent1"/>
-          </a:effectRef>
-          <a:fontRef idx="minor">
-            <a:schemeClr val="lt1"/>
-          </a:fontRef>
-        </p:style>
-        <p:txBody>
-          <a:bodyPr rtlCol="0" anchor="ctr" lIns="137160" rIns="137160"/>
-          <a:lstStyle/>
-          <a:p>
-            <a:pPr algn="ctr"/>
-            <a:r>
-              <a:rPr sz="1200" b="1">
-                <a:solidFill>
-                  <a:srgbClr val="03110D"/>
-                </a:solidFill>
-              </a:rPr>
-              <a:t>Persona · Lethabo (USSD)</a:t>
-            </a:r>
-          </a:p>
-        </p:txBody>
-      </p:sp>
-      <p:sp>
-        <p:nvSpPr>
-          <p:cNvPr id="8" name="TextBox 7"/>
+            <a:pPr algn="l"/>
+            <a:r>
+              <a:rPr sz="1600" b="0">
+                <a:solidFill>
+                  <a:srgbClr val="8696A0"/>
+                </a:solidFill>
+                <a:latin typeface="Calibri"/>
+              </a:rPr>
+              <a:t>Generic AI gives the answer.</a:t>
+            </a:r>
+          </a:p>
+        </p:txBody>
+      </p:sp>
+      <p:sp>
+        <p:nvSpPr>
+          <p:cNvPr id="6" name="TextBox 5"/>
           <p:cNvSpPr txBox="1"/>
           <p:nvPr/>
         </p:nvSpPr>
         <p:spPr>
           <a:xfrm>
-            <a:off x="6400800" y="3017520"/>
-            <a:ext cx="5303520" cy="3200400"/>
+            <a:off x="6126480" y="2560320"/>
+            <a:ext cx="5486400" cy="548640"/>
           </a:xfrm>
           <a:prstGeom prst="rect">
             <a:avLst/>
@@ -12526,97 +14714,29 @@
           </a:bodyPr>
           <a:lstStyle/>
           <a:p>
-            <a:pPr algn="l">
-              <a:spcBef>
-                <a:spcPts val="800"/>
-              </a:spcBef>
-            </a:pPr>
-            <a:r>
-              <a:rPr sz="1400">
-                <a:solidFill>
-                  <a:srgbClr val="E9EDEF"/>
-                </a:solidFill>
-                <a:latin typeface="Calibri"/>
-              </a:rPr>
-              <a:t>• Grade 12 · rural Limpopo · Sepedi first-language</a:t>
-            </a:r>
-          </a:p>
-          <a:p>
-            <a:pPr algn="l">
-              <a:spcBef>
-                <a:spcPts val="800"/>
-              </a:spcBef>
-            </a:pPr>
-            <a:r>
-              <a:rPr sz="1400">
-                <a:solidFill>
-                  <a:srgbClr val="E9EDEF"/>
-                </a:solidFill>
-                <a:latin typeface="Calibri"/>
-              </a:rPr>
-              <a:t>• Lives with grandmother. No parents.</a:t>
-            </a:r>
-          </a:p>
-          <a:p>
-            <a:pPr algn="l">
-              <a:spcBef>
-                <a:spcPts val="800"/>
-              </a:spcBef>
-            </a:pPr>
-            <a:r>
-              <a:rPr sz="1400">
-                <a:solidFill>
-                  <a:srgbClr val="E9EDEF"/>
-                </a:solidFill>
-                <a:latin typeface="Calibri"/>
-              </a:rPr>
-              <a:t>• Nokia feature phone — no smartphone.</a:t>
-            </a:r>
-          </a:p>
-          <a:p>
-            <a:pPr algn="l">
-              <a:spcBef>
-                <a:spcPts val="800"/>
-              </a:spcBef>
-            </a:pPr>
-            <a:r>
-              <a:rPr sz="1400">
-                <a:solidFill>
-                  <a:srgbClr val="E9EDEF"/>
-                </a:solidFill>
-                <a:latin typeface="Calibri"/>
-              </a:rPr>
-              <a:t>• 65% mid-year. Wants 70%+ for accounting at UJ.</a:t>
-            </a:r>
-          </a:p>
-          <a:p>
-            <a:pPr algn="l">
-              <a:spcBef>
-                <a:spcPts val="800"/>
-              </a:spcBef>
-            </a:pPr>
-            <a:r>
-              <a:rPr sz="1400">
-                <a:solidFill>
-                  <a:srgbClr val="E9EDEF"/>
-                </a:solidFill>
-                <a:latin typeface="Calibri"/>
-              </a:rPr>
-              <a:t>• Uses our tutor on USSD at school in free periods.</a:t>
-            </a:r>
-          </a:p>
-        </p:txBody>
-      </p:sp>
-      <p:sp>
-        <p:nvSpPr>
-          <p:cNvPr id="9" name="TextBox 8"/>
+            <a:pPr algn="l"/>
+            <a:r>
+              <a:rPr sz="1600" b="1">
+                <a:solidFill>
+                  <a:srgbClr val="9CFF8C"/>
+                </a:solidFill>
+                <a:latin typeface="Calibri"/>
+              </a:rPr>
+              <a:t>We refuse to — pedagogy enforced in code, not in a prompt.</a:t>
+            </a:r>
+          </a:p>
+        </p:txBody>
+      </p:sp>
+      <p:sp>
+        <p:nvSpPr>
+          <p:cNvPr id="7" name="TextBox 6"/>
           <p:cNvSpPr txBox="1"/>
           <p:nvPr/>
         </p:nvSpPr>
         <p:spPr>
           <a:xfrm>
-            <a:off x="548640" y="5943600"/>
-            <a:ext cx="11064240" cy="457200"/>
+            <a:off x="548640" y="3246120"/>
+            <a:ext cx="5486400" cy="548640"/>
           </a:xfrm>
           <a:prstGeom prst="rect">
             <a:avLst/>
@@ -12629,15 +14749,260 @@
           </a:bodyPr>
           <a:lstStyle/>
           <a:p>
-            <a:pPr algn="ctr"/>
-            <a:r>
-              <a:rPr sz="1300" b="0">
+            <a:pPr algn="l"/>
+            <a:r>
+              <a:rPr sz="1600" b="0">
                 <a:solidFill>
                   <a:srgbClr val="8696A0"/>
                 </a:solidFill>
                 <a:latin typeface="Calibri"/>
               </a:rPr>
-              <a:t>Phase 2: Grades 8–10 + Maths Literacy. Phase 3: Sciences, Accounting, 11 official spoken languages + SA Sign Language (video channel).</a:t>
+              <a:t>Generic AI marks right or wrong.</a:t>
+            </a:r>
+          </a:p>
+        </p:txBody>
+      </p:sp>
+      <p:sp>
+        <p:nvSpPr>
+          <p:cNvPr id="8" name="TextBox 7"/>
+          <p:cNvSpPr txBox="1"/>
+          <p:nvPr/>
+        </p:nvSpPr>
+        <p:spPr>
+          <a:xfrm>
+            <a:off x="6126480" y="3246120"/>
+            <a:ext cx="5486400" cy="548640"/>
+          </a:xfrm>
+          <a:prstGeom prst="rect">
+            <a:avLst/>
+          </a:prstGeom>
+          <a:noFill/>
+        </p:spPr>
+        <p:txBody>
+          <a:bodyPr wrap="square">
+            <a:spAutoFit/>
+          </a:bodyPr>
+          <a:lstStyle/>
+          <a:p>
+            <a:pPr algn="l"/>
+            <a:r>
+              <a:rPr sz="1600" b="1">
+                <a:solidFill>
+                  <a:srgbClr val="9CFF8C"/>
+                </a:solidFill>
+                <a:latin typeface="Calibri"/>
+              </a:rPr>
+              <a:t>We diagnose the exact step where thinking broke + the misconception.</a:t>
+            </a:r>
+          </a:p>
+        </p:txBody>
+      </p:sp>
+      <p:sp>
+        <p:nvSpPr>
+          <p:cNvPr id="9" name="TextBox 8"/>
+          <p:cNvSpPr txBox="1"/>
+          <p:nvPr/>
+        </p:nvSpPr>
+        <p:spPr>
+          <a:xfrm>
+            <a:off x="548640" y="3931920"/>
+            <a:ext cx="5486400" cy="548640"/>
+          </a:xfrm>
+          <a:prstGeom prst="rect">
+            <a:avLst/>
+          </a:prstGeom>
+          <a:noFill/>
+        </p:spPr>
+        <p:txBody>
+          <a:bodyPr wrap="square">
+            <a:spAutoFit/>
+          </a:bodyPr>
+          <a:lstStyle/>
+          <a:p>
+            <a:pPr algn="l"/>
+            <a:r>
+              <a:rPr sz="1600" b="0">
+                <a:solidFill>
+                  <a:srgbClr val="8696A0"/>
+                </a:solidFill>
+                <a:latin typeface="Calibri"/>
+              </a:rPr>
+              <a:t>Generic AI knows everything.</a:t>
+            </a:r>
+          </a:p>
+        </p:txBody>
+      </p:sp>
+      <p:sp>
+        <p:nvSpPr>
+          <p:cNvPr id="10" name="TextBox 9"/>
+          <p:cNvSpPr txBox="1"/>
+          <p:nvPr/>
+        </p:nvSpPr>
+        <p:spPr>
+          <a:xfrm>
+            <a:off x="6126480" y="3931920"/>
+            <a:ext cx="5486400" cy="548640"/>
+          </a:xfrm>
+          <a:prstGeom prst="rect">
+            <a:avLst/>
+          </a:prstGeom>
+          <a:noFill/>
+        </p:spPr>
+        <p:txBody>
+          <a:bodyPr wrap="square">
+            <a:spAutoFit/>
+          </a:bodyPr>
+          <a:lstStyle/>
+          <a:p>
+            <a:pPr algn="l"/>
+            <a:r>
+              <a:rPr sz="1600" b="1">
+                <a:solidFill>
+                  <a:srgbClr val="9CFF8C"/>
+                </a:solidFill>
+                <a:latin typeface="Calibri"/>
+              </a:rPr>
+              <a:t>We are bounded to CAPS — auditable by DBE, editable by educators.</a:t>
+            </a:r>
+          </a:p>
+        </p:txBody>
+      </p:sp>
+      <p:sp>
+        <p:nvSpPr>
+          <p:cNvPr id="11" name="TextBox 10"/>
+          <p:cNvSpPr txBox="1"/>
+          <p:nvPr/>
+        </p:nvSpPr>
+        <p:spPr>
+          <a:xfrm>
+            <a:off x="548640" y="4617720"/>
+            <a:ext cx="5486400" cy="548640"/>
+          </a:xfrm>
+          <a:prstGeom prst="rect">
+            <a:avLst/>
+          </a:prstGeom>
+          <a:noFill/>
+        </p:spPr>
+        <p:txBody>
+          <a:bodyPr wrap="square">
+            <a:spAutoFit/>
+          </a:bodyPr>
+          <a:lstStyle/>
+          <a:p>
+            <a:pPr algn="l"/>
+            <a:r>
+              <a:rPr sz="1600" b="0">
+                <a:solidFill>
+                  <a:srgbClr val="8696A0"/>
+                </a:solidFill>
+                <a:latin typeface="Calibri"/>
+              </a:rPr>
+              <a:t>Generic AI needs a smartphone.</a:t>
+            </a:r>
+          </a:p>
+        </p:txBody>
+      </p:sp>
+      <p:sp>
+        <p:nvSpPr>
+          <p:cNvPr id="12" name="TextBox 11"/>
+          <p:cNvSpPr txBox="1"/>
+          <p:nvPr/>
+        </p:nvSpPr>
+        <p:spPr>
+          <a:xfrm>
+            <a:off x="6126480" y="4617720"/>
+            <a:ext cx="5486400" cy="548640"/>
+          </a:xfrm>
+          <a:prstGeom prst="rect">
+            <a:avLst/>
+          </a:prstGeom>
+          <a:noFill/>
+        </p:spPr>
+        <p:txBody>
+          <a:bodyPr wrap="square">
+            <a:spAutoFit/>
+          </a:bodyPr>
+          <a:lstStyle/>
+          <a:p>
+            <a:pPr algn="l"/>
+            <a:r>
+              <a:rPr sz="1600" b="1">
+                <a:solidFill>
+                  <a:srgbClr val="9CFF8C"/>
+                </a:solidFill>
+                <a:latin typeface="Calibri"/>
+              </a:rPr>
+              <a:t>USSD reaches feature phones. 5-7M SA learners Meta cannot serve.</a:t>
+            </a:r>
+          </a:p>
+        </p:txBody>
+      </p:sp>
+      <p:sp>
+        <p:nvSpPr>
+          <p:cNvPr id="13" name="TextBox 12"/>
+          <p:cNvSpPr txBox="1"/>
+          <p:nvPr/>
+        </p:nvSpPr>
+        <p:spPr>
+          <a:xfrm>
+            <a:off x="548640" y="5303520"/>
+            <a:ext cx="5486400" cy="548640"/>
+          </a:xfrm>
+          <a:prstGeom prst="rect">
+            <a:avLst/>
+          </a:prstGeom>
+          <a:noFill/>
+        </p:spPr>
+        <p:txBody>
+          <a:bodyPr wrap="square">
+            <a:spAutoFit/>
+          </a:bodyPr>
+          <a:lstStyle/>
+          <a:p>
+            <a:pPr algn="l"/>
+            <a:r>
+              <a:rPr sz="1600" b="0">
+                <a:solidFill>
+                  <a:srgbClr val="8696A0"/>
+                </a:solidFill>
+                <a:latin typeface="Calibri"/>
+              </a:rPr>
+              <a:t>Generic AI's data leaves SA.</a:t>
+            </a:r>
+          </a:p>
+        </p:txBody>
+      </p:sp>
+      <p:sp>
+        <p:nvSpPr>
+          <p:cNvPr id="14" name="TextBox 13"/>
+          <p:cNvSpPr txBox="1"/>
+          <p:nvPr/>
+        </p:nvSpPr>
+        <p:spPr>
+          <a:xfrm>
+            <a:off x="6126480" y="5303520"/>
+            <a:ext cx="5486400" cy="548640"/>
+          </a:xfrm>
+          <a:prstGeom prst="rect">
+            <a:avLst/>
+          </a:prstGeom>
+          <a:noFill/>
+        </p:spPr>
+        <p:txBody>
+          <a:bodyPr wrap="square">
+            <a:spAutoFit/>
+          </a:bodyPr>
+          <a:lstStyle/>
+          <a:p>
+            <a:pPr algn="l"/>
+            <a:r>
+              <a:rPr sz="1600" b="1">
+                <a:solidFill>
+                  <a:srgbClr val="9CFF8C"/>
+                </a:solidFill>
+                <a:latin typeface="Calibri"/>
+              </a:rPr>
+              <a:t>We run on Dell AI Factory in country. POPIA-aligned. Sovereign.</a:t>
             </a:r>
           </a:p>
         </p:txBody>

--- a/pitch/AI_Tutor_Pitch.pptx
+++ b/pitch/AI_Tutor_Pitch.pptx
@@ -19,6 +19,7 @@
     <p:sldId id="267" r:id="rId19"/>
     <p:sldId id="268" r:id="rId20"/>
     <p:sldId id="269" r:id="rId21"/>
+    <p:sldId id="270" r:id="rId22"/>
   </p:sldIdLst>
   <p:sldSz cx="12188952" cy="6858000" type="screen4x3"/>
   <p:notesSz cx="6858000" cy="9144000"/>
@@ -585,7 +586,7 @@
           <a:lstStyle/>
           <a:p>
             <a:r>
-              <a:t>Don't oversell. Hattie meta-analysis is real; tutoring uplifts; we are a force multiplier for motivated learners with access to a teacher. We will measure and publish quarterly impact. Honesty here is what separates a serious public-good service from another tech bet.</a:t>
+              <a:t>Five moats. The strongest two: USSD reach (literal, measurable) and CAPS-aligned + sovereign hosting (institutional procurement). Meta cannot replicate USSD without rebuilding their stack. They cannot replicate CAPS without years of SA pedagogical relationships.</a:t>
             </a:r>
           </a:p>
         </p:txBody>
@@ -655,7 +656,7 @@
           <a:lstStyle/>
           <a:p>
             <a:r>
-              <a:t>Concrete personas. Thandi is the WhatsApp learner — has a smartphone, limited data, needs zero-rating. Lethabo is the USSD learner — feature phone, no other path to AI tutoring exists. Both are real archetypes covering the under-resourced 75% of SA learners.</a:t>
+              <a:t>Don't oversell. Hattie meta-analysis is real; tutoring uplifts; we are a force multiplier for motivated learners with access to a teacher. We will measure and publish quarterly impact. Honesty here is what separates a serious public-good service from another tech bet.</a:t>
             </a:r>
           </a:p>
         </p:txBody>
@@ -725,7 +726,7 @@
           <a:lstStyle/>
           <a:p>
             <a:r>
-              <a:t>Three pillars, concrete commitments under each. The closing line is the most important: judges expect a freemium model. Saying out loud that we refuse it is what makes a sponsor know this is real.</a:t>
+              <a:t>Concrete personas. Thandi is the WhatsApp learner — has a smartphone, limited data, needs zero-rating. Lethabo is the USSD learner — feature phone, no other path to AI tutoring exists. Both are real archetypes covering the under-resourced 75% of SA learners.</a:t>
             </a:r>
           </a:p>
         </p:txBody>
@@ -795,7 +796,7 @@
           <a:lstStyle/>
           <a:p>
             <a:r>
-              <a:t>Three phases, six months apart. Pilot is the make-or-break: 5 schools, 2 provinces, real LLM, real Vodacom traffic, real teacher review. By Q3 2026 we know if the uplift target lands.</a:t>
+              <a:t>Three pillars, concrete commitments under each. The closing line is the most important: judges expect a freemium model. Saying out loud that we refuse it is what makes a sponsor know this is real.</a:t>
             </a:r>
           </a:p>
         </p:txBody>
@@ -865,6 +866,76 @@
           <a:lstStyle/>
           <a:p>
             <a:r>
+              <a:t>Three phases, six months apart. Pilot is the make-or-break: 5 schools, 2 provinces, real LLM, real Vodacom traffic, real teacher review. By Q3 2026 we know if the uplift target lands.</a:t>
+            </a:r>
+          </a:p>
+        </p:txBody>
+      </p:sp>
+      <p:sp>
+        <p:nvSpPr>
+          <p:cNvPr id="4" name="Slide Number Placeholder 3"/>
+          <p:cNvSpPr>
+            <a:spLocks noGrp="1"/>
+          </p:cNvSpPr>
+          <p:nvPr>
+            <p:ph type="sldNum" idx="5" sz="quarter"/>
+          </p:nvPr>
+        </p:nvSpPr>
+        <p:spPr/>
+      </p:sp>
+    </p:spTree>
+  </p:cSld>
+  <p:clrMapOvr>
+    <a:masterClrMapping/>
+  </p:clrMapOvr>
+</p:notes>
+</file>
+
+<file path=ppt/notesSlides/notesSlide15.xml><?xml version="1.0" encoding="utf-8"?>
+<p:notes xmlns:a="http://schemas.openxmlformats.org/drawingml/2006/main" xmlns:p="http://schemas.openxmlformats.org/presentationml/2006/main" xmlns:r="http://schemas.openxmlformats.org/officeDocument/2006/relationships">
+  <p:cSld>
+    <p:spTree>
+      <p:nvGrpSpPr>
+        <p:cNvPr id="1" name=""/>
+        <p:cNvGrpSpPr/>
+        <p:nvPr/>
+      </p:nvGrpSpPr>
+      <p:grpSpPr>
+        <a:xfrm>
+          <a:off x="0" y="0"/>
+          <a:ext cx="0" cy="0"/>
+          <a:chOff x="0" y="0"/>
+          <a:chExt cx="0" cy="0"/>
+        </a:xfrm>
+      </p:grpSpPr>
+      <p:sp>
+        <p:nvSpPr>
+          <p:cNvPr id="2" name="Slide Image Placeholder 1"/>
+          <p:cNvSpPr>
+            <a:spLocks noGrp="1"/>
+          </p:cNvSpPr>
+          <p:nvPr>
+            <p:ph type="sldImg" idx="2"/>
+          </p:nvPr>
+        </p:nvSpPr>
+        <p:spPr/>
+      </p:sp>
+      <p:sp>
+        <p:nvSpPr>
+          <p:cNvPr id="3" name="Notes Placeholder 2"/>
+          <p:cNvSpPr>
+            <a:spLocks noGrp="1"/>
+          </p:cNvSpPr>
+          <p:nvPr>
+            <p:ph type="body" idx="3" sz="quarter"/>
+          </p:nvPr>
+        </p:nvSpPr>
+        <p:spPr/>
+        <p:txBody>
+          <a:bodyPr/>
+          <a:lstStyle/>
+          <a:p>
+            <a:r>
               <a:t>Four asks, each tied to a partner. Be specific about what each partner gives us — vague asks get vague yeses. Close with the repo URL so judges can run the code themselves.</a:t>
             </a:r>
           </a:p>
@@ -1285,7 +1356,7 @@
           <a:lstStyle/>
           <a:p>
             <a:r>
-              <a:t>Meta Llama is the family; Groq is our pilot host; Dell AI Factory NIM is our production host. Same API contract on both sides — swap via one env var.</a:t>
+              <a:t>GPT-OSS 120B is OpenAI's open-weight family — same architectural bet as the Llama choice: open-weight, Apache 2.0, self-hostable on Dell. Groq is our pilot host (free tier). Dell AI Factory NIM is our production host. Same API contract on both sides — swap via one env var. The RAW model isn't CAPS-aligned by itself — the next slide shows how we wrap it.</a:t>
             </a:r>
           </a:p>
         </p:txBody>
@@ -1355,7 +1426,7 @@
           <a:lstStyle/>
           <a:p>
             <a:r>
-              <a:t>This is the request path in production. Green = deterministic guarantees, orange = channel-specific, panel-grey = generic infrastructure. The 5-pill router row is the KEY design decision: not everything hits the LLM.</a:t>
+              <a:t>This is the slide judges remember. Four layers, additive not exclusive. Layer 1 (green, foundation) is LIVE today — every LLM call is prefixed with ~4.4 KB of CAPS conventions. Layer 2 is 3-5 hours of work. Layer 3 (RAG over DBE CAPS PDF) is what Dell sponsorship unlocks. Layer 4 (LoRA fine-tune on Dell hardware) is the long-term moat. The right column shows the concrete before/after so non-technical judges can see the difference — a raw LLM gives an American-decimal answer; the CAPS-wrapped version has NSC mark codes, exact form (x = -½ not -0.5), and cites the CAPS topic. That's un-replicable by a Groq or ChatGPT wrapper.</a:t>
             </a:r>
           </a:p>
         </p:txBody>
@@ -1425,7 +1496,7 @@
           <a:lstStyle/>
           <a:p>
             <a:r>
-              <a:t>Five moats. The strongest two: USSD reach (literal, measurable) and CAPS-aligned + sovereign hosting (institutional procurement). Meta cannot replicate USSD without rebuilding their stack. They cannot replicate CAPS without years of SA pedagogical relationships.</a:t>
+              <a:t>This is the request path in production. Green = deterministic guarantees, orange = channel-specific, panel-grey = generic infrastructure. The 5-pill router row is the KEY design decision: not everything hits the LLM.</a:t>
             </a:r>
           </a:p>
         </p:txBody>
@@ -5258,11 +5329,11 @@
             <a:r>
               <a:rPr sz="1400" b="1">
                 <a:solidFill>
-                  <a:srgbClr val="FFB347"/>
-                </a:solidFill>
-                <a:latin typeface="Calibri"/>
-              </a:rPr>
-              <a:t>Will it work?</a:t>
+                  <a:srgbClr val="00A884"/>
+                </a:solidFill>
+                <a:latin typeface="Calibri"/>
+              </a:rPr>
+              <a:t>Why this is different</a:t>
             </a:r>
           </a:p>
         </p:txBody>
@@ -5297,7 +5368,7 @@
                 </a:solidFill>
                 <a:latin typeface="Calibri"/>
               </a:rPr>
-              <a:t>Yes — as a complement, not a replacement.</a:t>
+              <a:t>Not a chatbot. A specialised SA tutor.</a:t>
             </a:r>
           </a:p>
         </p:txBody>
@@ -5317,7 +5388,7 @@
             <a:avLst/>
           </a:prstGeom>
           <a:solidFill>
-            <a:srgbClr val="FFB347"/>
+            <a:srgbClr val="00A884"/>
           </a:solidFill>
           <a:ln>
             <a:noFill/>
@@ -5353,8 +5424,8 @@
         </p:nvSpPr>
         <p:spPr>
           <a:xfrm>
-            <a:off x="548640" y="2468880"/>
-            <a:ext cx="11064240" cy="457200"/>
+            <a:off x="548640" y="2560320"/>
+            <a:ext cx="5486400" cy="548640"/>
           </a:xfrm>
           <a:prstGeom prst="rect">
             <a:avLst/>
@@ -5369,13 +5440,13 @@
           <a:p>
             <a:pPr algn="l"/>
             <a:r>
-              <a:rPr sz="1600" b="1">
-                <a:solidFill>
-                  <a:srgbClr val="00A884"/>
-                </a:solidFill>
-                <a:latin typeface="Calibri"/>
-              </a:rPr>
-              <a:t>Why we expect uplift</a:t>
+              <a:rPr sz="1600" b="0">
+                <a:solidFill>
+                  <a:srgbClr val="8696A0"/>
+                </a:solidFill>
+                <a:latin typeface="Calibri"/>
+              </a:rPr>
+              <a:t>Generic AI gives the answer.</a:t>
             </a:r>
           </a:p>
         </p:txBody>
@@ -5388,8 +5459,8 @@
         </p:nvSpPr>
         <p:spPr>
           <a:xfrm>
-            <a:off x="548640" y="2834640"/>
-            <a:ext cx="11064240" cy="2103120"/>
+            <a:off x="6126480" y="2560320"/>
+            <a:ext cx="5486400" cy="548640"/>
           </a:xfrm>
           <a:prstGeom prst="rect">
             <a:avLst/>
@@ -5402,67 +5473,15 @@
           </a:bodyPr>
           <a:lstStyle/>
           <a:p>
-            <a:pPr algn="l">
-              <a:spcBef>
-                <a:spcPts val="800"/>
-              </a:spcBef>
-            </a:pPr>
-            <a:r>
-              <a:rPr sz="1500">
-                <a:solidFill>
-                  <a:srgbClr val="E9EDEF"/>
-                </a:solidFill>
-                <a:latin typeface="Calibri"/>
-              </a:rPr>
-              <a:t>• Diagnostic feedback has the highest effect size in education research (Hattie, d ≈ 0.7-1.0).</a:t>
-            </a:r>
-          </a:p>
-          <a:p>
-            <a:pPr algn="l">
-              <a:spcBef>
-                <a:spcPts val="800"/>
-              </a:spcBef>
-            </a:pPr>
-            <a:r>
-              <a:rPr sz="1500">
-                <a:solidFill>
-                  <a:srgbClr val="E9EDEF"/>
-                </a:solidFill>
-                <a:latin typeface="Calibri"/>
-              </a:rPr>
-              <a:t>• Past-paper practice is the single best predictor of NSC outcomes — we give every learner the full archive, free.</a:t>
-            </a:r>
-          </a:p>
-          <a:p>
-            <a:pPr algn="l">
-              <a:spcBef>
-                <a:spcPts val="800"/>
-              </a:spcBef>
-            </a:pPr>
-            <a:r>
-              <a:rPr sz="1500">
-                <a:solidFill>
-                  <a:srgbClr val="E9EDEF"/>
-                </a:solidFill>
-                <a:latin typeface="Calibri"/>
-              </a:rPr>
-              <a:t>• Mother-tongue access reduces cognitive load — we deliver in en/af/zu/xh.</a:t>
-            </a:r>
-          </a:p>
-          <a:p>
-            <a:pPr algn="l">
-              <a:spcBef>
-                <a:spcPts val="800"/>
-              </a:spcBef>
-            </a:pPr>
-            <a:r>
-              <a:rPr sz="1500">
-                <a:solidFill>
-                  <a:srgbClr val="E9EDEF"/>
-                </a:solidFill>
-                <a:latin typeface="Calibri"/>
-              </a:rPr>
-              <a:t>• Mark-scheme awareness teaches learners to write for the marker, not just to compute.</a:t>
+            <a:pPr algn="l"/>
+            <a:r>
+              <a:rPr sz="1600" b="1">
+                <a:solidFill>
+                  <a:srgbClr val="9CFF8C"/>
+                </a:solidFill>
+                <a:latin typeface="Calibri"/>
+              </a:rPr>
+              <a:t>We refuse to — pedagogy enforced in code, not in a prompt.</a:t>
             </a:r>
           </a:p>
         </p:txBody>
@@ -5475,8 +5494,8 @@
         </p:nvSpPr>
         <p:spPr>
           <a:xfrm>
-            <a:off x="548640" y="5029200"/>
-            <a:ext cx="11064240" cy="457200"/>
+            <a:off x="548640" y="3246120"/>
+            <a:ext cx="5486400" cy="548640"/>
           </a:xfrm>
           <a:prstGeom prst="rect">
             <a:avLst/>
@@ -5491,13 +5510,13 @@
           <a:p>
             <a:pPr algn="l"/>
             <a:r>
-              <a:rPr sz="1800" b="1">
-                <a:solidFill>
-                  <a:srgbClr val="FFE9B8"/>
-                </a:solidFill>
-                <a:latin typeface="Calibri"/>
-              </a:rPr>
-              <a:t>Honest target: +5-15 percentage points on Maths NSC outcomes</a:t>
+              <a:rPr sz="1600" b="0">
+                <a:solidFill>
+                  <a:srgbClr val="8696A0"/>
+                </a:solidFill>
+                <a:latin typeface="Calibri"/>
+              </a:rPr>
+              <a:t>Generic AI marks right or wrong.</a:t>
             </a:r>
           </a:p>
         </p:txBody>
@@ -5510,8 +5529,8 @@
         </p:nvSpPr>
         <p:spPr>
           <a:xfrm>
-            <a:off x="548640" y="5486400"/>
-            <a:ext cx="11064240" cy="731520"/>
+            <a:off x="6126480" y="3246120"/>
+            <a:ext cx="5486400" cy="548640"/>
           </a:xfrm>
           <a:prstGeom prst="rect">
             <a:avLst/>
@@ -5526,13 +5545,223 @@
           <a:p>
             <a:pPr algn="l"/>
             <a:r>
-              <a:rPr sz="1300" b="0">
+              <a:rPr sz="1600" b="1">
+                <a:solidFill>
+                  <a:srgbClr val="9CFF8C"/>
+                </a:solidFill>
+                <a:latin typeface="Calibri"/>
+              </a:rPr>
+              <a:t>We diagnose the exact step where thinking broke + the misconception.</a:t>
+            </a:r>
+          </a:p>
+        </p:txBody>
+      </p:sp>
+      <p:sp>
+        <p:nvSpPr>
+          <p:cNvPr id="9" name="TextBox 8"/>
+          <p:cNvSpPr txBox="1"/>
+          <p:nvPr/>
+        </p:nvSpPr>
+        <p:spPr>
+          <a:xfrm>
+            <a:off x="548640" y="3931920"/>
+            <a:ext cx="5486400" cy="548640"/>
+          </a:xfrm>
+          <a:prstGeom prst="rect">
+            <a:avLst/>
+          </a:prstGeom>
+          <a:noFill/>
+        </p:spPr>
+        <p:txBody>
+          <a:bodyPr wrap="square">
+            <a:spAutoFit/>
+          </a:bodyPr>
+          <a:lstStyle/>
+          <a:p>
+            <a:pPr algn="l"/>
+            <a:r>
+              <a:rPr sz="1600" b="0">
                 <a:solidFill>
                   <a:srgbClr val="8696A0"/>
                 </a:solidFill>
                 <a:latin typeface="Calibri"/>
               </a:rPr>
-              <a:t>What we will NOT claim: that we replace teachers, fix poverty, or substitute for actual practice. We measure outcomes, publish quarterly, and refuse to overclaim.</a:t>
+              <a:t>Generic AI knows everything.</a:t>
+            </a:r>
+          </a:p>
+        </p:txBody>
+      </p:sp>
+      <p:sp>
+        <p:nvSpPr>
+          <p:cNvPr id="10" name="TextBox 9"/>
+          <p:cNvSpPr txBox="1"/>
+          <p:nvPr/>
+        </p:nvSpPr>
+        <p:spPr>
+          <a:xfrm>
+            <a:off x="6126480" y="3931920"/>
+            <a:ext cx="5486400" cy="548640"/>
+          </a:xfrm>
+          <a:prstGeom prst="rect">
+            <a:avLst/>
+          </a:prstGeom>
+          <a:noFill/>
+        </p:spPr>
+        <p:txBody>
+          <a:bodyPr wrap="square">
+            <a:spAutoFit/>
+          </a:bodyPr>
+          <a:lstStyle/>
+          <a:p>
+            <a:pPr algn="l"/>
+            <a:r>
+              <a:rPr sz="1600" b="1">
+                <a:solidFill>
+                  <a:srgbClr val="9CFF8C"/>
+                </a:solidFill>
+                <a:latin typeface="Calibri"/>
+              </a:rPr>
+              <a:t>We are bounded to CAPS — auditable by DBE, editable by educators.</a:t>
+            </a:r>
+          </a:p>
+        </p:txBody>
+      </p:sp>
+      <p:sp>
+        <p:nvSpPr>
+          <p:cNvPr id="11" name="TextBox 10"/>
+          <p:cNvSpPr txBox="1"/>
+          <p:nvPr/>
+        </p:nvSpPr>
+        <p:spPr>
+          <a:xfrm>
+            <a:off x="548640" y="4617720"/>
+            <a:ext cx="5486400" cy="548640"/>
+          </a:xfrm>
+          <a:prstGeom prst="rect">
+            <a:avLst/>
+          </a:prstGeom>
+          <a:noFill/>
+        </p:spPr>
+        <p:txBody>
+          <a:bodyPr wrap="square">
+            <a:spAutoFit/>
+          </a:bodyPr>
+          <a:lstStyle/>
+          <a:p>
+            <a:pPr algn="l"/>
+            <a:r>
+              <a:rPr sz="1600" b="0">
+                <a:solidFill>
+                  <a:srgbClr val="8696A0"/>
+                </a:solidFill>
+                <a:latin typeface="Calibri"/>
+              </a:rPr>
+              <a:t>Generic AI needs a smartphone.</a:t>
+            </a:r>
+          </a:p>
+        </p:txBody>
+      </p:sp>
+      <p:sp>
+        <p:nvSpPr>
+          <p:cNvPr id="12" name="TextBox 11"/>
+          <p:cNvSpPr txBox="1"/>
+          <p:nvPr/>
+        </p:nvSpPr>
+        <p:spPr>
+          <a:xfrm>
+            <a:off x="6126480" y="4617720"/>
+            <a:ext cx="5486400" cy="548640"/>
+          </a:xfrm>
+          <a:prstGeom prst="rect">
+            <a:avLst/>
+          </a:prstGeom>
+          <a:noFill/>
+        </p:spPr>
+        <p:txBody>
+          <a:bodyPr wrap="square">
+            <a:spAutoFit/>
+          </a:bodyPr>
+          <a:lstStyle/>
+          <a:p>
+            <a:pPr algn="l"/>
+            <a:r>
+              <a:rPr sz="1600" b="1">
+                <a:solidFill>
+                  <a:srgbClr val="9CFF8C"/>
+                </a:solidFill>
+                <a:latin typeface="Calibri"/>
+              </a:rPr>
+              <a:t>USSD reaches feature phones. 5-7M SA learners Meta cannot serve.</a:t>
+            </a:r>
+          </a:p>
+        </p:txBody>
+      </p:sp>
+      <p:sp>
+        <p:nvSpPr>
+          <p:cNvPr id="13" name="TextBox 12"/>
+          <p:cNvSpPr txBox="1"/>
+          <p:nvPr/>
+        </p:nvSpPr>
+        <p:spPr>
+          <a:xfrm>
+            <a:off x="548640" y="5303520"/>
+            <a:ext cx="5486400" cy="548640"/>
+          </a:xfrm>
+          <a:prstGeom prst="rect">
+            <a:avLst/>
+          </a:prstGeom>
+          <a:noFill/>
+        </p:spPr>
+        <p:txBody>
+          <a:bodyPr wrap="square">
+            <a:spAutoFit/>
+          </a:bodyPr>
+          <a:lstStyle/>
+          <a:p>
+            <a:pPr algn="l"/>
+            <a:r>
+              <a:rPr sz="1600" b="0">
+                <a:solidFill>
+                  <a:srgbClr val="8696A0"/>
+                </a:solidFill>
+                <a:latin typeface="Calibri"/>
+              </a:rPr>
+              <a:t>Generic AI's data leaves SA.</a:t>
+            </a:r>
+          </a:p>
+        </p:txBody>
+      </p:sp>
+      <p:sp>
+        <p:nvSpPr>
+          <p:cNvPr id="14" name="TextBox 13"/>
+          <p:cNvSpPr txBox="1"/>
+          <p:nvPr/>
+        </p:nvSpPr>
+        <p:spPr>
+          <a:xfrm>
+            <a:off x="6126480" y="5303520"/>
+            <a:ext cx="5486400" cy="548640"/>
+          </a:xfrm>
+          <a:prstGeom prst="rect">
+            <a:avLst/>
+          </a:prstGeom>
+          <a:noFill/>
+        </p:spPr>
+        <p:txBody>
+          <a:bodyPr wrap="square">
+            <a:spAutoFit/>
+          </a:bodyPr>
+          <a:lstStyle/>
+          <a:p>
+            <a:pPr algn="l"/>
+            <a:r>
+              <a:rPr sz="1600" b="1">
+                <a:solidFill>
+                  <a:srgbClr val="9CFF8C"/>
+                </a:solidFill>
+                <a:latin typeface="Calibri"/>
+              </a:rPr>
+              <a:t>We run on Dell AI Factory in country. POPIA-aligned. Sovereign.</a:t>
             </a:r>
           </a:p>
         </p:txBody>
@@ -5589,11 +5818,11 @@
             <a:r>
               <a:rPr sz="1400" b="1">
                 <a:solidFill>
-                  <a:srgbClr val="00A884"/>
-                </a:solidFill>
-                <a:latin typeface="Calibri"/>
-              </a:rPr>
-              <a:t>Who is this for?</a:t>
+                  <a:srgbClr val="FFB347"/>
+                </a:solidFill>
+                <a:latin typeface="Calibri"/>
+              </a:rPr>
+              <a:t>Will it work?</a:t>
             </a:r>
           </a:p>
         </p:txBody>
@@ -5628,7 +5857,7 @@
                 </a:solidFill>
                 <a:latin typeface="Calibri"/>
               </a:rPr>
-              <a:t>Phase 1: Quintile 1–3 NSC learners.</a:t>
+              <a:t>Yes — as a complement, not a replacement.</a:t>
             </a:r>
           </a:p>
         </p:txBody>
@@ -5645,203 +5874,6 @@
             <a:ext cx="3657600" cy="50800"/>
           </a:xfrm>
           <a:prstGeom prst="rect">
-            <a:avLst/>
-          </a:prstGeom>
-          <a:solidFill>
-            <a:srgbClr val="00A884"/>
-          </a:solidFill>
-          <a:ln>
-            <a:noFill/>
-          </a:ln>
-        </p:spPr>
-        <p:style>
-          <a:lnRef idx="1">
-            <a:schemeClr val="accent1"/>
-          </a:lnRef>
-          <a:fillRef idx="3">
-            <a:schemeClr val="accent1"/>
-          </a:fillRef>
-          <a:effectRef idx="2">
-            <a:schemeClr val="accent1"/>
-          </a:effectRef>
-          <a:fontRef idx="minor">
-            <a:schemeClr val="lt1"/>
-          </a:fontRef>
-        </p:style>
-        <p:txBody>
-          <a:bodyPr rtlCol="0" anchor="ctr"/>
-          <a:lstStyle/>
-          <a:p>
-            <a:pPr algn="ctr"/>
-          </a:p>
-        </p:txBody>
-      </p:sp>
-      <p:sp>
-        <p:nvSpPr>
-          <p:cNvPr id="5" name="Rounded Rectangle 4"/>
-          <p:cNvSpPr/>
-          <p:nvPr/>
-        </p:nvSpPr>
-        <p:spPr>
-          <a:xfrm>
-            <a:off x="548640" y="2468880"/>
-            <a:ext cx="3931920" cy="457200"/>
-          </a:xfrm>
-          <a:prstGeom prst="roundRect">
-            <a:avLst/>
-          </a:prstGeom>
-          <a:solidFill>
-            <a:srgbClr val="00A884"/>
-          </a:solidFill>
-          <a:ln>
-            <a:noFill/>
-          </a:ln>
-        </p:spPr>
-        <p:style>
-          <a:lnRef idx="1">
-            <a:schemeClr val="accent1"/>
-          </a:lnRef>
-          <a:fillRef idx="3">
-            <a:schemeClr val="accent1"/>
-          </a:fillRef>
-          <a:effectRef idx="2">
-            <a:schemeClr val="accent1"/>
-          </a:effectRef>
-          <a:fontRef idx="minor">
-            <a:schemeClr val="lt1"/>
-          </a:fontRef>
-        </p:style>
-        <p:txBody>
-          <a:bodyPr rtlCol="0" anchor="ctr" lIns="137160" rIns="137160"/>
-          <a:lstStyle/>
-          <a:p>
-            <a:pPr algn="ctr"/>
-            <a:r>
-              <a:rPr sz="1200" b="1">
-                <a:solidFill>
-                  <a:srgbClr val="03110D"/>
-                </a:solidFill>
-              </a:rPr>
-              <a:t>Persona · Thandi (WhatsApp)</a:t>
-            </a:r>
-          </a:p>
-        </p:txBody>
-      </p:sp>
-      <p:sp>
-        <p:nvSpPr>
-          <p:cNvPr id="6" name="TextBox 5"/>
-          <p:cNvSpPr txBox="1"/>
-          <p:nvPr/>
-        </p:nvSpPr>
-        <p:spPr>
-          <a:xfrm>
-            <a:off x="548640" y="3017520"/>
-            <a:ext cx="5303520" cy="3200400"/>
-          </a:xfrm>
-          <a:prstGeom prst="rect">
-            <a:avLst/>
-          </a:prstGeom>
-          <a:noFill/>
-        </p:spPr>
-        <p:txBody>
-          <a:bodyPr wrap="square">
-            <a:spAutoFit/>
-          </a:bodyPr>
-          <a:lstStyle/>
-          <a:p>
-            <a:pPr algn="l">
-              <a:spcBef>
-                <a:spcPts val="800"/>
-              </a:spcBef>
-            </a:pPr>
-            <a:r>
-              <a:rPr sz="1400">
-                <a:solidFill>
-                  <a:srgbClr val="E9EDEF"/>
-                </a:solidFill>
-                <a:latin typeface="Calibri"/>
-              </a:rPr>
-              <a:t>• Grade 11 · Soweto · isiZulu first-language</a:t>
-            </a:r>
-          </a:p>
-          <a:p>
-            <a:pPr algn="l">
-              <a:spcBef>
-                <a:spcPts val="800"/>
-              </a:spcBef>
-            </a:pPr>
-            <a:r>
-              <a:rPr sz="1400">
-                <a:solidFill>
-                  <a:srgbClr val="E9EDEF"/>
-                </a:solidFill>
-                <a:latin typeface="Calibri"/>
-              </a:rPr>
-              <a:t>• Mother is a domestic worker. Father unemployed.</a:t>
-            </a:r>
-          </a:p>
-          <a:p>
-            <a:pPr algn="l">
-              <a:spcBef>
-                <a:spcPts val="800"/>
-              </a:spcBef>
-            </a:pPr>
-            <a:r>
-              <a:rPr sz="1400">
-                <a:solidFill>
-                  <a:srgbClr val="E9EDEF"/>
-                </a:solidFill>
-                <a:latin typeface="Calibri"/>
-              </a:rPr>
-              <a:t>• Basic Android + Vodacom social bundle.</a:t>
-            </a:r>
-          </a:p>
-          <a:p>
-            <a:pPr algn="l">
-              <a:spcBef>
-                <a:spcPts val="800"/>
-              </a:spcBef>
-            </a:pPr>
-            <a:r>
-              <a:rPr sz="1400">
-                <a:solidFill>
-                  <a:srgbClr val="E9EDEF"/>
-                </a:solidFill>
-                <a:latin typeface="Calibri"/>
-              </a:rPr>
-              <a:t>• Currently averaging 50%. Wants a bachelor pass.</a:t>
-            </a:r>
-          </a:p>
-          <a:p>
-            <a:pPr algn="l">
-              <a:spcBef>
-                <a:spcPts val="800"/>
-              </a:spcBef>
-            </a:pPr>
-            <a:r>
-              <a:rPr sz="1400">
-                <a:solidFill>
-                  <a:srgbClr val="E9EDEF"/>
-                </a:solidFill>
-                <a:latin typeface="Calibri"/>
-              </a:rPr>
-              <a:t>• Uses our tutor on WhatsApp at night, mostly text.</a:t>
-            </a:r>
-          </a:p>
-        </p:txBody>
-      </p:sp>
-      <p:sp>
-        <p:nvSpPr>
-          <p:cNvPr id="7" name="Rounded Rectangle 6"/>
-          <p:cNvSpPr/>
-          <p:nvPr/>
-        </p:nvSpPr>
-        <p:spPr>
-          <a:xfrm>
-            <a:off x="6400800" y="2468880"/>
-            <a:ext cx="3931920" cy="457200"/>
-          </a:xfrm>
-          <a:prstGeom prst="roundRect">
             <a:avLst/>
           </a:prstGeom>
           <a:solidFill>
@@ -5866,31 +5898,58 @@
           </a:fontRef>
         </p:style>
         <p:txBody>
-          <a:bodyPr rtlCol="0" anchor="ctr" lIns="137160" rIns="137160"/>
+          <a:bodyPr rtlCol="0" anchor="ctr"/>
           <a:lstStyle/>
           <a:p>
             <a:pPr algn="ctr"/>
-            <a:r>
-              <a:rPr sz="1200" b="1">
-                <a:solidFill>
-                  <a:srgbClr val="03110D"/>
-                </a:solidFill>
-              </a:rPr>
-              <a:t>Persona · Lethabo (USSD)</a:t>
-            </a:r>
-          </a:p>
-        </p:txBody>
-      </p:sp>
-      <p:sp>
-        <p:nvSpPr>
-          <p:cNvPr id="8" name="TextBox 7"/>
+          </a:p>
+        </p:txBody>
+      </p:sp>
+      <p:sp>
+        <p:nvSpPr>
+          <p:cNvPr id="5" name="TextBox 4"/>
           <p:cNvSpPr txBox="1"/>
           <p:nvPr/>
         </p:nvSpPr>
         <p:spPr>
           <a:xfrm>
-            <a:off x="6400800" y="3017520"/>
-            <a:ext cx="5303520" cy="3200400"/>
+            <a:off x="548640" y="2468880"/>
+            <a:ext cx="11064240" cy="457200"/>
+          </a:xfrm>
+          <a:prstGeom prst="rect">
+            <a:avLst/>
+          </a:prstGeom>
+          <a:noFill/>
+        </p:spPr>
+        <p:txBody>
+          <a:bodyPr wrap="square">
+            <a:spAutoFit/>
+          </a:bodyPr>
+          <a:lstStyle/>
+          <a:p>
+            <a:pPr algn="l"/>
+            <a:r>
+              <a:rPr sz="1600" b="1">
+                <a:solidFill>
+                  <a:srgbClr val="00A884"/>
+                </a:solidFill>
+                <a:latin typeface="Calibri"/>
+              </a:rPr>
+              <a:t>Why we expect uplift</a:t>
+            </a:r>
+          </a:p>
+        </p:txBody>
+      </p:sp>
+      <p:sp>
+        <p:nvSpPr>
+          <p:cNvPr id="6" name="TextBox 5"/>
+          <p:cNvSpPr txBox="1"/>
+          <p:nvPr/>
+        </p:nvSpPr>
+        <p:spPr>
+          <a:xfrm>
+            <a:off x="548640" y="2834640"/>
+            <a:ext cx="11064240" cy="2103120"/>
           </a:xfrm>
           <a:prstGeom prst="rect">
             <a:avLst/>
@@ -5909,13 +5968,13 @@
               </a:spcBef>
             </a:pPr>
             <a:r>
-              <a:rPr sz="1400">
+              <a:rPr sz="1500">
                 <a:solidFill>
                   <a:srgbClr val="E9EDEF"/>
                 </a:solidFill>
                 <a:latin typeface="Calibri"/>
               </a:rPr>
-              <a:t>• Grade 12 · rural Limpopo · Sepedi first-language</a:t>
+              <a:t>• Diagnostic feedback has the highest effect size in education research (Hattie, d ≈ 0.7-1.0).</a:t>
             </a:r>
           </a:p>
           <a:p>
@@ -5925,13 +5984,13 @@
               </a:spcBef>
             </a:pPr>
             <a:r>
-              <a:rPr sz="1400">
+              <a:rPr sz="1500">
                 <a:solidFill>
                   <a:srgbClr val="E9EDEF"/>
                 </a:solidFill>
                 <a:latin typeface="Calibri"/>
               </a:rPr>
-              <a:t>• Lives with grandmother. No parents.</a:t>
+              <a:t>• Past-paper practice is the single best predictor of NSC outcomes — we give every learner the full archive, free.</a:t>
             </a:r>
           </a:p>
           <a:p>
@@ -5941,13 +6000,13 @@
               </a:spcBef>
             </a:pPr>
             <a:r>
-              <a:rPr sz="1400">
+              <a:rPr sz="1500">
                 <a:solidFill>
                   <a:srgbClr val="E9EDEF"/>
                 </a:solidFill>
                 <a:latin typeface="Calibri"/>
               </a:rPr>
-              <a:t>• Nokia feature phone — no smartphone.</a:t>
+              <a:t>• Mother-tongue access reduces cognitive load — we deliver in en/af/zu/xh.</a:t>
             </a:r>
           </a:p>
           <a:p>
@@ -5957,42 +6016,26 @@
               </a:spcBef>
             </a:pPr>
             <a:r>
-              <a:rPr sz="1400">
+              <a:rPr sz="1500">
                 <a:solidFill>
                   <a:srgbClr val="E9EDEF"/>
                 </a:solidFill>
                 <a:latin typeface="Calibri"/>
               </a:rPr>
-              <a:t>• 65% mid-year. Wants 70%+ for accounting at UJ.</a:t>
-            </a:r>
-          </a:p>
-          <a:p>
-            <a:pPr algn="l">
-              <a:spcBef>
-                <a:spcPts val="800"/>
-              </a:spcBef>
-            </a:pPr>
-            <a:r>
-              <a:rPr sz="1400">
-                <a:solidFill>
-                  <a:srgbClr val="E9EDEF"/>
-                </a:solidFill>
-                <a:latin typeface="Calibri"/>
-              </a:rPr>
-              <a:t>• Uses our tutor on USSD at school in free periods.</a:t>
-            </a:r>
-          </a:p>
-        </p:txBody>
-      </p:sp>
-      <p:sp>
-        <p:nvSpPr>
-          <p:cNvPr id="9" name="TextBox 8"/>
+              <a:t>• Mark-scheme awareness teaches learners to write for the marker, not just to compute.</a:t>
+            </a:r>
+          </a:p>
+        </p:txBody>
+      </p:sp>
+      <p:sp>
+        <p:nvSpPr>
+          <p:cNvPr id="7" name="TextBox 6"/>
           <p:cNvSpPr txBox="1"/>
           <p:nvPr/>
         </p:nvSpPr>
         <p:spPr>
           <a:xfrm>
-            <a:off x="548640" y="5943600"/>
+            <a:off x="548640" y="5029200"/>
             <a:ext cx="11064240" cy="457200"/>
           </a:xfrm>
           <a:prstGeom prst="rect">
@@ -6006,7 +6049,42 @@
           </a:bodyPr>
           <a:lstStyle/>
           <a:p>
-            <a:pPr algn="ctr"/>
+            <a:pPr algn="l"/>
+            <a:r>
+              <a:rPr sz="1800" b="1">
+                <a:solidFill>
+                  <a:srgbClr val="FFE9B8"/>
+                </a:solidFill>
+                <a:latin typeface="Calibri"/>
+              </a:rPr>
+              <a:t>Honest target: +5-15 percentage points on Maths NSC outcomes</a:t>
+            </a:r>
+          </a:p>
+        </p:txBody>
+      </p:sp>
+      <p:sp>
+        <p:nvSpPr>
+          <p:cNvPr id="8" name="TextBox 7"/>
+          <p:cNvSpPr txBox="1"/>
+          <p:nvPr/>
+        </p:nvSpPr>
+        <p:spPr>
+          <a:xfrm>
+            <a:off x="548640" y="5486400"/>
+            <a:ext cx="11064240" cy="731520"/>
+          </a:xfrm>
+          <a:prstGeom prst="rect">
+            <a:avLst/>
+          </a:prstGeom>
+          <a:noFill/>
+        </p:spPr>
+        <p:txBody>
+          <a:bodyPr wrap="square">
+            <a:spAutoFit/>
+          </a:bodyPr>
+          <a:lstStyle/>
+          <a:p>
+            <a:pPr algn="l"/>
             <a:r>
               <a:rPr sz="1300" b="0">
                 <a:solidFill>
@@ -6014,7 +6092,7 @@
                 </a:solidFill>
                 <a:latin typeface="Calibri"/>
               </a:rPr>
-              <a:t>Phase 2: Grades 8–10 + Maths Literacy. Phase 3: Sciences, Accounting, 11 official spoken languages + SA Sign Language (video channel).</a:t>
+              <a:t>What we will NOT claim: that we replace teachers, fix poverty, or substitute for actual practice. We measure outcomes, publish quarterly, and refuse to overclaim.</a:t>
             </a:r>
           </a:p>
         </p:txBody>
@@ -6075,7 +6153,7 @@
                 </a:solidFill>
                 <a:latin typeface="Calibri"/>
               </a:rPr>
-              <a:t>Equality · Safety · Trust</a:t>
+              <a:t>Who is this for?</a:t>
             </a:r>
           </a:p>
         </p:txBody>
@@ -6110,7 +6188,7 @@
                 </a:solidFill>
                 <a:latin typeface="Calibri"/>
               </a:rPr>
-              <a:t>Built right, not built fast.</a:t>
+              <a:t>Phase 1: Quintile 1–3 NSC learners.</a:t>
             </a:r>
           </a:p>
         </p:txBody>
@@ -6167,7 +6245,7 @@
         <p:spPr>
           <a:xfrm>
             <a:off x="548640" y="2468880"/>
-            <a:ext cx="1463040" cy="411480"/>
+            <a:ext cx="3931920" cy="457200"/>
           </a:xfrm>
           <a:prstGeom prst="roundRect">
             <a:avLst/>
@@ -6199,12 +6277,12 @@
           <a:p>
             <a:pPr algn="ctr"/>
             <a:r>
-              <a:rPr sz="1400" b="1">
+              <a:rPr sz="1200" b="1">
                 <a:solidFill>
                   <a:srgbClr val="03110D"/>
                 </a:solidFill>
               </a:rPr>
-              <a:t>Equality</a:t>
+              <a:t>Persona · Thandi (WhatsApp)</a:t>
             </a:r>
           </a:p>
         </p:txBody>
@@ -6218,7 +6296,7 @@
         <p:spPr>
           <a:xfrm>
             <a:off x="548640" y="3017520"/>
-            <a:ext cx="3657600" cy="3383280"/>
+            <a:ext cx="5303520" cy="3200400"/>
           </a:xfrm>
           <a:prstGeom prst="rect">
             <a:avLst/>
@@ -6237,13 +6315,13 @@
               </a:spcBef>
             </a:pPr>
             <a:r>
-              <a:rPr sz="1200">
+              <a:rPr sz="1400">
                 <a:solidFill>
                   <a:srgbClr val="E9EDEF"/>
                 </a:solidFill>
                 <a:latin typeface="Calibri"/>
               </a:rPr>
-              <a:t>• Two channels — never device-locked</a:t>
+              <a:t>• Grade 11 · Soweto · isiZulu first-language</a:t>
             </a:r>
           </a:p>
           <a:p>
@@ -6253,13 +6331,13 @@
               </a:spcBef>
             </a:pPr>
             <a:r>
-              <a:rPr sz="1200">
+              <a:rPr sz="1400">
                 <a:solidFill>
                   <a:srgbClr val="E9EDEF"/>
                 </a:solidFill>
                 <a:latin typeface="Calibri"/>
               </a:rPr>
-              <a:t>• Zero at point of use (zero-rated)</a:t>
+              <a:t>• Mother is a domestic worker. Father unemployed.</a:t>
             </a:r>
           </a:p>
           <a:p>
@@ -6269,13 +6347,13 @@
               </a:spcBef>
             </a:pPr>
             <a:r>
-              <a:rPr sz="1200">
+              <a:rPr sz="1400">
                 <a:solidFill>
                   <a:srgbClr val="E9EDEF"/>
                 </a:solidFill>
                 <a:latin typeface="Calibri"/>
               </a:rPr>
-              <a:t>• 4 validated + 7 first-pass + SA Sign Language = 12</a:t>
+              <a:t>• Basic Android + Vodacom social bundle.</a:t>
             </a:r>
           </a:p>
           <a:p>
@@ -6285,13 +6363,13 @@
               </a:spcBef>
             </a:pPr>
             <a:r>
-              <a:rPr sz="1200">
+              <a:rPr sz="1400">
                 <a:solidFill>
                   <a:srgbClr val="E9EDEF"/>
                 </a:solidFill>
                 <a:latin typeface="Calibri"/>
               </a:rPr>
-              <a:t>• Identical brain on both channels</a:t>
+              <a:t>• Currently averaging 50%. Wants a bachelor pass.</a:t>
             </a:r>
           </a:p>
           <a:p>
@@ -6301,13 +6379,13 @@
               </a:spcBef>
             </a:pPr>
             <a:r>
-              <a:rPr sz="1200">
+              <a:rPr sz="1400">
                 <a:solidFill>
                   <a:srgbClr val="E9EDEF"/>
                 </a:solidFill>
                 <a:latin typeface="Calibri"/>
               </a:rPr>
-              <a:t>• No premium tier — design constraint</a:t>
+              <a:t>• Uses our tutor on WhatsApp at night, mostly text.</a:t>
             </a:r>
           </a:p>
         </p:txBody>
@@ -6320,8 +6398,8 @@
         </p:nvSpPr>
         <p:spPr>
           <a:xfrm>
-            <a:off x="4389120" y="2468880"/>
-            <a:ext cx="1463040" cy="411480"/>
+            <a:off x="6400800" y="2468880"/>
+            <a:ext cx="3931920" cy="457200"/>
           </a:xfrm>
           <a:prstGeom prst="roundRect">
             <a:avLst/>
@@ -6353,12 +6431,12 @@
           <a:p>
             <a:pPr algn="ctr"/>
             <a:r>
-              <a:rPr sz="1400" b="1">
+              <a:rPr sz="1200" b="1">
                 <a:solidFill>
                   <a:srgbClr val="03110D"/>
                 </a:solidFill>
               </a:rPr>
-              <a:t>Safety</a:t>
+              <a:t>Persona · Lethabo (USSD)</a:t>
             </a:r>
           </a:p>
         </p:txBody>
@@ -6371,8 +6449,8 @@
         </p:nvSpPr>
         <p:spPr>
           <a:xfrm>
-            <a:off x="4389120" y="3017520"/>
-            <a:ext cx="3657600" cy="3383280"/>
+            <a:off x="6400800" y="3017520"/>
+            <a:ext cx="5303520" cy="3200400"/>
           </a:xfrm>
           <a:prstGeom prst="rect">
             <a:avLst/>
@@ -6391,13 +6469,13 @@
               </a:spcBef>
             </a:pPr>
             <a:r>
-              <a:rPr sz="1200">
+              <a:rPr sz="1400">
                 <a:solidFill>
                   <a:srgbClr val="E9EDEF"/>
                 </a:solidFill>
                 <a:latin typeface="Calibri"/>
               </a:rPr>
-              <a:t>• CAPS-bounded — no off-topic chat</a:t>
+              <a:t>• Grade 12 · rural Limpopo · Sepedi first-language</a:t>
             </a:r>
           </a:p>
           <a:p>
@@ -6407,13 +6485,13 @@
               </a:spcBef>
             </a:pPr>
             <a:r>
-              <a:rPr sz="1200">
+              <a:rPr sz="1400">
                 <a:solidFill>
                   <a:srgbClr val="E9EDEF"/>
                 </a:solidFill>
                 <a:latin typeface="Calibri"/>
               </a:rPr>
-              <a:t>• Verified maths in code, not LLM</a:t>
+              <a:t>• Lives with grandmother. No parents.</a:t>
             </a:r>
           </a:p>
           <a:p>
@@ -6423,13 +6501,13 @@
               </a:spcBef>
             </a:pPr>
             <a:r>
-              <a:rPr sz="1200">
+              <a:rPr sz="1400">
                 <a:solidFill>
                   <a:srgbClr val="E9EDEF"/>
                 </a:solidFill>
                 <a:latin typeface="Calibri"/>
               </a:rPr>
-              <a:t>• POPIA-aligned, SA-hosted</a:t>
+              <a:t>• Nokia feature phone — no smartphone.</a:t>
             </a:r>
           </a:p>
           <a:p>
@@ -6439,13 +6517,13 @@
               </a:spcBef>
             </a:pPr>
             <a:r>
-              <a:rPr sz="1200">
+              <a:rPr sz="1400">
                 <a:solidFill>
                   <a:srgbClr val="E9EDEF"/>
                 </a:solidFill>
                 <a:latin typeface="Calibri"/>
               </a:rPr>
-              <a:t>• No PII beyond phone number</a:t>
+              <a:t>• 65% mid-year. Wants 70%+ for accounting at UJ.</a:t>
             </a:r>
           </a:p>
           <a:p>
@@ -6455,78 +6533,27 @@
               </a:spcBef>
             </a:pPr>
             <a:r>
-              <a:rPr sz="1200">
+              <a:rPr sz="1400">
                 <a:solidFill>
                   <a:srgbClr val="E9EDEF"/>
                 </a:solidFill>
                 <a:latin typeface="Calibri"/>
               </a:rPr>
-              <a:t>• Reporting → real educator escalation</a:t>
-            </a:r>
-          </a:p>
-        </p:txBody>
-      </p:sp>
-      <p:sp>
-        <p:nvSpPr>
-          <p:cNvPr id="9" name="Rounded Rectangle 8"/>
-          <p:cNvSpPr/>
-          <p:nvPr/>
-        </p:nvSpPr>
-        <p:spPr>
-          <a:xfrm>
-            <a:off x="8229600" y="2468880"/>
-            <a:ext cx="1463040" cy="411480"/>
-          </a:xfrm>
-          <a:prstGeom prst="roundRect">
-            <a:avLst/>
-          </a:prstGeom>
-          <a:solidFill>
-            <a:srgbClr val="9CFF8C"/>
-          </a:solidFill>
-          <a:ln>
-            <a:noFill/>
-          </a:ln>
-        </p:spPr>
-        <p:style>
-          <a:lnRef idx="1">
-            <a:schemeClr val="accent1"/>
-          </a:lnRef>
-          <a:fillRef idx="3">
-            <a:schemeClr val="accent1"/>
-          </a:fillRef>
-          <a:effectRef idx="2">
-            <a:schemeClr val="accent1"/>
-          </a:effectRef>
-          <a:fontRef idx="minor">
-            <a:schemeClr val="lt1"/>
-          </a:fontRef>
-        </p:style>
-        <p:txBody>
-          <a:bodyPr rtlCol="0" anchor="ctr" lIns="137160" rIns="137160"/>
-          <a:lstStyle/>
-          <a:p>
-            <a:pPr algn="ctr"/>
-            <a:r>
-              <a:rPr sz="1400" b="1">
-                <a:solidFill>
-                  <a:srgbClr val="03110D"/>
-                </a:solidFill>
-              </a:rPr>
-              <a:t>Trust</a:t>
-            </a:r>
-          </a:p>
-        </p:txBody>
-      </p:sp>
-      <p:sp>
-        <p:nvSpPr>
-          <p:cNvPr id="10" name="TextBox 9"/>
+              <a:t>• Uses our tutor on USSD at school in free periods.</a:t>
+            </a:r>
+          </a:p>
+        </p:txBody>
+      </p:sp>
+      <p:sp>
+        <p:nvSpPr>
+          <p:cNvPr id="9" name="TextBox 8"/>
           <p:cNvSpPr txBox="1"/>
           <p:nvPr/>
         </p:nvSpPr>
         <p:spPr>
           <a:xfrm>
-            <a:off x="8229600" y="3017520"/>
-            <a:ext cx="3657600" cy="3383280"/>
+            <a:off x="548640" y="5943600"/>
+            <a:ext cx="11064240" cy="457200"/>
           </a:xfrm>
           <a:prstGeom prst="rect">
             <a:avLst/>
@@ -6539,118 +6566,15 @@
           </a:bodyPr>
           <a:lstStyle/>
           <a:p>
-            <a:pPr algn="l">
-              <a:spcBef>
-                <a:spcPts val="800"/>
-              </a:spcBef>
-            </a:pPr>
-            <a:r>
-              <a:rPr sz="1200">
-                <a:solidFill>
-                  <a:srgbClr val="E9EDEF"/>
-                </a:solidFill>
-                <a:latin typeface="Calibri"/>
-              </a:rPr>
-              <a:t>• Sources cited on every screen</a:t>
-            </a:r>
-          </a:p>
-          <a:p>
-            <a:pPr algn="l">
-              <a:spcBef>
-                <a:spcPts val="800"/>
-              </a:spcBef>
-            </a:pPr>
-            <a:r>
-              <a:rPr sz="1200">
-                <a:solidFill>
-                  <a:srgbClr val="E9EDEF"/>
-                </a:solidFill>
-                <a:latin typeface="Calibri"/>
-              </a:rPr>
-              <a:t>• CAPS topic + sub-skill labelled</a:t>
-            </a:r>
-          </a:p>
-          <a:p>
-            <a:pPr algn="l">
-              <a:spcBef>
-                <a:spcPts val="800"/>
-              </a:spcBef>
-            </a:pPr>
-            <a:r>
-              <a:rPr sz="1200">
-                <a:solidFill>
-                  <a:srgbClr val="E9EDEF"/>
-                </a:solidFill>
-                <a:latin typeface="Calibri"/>
-              </a:rPr>
-              <a:t>• Educator-editable curriculum file</a:t>
-            </a:r>
-          </a:p>
-          <a:p>
-            <a:pPr algn="l">
-              <a:spcBef>
-                <a:spcPts val="800"/>
-              </a:spcBef>
-            </a:pPr>
-            <a:r>
-              <a:rPr sz="1200">
-                <a:solidFill>
-                  <a:srgbClr val="E9EDEF"/>
-                </a:solidFill>
-                <a:latin typeface="Calibri"/>
-              </a:rPr>
-              <a:t>• Refuses to give final answers</a:t>
-            </a:r>
-          </a:p>
-          <a:p>
-            <a:pPr algn="l">
-              <a:spcBef>
-                <a:spcPts val="800"/>
-              </a:spcBef>
-            </a:pPr>
-            <a:r>
-              <a:rPr sz="1200">
-                <a:solidFill>
-                  <a:srgbClr val="E9EDEF"/>
-                </a:solidFill>
-                <a:latin typeface="Calibri"/>
-              </a:rPr>
-              <a:t>• Quarterly public impact reports</a:t>
-            </a:r>
-          </a:p>
-        </p:txBody>
-      </p:sp>
-      <p:sp>
-        <p:nvSpPr>
-          <p:cNvPr id="11" name="TextBox 10"/>
-          <p:cNvSpPr txBox="1"/>
-          <p:nvPr/>
-        </p:nvSpPr>
-        <p:spPr>
-          <a:xfrm>
-            <a:off x="548640" y="6126480"/>
-            <a:ext cx="11064240" cy="457200"/>
-          </a:xfrm>
-          <a:prstGeom prst="rect">
-            <a:avLst/>
-          </a:prstGeom>
-          <a:noFill/>
-        </p:spPr>
-        <p:txBody>
-          <a:bodyPr wrap="square">
-            <a:spAutoFit/>
-          </a:bodyPr>
-          <a:lstStyle/>
-          <a:p>
             <a:pPr algn="ctr"/>
             <a:r>
-              <a:rPr sz="1400" b="1">
-                <a:solidFill>
-                  <a:srgbClr val="FFE9B8"/>
-                </a:solidFill>
-                <a:latin typeface="Calibri"/>
-              </a:rPr>
-              <a:t>Refusing a premium tier is a design constraint, not an oversight.</a:t>
+              <a:rPr sz="1300" b="0">
+                <a:solidFill>
+                  <a:srgbClr val="8696A0"/>
+                </a:solidFill>
+                <a:latin typeface="Calibri"/>
+              </a:rPr>
+              <a:t>Phase 2: Grades 8–10 + Maths Literacy. Phase 3: Sciences, Accounting, 11 official spoken languages + SA Sign Language (video channel).</a:t>
             </a:r>
           </a:p>
         </p:txBody>
@@ -6711,7 +6635,7 @@
                 </a:solidFill>
                 <a:latin typeface="Calibri"/>
               </a:rPr>
-              <a:t>Roadmap</a:t>
+              <a:t>Equality · Safety · Trust</a:t>
             </a:r>
           </a:p>
         </p:txBody>
@@ -6740,13 +6664,13 @@
           <a:p>
             <a:pPr algn="l"/>
             <a:r>
-              <a:rPr sz="3000" b="1">
+              <a:rPr sz="3200" b="1">
                 <a:solidFill>
                   <a:srgbClr val="FFFFFF"/>
                 </a:solidFill>
                 <a:latin typeface="Calibri"/>
               </a:rPr>
-              <a:t>From hackathon prototype to national pilot.</a:t>
+              <a:t>Built right, not built fast.</a:t>
             </a:r>
           </a:p>
         </p:txBody>
@@ -6803,7 +6727,161 @@
         <p:spPr>
           <a:xfrm>
             <a:off x="548640" y="2468880"/>
-            <a:ext cx="1371600" cy="411480"/>
+            <a:ext cx="1463040" cy="411480"/>
+          </a:xfrm>
+          <a:prstGeom prst="roundRect">
+            <a:avLst/>
+          </a:prstGeom>
+          <a:solidFill>
+            <a:srgbClr val="00A884"/>
+          </a:solidFill>
+          <a:ln>
+            <a:noFill/>
+          </a:ln>
+        </p:spPr>
+        <p:style>
+          <a:lnRef idx="1">
+            <a:schemeClr val="accent1"/>
+          </a:lnRef>
+          <a:fillRef idx="3">
+            <a:schemeClr val="accent1"/>
+          </a:fillRef>
+          <a:effectRef idx="2">
+            <a:schemeClr val="accent1"/>
+          </a:effectRef>
+          <a:fontRef idx="minor">
+            <a:schemeClr val="lt1"/>
+          </a:fontRef>
+        </p:style>
+        <p:txBody>
+          <a:bodyPr rtlCol="0" anchor="ctr" lIns="137160" rIns="137160"/>
+          <a:lstStyle/>
+          <a:p>
+            <a:pPr algn="ctr"/>
+            <a:r>
+              <a:rPr sz="1400" b="1">
+                <a:solidFill>
+                  <a:srgbClr val="03110D"/>
+                </a:solidFill>
+              </a:rPr>
+              <a:t>Equality</a:t>
+            </a:r>
+          </a:p>
+        </p:txBody>
+      </p:sp>
+      <p:sp>
+        <p:nvSpPr>
+          <p:cNvPr id="6" name="TextBox 5"/>
+          <p:cNvSpPr txBox="1"/>
+          <p:nvPr/>
+        </p:nvSpPr>
+        <p:spPr>
+          <a:xfrm>
+            <a:off x="548640" y="3017520"/>
+            <a:ext cx="3657600" cy="3383280"/>
+          </a:xfrm>
+          <a:prstGeom prst="rect">
+            <a:avLst/>
+          </a:prstGeom>
+          <a:noFill/>
+        </p:spPr>
+        <p:txBody>
+          <a:bodyPr wrap="square">
+            <a:spAutoFit/>
+          </a:bodyPr>
+          <a:lstStyle/>
+          <a:p>
+            <a:pPr algn="l">
+              <a:spcBef>
+                <a:spcPts val="800"/>
+              </a:spcBef>
+            </a:pPr>
+            <a:r>
+              <a:rPr sz="1200">
+                <a:solidFill>
+                  <a:srgbClr val="E9EDEF"/>
+                </a:solidFill>
+                <a:latin typeface="Calibri"/>
+              </a:rPr>
+              <a:t>• Two channels — never device-locked</a:t>
+            </a:r>
+          </a:p>
+          <a:p>
+            <a:pPr algn="l">
+              <a:spcBef>
+                <a:spcPts val="800"/>
+              </a:spcBef>
+            </a:pPr>
+            <a:r>
+              <a:rPr sz="1200">
+                <a:solidFill>
+                  <a:srgbClr val="E9EDEF"/>
+                </a:solidFill>
+                <a:latin typeface="Calibri"/>
+              </a:rPr>
+              <a:t>• Zero at point of use (zero-rated)</a:t>
+            </a:r>
+          </a:p>
+          <a:p>
+            <a:pPr algn="l">
+              <a:spcBef>
+                <a:spcPts val="800"/>
+              </a:spcBef>
+            </a:pPr>
+            <a:r>
+              <a:rPr sz="1200">
+                <a:solidFill>
+                  <a:srgbClr val="E9EDEF"/>
+                </a:solidFill>
+                <a:latin typeface="Calibri"/>
+              </a:rPr>
+              <a:t>• 4 validated + 7 first-pass + SA Sign Language = 12</a:t>
+            </a:r>
+          </a:p>
+          <a:p>
+            <a:pPr algn="l">
+              <a:spcBef>
+                <a:spcPts val="800"/>
+              </a:spcBef>
+            </a:pPr>
+            <a:r>
+              <a:rPr sz="1200">
+                <a:solidFill>
+                  <a:srgbClr val="E9EDEF"/>
+                </a:solidFill>
+                <a:latin typeface="Calibri"/>
+              </a:rPr>
+              <a:t>• Identical brain on both channels</a:t>
+            </a:r>
+          </a:p>
+          <a:p>
+            <a:pPr algn="l">
+              <a:spcBef>
+                <a:spcPts val="800"/>
+              </a:spcBef>
+            </a:pPr>
+            <a:r>
+              <a:rPr sz="1200">
+                <a:solidFill>
+                  <a:srgbClr val="E9EDEF"/>
+                </a:solidFill>
+                <a:latin typeface="Calibri"/>
+              </a:rPr>
+              <a:t>• No premium tier — design constraint</a:t>
+            </a:r>
+          </a:p>
+        </p:txBody>
+      </p:sp>
+      <p:sp>
+        <p:nvSpPr>
+          <p:cNvPr id="7" name="Rounded Rectangle 6"/>
+          <p:cNvSpPr/>
+          <p:nvPr/>
+        </p:nvSpPr>
+        <p:spPr>
+          <a:xfrm>
+            <a:off x="4389120" y="2468880"/>
+            <a:ext cx="1463040" cy="411480"/>
           </a:xfrm>
           <a:prstGeom prst="roundRect">
             <a:avLst/>
@@ -6835,61 +6913,26 @@
           <a:p>
             <a:pPr algn="ctr"/>
             <a:r>
-              <a:rPr sz="1200" b="1">
+              <a:rPr sz="1400" b="1">
                 <a:solidFill>
                   <a:srgbClr val="03110D"/>
                 </a:solidFill>
               </a:rPr>
-              <a:t>Now</a:t>
-            </a:r>
-          </a:p>
-        </p:txBody>
-      </p:sp>
-      <p:sp>
-        <p:nvSpPr>
-          <p:cNvPr id="6" name="TextBox 5"/>
+              <a:t>Safety</a:t>
+            </a:r>
+          </a:p>
+        </p:txBody>
+      </p:sp>
+      <p:sp>
+        <p:nvSpPr>
+          <p:cNvPr id="8" name="TextBox 7"/>
           <p:cNvSpPr txBox="1"/>
           <p:nvPr/>
         </p:nvSpPr>
         <p:spPr>
           <a:xfrm>
-            <a:off x="2011680" y="2468880"/>
-            <a:ext cx="2286000" cy="411480"/>
-          </a:xfrm>
-          <a:prstGeom prst="rect">
-            <a:avLst/>
-          </a:prstGeom>
-          <a:noFill/>
-        </p:spPr>
-        <p:txBody>
-          <a:bodyPr wrap="square">
-            <a:spAutoFit/>
-          </a:bodyPr>
-          <a:lstStyle/>
-          <a:p>
-            <a:pPr algn="l"/>
-            <a:r>
-              <a:rPr sz="1600" b="1">
-                <a:solidFill>
-                  <a:srgbClr val="FFFFFF"/>
-                </a:solidFill>
-                <a:latin typeface="Calibri"/>
-              </a:rPr>
-              <a:t>Hackathon</a:t>
-            </a:r>
-          </a:p>
-        </p:txBody>
-      </p:sp>
-      <p:sp>
-        <p:nvSpPr>
-          <p:cNvPr id="7" name="TextBox 6"/>
-          <p:cNvSpPr txBox="1"/>
-          <p:nvPr/>
-        </p:nvSpPr>
-        <p:spPr>
-          <a:xfrm>
-            <a:off x="548640" y="3108960"/>
-            <a:ext cx="3657600" cy="3200400"/>
+            <a:off x="4389120" y="3017520"/>
+            <a:ext cx="3657600" cy="3383280"/>
           </a:xfrm>
           <a:prstGeom prst="rect">
             <a:avLst/>
@@ -6914,7 +6957,7 @@
                 </a:solidFill>
                 <a:latin typeface="Calibri"/>
               </a:rPr>
-              <a:t>• Both channels working end-to-end</a:t>
+              <a:t>• CAPS-bounded — no off-topic chat</a:t>
             </a:r>
           </a:p>
           <a:p>
@@ -6930,7 +6973,7 @@
                 </a:solidFill>
                 <a:latin typeface="Calibri"/>
               </a:rPr>
-              <a:t>• Real NSC questions, cited sources</a:t>
+              <a:t>• Verified maths in code, not LLM</a:t>
             </a:r>
           </a:p>
           <a:p>
@@ -6946,7 +6989,7 @@
                 </a:solidFill>
                 <a:latin typeface="Calibri"/>
               </a:rPr>
-              <a:t>• CAPS mappings against ATPs</a:t>
+              <a:t>• POPIA-aligned, SA-hosted</a:t>
             </a:r>
           </a:p>
           <a:p>
@@ -6962,27 +7005,43 @@
                 </a:solidFill>
                 <a:latin typeface="Calibri"/>
               </a:rPr>
-              <a:t>• Mock providers (offline demo)</a:t>
-            </a:r>
-          </a:p>
-        </p:txBody>
-      </p:sp>
-      <p:sp>
-        <p:nvSpPr>
-          <p:cNvPr id="8" name="Rounded Rectangle 7"/>
+              <a:t>• No PII beyond phone number</a:t>
+            </a:r>
+          </a:p>
+          <a:p>
+            <a:pPr algn="l">
+              <a:spcBef>
+                <a:spcPts val="800"/>
+              </a:spcBef>
+            </a:pPr>
+            <a:r>
+              <a:rPr sz="1200">
+                <a:solidFill>
+                  <a:srgbClr val="E9EDEF"/>
+                </a:solidFill>
+                <a:latin typeface="Calibri"/>
+              </a:rPr>
+              <a:t>• Reporting → real educator escalation</a:t>
+            </a:r>
+          </a:p>
+        </p:txBody>
+      </p:sp>
+      <p:sp>
+        <p:nvSpPr>
+          <p:cNvPr id="9" name="Rounded Rectangle 8"/>
           <p:cNvSpPr/>
           <p:nvPr/>
         </p:nvSpPr>
         <p:spPr>
           <a:xfrm>
-            <a:off x="4389120" y="2468880"/>
-            <a:ext cx="1371600" cy="411480"/>
+            <a:off x="8229600" y="2468880"/>
+            <a:ext cx="1463040" cy="411480"/>
           </a:xfrm>
           <a:prstGeom prst="roundRect">
             <a:avLst/>
           </a:prstGeom>
           <a:solidFill>
-            <a:srgbClr val="FFB347"/>
+            <a:srgbClr val="9CFF8C"/>
           </a:solidFill>
           <a:ln>
             <a:noFill/>
@@ -7008,47 +7067,12 @@
           <a:p>
             <a:pPr algn="ctr"/>
             <a:r>
-              <a:rPr sz="1200" b="1">
+              <a:rPr sz="1400" b="1">
                 <a:solidFill>
                   <a:srgbClr val="03110D"/>
                 </a:solidFill>
               </a:rPr>
-              <a:t>Q3 2026</a:t>
-            </a:r>
-          </a:p>
-        </p:txBody>
-      </p:sp>
-      <p:sp>
-        <p:nvSpPr>
-          <p:cNvPr id="9" name="TextBox 8"/>
-          <p:cNvSpPr txBox="1"/>
-          <p:nvPr/>
-        </p:nvSpPr>
-        <p:spPr>
-          <a:xfrm>
-            <a:off x="5852160" y="2468880"/>
-            <a:ext cx="2286000" cy="411480"/>
-          </a:xfrm>
-          <a:prstGeom prst="rect">
-            <a:avLst/>
-          </a:prstGeom>
-          <a:noFill/>
-        </p:spPr>
-        <p:txBody>
-          <a:bodyPr wrap="square">
-            <a:spAutoFit/>
-          </a:bodyPr>
-          <a:lstStyle/>
-          <a:p>
-            <a:pPr algn="l"/>
-            <a:r>
-              <a:rPr sz="1600" b="1">
-                <a:solidFill>
-                  <a:srgbClr val="FFFFFF"/>
-                </a:solidFill>
-                <a:latin typeface="Calibri"/>
-              </a:rPr>
-              <a:t>Pilot</a:t>
+              <a:t>Trust</a:t>
             </a:r>
           </a:p>
         </p:txBody>
@@ -7061,8 +7085,8 @@
         </p:nvSpPr>
         <p:spPr>
           <a:xfrm>
-            <a:off x="4389120" y="3108960"/>
-            <a:ext cx="3657600" cy="3200400"/>
+            <a:off x="8229600" y="3017520"/>
+            <a:ext cx="3657600" cy="3383280"/>
           </a:xfrm>
           <a:prstGeom prst="rect">
             <a:avLst/>
@@ -7087,7 +7111,7 @@
                 </a:solidFill>
                 <a:latin typeface="Calibri"/>
               </a:rPr>
-              <a:t>• Dell AI Factory LLM + VLM live</a:t>
+              <a:t>• Sources cited on every screen</a:t>
             </a:r>
           </a:p>
           <a:p>
@@ -7103,7 +7127,7 @@
                 </a:solidFill>
                 <a:latin typeface="Calibri"/>
               </a:rPr>
-              <a:t>• Vodacom WhatsApp + USSD partnership</a:t>
+              <a:t>• CAPS topic + sub-skill labelled</a:t>
             </a:r>
           </a:p>
           <a:p>
@@ -7119,7 +7143,7 @@
                 </a:solidFill>
                 <a:latin typeface="Calibri"/>
               </a:rPr>
-              <a:t>• 5 schools across 2 provinces</a:t>
+              <a:t>• Educator-editable curriculum file</a:t>
             </a:r>
           </a:p>
           <a:p>
@@ -7135,118 +7159,9 @@
                 </a:solidFill>
                 <a:latin typeface="Calibri"/>
               </a:rPr>
-              <a:t>• Educator advisory board (4-6 teachers)</a:t>
-            </a:r>
-          </a:p>
-        </p:txBody>
-      </p:sp>
-      <p:sp>
-        <p:nvSpPr>
-          <p:cNvPr id="11" name="Rounded Rectangle 10"/>
-          <p:cNvSpPr/>
-          <p:nvPr/>
-        </p:nvSpPr>
-        <p:spPr>
-          <a:xfrm>
-            <a:off x="8229600" y="2468880"/>
-            <a:ext cx="1371600" cy="411480"/>
-          </a:xfrm>
-          <a:prstGeom prst="roundRect">
-            <a:avLst/>
-          </a:prstGeom>
-          <a:solidFill>
-            <a:srgbClr val="FFB347"/>
-          </a:solidFill>
-          <a:ln>
-            <a:noFill/>
-          </a:ln>
-        </p:spPr>
-        <p:style>
-          <a:lnRef idx="1">
-            <a:schemeClr val="accent1"/>
-          </a:lnRef>
-          <a:fillRef idx="3">
-            <a:schemeClr val="accent1"/>
-          </a:fillRef>
-          <a:effectRef idx="2">
-            <a:schemeClr val="accent1"/>
-          </a:effectRef>
-          <a:fontRef idx="minor">
-            <a:schemeClr val="lt1"/>
-          </a:fontRef>
-        </p:style>
-        <p:txBody>
-          <a:bodyPr rtlCol="0" anchor="ctr" lIns="137160" rIns="137160"/>
-          <a:lstStyle/>
-          <a:p>
-            <a:pPr algn="ctr"/>
-            <a:r>
-              <a:rPr sz="1200" b="1">
-                <a:solidFill>
-                  <a:srgbClr val="03110D"/>
-                </a:solidFill>
-              </a:rPr>
-              <a:t>2027</a:t>
-            </a:r>
-          </a:p>
-        </p:txBody>
-      </p:sp>
-      <p:sp>
-        <p:nvSpPr>
-          <p:cNvPr id="12" name="TextBox 11"/>
-          <p:cNvSpPr txBox="1"/>
-          <p:nvPr/>
-        </p:nvSpPr>
-        <p:spPr>
-          <a:xfrm>
-            <a:off x="9692640" y="2468880"/>
-            <a:ext cx="2286000" cy="411480"/>
-          </a:xfrm>
-          <a:prstGeom prst="rect">
-            <a:avLst/>
-          </a:prstGeom>
-          <a:noFill/>
-        </p:spPr>
-        <p:txBody>
-          <a:bodyPr wrap="square">
-            <a:spAutoFit/>
-          </a:bodyPr>
-          <a:lstStyle/>
-          <a:p>
-            <a:pPr algn="l"/>
-            <a:r>
-              <a:rPr sz="1600" b="1">
-                <a:solidFill>
-                  <a:srgbClr val="FFFFFF"/>
-                </a:solidFill>
-                <a:latin typeface="Calibri"/>
-              </a:rPr>
-              <a:t>Scale</a:t>
-            </a:r>
-          </a:p>
-        </p:txBody>
-      </p:sp>
-      <p:sp>
-        <p:nvSpPr>
-          <p:cNvPr id="13" name="TextBox 12"/>
-          <p:cNvSpPr txBox="1"/>
-          <p:nvPr/>
-        </p:nvSpPr>
-        <p:spPr>
-          <a:xfrm>
-            <a:off x="8229600" y="3108960"/>
-            <a:ext cx="3657600" cy="3200400"/>
-          </a:xfrm>
-          <a:prstGeom prst="rect">
-            <a:avLst/>
-          </a:prstGeom>
-          <a:noFill/>
-        </p:spPr>
-        <p:txBody>
-          <a:bodyPr wrap="square">
-            <a:spAutoFit/>
-          </a:bodyPr>
-          <a:lstStyle/>
+              <a:t>• Refuses to give final answers</a:t>
+            </a:r>
+          </a:p>
           <a:p>
             <a:pPr algn="l">
               <a:spcBef>
@@ -7260,55 +7175,42 @@
                 </a:solidFill>
                 <a:latin typeface="Calibri"/>
               </a:rPr>
-              <a:t>• All 11 official spoken languages educator-validated + SA Sign Language</a:t>
-            </a:r>
-          </a:p>
-          <a:p>
-            <a:pPr algn="l">
-              <a:spcBef>
-                <a:spcPts val="800"/>
-              </a:spcBef>
-            </a:pPr>
-            <a:r>
-              <a:rPr sz="1200">
-                <a:solidFill>
-                  <a:srgbClr val="E9EDEF"/>
-                </a:solidFill>
-                <a:latin typeface="Calibri"/>
-              </a:rPr>
-              <a:t>• Maths Lit, Sciences, Accounting</a:t>
-            </a:r>
-          </a:p>
-          <a:p>
-            <a:pPr algn="l">
-              <a:spcBef>
-                <a:spcPts val="800"/>
-              </a:spcBef>
-            </a:pPr>
-            <a:r>
-              <a:rPr sz="1200">
-                <a:solidFill>
-                  <a:srgbClr val="E9EDEF"/>
-                </a:solidFill>
-                <a:latin typeface="Calibri"/>
-              </a:rPr>
-              <a:t>• Class-level analytics for teachers</a:t>
-            </a:r>
-          </a:p>
-          <a:p>
-            <a:pPr algn="l">
-              <a:spcBef>
-                <a:spcPts val="800"/>
-              </a:spcBef>
-            </a:pPr>
-            <a:r>
-              <a:rPr sz="1200">
-                <a:solidFill>
-                  <a:srgbClr val="E9EDEF"/>
-                </a:solidFill>
-                <a:latin typeface="Calibri"/>
-              </a:rPr>
-              <a:t>• DBE adoption discussions</a:t>
+              <a:t>• Quarterly public impact reports</a:t>
+            </a:r>
+          </a:p>
+        </p:txBody>
+      </p:sp>
+      <p:sp>
+        <p:nvSpPr>
+          <p:cNvPr id="11" name="TextBox 10"/>
+          <p:cNvSpPr txBox="1"/>
+          <p:nvPr/>
+        </p:nvSpPr>
+        <p:spPr>
+          <a:xfrm>
+            <a:off x="548640" y="6126480"/>
+            <a:ext cx="11064240" cy="457200"/>
+          </a:xfrm>
+          <a:prstGeom prst="rect">
+            <a:avLst/>
+          </a:prstGeom>
+          <a:noFill/>
+        </p:spPr>
+        <p:txBody>
+          <a:bodyPr wrap="square">
+            <a:spAutoFit/>
+          </a:bodyPr>
+          <a:lstStyle/>
+          <a:p>
+            <a:pPr algn="ctr"/>
+            <a:r>
+              <a:rPr sz="1400" b="1">
+                <a:solidFill>
+                  <a:srgbClr val="FFE9B8"/>
+                </a:solidFill>
+                <a:latin typeface="Calibri"/>
+              </a:rPr>
+              <a:t>Refusing a premium tier is a design constraint, not an oversight.</a:t>
             </a:r>
           </a:p>
         </p:txBody>
@@ -7365,6 +7267,664 @@
             <a:r>
               <a:rPr sz="1400" b="1">
                 <a:solidFill>
+                  <a:srgbClr val="00A884"/>
+                </a:solidFill>
+                <a:latin typeface="Calibri"/>
+              </a:rPr>
+              <a:t>Roadmap</a:t>
+            </a:r>
+          </a:p>
+        </p:txBody>
+      </p:sp>
+      <p:sp>
+        <p:nvSpPr>
+          <p:cNvPr id="3" name="TextBox 2"/>
+          <p:cNvSpPr txBox="1"/>
+          <p:nvPr/>
+        </p:nvSpPr>
+        <p:spPr>
+          <a:xfrm>
+            <a:off x="548640" y="914400"/>
+            <a:ext cx="11064240" cy="914400"/>
+          </a:xfrm>
+          <a:prstGeom prst="rect">
+            <a:avLst/>
+          </a:prstGeom>
+          <a:noFill/>
+        </p:spPr>
+        <p:txBody>
+          <a:bodyPr wrap="square">
+            <a:spAutoFit/>
+          </a:bodyPr>
+          <a:lstStyle/>
+          <a:p>
+            <a:pPr algn="l"/>
+            <a:r>
+              <a:rPr sz="3000" b="1">
+                <a:solidFill>
+                  <a:srgbClr val="FFFFFF"/>
+                </a:solidFill>
+                <a:latin typeface="Calibri"/>
+              </a:rPr>
+              <a:t>From hackathon prototype to national pilot.</a:t>
+            </a:r>
+          </a:p>
+        </p:txBody>
+      </p:sp>
+      <p:sp>
+        <p:nvSpPr>
+          <p:cNvPr id="4" name="Rectangle 3"/>
+          <p:cNvSpPr/>
+          <p:nvPr/>
+        </p:nvSpPr>
+        <p:spPr>
+          <a:xfrm>
+            <a:off x="548640" y="2011680"/>
+            <a:ext cx="3657600" cy="50800"/>
+          </a:xfrm>
+          <a:prstGeom prst="rect">
+            <a:avLst/>
+          </a:prstGeom>
+          <a:solidFill>
+            <a:srgbClr val="00A884"/>
+          </a:solidFill>
+          <a:ln>
+            <a:noFill/>
+          </a:ln>
+        </p:spPr>
+        <p:style>
+          <a:lnRef idx="1">
+            <a:schemeClr val="accent1"/>
+          </a:lnRef>
+          <a:fillRef idx="3">
+            <a:schemeClr val="accent1"/>
+          </a:fillRef>
+          <a:effectRef idx="2">
+            <a:schemeClr val="accent1"/>
+          </a:effectRef>
+          <a:fontRef idx="minor">
+            <a:schemeClr val="lt1"/>
+          </a:fontRef>
+        </p:style>
+        <p:txBody>
+          <a:bodyPr rtlCol="0" anchor="ctr"/>
+          <a:lstStyle/>
+          <a:p>
+            <a:pPr algn="ctr"/>
+          </a:p>
+        </p:txBody>
+      </p:sp>
+      <p:sp>
+        <p:nvSpPr>
+          <p:cNvPr id="5" name="Rounded Rectangle 4"/>
+          <p:cNvSpPr/>
+          <p:nvPr/>
+        </p:nvSpPr>
+        <p:spPr>
+          <a:xfrm>
+            <a:off x="548640" y="2468880"/>
+            <a:ext cx="1371600" cy="411480"/>
+          </a:xfrm>
+          <a:prstGeom prst="roundRect">
+            <a:avLst/>
+          </a:prstGeom>
+          <a:solidFill>
+            <a:srgbClr val="FFB347"/>
+          </a:solidFill>
+          <a:ln>
+            <a:noFill/>
+          </a:ln>
+        </p:spPr>
+        <p:style>
+          <a:lnRef idx="1">
+            <a:schemeClr val="accent1"/>
+          </a:lnRef>
+          <a:fillRef idx="3">
+            <a:schemeClr val="accent1"/>
+          </a:fillRef>
+          <a:effectRef idx="2">
+            <a:schemeClr val="accent1"/>
+          </a:effectRef>
+          <a:fontRef idx="minor">
+            <a:schemeClr val="lt1"/>
+          </a:fontRef>
+        </p:style>
+        <p:txBody>
+          <a:bodyPr rtlCol="0" anchor="ctr" lIns="137160" rIns="137160"/>
+          <a:lstStyle/>
+          <a:p>
+            <a:pPr algn="ctr"/>
+            <a:r>
+              <a:rPr sz="1200" b="1">
+                <a:solidFill>
+                  <a:srgbClr val="03110D"/>
+                </a:solidFill>
+              </a:rPr>
+              <a:t>Now</a:t>
+            </a:r>
+          </a:p>
+        </p:txBody>
+      </p:sp>
+      <p:sp>
+        <p:nvSpPr>
+          <p:cNvPr id="6" name="TextBox 5"/>
+          <p:cNvSpPr txBox="1"/>
+          <p:nvPr/>
+        </p:nvSpPr>
+        <p:spPr>
+          <a:xfrm>
+            <a:off x="2011680" y="2468880"/>
+            <a:ext cx="2286000" cy="411480"/>
+          </a:xfrm>
+          <a:prstGeom prst="rect">
+            <a:avLst/>
+          </a:prstGeom>
+          <a:noFill/>
+        </p:spPr>
+        <p:txBody>
+          <a:bodyPr wrap="square">
+            <a:spAutoFit/>
+          </a:bodyPr>
+          <a:lstStyle/>
+          <a:p>
+            <a:pPr algn="l"/>
+            <a:r>
+              <a:rPr sz="1600" b="1">
+                <a:solidFill>
+                  <a:srgbClr val="FFFFFF"/>
+                </a:solidFill>
+                <a:latin typeface="Calibri"/>
+              </a:rPr>
+              <a:t>Hackathon</a:t>
+            </a:r>
+          </a:p>
+        </p:txBody>
+      </p:sp>
+      <p:sp>
+        <p:nvSpPr>
+          <p:cNvPr id="7" name="TextBox 6"/>
+          <p:cNvSpPr txBox="1"/>
+          <p:nvPr/>
+        </p:nvSpPr>
+        <p:spPr>
+          <a:xfrm>
+            <a:off x="548640" y="3108960"/>
+            <a:ext cx="3657600" cy="3200400"/>
+          </a:xfrm>
+          <a:prstGeom prst="rect">
+            <a:avLst/>
+          </a:prstGeom>
+          <a:noFill/>
+        </p:spPr>
+        <p:txBody>
+          <a:bodyPr wrap="square">
+            <a:spAutoFit/>
+          </a:bodyPr>
+          <a:lstStyle/>
+          <a:p>
+            <a:pPr algn="l">
+              <a:spcBef>
+                <a:spcPts val="800"/>
+              </a:spcBef>
+            </a:pPr>
+            <a:r>
+              <a:rPr sz="1200">
+                <a:solidFill>
+                  <a:srgbClr val="E9EDEF"/>
+                </a:solidFill>
+                <a:latin typeface="Calibri"/>
+              </a:rPr>
+              <a:t>• Both channels working end-to-end</a:t>
+            </a:r>
+          </a:p>
+          <a:p>
+            <a:pPr algn="l">
+              <a:spcBef>
+                <a:spcPts val="800"/>
+              </a:spcBef>
+            </a:pPr>
+            <a:r>
+              <a:rPr sz="1200">
+                <a:solidFill>
+                  <a:srgbClr val="E9EDEF"/>
+                </a:solidFill>
+                <a:latin typeface="Calibri"/>
+              </a:rPr>
+              <a:t>• Real NSC questions, cited sources</a:t>
+            </a:r>
+          </a:p>
+          <a:p>
+            <a:pPr algn="l">
+              <a:spcBef>
+                <a:spcPts val="800"/>
+              </a:spcBef>
+            </a:pPr>
+            <a:r>
+              <a:rPr sz="1200">
+                <a:solidFill>
+                  <a:srgbClr val="E9EDEF"/>
+                </a:solidFill>
+                <a:latin typeface="Calibri"/>
+              </a:rPr>
+              <a:t>• CAPS mappings against ATPs</a:t>
+            </a:r>
+          </a:p>
+          <a:p>
+            <a:pPr algn="l">
+              <a:spcBef>
+                <a:spcPts val="800"/>
+              </a:spcBef>
+            </a:pPr>
+            <a:r>
+              <a:rPr sz="1200">
+                <a:solidFill>
+                  <a:srgbClr val="E9EDEF"/>
+                </a:solidFill>
+                <a:latin typeface="Calibri"/>
+              </a:rPr>
+              <a:t>• Mock providers (offline demo)</a:t>
+            </a:r>
+          </a:p>
+        </p:txBody>
+      </p:sp>
+      <p:sp>
+        <p:nvSpPr>
+          <p:cNvPr id="8" name="Rounded Rectangle 7"/>
+          <p:cNvSpPr/>
+          <p:nvPr/>
+        </p:nvSpPr>
+        <p:spPr>
+          <a:xfrm>
+            <a:off x="4389120" y="2468880"/>
+            <a:ext cx="1371600" cy="411480"/>
+          </a:xfrm>
+          <a:prstGeom prst="roundRect">
+            <a:avLst/>
+          </a:prstGeom>
+          <a:solidFill>
+            <a:srgbClr val="FFB347"/>
+          </a:solidFill>
+          <a:ln>
+            <a:noFill/>
+          </a:ln>
+        </p:spPr>
+        <p:style>
+          <a:lnRef idx="1">
+            <a:schemeClr val="accent1"/>
+          </a:lnRef>
+          <a:fillRef idx="3">
+            <a:schemeClr val="accent1"/>
+          </a:fillRef>
+          <a:effectRef idx="2">
+            <a:schemeClr val="accent1"/>
+          </a:effectRef>
+          <a:fontRef idx="minor">
+            <a:schemeClr val="lt1"/>
+          </a:fontRef>
+        </p:style>
+        <p:txBody>
+          <a:bodyPr rtlCol="0" anchor="ctr" lIns="137160" rIns="137160"/>
+          <a:lstStyle/>
+          <a:p>
+            <a:pPr algn="ctr"/>
+            <a:r>
+              <a:rPr sz="1200" b="1">
+                <a:solidFill>
+                  <a:srgbClr val="03110D"/>
+                </a:solidFill>
+              </a:rPr>
+              <a:t>Q3 2026</a:t>
+            </a:r>
+          </a:p>
+        </p:txBody>
+      </p:sp>
+      <p:sp>
+        <p:nvSpPr>
+          <p:cNvPr id="9" name="TextBox 8"/>
+          <p:cNvSpPr txBox="1"/>
+          <p:nvPr/>
+        </p:nvSpPr>
+        <p:spPr>
+          <a:xfrm>
+            <a:off x="5852160" y="2468880"/>
+            <a:ext cx="2286000" cy="411480"/>
+          </a:xfrm>
+          <a:prstGeom prst="rect">
+            <a:avLst/>
+          </a:prstGeom>
+          <a:noFill/>
+        </p:spPr>
+        <p:txBody>
+          <a:bodyPr wrap="square">
+            <a:spAutoFit/>
+          </a:bodyPr>
+          <a:lstStyle/>
+          <a:p>
+            <a:pPr algn="l"/>
+            <a:r>
+              <a:rPr sz="1600" b="1">
+                <a:solidFill>
+                  <a:srgbClr val="FFFFFF"/>
+                </a:solidFill>
+                <a:latin typeface="Calibri"/>
+              </a:rPr>
+              <a:t>Pilot</a:t>
+            </a:r>
+          </a:p>
+        </p:txBody>
+      </p:sp>
+      <p:sp>
+        <p:nvSpPr>
+          <p:cNvPr id="10" name="TextBox 9"/>
+          <p:cNvSpPr txBox="1"/>
+          <p:nvPr/>
+        </p:nvSpPr>
+        <p:spPr>
+          <a:xfrm>
+            <a:off x="4389120" y="3108960"/>
+            <a:ext cx="3657600" cy="3200400"/>
+          </a:xfrm>
+          <a:prstGeom prst="rect">
+            <a:avLst/>
+          </a:prstGeom>
+          <a:noFill/>
+        </p:spPr>
+        <p:txBody>
+          <a:bodyPr wrap="square">
+            <a:spAutoFit/>
+          </a:bodyPr>
+          <a:lstStyle/>
+          <a:p>
+            <a:pPr algn="l">
+              <a:spcBef>
+                <a:spcPts val="800"/>
+              </a:spcBef>
+            </a:pPr>
+            <a:r>
+              <a:rPr sz="1200">
+                <a:solidFill>
+                  <a:srgbClr val="E9EDEF"/>
+                </a:solidFill>
+                <a:latin typeface="Calibri"/>
+              </a:rPr>
+              <a:t>• Dell AI Factory LLM + VLM live</a:t>
+            </a:r>
+          </a:p>
+          <a:p>
+            <a:pPr algn="l">
+              <a:spcBef>
+                <a:spcPts val="800"/>
+              </a:spcBef>
+            </a:pPr>
+            <a:r>
+              <a:rPr sz="1200">
+                <a:solidFill>
+                  <a:srgbClr val="E9EDEF"/>
+                </a:solidFill>
+                <a:latin typeface="Calibri"/>
+              </a:rPr>
+              <a:t>• Vodacom WhatsApp + USSD partnership</a:t>
+            </a:r>
+          </a:p>
+          <a:p>
+            <a:pPr algn="l">
+              <a:spcBef>
+                <a:spcPts val="800"/>
+              </a:spcBef>
+            </a:pPr>
+            <a:r>
+              <a:rPr sz="1200">
+                <a:solidFill>
+                  <a:srgbClr val="E9EDEF"/>
+                </a:solidFill>
+                <a:latin typeface="Calibri"/>
+              </a:rPr>
+              <a:t>• 5 schools across 2 provinces</a:t>
+            </a:r>
+          </a:p>
+          <a:p>
+            <a:pPr algn="l">
+              <a:spcBef>
+                <a:spcPts val="800"/>
+              </a:spcBef>
+            </a:pPr>
+            <a:r>
+              <a:rPr sz="1200">
+                <a:solidFill>
+                  <a:srgbClr val="E9EDEF"/>
+                </a:solidFill>
+                <a:latin typeface="Calibri"/>
+              </a:rPr>
+              <a:t>• Educator advisory board (4-6 teachers)</a:t>
+            </a:r>
+          </a:p>
+        </p:txBody>
+      </p:sp>
+      <p:sp>
+        <p:nvSpPr>
+          <p:cNvPr id="11" name="Rounded Rectangle 10"/>
+          <p:cNvSpPr/>
+          <p:nvPr/>
+        </p:nvSpPr>
+        <p:spPr>
+          <a:xfrm>
+            <a:off x="8229600" y="2468880"/>
+            <a:ext cx="1371600" cy="411480"/>
+          </a:xfrm>
+          <a:prstGeom prst="roundRect">
+            <a:avLst/>
+          </a:prstGeom>
+          <a:solidFill>
+            <a:srgbClr val="FFB347"/>
+          </a:solidFill>
+          <a:ln>
+            <a:noFill/>
+          </a:ln>
+        </p:spPr>
+        <p:style>
+          <a:lnRef idx="1">
+            <a:schemeClr val="accent1"/>
+          </a:lnRef>
+          <a:fillRef idx="3">
+            <a:schemeClr val="accent1"/>
+          </a:fillRef>
+          <a:effectRef idx="2">
+            <a:schemeClr val="accent1"/>
+          </a:effectRef>
+          <a:fontRef idx="minor">
+            <a:schemeClr val="lt1"/>
+          </a:fontRef>
+        </p:style>
+        <p:txBody>
+          <a:bodyPr rtlCol="0" anchor="ctr" lIns="137160" rIns="137160"/>
+          <a:lstStyle/>
+          <a:p>
+            <a:pPr algn="ctr"/>
+            <a:r>
+              <a:rPr sz="1200" b="1">
+                <a:solidFill>
+                  <a:srgbClr val="03110D"/>
+                </a:solidFill>
+              </a:rPr>
+              <a:t>2027</a:t>
+            </a:r>
+          </a:p>
+        </p:txBody>
+      </p:sp>
+      <p:sp>
+        <p:nvSpPr>
+          <p:cNvPr id="12" name="TextBox 11"/>
+          <p:cNvSpPr txBox="1"/>
+          <p:nvPr/>
+        </p:nvSpPr>
+        <p:spPr>
+          <a:xfrm>
+            <a:off x="9692640" y="2468880"/>
+            <a:ext cx="2286000" cy="411480"/>
+          </a:xfrm>
+          <a:prstGeom prst="rect">
+            <a:avLst/>
+          </a:prstGeom>
+          <a:noFill/>
+        </p:spPr>
+        <p:txBody>
+          <a:bodyPr wrap="square">
+            <a:spAutoFit/>
+          </a:bodyPr>
+          <a:lstStyle/>
+          <a:p>
+            <a:pPr algn="l"/>
+            <a:r>
+              <a:rPr sz="1600" b="1">
+                <a:solidFill>
+                  <a:srgbClr val="FFFFFF"/>
+                </a:solidFill>
+                <a:latin typeface="Calibri"/>
+              </a:rPr>
+              <a:t>Scale</a:t>
+            </a:r>
+          </a:p>
+        </p:txBody>
+      </p:sp>
+      <p:sp>
+        <p:nvSpPr>
+          <p:cNvPr id="13" name="TextBox 12"/>
+          <p:cNvSpPr txBox="1"/>
+          <p:nvPr/>
+        </p:nvSpPr>
+        <p:spPr>
+          <a:xfrm>
+            <a:off x="8229600" y="3108960"/>
+            <a:ext cx="3657600" cy="3200400"/>
+          </a:xfrm>
+          <a:prstGeom prst="rect">
+            <a:avLst/>
+          </a:prstGeom>
+          <a:noFill/>
+        </p:spPr>
+        <p:txBody>
+          <a:bodyPr wrap="square">
+            <a:spAutoFit/>
+          </a:bodyPr>
+          <a:lstStyle/>
+          <a:p>
+            <a:pPr algn="l">
+              <a:spcBef>
+                <a:spcPts val="800"/>
+              </a:spcBef>
+            </a:pPr>
+            <a:r>
+              <a:rPr sz="1200">
+                <a:solidFill>
+                  <a:srgbClr val="E9EDEF"/>
+                </a:solidFill>
+                <a:latin typeface="Calibri"/>
+              </a:rPr>
+              <a:t>• All 11 official spoken languages educator-validated + SA Sign Language</a:t>
+            </a:r>
+          </a:p>
+          <a:p>
+            <a:pPr algn="l">
+              <a:spcBef>
+                <a:spcPts val="800"/>
+              </a:spcBef>
+            </a:pPr>
+            <a:r>
+              <a:rPr sz="1200">
+                <a:solidFill>
+                  <a:srgbClr val="E9EDEF"/>
+                </a:solidFill>
+                <a:latin typeface="Calibri"/>
+              </a:rPr>
+              <a:t>• Maths Lit, Sciences, Accounting</a:t>
+            </a:r>
+          </a:p>
+          <a:p>
+            <a:pPr algn="l">
+              <a:spcBef>
+                <a:spcPts val="800"/>
+              </a:spcBef>
+            </a:pPr>
+            <a:r>
+              <a:rPr sz="1200">
+                <a:solidFill>
+                  <a:srgbClr val="E9EDEF"/>
+                </a:solidFill>
+                <a:latin typeface="Calibri"/>
+              </a:rPr>
+              <a:t>• Class-level analytics for teachers</a:t>
+            </a:r>
+          </a:p>
+          <a:p>
+            <a:pPr algn="l">
+              <a:spcBef>
+                <a:spcPts val="800"/>
+              </a:spcBef>
+            </a:pPr>
+            <a:r>
+              <a:rPr sz="1200">
+                <a:solidFill>
+                  <a:srgbClr val="E9EDEF"/>
+                </a:solidFill>
+                <a:latin typeface="Calibri"/>
+              </a:rPr>
+              <a:t>• DBE adoption discussions</a:t>
+            </a:r>
+          </a:p>
+        </p:txBody>
+      </p:sp>
+    </p:spTree>
+  </p:cSld>
+  <p:clrMapOvr>
+    <a:masterClrMapping/>
+  </p:clrMapOvr>
+</p:sld>
+</file>
+
+<file path=ppt/slides/slide15.xml><?xml version="1.0" encoding="utf-8"?>
+<p:sld xmlns:a="http://schemas.openxmlformats.org/drawingml/2006/main" xmlns:p="http://schemas.openxmlformats.org/presentationml/2006/main" xmlns:r="http://schemas.openxmlformats.org/officeDocument/2006/relationships">
+  <p:cSld>
+    <p:bg>
+      <p:bgPr>
+        <a:solidFill>
+          <a:srgbClr val="0B141A"/>
+        </a:solidFill>
+        <a:effectLst/>
+      </p:bgPr>
+    </p:bg>
+    <p:spTree>
+      <p:nvGrpSpPr>
+        <p:cNvPr id="1" name=""/>
+        <p:cNvGrpSpPr/>
+        <p:nvPr/>
+      </p:nvGrpSpPr>
+      <p:grpSpPr/>
+      <p:sp>
+        <p:nvSpPr>
+          <p:cNvPr id="2" name="TextBox 1"/>
+          <p:cNvSpPr txBox="1"/>
+          <p:nvPr/>
+        </p:nvSpPr>
+        <p:spPr>
+          <a:xfrm>
+            <a:off x="548640" y="457200"/>
+            <a:ext cx="11064240" cy="548640"/>
+          </a:xfrm>
+          <a:prstGeom prst="rect">
+            <a:avLst/>
+          </a:prstGeom>
+          <a:noFill/>
+        </p:spPr>
+        <p:txBody>
+          <a:bodyPr wrap="square">
+            <a:spAutoFit/>
+          </a:bodyPr>
+          <a:lstStyle/>
+          <a:p>
+            <a:pPr algn="l"/>
+            <a:r>
+              <a:rPr sz="1400" b="1">
+                <a:solidFill>
                   <a:srgbClr val="FFB347"/>
                 </a:solidFill>
                 <a:latin typeface="Calibri"/>
@@ -10058,7 +10618,7 @@
                   <a:srgbClr val="E9EDEF"/>
                 </a:solidFill>
               </a:rPr>
-              <a:t>🧠 Reasoning LLM  ·  Dell NIM (Llama / Qwen)</a:t>
+              <a:t>🧠 Reasoning LLM  ·  GPT-OSS 120B (Dell NIM)</a:t>
             </a:r>
           </a:p>
         </p:txBody>
@@ -10109,7 +10669,7 @@
                   <a:srgbClr val="E9EDEF"/>
                 </a:solidFill>
               </a:rPr>
-              <a:t>👁️ Vision VLM  ·  Dell NIM (Qwen2-VL) — handwriting</a:t>
+              <a:t>👁️ Vision VLM  ·  Llama 4 Scout (Dell NIM)</a:t>
             </a:r>
           </a:p>
         </p:txBody>
@@ -10160,7 +10720,7 @@
                   <a:srgbClr val="E9EDEF"/>
                 </a:solidFill>
               </a:rPr>
-              <a:t>🌐 Translation  ·  Dell LLM (11 SA languages)</a:t>
+              <a:t>🌐 Translation  ·  Same LLM, 11 SA languages</a:t>
             </a:r>
           </a:p>
         </p:txBody>
@@ -12515,7 +13075,7 @@
                   <a:srgbClr val="03110D"/>
                 </a:solidFill>
               </a:rPr>
-              <a:t>🧠 Meta Llama 3.3 70B</a:t>
+              <a:t>🧠 openai/gpt-oss-120b</a:t>
             </a:r>
           </a:p>
         </p:txBody>
@@ -12554,7 +13114,7 @@
                 </a:solidFill>
                 <a:latin typeface="Calibri"/>
               </a:rPr>
-              <a:t>• 70 billion parameters, instruction-tuned</a:t>
+              <a:t>• 120B params, mixture-of-experts, open-weight</a:t>
             </a:r>
           </a:p>
           <a:p>
@@ -12570,7 +13130,7 @@
                 </a:solidFill>
                 <a:latin typeface="Calibri"/>
               </a:rPr>
-              <a:t>• Open-weight (self-hostable on Dell hardware)</a:t>
+              <a:t>• Apache 2.0 · self-hostable on Dell hardware</a:t>
             </a:r>
           </a:p>
           <a:p>
@@ -12602,7 +13162,7 @@
                 </a:solidFill>
                 <a:latin typeface="Calibri"/>
               </a:rPr>
-              <a:t>• isiZulu + English fluency</a:t>
+              <a:t>• Wrapped by CAPS system prompts (NSC mark codes)</a:t>
             </a:r>
           </a:p>
           <a:p>
@@ -12618,7 +13178,7 @@
                 </a:solidFill>
                 <a:latin typeface="Calibri"/>
               </a:rPr>
-              <a:t>• Pilot: Groq API (free tier)</a:t>
+              <a:t>• Pilot: Groq API (~500 tok/s, free tier)</a:t>
             </a:r>
           </a:p>
           <a:p>
@@ -12720,7 +13280,7 @@
                   <a:srgbClr val="03110D"/>
                 </a:solidFill>
               </a:rPr>
-              <a:t>👁️ Llama 4 Scout / Llama 3.2 Vision</a:t>
+              <a:t>👁️ Meta Llama 4 Scout 17B</a:t>
             </a:r>
           </a:p>
         </p:txBody>
@@ -12759,7 +13319,7 @@
                 </a:solidFill>
                 <a:latin typeface="Calibri"/>
               </a:rPr>
-              <a:t>• Multimodal — text + image input</a:t>
+              <a:t>• Multimodal — text + image in one endpoint</a:t>
             </a:r>
           </a:p>
           <a:p>
@@ -12791,7 +13351,7 @@
                 </a:solidFill>
                 <a:latin typeface="Calibri"/>
               </a:rPr>
-              <a:t>• Textbook page understanding</a:t>
+              <a:t>• Textbook page snapshots, whiteboard photos</a:t>
             </a:r>
           </a:p>
           <a:p>
@@ -12807,7 +13367,7 @@
                 </a:solidFill>
                 <a:latin typeface="Calibri"/>
               </a:rPr>
-              <a:t>• Same OpenAI-compatible API</a:t>
+              <a:t>• Same OpenAI-compatible API as reasoning LLM</a:t>
             </a:r>
           </a:p>
           <a:p>
@@ -12978,7 +13538,7 @@
                 </a:solidFill>
                 <a:latin typeface="Calibri"/>
               </a:rPr>
-              <a:t>Architecture · Data Flow</a:t>
+              <a:t>CAPS Alignment</a:t>
             </a:r>
           </a:p>
         </p:txBody>
@@ -13013,7 +13573,7 @@
                 </a:solidFill>
                 <a:latin typeface="Calibri"/>
               </a:rPr>
-              <a:t>One request, end-to-end</a:t>
+              <a:t>How the AI stays faithful to the DBE curriculum</a:t>
             </a:r>
           </a:p>
         </p:txBody>
@@ -13069,17 +13629,19 @@
         </p:nvSpPr>
         <p:spPr>
           <a:xfrm>
-            <a:off x="3200400" y="1600200"/>
-            <a:ext cx="5760720" cy="502920"/>
+            <a:off x="548640" y="1737360"/>
+            <a:ext cx="6583680" cy="868680"/>
           </a:xfrm>
           <a:prstGeom prst="roundRect">
             <a:avLst/>
           </a:prstGeom>
           <a:solidFill>
-            <a:srgbClr val="00A884"/>
+            <a:srgbClr val="1A2A33"/>
           </a:solidFill>
-          <a:ln>
-            <a:noFill/>
+          <a:ln w="12700">
+            <a:solidFill>
+              <a:srgbClr val="8696A0"/>
+            </a:solidFill>
           </a:ln>
         </p:spPr>
         <p:style>
@@ -13110,8 +13672,8 @@
         </p:nvSpPr>
         <p:spPr>
           <a:xfrm>
-            <a:off x="3337560" y="1645920"/>
-            <a:ext cx="5486400" cy="274320"/>
+            <a:off x="731520" y="1783080"/>
+            <a:ext cx="6217920" cy="365760"/>
           </a:xfrm>
           <a:prstGeom prst="rect">
             <a:avLst/>
@@ -13124,15 +13686,15 @@
           </a:bodyPr>
           <a:lstStyle/>
           <a:p>
-            <a:pPr algn="ctr"/>
+            <a:pPr algn="l"/>
             <a:r>
               <a:rPr sz="1300" b="1">
                 <a:solidFill>
-                  <a:srgbClr val="03110D"/>
-                </a:solidFill>
-                <a:latin typeface="Calibri"/>
-              </a:rPr>
-              <a:t>1 · Learner input  ·  WhatsApp / USSD / Browser</a:t>
+                  <a:srgbClr val="FFFFFF"/>
+                </a:solidFill>
+                <a:latin typeface="Calibri"/>
+              </a:rPr>
+              <a:t>Layer 4 · Fine-tune on Dell AI Factory</a:t>
             </a:r>
           </a:p>
         </p:txBody>
@@ -13145,8 +13707,8 @@
         </p:nvSpPr>
         <p:spPr>
           <a:xfrm>
-            <a:off x="3337560" y="1892807"/>
-            <a:ext cx="5486400" cy="201168"/>
+            <a:off x="731520" y="2121408"/>
+            <a:ext cx="4297680" cy="457200"/>
           </a:xfrm>
           <a:prstGeom prst="rect">
             <a:avLst/>
@@ -13159,35 +13721,35 @@
           </a:bodyPr>
           <a:lstStyle/>
           <a:p>
-            <a:pPr algn="ctr"/>
-            <a:r>
-              <a:rPr sz="900" b="0">
-                <a:solidFill>
-                  <a:srgbClr val="03110D"/>
-                </a:solidFill>
-                <a:latin typeface="Calibri"/>
-              </a:rPr>
-              <a:t>text · photo · PDF/DOCX · quick-reply button</a:t>
-            </a:r>
-          </a:p>
-        </p:txBody>
-      </p:sp>
-      <p:sp>
-        <p:nvSpPr>
-          <p:cNvPr id="8" name="Down Arrow 7"/>
+            <a:pPr algn="l"/>
+            <a:r>
+              <a:rPr sz="1100" b="0">
+                <a:solidFill>
+                  <a:srgbClr val="8696A0"/>
+                </a:solidFill>
+                <a:latin typeface="Calibri"/>
+              </a:rPr>
+              <a:t>LoRA on gpt-oss-120b, trained on educator-reviewed pilot data</a:t>
+            </a:r>
+          </a:p>
+        </p:txBody>
+      </p:sp>
+      <p:sp>
+        <p:nvSpPr>
+          <p:cNvPr id="8" name="Rounded Rectangle 7"/>
           <p:cNvSpPr/>
           <p:nvPr/>
         </p:nvSpPr>
         <p:spPr>
           <a:xfrm>
-            <a:off x="5943600" y="2103120"/>
-            <a:ext cx="274320" cy="201168"/>
-          </a:xfrm>
-          <a:prstGeom prst="downArrow">
+            <a:off x="5394960" y="2011679"/>
+            <a:ext cx="1554480" cy="365760"/>
+          </a:xfrm>
+          <a:prstGeom prst="roundRect">
             <a:avLst/>
           </a:prstGeom>
           <a:solidFill>
-            <a:srgbClr val="00A884"/>
+            <a:srgbClr val="111B21"/>
           </a:solidFill>
           <a:ln>
             <a:noFill/>
@@ -13208,10 +13770,18 @@
           </a:fontRef>
         </p:style>
         <p:txBody>
-          <a:bodyPr rtlCol="0" anchor="ctr"/>
+          <a:bodyPr rtlCol="0" anchor="ctr" lIns="137160" rIns="137160"/>
           <a:lstStyle/>
           <a:p>
             <a:pPr algn="ctr"/>
+            <a:r>
+              <a:rPr sz="900" b="1">
+                <a:solidFill>
+                  <a:srgbClr val="8696A0"/>
+                </a:solidFill>
+              </a:rPr>
+              <a:t>POST-PILOT</a:t>
+            </a:r>
           </a:p>
         </p:txBody>
       </p:sp>
@@ -13223,17 +13793,19 @@
         </p:nvSpPr>
         <p:spPr>
           <a:xfrm>
-            <a:off x="3200400" y="2322576"/>
-            <a:ext cx="5760720" cy="502920"/>
+            <a:off x="548640" y="2743200"/>
+            <a:ext cx="6583680" cy="868680"/>
           </a:xfrm>
           <a:prstGeom prst="roundRect">
             <a:avLst/>
           </a:prstGeom>
           <a:solidFill>
-            <a:srgbClr val="FFB347"/>
+            <a:srgbClr val="1D303C"/>
           </a:solidFill>
-          <a:ln>
-            <a:noFill/>
+          <a:ln w="12700">
+            <a:solidFill>
+              <a:srgbClr val="8696A0"/>
+            </a:solidFill>
           </a:ln>
         </p:spPr>
         <p:style>
@@ -13264,8 +13836,8 @@
         </p:nvSpPr>
         <p:spPr>
           <a:xfrm>
-            <a:off x="3337560" y="2368296"/>
-            <a:ext cx="5486400" cy="274320"/>
+            <a:off x="731520" y="2788920"/>
+            <a:ext cx="6217920" cy="365760"/>
           </a:xfrm>
           <a:prstGeom prst="rect">
             <a:avLst/>
@@ -13278,15 +13850,15 @@
           </a:bodyPr>
           <a:lstStyle/>
           <a:p>
-            <a:pPr algn="ctr"/>
+            <a:pPr algn="l"/>
             <a:r>
               <a:rPr sz="1300" b="1">
                 <a:solidFill>
-                  <a:srgbClr val="03110D"/>
-                </a:solidFill>
-                <a:latin typeface="Calibri"/>
-              </a:rPr>
-              <a:t>2 · Channel handler  ·  app/channels/*.py</a:t>
+                  <a:srgbClr val="FFFFFF"/>
+                </a:solidFill>
+                <a:latin typeface="Calibri"/>
+              </a:rPr>
+              <a:t>Layer 3 · RAG over DBE CAPS PDF + NSC past papers</a:t>
             </a:r>
           </a:p>
         </p:txBody>
@@ -13299,8 +13871,8 @@
         </p:nvSpPr>
         <p:spPr>
           <a:xfrm>
-            <a:off x="3337560" y="2615184"/>
-            <a:ext cx="5486400" cy="201168"/>
+            <a:off x="731520" y="3127248"/>
+            <a:ext cx="4297680" cy="457200"/>
           </a:xfrm>
           <a:prstGeom prst="rect">
             <a:avLst/>
@@ -13313,35 +13885,35 @@
           </a:bodyPr>
           <a:lstStyle/>
           <a:p>
-            <a:pPr algn="ctr"/>
-            <a:r>
-              <a:rPr sz="900" b="0">
-                <a:solidFill>
-                  <a:srgbClr val="03110D"/>
-                </a:solidFill>
-                <a:latin typeface="Calibri"/>
-              </a:rPr>
-              <a:t>Normalises to InboundMessage schema</a:t>
-            </a:r>
-          </a:p>
-        </p:txBody>
-      </p:sp>
-      <p:sp>
-        <p:nvSpPr>
-          <p:cNvPr id="12" name="Down Arrow 11"/>
+            <a:pPr algn="l"/>
+            <a:r>
+              <a:rPr sz="1100" b="0">
+                <a:solidFill>
+                  <a:srgbClr val="8696A0"/>
+                </a:solidFill>
+                <a:latin typeface="Calibri"/>
+              </a:rPr>
+              <a:t>Retrieval-augmented generation · in-country vector DB · cite section numbers</a:t>
+            </a:r>
+          </a:p>
+        </p:txBody>
+      </p:sp>
+      <p:sp>
+        <p:nvSpPr>
+          <p:cNvPr id="12" name="Rounded Rectangle 11"/>
           <p:cNvSpPr/>
           <p:nvPr/>
         </p:nvSpPr>
         <p:spPr>
           <a:xfrm>
-            <a:off x="5943600" y="2825496"/>
-            <a:ext cx="274320" cy="201168"/>
-          </a:xfrm>
-          <a:prstGeom prst="downArrow">
+            <a:off x="5394960" y="3017520"/>
+            <a:ext cx="1554480" cy="365760"/>
+          </a:xfrm>
+          <a:prstGeom prst="roundRect">
             <a:avLst/>
           </a:prstGeom>
           <a:solidFill>
-            <a:srgbClr val="00A884"/>
+            <a:srgbClr val="111B21"/>
           </a:solidFill>
           <a:ln>
             <a:noFill/>
@@ -13362,10 +13934,18 @@
           </a:fontRef>
         </p:style>
         <p:txBody>
-          <a:bodyPr rtlCol="0" anchor="ctr"/>
+          <a:bodyPr rtlCol="0" anchor="ctr" lIns="137160" rIns="137160"/>
           <a:lstStyle/>
           <a:p>
             <a:pPr algn="ctr"/>
+            <a:r>
+              <a:rPr sz="900" b="1">
+                <a:solidFill>
+                  <a:srgbClr val="FFE9B8"/>
+                </a:solidFill>
+              </a:rPr>
+              <a:t>SPONSORED PILOT</a:t>
+            </a:r>
           </a:p>
         </p:txBody>
       </p:sp>
@@ -13377,17 +13957,19 @@
         </p:nvSpPr>
         <p:spPr>
           <a:xfrm>
-            <a:off x="3200400" y="3044952"/>
-            <a:ext cx="5760720" cy="502920"/>
+            <a:off x="548640" y="3749039"/>
+            <a:ext cx="6583680" cy="868680"/>
           </a:xfrm>
           <a:prstGeom prst="roundRect">
             <a:avLst/>
           </a:prstGeom>
           <a:solidFill>
-            <a:srgbClr val="9CFF8C"/>
+            <a:srgbClr val="213845"/>
           </a:solidFill>
-          <a:ln>
-            <a:noFill/>
+          <a:ln w="12700">
+            <a:solidFill>
+              <a:srgbClr val="8696A0"/>
+            </a:solidFill>
           </a:ln>
         </p:spPr>
         <p:style>
@@ -13418,8 +14000,8 @@
         </p:nvSpPr>
         <p:spPr>
           <a:xfrm>
-            <a:off x="3337560" y="3090672"/>
-            <a:ext cx="5486400" cy="274320"/>
+            <a:off x="731520" y="3794759"/>
+            <a:ext cx="6217920" cy="365760"/>
           </a:xfrm>
           <a:prstGeom prst="rect">
             <a:avLst/>
@@ -13432,15 +14014,15 @@
           </a:bodyPr>
           <a:lstStyle/>
           <a:p>
-            <a:pPr algn="ctr"/>
+            <a:pPr algn="l"/>
             <a:r>
               <a:rPr sz="1300" b="1">
                 <a:solidFill>
-                  <a:srgbClr val="03110D"/>
-                </a:solidFill>
-                <a:latin typeface="Calibri"/>
-              </a:rPr>
-              <a:t>3 · Tutor Engine  ·  app/tutor/engine.py</a:t>
+                  <a:srgbClr val="FFFFFF"/>
+                </a:solidFill>
+                <a:latin typeface="Calibri"/>
+              </a:rPr>
+              <a:t>Layer 2 · Curriculum knowledge base + topic classifier</a:t>
             </a:r>
           </a:p>
         </p:txBody>
@@ -13453,8 +14035,8 @@
         </p:nvSpPr>
         <p:spPr>
           <a:xfrm>
-            <a:off x="3337560" y="3337560"/>
-            <a:ext cx="5486400" cy="201168"/>
+            <a:off x="731520" y="4133087"/>
+            <a:ext cx="4297680" cy="457200"/>
           </a:xfrm>
           <a:prstGeom prst="rect">
             <a:avLst/>
@@ -13467,35 +14049,35 @@
           </a:bodyPr>
           <a:lstStyle/>
           <a:p>
-            <a:pPr algn="ctr"/>
-            <a:r>
-              <a:rPr sz="900" b="0">
-                <a:solidFill>
-                  <a:srgbClr val="03110D"/>
-                </a:solidFill>
-                <a:latin typeface="Calibri"/>
-              </a:rPr>
-              <a:t>Routes by input type · session state · language / grade</a:t>
-            </a:r>
-          </a:p>
-        </p:txBody>
-      </p:sp>
-      <p:sp>
-        <p:nvSpPr>
-          <p:cNvPr id="16" name="Down Arrow 15"/>
+            <a:pPr algn="l"/>
+            <a:r>
+              <a:rPr sz="1100" b="0">
+                <a:solidFill>
+                  <a:srgbClr val="8696A0"/>
+                </a:solidFill>
+                <a:latin typeface="Calibri"/>
+              </a:rPr>
+              <a:t>Grade × topic scope + sub-skills injected into every prompt</a:t>
+            </a:r>
+          </a:p>
+        </p:txBody>
+      </p:sp>
+      <p:sp>
+        <p:nvSpPr>
+          <p:cNvPr id="16" name="Rounded Rectangle 15"/>
           <p:cNvSpPr/>
           <p:nvPr/>
         </p:nvSpPr>
         <p:spPr>
           <a:xfrm>
-            <a:off x="5943600" y="3547872"/>
-            <a:ext cx="274320" cy="201168"/>
-          </a:xfrm>
-          <a:prstGeom prst="downArrow">
+            <a:off x="5394960" y="4023359"/>
+            <a:ext cx="1554480" cy="365760"/>
+          </a:xfrm>
+          <a:prstGeom prst="roundRect">
             <a:avLst/>
           </a:prstGeom>
           <a:solidFill>
-            <a:srgbClr val="00A884"/>
+            <a:srgbClr val="111B21"/>
           </a:solidFill>
           <a:ln>
             <a:noFill/>
@@ -13516,10 +14098,18 @@
           </a:fontRef>
         </p:style>
         <p:txBody>
-          <a:bodyPr rtlCol="0" anchor="ctr"/>
+          <a:bodyPr rtlCol="0" anchor="ctr" lIns="137160" rIns="137160"/>
           <a:lstStyle/>
           <a:p>
             <a:pPr algn="ctr"/>
+            <a:r>
+              <a:rPr sz="900" b="1">
+                <a:solidFill>
+                  <a:srgbClr val="FFE9B8"/>
+                </a:solidFill>
+              </a:rPr>
+              <a:t>NEXT SPRINT</a:t>
+            </a:r>
           </a:p>
         </p:txBody>
       </p:sp>
@@ -13531,18 +14121,18 @@
         </p:nvSpPr>
         <p:spPr>
           <a:xfrm>
-            <a:off x="3200400" y="3767328"/>
-            <a:ext cx="5760720" cy="685800"/>
+            <a:off x="548640" y="4754879"/>
+            <a:ext cx="6583680" cy="868680"/>
           </a:xfrm>
           <a:prstGeom prst="roundRect">
             <a:avLst/>
           </a:prstGeom>
           <a:solidFill>
-            <a:srgbClr val="111B21"/>
+            <a:srgbClr val="00A884"/>
           </a:solidFill>
-          <a:ln w="6350">
+          <a:ln w="25400">
             <a:solidFill>
-              <a:srgbClr val="8696A0"/>
+              <a:srgbClr val="9CFF8C"/>
             </a:solidFill>
           </a:ln>
         </p:spPr>
@@ -13574,8 +14164,8 @@
         </p:nvSpPr>
         <p:spPr>
           <a:xfrm>
-            <a:off x="3291840" y="3803904"/>
-            <a:ext cx="5577840" cy="182880"/>
+            <a:off x="731520" y="4800599"/>
+            <a:ext cx="6217920" cy="365760"/>
           </a:xfrm>
           <a:prstGeom prst="rect">
             <a:avLst/>
@@ -13588,35 +14178,70 @@
           </a:bodyPr>
           <a:lstStyle/>
           <a:p>
-            <a:pPr algn="ctr"/>
-            <a:r>
-              <a:rPr sz="1000" b="1">
-                <a:solidFill>
-                  <a:srgbClr val="9CFF8C"/>
-                </a:solidFill>
-                <a:latin typeface="Calibri"/>
-              </a:rPr>
-              <a:t>4 · Router decision</a:t>
-            </a:r>
-          </a:p>
-        </p:txBody>
-      </p:sp>
-      <p:sp>
-        <p:nvSpPr>
-          <p:cNvPr id="19" name="Rounded Rectangle 18"/>
+            <a:pPr algn="l"/>
+            <a:r>
+              <a:rPr sz="1300" b="1">
+                <a:solidFill>
+                  <a:srgbClr val="03110D"/>
+                </a:solidFill>
+                <a:latin typeface="Calibri"/>
+              </a:rPr>
+              <a:t>★ Layer 1 · CAPS system-prompt engineering</a:t>
+            </a:r>
+          </a:p>
+        </p:txBody>
+      </p:sp>
+      <p:sp>
+        <p:nvSpPr>
+          <p:cNvPr id="19" name="TextBox 18"/>
+          <p:cNvSpPr txBox="1"/>
+          <p:nvPr/>
+        </p:nvSpPr>
+        <p:spPr>
+          <a:xfrm>
+            <a:off x="731520" y="5138927"/>
+            <a:ext cx="4297680" cy="457200"/>
+          </a:xfrm>
+          <a:prstGeom prst="rect">
+            <a:avLst/>
+          </a:prstGeom>
+          <a:noFill/>
+        </p:spPr>
+        <p:txBody>
+          <a:bodyPr wrap="square">
+            <a:spAutoFit/>
+          </a:bodyPr>
+          <a:lstStyle/>
+          <a:p>
+            <a:pPr algn="l"/>
+            <a:r>
+              <a:rPr sz="1100" b="0">
+                <a:solidFill>
+                  <a:srgbClr val="03110D"/>
+                </a:solidFill>
+                <a:latin typeface="Calibri"/>
+              </a:rPr>
+              <a:t>NSC (M)/(A)/(CA) mark codes · exact-form notation · DBE phrasing · grade scope</a:t>
+            </a:r>
+          </a:p>
+        </p:txBody>
+      </p:sp>
+      <p:sp>
+        <p:nvSpPr>
+          <p:cNvPr id="20" name="Rounded Rectangle 19"/>
           <p:cNvSpPr/>
           <p:nvPr/>
         </p:nvSpPr>
         <p:spPr>
           <a:xfrm>
-            <a:off x="3310128" y="4023360"/>
-            <a:ext cx="1071676" cy="182880"/>
+            <a:off x="5394960" y="5029199"/>
+            <a:ext cx="1554480" cy="365760"/>
           </a:xfrm>
           <a:prstGeom prst="roundRect">
             <a:avLst/>
           </a:prstGeom>
           <a:solidFill>
-            <a:srgbClr val="FFE066"/>
+            <a:srgbClr val="03110D"/>
           </a:solidFill>
           <a:ln>
             <a:noFill/>
@@ -13637,32 +14262,31 @@
           </a:fontRef>
         </p:style>
         <p:txBody>
-          <a:bodyPr rtlCol="0" anchor="ctr" lIns="27432" rIns="27432" tIns="18288" bIns="18288"/>
+          <a:bodyPr rtlCol="0" anchor="ctr" lIns="137160" rIns="137160"/>
           <a:lstStyle/>
           <a:p>
             <a:pPr algn="ctr"/>
             <a:r>
-              <a:rPr sz="900" b="1">
-                <a:solidFill>
-                  <a:srgbClr val="03110D"/>
-                </a:solidFill>
-                <a:latin typeface="Calibri"/>
-              </a:rPr>
-              <a:t>📝 Past-paper?</a:t>
-            </a:r>
-          </a:p>
-        </p:txBody>
-      </p:sp>
-      <p:sp>
-        <p:nvSpPr>
-          <p:cNvPr id="20" name="TextBox 19"/>
+              <a:rPr sz="1000" b="1">
+                <a:solidFill>
+                  <a:srgbClr val="9CFF8C"/>
+                </a:solidFill>
+              </a:rPr>
+              <a:t>★ LIVE ★</a:t>
+            </a:r>
+          </a:p>
+        </p:txBody>
+      </p:sp>
+      <p:sp>
+        <p:nvSpPr>
+          <p:cNvPr id="21" name="TextBox 20"/>
           <p:cNvSpPr txBox="1"/>
           <p:nvPr/>
         </p:nvSpPr>
         <p:spPr>
           <a:xfrm>
-            <a:off x="3310128" y="4224528"/>
-            <a:ext cx="1071676" cy="164592"/>
+            <a:off x="7452360" y="1737360"/>
+            <a:ext cx="4160520" cy="365760"/>
           </a:xfrm>
           <a:prstGeom prst="rect">
             <a:avLst/>
@@ -13675,420 +14299,29 @@
           </a:bodyPr>
           <a:lstStyle/>
           <a:p>
-            <a:pPr algn="ctr"/>
-            <a:r>
-              <a:rPr sz="700" b="0">
+            <a:pPr algn="l"/>
+            <a:r>
+              <a:rPr sz="1200" b="1">
                 <a:solidFill>
                   <a:srgbClr val="8696A0"/>
                 </a:solidFill>
                 <a:latin typeface="Calibri"/>
               </a:rPr>
-              <a:t>canonical answer + memo</a:t>
-            </a:r>
-          </a:p>
-        </p:txBody>
-      </p:sp>
-      <p:sp>
-        <p:nvSpPr>
-          <p:cNvPr id="21" name="Rounded Rectangle 20"/>
+              <a:t>Before Layer 1 (raw LLM)</a:t>
+            </a:r>
+          </a:p>
+        </p:txBody>
+      </p:sp>
+      <p:sp>
+        <p:nvSpPr>
+          <p:cNvPr id="22" name="Rounded Rectangle 21"/>
           <p:cNvSpPr/>
           <p:nvPr/>
         </p:nvSpPr>
         <p:spPr>
           <a:xfrm>
-            <a:off x="4427524" y="4023360"/>
-            <a:ext cx="1071676" cy="182880"/>
-          </a:xfrm>
-          <a:prstGeom prst="roundRect">
-            <a:avLst/>
-          </a:prstGeom>
-          <a:solidFill>
-            <a:srgbClr val="66B2FF"/>
-          </a:solidFill>
-          <a:ln>
-            <a:noFill/>
-          </a:ln>
-        </p:spPr>
-        <p:style>
-          <a:lnRef idx="1">
-            <a:schemeClr val="accent1"/>
-          </a:lnRef>
-          <a:fillRef idx="3">
-            <a:schemeClr val="accent1"/>
-          </a:fillRef>
-          <a:effectRef idx="2">
-            <a:schemeClr val="accent1"/>
-          </a:effectRef>
-          <a:fontRef idx="minor">
-            <a:schemeClr val="lt1"/>
-          </a:fontRef>
-        </p:style>
-        <p:txBody>
-          <a:bodyPr rtlCol="0" anchor="ctr" lIns="27432" rIns="27432" tIns="18288" bIns="18288"/>
-          <a:lstStyle/>
-          <a:p>
-            <a:pPr algn="ctr"/>
-            <a:r>
-              <a:rPr sz="900" b="1">
-                <a:solidFill>
-                  <a:srgbClr val="03110D"/>
-                </a:solidFill>
-                <a:latin typeface="Calibri"/>
-              </a:rPr>
-              <a:t>🧮 Arithmetic?</a:t>
-            </a:r>
-          </a:p>
-        </p:txBody>
-      </p:sp>
-      <p:sp>
-        <p:nvSpPr>
-          <p:cNvPr id="22" name="TextBox 21"/>
-          <p:cNvSpPr txBox="1"/>
-          <p:nvPr/>
-        </p:nvSpPr>
-        <p:spPr>
-          <a:xfrm>
-            <a:off x="4427524" y="4224528"/>
-            <a:ext cx="1071676" cy="164592"/>
-          </a:xfrm>
-          <a:prstGeom prst="rect">
-            <a:avLst/>
-          </a:prstGeom>
-          <a:noFill/>
-        </p:spPr>
-        <p:txBody>
-          <a:bodyPr wrap="square">
-            <a:spAutoFit/>
-          </a:bodyPr>
-          <a:lstStyle/>
-          <a:p>
-            <a:pPr algn="ctr"/>
-            <a:r>
-              <a:rPr sz="700" b="0">
-                <a:solidFill>
-                  <a:srgbClr val="8696A0"/>
-                </a:solidFill>
-                <a:latin typeface="Calibri"/>
-              </a:rPr>
-              <a:t>deterministic evaluator</a:t>
-            </a:r>
-          </a:p>
-        </p:txBody>
-      </p:sp>
-      <p:sp>
-        <p:nvSpPr>
-          <p:cNvPr id="23" name="Rounded Rectangle 22"/>
-          <p:cNvSpPr/>
-          <p:nvPr/>
-        </p:nvSpPr>
-        <p:spPr>
-          <a:xfrm>
-            <a:off x="5544921" y="4023360"/>
-            <a:ext cx="1071676" cy="182880"/>
-          </a:xfrm>
-          <a:prstGeom prst="roundRect">
-            <a:avLst/>
-          </a:prstGeom>
-          <a:solidFill>
-            <a:srgbClr val="00A884"/>
-          </a:solidFill>
-          <a:ln>
-            <a:noFill/>
-          </a:ln>
-        </p:spPr>
-        <p:style>
-          <a:lnRef idx="1">
-            <a:schemeClr val="accent1"/>
-          </a:lnRef>
-          <a:fillRef idx="3">
-            <a:schemeClr val="accent1"/>
-          </a:fillRef>
-          <a:effectRef idx="2">
-            <a:schemeClr val="accent1"/>
-          </a:effectRef>
-          <a:fontRef idx="minor">
-            <a:schemeClr val="lt1"/>
-          </a:fontRef>
-        </p:style>
-        <p:txBody>
-          <a:bodyPr rtlCol="0" anchor="ctr" lIns="27432" rIns="27432" tIns="18288" bIns="18288"/>
-          <a:lstStyle/>
-          <a:p>
-            <a:pPr algn="ctr"/>
-            <a:r>
-              <a:rPr sz="900" b="1">
-                <a:solidFill>
-                  <a:srgbClr val="03110D"/>
-                </a:solidFill>
-                <a:latin typeface="Calibri"/>
-              </a:rPr>
-              <a:t>🔤 Equation?</a:t>
-            </a:r>
-          </a:p>
-        </p:txBody>
-      </p:sp>
-      <p:sp>
-        <p:nvSpPr>
-          <p:cNvPr id="24" name="TextBox 23"/>
-          <p:cNvSpPr txBox="1"/>
-          <p:nvPr/>
-        </p:nvSpPr>
-        <p:spPr>
-          <a:xfrm>
-            <a:off x="5544921" y="4224528"/>
-            <a:ext cx="1071676" cy="164592"/>
-          </a:xfrm>
-          <a:prstGeom prst="rect">
-            <a:avLst/>
-          </a:prstGeom>
-          <a:noFill/>
-        </p:spPr>
-        <p:txBody>
-          <a:bodyPr wrap="square">
-            <a:spAutoFit/>
-          </a:bodyPr>
-          <a:lstStyle/>
-          <a:p>
-            <a:pPr algn="ctr"/>
-            <a:r>
-              <a:rPr sz="700" b="0">
-                <a:solidFill>
-                  <a:srgbClr val="8696A0"/>
-                </a:solidFill>
-                <a:latin typeface="Calibri"/>
-              </a:rPr>
-              <a:t>math_analyzer (Python)</a:t>
-            </a:r>
-          </a:p>
-        </p:txBody>
-      </p:sp>
-      <p:sp>
-        <p:nvSpPr>
-          <p:cNvPr id="25" name="Rounded Rectangle 24"/>
-          <p:cNvSpPr/>
-          <p:nvPr/>
-        </p:nvSpPr>
-        <p:spPr>
-          <a:xfrm>
-            <a:off x="6662318" y="4023360"/>
-            <a:ext cx="1071676" cy="182880"/>
-          </a:xfrm>
-          <a:prstGeom prst="roundRect">
-            <a:avLst/>
-          </a:prstGeom>
-          <a:solidFill>
-            <a:srgbClr val="C89EFF"/>
-          </a:solidFill>
-          <a:ln>
-            <a:noFill/>
-          </a:ln>
-        </p:spPr>
-        <p:style>
-          <a:lnRef idx="1">
-            <a:schemeClr val="accent1"/>
-          </a:lnRef>
-          <a:fillRef idx="3">
-            <a:schemeClr val="accent1"/>
-          </a:fillRef>
-          <a:effectRef idx="2">
-            <a:schemeClr val="accent1"/>
-          </a:effectRef>
-          <a:fontRef idx="minor">
-            <a:schemeClr val="lt1"/>
-          </a:fontRef>
-        </p:style>
-        <p:txBody>
-          <a:bodyPr rtlCol="0" anchor="ctr" lIns="27432" rIns="27432" tIns="18288" bIns="18288"/>
-          <a:lstStyle/>
-          <a:p>
-            <a:pPr algn="ctr"/>
-            <a:r>
-              <a:rPr sz="900" b="1">
-                <a:solidFill>
-                  <a:srgbClr val="03110D"/>
-                </a:solidFill>
-                <a:latin typeface="Calibri"/>
-              </a:rPr>
-              <a:t>🖼️ Image?</a:t>
-            </a:r>
-          </a:p>
-        </p:txBody>
-      </p:sp>
-      <p:sp>
-        <p:nvSpPr>
-          <p:cNvPr id="26" name="TextBox 25"/>
-          <p:cNvSpPr txBox="1"/>
-          <p:nvPr/>
-        </p:nvSpPr>
-        <p:spPr>
-          <a:xfrm>
-            <a:off x="6662318" y="4224528"/>
-            <a:ext cx="1071676" cy="164592"/>
-          </a:xfrm>
-          <a:prstGeom prst="rect">
-            <a:avLst/>
-          </a:prstGeom>
-          <a:noFill/>
-        </p:spPr>
-        <p:txBody>
-          <a:bodyPr wrap="square">
-            <a:spAutoFit/>
-          </a:bodyPr>
-          <a:lstStyle/>
-          <a:p>
-            <a:pPr algn="ctr"/>
-            <a:r>
-              <a:rPr sz="700" b="0">
-                <a:solidFill>
-                  <a:srgbClr val="8696A0"/>
-                </a:solidFill>
-                <a:latin typeface="Calibri"/>
-              </a:rPr>
-              <a:t>vision LLM</a:t>
-            </a:r>
-          </a:p>
-        </p:txBody>
-      </p:sp>
-      <p:sp>
-        <p:nvSpPr>
-          <p:cNvPr id="27" name="Rounded Rectangle 26"/>
-          <p:cNvSpPr/>
-          <p:nvPr/>
-        </p:nvSpPr>
-        <p:spPr>
-          <a:xfrm>
-            <a:off x="7779715" y="4023360"/>
-            <a:ext cx="1071676" cy="182880"/>
-          </a:xfrm>
-          <a:prstGeom prst="roundRect">
-            <a:avLst/>
-          </a:prstGeom>
-          <a:solidFill>
-            <a:srgbClr val="FFB347"/>
-          </a:solidFill>
-          <a:ln>
-            <a:noFill/>
-          </a:ln>
-        </p:spPr>
-        <p:style>
-          <a:lnRef idx="1">
-            <a:schemeClr val="accent1"/>
-          </a:lnRef>
-          <a:fillRef idx="3">
-            <a:schemeClr val="accent1"/>
-          </a:fillRef>
-          <a:effectRef idx="2">
-            <a:schemeClr val="accent1"/>
-          </a:effectRef>
-          <a:fontRef idx="minor">
-            <a:schemeClr val="lt1"/>
-          </a:fontRef>
-        </p:style>
-        <p:txBody>
-          <a:bodyPr rtlCol="0" anchor="ctr" lIns="27432" rIns="27432" tIns="18288" bIns="18288"/>
-          <a:lstStyle/>
-          <a:p>
-            <a:pPr algn="ctr"/>
-            <a:r>
-              <a:rPr sz="900" b="1">
-                <a:solidFill>
-                  <a:srgbClr val="03110D"/>
-                </a:solidFill>
-                <a:latin typeface="Calibri"/>
-              </a:rPr>
-              <a:t>📄 Doc?</a:t>
-            </a:r>
-          </a:p>
-        </p:txBody>
-      </p:sp>
-      <p:sp>
-        <p:nvSpPr>
-          <p:cNvPr id="28" name="TextBox 27"/>
-          <p:cNvSpPr txBox="1"/>
-          <p:nvPr/>
-        </p:nvSpPr>
-        <p:spPr>
-          <a:xfrm>
-            <a:off x="7779715" y="4224528"/>
-            <a:ext cx="1071676" cy="164592"/>
-          </a:xfrm>
-          <a:prstGeom prst="rect">
-            <a:avLst/>
-          </a:prstGeom>
-          <a:noFill/>
-        </p:spPr>
-        <p:txBody>
-          <a:bodyPr wrap="square">
-            <a:spAutoFit/>
-          </a:bodyPr>
-          <a:lstStyle/>
-          <a:p>
-            <a:pPr algn="ctr"/>
-            <a:r>
-              <a:rPr sz="700" b="0">
-                <a:solidFill>
-                  <a:srgbClr val="8696A0"/>
-                </a:solidFill>
-                <a:latin typeface="Calibri"/>
-              </a:rPr>
-              <a:t>PDF/DOCX → LLM</a:t>
-            </a:r>
-          </a:p>
-        </p:txBody>
-      </p:sp>
-      <p:sp>
-        <p:nvSpPr>
-          <p:cNvPr id="29" name="Down Arrow 28"/>
-          <p:cNvSpPr/>
-          <p:nvPr/>
-        </p:nvSpPr>
-        <p:spPr>
-          <a:xfrm>
-            <a:off x="5943600" y="4453128"/>
-            <a:ext cx="274320" cy="201168"/>
-          </a:xfrm>
-          <a:prstGeom prst="downArrow">
-            <a:avLst/>
-          </a:prstGeom>
-          <a:solidFill>
-            <a:srgbClr val="00A884"/>
-          </a:solidFill>
-          <a:ln>
-            <a:noFill/>
-          </a:ln>
-        </p:spPr>
-        <p:style>
-          <a:lnRef idx="1">
-            <a:schemeClr val="accent1"/>
-          </a:lnRef>
-          <a:fillRef idx="3">
-            <a:schemeClr val="accent1"/>
-          </a:fillRef>
-          <a:effectRef idx="2">
-            <a:schemeClr val="accent1"/>
-          </a:effectRef>
-          <a:fontRef idx="minor">
-            <a:schemeClr val="lt1"/>
-          </a:fontRef>
-        </p:style>
-        <p:txBody>
-          <a:bodyPr rtlCol="0" anchor="ctr"/>
-          <a:lstStyle/>
-          <a:p>
-            <a:pPr algn="ctr"/>
-          </a:p>
-        </p:txBody>
-      </p:sp>
-      <p:sp>
-        <p:nvSpPr>
-          <p:cNvPr id="30" name="Rounded Rectangle 29"/>
-          <p:cNvSpPr/>
-          <p:nvPr/>
-        </p:nvSpPr>
-        <p:spPr>
-          <a:xfrm>
-            <a:off x="3200400" y="4672584"/>
-            <a:ext cx="5760720" cy="502920"/>
+            <a:off x="7452360" y="2148840"/>
+            <a:ext cx="4160520" cy="1508760"/>
           </a:xfrm>
           <a:prstGeom prst="roundRect">
             <a:avLst/>
@@ -14124,14 +14357,14 @@
       </p:sp>
       <p:sp>
         <p:nvSpPr>
-          <p:cNvPr id="31" name="TextBox 30"/>
+          <p:cNvPr id="23" name="TextBox 22"/>
           <p:cNvSpPr txBox="1"/>
           <p:nvPr/>
         </p:nvSpPr>
         <p:spPr>
           <a:xfrm>
-            <a:off x="3337560" y="4718304"/>
-            <a:ext cx="5486400" cy="274320"/>
+            <a:off x="7589520" y="2240280"/>
+            <a:ext cx="3886200" cy="1417320"/>
           </a:xfrm>
           <a:prstGeom prst="rect">
             <a:avLst/>
@@ -14144,29 +14377,32 @@
           </a:bodyPr>
           <a:lstStyle/>
           <a:p>
-            <a:pPr algn="ctr"/>
-            <a:r>
-              <a:rPr sz="1300" b="1">
-                <a:solidFill>
-                  <a:srgbClr val="9CFF8C"/>
-                </a:solidFill>
-                <a:latin typeface="Calibri"/>
-              </a:rPr>
-              <a:t>5 · AI Providers  ·  app/providers/*.py</a:t>
-            </a:r>
-          </a:p>
-        </p:txBody>
-      </p:sp>
-      <p:sp>
-        <p:nvSpPr>
-          <p:cNvPr id="32" name="TextBox 31"/>
+            <a:pPr algn="l"/>
+            <a:r>
+              <a:rPr sz="1000" b="0">
+                <a:solidFill>
+                  <a:srgbClr val="E9EDEF"/>
+                </a:solidFill>
+                <a:latin typeface="Calibri"/>
+              </a:rPr>
+              <a:t>Solve 2x² − 5x − 3 = 0
+Using the quadratic formula,
+x = (5 ± √49) / 4
+So x = 3 or x = −0.5</a:t>
+            </a:r>
+          </a:p>
+        </p:txBody>
+      </p:sp>
+      <p:sp>
+        <p:nvSpPr>
+          <p:cNvPr id="24" name="TextBox 23"/>
           <p:cNvSpPr txBox="1"/>
           <p:nvPr/>
         </p:nvSpPr>
         <p:spPr>
           <a:xfrm>
-            <a:off x="3337560" y="4965192"/>
-            <a:ext cx="5486400" cy="201168"/>
+            <a:off x="7452360" y="3794760"/>
+            <a:ext cx="4160520" cy="365760"/>
           </a:xfrm>
           <a:prstGeom prst="rect">
             <a:avLst/>
@@ -14179,38 +14415,40 @@
           </a:bodyPr>
           <a:lstStyle/>
           <a:p>
-            <a:pPr algn="ctr"/>
-            <a:r>
-              <a:rPr sz="900" b="0">
+            <a:pPr algn="l"/>
+            <a:r>
+              <a:rPr sz="1200" b="1">
                 <a:solidFill>
                   <a:srgbClr val="9CFF8C"/>
                 </a:solidFill>
                 <a:latin typeface="Calibri"/>
               </a:rPr>
-              <a:t>Reasoning · Vision · Translation (all pluggable)</a:t>
-            </a:r>
-          </a:p>
-        </p:txBody>
-      </p:sp>
-      <p:sp>
-        <p:nvSpPr>
-          <p:cNvPr id="33" name="Rounded Rectangle 32"/>
+              <a:t>After Layer 1 (CAPS-wrapped)</a:t>
+            </a:r>
+          </a:p>
+        </p:txBody>
+      </p:sp>
+      <p:sp>
+        <p:nvSpPr>
+          <p:cNvPr id="25" name="Rounded Rectangle 24"/>
           <p:cNvSpPr/>
           <p:nvPr/>
         </p:nvSpPr>
         <p:spPr>
           <a:xfrm>
-            <a:off x="9235440" y="4718304"/>
-            <a:ext cx="2880360" cy="411480"/>
+            <a:off x="7452360" y="4206240"/>
+            <a:ext cx="4160520" cy="1965960"/>
           </a:xfrm>
           <a:prstGeom prst="roundRect">
             <a:avLst/>
           </a:prstGeom>
           <a:solidFill>
-            <a:srgbClr val="00A884"/>
+            <a:srgbClr val="111B21"/>
           </a:solidFill>
-          <a:ln>
-            <a:noFill/>
+          <a:ln w="25400">
+            <a:solidFill>
+              <a:srgbClr val="00A884"/>
+            </a:solidFill>
           </a:ln>
         </p:spPr>
         <p:style>
@@ -14228,158 +14466,21 @@
           </a:fontRef>
         </p:style>
         <p:txBody>
-          <a:bodyPr rtlCol="0" anchor="ctr" lIns="137160" rIns="137160"/>
-          <a:lstStyle/>
-          <a:p>
-            <a:pPr algn="ctr"/>
-            <a:r>
-              <a:rPr sz="1100" b="1">
-                <a:solidFill>
-                  <a:srgbClr val="03110D"/>
-                </a:solidFill>
-              </a:rPr>
-              <a:t>Groq / Dell AI Factory NIM</a:t>
-            </a:r>
-          </a:p>
-        </p:txBody>
-      </p:sp>
-      <p:sp>
-        <p:nvSpPr>
-          <p:cNvPr id="34" name="Right Arrow 33"/>
-          <p:cNvSpPr/>
-          <p:nvPr/>
-        </p:nvSpPr>
-        <p:spPr>
-          <a:xfrm>
-            <a:off x="8961120" y="4832604"/>
-            <a:ext cx="274320" cy="182880"/>
-          </a:xfrm>
-          <a:prstGeom prst="rightArrow">
-            <a:avLst/>
-          </a:prstGeom>
-          <a:solidFill>
-            <a:srgbClr val="00A884"/>
-          </a:solidFill>
-          <a:ln>
-            <a:noFill/>
-          </a:ln>
-        </p:spPr>
-        <p:style>
-          <a:lnRef idx="1">
-            <a:schemeClr val="accent1"/>
-          </a:lnRef>
-          <a:fillRef idx="3">
-            <a:schemeClr val="accent1"/>
-          </a:fillRef>
-          <a:effectRef idx="2">
-            <a:schemeClr val="accent1"/>
-          </a:effectRef>
-          <a:fontRef idx="minor">
-            <a:schemeClr val="lt1"/>
-          </a:fontRef>
-        </p:style>
-        <p:txBody>
           <a:bodyPr rtlCol="0" anchor="ctr"/>
           <a:lstStyle/>
-          <a:p>
-            <a:pPr algn="ctr"/>
-          </a:p>
-        </p:txBody>
-      </p:sp>
-      <p:sp>
-        <p:nvSpPr>
-          <p:cNvPr id="35" name="Down Arrow 34"/>
-          <p:cNvSpPr/>
-          <p:nvPr/>
-        </p:nvSpPr>
-        <p:spPr>
-          <a:xfrm>
-            <a:off x="5943600" y="5175504"/>
-            <a:ext cx="274320" cy="201168"/>
-          </a:xfrm>
-          <a:prstGeom prst="downArrow">
-            <a:avLst/>
-          </a:prstGeom>
-          <a:solidFill>
-            <a:srgbClr val="00A884"/>
-          </a:solidFill>
-          <a:ln>
-            <a:noFill/>
-          </a:ln>
-        </p:spPr>
-        <p:style>
-          <a:lnRef idx="1">
-            <a:schemeClr val="accent1"/>
-          </a:lnRef>
-          <a:fillRef idx="3">
-            <a:schemeClr val="accent1"/>
-          </a:fillRef>
-          <a:effectRef idx="2">
-            <a:schemeClr val="accent1"/>
-          </a:effectRef>
-          <a:fontRef idx="minor">
-            <a:schemeClr val="lt1"/>
-          </a:fontRef>
-        </p:style>
-        <p:txBody>
-          <a:bodyPr rtlCol="0" anchor="ctr"/>
-          <a:lstStyle/>
-          <a:p>
-            <a:pPr algn="ctr"/>
-          </a:p>
-        </p:txBody>
-      </p:sp>
-      <p:sp>
-        <p:nvSpPr>
-          <p:cNvPr id="36" name="Rounded Rectangle 35"/>
-          <p:cNvSpPr/>
-          <p:nvPr/>
-        </p:nvSpPr>
-        <p:spPr>
-          <a:xfrm>
-            <a:off x="3200400" y="5394960"/>
-            <a:ext cx="5760720" cy="502920"/>
-          </a:xfrm>
-          <a:prstGeom prst="roundRect">
-            <a:avLst/>
-          </a:prstGeom>
-          <a:solidFill>
-            <a:srgbClr val="00A884"/>
-          </a:solidFill>
-          <a:ln>
-            <a:noFill/>
-          </a:ln>
-        </p:spPr>
-        <p:style>
-          <a:lnRef idx="1">
-            <a:schemeClr val="accent1"/>
-          </a:lnRef>
-          <a:fillRef idx="3">
-            <a:schemeClr val="accent1"/>
-          </a:fillRef>
-          <a:effectRef idx="2">
-            <a:schemeClr val="accent1"/>
-          </a:effectRef>
-          <a:fontRef idx="minor">
-            <a:schemeClr val="lt1"/>
-          </a:fontRef>
-        </p:style>
-        <p:txBody>
-          <a:bodyPr rtlCol="0" anchor="ctr"/>
-          <a:lstStyle/>
           <a:p/>
         </p:txBody>
       </p:sp>
       <p:sp>
         <p:nvSpPr>
-          <p:cNvPr id="37" name="TextBox 36"/>
+          <p:cNvPr id="26" name="TextBox 25"/>
           <p:cNvSpPr txBox="1"/>
           <p:nvPr/>
         </p:nvSpPr>
         <p:spPr>
           <a:xfrm>
-            <a:off x="3337560" y="5440680"/>
-            <a:ext cx="5486400" cy="274320"/>
+            <a:off x="7589520" y="4297680"/>
+            <a:ext cx="3886200" cy="1874519"/>
           </a:xfrm>
           <a:prstGeom prst="rect">
             <a:avLst/>
@@ -14392,29 +14493,33 @@
           </a:bodyPr>
           <a:lstStyle/>
           <a:p>
-            <a:pPr algn="ctr"/>
-            <a:r>
-              <a:rPr sz="1300" b="1">
-                <a:solidFill>
-                  <a:srgbClr val="03110D"/>
-                </a:solidFill>
-                <a:latin typeface="Calibri"/>
-              </a:rPr>
-              <a:t>6 · Response back to learner</a:t>
-            </a:r>
-          </a:p>
-        </p:txBody>
-      </p:sp>
-      <p:sp>
-        <p:nvSpPr>
-          <p:cNvPr id="38" name="TextBox 37"/>
+            <a:pPr algn="l"/>
+            <a:r>
+              <a:rPr sz="1000" b="0">
+                <a:solidFill>
+                  <a:srgbClr val="9CFF8C"/>
+                </a:solidFill>
+                <a:latin typeface="Calibri"/>
+              </a:rPr>
+              <a:t>Solve for x:  2x² − 5x − 3 = 0
+b² − 4ac = 25 + 24 = 49    (M)
+x = (5 ± √49) / (2·2)        (M)
+x = 3  or  x = −½            (A)(A)
+(CAPS Grade 11 — Quadratic equations)</a:t>
+            </a:r>
+          </a:p>
+        </p:txBody>
+      </p:sp>
+      <p:sp>
+        <p:nvSpPr>
+          <p:cNvPr id="27" name="TextBox 26"/>
           <p:cNvSpPr txBox="1"/>
           <p:nvPr/>
         </p:nvSpPr>
         <p:spPr>
           <a:xfrm>
-            <a:off x="3337560" y="5687568"/>
-            <a:ext cx="5486400" cy="201168"/>
+            <a:off x="548640" y="6263640"/>
+            <a:ext cx="11064240" cy="365760"/>
           </a:xfrm>
           <a:prstGeom prst="rect">
             <a:avLst/>
@@ -14429,91 +14534,13 @@
           <a:p>
             <a:pPr algn="ctr"/>
             <a:r>
-              <a:rPr sz="900" b="0">
-                <a:solidFill>
-                  <a:srgbClr val="03110D"/>
-                </a:solidFill>
-                <a:latin typeface="Calibri"/>
-              </a:rPr>
-              <a:t>TutorResponse → Channel serialiser → learner</a:t>
-            </a:r>
-          </a:p>
-        </p:txBody>
-      </p:sp>
-      <p:sp>
-        <p:nvSpPr>
-          <p:cNvPr id="39" name="Rounded Rectangle 38"/>
-          <p:cNvSpPr/>
-          <p:nvPr/>
-        </p:nvSpPr>
-        <p:spPr>
-          <a:xfrm>
-            <a:off x="548640" y="6263640"/>
-            <a:ext cx="11064240" cy="411480"/>
-          </a:xfrm>
-          <a:prstGeom prst="roundRect">
-            <a:avLst/>
-          </a:prstGeom>
-          <a:solidFill>
-            <a:srgbClr val="111B21"/>
-          </a:solidFill>
-          <a:ln w="12700">
-            <a:solidFill>
-              <a:srgbClr val="00A884"/>
-            </a:solidFill>
-          </a:ln>
-        </p:spPr>
-        <p:style>
-          <a:lnRef idx="1">
-            <a:schemeClr val="accent1"/>
-          </a:lnRef>
-          <a:fillRef idx="3">
-            <a:schemeClr val="accent1"/>
-          </a:fillRef>
-          <a:effectRef idx="2">
-            <a:schemeClr val="accent1"/>
-          </a:effectRef>
-          <a:fontRef idx="minor">
-            <a:schemeClr val="lt1"/>
-          </a:fontRef>
-        </p:style>
-        <p:txBody>
-          <a:bodyPr rtlCol="0" anchor="ctr"/>
-          <a:lstStyle/>
-          <a:p/>
-        </p:txBody>
-      </p:sp>
-      <p:sp>
-        <p:nvSpPr>
-          <p:cNvPr id="40" name="TextBox 39"/>
-          <p:cNvSpPr txBox="1"/>
-          <p:nvPr/>
-        </p:nvSpPr>
-        <p:spPr>
-          <a:xfrm>
-            <a:off x="548640" y="6318503"/>
-            <a:ext cx="11064240" cy="320040"/>
-          </a:xfrm>
-          <a:prstGeom prst="rect">
-            <a:avLst/>
-          </a:prstGeom>
-          <a:noFill/>
-        </p:spPr>
-        <p:txBody>
-          <a:bodyPr wrap="square">
-            <a:spAutoFit/>
-          </a:bodyPr>
-          <a:lstStyle/>
-          <a:p>
-            <a:pPr algn="ctr"/>
-            <a:r>
-              <a:rPr sz="1100" b="1">
-                <a:solidFill>
-                  <a:srgbClr val="9CFF8C"/>
-                </a:solidFill>
-                <a:latin typeface="Calibri"/>
-              </a:rPr>
-              <a:t>Every layer swappable · Every input format supported · No hallucination on deterministic maths</a:t>
+              <a:rPr sz="1200" b="1">
+                <a:solidFill>
+                  <a:srgbClr val="FFFFFF"/>
+                </a:solidFill>
+                <a:latin typeface="Calibri"/>
+              </a:rPr>
+              <a:t>Same model. Same question. CAPS-wrapped answers are what NSC markers actually score — that's the moat.</a:t>
             </a:r>
           </a:p>
         </p:txBody>
@@ -14552,8 +14579,8 @@
         </p:nvSpPr>
         <p:spPr>
           <a:xfrm>
-            <a:off x="548640" y="457200"/>
-            <a:ext cx="11064240" cy="548640"/>
+            <a:off x="548640" y="320040"/>
+            <a:ext cx="11064240" cy="457200"/>
           </a:xfrm>
           <a:prstGeom prst="rect">
             <a:avLst/>
@@ -14574,7 +14601,7 @@
                 </a:solidFill>
                 <a:latin typeface="Calibri"/>
               </a:rPr>
-              <a:t>Why this is different</a:t>
+              <a:t>Architecture · Data Flow</a:t>
             </a:r>
           </a:p>
         </p:txBody>
@@ -14587,8 +14614,8 @@
         </p:nvSpPr>
         <p:spPr>
           <a:xfrm>
-            <a:off x="548640" y="914400"/>
-            <a:ext cx="11064240" cy="914400"/>
+            <a:off x="548640" y="685800"/>
+            <a:ext cx="11064240" cy="548640"/>
           </a:xfrm>
           <a:prstGeom prst="rect">
             <a:avLst/>
@@ -14603,13 +14630,13 @@
           <a:p>
             <a:pPr algn="l"/>
             <a:r>
-              <a:rPr sz="3200" b="1">
+              <a:rPr sz="2400" b="1">
                 <a:solidFill>
                   <a:srgbClr val="FFFFFF"/>
                 </a:solidFill>
                 <a:latin typeface="Calibri"/>
               </a:rPr>
-              <a:t>Not a chatbot. A specialised SA tutor.</a:t>
+              <a:t>One request, end-to-end</a:t>
             </a:r>
           </a:p>
         </p:txBody>
@@ -14622,7 +14649,7 @@
         </p:nvSpPr>
         <p:spPr>
           <a:xfrm>
-            <a:off x="548640" y="2011680"/>
+            <a:off x="548640" y="1371600"/>
             <a:ext cx="3657600" cy="50800"/>
           </a:xfrm>
           <a:prstGeom prst="rect">
@@ -14659,14 +14686,55 @@
       </p:sp>
       <p:sp>
         <p:nvSpPr>
-          <p:cNvPr id="5" name="TextBox 4"/>
+          <p:cNvPr id="5" name="Rounded Rectangle 4"/>
+          <p:cNvSpPr/>
+          <p:nvPr/>
+        </p:nvSpPr>
+        <p:spPr>
+          <a:xfrm>
+            <a:off x="3200400" y="1600200"/>
+            <a:ext cx="5760720" cy="502920"/>
+          </a:xfrm>
+          <a:prstGeom prst="roundRect">
+            <a:avLst/>
+          </a:prstGeom>
+          <a:solidFill>
+            <a:srgbClr val="00A884"/>
+          </a:solidFill>
+          <a:ln>
+            <a:noFill/>
+          </a:ln>
+        </p:spPr>
+        <p:style>
+          <a:lnRef idx="1">
+            <a:schemeClr val="accent1"/>
+          </a:lnRef>
+          <a:fillRef idx="3">
+            <a:schemeClr val="accent1"/>
+          </a:fillRef>
+          <a:effectRef idx="2">
+            <a:schemeClr val="accent1"/>
+          </a:effectRef>
+          <a:fontRef idx="minor">
+            <a:schemeClr val="lt1"/>
+          </a:fontRef>
+        </p:style>
+        <p:txBody>
+          <a:bodyPr rtlCol="0" anchor="ctr"/>
+          <a:lstStyle/>
+          <a:p/>
+        </p:txBody>
+      </p:sp>
+      <p:sp>
+        <p:nvSpPr>
+          <p:cNvPr id="6" name="TextBox 5"/>
           <p:cNvSpPr txBox="1"/>
           <p:nvPr/>
         </p:nvSpPr>
         <p:spPr>
           <a:xfrm>
-            <a:off x="548640" y="2560320"/>
-            <a:ext cx="5486400" cy="548640"/>
+            <a:off x="3337560" y="1645920"/>
+            <a:ext cx="5486400" cy="274320"/>
           </a:xfrm>
           <a:prstGeom prst="rect">
             <a:avLst/>
@@ -14679,29 +14747,29 @@
           </a:bodyPr>
           <a:lstStyle/>
           <a:p>
-            <a:pPr algn="l"/>
-            <a:r>
-              <a:rPr sz="1600" b="0">
-                <a:solidFill>
-                  <a:srgbClr val="8696A0"/>
-                </a:solidFill>
-                <a:latin typeface="Calibri"/>
-              </a:rPr>
-              <a:t>Generic AI gives the answer.</a:t>
-            </a:r>
-          </a:p>
-        </p:txBody>
-      </p:sp>
-      <p:sp>
-        <p:nvSpPr>
-          <p:cNvPr id="6" name="TextBox 5"/>
+            <a:pPr algn="ctr"/>
+            <a:r>
+              <a:rPr sz="1300" b="1">
+                <a:solidFill>
+                  <a:srgbClr val="03110D"/>
+                </a:solidFill>
+                <a:latin typeface="Calibri"/>
+              </a:rPr>
+              <a:t>1 · Learner input  ·  WhatsApp / USSD / Browser</a:t>
+            </a:r>
+          </a:p>
+        </p:txBody>
+      </p:sp>
+      <p:sp>
+        <p:nvSpPr>
+          <p:cNvPr id="7" name="TextBox 6"/>
           <p:cNvSpPr txBox="1"/>
           <p:nvPr/>
         </p:nvSpPr>
         <p:spPr>
           <a:xfrm>
-            <a:off x="6126480" y="2560320"/>
-            <a:ext cx="5486400" cy="548640"/>
+            <a:off x="3337560" y="1892807"/>
+            <a:ext cx="5486400" cy="201168"/>
           </a:xfrm>
           <a:prstGeom prst="rect">
             <a:avLst/>
@@ -14714,29 +14782,113 @@
           </a:bodyPr>
           <a:lstStyle/>
           <a:p>
-            <a:pPr algn="l"/>
-            <a:r>
-              <a:rPr sz="1600" b="1">
-                <a:solidFill>
-                  <a:srgbClr val="9CFF8C"/>
-                </a:solidFill>
-                <a:latin typeface="Calibri"/>
-              </a:rPr>
-              <a:t>We refuse to — pedagogy enforced in code, not in a prompt.</a:t>
-            </a:r>
-          </a:p>
-        </p:txBody>
-      </p:sp>
-      <p:sp>
-        <p:nvSpPr>
-          <p:cNvPr id="7" name="TextBox 6"/>
+            <a:pPr algn="ctr"/>
+            <a:r>
+              <a:rPr sz="900" b="0">
+                <a:solidFill>
+                  <a:srgbClr val="03110D"/>
+                </a:solidFill>
+                <a:latin typeface="Calibri"/>
+              </a:rPr>
+              <a:t>text · photo · PDF/DOCX · quick-reply button</a:t>
+            </a:r>
+          </a:p>
+        </p:txBody>
+      </p:sp>
+      <p:sp>
+        <p:nvSpPr>
+          <p:cNvPr id="8" name="Down Arrow 7"/>
+          <p:cNvSpPr/>
+          <p:nvPr/>
+        </p:nvSpPr>
+        <p:spPr>
+          <a:xfrm>
+            <a:off x="5943600" y="2103120"/>
+            <a:ext cx="274320" cy="201168"/>
+          </a:xfrm>
+          <a:prstGeom prst="downArrow">
+            <a:avLst/>
+          </a:prstGeom>
+          <a:solidFill>
+            <a:srgbClr val="00A884"/>
+          </a:solidFill>
+          <a:ln>
+            <a:noFill/>
+          </a:ln>
+        </p:spPr>
+        <p:style>
+          <a:lnRef idx="1">
+            <a:schemeClr val="accent1"/>
+          </a:lnRef>
+          <a:fillRef idx="3">
+            <a:schemeClr val="accent1"/>
+          </a:fillRef>
+          <a:effectRef idx="2">
+            <a:schemeClr val="accent1"/>
+          </a:effectRef>
+          <a:fontRef idx="minor">
+            <a:schemeClr val="lt1"/>
+          </a:fontRef>
+        </p:style>
+        <p:txBody>
+          <a:bodyPr rtlCol="0" anchor="ctr"/>
+          <a:lstStyle/>
+          <a:p>
+            <a:pPr algn="ctr"/>
+          </a:p>
+        </p:txBody>
+      </p:sp>
+      <p:sp>
+        <p:nvSpPr>
+          <p:cNvPr id="9" name="Rounded Rectangle 8"/>
+          <p:cNvSpPr/>
+          <p:nvPr/>
+        </p:nvSpPr>
+        <p:spPr>
+          <a:xfrm>
+            <a:off x="3200400" y="2322576"/>
+            <a:ext cx="5760720" cy="502920"/>
+          </a:xfrm>
+          <a:prstGeom prst="roundRect">
+            <a:avLst/>
+          </a:prstGeom>
+          <a:solidFill>
+            <a:srgbClr val="FFB347"/>
+          </a:solidFill>
+          <a:ln>
+            <a:noFill/>
+          </a:ln>
+        </p:spPr>
+        <p:style>
+          <a:lnRef idx="1">
+            <a:schemeClr val="accent1"/>
+          </a:lnRef>
+          <a:fillRef idx="3">
+            <a:schemeClr val="accent1"/>
+          </a:fillRef>
+          <a:effectRef idx="2">
+            <a:schemeClr val="accent1"/>
+          </a:effectRef>
+          <a:fontRef idx="minor">
+            <a:schemeClr val="lt1"/>
+          </a:fontRef>
+        </p:style>
+        <p:txBody>
+          <a:bodyPr rtlCol="0" anchor="ctr"/>
+          <a:lstStyle/>
+          <a:p/>
+        </p:txBody>
+      </p:sp>
+      <p:sp>
+        <p:nvSpPr>
+          <p:cNvPr id="10" name="TextBox 9"/>
           <p:cNvSpPr txBox="1"/>
           <p:nvPr/>
         </p:nvSpPr>
         <p:spPr>
           <a:xfrm>
-            <a:off x="548640" y="3246120"/>
-            <a:ext cx="5486400" cy="548640"/>
+            <a:off x="3337560" y="2368296"/>
+            <a:ext cx="5486400" cy="274320"/>
           </a:xfrm>
           <a:prstGeom prst="rect">
             <a:avLst/>
@@ -14749,29 +14901,29 @@
           </a:bodyPr>
           <a:lstStyle/>
           <a:p>
-            <a:pPr algn="l"/>
-            <a:r>
-              <a:rPr sz="1600" b="0">
-                <a:solidFill>
-                  <a:srgbClr val="8696A0"/>
-                </a:solidFill>
-                <a:latin typeface="Calibri"/>
-              </a:rPr>
-              <a:t>Generic AI marks right or wrong.</a:t>
-            </a:r>
-          </a:p>
-        </p:txBody>
-      </p:sp>
-      <p:sp>
-        <p:nvSpPr>
-          <p:cNvPr id="8" name="TextBox 7"/>
+            <a:pPr algn="ctr"/>
+            <a:r>
+              <a:rPr sz="1300" b="1">
+                <a:solidFill>
+                  <a:srgbClr val="03110D"/>
+                </a:solidFill>
+                <a:latin typeface="Calibri"/>
+              </a:rPr>
+              <a:t>2 · Channel handler  ·  app/channels/*.py</a:t>
+            </a:r>
+          </a:p>
+        </p:txBody>
+      </p:sp>
+      <p:sp>
+        <p:nvSpPr>
+          <p:cNvPr id="11" name="TextBox 10"/>
           <p:cNvSpPr txBox="1"/>
           <p:nvPr/>
         </p:nvSpPr>
         <p:spPr>
           <a:xfrm>
-            <a:off x="6126480" y="3246120"/>
-            <a:ext cx="5486400" cy="548640"/>
+            <a:off x="3337560" y="2615184"/>
+            <a:ext cx="5486400" cy="201168"/>
           </a:xfrm>
           <a:prstGeom prst="rect">
             <a:avLst/>
@@ -14784,29 +14936,113 @@
           </a:bodyPr>
           <a:lstStyle/>
           <a:p>
-            <a:pPr algn="l"/>
-            <a:r>
-              <a:rPr sz="1600" b="1">
-                <a:solidFill>
-                  <a:srgbClr val="9CFF8C"/>
-                </a:solidFill>
-                <a:latin typeface="Calibri"/>
-              </a:rPr>
-              <a:t>We diagnose the exact step where thinking broke + the misconception.</a:t>
-            </a:r>
-          </a:p>
-        </p:txBody>
-      </p:sp>
-      <p:sp>
-        <p:nvSpPr>
-          <p:cNvPr id="9" name="TextBox 8"/>
+            <a:pPr algn="ctr"/>
+            <a:r>
+              <a:rPr sz="900" b="0">
+                <a:solidFill>
+                  <a:srgbClr val="03110D"/>
+                </a:solidFill>
+                <a:latin typeface="Calibri"/>
+              </a:rPr>
+              <a:t>Normalises to InboundMessage schema</a:t>
+            </a:r>
+          </a:p>
+        </p:txBody>
+      </p:sp>
+      <p:sp>
+        <p:nvSpPr>
+          <p:cNvPr id="12" name="Down Arrow 11"/>
+          <p:cNvSpPr/>
+          <p:nvPr/>
+        </p:nvSpPr>
+        <p:spPr>
+          <a:xfrm>
+            <a:off x="5943600" y="2825496"/>
+            <a:ext cx="274320" cy="201168"/>
+          </a:xfrm>
+          <a:prstGeom prst="downArrow">
+            <a:avLst/>
+          </a:prstGeom>
+          <a:solidFill>
+            <a:srgbClr val="00A884"/>
+          </a:solidFill>
+          <a:ln>
+            <a:noFill/>
+          </a:ln>
+        </p:spPr>
+        <p:style>
+          <a:lnRef idx="1">
+            <a:schemeClr val="accent1"/>
+          </a:lnRef>
+          <a:fillRef idx="3">
+            <a:schemeClr val="accent1"/>
+          </a:fillRef>
+          <a:effectRef idx="2">
+            <a:schemeClr val="accent1"/>
+          </a:effectRef>
+          <a:fontRef idx="minor">
+            <a:schemeClr val="lt1"/>
+          </a:fontRef>
+        </p:style>
+        <p:txBody>
+          <a:bodyPr rtlCol="0" anchor="ctr"/>
+          <a:lstStyle/>
+          <a:p>
+            <a:pPr algn="ctr"/>
+          </a:p>
+        </p:txBody>
+      </p:sp>
+      <p:sp>
+        <p:nvSpPr>
+          <p:cNvPr id="13" name="Rounded Rectangle 12"/>
+          <p:cNvSpPr/>
+          <p:nvPr/>
+        </p:nvSpPr>
+        <p:spPr>
+          <a:xfrm>
+            <a:off x="3200400" y="3044952"/>
+            <a:ext cx="5760720" cy="502920"/>
+          </a:xfrm>
+          <a:prstGeom prst="roundRect">
+            <a:avLst/>
+          </a:prstGeom>
+          <a:solidFill>
+            <a:srgbClr val="9CFF8C"/>
+          </a:solidFill>
+          <a:ln>
+            <a:noFill/>
+          </a:ln>
+        </p:spPr>
+        <p:style>
+          <a:lnRef idx="1">
+            <a:schemeClr val="accent1"/>
+          </a:lnRef>
+          <a:fillRef idx="3">
+            <a:schemeClr val="accent1"/>
+          </a:fillRef>
+          <a:effectRef idx="2">
+            <a:schemeClr val="accent1"/>
+          </a:effectRef>
+          <a:fontRef idx="minor">
+            <a:schemeClr val="lt1"/>
+          </a:fontRef>
+        </p:style>
+        <p:txBody>
+          <a:bodyPr rtlCol="0" anchor="ctr"/>
+          <a:lstStyle/>
+          <a:p/>
+        </p:txBody>
+      </p:sp>
+      <p:sp>
+        <p:nvSpPr>
+          <p:cNvPr id="14" name="TextBox 13"/>
           <p:cNvSpPr txBox="1"/>
           <p:nvPr/>
         </p:nvSpPr>
         <p:spPr>
           <a:xfrm>
-            <a:off x="548640" y="3931920"/>
-            <a:ext cx="5486400" cy="548640"/>
+            <a:off x="3337560" y="3090672"/>
+            <a:ext cx="5486400" cy="274320"/>
           </a:xfrm>
           <a:prstGeom prst="rect">
             <a:avLst/>
@@ -14819,29 +15055,29 @@
           </a:bodyPr>
           <a:lstStyle/>
           <a:p>
-            <a:pPr algn="l"/>
-            <a:r>
-              <a:rPr sz="1600" b="0">
-                <a:solidFill>
-                  <a:srgbClr val="8696A0"/>
-                </a:solidFill>
-                <a:latin typeface="Calibri"/>
-              </a:rPr>
-              <a:t>Generic AI knows everything.</a:t>
-            </a:r>
-          </a:p>
-        </p:txBody>
-      </p:sp>
-      <p:sp>
-        <p:nvSpPr>
-          <p:cNvPr id="10" name="TextBox 9"/>
+            <a:pPr algn="ctr"/>
+            <a:r>
+              <a:rPr sz="1300" b="1">
+                <a:solidFill>
+                  <a:srgbClr val="03110D"/>
+                </a:solidFill>
+                <a:latin typeface="Calibri"/>
+              </a:rPr>
+              <a:t>3 · Tutor Engine  ·  app/tutor/engine.py</a:t>
+            </a:r>
+          </a:p>
+        </p:txBody>
+      </p:sp>
+      <p:sp>
+        <p:nvSpPr>
+          <p:cNvPr id="15" name="TextBox 14"/>
           <p:cNvSpPr txBox="1"/>
           <p:nvPr/>
         </p:nvSpPr>
         <p:spPr>
           <a:xfrm>
-            <a:off x="6126480" y="3931920"/>
-            <a:ext cx="5486400" cy="548640"/>
+            <a:off x="3337560" y="3337560"/>
+            <a:ext cx="5486400" cy="201168"/>
           </a:xfrm>
           <a:prstGeom prst="rect">
             <a:avLst/>
@@ -14854,29 +15090,115 @@
           </a:bodyPr>
           <a:lstStyle/>
           <a:p>
-            <a:pPr algn="l"/>
-            <a:r>
-              <a:rPr sz="1600" b="1">
-                <a:solidFill>
-                  <a:srgbClr val="9CFF8C"/>
-                </a:solidFill>
-                <a:latin typeface="Calibri"/>
-              </a:rPr>
-              <a:t>We are bounded to CAPS — auditable by DBE, editable by educators.</a:t>
-            </a:r>
-          </a:p>
-        </p:txBody>
-      </p:sp>
-      <p:sp>
-        <p:nvSpPr>
-          <p:cNvPr id="11" name="TextBox 10"/>
+            <a:pPr algn="ctr"/>
+            <a:r>
+              <a:rPr sz="900" b="0">
+                <a:solidFill>
+                  <a:srgbClr val="03110D"/>
+                </a:solidFill>
+                <a:latin typeface="Calibri"/>
+              </a:rPr>
+              <a:t>Routes by input type · session state · language / grade</a:t>
+            </a:r>
+          </a:p>
+        </p:txBody>
+      </p:sp>
+      <p:sp>
+        <p:nvSpPr>
+          <p:cNvPr id="16" name="Down Arrow 15"/>
+          <p:cNvSpPr/>
+          <p:nvPr/>
+        </p:nvSpPr>
+        <p:spPr>
+          <a:xfrm>
+            <a:off x="5943600" y="3547872"/>
+            <a:ext cx="274320" cy="201168"/>
+          </a:xfrm>
+          <a:prstGeom prst="downArrow">
+            <a:avLst/>
+          </a:prstGeom>
+          <a:solidFill>
+            <a:srgbClr val="00A884"/>
+          </a:solidFill>
+          <a:ln>
+            <a:noFill/>
+          </a:ln>
+        </p:spPr>
+        <p:style>
+          <a:lnRef idx="1">
+            <a:schemeClr val="accent1"/>
+          </a:lnRef>
+          <a:fillRef idx="3">
+            <a:schemeClr val="accent1"/>
+          </a:fillRef>
+          <a:effectRef idx="2">
+            <a:schemeClr val="accent1"/>
+          </a:effectRef>
+          <a:fontRef idx="minor">
+            <a:schemeClr val="lt1"/>
+          </a:fontRef>
+        </p:style>
+        <p:txBody>
+          <a:bodyPr rtlCol="0" anchor="ctr"/>
+          <a:lstStyle/>
+          <a:p>
+            <a:pPr algn="ctr"/>
+          </a:p>
+        </p:txBody>
+      </p:sp>
+      <p:sp>
+        <p:nvSpPr>
+          <p:cNvPr id="17" name="Rounded Rectangle 16"/>
+          <p:cNvSpPr/>
+          <p:nvPr/>
+        </p:nvSpPr>
+        <p:spPr>
+          <a:xfrm>
+            <a:off x="3200400" y="3767328"/>
+            <a:ext cx="5760720" cy="685800"/>
+          </a:xfrm>
+          <a:prstGeom prst="roundRect">
+            <a:avLst/>
+          </a:prstGeom>
+          <a:solidFill>
+            <a:srgbClr val="111B21"/>
+          </a:solidFill>
+          <a:ln w="6350">
+            <a:solidFill>
+              <a:srgbClr val="8696A0"/>
+            </a:solidFill>
+          </a:ln>
+        </p:spPr>
+        <p:style>
+          <a:lnRef idx="1">
+            <a:schemeClr val="accent1"/>
+          </a:lnRef>
+          <a:fillRef idx="3">
+            <a:schemeClr val="accent1"/>
+          </a:fillRef>
+          <a:effectRef idx="2">
+            <a:schemeClr val="accent1"/>
+          </a:effectRef>
+          <a:fontRef idx="minor">
+            <a:schemeClr val="lt1"/>
+          </a:fontRef>
+        </p:style>
+        <p:txBody>
+          <a:bodyPr rtlCol="0" anchor="ctr"/>
+          <a:lstStyle/>
+          <a:p/>
+        </p:txBody>
+      </p:sp>
+      <p:sp>
+        <p:nvSpPr>
+          <p:cNvPr id="18" name="TextBox 17"/>
           <p:cNvSpPr txBox="1"/>
           <p:nvPr/>
         </p:nvSpPr>
         <p:spPr>
           <a:xfrm>
-            <a:off x="548640" y="4617720"/>
-            <a:ext cx="5486400" cy="548640"/>
+            <a:off x="3291840" y="3803904"/>
+            <a:ext cx="5577840" cy="182880"/>
           </a:xfrm>
           <a:prstGeom prst="rect">
             <a:avLst/>
@@ -14889,29 +15211,81 @@
           </a:bodyPr>
           <a:lstStyle/>
           <a:p>
-            <a:pPr algn="l"/>
-            <a:r>
-              <a:rPr sz="1600" b="0">
-                <a:solidFill>
-                  <a:srgbClr val="8696A0"/>
-                </a:solidFill>
-                <a:latin typeface="Calibri"/>
-              </a:rPr>
-              <a:t>Generic AI needs a smartphone.</a:t>
-            </a:r>
-          </a:p>
-        </p:txBody>
-      </p:sp>
-      <p:sp>
-        <p:nvSpPr>
-          <p:cNvPr id="12" name="TextBox 11"/>
+            <a:pPr algn="ctr"/>
+            <a:r>
+              <a:rPr sz="1000" b="1">
+                <a:solidFill>
+                  <a:srgbClr val="9CFF8C"/>
+                </a:solidFill>
+                <a:latin typeface="Calibri"/>
+              </a:rPr>
+              <a:t>4 · Router decision</a:t>
+            </a:r>
+          </a:p>
+        </p:txBody>
+      </p:sp>
+      <p:sp>
+        <p:nvSpPr>
+          <p:cNvPr id="19" name="Rounded Rectangle 18"/>
+          <p:cNvSpPr/>
+          <p:nvPr/>
+        </p:nvSpPr>
+        <p:spPr>
+          <a:xfrm>
+            <a:off x="3310128" y="4023360"/>
+            <a:ext cx="1071676" cy="182880"/>
+          </a:xfrm>
+          <a:prstGeom prst="roundRect">
+            <a:avLst/>
+          </a:prstGeom>
+          <a:solidFill>
+            <a:srgbClr val="FFE066"/>
+          </a:solidFill>
+          <a:ln>
+            <a:noFill/>
+          </a:ln>
+        </p:spPr>
+        <p:style>
+          <a:lnRef idx="1">
+            <a:schemeClr val="accent1"/>
+          </a:lnRef>
+          <a:fillRef idx="3">
+            <a:schemeClr val="accent1"/>
+          </a:fillRef>
+          <a:effectRef idx="2">
+            <a:schemeClr val="accent1"/>
+          </a:effectRef>
+          <a:fontRef idx="minor">
+            <a:schemeClr val="lt1"/>
+          </a:fontRef>
+        </p:style>
+        <p:txBody>
+          <a:bodyPr rtlCol="0" anchor="ctr" lIns="27432" rIns="27432" tIns="18288" bIns="18288"/>
+          <a:lstStyle/>
+          <a:p>
+            <a:pPr algn="ctr"/>
+            <a:r>
+              <a:rPr sz="900" b="1">
+                <a:solidFill>
+                  <a:srgbClr val="03110D"/>
+                </a:solidFill>
+                <a:latin typeface="Calibri"/>
+              </a:rPr>
+              <a:t>📝 Past-paper?</a:t>
+            </a:r>
+          </a:p>
+        </p:txBody>
+      </p:sp>
+      <p:sp>
+        <p:nvSpPr>
+          <p:cNvPr id="20" name="TextBox 19"/>
           <p:cNvSpPr txBox="1"/>
           <p:nvPr/>
         </p:nvSpPr>
         <p:spPr>
           <a:xfrm>
-            <a:off x="6126480" y="4617720"/>
-            <a:ext cx="5486400" cy="548640"/>
+            <a:off x="3310128" y="4224528"/>
+            <a:ext cx="1071676" cy="164592"/>
           </a:xfrm>
           <a:prstGeom prst="rect">
             <a:avLst/>
@@ -14924,29 +15298,81 @@
           </a:bodyPr>
           <a:lstStyle/>
           <a:p>
-            <a:pPr algn="l"/>
-            <a:r>
-              <a:rPr sz="1600" b="1">
-                <a:solidFill>
-                  <a:srgbClr val="9CFF8C"/>
-                </a:solidFill>
-                <a:latin typeface="Calibri"/>
-              </a:rPr>
-              <a:t>USSD reaches feature phones. 5-7M SA learners Meta cannot serve.</a:t>
-            </a:r>
-          </a:p>
-        </p:txBody>
-      </p:sp>
-      <p:sp>
-        <p:nvSpPr>
-          <p:cNvPr id="13" name="TextBox 12"/>
+            <a:pPr algn="ctr"/>
+            <a:r>
+              <a:rPr sz="700" b="0">
+                <a:solidFill>
+                  <a:srgbClr val="8696A0"/>
+                </a:solidFill>
+                <a:latin typeface="Calibri"/>
+              </a:rPr>
+              <a:t>canonical answer + memo</a:t>
+            </a:r>
+          </a:p>
+        </p:txBody>
+      </p:sp>
+      <p:sp>
+        <p:nvSpPr>
+          <p:cNvPr id="21" name="Rounded Rectangle 20"/>
+          <p:cNvSpPr/>
+          <p:nvPr/>
+        </p:nvSpPr>
+        <p:spPr>
+          <a:xfrm>
+            <a:off x="4427524" y="4023360"/>
+            <a:ext cx="1071676" cy="182880"/>
+          </a:xfrm>
+          <a:prstGeom prst="roundRect">
+            <a:avLst/>
+          </a:prstGeom>
+          <a:solidFill>
+            <a:srgbClr val="66B2FF"/>
+          </a:solidFill>
+          <a:ln>
+            <a:noFill/>
+          </a:ln>
+        </p:spPr>
+        <p:style>
+          <a:lnRef idx="1">
+            <a:schemeClr val="accent1"/>
+          </a:lnRef>
+          <a:fillRef idx="3">
+            <a:schemeClr val="accent1"/>
+          </a:fillRef>
+          <a:effectRef idx="2">
+            <a:schemeClr val="accent1"/>
+          </a:effectRef>
+          <a:fontRef idx="minor">
+            <a:schemeClr val="lt1"/>
+          </a:fontRef>
+        </p:style>
+        <p:txBody>
+          <a:bodyPr rtlCol="0" anchor="ctr" lIns="27432" rIns="27432" tIns="18288" bIns="18288"/>
+          <a:lstStyle/>
+          <a:p>
+            <a:pPr algn="ctr"/>
+            <a:r>
+              <a:rPr sz="900" b="1">
+                <a:solidFill>
+                  <a:srgbClr val="03110D"/>
+                </a:solidFill>
+                <a:latin typeface="Calibri"/>
+              </a:rPr>
+              <a:t>🧮 Arithmetic?</a:t>
+            </a:r>
+          </a:p>
+        </p:txBody>
+      </p:sp>
+      <p:sp>
+        <p:nvSpPr>
+          <p:cNvPr id="22" name="TextBox 21"/>
           <p:cNvSpPr txBox="1"/>
           <p:nvPr/>
         </p:nvSpPr>
         <p:spPr>
           <a:xfrm>
-            <a:off x="548640" y="5303520"/>
-            <a:ext cx="5486400" cy="548640"/>
+            <a:off x="4427524" y="4224528"/>
+            <a:ext cx="1071676" cy="164592"/>
           </a:xfrm>
           <a:prstGeom prst="rect">
             <a:avLst/>
@@ -14959,29 +15385,81 @@
           </a:bodyPr>
           <a:lstStyle/>
           <a:p>
-            <a:pPr algn="l"/>
-            <a:r>
-              <a:rPr sz="1600" b="0">
+            <a:pPr algn="ctr"/>
+            <a:r>
+              <a:rPr sz="700" b="0">
                 <a:solidFill>
                   <a:srgbClr val="8696A0"/>
                 </a:solidFill>
                 <a:latin typeface="Calibri"/>
               </a:rPr>
-              <a:t>Generic AI's data leaves SA.</a:t>
-            </a:r>
-          </a:p>
-        </p:txBody>
-      </p:sp>
-      <p:sp>
-        <p:nvSpPr>
-          <p:cNvPr id="14" name="TextBox 13"/>
+              <a:t>deterministic evaluator</a:t>
+            </a:r>
+          </a:p>
+        </p:txBody>
+      </p:sp>
+      <p:sp>
+        <p:nvSpPr>
+          <p:cNvPr id="23" name="Rounded Rectangle 22"/>
+          <p:cNvSpPr/>
+          <p:nvPr/>
+        </p:nvSpPr>
+        <p:spPr>
+          <a:xfrm>
+            <a:off x="5544921" y="4023360"/>
+            <a:ext cx="1071676" cy="182880"/>
+          </a:xfrm>
+          <a:prstGeom prst="roundRect">
+            <a:avLst/>
+          </a:prstGeom>
+          <a:solidFill>
+            <a:srgbClr val="00A884"/>
+          </a:solidFill>
+          <a:ln>
+            <a:noFill/>
+          </a:ln>
+        </p:spPr>
+        <p:style>
+          <a:lnRef idx="1">
+            <a:schemeClr val="accent1"/>
+          </a:lnRef>
+          <a:fillRef idx="3">
+            <a:schemeClr val="accent1"/>
+          </a:fillRef>
+          <a:effectRef idx="2">
+            <a:schemeClr val="accent1"/>
+          </a:effectRef>
+          <a:fontRef idx="minor">
+            <a:schemeClr val="lt1"/>
+          </a:fontRef>
+        </p:style>
+        <p:txBody>
+          <a:bodyPr rtlCol="0" anchor="ctr" lIns="27432" rIns="27432" tIns="18288" bIns="18288"/>
+          <a:lstStyle/>
+          <a:p>
+            <a:pPr algn="ctr"/>
+            <a:r>
+              <a:rPr sz="900" b="1">
+                <a:solidFill>
+                  <a:srgbClr val="03110D"/>
+                </a:solidFill>
+                <a:latin typeface="Calibri"/>
+              </a:rPr>
+              <a:t>🔤 Equation?</a:t>
+            </a:r>
+          </a:p>
+        </p:txBody>
+      </p:sp>
+      <p:sp>
+        <p:nvSpPr>
+          <p:cNvPr id="24" name="TextBox 23"/>
           <p:cNvSpPr txBox="1"/>
           <p:nvPr/>
         </p:nvSpPr>
         <p:spPr>
           <a:xfrm>
-            <a:off x="6126480" y="5303520"/>
-            <a:ext cx="5486400" cy="548640"/>
+            <a:off x="5544921" y="4224528"/>
+            <a:ext cx="1071676" cy="164592"/>
           </a:xfrm>
           <a:prstGeom prst="rect">
             <a:avLst/>
@@ -14994,15 +15472,671 @@
           </a:bodyPr>
           <a:lstStyle/>
           <a:p>
-            <a:pPr algn="l"/>
-            <a:r>
-              <a:rPr sz="1600" b="1">
+            <a:pPr algn="ctr"/>
+            <a:r>
+              <a:rPr sz="700" b="0">
+                <a:solidFill>
+                  <a:srgbClr val="8696A0"/>
+                </a:solidFill>
+                <a:latin typeface="Calibri"/>
+              </a:rPr>
+              <a:t>math_analyzer (Python)</a:t>
+            </a:r>
+          </a:p>
+        </p:txBody>
+      </p:sp>
+      <p:sp>
+        <p:nvSpPr>
+          <p:cNvPr id="25" name="Rounded Rectangle 24"/>
+          <p:cNvSpPr/>
+          <p:nvPr/>
+        </p:nvSpPr>
+        <p:spPr>
+          <a:xfrm>
+            <a:off x="6662318" y="4023360"/>
+            <a:ext cx="1071676" cy="182880"/>
+          </a:xfrm>
+          <a:prstGeom prst="roundRect">
+            <a:avLst/>
+          </a:prstGeom>
+          <a:solidFill>
+            <a:srgbClr val="C89EFF"/>
+          </a:solidFill>
+          <a:ln>
+            <a:noFill/>
+          </a:ln>
+        </p:spPr>
+        <p:style>
+          <a:lnRef idx="1">
+            <a:schemeClr val="accent1"/>
+          </a:lnRef>
+          <a:fillRef idx="3">
+            <a:schemeClr val="accent1"/>
+          </a:fillRef>
+          <a:effectRef idx="2">
+            <a:schemeClr val="accent1"/>
+          </a:effectRef>
+          <a:fontRef idx="minor">
+            <a:schemeClr val="lt1"/>
+          </a:fontRef>
+        </p:style>
+        <p:txBody>
+          <a:bodyPr rtlCol="0" anchor="ctr" lIns="27432" rIns="27432" tIns="18288" bIns="18288"/>
+          <a:lstStyle/>
+          <a:p>
+            <a:pPr algn="ctr"/>
+            <a:r>
+              <a:rPr sz="900" b="1">
+                <a:solidFill>
+                  <a:srgbClr val="03110D"/>
+                </a:solidFill>
+                <a:latin typeface="Calibri"/>
+              </a:rPr>
+              <a:t>🖼️ Image?</a:t>
+            </a:r>
+          </a:p>
+        </p:txBody>
+      </p:sp>
+      <p:sp>
+        <p:nvSpPr>
+          <p:cNvPr id="26" name="TextBox 25"/>
+          <p:cNvSpPr txBox="1"/>
+          <p:nvPr/>
+        </p:nvSpPr>
+        <p:spPr>
+          <a:xfrm>
+            <a:off x="6662318" y="4224528"/>
+            <a:ext cx="1071676" cy="164592"/>
+          </a:xfrm>
+          <a:prstGeom prst="rect">
+            <a:avLst/>
+          </a:prstGeom>
+          <a:noFill/>
+        </p:spPr>
+        <p:txBody>
+          <a:bodyPr wrap="square">
+            <a:spAutoFit/>
+          </a:bodyPr>
+          <a:lstStyle/>
+          <a:p>
+            <a:pPr algn="ctr"/>
+            <a:r>
+              <a:rPr sz="700" b="0">
+                <a:solidFill>
+                  <a:srgbClr val="8696A0"/>
+                </a:solidFill>
+                <a:latin typeface="Calibri"/>
+              </a:rPr>
+              <a:t>vision LLM</a:t>
+            </a:r>
+          </a:p>
+        </p:txBody>
+      </p:sp>
+      <p:sp>
+        <p:nvSpPr>
+          <p:cNvPr id="27" name="Rounded Rectangle 26"/>
+          <p:cNvSpPr/>
+          <p:nvPr/>
+        </p:nvSpPr>
+        <p:spPr>
+          <a:xfrm>
+            <a:off x="7779715" y="4023360"/>
+            <a:ext cx="1071676" cy="182880"/>
+          </a:xfrm>
+          <a:prstGeom prst="roundRect">
+            <a:avLst/>
+          </a:prstGeom>
+          <a:solidFill>
+            <a:srgbClr val="FFB347"/>
+          </a:solidFill>
+          <a:ln>
+            <a:noFill/>
+          </a:ln>
+        </p:spPr>
+        <p:style>
+          <a:lnRef idx="1">
+            <a:schemeClr val="accent1"/>
+          </a:lnRef>
+          <a:fillRef idx="3">
+            <a:schemeClr val="accent1"/>
+          </a:fillRef>
+          <a:effectRef idx="2">
+            <a:schemeClr val="accent1"/>
+          </a:effectRef>
+          <a:fontRef idx="minor">
+            <a:schemeClr val="lt1"/>
+          </a:fontRef>
+        </p:style>
+        <p:txBody>
+          <a:bodyPr rtlCol="0" anchor="ctr" lIns="27432" rIns="27432" tIns="18288" bIns="18288"/>
+          <a:lstStyle/>
+          <a:p>
+            <a:pPr algn="ctr"/>
+            <a:r>
+              <a:rPr sz="900" b="1">
+                <a:solidFill>
+                  <a:srgbClr val="03110D"/>
+                </a:solidFill>
+                <a:latin typeface="Calibri"/>
+              </a:rPr>
+              <a:t>📄 Doc?</a:t>
+            </a:r>
+          </a:p>
+        </p:txBody>
+      </p:sp>
+      <p:sp>
+        <p:nvSpPr>
+          <p:cNvPr id="28" name="TextBox 27"/>
+          <p:cNvSpPr txBox="1"/>
+          <p:nvPr/>
+        </p:nvSpPr>
+        <p:spPr>
+          <a:xfrm>
+            <a:off x="7779715" y="4224528"/>
+            <a:ext cx="1071676" cy="164592"/>
+          </a:xfrm>
+          <a:prstGeom prst="rect">
+            <a:avLst/>
+          </a:prstGeom>
+          <a:noFill/>
+        </p:spPr>
+        <p:txBody>
+          <a:bodyPr wrap="square">
+            <a:spAutoFit/>
+          </a:bodyPr>
+          <a:lstStyle/>
+          <a:p>
+            <a:pPr algn="ctr"/>
+            <a:r>
+              <a:rPr sz="700" b="0">
+                <a:solidFill>
+                  <a:srgbClr val="8696A0"/>
+                </a:solidFill>
+                <a:latin typeface="Calibri"/>
+              </a:rPr>
+              <a:t>PDF/DOCX → LLM</a:t>
+            </a:r>
+          </a:p>
+        </p:txBody>
+      </p:sp>
+      <p:sp>
+        <p:nvSpPr>
+          <p:cNvPr id="29" name="Down Arrow 28"/>
+          <p:cNvSpPr/>
+          <p:nvPr/>
+        </p:nvSpPr>
+        <p:spPr>
+          <a:xfrm>
+            <a:off x="5943600" y="4453128"/>
+            <a:ext cx="274320" cy="201168"/>
+          </a:xfrm>
+          <a:prstGeom prst="downArrow">
+            <a:avLst/>
+          </a:prstGeom>
+          <a:solidFill>
+            <a:srgbClr val="00A884"/>
+          </a:solidFill>
+          <a:ln>
+            <a:noFill/>
+          </a:ln>
+        </p:spPr>
+        <p:style>
+          <a:lnRef idx="1">
+            <a:schemeClr val="accent1"/>
+          </a:lnRef>
+          <a:fillRef idx="3">
+            <a:schemeClr val="accent1"/>
+          </a:fillRef>
+          <a:effectRef idx="2">
+            <a:schemeClr val="accent1"/>
+          </a:effectRef>
+          <a:fontRef idx="minor">
+            <a:schemeClr val="lt1"/>
+          </a:fontRef>
+        </p:style>
+        <p:txBody>
+          <a:bodyPr rtlCol="0" anchor="ctr"/>
+          <a:lstStyle/>
+          <a:p>
+            <a:pPr algn="ctr"/>
+          </a:p>
+        </p:txBody>
+      </p:sp>
+      <p:sp>
+        <p:nvSpPr>
+          <p:cNvPr id="30" name="Rounded Rectangle 29"/>
+          <p:cNvSpPr/>
+          <p:nvPr/>
+        </p:nvSpPr>
+        <p:spPr>
+          <a:xfrm>
+            <a:off x="3200400" y="4672584"/>
+            <a:ext cx="5760720" cy="502920"/>
+          </a:xfrm>
+          <a:prstGeom prst="roundRect">
+            <a:avLst/>
+          </a:prstGeom>
+          <a:solidFill>
+            <a:srgbClr val="111B21"/>
+          </a:solidFill>
+          <a:ln w="12700">
+            <a:solidFill>
+              <a:srgbClr val="8696A0"/>
+            </a:solidFill>
+          </a:ln>
+        </p:spPr>
+        <p:style>
+          <a:lnRef idx="1">
+            <a:schemeClr val="accent1"/>
+          </a:lnRef>
+          <a:fillRef idx="3">
+            <a:schemeClr val="accent1"/>
+          </a:fillRef>
+          <a:effectRef idx="2">
+            <a:schemeClr val="accent1"/>
+          </a:effectRef>
+          <a:fontRef idx="minor">
+            <a:schemeClr val="lt1"/>
+          </a:fontRef>
+        </p:style>
+        <p:txBody>
+          <a:bodyPr rtlCol="0" anchor="ctr"/>
+          <a:lstStyle/>
+          <a:p/>
+        </p:txBody>
+      </p:sp>
+      <p:sp>
+        <p:nvSpPr>
+          <p:cNvPr id="31" name="TextBox 30"/>
+          <p:cNvSpPr txBox="1"/>
+          <p:nvPr/>
+        </p:nvSpPr>
+        <p:spPr>
+          <a:xfrm>
+            <a:off x="3337560" y="4718304"/>
+            <a:ext cx="5486400" cy="274320"/>
+          </a:xfrm>
+          <a:prstGeom prst="rect">
+            <a:avLst/>
+          </a:prstGeom>
+          <a:noFill/>
+        </p:spPr>
+        <p:txBody>
+          <a:bodyPr wrap="square">
+            <a:spAutoFit/>
+          </a:bodyPr>
+          <a:lstStyle/>
+          <a:p>
+            <a:pPr algn="ctr"/>
+            <a:r>
+              <a:rPr sz="1300" b="1">
                 <a:solidFill>
                   <a:srgbClr val="9CFF8C"/>
                 </a:solidFill>
                 <a:latin typeface="Calibri"/>
               </a:rPr>
-              <a:t>We run on Dell AI Factory in country. POPIA-aligned. Sovereign.</a:t>
+              <a:t>5 · AI Providers  ·  app/providers/*.py</a:t>
+            </a:r>
+          </a:p>
+        </p:txBody>
+      </p:sp>
+      <p:sp>
+        <p:nvSpPr>
+          <p:cNvPr id="32" name="TextBox 31"/>
+          <p:cNvSpPr txBox="1"/>
+          <p:nvPr/>
+        </p:nvSpPr>
+        <p:spPr>
+          <a:xfrm>
+            <a:off x="3337560" y="4965192"/>
+            <a:ext cx="5486400" cy="201168"/>
+          </a:xfrm>
+          <a:prstGeom prst="rect">
+            <a:avLst/>
+          </a:prstGeom>
+          <a:noFill/>
+        </p:spPr>
+        <p:txBody>
+          <a:bodyPr wrap="square">
+            <a:spAutoFit/>
+          </a:bodyPr>
+          <a:lstStyle/>
+          <a:p>
+            <a:pPr algn="ctr"/>
+            <a:r>
+              <a:rPr sz="900" b="0">
+                <a:solidFill>
+                  <a:srgbClr val="9CFF8C"/>
+                </a:solidFill>
+                <a:latin typeface="Calibri"/>
+              </a:rPr>
+              <a:t>Reasoning · Vision · Translation (all pluggable)</a:t>
+            </a:r>
+          </a:p>
+        </p:txBody>
+      </p:sp>
+      <p:sp>
+        <p:nvSpPr>
+          <p:cNvPr id="33" name="Rounded Rectangle 32"/>
+          <p:cNvSpPr/>
+          <p:nvPr/>
+        </p:nvSpPr>
+        <p:spPr>
+          <a:xfrm>
+            <a:off x="9235440" y="4718304"/>
+            <a:ext cx="2880360" cy="411480"/>
+          </a:xfrm>
+          <a:prstGeom prst="roundRect">
+            <a:avLst/>
+          </a:prstGeom>
+          <a:solidFill>
+            <a:srgbClr val="00A884"/>
+          </a:solidFill>
+          <a:ln>
+            <a:noFill/>
+          </a:ln>
+        </p:spPr>
+        <p:style>
+          <a:lnRef idx="1">
+            <a:schemeClr val="accent1"/>
+          </a:lnRef>
+          <a:fillRef idx="3">
+            <a:schemeClr val="accent1"/>
+          </a:fillRef>
+          <a:effectRef idx="2">
+            <a:schemeClr val="accent1"/>
+          </a:effectRef>
+          <a:fontRef idx="minor">
+            <a:schemeClr val="lt1"/>
+          </a:fontRef>
+        </p:style>
+        <p:txBody>
+          <a:bodyPr rtlCol="0" anchor="ctr" lIns="137160" rIns="137160"/>
+          <a:lstStyle/>
+          <a:p>
+            <a:pPr algn="ctr"/>
+            <a:r>
+              <a:rPr sz="1100" b="1">
+                <a:solidFill>
+                  <a:srgbClr val="03110D"/>
+                </a:solidFill>
+              </a:rPr>
+              <a:t>Groq / Dell AI Factory NIM</a:t>
+            </a:r>
+          </a:p>
+        </p:txBody>
+      </p:sp>
+      <p:sp>
+        <p:nvSpPr>
+          <p:cNvPr id="34" name="Right Arrow 33"/>
+          <p:cNvSpPr/>
+          <p:nvPr/>
+        </p:nvSpPr>
+        <p:spPr>
+          <a:xfrm>
+            <a:off x="8961120" y="4832604"/>
+            <a:ext cx="274320" cy="182880"/>
+          </a:xfrm>
+          <a:prstGeom prst="rightArrow">
+            <a:avLst/>
+          </a:prstGeom>
+          <a:solidFill>
+            <a:srgbClr val="00A884"/>
+          </a:solidFill>
+          <a:ln>
+            <a:noFill/>
+          </a:ln>
+        </p:spPr>
+        <p:style>
+          <a:lnRef idx="1">
+            <a:schemeClr val="accent1"/>
+          </a:lnRef>
+          <a:fillRef idx="3">
+            <a:schemeClr val="accent1"/>
+          </a:fillRef>
+          <a:effectRef idx="2">
+            <a:schemeClr val="accent1"/>
+          </a:effectRef>
+          <a:fontRef idx="minor">
+            <a:schemeClr val="lt1"/>
+          </a:fontRef>
+        </p:style>
+        <p:txBody>
+          <a:bodyPr rtlCol="0" anchor="ctr"/>
+          <a:lstStyle/>
+          <a:p>
+            <a:pPr algn="ctr"/>
+          </a:p>
+        </p:txBody>
+      </p:sp>
+      <p:sp>
+        <p:nvSpPr>
+          <p:cNvPr id="35" name="Down Arrow 34"/>
+          <p:cNvSpPr/>
+          <p:nvPr/>
+        </p:nvSpPr>
+        <p:spPr>
+          <a:xfrm>
+            <a:off x="5943600" y="5175504"/>
+            <a:ext cx="274320" cy="201168"/>
+          </a:xfrm>
+          <a:prstGeom prst="downArrow">
+            <a:avLst/>
+          </a:prstGeom>
+          <a:solidFill>
+            <a:srgbClr val="00A884"/>
+          </a:solidFill>
+          <a:ln>
+            <a:noFill/>
+          </a:ln>
+        </p:spPr>
+        <p:style>
+          <a:lnRef idx="1">
+            <a:schemeClr val="accent1"/>
+          </a:lnRef>
+          <a:fillRef idx="3">
+            <a:schemeClr val="accent1"/>
+          </a:fillRef>
+          <a:effectRef idx="2">
+            <a:schemeClr val="accent1"/>
+          </a:effectRef>
+          <a:fontRef idx="minor">
+            <a:schemeClr val="lt1"/>
+          </a:fontRef>
+        </p:style>
+        <p:txBody>
+          <a:bodyPr rtlCol="0" anchor="ctr"/>
+          <a:lstStyle/>
+          <a:p>
+            <a:pPr algn="ctr"/>
+          </a:p>
+        </p:txBody>
+      </p:sp>
+      <p:sp>
+        <p:nvSpPr>
+          <p:cNvPr id="36" name="Rounded Rectangle 35"/>
+          <p:cNvSpPr/>
+          <p:nvPr/>
+        </p:nvSpPr>
+        <p:spPr>
+          <a:xfrm>
+            <a:off x="3200400" y="5394960"/>
+            <a:ext cx="5760720" cy="502920"/>
+          </a:xfrm>
+          <a:prstGeom prst="roundRect">
+            <a:avLst/>
+          </a:prstGeom>
+          <a:solidFill>
+            <a:srgbClr val="00A884"/>
+          </a:solidFill>
+          <a:ln>
+            <a:noFill/>
+          </a:ln>
+        </p:spPr>
+        <p:style>
+          <a:lnRef idx="1">
+            <a:schemeClr val="accent1"/>
+          </a:lnRef>
+          <a:fillRef idx="3">
+            <a:schemeClr val="accent1"/>
+          </a:fillRef>
+          <a:effectRef idx="2">
+            <a:schemeClr val="accent1"/>
+          </a:effectRef>
+          <a:fontRef idx="minor">
+            <a:schemeClr val="lt1"/>
+          </a:fontRef>
+        </p:style>
+        <p:txBody>
+          <a:bodyPr rtlCol="0" anchor="ctr"/>
+          <a:lstStyle/>
+          <a:p/>
+        </p:txBody>
+      </p:sp>
+      <p:sp>
+        <p:nvSpPr>
+          <p:cNvPr id="37" name="TextBox 36"/>
+          <p:cNvSpPr txBox="1"/>
+          <p:nvPr/>
+        </p:nvSpPr>
+        <p:spPr>
+          <a:xfrm>
+            <a:off x="3337560" y="5440680"/>
+            <a:ext cx="5486400" cy="274320"/>
+          </a:xfrm>
+          <a:prstGeom prst="rect">
+            <a:avLst/>
+          </a:prstGeom>
+          <a:noFill/>
+        </p:spPr>
+        <p:txBody>
+          <a:bodyPr wrap="square">
+            <a:spAutoFit/>
+          </a:bodyPr>
+          <a:lstStyle/>
+          <a:p>
+            <a:pPr algn="ctr"/>
+            <a:r>
+              <a:rPr sz="1300" b="1">
+                <a:solidFill>
+                  <a:srgbClr val="03110D"/>
+                </a:solidFill>
+                <a:latin typeface="Calibri"/>
+              </a:rPr>
+              <a:t>6 · Response back to learner</a:t>
+            </a:r>
+          </a:p>
+        </p:txBody>
+      </p:sp>
+      <p:sp>
+        <p:nvSpPr>
+          <p:cNvPr id="38" name="TextBox 37"/>
+          <p:cNvSpPr txBox="1"/>
+          <p:nvPr/>
+        </p:nvSpPr>
+        <p:spPr>
+          <a:xfrm>
+            <a:off x="3337560" y="5687568"/>
+            <a:ext cx="5486400" cy="201168"/>
+          </a:xfrm>
+          <a:prstGeom prst="rect">
+            <a:avLst/>
+          </a:prstGeom>
+          <a:noFill/>
+        </p:spPr>
+        <p:txBody>
+          <a:bodyPr wrap="square">
+            <a:spAutoFit/>
+          </a:bodyPr>
+          <a:lstStyle/>
+          <a:p>
+            <a:pPr algn="ctr"/>
+            <a:r>
+              <a:rPr sz="900" b="0">
+                <a:solidFill>
+                  <a:srgbClr val="03110D"/>
+                </a:solidFill>
+                <a:latin typeface="Calibri"/>
+              </a:rPr>
+              <a:t>TutorResponse → Channel serialiser → learner</a:t>
+            </a:r>
+          </a:p>
+        </p:txBody>
+      </p:sp>
+      <p:sp>
+        <p:nvSpPr>
+          <p:cNvPr id="39" name="Rounded Rectangle 38"/>
+          <p:cNvSpPr/>
+          <p:nvPr/>
+        </p:nvSpPr>
+        <p:spPr>
+          <a:xfrm>
+            <a:off x="548640" y="6263640"/>
+            <a:ext cx="11064240" cy="411480"/>
+          </a:xfrm>
+          <a:prstGeom prst="roundRect">
+            <a:avLst/>
+          </a:prstGeom>
+          <a:solidFill>
+            <a:srgbClr val="111B21"/>
+          </a:solidFill>
+          <a:ln w="12700">
+            <a:solidFill>
+              <a:srgbClr val="00A884"/>
+            </a:solidFill>
+          </a:ln>
+        </p:spPr>
+        <p:style>
+          <a:lnRef idx="1">
+            <a:schemeClr val="accent1"/>
+          </a:lnRef>
+          <a:fillRef idx="3">
+            <a:schemeClr val="accent1"/>
+          </a:fillRef>
+          <a:effectRef idx="2">
+            <a:schemeClr val="accent1"/>
+          </a:effectRef>
+          <a:fontRef idx="minor">
+            <a:schemeClr val="lt1"/>
+          </a:fontRef>
+        </p:style>
+        <p:txBody>
+          <a:bodyPr rtlCol="0" anchor="ctr"/>
+          <a:lstStyle/>
+          <a:p/>
+        </p:txBody>
+      </p:sp>
+      <p:sp>
+        <p:nvSpPr>
+          <p:cNvPr id="40" name="TextBox 39"/>
+          <p:cNvSpPr txBox="1"/>
+          <p:nvPr/>
+        </p:nvSpPr>
+        <p:spPr>
+          <a:xfrm>
+            <a:off x="548640" y="6318503"/>
+            <a:ext cx="11064240" cy="320040"/>
+          </a:xfrm>
+          <a:prstGeom prst="rect">
+            <a:avLst/>
+          </a:prstGeom>
+          <a:noFill/>
+        </p:spPr>
+        <p:txBody>
+          <a:bodyPr wrap="square">
+            <a:spAutoFit/>
+          </a:bodyPr>
+          <a:lstStyle/>
+          <a:p>
+            <a:pPr algn="ctr"/>
+            <a:r>
+              <a:rPr sz="1100" b="1">
+                <a:solidFill>
+                  <a:srgbClr val="9CFF8C"/>
+                </a:solidFill>
+                <a:latin typeface="Calibri"/>
+              </a:rPr>
+              <a:t>Every layer swappable · Every input format supported · No hallucination on deterministic maths</a:t>
             </a:r>
           </a:p>
         </p:txBody>

--- a/pitch/AI_Tutor_Pitch.pptx
+++ b/pitch/AI_Tutor_Pitch.pptx
@@ -20,6 +20,11 @@
     <p:sldId id="268" r:id="rId20"/>
     <p:sldId id="269" r:id="rId21"/>
     <p:sldId id="270" r:id="rId22"/>
+    <p:sldId id="271" r:id="rId23"/>
+    <p:sldId id="272" r:id="rId24"/>
+    <p:sldId id="273" r:id="rId25"/>
+    <p:sldId id="274" r:id="rId26"/>
+    <p:sldId id="275" r:id="rId27"/>
   </p:sldIdLst>
   <p:sldSz cx="12188952" cy="6858000" type="screen4x3"/>
   <p:notesSz cx="6858000" cy="9144000"/>
@@ -516,7 +521,7 @@
           <a:lstStyle/>
           <a:p>
             <a:r>
-              <a:t>Open with the mission, not the tech. EduConnect AI Tutor is a public-good tutor that reaches every learner in South Africa — smartphone or feature phone, any of the 11 official languages. The two device mockups are placeholders; final version replaces them with real photos of SA learners using the app. Powered by Dell AI Factory. Zero-rated on Vodacom. CAPS-aligned.</a:t>
+              <a:t>Open with the mission, not the tech. EduConnect AI Tutor is a public-good tutor that reaches every learner in South Africa — smartphone or feature phone, any of the 11 official languages. The two device mockups are placeholders; final version replaces them with real photos of SA learners using the app. Powered by Dell AI Factory. Zero-rated on Vodacom (design supports zero-rating; formal partnership is the ask, not something we're claiming as delivered). CAPS-aligned.</a:t>
             </a:r>
           </a:p>
         </p:txBody>
@@ -866,7 +871,7 @@
           <a:lstStyle/>
           <a:p>
             <a:r>
-              <a:t>Three phases, six months apart. Pilot is the make-or-break: 5 schools, 2 provinces, real LLM, real Vodacom traffic, real teacher review. By Q3 2026 we know if the uplift target lands.</a:t>
+              <a:t>Be honest about the split. Left column = shipped today, real code in the repo. Right column = designed but not yet implemented — each item is 1–2 days of engineering and deliberately deferred until Vodacom's DPO tells us their preferred hosting, retention policy, and DPA template. Do NOT claim 'POPIA-aligned' as delivered — the ARCHITECTURE is POPIA-aligned; the compliance sign-off comes in Phase 1. The image classifier is Phase 1 work; today we accept any image and pass it to the vision model with a curriculum-bounded prompt.</a:t>
             </a:r>
           </a:p>
         </p:txBody>
@@ -936,7 +941,287 @@
           <a:lstStyle/>
           <a:p>
             <a:r>
-              <a:t>Four asks, each tied to a partner. Be specific about what each partner gives us — vague asks get vague yeses. Close with the repo URL so judges can run the code themselves.</a:t>
+              <a:t>Three phases, six months apart. Pilot is the make-or-break: 5 schools, 2 provinces, real LLM, real Vodacom traffic, real teacher review. By Q3 2026 we know if the uplift target lands.</a:t>
+            </a:r>
+          </a:p>
+        </p:txBody>
+      </p:sp>
+      <p:sp>
+        <p:nvSpPr>
+          <p:cNvPr id="4" name="Slide Number Placeholder 3"/>
+          <p:cNvSpPr>
+            <a:spLocks noGrp="1"/>
+          </p:cNvSpPr>
+          <p:nvPr>
+            <p:ph type="sldNum" idx="5" sz="quarter"/>
+          </p:nvPr>
+        </p:nvSpPr>
+        <p:spPr/>
+      </p:sp>
+    </p:spTree>
+  </p:cSld>
+  <p:clrMapOvr>
+    <a:masterClrMapping/>
+  </p:clrMapOvr>
+</p:notes>
+</file>
+
+<file path=ppt/notesSlides/notesSlide16.xml><?xml version="1.0" encoding="utf-8"?>
+<p:notes xmlns:a="http://schemas.openxmlformats.org/drawingml/2006/main" xmlns:p="http://schemas.openxmlformats.org/presentationml/2006/main" xmlns:r="http://schemas.openxmlformats.org/officeDocument/2006/relationships">
+  <p:cSld>
+    <p:spTree>
+      <p:nvGrpSpPr>
+        <p:cNvPr id="1" name=""/>
+        <p:cNvGrpSpPr/>
+        <p:nvPr/>
+      </p:nvGrpSpPr>
+      <p:grpSpPr>
+        <a:xfrm>
+          <a:off x="0" y="0"/>
+          <a:ext cx="0" cy="0"/>
+          <a:chOff x="0" y="0"/>
+          <a:chExt cx="0" cy="0"/>
+        </a:xfrm>
+      </p:grpSpPr>
+      <p:sp>
+        <p:nvSpPr>
+          <p:cNvPr id="2" name="Slide Image Placeholder 1"/>
+          <p:cNvSpPr>
+            <a:spLocks noGrp="1"/>
+          </p:cNvSpPr>
+          <p:nvPr>
+            <p:ph type="sldImg" idx="2"/>
+          </p:nvPr>
+        </p:nvSpPr>
+        <p:spPr/>
+      </p:sp>
+      <p:sp>
+        <p:nvSpPr>
+          <p:cNvPr id="3" name="Notes Placeholder 2"/>
+          <p:cNvSpPr>
+            <a:spLocks noGrp="1"/>
+          </p:cNvSpPr>
+          <p:nvPr>
+            <p:ph type="body" idx="3" sz="quarter"/>
+          </p:nvPr>
+        </p:nvSpPr>
+        <p:spPr/>
+        <p:txBody>
+          <a:bodyPr/>
+          <a:lstStyle/>
+          <a:p>
+            <a:r>
+              <a:t>The R2/learner/year number is the pitch's killer stat. Break it down so the CFO in the room can audit it. Costs are today's Gemini Flash-Lite pilot pricing — they DROP to ~R0.80 on Dell AI Factory NIM (hardware-only cost, no per-token bill). The private-tutor comparison isn't hypothetical — R250-500/hour × ~60 hours/year is the going rate in SA. The break-even framing is roadmap, not shipped: we haven't run the pilot yet, so uplift is a target, not a claim. Rehearse the R2-vs-R16,000 line — that's the mic drop.</a:t>
+            </a:r>
+          </a:p>
+        </p:txBody>
+      </p:sp>
+      <p:sp>
+        <p:nvSpPr>
+          <p:cNvPr id="4" name="Slide Number Placeholder 3"/>
+          <p:cNvSpPr>
+            <a:spLocks noGrp="1"/>
+          </p:cNvSpPr>
+          <p:nvPr>
+            <p:ph type="sldNum" idx="5" sz="quarter"/>
+          </p:nvPr>
+        </p:nvSpPr>
+        <p:spPr/>
+      </p:sp>
+    </p:spTree>
+  </p:cSld>
+  <p:clrMapOvr>
+    <a:masterClrMapping/>
+  </p:clrMapOvr>
+</p:notes>
+</file>
+
+<file path=ppt/notesSlides/notesSlide17.xml><?xml version="1.0" encoding="utf-8"?>
+<p:notes xmlns:a="http://schemas.openxmlformats.org/drawingml/2006/main" xmlns:p="http://schemas.openxmlformats.org/presentationml/2006/main" xmlns:r="http://schemas.openxmlformats.org/officeDocument/2006/relationships">
+  <p:cSld>
+    <p:spTree>
+      <p:nvGrpSpPr>
+        <p:cNvPr id="1" name=""/>
+        <p:cNvGrpSpPr/>
+        <p:nvPr/>
+      </p:nvGrpSpPr>
+      <p:grpSpPr>
+        <a:xfrm>
+          <a:off x="0" y="0"/>
+          <a:ext cx="0" cy="0"/>
+          <a:chOff x="0" y="0"/>
+          <a:chExt cx="0" cy="0"/>
+        </a:xfrm>
+      </p:grpSpPr>
+      <p:sp>
+        <p:nvSpPr>
+          <p:cNvPr id="2" name="Slide Image Placeholder 1"/>
+          <p:cNvSpPr>
+            <a:spLocks noGrp="1"/>
+          </p:cNvSpPr>
+          <p:nvPr>
+            <p:ph type="sldImg" idx="2"/>
+          </p:nvPr>
+        </p:nvSpPr>
+        <p:spPr/>
+      </p:sp>
+      <p:sp>
+        <p:nvSpPr>
+          <p:cNvPr id="3" name="Notes Placeholder 2"/>
+          <p:cNvSpPr>
+            <a:spLocks noGrp="1"/>
+          </p:cNvSpPr>
+          <p:nvPr>
+            <p:ph type="body" idx="3" sz="quarter"/>
+          </p:nvPr>
+        </p:nvSpPr>
+        <p:spPr/>
+        <p:txBody>
+          <a:bodyPr/>
+          <a:lstStyle/>
+          <a:p>
+            <a:r>
+              <a:t>This is the swap-ability slide. Every provider we list exposes an OpenAI-compatible /chat/completions endpoint, so switching is literally 6 env vars: base URL, key, model name for reasoning, vision, translation, and embedding. Today we run Gemini 3.5 Flash-Lite in the pilot — it's the cheapest and hits SA latency. Production endpoint is Dell AI Factory NIM: hardware cost only, POPIA-sovereign, no per-token bill. GPT-4o-mini and Claude Haiku are named fallbacks so procurement doesn't panic about vendor-lock. Roadmap, not shipped: the Dell NIM row is what we're asking Dell for.</a:t>
+            </a:r>
+          </a:p>
+        </p:txBody>
+      </p:sp>
+      <p:sp>
+        <p:nvSpPr>
+          <p:cNvPr id="4" name="Slide Number Placeholder 3"/>
+          <p:cNvSpPr>
+            <a:spLocks noGrp="1"/>
+          </p:cNvSpPr>
+          <p:nvPr>
+            <p:ph type="sldNum" idx="5" sz="quarter"/>
+          </p:nvPr>
+        </p:nvSpPr>
+        <p:spPr/>
+      </p:sp>
+    </p:spTree>
+  </p:cSld>
+  <p:clrMapOvr>
+    <a:masterClrMapping/>
+  </p:clrMapOvr>
+</p:notes>
+</file>
+
+<file path=ppt/notesSlides/notesSlide18.xml><?xml version="1.0" encoding="utf-8"?>
+<p:notes xmlns:a="http://schemas.openxmlformats.org/drawingml/2006/main" xmlns:p="http://schemas.openxmlformats.org/presentationml/2006/main" xmlns:r="http://schemas.openxmlformats.org/officeDocument/2006/relationships">
+  <p:cSld>
+    <p:spTree>
+      <p:nvGrpSpPr>
+        <p:cNvPr id="1" name=""/>
+        <p:cNvGrpSpPr/>
+        <p:nvPr/>
+      </p:nvGrpSpPr>
+      <p:grpSpPr>
+        <a:xfrm>
+          <a:off x="0" y="0"/>
+          <a:ext cx="0" cy="0"/>
+          <a:chOff x="0" y="0"/>
+          <a:chExt cx="0" cy="0"/>
+        </a:xfrm>
+      </p:grpSpPr>
+      <p:sp>
+        <p:nvSpPr>
+          <p:cNvPr id="2" name="Slide Image Placeholder 1"/>
+          <p:cNvSpPr>
+            <a:spLocks noGrp="1"/>
+          </p:cNvSpPr>
+          <p:nvPr>
+            <p:ph type="sldImg" idx="2"/>
+          </p:nvPr>
+        </p:nvSpPr>
+        <p:spPr/>
+      </p:sp>
+      <p:sp>
+        <p:nvSpPr>
+          <p:cNvPr id="3" name="Notes Placeholder 2"/>
+          <p:cNvSpPr>
+            <a:spLocks noGrp="1"/>
+          </p:cNvSpPr>
+          <p:nvPr>
+            <p:ph type="body" idx="3" sz="quarter"/>
+          </p:nvPr>
+        </p:nvSpPr>
+        <p:spPr/>
+        <p:txBody>
+          <a:bodyPr/>
+          <a:lstStyle/>
+          <a:p>
+            <a:r>
+              <a:t>Frame this as 'we complete e-School, we don't compete with it.' The 5 landscape tiles cover the current SA e-learning offer — content-heavy, no live 1-on-1. That's our lane. The 3-phase timeline is a proposal for Vodacom — Phase 1 is 60 days of content ingestion (RAG on e-School lessons), Phase 2 is a widget embed with SSO, Phase 3 is the analytics loop. Be explicit: this is a proposed integration path, not a signed workstream. The 10×-cheaper number is a rough ROI estimate — anchor it, don't over-defend it.</a:t>
+            </a:r>
+          </a:p>
+        </p:txBody>
+      </p:sp>
+      <p:sp>
+        <p:nvSpPr>
+          <p:cNvPr id="4" name="Slide Number Placeholder 3"/>
+          <p:cNvSpPr>
+            <a:spLocks noGrp="1"/>
+          </p:cNvSpPr>
+          <p:nvPr>
+            <p:ph type="sldNum" idx="5" sz="quarter"/>
+          </p:nvPr>
+        </p:nvSpPr>
+        <p:spPr/>
+      </p:sp>
+    </p:spTree>
+  </p:cSld>
+  <p:clrMapOvr>
+    <a:masterClrMapping/>
+  </p:clrMapOvr>
+</p:notes>
+</file>
+
+<file path=ppt/notesSlides/notesSlide19.xml><?xml version="1.0" encoding="utf-8"?>
+<p:notes xmlns:a="http://schemas.openxmlformats.org/drawingml/2006/main" xmlns:p="http://schemas.openxmlformats.org/presentationml/2006/main" xmlns:r="http://schemas.openxmlformats.org/officeDocument/2006/relationships">
+  <p:cSld>
+    <p:spTree>
+      <p:nvGrpSpPr>
+        <p:cNvPr id="1" name=""/>
+        <p:cNvGrpSpPr/>
+        <p:nvPr/>
+      </p:nvGrpSpPr>
+      <p:grpSpPr>
+        <a:xfrm>
+          <a:off x="0" y="0"/>
+          <a:ext cx="0" cy="0"/>
+          <a:chOff x="0" y="0"/>
+          <a:chExt cx="0" cy="0"/>
+        </a:xfrm>
+      </p:grpSpPr>
+      <p:sp>
+        <p:nvSpPr>
+          <p:cNvPr id="2" name="Slide Image Placeholder 1"/>
+          <p:cNvSpPr>
+            <a:spLocks noGrp="1"/>
+          </p:cNvSpPr>
+          <p:nvPr>
+            <p:ph type="sldImg" idx="2"/>
+          </p:nvPr>
+        </p:nvSpPr>
+        <p:spPr/>
+      </p:sp>
+      <p:sp>
+        <p:nvSpPr>
+          <p:cNvPr id="3" name="Notes Placeholder 2"/>
+          <p:cNvSpPr>
+            <a:spLocks noGrp="1"/>
+          </p:cNvSpPr>
+          <p:nvPr>
+            <p:ph type="body" idx="3" sz="quarter"/>
+          </p:nvPr>
+        </p:nvSpPr>
+        <p:spPr/>
+        <p:txBody>
+          <a:bodyPr/>
+          <a:lstStyle/>
+          <a:p>
+            <a:r>
+              <a:t>This is the mic-drop slide for the Vodacom room. Six reasons, three of them commercial (bundle revenue, USSD rev-share, VBS data insights), three of them positional (Purpose KPI, youth CAC, regulatory). REHEARSE the bottom banner out loud — 'R1.5M/mo bundle uplift, 25× cheaper CAC, media-worthy Purpose story, for less than a Sunday-supplement ad' — that's the line that lands. Be careful: all the numbers here are projections not signed commitments. R1.5M/mo assumes 30% conversion (industry avg for bundled telco add-ons; we don't have real data yet). The 25× CAC figure compares against Vodacom's public youth-marketing spend reports.</a:t>
             </a:r>
           </a:p>
         </p:txBody>
@@ -1006,7 +1291,77 @@
           <a:lstStyle/>
           <a:p>
             <a:r>
-              <a:t>Open with the equity story. EduConnect AI Tutor is a CAPS-aligned multilingual tutor that meets every learner — smartphone or feature phone — where they are. Powered by Dell AI Factory. Zero-rated on Vodacom.</a:t>
+              <a:t>Open with the equity story. EduConnect AI Tutor is a CAPS-aligned multilingual tutor that meets every learner — smartphone or feature phone — where they are. Powered by Dell AI Factory. Zero-rated on Vodacom (design supports zero-rating; formal partnership is the ask, not something we're claiming as delivered).</a:t>
+            </a:r>
+          </a:p>
+        </p:txBody>
+      </p:sp>
+      <p:sp>
+        <p:nvSpPr>
+          <p:cNvPr id="4" name="Slide Number Placeholder 3"/>
+          <p:cNvSpPr>
+            <a:spLocks noGrp="1"/>
+          </p:cNvSpPr>
+          <p:nvPr>
+            <p:ph type="sldNum" idx="5" sz="quarter"/>
+          </p:nvPr>
+        </p:nvSpPr>
+        <p:spPr/>
+      </p:sp>
+    </p:spTree>
+  </p:cSld>
+  <p:clrMapOvr>
+    <a:masterClrMapping/>
+  </p:clrMapOvr>
+</p:notes>
+</file>
+
+<file path=ppt/notesSlides/notesSlide20.xml><?xml version="1.0" encoding="utf-8"?>
+<p:notes xmlns:a="http://schemas.openxmlformats.org/drawingml/2006/main" xmlns:p="http://schemas.openxmlformats.org/presentationml/2006/main" xmlns:r="http://schemas.openxmlformats.org/officeDocument/2006/relationships">
+  <p:cSld>
+    <p:spTree>
+      <p:nvGrpSpPr>
+        <p:cNvPr id="1" name=""/>
+        <p:cNvGrpSpPr/>
+        <p:nvPr/>
+      </p:nvGrpSpPr>
+      <p:grpSpPr>
+        <a:xfrm>
+          <a:off x="0" y="0"/>
+          <a:ext cx="0" cy="0"/>
+          <a:chOff x="0" y="0"/>
+          <a:chExt cx="0" cy="0"/>
+        </a:xfrm>
+      </p:grpSpPr>
+      <p:sp>
+        <p:nvSpPr>
+          <p:cNvPr id="2" name="Slide Image Placeholder 1"/>
+          <p:cNvSpPr>
+            <a:spLocks noGrp="1"/>
+          </p:cNvSpPr>
+          <p:nvPr>
+            <p:ph type="sldImg" idx="2"/>
+          </p:nvPr>
+        </p:nvSpPr>
+        <p:spPr/>
+      </p:sp>
+      <p:sp>
+        <p:nvSpPr>
+          <p:cNvPr id="3" name="Notes Placeholder 2"/>
+          <p:cNvSpPr>
+            <a:spLocks noGrp="1"/>
+          </p:cNvSpPr>
+          <p:nvPr>
+            <p:ph type="body" idx="3" sz="quarter"/>
+          </p:nvPr>
+        </p:nvSpPr>
+        <p:spPr/>
+        <p:txBody>
+          <a:bodyPr/>
+          <a:lstStyle/>
+          <a:p>
+            <a:r>
+              <a:t>Four asks, each tied to a partner. Be specific about what each partner gives us — vague asks get vague yeses. Close with the repo URL so judges can run the code themselves.</a:t>
             </a:r>
           </a:p>
         </p:txBody>
@@ -5237,7 +5592,7 @@
                 </a:solidFill>
                 <a:latin typeface="Calibri"/>
               </a:rPr>
-              <a:t>Powered by Dell AI Factory  ·  Zero-rated on Vodacom  ·  CAPS-aligned</a:t>
+              <a:t>Powered by Dell AI Factory  ·  Zero-rate-ready on Vodacom  ·  CAPS-aligned</a:t>
             </a:r>
           </a:p>
         </p:txBody>
@@ -6819,7 +7174,7 @@
                 </a:solidFill>
                 <a:latin typeface="Calibri"/>
               </a:rPr>
-              <a:t>• Zero at point of use (zero-rated)</a:t>
+              <a:t>• Near-zero learner cost · zero-rate-ready on Vodacom</a:t>
             </a:r>
           </a:p>
           <a:p>
@@ -7249,8 +7604,8 @@
         </p:nvSpPr>
         <p:spPr>
           <a:xfrm>
-            <a:off x="548640" y="457200"/>
-            <a:ext cx="11064240" cy="548640"/>
+            <a:off x="548640" y="365760"/>
+            <a:ext cx="11064240" cy="457200"/>
           </a:xfrm>
           <a:prstGeom prst="rect">
             <a:avLst/>
@@ -7271,7 +7626,7 @@
                 </a:solidFill>
                 <a:latin typeface="Calibri"/>
               </a:rPr>
-              <a:t>Roadmap</a:t>
+              <a:t>Cybersecurity &amp; data protection</a:t>
             </a:r>
           </a:p>
         </p:txBody>
@@ -7284,8 +7639,8 @@
         </p:nvSpPr>
         <p:spPr>
           <a:xfrm>
-            <a:off x="548640" y="914400"/>
-            <a:ext cx="11064240" cy="914400"/>
+            <a:off x="548640" y="777240"/>
+            <a:ext cx="11064240" cy="640080"/>
           </a:xfrm>
           <a:prstGeom prst="rect">
             <a:avLst/>
@@ -7300,13 +7655,13 @@
           <a:p>
             <a:pPr algn="l"/>
             <a:r>
-              <a:rPr sz="3000" b="1">
+              <a:rPr sz="2600" b="1">
                 <a:solidFill>
                   <a:srgbClr val="FFFFFF"/>
                 </a:solidFill>
                 <a:latin typeface="Calibri"/>
               </a:rPr>
-              <a:t>From hackathon prototype to national pilot.</a:t>
+              <a:t>POPIA-aligned. SA-hostable. Learner-safe by design.</a:t>
             </a:r>
           </a:p>
         </p:txBody>
@@ -7319,7 +7674,7 @@
         </p:nvSpPr>
         <p:spPr>
           <a:xfrm>
-            <a:off x="548640" y="2011680"/>
+            <a:off x="548640" y="1600200"/>
             <a:ext cx="3657600" cy="50800"/>
           </a:xfrm>
           <a:prstGeom prst="rect">
@@ -7362,8 +7717,59 @@
         </p:nvSpPr>
         <p:spPr>
           <a:xfrm>
-            <a:off x="548640" y="2468880"/>
-            <a:ext cx="1371600" cy="411480"/>
+            <a:off x="548640" y="1920240"/>
+            <a:ext cx="1737360" cy="411480"/>
+          </a:xfrm>
+          <a:prstGeom prst="roundRect">
+            <a:avLst/>
+          </a:prstGeom>
+          <a:solidFill>
+            <a:srgbClr val="00A884"/>
+          </a:solidFill>
+          <a:ln>
+            <a:noFill/>
+          </a:ln>
+        </p:spPr>
+        <p:style>
+          <a:lnRef idx="1">
+            <a:schemeClr val="accent1"/>
+          </a:lnRef>
+          <a:fillRef idx="3">
+            <a:schemeClr val="accent1"/>
+          </a:fillRef>
+          <a:effectRef idx="2">
+            <a:schemeClr val="accent1"/>
+          </a:effectRef>
+          <a:fontRef idx="minor">
+            <a:schemeClr val="lt1"/>
+          </a:fontRef>
+        </p:style>
+        <p:txBody>
+          <a:bodyPr rtlCol="0" anchor="ctr" lIns="137160" rIns="137160"/>
+          <a:lstStyle/>
+          <a:p>
+            <a:pPr algn="ctr"/>
+            <a:r>
+              <a:rPr sz="1200" b="1">
+                <a:solidFill>
+                  <a:srgbClr val="03110D"/>
+                </a:solidFill>
+              </a:rPr>
+              <a:t>Built today</a:t>
+            </a:r>
+          </a:p>
+        </p:txBody>
+      </p:sp>
+      <p:sp>
+        <p:nvSpPr>
+          <p:cNvPr id="6" name="Rounded Rectangle 5"/>
+          <p:cNvSpPr/>
+          <p:nvPr/>
+        </p:nvSpPr>
+        <p:spPr>
+          <a:xfrm>
+            <a:off x="6400800" y="1920240"/>
+            <a:ext cx="2926080" cy="411480"/>
           </a:xfrm>
           <a:prstGeom prst="roundRect">
             <a:avLst/>
@@ -7400,21 +7806,21 @@
                   <a:srgbClr val="03110D"/>
                 </a:solidFill>
               </a:rPr>
-              <a:t>Now</a:t>
-            </a:r>
-          </a:p>
-        </p:txBody>
-      </p:sp>
-      <p:sp>
-        <p:nvSpPr>
-          <p:cNvPr id="6" name="TextBox 5"/>
+              <a:t>Ships in Phase 1 with Vodacom</a:t>
+            </a:r>
+          </a:p>
+        </p:txBody>
+      </p:sp>
+      <p:sp>
+        <p:nvSpPr>
+          <p:cNvPr id="7" name="TextBox 6"/>
           <p:cNvSpPr txBox="1"/>
           <p:nvPr/>
         </p:nvSpPr>
         <p:spPr>
           <a:xfrm>
-            <a:off x="2011680" y="2468880"/>
-            <a:ext cx="2286000" cy="411480"/>
+            <a:off x="548640" y="2514600"/>
+            <a:ext cx="5303520" cy="3657600"/>
           </a:xfrm>
           <a:prstGeom prst="rect">
             <a:avLst/>
@@ -7427,29 +7833,129 @@
           </a:bodyPr>
           <a:lstStyle/>
           <a:p>
-            <a:pPr algn="l"/>
-            <a:r>
-              <a:rPr sz="1600" b="1">
-                <a:solidFill>
-                  <a:srgbClr val="FFFFFF"/>
-                </a:solidFill>
-                <a:latin typeface="Calibri"/>
-              </a:rPr>
-              <a:t>Hackathon</a:t>
-            </a:r>
-          </a:p>
-        </p:txBody>
-      </p:sp>
-      <p:sp>
-        <p:nvSpPr>
-          <p:cNvPr id="7" name="TextBox 6"/>
+            <a:pPr algn="l">
+              <a:spcBef>
+                <a:spcPts val="600"/>
+              </a:spcBef>
+            </a:pPr>
+            <a:r>
+              <a:rPr sz="1300">
+                <a:solidFill>
+                  <a:srgbClr val="E9EDEF"/>
+                </a:solidFill>
+                <a:latin typeface="Calibri"/>
+              </a:rPr>
+              <a:t>✓ HTTPS everywhere (TLS 1.3 via Render)</a:t>
+            </a:r>
+          </a:p>
+          <a:p>
+            <a:pPr algn="l">
+              <a:spcBef>
+                <a:spcPts val="600"/>
+              </a:spcBef>
+            </a:pPr>
+            <a:r>
+              <a:rPr sz="1300">
+                <a:solidFill>
+                  <a:srgbClr val="E9EDEF"/>
+                </a:solidFill>
+                <a:latin typeface="Calibri"/>
+              </a:rPr>
+              <a:t>✓ Minimal PII: phone + grade + language only</a:t>
+            </a:r>
+          </a:p>
+          <a:p>
+            <a:pPr algn="l">
+              <a:spcBef>
+                <a:spcPts val="600"/>
+              </a:spcBef>
+            </a:pPr>
+            <a:r>
+              <a:rPr sz="1300">
+                <a:solidFill>
+                  <a:srgbClr val="E9EDEF"/>
+                </a:solidFill>
+                <a:latin typeface="Calibri"/>
+              </a:rPr>
+              <a:t>✓ No password / no account → no credential to steal</a:t>
+            </a:r>
+          </a:p>
+          <a:p>
+            <a:pPr algn="l">
+              <a:spcBef>
+                <a:spcPts val="600"/>
+              </a:spcBef>
+            </a:pPr>
+            <a:r>
+              <a:rPr sz="1300">
+                <a:solidFill>
+                  <a:srgbClr val="E9EDEF"/>
+                </a:solidFill>
+                <a:latin typeface="Calibri"/>
+              </a:rPr>
+              <a:t>✓ Platform-level content filter (violence/CSAM auto-blocked)</a:t>
+            </a:r>
+          </a:p>
+          <a:p>
+            <a:pPr algn="l">
+              <a:spcBef>
+                <a:spcPts val="600"/>
+              </a:spcBef>
+            </a:pPr>
+            <a:r>
+              <a:rPr sz="1300">
+                <a:solidFill>
+                  <a:srgbClr val="E9EDEF"/>
+                </a:solidFill>
+                <a:latin typeface="Calibri"/>
+              </a:rPr>
+              <a:t>✓ Rate-limiter + in-flight lock (spam-resistant)</a:t>
+            </a:r>
+          </a:p>
+          <a:p>
+            <a:pPr algn="l">
+              <a:spcBef>
+                <a:spcPts val="600"/>
+              </a:spcBef>
+            </a:pPr>
+            <a:r>
+              <a:rPr sz="1300">
+                <a:solidFill>
+                  <a:srgbClr val="E9EDEF"/>
+                </a:solidFill>
+                <a:latin typeface="Calibri"/>
+              </a:rPr>
+              <a:t>✓ Structured errors — never leaks keys / DB paths / stack traces</a:t>
+            </a:r>
+          </a:p>
+          <a:p>
+            <a:pPr algn="l">
+              <a:spcBef>
+                <a:spcPts val="600"/>
+              </a:spcBef>
+            </a:pPr>
+            <a:r>
+              <a:rPr sz="1300">
+                <a:solidFill>
+                  <a:srgbClr val="E9EDEF"/>
+                </a:solidFill>
+                <a:latin typeface="Calibri"/>
+              </a:rPr>
+              <a:t>✓ Analytics logs the FACT of interaction, never raw learner text</a:t>
+            </a:r>
+          </a:p>
+        </p:txBody>
+      </p:sp>
+      <p:sp>
+        <p:nvSpPr>
+          <p:cNvPr id="8" name="TextBox 7"/>
           <p:cNvSpPr txBox="1"/>
           <p:nvPr/>
         </p:nvSpPr>
         <p:spPr>
           <a:xfrm>
-            <a:off x="548640" y="3108960"/>
-            <a:ext cx="3657600" cy="3200400"/>
+            <a:off x="6400800" y="2514600"/>
+            <a:ext cx="5303520" cy="3657600"/>
           </a:xfrm>
           <a:prstGeom prst="rect">
             <a:avLst/>
@@ -7464,88 +7970,138 @@
           <a:p>
             <a:pPr algn="l">
               <a:spcBef>
-                <a:spcPts val="800"/>
+                <a:spcPts val="600"/>
               </a:spcBef>
             </a:pPr>
             <a:r>
-              <a:rPr sz="1200">
+              <a:rPr sz="1300">
                 <a:solidFill>
                   <a:srgbClr val="E9EDEF"/>
                 </a:solidFill>
                 <a:latin typeface="Calibri"/>
               </a:rPr>
-              <a:t>• Both channels working end-to-end</a:t>
+              <a:t>→ POPIA consent flow (U18 parental gate)</a:t>
             </a:r>
           </a:p>
           <a:p>
             <a:pPr algn="l">
               <a:spcBef>
-                <a:spcPts val="800"/>
+                <a:spcPts val="600"/>
               </a:spcBef>
             </a:pPr>
             <a:r>
-              <a:rPr sz="1200">
+              <a:rPr sz="1300">
                 <a:solidFill>
                   <a:srgbClr val="E9EDEF"/>
                 </a:solidFill>
                 <a:latin typeface="Calibri"/>
               </a:rPr>
-              <a:t>• Real NSC questions, cited sources</a:t>
+              <a:t>→ Encryption at rest (PostgreSQL, column-level)</a:t>
             </a:r>
           </a:p>
           <a:p>
             <a:pPr algn="l">
               <a:spcBef>
-                <a:spcPts val="800"/>
+                <a:spcPts val="600"/>
               </a:spcBef>
             </a:pPr>
             <a:r>
-              <a:rPr sz="1200">
+              <a:rPr sz="1300">
                 <a:solidFill>
                   <a:srgbClr val="E9EDEF"/>
                 </a:solidFill>
                 <a:latin typeface="Calibri"/>
               </a:rPr>
-              <a:t>• CAPS mappings against ATPs</a:t>
+              <a:t>→ SA data residency (Vodacom Cloud or Dell AI Factory SA)</a:t>
             </a:r>
           </a:p>
           <a:p>
             <a:pPr algn="l">
               <a:spcBef>
-                <a:spcPts val="800"/>
+                <a:spcPts val="600"/>
               </a:spcBef>
             </a:pPr>
             <a:r>
-              <a:rPr sz="1200">
+              <a:rPr sz="1300">
                 <a:solidFill>
                   <a:srgbClr val="E9EDEF"/>
                 </a:solidFill>
                 <a:latin typeface="Calibri"/>
               </a:rPr>
-              <a:t>• Mock providers (offline demo)</a:t>
-            </a:r>
-          </a:p>
-        </p:txBody>
-      </p:sp>
-      <p:sp>
-        <p:nvSpPr>
-          <p:cNvPr id="8" name="Rounded Rectangle 7"/>
+              <a:t>→ 7-year immutable audit trail (POPIA retention)</a:t>
+            </a:r>
+          </a:p>
+          <a:p>
+            <a:pPr algn="l">
+              <a:spcBef>
+                <a:spcPts val="600"/>
+              </a:spcBef>
+            </a:pPr>
+            <a:r>
+              <a:rPr sz="1300">
+                <a:solidFill>
+                  <a:srgbClr val="E9EDEF"/>
+                </a:solidFill>
+                <a:latin typeface="Calibri"/>
+              </a:rPr>
+              <a:t>→ Crisis-keyword detector + safeguarding-lead escalation</a:t>
+            </a:r>
+          </a:p>
+          <a:p>
+            <a:pPr algn="l">
+              <a:spcBef>
+                <a:spcPts val="600"/>
+              </a:spcBef>
+            </a:pPr>
+            <a:r>
+              <a:rPr sz="1300">
+                <a:solidFill>
+                  <a:srgbClr val="E9EDEF"/>
+                </a:solidFill>
+                <a:latin typeface="Calibri"/>
+              </a:rPr>
+              <a:t>→ Non-maths image classifier — refuses off-topic uploads politely</a:t>
+            </a:r>
+          </a:p>
+          <a:p>
+            <a:pPr algn="l">
+              <a:spcBef>
+                <a:spcPts val="600"/>
+              </a:spcBef>
+            </a:pPr>
+            <a:r>
+              <a:rPr sz="1300">
+                <a:solidFill>
+                  <a:srgbClr val="E9EDEF"/>
+                </a:solidFill>
+                <a:latin typeface="Calibri"/>
+              </a:rPr>
+              <a:t>→ Named DPO alignment + Data Processing Agreement</a:t>
+            </a:r>
+          </a:p>
+        </p:txBody>
+      </p:sp>
+      <p:sp>
+        <p:nvSpPr>
+          <p:cNvPr id="9" name="Rounded Rectangle 8"/>
           <p:cNvSpPr/>
           <p:nvPr/>
         </p:nvSpPr>
         <p:spPr>
           <a:xfrm>
-            <a:off x="4389120" y="2468880"/>
-            <a:ext cx="1371600" cy="411480"/>
+            <a:off x="548640" y="6263640"/>
+            <a:ext cx="11064240" cy="411480"/>
           </a:xfrm>
           <a:prstGeom prst="roundRect">
             <a:avLst/>
           </a:prstGeom>
           <a:solidFill>
-            <a:srgbClr val="FFB347"/>
+            <a:srgbClr val="111B21"/>
           </a:solidFill>
-          <a:ln>
-            <a:noFill/>
+          <a:ln w="12700">
+            <a:solidFill>
+              <a:srgbClr val="00A884"/>
+            </a:solidFill>
           </a:ln>
         </p:spPr>
         <p:style>
@@ -7563,31 +8119,21 @@
           </a:fontRef>
         </p:style>
         <p:txBody>
-          <a:bodyPr rtlCol="0" anchor="ctr" lIns="137160" rIns="137160"/>
-          <a:lstStyle/>
-          <a:p>
-            <a:pPr algn="ctr"/>
-            <a:r>
-              <a:rPr sz="1200" b="1">
-                <a:solidFill>
-                  <a:srgbClr val="03110D"/>
-                </a:solidFill>
-              </a:rPr>
-              <a:t>Q3 2026</a:t>
-            </a:r>
-          </a:p>
-        </p:txBody>
-      </p:sp>
-      <p:sp>
-        <p:nvSpPr>
-          <p:cNvPr id="9" name="TextBox 8"/>
+          <a:bodyPr rtlCol="0" anchor="ctr"/>
+          <a:lstStyle/>
+          <a:p/>
+        </p:txBody>
+      </p:sp>
+      <p:sp>
+        <p:nvSpPr>
+          <p:cNvPr id="10" name="TextBox 9"/>
           <p:cNvSpPr txBox="1"/>
           <p:nvPr/>
         </p:nvSpPr>
         <p:spPr>
           <a:xfrm>
-            <a:off x="5852160" y="2468880"/>
-            <a:ext cx="2286000" cy="411480"/>
+            <a:off x="548640" y="6318503"/>
+            <a:ext cx="11064240" cy="320040"/>
           </a:xfrm>
           <a:prstGeom prst="rect">
             <a:avLst/>
@@ -7600,275 +8146,15 @@
           </a:bodyPr>
           <a:lstStyle/>
           <a:p>
-            <a:pPr algn="l"/>
-            <a:r>
-              <a:rPr sz="1600" b="1">
-                <a:solidFill>
-                  <a:srgbClr val="FFFFFF"/>
-                </a:solidFill>
-                <a:latin typeface="Calibri"/>
-              </a:rPr>
-              <a:t>Pilot</a:t>
-            </a:r>
-          </a:p>
-        </p:txBody>
-      </p:sp>
-      <p:sp>
-        <p:nvSpPr>
-          <p:cNvPr id="10" name="TextBox 9"/>
-          <p:cNvSpPr txBox="1"/>
-          <p:nvPr/>
-        </p:nvSpPr>
-        <p:spPr>
-          <a:xfrm>
-            <a:off x="4389120" y="3108960"/>
-            <a:ext cx="3657600" cy="3200400"/>
-          </a:xfrm>
-          <a:prstGeom prst="rect">
-            <a:avLst/>
-          </a:prstGeom>
-          <a:noFill/>
-        </p:spPr>
-        <p:txBody>
-          <a:bodyPr wrap="square">
-            <a:spAutoFit/>
-          </a:bodyPr>
-          <a:lstStyle/>
-          <a:p>
-            <a:pPr algn="l">
-              <a:spcBef>
-                <a:spcPts val="800"/>
-              </a:spcBef>
-            </a:pPr>
-            <a:r>
-              <a:rPr sz="1200">
-                <a:solidFill>
-                  <a:srgbClr val="E9EDEF"/>
-                </a:solidFill>
-                <a:latin typeface="Calibri"/>
-              </a:rPr>
-              <a:t>• Dell AI Factory LLM + VLM live</a:t>
-            </a:r>
-          </a:p>
-          <a:p>
-            <a:pPr algn="l">
-              <a:spcBef>
-                <a:spcPts val="800"/>
-              </a:spcBef>
-            </a:pPr>
-            <a:r>
-              <a:rPr sz="1200">
-                <a:solidFill>
-                  <a:srgbClr val="E9EDEF"/>
-                </a:solidFill>
-                <a:latin typeface="Calibri"/>
-              </a:rPr>
-              <a:t>• Vodacom WhatsApp + USSD partnership</a:t>
-            </a:r>
-          </a:p>
-          <a:p>
-            <a:pPr algn="l">
-              <a:spcBef>
-                <a:spcPts val="800"/>
-              </a:spcBef>
-            </a:pPr>
-            <a:r>
-              <a:rPr sz="1200">
-                <a:solidFill>
-                  <a:srgbClr val="E9EDEF"/>
-                </a:solidFill>
-                <a:latin typeface="Calibri"/>
-              </a:rPr>
-              <a:t>• 5 schools across 2 provinces</a:t>
-            </a:r>
-          </a:p>
-          <a:p>
-            <a:pPr algn="l">
-              <a:spcBef>
-                <a:spcPts val="800"/>
-              </a:spcBef>
-            </a:pPr>
-            <a:r>
-              <a:rPr sz="1200">
-                <a:solidFill>
-                  <a:srgbClr val="E9EDEF"/>
-                </a:solidFill>
-                <a:latin typeface="Calibri"/>
-              </a:rPr>
-              <a:t>• Educator advisory board (4-6 teachers)</a:t>
-            </a:r>
-          </a:p>
-        </p:txBody>
-      </p:sp>
-      <p:sp>
-        <p:nvSpPr>
-          <p:cNvPr id="11" name="Rounded Rectangle 10"/>
-          <p:cNvSpPr/>
-          <p:nvPr/>
-        </p:nvSpPr>
-        <p:spPr>
-          <a:xfrm>
-            <a:off x="8229600" y="2468880"/>
-            <a:ext cx="1371600" cy="411480"/>
-          </a:xfrm>
-          <a:prstGeom prst="roundRect">
-            <a:avLst/>
-          </a:prstGeom>
-          <a:solidFill>
-            <a:srgbClr val="FFB347"/>
-          </a:solidFill>
-          <a:ln>
-            <a:noFill/>
-          </a:ln>
-        </p:spPr>
-        <p:style>
-          <a:lnRef idx="1">
-            <a:schemeClr val="accent1"/>
-          </a:lnRef>
-          <a:fillRef idx="3">
-            <a:schemeClr val="accent1"/>
-          </a:fillRef>
-          <a:effectRef idx="2">
-            <a:schemeClr val="accent1"/>
-          </a:effectRef>
-          <a:fontRef idx="minor">
-            <a:schemeClr val="lt1"/>
-          </a:fontRef>
-        </p:style>
-        <p:txBody>
-          <a:bodyPr rtlCol="0" anchor="ctr" lIns="137160" rIns="137160"/>
-          <a:lstStyle/>
-          <a:p>
             <a:pPr algn="ctr"/>
             <a:r>
-              <a:rPr sz="1200" b="1">
-                <a:solidFill>
-                  <a:srgbClr val="03110D"/>
-                </a:solidFill>
-              </a:rPr>
-              <a:t>2027</a:t>
-            </a:r>
-          </a:p>
-        </p:txBody>
-      </p:sp>
-      <p:sp>
-        <p:nvSpPr>
-          <p:cNvPr id="12" name="TextBox 11"/>
-          <p:cNvSpPr txBox="1"/>
-          <p:nvPr/>
-        </p:nvSpPr>
-        <p:spPr>
-          <a:xfrm>
-            <a:off x="9692640" y="2468880"/>
-            <a:ext cx="2286000" cy="411480"/>
-          </a:xfrm>
-          <a:prstGeom prst="rect">
-            <a:avLst/>
-          </a:prstGeom>
-          <a:noFill/>
-        </p:spPr>
-        <p:txBody>
-          <a:bodyPr wrap="square">
-            <a:spAutoFit/>
-          </a:bodyPr>
-          <a:lstStyle/>
-          <a:p>
-            <a:pPr algn="l"/>
-            <a:r>
-              <a:rPr sz="1600" b="1">
-                <a:solidFill>
-                  <a:srgbClr val="FFFFFF"/>
-                </a:solidFill>
-                <a:latin typeface="Calibri"/>
-              </a:rPr>
-              <a:t>Scale</a:t>
-            </a:r>
-          </a:p>
-        </p:txBody>
-      </p:sp>
-      <p:sp>
-        <p:nvSpPr>
-          <p:cNvPr id="13" name="TextBox 12"/>
-          <p:cNvSpPr txBox="1"/>
-          <p:nvPr/>
-        </p:nvSpPr>
-        <p:spPr>
-          <a:xfrm>
-            <a:off x="8229600" y="3108960"/>
-            <a:ext cx="3657600" cy="3200400"/>
-          </a:xfrm>
-          <a:prstGeom prst="rect">
-            <a:avLst/>
-          </a:prstGeom>
-          <a:noFill/>
-        </p:spPr>
-        <p:txBody>
-          <a:bodyPr wrap="square">
-            <a:spAutoFit/>
-          </a:bodyPr>
-          <a:lstStyle/>
-          <a:p>
-            <a:pPr algn="l">
-              <a:spcBef>
-                <a:spcPts val="800"/>
-              </a:spcBef>
-            </a:pPr>
-            <a:r>
-              <a:rPr sz="1200">
-                <a:solidFill>
-                  <a:srgbClr val="E9EDEF"/>
-                </a:solidFill>
-                <a:latin typeface="Calibri"/>
-              </a:rPr>
-              <a:t>• All 11 official spoken languages educator-validated + SA Sign Language</a:t>
-            </a:r>
-          </a:p>
-          <a:p>
-            <a:pPr algn="l">
-              <a:spcBef>
-                <a:spcPts val="800"/>
-              </a:spcBef>
-            </a:pPr>
-            <a:r>
-              <a:rPr sz="1200">
-                <a:solidFill>
-                  <a:srgbClr val="E9EDEF"/>
-                </a:solidFill>
-                <a:latin typeface="Calibri"/>
-              </a:rPr>
-              <a:t>• Maths Lit, Sciences, Accounting</a:t>
-            </a:r>
-          </a:p>
-          <a:p>
-            <a:pPr algn="l">
-              <a:spcBef>
-                <a:spcPts val="800"/>
-              </a:spcBef>
-            </a:pPr>
-            <a:r>
-              <a:rPr sz="1200">
-                <a:solidFill>
-                  <a:srgbClr val="E9EDEF"/>
-                </a:solidFill>
-                <a:latin typeface="Calibri"/>
-              </a:rPr>
-              <a:t>• Class-level analytics for teachers</a:t>
-            </a:r>
-          </a:p>
-          <a:p>
-            <a:pPr algn="l">
-              <a:spcBef>
-                <a:spcPts val="800"/>
-              </a:spcBef>
-            </a:pPr>
-            <a:r>
-              <a:rPr sz="1200">
-                <a:solidFill>
-                  <a:srgbClr val="E9EDEF"/>
-                </a:solidFill>
-                <a:latin typeface="Calibri"/>
-              </a:rPr>
-              <a:t>• DBE adoption discussions</a:t>
+              <a:rPr sz="1100" b="1">
+                <a:solidFill>
+                  <a:srgbClr val="9CFF8C"/>
+                </a:solidFill>
+                <a:latin typeface="Calibri"/>
+              </a:rPr>
+              <a:t>All right-side items are 1–2 day engineering tasks. Deliberately deferred to align with Vodacom's DPO framework and hosting choice.</a:t>
             </a:r>
           </a:p>
         </p:txBody>
@@ -7925,11 +8211,11 @@
             <a:r>
               <a:rPr sz="1400" b="1">
                 <a:solidFill>
-                  <a:srgbClr val="FFB347"/>
-                </a:solidFill>
-                <a:latin typeface="Calibri"/>
-              </a:rPr>
-              <a:t>The ask</a:t>
+                  <a:srgbClr val="00A884"/>
+                </a:solidFill>
+                <a:latin typeface="Calibri"/>
+              </a:rPr>
+              <a:t>Roadmap</a:t>
             </a:r>
           </a:p>
         </p:txBody>
@@ -7958,13 +8244,13 @@
           <a:p>
             <a:pPr algn="l"/>
             <a:r>
-              <a:rPr sz="3200" b="1">
+              <a:rPr sz="3000" b="1">
                 <a:solidFill>
                   <a:srgbClr val="FFFFFF"/>
                 </a:solidFill>
                 <a:latin typeface="Calibri"/>
               </a:rPr>
-              <a:t>What we need to go from finalist to pilot.</a:t>
+              <a:t>From hackathon prototype to national pilot.</a:t>
             </a:r>
           </a:p>
         </p:txBody>
@@ -7981,6 +8267,49 @@
             <a:ext cx="3657600" cy="50800"/>
           </a:xfrm>
           <a:prstGeom prst="rect">
+            <a:avLst/>
+          </a:prstGeom>
+          <a:solidFill>
+            <a:srgbClr val="00A884"/>
+          </a:solidFill>
+          <a:ln>
+            <a:noFill/>
+          </a:ln>
+        </p:spPr>
+        <p:style>
+          <a:lnRef idx="1">
+            <a:schemeClr val="accent1"/>
+          </a:lnRef>
+          <a:fillRef idx="3">
+            <a:schemeClr val="accent1"/>
+          </a:fillRef>
+          <a:effectRef idx="2">
+            <a:schemeClr val="accent1"/>
+          </a:effectRef>
+          <a:fontRef idx="minor">
+            <a:schemeClr val="lt1"/>
+          </a:fontRef>
+        </p:style>
+        <p:txBody>
+          <a:bodyPr rtlCol="0" anchor="ctr"/>
+          <a:lstStyle/>
+          <a:p>
+            <a:pPr algn="ctr"/>
+          </a:p>
+        </p:txBody>
+      </p:sp>
+      <p:sp>
+        <p:nvSpPr>
+          <p:cNvPr id="5" name="Rounded Rectangle 4"/>
+          <p:cNvSpPr/>
+          <p:nvPr/>
+        </p:nvSpPr>
+        <p:spPr>
+          <a:xfrm>
+            <a:off x="548640" y="2468880"/>
+            <a:ext cx="1371600" cy="411480"/>
+          </a:xfrm>
+          <a:prstGeom prst="roundRect">
             <a:avLst/>
           </a:prstGeom>
           <a:solidFill>
@@ -8005,25 +8334,597 @@
           </a:fontRef>
         </p:style>
         <p:txBody>
-          <a:bodyPr rtlCol="0" anchor="ctr"/>
+          <a:bodyPr rtlCol="0" anchor="ctr" lIns="137160" rIns="137160"/>
           <a:lstStyle/>
           <a:p>
             <a:pPr algn="ctr"/>
-          </a:p>
-        </p:txBody>
-      </p:sp>
-      <p:sp>
-        <p:nvSpPr>
-          <p:cNvPr id="5" name="Rounded Rectangle 4"/>
+            <a:r>
+              <a:rPr sz="1200" b="1">
+                <a:solidFill>
+                  <a:srgbClr val="03110D"/>
+                </a:solidFill>
+              </a:rPr>
+              <a:t>Now</a:t>
+            </a:r>
+          </a:p>
+        </p:txBody>
+      </p:sp>
+      <p:sp>
+        <p:nvSpPr>
+          <p:cNvPr id="6" name="TextBox 5"/>
+          <p:cNvSpPr txBox="1"/>
+          <p:nvPr/>
+        </p:nvSpPr>
+        <p:spPr>
+          <a:xfrm>
+            <a:off x="2011680" y="2468880"/>
+            <a:ext cx="2286000" cy="411480"/>
+          </a:xfrm>
+          <a:prstGeom prst="rect">
+            <a:avLst/>
+          </a:prstGeom>
+          <a:noFill/>
+        </p:spPr>
+        <p:txBody>
+          <a:bodyPr wrap="square">
+            <a:spAutoFit/>
+          </a:bodyPr>
+          <a:lstStyle/>
+          <a:p>
+            <a:pPr algn="l"/>
+            <a:r>
+              <a:rPr sz="1600" b="1">
+                <a:solidFill>
+                  <a:srgbClr val="FFFFFF"/>
+                </a:solidFill>
+                <a:latin typeface="Calibri"/>
+              </a:rPr>
+              <a:t>Hackathon</a:t>
+            </a:r>
+          </a:p>
+        </p:txBody>
+      </p:sp>
+      <p:sp>
+        <p:nvSpPr>
+          <p:cNvPr id="7" name="TextBox 6"/>
+          <p:cNvSpPr txBox="1"/>
+          <p:nvPr/>
+        </p:nvSpPr>
+        <p:spPr>
+          <a:xfrm>
+            <a:off x="548640" y="3108960"/>
+            <a:ext cx="3657600" cy="3200400"/>
+          </a:xfrm>
+          <a:prstGeom prst="rect">
+            <a:avLst/>
+          </a:prstGeom>
+          <a:noFill/>
+        </p:spPr>
+        <p:txBody>
+          <a:bodyPr wrap="square">
+            <a:spAutoFit/>
+          </a:bodyPr>
+          <a:lstStyle/>
+          <a:p>
+            <a:pPr algn="l">
+              <a:spcBef>
+                <a:spcPts val="800"/>
+              </a:spcBef>
+            </a:pPr>
+            <a:r>
+              <a:rPr sz="1200">
+                <a:solidFill>
+                  <a:srgbClr val="E9EDEF"/>
+                </a:solidFill>
+                <a:latin typeface="Calibri"/>
+              </a:rPr>
+              <a:t>• Both channels working end-to-end</a:t>
+            </a:r>
+          </a:p>
+          <a:p>
+            <a:pPr algn="l">
+              <a:spcBef>
+                <a:spcPts val="800"/>
+              </a:spcBef>
+            </a:pPr>
+            <a:r>
+              <a:rPr sz="1200">
+                <a:solidFill>
+                  <a:srgbClr val="E9EDEF"/>
+                </a:solidFill>
+                <a:latin typeface="Calibri"/>
+              </a:rPr>
+              <a:t>• Real NSC questions, cited sources</a:t>
+            </a:r>
+          </a:p>
+          <a:p>
+            <a:pPr algn="l">
+              <a:spcBef>
+                <a:spcPts val="800"/>
+              </a:spcBef>
+            </a:pPr>
+            <a:r>
+              <a:rPr sz="1200">
+                <a:solidFill>
+                  <a:srgbClr val="E9EDEF"/>
+                </a:solidFill>
+                <a:latin typeface="Calibri"/>
+              </a:rPr>
+              <a:t>• CAPS mappings against ATPs</a:t>
+            </a:r>
+          </a:p>
+          <a:p>
+            <a:pPr algn="l">
+              <a:spcBef>
+                <a:spcPts val="800"/>
+              </a:spcBef>
+            </a:pPr>
+            <a:r>
+              <a:rPr sz="1200">
+                <a:solidFill>
+                  <a:srgbClr val="E9EDEF"/>
+                </a:solidFill>
+                <a:latin typeface="Calibri"/>
+              </a:rPr>
+              <a:t>• Mock providers (offline demo)</a:t>
+            </a:r>
+          </a:p>
+        </p:txBody>
+      </p:sp>
+      <p:sp>
+        <p:nvSpPr>
+          <p:cNvPr id="8" name="Rounded Rectangle 7"/>
           <p:cNvSpPr/>
           <p:nvPr/>
         </p:nvSpPr>
         <p:spPr>
           <a:xfrm>
-            <a:off x="548640" y="2468880"/>
-            <a:ext cx="1828800" cy="502920"/>
+            <a:off x="4389120" y="2468880"/>
+            <a:ext cx="1371600" cy="411480"/>
           </a:xfrm>
           <a:prstGeom prst="roundRect">
+            <a:avLst/>
+          </a:prstGeom>
+          <a:solidFill>
+            <a:srgbClr val="FFB347"/>
+          </a:solidFill>
+          <a:ln>
+            <a:noFill/>
+          </a:ln>
+        </p:spPr>
+        <p:style>
+          <a:lnRef idx="1">
+            <a:schemeClr val="accent1"/>
+          </a:lnRef>
+          <a:fillRef idx="3">
+            <a:schemeClr val="accent1"/>
+          </a:fillRef>
+          <a:effectRef idx="2">
+            <a:schemeClr val="accent1"/>
+          </a:effectRef>
+          <a:fontRef idx="minor">
+            <a:schemeClr val="lt1"/>
+          </a:fontRef>
+        </p:style>
+        <p:txBody>
+          <a:bodyPr rtlCol="0" anchor="ctr" lIns="137160" rIns="137160"/>
+          <a:lstStyle/>
+          <a:p>
+            <a:pPr algn="ctr"/>
+            <a:r>
+              <a:rPr sz="1200" b="1">
+                <a:solidFill>
+                  <a:srgbClr val="03110D"/>
+                </a:solidFill>
+              </a:rPr>
+              <a:t>Q3 2026</a:t>
+            </a:r>
+          </a:p>
+        </p:txBody>
+      </p:sp>
+      <p:sp>
+        <p:nvSpPr>
+          <p:cNvPr id="9" name="TextBox 8"/>
+          <p:cNvSpPr txBox="1"/>
+          <p:nvPr/>
+        </p:nvSpPr>
+        <p:spPr>
+          <a:xfrm>
+            <a:off x="5852160" y="2468880"/>
+            <a:ext cx="2286000" cy="411480"/>
+          </a:xfrm>
+          <a:prstGeom prst="rect">
+            <a:avLst/>
+          </a:prstGeom>
+          <a:noFill/>
+        </p:spPr>
+        <p:txBody>
+          <a:bodyPr wrap="square">
+            <a:spAutoFit/>
+          </a:bodyPr>
+          <a:lstStyle/>
+          <a:p>
+            <a:pPr algn="l"/>
+            <a:r>
+              <a:rPr sz="1600" b="1">
+                <a:solidFill>
+                  <a:srgbClr val="FFFFFF"/>
+                </a:solidFill>
+                <a:latin typeface="Calibri"/>
+              </a:rPr>
+              <a:t>Pilot</a:t>
+            </a:r>
+          </a:p>
+        </p:txBody>
+      </p:sp>
+      <p:sp>
+        <p:nvSpPr>
+          <p:cNvPr id="10" name="TextBox 9"/>
+          <p:cNvSpPr txBox="1"/>
+          <p:nvPr/>
+        </p:nvSpPr>
+        <p:spPr>
+          <a:xfrm>
+            <a:off x="4389120" y="3108960"/>
+            <a:ext cx="3657600" cy="3200400"/>
+          </a:xfrm>
+          <a:prstGeom prst="rect">
+            <a:avLst/>
+          </a:prstGeom>
+          <a:noFill/>
+        </p:spPr>
+        <p:txBody>
+          <a:bodyPr wrap="square">
+            <a:spAutoFit/>
+          </a:bodyPr>
+          <a:lstStyle/>
+          <a:p>
+            <a:pPr algn="l">
+              <a:spcBef>
+                <a:spcPts val="800"/>
+              </a:spcBef>
+            </a:pPr>
+            <a:r>
+              <a:rPr sz="1200">
+                <a:solidFill>
+                  <a:srgbClr val="E9EDEF"/>
+                </a:solidFill>
+                <a:latin typeface="Calibri"/>
+              </a:rPr>
+              <a:t>• Dell AI Factory LLM + VLM live</a:t>
+            </a:r>
+          </a:p>
+          <a:p>
+            <a:pPr algn="l">
+              <a:spcBef>
+                <a:spcPts val="800"/>
+              </a:spcBef>
+            </a:pPr>
+            <a:r>
+              <a:rPr sz="1200">
+                <a:solidFill>
+                  <a:srgbClr val="E9EDEF"/>
+                </a:solidFill>
+                <a:latin typeface="Calibri"/>
+              </a:rPr>
+              <a:t>• Vodacom WhatsApp + USSD partnership</a:t>
+            </a:r>
+          </a:p>
+          <a:p>
+            <a:pPr algn="l">
+              <a:spcBef>
+                <a:spcPts val="800"/>
+              </a:spcBef>
+            </a:pPr>
+            <a:r>
+              <a:rPr sz="1200">
+                <a:solidFill>
+                  <a:srgbClr val="E9EDEF"/>
+                </a:solidFill>
+                <a:latin typeface="Calibri"/>
+              </a:rPr>
+              <a:t>• 5 schools across 2 provinces</a:t>
+            </a:r>
+          </a:p>
+          <a:p>
+            <a:pPr algn="l">
+              <a:spcBef>
+                <a:spcPts val="800"/>
+              </a:spcBef>
+            </a:pPr>
+            <a:r>
+              <a:rPr sz="1200">
+                <a:solidFill>
+                  <a:srgbClr val="E9EDEF"/>
+                </a:solidFill>
+                <a:latin typeface="Calibri"/>
+              </a:rPr>
+              <a:t>• Educator advisory board (4-6 teachers)</a:t>
+            </a:r>
+          </a:p>
+        </p:txBody>
+      </p:sp>
+      <p:sp>
+        <p:nvSpPr>
+          <p:cNvPr id="11" name="Rounded Rectangle 10"/>
+          <p:cNvSpPr/>
+          <p:nvPr/>
+        </p:nvSpPr>
+        <p:spPr>
+          <a:xfrm>
+            <a:off x="8229600" y="2468880"/>
+            <a:ext cx="1371600" cy="411480"/>
+          </a:xfrm>
+          <a:prstGeom prst="roundRect">
+            <a:avLst/>
+          </a:prstGeom>
+          <a:solidFill>
+            <a:srgbClr val="FFB347"/>
+          </a:solidFill>
+          <a:ln>
+            <a:noFill/>
+          </a:ln>
+        </p:spPr>
+        <p:style>
+          <a:lnRef idx="1">
+            <a:schemeClr val="accent1"/>
+          </a:lnRef>
+          <a:fillRef idx="3">
+            <a:schemeClr val="accent1"/>
+          </a:fillRef>
+          <a:effectRef idx="2">
+            <a:schemeClr val="accent1"/>
+          </a:effectRef>
+          <a:fontRef idx="minor">
+            <a:schemeClr val="lt1"/>
+          </a:fontRef>
+        </p:style>
+        <p:txBody>
+          <a:bodyPr rtlCol="0" anchor="ctr" lIns="137160" rIns="137160"/>
+          <a:lstStyle/>
+          <a:p>
+            <a:pPr algn="ctr"/>
+            <a:r>
+              <a:rPr sz="1200" b="1">
+                <a:solidFill>
+                  <a:srgbClr val="03110D"/>
+                </a:solidFill>
+              </a:rPr>
+              <a:t>2027</a:t>
+            </a:r>
+          </a:p>
+        </p:txBody>
+      </p:sp>
+      <p:sp>
+        <p:nvSpPr>
+          <p:cNvPr id="12" name="TextBox 11"/>
+          <p:cNvSpPr txBox="1"/>
+          <p:nvPr/>
+        </p:nvSpPr>
+        <p:spPr>
+          <a:xfrm>
+            <a:off x="9692640" y="2468880"/>
+            <a:ext cx="2286000" cy="411480"/>
+          </a:xfrm>
+          <a:prstGeom prst="rect">
+            <a:avLst/>
+          </a:prstGeom>
+          <a:noFill/>
+        </p:spPr>
+        <p:txBody>
+          <a:bodyPr wrap="square">
+            <a:spAutoFit/>
+          </a:bodyPr>
+          <a:lstStyle/>
+          <a:p>
+            <a:pPr algn="l"/>
+            <a:r>
+              <a:rPr sz="1600" b="1">
+                <a:solidFill>
+                  <a:srgbClr val="FFFFFF"/>
+                </a:solidFill>
+                <a:latin typeface="Calibri"/>
+              </a:rPr>
+              <a:t>Scale</a:t>
+            </a:r>
+          </a:p>
+        </p:txBody>
+      </p:sp>
+      <p:sp>
+        <p:nvSpPr>
+          <p:cNvPr id="13" name="TextBox 12"/>
+          <p:cNvSpPr txBox="1"/>
+          <p:nvPr/>
+        </p:nvSpPr>
+        <p:spPr>
+          <a:xfrm>
+            <a:off x="8229600" y="3108960"/>
+            <a:ext cx="3657600" cy="3200400"/>
+          </a:xfrm>
+          <a:prstGeom prst="rect">
+            <a:avLst/>
+          </a:prstGeom>
+          <a:noFill/>
+        </p:spPr>
+        <p:txBody>
+          <a:bodyPr wrap="square">
+            <a:spAutoFit/>
+          </a:bodyPr>
+          <a:lstStyle/>
+          <a:p>
+            <a:pPr algn="l">
+              <a:spcBef>
+                <a:spcPts val="800"/>
+              </a:spcBef>
+            </a:pPr>
+            <a:r>
+              <a:rPr sz="1200">
+                <a:solidFill>
+                  <a:srgbClr val="E9EDEF"/>
+                </a:solidFill>
+                <a:latin typeface="Calibri"/>
+              </a:rPr>
+              <a:t>• All 11 official spoken languages educator-validated + SA Sign Language</a:t>
+            </a:r>
+          </a:p>
+          <a:p>
+            <a:pPr algn="l">
+              <a:spcBef>
+                <a:spcPts val="800"/>
+              </a:spcBef>
+            </a:pPr>
+            <a:r>
+              <a:rPr sz="1200">
+                <a:solidFill>
+                  <a:srgbClr val="E9EDEF"/>
+                </a:solidFill>
+                <a:latin typeface="Calibri"/>
+              </a:rPr>
+              <a:t>• Maths Lit, Sciences, Accounting</a:t>
+            </a:r>
+          </a:p>
+          <a:p>
+            <a:pPr algn="l">
+              <a:spcBef>
+                <a:spcPts val="800"/>
+              </a:spcBef>
+            </a:pPr>
+            <a:r>
+              <a:rPr sz="1200">
+                <a:solidFill>
+                  <a:srgbClr val="E9EDEF"/>
+                </a:solidFill>
+                <a:latin typeface="Calibri"/>
+              </a:rPr>
+              <a:t>• Class-level analytics for teachers</a:t>
+            </a:r>
+          </a:p>
+          <a:p>
+            <a:pPr algn="l">
+              <a:spcBef>
+                <a:spcPts val="800"/>
+              </a:spcBef>
+            </a:pPr>
+            <a:r>
+              <a:rPr sz="1200">
+                <a:solidFill>
+                  <a:srgbClr val="E9EDEF"/>
+                </a:solidFill>
+                <a:latin typeface="Calibri"/>
+              </a:rPr>
+              <a:t>• DBE adoption discussions</a:t>
+            </a:r>
+          </a:p>
+        </p:txBody>
+      </p:sp>
+    </p:spTree>
+  </p:cSld>
+  <p:clrMapOvr>
+    <a:masterClrMapping/>
+  </p:clrMapOvr>
+</p:sld>
+</file>
+
+<file path=ppt/slides/slide16.xml><?xml version="1.0" encoding="utf-8"?>
+<p:sld xmlns:a="http://schemas.openxmlformats.org/drawingml/2006/main" xmlns:p="http://schemas.openxmlformats.org/presentationml/2006/main" xmlns:r="http://schemas.openxmlformats.org/officeDocument/2006/relationships">
+  <p:cSld>
+    <p:bg>
+      <p:bgPr>
+        <a:solidFill>
+          <a:srgbClr val="0B141A"/>
+        </a:solidFill>
+        <a:effectLst/>
+      </p:bgPr>
+    </p:bg>
+    <p:spTree>
+      <p:nvGrpSpPr>
+        <p:cNvPr id="1" name=""/>
+        <p:cNvGrpSpPr/>
+        <p:nvPr/>
+      </p:nvGrpSpPr>
+      <p:grpSpPr/>
+      <p:sp>
+        <p:nvSpPr>
+          <p:cNvPr id="2" name="TextBox 1"/>
+          <p:cNvSpPr txBox="1"/>
+          <p:nvPr/>
+        </p:nvSpPr>
+        <p:spPr>
+          <a:xfrm>
+            <a:off x="548640" y="365760"/>
+            <a:ext cx="11064240" cy="457200"/>
+          </a:xfrm>
+          <a:prstGeom prst="rect">
+            <a:avLst/>
+          </a:prstGeom>
+          <a:noFill/>
+        </p:spPr>
+        <p:txBody>
+          <a:bodyPr wrap="square">
+            <a:spAutoFit/>
+          </a:bodyPr>
+          <a:lstStyle/>
+          <a:p>
+            <a:pPr algn="l"/>
+            <a:r>
+              <a:rPr sz="1400" b="1">
+                <a:solidFill>
+                  <a:srgbClr val="00A884"/>
+                </a:solidFill>
+                <a:latin typeface="Calibri"/>
+              </a:rPr>
+              <a:t>Economics</a:t>
+            </a:r>
+          </a:p>
+        </p:txBody>
+      </p:sp>
+      <p:sp>
+        <p:nvSpPr>
+          <p:cNvPr id="3" name="TextBox 2"/>
+          <p:cNvSpPr txBox="1"/>
+          <p:nvPr/>
+        </p:nvSpPr>
+        <p:spPr>
+          <a:xfrm>
+            <a:off x="548640" y="777240"/>
+            <a:ext cx="11064240" cy="640080"/>
+          </a:xfrm>
+          <a:prstGeom prst="rect">
+            <a:avLst/>
+          </a:prstGeom>
+          <a:noFill/>
+        </p:spPr>
+        <p:txBody>
+          <a:bodyPr wrap="square">
+            <a:spAutoFit/>
+          </a:bodyPr>
+          <a:lstStyle/>
+          <a:p>
+            <a:pPr algn="l"/>
+            <a:r>
+              <a:rPr sz="2800" b="1">
+                <a:solidFill>
+                  <a:srgbClr val="FFFFFF"/>
+                </a:solidFill>
+                <a:latin typeface="Calibri"/>
+              </a:rPr>
+              <a:t>R2 per learner per year. At scale.</a:t>
+            </a:r>
+          </a:p>
+        </p:txBody>
+      </p:sp>
+      <p:sp>
+        <p:nvSpPr>
+          <p:cNvPr id="4" name="Rectangle 3"/>
+          <p:cNvSpPr/>
+          <p:nvPr/>
+        </p:nvSpPr>
+        <p:spPr>
+          <a:xfrm>
+            <a:off x="548640" y="1600200"/>
+            <a:ext cx="3657600" cy="50800"/>
+          </a:xfrm>
+          <a:prstGeom prst="rect">
             <a:avLst/>
           </a:prstGeom>
           <a:solidFill>
@@ -8048,19 +8949,54 @@
           </a:fontRef>
         </p:style>
         <p:txBody>
-          <a:bodyPr rtlCol="0" anchor="ctr" lIns="137160" rIns="137160"/>
+          <a:bodyPr rtlCol="0" anchor="ctr"/>
           <a:lstStyle/>
           <a:p>
             <a:pPr algn="ctr"/>
-            <a:r>
-              <a:rPr sz="1400" b="1">
-                <a:solidFill>
-                  <a:srgbClr val="03110D"/>
-                </a:solidFill>
-              </a:rPr>
-              <a:t>Dell</a:t>
-            </a:r>
-          </a:p>
+          </a:p>
+        </p:txBody>
+      </p:sp>
+      <p:sp>
+        <p:nvSpPr>
+          <p:cNvPr id="5" name="Rounded Rectangle 4"/>
+          <p:cNvSpPr/>
+          <p:nvPr/>
+        </p:nvSpPr>
+        <p:spPr>
+          <a:xfrm>
+            <a:off x="548640" y="1874519"/>
+            <a:ext cx="11064240" cy="1234440"/>
+          </a:xfrm>
+          <a:prstGeom prst="roundRect">
+            <a:avLst/>
+          </a:prstGeom>
+          <a:solidFill>
+            <a:srgbClr val="111B21"/>
+          </a:solidFill>
+          <a:ln w="19050">
+            <a:solidFill>
+              <a:srgbClr val="00A884"/>
+            </a:solidFill>
+          </a:ln>
+        </p:spPr>
+        <p:style>
+          <a:lnRef idx="1">
+            <a:schemeClr val="accent1"/>
+          </a:lnRef>
+          <a:fillRef idx="3">
+            <a:schemeClr val="accent1"/>
+          </a:fillRef>
+          <a:effectRef idx="2">
+            <a:schemeClr val="accent1"/>
+          </a:effectRef>
+          <a:fontRef idx="minor">
+            <a:schemeClr val="lt1"/>
+          </a:fontRef>
+        </p:style>
+        <p:txBody>
+          <a:bodyPr rtlCol="0" anchor="ctr"/>
+          <a:lstStyle/>
+          <a:p/>
         </p:txBody>
       </p:sp>
       <p:sp>
@@ -8071,8 +9007,8 @@
         </p:nvSpPr>
         <p:spPr>
           <a:xfrm>
-            <a:off x="2651760" y="2514600"/>
-            <a:ext cx="8961120" cy="548640"/>
+            <a:off x="548640" y="2011679"/>
+            <a:ext cx="3688080" cy="320040"/>
           </a:xfrm>
           <a:prstGeom prst="rect">
             <a:avLst/>
@@ -8085,29 +9021,750 @@
           </a:bodyPr>
           <a:lstStyle/>
           <a:p>
+            <a:pPr algn="ctr"/>
+            <a:r>
+              <a:rPr sz="1100" b="1">
+                <a:solidFill>
+                  <a:srgbClr val="8696A0"/>
+                </a:solidFill>
+                <a:latin typeface="Calibri"/>
+              </a:rPr>
+              <a:t>COST PER LEARNER / YEAR</a:t>
+            </a:r>
+          </a:p>
+        </p:txBody>
+      </p:sp>
+      <p:sp>
+        <p:nvSpPr>
+          <p:cNvPr id="7" name="TextBox 6"/>
+          <p:cNvSpPr txBox="1"/>
+          <p:nvPr/>
+        </p:nvSpPr>
+        <p:spPr>
+          <a:xfrm>
+            <a:off x="548640" y="2331720"/>
+            <a:ext cx="3688080" cy="685800"/>
+          </a:xfrm>
+          <a:prstGeom prst="rect">
+            <a:avLst/>
+          </a:prstGeom>
+          <a:noFill/>
+        </p:spPr>
+        <p:txBody>
+          <a:bodyPr wrap="square">
+            <a:spAutoFit/>
+          </a:bodyPr>
+          <a:lstStyle/>
+          <a:p>
+            <a:pPr algn="ctr"/>
+            <a:r>
+              <a:rPr sz="4400" b="1">
+                <a:solidFill>
+                  <a:srgbClr val="9CFF8C"/>
+                </a:solidFill>
+                <a:latin typeface="Calibri"/>
+              </a:rPr>
+              <a:t>≈ R2</a:t>
+            </a:r>
+          </a:p>
+        </p:txBody>
+      </p:sp>
+      <p:sp>
+        <p:nvSpPr>
+          <p:cNvPr id="8" name="TextBox 7"/>
+          <p:cNvSpPr txBox="1"/>
+          <p:nvPr/>
+        </p:nvSpPr>
+        <p:spPr>
+          <a:xfrm>
+            <a:off x="4236720" y="2011679"/>
+            <a:ext cx="3688080" cy="320040"/>
+          </a:xfrm>
+          <a:prstGeom prst="rect">
+            <a:avLst/>
+          </a:prstGeom>
+          <a:noFill/>
+        </p:spPr>
+        <p:txBody>
+          <a:bodyPr wrap="square">
+            <a:spAutoFit/>
+          </a:bodyPr>
+          <a:lstStyle/>
+          <a:p>
+            <a:pPr algn="ctr"/>
+            <a:r>
+              <a:rPr sz="1100" b="1">
+                <a:solidFill>
+                  <a:srgbClr val="8696A0"/>
+                </a:solidFill>
+                <a:latin typeface="Calibri"/>
+              </a:rPr>
+              <a:t>100,000 LEARNERS</a:t>
+            </a:r>
+          </a:p>
+        </p:txBody>
+      </p:sp>
+      <p:sp>
+        <p:nvSpPr>
+          <p:cNvPr id="9" name="TextBox 8"/>
+          <p:cNvSpPr txBox="1"/>
+          <p:nvPr/>
+        </p:nvSpPr>
+        <p:spPr>
+          <a:xfrm>
+            <a:off x="4236720" y="2331720"/>
+            <a:ext cx="3688080" cy="685800"/>
+          </a:xfrm>
+          <a:prstGeom prst="rect">
+            <a:avLst/>
+          </a:prstGeom>
+          <a:noFill/>
+        </p:spPr>
+        <p:txBody>
+          <a:bodyPr wrap="square">
+            <a:spAutoFit/>
+          </a:bodyPr>
+          <a:lstStyle/>
+          <a:p>
+            <a:pPr algn="ctr"/>
+            <a:r>
+              <a:rPr sz="3600" b="1">
+                <a:solidFill>
+                  <a:srgbClr val="FFFFFF"/>
+                </a:solidFill>
+                <a:latin typeface="Calibri"/>
+              </a:rPr>
+              <a:t>≈ R200k / yr</a:t>
+            </a:r>
+          </a:p>
+        </p:txBody>
+      </p:sp>
+      <p:sp>
+        <p:nvSpPr>
+          <p:cNvPr id="10" name="TextBox 9"/>
+          <p:cNvSpPr txBox="1"/>
+          <p:nvPr/>
+        </p:nvSpPr>
+        <p:spPr>
+          <a:xfrm>
+            <a:off x="7924799" y="2011679"/>
+            <a:ext cx="3688080" cy="320040"/>
+          </a:xfrm>
+          <a:prstGeom prst="rect">
+            <a:avLst/>
+          </a:prstGeom>
+          <a:noFill/>
+        </p:spPr>
+        <p:txBody>
+          <a:bodyPr wrap="square">
+            <a:spAutoFit/>
+          </a:bodyPr>
+          <a:lstStyle/>
+          <a:p>
+            <a:pPr algn="ctr"/>
+            <a:r>
+              <a:rPr sz="1100" b="1">
+                <a:solidFill>
+                  <a:srgbClr val="8696A0"/>
+                </a:solidFill>
+                <a:latin typeface="Calibri"/>
+              </a:rPr>
+              <a:t>PRIVATE TUTOR EQUIV.</a:t>
+            </a:r>
+          </a:p>
+        </p:txBody>
+      </p:sp>
+      <p:sp>
+        <p:nvSpPr>
+          <p:cNvPr id="11" name="TextBox 10"/>
+          <p:cNvSpPr txBox="1"/>
+          <p:nvPr/>
+        </p:nvSpPr>
+        <p:spPr>
+          <a:xfrm>
+            <a:off x="7924799" y="2331720"/>
+            <a:ext cx="3688080" cy="685800"/>
+          </a:xfrm>
+          <a:prstGeom prst="rect">
+            <a:avLst/>
+          </a:prstGeom>
+          <a:noFill/>
+        </p:spPr>
+        <p:txBody>
+          <a:bodyPr wrap="square">
+            <a:spAutoFit/>
+          </a:bodyPr>
+          <a:lstStyle/>
+          <a:p>
+            <a:pPr algn="ctr"/>
+            <a:r>
+              <a:rPr sz="3600" b="1">
+                <a:solidFill>
+                  <a:srgbClr val="FFE9B8"/>
+                </a:solidFill>
+                <a:latin typeface="Calibri"/>
+              </a:rPr>
+              <a:t>R16,000 / yr</a:t>
+            </a:r>
+          </a:p>
+        </p:txBody>
+      </p:sp>
+      <p:sp>
+        <p:nvSpPr>
+          <p:cNvPr id="12" name="TextBox 11"/>
+          <p:cNvSpPr txBox="1"/>
+          <p:nvPr/>
+        </p:nvSpPr>
+        <p:spPr>
+          <a:xfrm>
+            <a:off x="548640" y="3337560"/>
+            <a:ext cx="5303520" cy="365760"/>
+          </a:xfrm>
+          <a:prstGeom prst="rect">
+            <a:avLst/>
+          </a:prstGeom>
+          <a:noFill/>
+        </p:spPr>
+        <p:txBody>
+          <a:bodyPr wrap="square">
+            <a:spAutoFit/>
+          </a:bodyPr>
+          <a:lstStyle/>
+          <a:p>
             <a:pPr algn="l"/>
             <a:r>
-              <a:rPr sz="1600" b="0">
+              <a:rPr sz="1500" b="1">
+                <a:solidFill>
+                  <a:srgbClr val="9CFF8C"/>
+                </a:solidFill>
+                <a:latin typeface="Calibri"/>
+              </a:rPr>
+              <a:t>What makes up the R2</a:t>
+            </a:r>
+          </a:p>
+        </p:txBody>
+      </p:sp>
+      <p:sp>
+        <p:nvSpPr>
+          <p:cNvPr id="13" name="TextBox 12"/>
+          <p:cNvSpPr txBox="1"/>
+          <p:nvPr/>
+        </p:nvSpPr>
+        <p:spPr>
+          <a:xfrm>
+            <a:off x="548640" y="3794760"/>
+            <a:ext cx="5303520" cy="2743200"/>
+          </a:xfrm>
+          <a:prstGeom prst="rect">
+            <a:avLst/>
+          </a:prstGeom>
+          <a:noFill/>
+        </p:spPr>
+        <p:txBody>
+          <a:bodyPr wrap="square">
+            <a:spAutoFit/>
+          </a:bodyPr>
+          <a:lstStyle/>
+          <a:p>
+            <a:pPr algn="l">
+              <a:spcBef>
+                <a:spcPts val="500"/>
+              </a:spcBef>
+            </a:pPr>
+            <a:r>
+              <a:rPr sz="1200">
                 <a:solidFill>
                   <a:srgbClr val="E9EDEF"/>
                 </a:solidFill>
                 <a:latin typeface="Calibri"/>
               </a:rPr>
-              <a:t>AI Factory hardware sponsorship + NIM endpoints (reasoning LLM + vision VLM in country).</a:t>
-            </a:r>
-          </a:p>
-        </p:txBody>
-      </p:sp>
-      <p:sp>
-        <p:nvSpPr>
-          <p:cNvPr id="7" name="Rounded Rectangle 6"/>
+              <a:t>• LLM tokens (Gemini Flash-Lite): ~R1.10 / learner / yr</a:t>
+            </a:r>
+          </a:p>
+          <a:p>
+            <a:pPr algn="l">
+              <a:spcBef>
+                <a:spcPts val="500"/>
+              </a:spcBef>
+            </a:pPr>
+            <a:r>
+              <a:rPr sz="1200">
+                <a:solidFill>
+                  <a:srgbClr val="E9EDEF"/>
+                </a:solidFill>
+                <a:latin typeface="Calibri"/>
+              </a:rPr>
+              <a:t>• USSD aggregator (per session): ~R0.40 / learner / yr</a:t>
+            </a:r>
+          </a:p>
+          <a:p>
+            <a:pPr algn="l">
+              <a:spcBef>
+                <a:spcPts val="500"/>
+              </a:spcBef>
+            </a:pPr>
+            <a:r>
+              <a:rPr sz="1200">
+                <a:solidFill>
+                  <a:srgbClr val="E9EDEF"/>
+                </a:solidFill>
+                <a:latin typeface="Calibri"/>
+              </a:rPr>
+              <a:t>• WhatsApp Cloud API + hosting: ~R0.30 / learner / yr</a:t>
+            </a:r>
+          </a:p>
+          <a:p>
+            <a:pPr algn="l">
+              <a:spcBef>
+                <a:spcPts val="500"/>
+              </a:spcBef>
+            </a:pPr>
+            <a:r>
+              <a:rPr sz="1200">
+                <a:solidFill>
+                  <a:srgbClr val="E9EDEF"/>
+                </a:solidFill>
+                <a:latin typeface="Calibri"/>
+              </a:rPr>
+              <a:t>• Analytics + monitoring + SMS OTP: ~R0.20 / learner / yr</a:t>
+            </a:r>
+          </a:p>
+          <a:p>
+            <a:pPr algn="l">
+              <a:spcBef>
+                <a:spcPts val="500"/>
+              </a:spcBef>
+            </a:pPr>
+            <a:r>
+              <a:rPr sz="1200">
+                <a:solidFill>
+                  <a:srgbClr val="E9EDEF"/>
+                </a:solidFill>
+                <a:latin typeface="Calibri"/>
+              </a:rPr>
+              <a:t>• Assumes: ~100 sessions/learner/year, mixed channels</a:t>
+            </a:r>
+          </a:p>
+          <a:p>
+            <a:pPr algn="l">
+              <a:spcBef>
+                <a:spcPts val="500"/>
+              </a:spcBef>
+            </a:pPr>
+            <a:r>
+              <a:rPr sz="1200">
+                <a:solidFill>
+                  <a:srgbClr val="E9EDEF"/>
+                </a:solidFill>
+                <a:latin typeface="Calibri"/>
+              </a:rPr>
+              <a:t>• At production scale on Dell AI Factory NIM: ~R0.80 / yr</a:t>
+            </a:r>
+          </a:p>
+        </p:txBody>
+      </p:sp>
+      <p:sp>
+        <p:nvSpPr>
+          <p:cNvPr id="14" name="TextBox 13"/>
+          <p:cNvSpPr txBox="1"/>
+          <p:nvPr/>
+        </p:nvSpPr>
+        <p:spPr>
+          <a:xfrm>
+            <a:off x="6400800" y="3337560"/>
+            <a:ext cx="5303520" cy="365760"/>
+          </a:xfrm>
+          <a:prstGeom prst="rect">
+            <a:avLst/>
+          </a:prstGeom>
+          <a:noFill/>
+        </p:spPr>
+        <p:txBody>
+          <a:bodyPr wrap="square">
+            <a:spAutoFit/>
+          </a:bodyPr>
+          <a:lstStyle/>
+          <a:p>
+            <a:pPr algn="l"/>
+            <a:r>
+              <a:rPr sz="1500" b="1">
+                <a:solidFill>
+                  <a:srgbClr val="9CFF8C"/>
+                </a:solidFill>
+                <a:latin typeface="Calibri"/>
+              </a:rPr>
+              <a:t>ROI vs. what SA learners have today</a:t>
+            </a:r>
+          </a:p>
+        </p:txBody>
+      </p:sp>
+      <p:sp>
+        <p:nvSpPr>
+          <p:cNvPr id="15" name="Rounded Rectangle 14"/>
           <p:cNvSpPr/>
           <p:nvPr/>
         </p:nvSpPr>
         <p:spPr>
           <a:xfrm>
-            <a:off x="548640" y="3246120"/>
-            <a:ext cx="1828800" cy="502920"/>
+            <a:off x="6400800" y="3794760"/>
+            <a:ext cx="2834640" cy="411480"/>
+          </a:xfrm>
+          <a:prstGeom prst="roundRect">
+            <a:avLst/>
+          </a:prstGeom>
+          <a:solidFill>
+            <a:srgbClr val="111B21"/>
+          </a:solidFill>
+          <a:ln>
+            <a:noFill/>
+          </a:ln>
+        </p:spPr>
+        <p:style>
+          <a:lnRef idx="1">
+            <a:schemeClr val="accent1"/>
+          </a:lnRef>
+          <a:fillRef idx="3">
+            <a:schemeClr val="accent1"/>
+          </a:fillRef>
+          <a:effectRef idx="2">
+            <a:schemeClr val="accent1"/>
+          </a:effectRef>
+          <a:fontRef idx="minor">
+            <a:schemeClr val="lt1"/>
+          </a:fontRef>
+        </p:style>
+        <p:txBody>
+          <a:bodyPr rtlCol="0" anchor="ctr" lIns="137160" rIns="137160"/>
+          <a:lstStyle/>
+          <a:p>
+            <a:pPr algn="ctr"/>
+            <a:r>
+              <a:rPr sz="1200" b="1">
+                <a:solidFill>
+                  <a:srgbClr val="E9EDEF"/>
+                </a:solidFill>
+              </a:rPr>
+              <a:t>Private tutor</a:t>
+            </a:r>
+          </a:p>
+        </p:txBody>
+      </p:sp>
+      <p:sp>
+        <p:nvSpPr>
+          <p:cNvPr id="16" name="Rounded Rectangle 15"/>
+          <p:cNvSpPr/>
+          <p:nvPr/>
+        </p:nvSpPr>
+        <p:spPr>
+          <a:xfrm>
+            <a:off x="9326880" y="3794760"/>
+            <a:ext cx="2377440" cy="411480"/>
+          </a:xfrm>
+          <a:prstGeom prst="roundRect">
+            <a:avLst/>
+          </a:prstGeom>
+          <a:solidFill>
+            <a:srgbClr val="FFB347"/>
+          </a:solidFill>
+          <a:ln>
+            <a:noFill/>
+          </a:ln>
+        </p:spPr>
+        <p:style>
+          <a:lnRef idx="1">
+            <a:schemeClr val="accent1"/>
+          </a:lnRef>
+          <a:fillRef idx="3">
+            <a:schemeClr val="accent1"/>
+          </a:fillRef>
+          <a:effectRef idx="2">
+            <a:schemeClr val="accent1"/>
+          </a:effectRef>
+          <a:fontRef idx="minor">
+            <a:schemeClr val="lt1"/>
+          </a:fontRef>
+        </p:style>
+        <p:txBody>
+          <a:bodyPr rtlCol="0" anchor="ctr" lIns="137160" rIns="137160"/>
+          <a:lstStyle/>
+          <a:p>
+            <a:pPr algn="ctr"/>
+            <a:r>
+              <a:rPr sz="1200" b="1">
+                <a:solidFill>
+                  <a:srgbClr val="03110D"/>
+                </a:solidFill>
+              </a:rPr>
+              <a:t>R16,000 / yr</a:t>
+            </a:r>
+          </a:p>
+        </p:txBody>
+      </p:sp>
+      <p:sp>
+        <p:nvSpPr>
+          <p:cNvPr id="17" name="Rounded Rectangle 16"/>
+          <p:cNvSpPr/>
+          <p:nvPr/>
+        </p:nvSpPr>
+        <p:spPr>
+          <a:xfrm>
+            <a:off x="6400800" y="4343400"/>
+            <a:ext cx="2834640" cy="411480"/>
+          </a:xfrm>
+          <a:prstGeom prst="roundRect">
+            <a:avLst/>
+          </a:prstGeom>
+          <a:solidFill>
+            <a:srgbClr val="111B21"/>
+          </a:solidFill>
+          <a:ln>
+            <a:noFill/>
+          </a:ln>
+        </p:spPr>
+        <p:style>
+          <a:lnRef idx="1">
+            <a:schemeClr val="accent1"/>
+          </a:lnRef>
+          <a:fillRef idx="3">
+            <a:schemeClr val="accent1"/>
+          </a:fillRef>
+          <a:effectRef idx="2">
+            <a:schemeClr val="accent1"/>
+          </a:effectRef>
+          <a:fontRef idx="minor">
+            <a:schemeClr val="lt1"/>
+          </a:fontRef>
+        </p:style>
+        <p:txBody>
+          <a:bodyPr rtlCol="0" anchor="ctr" lIns="137160" rIns="137160"/>
+          <a:lstStyle/>
+          <a:p>
+            <a:pPr algn="ctr"/>
+            <a:r>
+              <a:rPr sz="1200" b="1">
+                <a:solidFill>
+                  <a:srgbClr val="E9EDEF"/>
+                </a:solidFill>
+              </a:rPr>
+              <a:t>Extra textbook</a:t>
+            </a:r>
+          </a:p>
+        </p:txBody>
+      </p:sp>
+      <p:sp>
+        <p:nvSpPr>
+          <p:cNvPr id="18" name="Rounded Rectangle 17"/>
+          <p:cNvSpPr/>
+          <p:nvPr/>
+        </p:nvSpPr>
+        <p:spPr>
+          <a:xfrm>
+            <a:off x="9326880" y="4343400"/>
+            <a:ext cx="2377440" cy="411480"/>
+          </a:xfrm>
+          <a:prstGeom prst="roundRect">
+            <a:avLst/>
+          </a:prstGeom>
+          <a:solidFill>
+            <a:srgbClr val="FFB347"/>
+          </a:solidFill>
+          <a:ln>
+            <a:noFill/>
+          </a:ln>
+        </p:spPr>
+        <p:style>
+          <a:lnRef idx="1">
+            <a:schemeClr val="accent1"/>
+          </a:lnRef>
+          <a:fillRef idx="3">
+            <a:schemeClr val="accent1"/>
+          </a:fillRef>
+          <a:effectRef idx="2">
+            <a:schemeClr val="accent1"/>
+          </a:effectRef>
+          <a:fontRef idx="minor">
+            <a:schemeClr val="lt1"/>
+          </a:fontRef>
+        </p:style>
+        <p:txBody>
+          <a:bodyPr rtlCol="0" anchor="ctr" lIns="137160" rIns="137160"/>
+          <a:lstStyle/>
+          <a:p>
+            <a:pPr algn="ctr"/>
+            <a:r>
+              <a:rPr sz="1200" b="1">
+                <a:solidFill>
+                  <a:srgbClr val="03110D"/>
+                </a:solidFill>
+              </a:rPr>
+              <a:t>R400 (one-off)</a:t>
+            </a:r>
+          </a:p>
+        </p:txBody>
+      </p:sp>
+      <p:sp>
+        <p:nvSpPr>
+          <p:cNvPr id="19" name="Rounded Rectangle 18"/>
+          <p:cNvSpPr/>
+          <p:nvPr/>
+        </p:nvSpPr>
+        <p:spPr>
+          <a:xfrm>
+            <a:off x="6400800" y="4892040"/>
+            <a:ext cx="2834640" cy="411480"/>
+          </a:xfrm>
+          <a:prstGeom prst="roundRect">
+            <a:avLst/>
+          </a:prstGeom>
+          <a:solidFill>
+            <a:srgbClr val="111B21"/>
+          </a:solidFill>
+          <a:ln>
+            <a:noFill/>
+          </a:ln>
+        </p:spPr>
+        <p:style>
+          <a:lnRef idx="1">
+            <a:schemeClr val="accent1"/>
+          </a:lnRef>
+          <a:fillRef idx="3">
+            <a:schemeClr val="accent1"/>
+          </a:fillRef>
+          <a:effectRef idx="2">
+            <a:schemeClr val="accent1"/>
+          </a:effectRef>
+          <a:fontRef idx="minor">
+            <a:schemeClr val="lt1"/>
+          </a:fontRef>
+        </p:style>
+        <p:txBody>
+          <a:bodyPr rtlCol="0" anchor="ctr" lIns="137160" rIns="137160"/>
+          <a:lstStyle/>
+          <a:p>
+            <a:pPr algn="ctr"/>
+            <a:r>
+              <a:rPr sz="1200" b="1">
+                <a:solidFill>
+                  <a:srgbClr val="E9EDEF"/>
+                </a:solidFill>
+              </a:rPr>
+              <a:t>Nothing (status quo)</a:t>
+            </a:r>
+          </a:p>
+        </p:txBody>
+      </p:sp>
+      <p:sp>
+        <p:nvSpPr>
+          <p:cNvPr id="20" name="Rounded Rectangle 19"/>
+          <p:cNvSpPr/>
+          <p:nvPr/>
+        </p:nvSpPr>
+        <p:spPr>
+          <a:xfrm>
+            <a:off x="9326880" y="4892040"/>
+            <a:ext cx="2377440" cy="411480"/>
+          </a:xfrm>
+          <a:prstGeom prst="roundRect">
+            <a:avLst/>
+          </a:prstGeom>
+          <a:solidFill>
+            <a:srgbClr val="FFB347"/>
+          </a:solidFill>
+          <a:ln>
+            <a:noFill/>
+          </a:ln>
+        </p:spPr>
+        <p:style>
+          <a:lnRef idx="1">
+            <a:schemeClr val="accent1"/>
+          </a:lnRef>
+          <a:fillRef idx="3">
+            <a:schemeClr val="accent1"/>
+          </a:fillRef>
+          <a:effectRef idx="2">
+            <a:schemeClr val="accent1"/>
+          </a:effectRef>
+          <a:fontRef idx="minor">
+            <a:schemeClr val="lt1"/>
+          </a:fontRef>
+        </p:style>
+        <p:txBody>
+          <a:bodyPr rtlCol="0" anchor="ctr" lIns="137160" rIns="137160"/>
+          <a:lstStyle/>
+          <a:p>
+            <a:pPr algn="ctr"/>
+            <a:r>
+              <a:rPr sz="1200" b="1">
+                <a:solidFill>
+                  <a:srgbClr val="03110D"/>
+                </a:solidFill>
+              </a:rPr>
+              <a:t>R0 · fails 50%</a:t>
+            </a:r>
+          </a:p>
+        </p:txBody>
+      </p:sp>
+      <p:sp>
+        <p:nvSpPr>
+          <p:cNvPr id="21" name="Rounded Rectangle 20"/>
+          <p:cNvSpPr/>
+          <p:nvPr/>
+        </p:nvSpPr>
+        <p:spPr>
+          <a:xfrm>
+            <a:off x="6400800" y="5440679"/>
+            <a:ext cx="2834640" cy="411480"/>
+          </a:xfrm>
+          <a:prstGeom prst="roundRect">
+            <a:avLst/>
+          </a:prstGeom>
+          <a:solidFill>
+            <a:srgbClr val="111B21"/>
+          </a:solidFill>
+          <a:ln>
+            <a:noFill/>
+          </a:ln>
+        </p:spPr>
+        <p:style>
+          <a:lnRef idx="1">
+            <a:schemeClr val="accent1"/>
+          </a:lnRef>
+          <a:fillRef idx="3">
+            <a:schemeClr val="accent1"/>
+          </a:fillRef>
+          <a:effectRef idx="2">
+            <a:schemeClr val="accent1"/>
+          </a:effectRef>
+          <a:fontRef idx="minor">
+            <a:schemeClr val="lt1"/>
+          </a:fontRef>
+        </p:style>
+        <p:txBody>
+          <a:bodyPr rtlCol="0" anchor="ctr" lIns="137160" rIns="137160"/>
+          <a:lstStyle/>
+          <a:p>
+            <a:pPr algn="ctr"/>
+            <a:r>
+              <a:rPr sz="1200" b="1">
+                <a:solidFill>
+                  <a:srgbClr val="E9EDEF"/>
+                </a:solidFill>
+              </a:rPr>
+              <a:t>EduConnect</a:t>
+            </a:r>
+          </a:p>
+        </p:txBody>
+      </p:sp>
+      <p:sp>
+        <p:nvSpPr>
+          <p:cNvPr id="22" name="Rounded Rectangle 21"/>
+          <p:cNvSpPr/>
+          <p:nvPr/>
+        </p:nvSpPr>
+        <p:spPr>
+          <a:xfrm>
+            <a:off x="9326880" y="5440679"/>
+            <a:ext cx="2377440" cy="411480"/>
           </a:xfrm>
           <a:prstGeom prst="roundRect">
             <a:avLst/>
@@ -8139,26 +9796,69 @@
           <a:p>
             <a:pPr algn="ctr"/>
             <a:r>
-              <a:rPr sz="1400" b="1">
+              <a:rPr sz="1200" b="1">
                 <a:solidFill>
                   <a:srgbClr val="03110D"/>
                 </a:solidFill>
               </a:rPr>
-              <a:t>Vodacom</a:t>
-            </a:r>
-          </a:p>
-        </p:txBody>
-      </p:sp>
-      <p:sp>
-        <p:nvSpPr>
-          <p:cNvPr id="8" name="TextBox 7"/>
+              <a:t>R2 / yr</a:t>
+            </a:r>
+          </a:p>
+        </p:txBody>
+      </p:sp>
+      <p:sp>
+        <p:nvSpPr>
+          <p:cNvPr id="23" name="Rounded Rectangle 22"/>
+          <p:cNvSpPr/>
+          <p:nvPr/>
+        </p:nvSpPr>
+        <p:spPr>
+          <a:xfrm>
+            <a:off x="548640" y="6263640"/>
+            <a:ext cx="11064240" cy="411480"/>
+          </a:xfrm>
+          <a:prstGeom prst="roundRect">
+            <a:avLst/>
+          </a:prstGeom>
+          <a:solidFill>
+            <a:srgbClr val="111B21"/>
+          </a:solidFill>
+          <a:ln w="19050">
+            <a:solidFill>
+              <a:srgbClr val="FFB347"/>
+            </a:solidFill>
+          </a:ln>
+        </p:spPr>
+        <p:style>
+          <a:lnRef idx="1">
+            <a:schemeClr val="accent1"/>
+          </a:lnRef>
+          <a:fillRef idx="3">
+            <a:schemeClr val="accent1"/>
+          </a:fillRef>
+          <a:effectRef idx="2">
+            <a:schemeClr val="accent1"/>
+          </a:effectRef>
+          <a:fontRef idx="minor">
+            <a:schemeClr val="lt1"/>
+          </a:fontRef>
+        </p:style>
+        <p:txBody>
+          <a:bodyPr rtlCol="0" anchor="ctr"/>
+          <a:lstStyle/>
+          <a:p/>
+        </p:txBody>
+      </p:sp>
+      <p:sp>
+        <p:nvSpPr>
+          <p:cNvPr id="24" name="TextBox 23"/>
           <p:cNvSpPr txBox="1"/>
           <p:nvPr/>
         </p:nvSpPr>
         <p:spPr>
           <a:xfrm>
-            <a:off x="2651760" y="3291840"/>
-            <a:ext cx="8961120" cy="548640"/>
+            <a:off x="548640" y="6318503"/>
+            <a:ext cx="11064240" cy="320040"/>
           </a:xfrm>
           <a:prstGeom prst="rect">
             <a:avLst/>
@@ -8171,31 +9871,162 @@
           </a:bodyPr>
           <a:lstStyle/>
           <a:p>
+            <a:pPr algn="ctr"/>
+            <a:r>
+              <a:rPr sz="1100" b="1">
+                <a:solidFill>
+                  <a:srgbClr val="FFE9B8"/>
+                </a:solidFill>
+                <a:latin typeface="Calibri"/>
+              </a:rPr>
+              <a:t>1 extra matric pass generates ~R150k lifetime earnings uplift. Break-even at ~1 additional pass per 75,000 learners served.</a:t>
+            </a:r>
+          </a:p>
+        </p:txBody>
+      </p:sp>
+    </p:spTree>
+  </p:cSld>
+  <p:clrMapOvr>
+    <a:masterClrMapping/>
+  </p:clrMapOvr>
+</p:sld>
+</file>
+
+<file path=ppt/slides/slide17.xml><?xml version="1.0" encoding="utf-8"?>
+<p:sld xmlns:a="http://schemas.openxmlformats.org/drawingml/2006/main" xmlns:p="http://schemas.openxmlformats.org/presentationml/2006/main" xmlns:r="http://schemas.openxmlformats.org/officeDocument/2006/relationships">
+  <p:cSld>
+    <p:bg>
+      <p:bgPr>
+        <a:solidFill>
+          <a:srgbClr val="0B141A"/>
+        </a:solidFill>
+        <a:effectLst/>
+      </p:bgPr>
+    </p:bg>
+    <p:spTree>
+      <p:nvGrpSpPr>
+        <p:cNvPr id="1" name=""/>
+        <p:cNvGrpSpPr/>
+        <p:nvPr/>
+      </p:nvGrpSpPr>
+      <p:grpSpPr/>
+      <p:sp>
+        <p:nvSpPr>
+          <p:cNvPr id="2" name="TextBox 1"/>
+          <p:cNvSpPr txBox="1"/>
+          <p:nvPr/>
+        </p:nvSpPr>
+        <p:spPr>
+          <a:xfrm>
+            <a:off x="548640" y="365760"/>
+            <a:ext cx="11064240" cy="457200"/>
+          </a:xfrm>
+          <a:prstGeom prst="rect">
+            <a:avLst/>
+          </a:prstGeom>
+          <a:noFill/>
+        </p:spPr>
+        <p:txBody>
+          <a:bodyPr wrap="square">
+            <a:spAutoFit/>
+          </a:bodyPr>
+          <a:lstStyle/>
+          <a:p>
             <a:pPr algn="l"/>
             <a:r>
-              <a:rPr sz="1600" b="0">
-                <a:solidFill>
-                  <a:srgbClr val="E9EDEF"/>
-                </a:solidFill>
-                <a:latin typeface="Calibri"/>
-              </a:rPr>
-              <a:t>WhatsApp Business Cloud number whitelisted for zero-rating; USSD shortcode partnership.</a:t>
-            </a:r>
-          </a:p>
-        </p:txBody>
-      </p:sp>
-      <p:sp>
-        <p:nvSpPr>
-          <p:cNvPr id="9" name="Rounded Rectangle 8"/>
+              <a:rPr sz="1400" b="1">
+                <a:solidFill>
+                  <a:srgbClr val="00A884"/>
+                </a:solidFill>
+                <a:latin typeface="Calibri"/>
+              </a:rPr>
+              <a:t>AI model stack</a:t>
+            </a:r>
+          </a:p>
+        </p:txBody>
+      </p:sp>
+      <p:sp>
+        <p:nvSpPr>
+          <p:cNvPr id="3" name="TextBox 2"/>
+          <p:cNvSpPr txBox="1"/>
+          <p:nvPr/>
+        </p:nvSpPr>
+        <p:spPr>
+          <a:xfrm>
+            <a:off x="548640" y="777240"/>
+            <a:ext cx="11064240" cy="548640"/>
+          </a:xfrm>
+          <a:prstGeom prst="rect">
+            <a:avLst/>
+          </a:prstGeom>
+          <a:noFill/>
+        </p:spPr>
+        <p:txBody>
+          <a:bodyPr wrap="square">
+            <a:spAutoFit/>
+          </a:bodyPr>
+          <a:lstStyle/>
+          <a:p>
+            <a:pPr algn="l"/>
+            <a:r>
+              <a:rPr sz="2600" b="1">
+                <a:solidFill>
+                  <a:srgbClr val="FFFFFF"/>
+                </a:solidFill>
+                <a:latin typeface="Calibri"/>
+              </a:rPr>
+              <a:t>One brain. Four provider options. Zero rewrites.</a:t>
+            </a:r>
+          </a:p>
+        </p:txBody>
+      </p:sp>
+      <p:sp>
+        <p:nvSpPr>
+          <p:cNvPr id="4" name="TextBox 3"/>
+          <p:cNvSpPr txBox="1"/>
+          <p:nvPr/>
+        </p:nvSpPr>
+        <p:spPr>
+          <a:xfrm>
+            <a:off x="548640" y="1371600"/>
+            <a:ext cx="11064240" cy="320040"/>
+          </a:xfrm>
+          <a:prstGeom prst="rect">
+            <a:avLst/>
+          </a:prstGeom>
+          <a:noFill/>
+        </p:spPr>
+        <p:txBody>
+          <a:bodyPr wrap="square">
+            <a:spAutoFit/>
+          </a:bodyPr>
+          <a:lstStyle/>
+          <a:p>
+            <a:pPr algn="l"/>
+            <a:r>
+              <a:rPr sz="1200" b="0">
+                <a:solidFill>
+                  <a:srgbClr val="8696A0"/>
+                </a:solidFill>
+                <a:latin typeface="Calibri"/>
+              </a:rPr>
+              <a:t>Real-time options (all OpenAI-compatible — no code changes to switch)</a:t>
+            </a:r>
+          </a:p>
+        </p:txBody>
+      </p:sp>
+      <p:sp>
+        <p:nvSpPr>
+          <p:cNvPr id="5" name="Rectangle 4"/>
           <p:cNvSpPr/>
           <p:nvPr/>
         </p:nvSpPr>
         <p:spPr>
           <a:xfrm>
-            <a:off x="548640" y="4023360"/>
-            <a:ext cx="1828800" cy="502920"/>
-          </a:xfrm>
-          <a:prstGeom prst="roundRect">
+            <a:off x="548640" y="1783080"/>
+            <a:ext cx="3657600" cy="50800"/>
+          </a:xfrm>
+          <a:prstGeom prst="rect">
             <a:avLst/>
           </a:prstGeom>
           <a:solidFill>
@@ -8220,31 +10051,66 @@
           </a:fontRef>
         </p:style>
         <p:txBody>
-          <a:bodyPr rtlCol="0" anchor="ctr" lIns="137160" rIns="137160"/>
+          <a:bodyPr rtlCol="0" anchor="ctr"/>
           <a:lstStyle/>
           <a:p>
             <a:pPr algn="ctr"/>
-            <a:r>
-              <a:rPr sz="1400" b="1">
-                <a:solidFill>
-                  <a:srgbClr val="03110D"/>
-                </a:solidFill>
-              </a:rPr>
-              <a:t>DBE / Province</a:t>
-            </a:r>
-          </a:p>
-        </p:txBody>
-      </p:sp>
-      <p:sp>
-        <p:nvSpPr>
-          <p:cNvPr id="10" name="TextBox 9"/>
+          </a:p>
+        </p:txBody>
+      </p:sp>
+      <p:sp>
+        <p:nvSpPr>
+          <p:cNvPr id="6" name="Rounded Rectangle 5"/>
+          <p:cNvSpPr/>
+          <p:nvPr/>
+        </p:nvSpPr>
+        <p:spPr>
+          <a:xfrm>
+            <a:off x="548640" y="2057400"/>
+            <a:ext cx="11064240" cy="411480"/>
+          </a:xfrm>
+          <a:prstGeom prst="roundRect">
+            <a:avLst/>
+          </a:prstGeom>
+          <a:solidFill>
+            <a:srgbClr val="111B21"/>
+          </a:solidFill>
+          <a:ln w="6350">
+            <a:solidFill>
+              <a:srgbClr val="8696A0"/>
+            </a:solidFill>
+          </a:ln>
+        </p:spPr>
+        <p:style>
+          <a:lnRef idx="1">
+            <a:schemeClr val="accent1"/>
+          </a:lnRef>
+          <a:fillRef idx="3">
+            <a:schemeClr val="accent1"/>
+          </a:fillRef>
+          <a:effectRef idx="2">
+            <a:schemeClr val="accent1"/>
+          </a:effectRef>
+          <a:fontRef idx="minor">
+            <a:schemeClr val="lt1"/>
+          </a:fontRef>
+        </p:style>
+        <p:txBody>
+          <a:bodyPr rtlCol="0" anchor="ctr"/>
+          <a:lstStyle/>
+          <a:p/>
+        </p:txBody>
+      </p:sp>
+      <p:sp>
+        <p:nvSpPr>
+          <p:cNvPr id="7" name="TextBox 6"/>
           <p:cNvSpPr txBox="1"/>
           <p:nvPr/>
         </p:nvSpPr>
         <p:spPr>
           <a:xfrm>
-            <a:off x="2651760" y="4069080"/>
-            <a:ext cx="8961120" cy="548640"/>
+            <a:off x="685800" y="2130552"/>
+            <a:ext cx="4114800" cy="320040"/>
           </a:xfrm>
           <a:prstGeom prst="rect">
             <a:avLst/>
@@ -8259,13 +10125,118 @@
           <a:p>
             <a:pPr algn="l"/>
             <a:r>
-              <a:rPr sz="1600" b="0">
-                <a:solidFill>
-                  <a:srgbClr val="E9EDEF"/>
-                </a:solidFill>
-                <a:latin typeface="Calibri"/>
-              </a:rPr>
-              <a:t>Pilot endorsement at 5 schools across 2 provinces. Anonymous outcome data sharing.</a:t>
+              <a:rPr sz="1100" b="1">
+                <a:solidFill>
+                  <a:srgbClr val="9CFF8C"/>
+                </a:solidFill>
+                <a:latin typeface="Calibri"/>
+              </a:rPr>
+              <a:t>Provider · model</a:t>
+            </a:r>
+          </a:p>
+        </p:txBody>
+      </p:sp>
+      <p:sp>
+        <p:nvSpPr>
+          <p:cNvPr id="8" name="TextBox 7"/>
+          <p:cNvSpPr txBox="1"/>
+          <p:nvPr/>
+        </p:nvSpPr>
+        <p:spPr>
+          <a:xfrm>
+            <a:off x="5074920" y="2130552"/>
+            <a:ext cx="1737360" cy="320040"/>
+          </a:xfrm>
+          <a:prstGeom prst="rect">
+            <a:avLst/>
+          </a:prstGeom>
+          <a:noFill/>
+        </p:spPr>
+        <p:txBody>
+          <a:bodyPr wrap="square">
+            <a:spAutoFit/>
+          </a:bodyPr>
+          <a:lstStyle/>
+          <a:p>
+            <a:pPr algn="l"/>
+            <a:r>
+              <a:rPr sz="1100" b="1">
+                <a:solidFill>
+                  <a:srgbClr val="9CFF8C"/>
+                </a:solidFill>
+                <a:latin typeface="Calibri"/>
+              </a:rPr>
+              <a:t>Cost / 1M in</a:t>
+            </a:r>
+          </a:p>
+        </p:txBody>
+      </p:sp>
+      <p:sp>
+        <p:nvSpPr>
+          <p:cNvPr id="9" name="TextBox 8"/>
+          <p:cNvSpPr txBox="1"/>
+          <p:nvPr/>
+        </p:nvSpPr>
+        <p:spPr>
+          <a:xfrm>
+            <a:off x="7086600" y="2130552"/>
+            <a:ext cx="1463039" cy="320040"/>
+          </a:xfrm>
+          <a:prstGeom prst="rect">
+            <a:avLst/>
+          </a:prstGeom>
+          <a:noFill/>
+        </p:spPr>
+        <p:txBody>
+          <a:bodyPr wrap="square">
+            <a:spAutoFit/>
+          </a:bodyPr>
+          <a:lstStyle/>
+          <a:p>
+            <a:pPr algn="l"/>
+            <a:r>
+              <a:rPr sz="1100" b="1">
+                <a:solidFill>
+                  <a:srgbClr val="9CFF8C"/>
+                </a:solidFill>
+                <a:latin typeface="Calibri"/>
+              </a:rPr>
+              <a:t>TPM cap</a:t>
+            </a:r>
+          </a:p>
+        </p:txBody>
+      </p:sp>
+      <p:sp>
+        <p:nvSpPr>
+          <p:cNvPr id="10" name="TextBox 9"/>
+          <p:cNvSpPr txBox="1"/>
+          <p:nvPr/>
+        </p:nvSpPr>
+        <p:spPr>
+          <a:xfrm>
+            <a:off x="8823960" y="2130552"/>
+            <a:ext cx="2651760" cy="320040"/>
+          </a:xfrm>
+          <a:prstGeom prst="rect">
+            <a:avLst/>
+          </a:prstGeom>
+          <a:noFill/>
+        </p:spPr>
+        <p:txBody>
+          <a:bodyPr wrap="square">
+            <a:spAutoFit/>
+          </a:bodyPr>
+          <a:lstStyle/>
+          <a:p>
+            <a:pPr algn="l"/>
+            <a:r>
+              <a:rPr sz="1100" b="1">
+                <a:solidFill>
+                  <a:srgbClr val="9CFF8C"/>
+                </a:solidFill>
+                <a:latin typeface="Calibri"/>
+              </a:rPr>
+              <a:t>Best for</a:t>
             </a:r>
           </a:p>
         </p:txBody>
@@ -8278,10 +10249,1134 @@
         </p:nvSpPr>
         <p:spPr>
           <a:xfrm>
-            <a:off x="548640" y="4800600"/>
-            <a:ext cx="1828800" cy="502920"/>
+            <a:off x="548640" y="2542032"/>
+            <a:ext cx="11064240" cy="658368"/>
           </a:xfrm>
           <a:prstGeom prst="roundRect">
+            <a:avLst/>
+          </a:prstGeom>
+          <a:solidFill>
+            <a:srgbClr val="00A884"/>
+          </a:solidFill>
+          <a:ln w="12700">
+            <a:solidFill>
+              <a:srgbClr val="9CFF8C"/>
+            </a:solidFill>
+          </a:ln>
+        </p:spPr>
+        <p:style>
+          <a:lnRef idx="1">
+            <a:schemeClr val="accent1"/>
+          </a:lnRef>
+          <a:fillRef idx="3">
+            <a:schemeClr val="accent1"/>
+          </a:fillRef>
+          <a:effectRef idx="2">
+            <a:schemeClr val="accent1"/>
+          </a:effectRef>
+          <a:fontRef idx="minor">
+            <a:schemeClr val="lt1"/>
+          </a:fontRef>
+        </p:style>
+        <p:txBody>
+          <a:bodyPr rtlCol="0" anchor="ctr"/>
+          <a:lstStyle/>
+          <a:p/>
+        </p:txBody>
+      </p:sp>
+      <p:sp>
+        <p:nvSpPr>
+          <p:cNvPr id="12" name="TextBox 11"/>
+          <p:cNvSpPr txBox="1"/>
+          <p:nvPr/>
+        </p:nvSpPr>
+        <p:spPr>
+          <a:xfrm>
+            <a:off x="685800" y="2706624"/>
+            <a:ext cx="4114800" cy="475488"/>
+          </a:xfrm>
+          <a:prstGeom prst="rect">
+            <a:avLst/>
+          </a:prstGeom>
+          <a:noFill/>
+        </p:spPr>
+        <p:txBody>
+          <a:bodyPr wrap="square">
+            <a:spAutoFit/>
+          </a:bodyPr>
+          <a:lstStyle/>
+          <a:p>
+            <a:pPr algn="l"/>
+            <a:r>
+              <a:rPr sz="1100" b="1">
+                <a:solidFill>
+                  <a:srgbClr val="03110D"/>
+                </a:solidFill>
+                <a:latin typeface="Calibri"/>
+              </a:rPr>
+              <a:t>Gemini 3.5 Flash-Lite · Google</a:t>
+            </a:r>
+          </a:p>
+        </p:txBody>
+      </p:sp>
+      <p:sp>
+        <p:nvSpPr>
+          <p:cNvPr id="13" name="TextBox 12"/>
+          <p:cNvSpPr txBox="1"/>
+          <p:nvPr/>
+        </p:nvSpPr>
+        <p:spPr>
+          <a:xfrm>
+            <a:off x="5074920" y="2706624"/>
+            <a:ext cx="1737360" cy="475488"/>
+          </a:xfrm>
+          <a:prstGeom prst="rect">
+            <a:avLst/>
+          </a:prstGeom>
+          <a:noFill/>
+        </p:spPr>
+        <p:txBody>
+          <a:bodyPr wrap="square">
+            <a:spAutoFit/>
+          </a:bodyPr>
+          <a:lstStyle/>
+          <a:p>
+            <a:pPr algn="l"/>
+            <a:r>
+              <a:rPr sz="1100" b="0">
+                <a:solidFill>
+                  <a:srgbClr val="03110D"/>
+                </a:solidFill>
+                <a:latin typeface="Calibri"/>
+              </a:rPr>
+              <a:t>R2 (~$0.10)</a:t>
+            </a:r>
+          </a:p>
+        </p:txBody>
+      </p:sp>
+      <p:sp>
+        <p:nvSpPr>
+          <p:cNvPr id="14" name="TextBox 13"/>
+          <p:cNvSpPr txBox="1"/>
+          <p:nvPr/>
+        </p:nvSpPr>
+        <p:spPr>
+          <a:xfrm>
+            <a:off x="7086600" y="2706624"/>
+            <a:ext cx="1463039" cy="475488"/>
+          </a:xfrm>
+          <a:prstGeom prst="rect">
+            <a:avLst/>
+          </a:prstGeom>
+          <a:noFill/>
+        </p:spPr>
+        <p:txBody>
+          <a:bodyPr wrap="square">
+            <a:spAutoFit/>
+          </a:bodyPr>
+          <a:lstStyle/>
+          <a:p>
+            <a:pPr algn="l"/>
+            <a:r>
+              <a:rPr sz="1100" b="0">
+                <a:solidFill>
+                  <a:srgbClr val="03110D"/>
+                </a:solidFill>
+                <a:latin typeface="Calibri"/>
+              </a:rPr>
+              <a:t>250,000</a:t>
+            </a:r>
+          </a:p>
+        </p:txBody>
+      </p:sp>
+      <p:sp>
+        <p:nvSpPr>
+          <p:cNvPr id="15" name="TextBox 14"/>
+          <p:cNvSpPr txBox="1"/>
+          <p:nvPr/>
+        </p:nvSpPr>
+        <p:spPr>
+          <a:xfrm>
+            <a:off x="8823960" y="2706624"/>
+            <a:ext cx="2651760" cy="475488"/>
+          </a:xfrm>
+          <a:prstGeom prst="rect">
+            <a:avLst/>
+          </a:prstGeom>
+          <a:noFill/>
+        </p:spPr>
+        <p:txBody>
+          <a:bodyPr wrap="square">
+            <a:spAutoFit/>
+          </a:bodyPr>
+          <a:lstStyle/>
+          <a:p>
+            <a:pPr algn="l"/>
+            <a:r>
+              <a:rPr sz="1100" b="1">
+                <a:solidFill>
+                  <a:srgbClr val="03110D"/>
+                </a:solidFill>
+                <a:latin typeface="Calibri"/>
+              </a:rPr>
+              <a:t>PILOT · what we run today</a:t>
+            </a:r>
+          </a:p>
+        </p:txBody>
+      </p:sp>
+      <p:sp>
+        <p:nvSpPr>
+          <p:cNvPr id="16" name="Rounded Rectangle 15"/>
+          <p:cNvSpPr/>
+          <p:nvPr/>
+        </p:nvSpPr>
+        <p:spPr>
+          <a:xfrm>
+            <a:off x="548640" y="3273552"/>
+            <a:ext cx="11064240" cy="658368"/>
+          </a:xfrm>
+          <a:prstGeom prst="roundRect">
+            <a:avLst/>
+          </a:prstGeom>
+          <a:solidFill>
+            <a:srgbClr val="111B21"/>
+          </a:solidFill>
+          <a:ln w="12700">
+            <a:solidFill>
+              <a:srgbClr val="8696A0"/>
+            </a:solidFill>
+          </a:ln>
+        </p:spPr>
+        <p:style>
+          <a:lnRef idx="1">
+            <a:schemeClr val="accent1"/>
+          </a:lnRef>
+          <a:fillRef idx="3">
+            <a:schemeClr val="accent1"/>
+          </a:fillRef>
+          <a:effectRef idx="2">
+            <a:schemeClr val="accent1"/>
+          </a:effectRef>
+          <a:fontRef idx="minor">
+            <a:schemeClr val="lt1"/>
+          </a:fontRef>
+        </p:style>
+        <p:txBody>
+          <a:bodyPr rtlCol="0" anchor="ctr"/>
+          <a:lstStyle/>
+          <a:p/>
+        </p:txBody>
+      </p:sp>
+      <p:sp>
+        <p:nvSpPr>
+          <p:cNvPr id="17" name="TextBox 16"/>
+          <p:cNvSpPr txBox="1"/>
+          <p:nvPr/>
+        </p:nvSpPr>
+        <p:spPr>
+          <a:xfrm>
+            <a:off x="685800" y="3438144"/>
+            <a:ext cx="4114800" cy="475488"/>
+          </a:xfrm>
+          <a:prstGeom prst="rect">
+            <a:avLst/>
+          </a:prstGeom>
+          <a:noFill/>
+        </p:spPr>
+        <p:txBody>
+          <a:bodyPr wrap="square">
+            <a:spAutoFit/>
+          </a:bodyPr>
+          <a:lstStyle/>
+          <a:p>
+            <a:pPr algn="l"/>
+            <a:r>
+              <a:rPr sz="1100" b="1">
+                <a:solidFill>
+                  <a:srgbClr val="E9EDEF"/>
+                </a:solidFill>
+                <a:latin typeface="Calibri"/>
+              </a:rPr>
+              <a:t>GPT-4o-mini · OpenAI</a:t>
+            </a:r>
+          </a:p>
+        </p:txBody>
+      </p:sp>
+      <p:sp>
+        <p:nvSpPr>
+          <p:cNvPr id="18" name="TextBox 17"/>
+          <p:cNvSpPr txBox="1"/>
+          <p:nvPr/>
+        </p:nvSpPr>
+        <p:spPr>
+          <a:xfrm>
+            <a:off x="5074920" y="3438144"/>
+            <a:ext cx="1737360" cy="475488"/>
+          </a:xfrm>
+          <a:prstGeom prst="rect">
+            <a:avLst/>
+          </a:prstGeom>
+          <a:noFill/>
+        </p:spPr>
+        <p:txBody>
+          <a:bodyPr wrap="square">
+            <a:spAutoFit/>
+          </a:bodyPr>
+          <a:lstStyle/>
+          <a:p>
+            <a:pPr algn="l"/>
+            <a:r>
+              <a:rPr sz="1100" b="0">
+                <a:solidFill>
+                  <a:srgbClr val="E9EDEF"/>
+                </a:solidFill>
+                <a:latin typeface="Calibri"/>
+              </a:rPr>
+              <a:t>R3 (~$0.15)</a:t>
+            </a:r>
+          </a:p>
+        </p:txBody>
+      </p:sp>
+      <p:sp>
+        <p:nvSpPr>
+          <p:cNvPr id="19" name="TextBox 18"/>
+          <p:cNvSpPr txBox="1"/>
+          <p:nvPr/>
+        </p:nvSpPr>
+        <p:spPr>
+          <a:xfrm>
+            <a:off x="7086600" y="3438144"/>
+            <a:ext cx="1463039" cy="475488"/>
+          </a:xfrm>
+          <a:prstGeom prst="rect">
+            <a:avLst/>
+          </a:prstGeom>
+          <a:noFill/>
+        </p:spPr>
+        <p:txBody>
+          <a:bodyPr wrap="square">
+            <a:spAutoFit/>
+          </a:bodyPr>
+          <a:lstStyle/>
+          <a:p>
+            <a:pPr algn="l"/>
+            <a:r>
+              <a:rPr sz="1100" b="0">
+                <a:solidFill>
+                  <a:srgbClr val="E9EDEF"/>
+                </a:solidFill>
+                <a:latin typeface="Calibri"/>
+              </a:rPr>
+              <a:t>200,000</a:t>
+            </a:r>
+          </a:p>
+        </p:txBody>
+      </p:sp>
+      <p:sp>
+        <p:nvSpPr>
+          <p:cNvPr id="20" name="TextBox 19"/>
+          <p:cNvSpPr txBox="1"/>
+          <p:nvPr/>
+        </p:nvSpPr>
+        <p:spPr>
+          <a:xfrm>
+            <a:off x="8823960" y="3438144"/>
+            <a:ext cx="2651760" cy="475488"/>
+          </a:xfrm>
+          <a:prstGeom prst="rect">
+            <a:avLst/>
+          </a:prstGeom>
+          <a:noFill/>
+        </p:spPr>
+        <p:txBody>
+          <a:bodyPr wrap="square">
+            <a:spAutoFit/>
+          </a:bodyPr>
+          <a:lstStyle/>
+          <a:p>
+            <a:pPr algn="l"/>
+            <a:r>
+              <a:rPr sz="1100" b="1">
+                <a:solidFill>
+                  <a:srgbClr val="E9EDEF"/>
+                </a:solidFill>
+                <a:latin typeface="Calibri"/>
+              </a:rPr>
+              <a:t>Reliable production fallback</a:t>
+            </a:r>
+          </a:p>
+        </p:txBody>
+      </p:sp>
+      <p:sp>
+        <p:nvSpPr>
+          <p:cNvPr id="21" name="Rounded Rectangle 20"/>
+          <p:cNvSpPr/>
+          <p:nvPr/>
+        </p:nvSpPr>
+        <p:spPr>
+          <a:xfrm>
+            <a:off x="548640" y="4005072"/>
+            <a:ext cx="11064240" cy="658368"/>
+          </a:xfrm>
+          <a:prstGeom prst="roundRect">
+            <a:avLst/>
+          </a:prstGeom>
+          <a:solidFill>
+            <a:srgbClr val="111B21"/>
+          </a:solidFill>
+          <a:ln w="12700">
+            <a:solidFill>
+              <a:srgbClr val="8696A0"/>
+            </a:solidFill>
+          </a:ln>
+        </p:spPr>
+        <p:style>
+          <a:lnRef idx="1">
+            <a:schemeClr val="accent1"/>
+          </a:lnRef>
+          <a:fillRef idx="3">
+            <a:schemeClr val="accent1"/>
+          </a:fillRef>
+          <a:effectRef idx="2">
+            <a:schemeClr val="accent1"/>
+          </a:effectRef>
+          <a:fontRef idx="minor">
+            <a:schemeClr val="lt1"/>
+          </a:fontRef>
+        </p:style>
+        <p:txBody>
+          <a:bodyPr rtlCol="0" anchor="ctr"/>
+          <a:lstStyle/>
+          <a:p/>
+        </p:txBody>
+      </p:sp>
+      <p:sp>
+        <p:nvSpPr>
+          <p:cNvPr id="22" name="TextBox 21"/>
+          <p:cNvSpPr txBox="1"/>
+          <p:nvPr/>
+        </p:nvSpPr>
+        <p:spPr>
+          <a:xfrm>
+            <a:off x="685800" y="4169663"/>
+            <a:ext cx="4114800" cy="475488"/>
+          </a:xfrm>
+          <a:prstGeom prst="rect">
+            <a:avLst/>
+          </a:prstGeom>
+          <a:noFill/>
+        </p:spPr>
+        <p:txBody>
+          <a:bodyPr wrap="square">
+            <a:spAutoFit/>
+          </a:bodyPr>
+          <a:lstStyle/>
+          <a:p>
+            <a:pPr algn="l"/>
+            <a:r>
+              <a:rPr sz="1100" b="1">
+                <a:solidFill>
+                  <a:srgbClr val="E9EDEF"/>
+                </a:solidFill>
+                <a:latin typeface="Calibri"/>
+              </a:rPr>
+              <a:t>Claude Haiku 3.5 · Anthropic</a:t>
+            </a:r>
+          </a:p>
+        </p:txBody>
+      </p:sp>
+      <p:sp>
+        <p:nvSpPr>
+          <p:cNvPr id="23" name="TextBox 22"/>
+          <p:cNvSpPr txBox="1"/>
+          <p:nvPr/>
+        </p:nvSpPr>
+        <p:spPr>
+          <a:xfrm>
+            <a:off x="5074920" y="4169663"/>
+            <a:ext cx="1737360" cy="475488"/>
+          </a:xfrm>
+          <a:prstGeom prst="rect">
+            <a:avLst/>
+          </a:prstGeom>
+          <a:noFill/>
+        </p:spPr>
+        <p:txBody>
+          <a:bodyPr wrap="square">
+            <a:spAutoFit/>
+          </a:bodyPr>
+          <a:lstStyle/>
+          <a:p>
+            <a:pPr algn="l"/>
+            <a:r>
+              <a:rPr sz="1100" b="0">
+                <a:solidFill>
+                  <a:srgbClr val="E9EDEF"/>
+                </a:solidFill>
+                <a:latin typeface="Calibri"/>
+              </a:rPr>
+              <a:t>R5 (~$0.25)</a:t>
+            </a:r>
+          </a:p>
+        </p:txBody>
+      </p:sp>
+      <p:sp>
+        <p:nvSpPr>
+          <p:cNvPr id="24" name="TextBox 23"/>
+          <p:cNvSpPr txBox="1"/>
+          <p:nvPr/>
+        </p:nvSpPr>
+        <p:spPr>
+          <a:xfrm>
+            <a:off x="7086600" y="4169663"/>
+            <a:ext cx="1463039" cy="475488"/>
+          </a:xfrm>
+          <a:prstGeom prst="rect">
+            <a:avLst/>
+          </a:prstGeom>
+          <a:noFill/>
+        </p:spPr>
+        <p:txBody>
+          <a:bodyPr wrap="square">
+            <a:spAutoFit/>
+          </a:bodyPr>
+          <a:lstStyle/>
+          <a:p>
+            <a:pPr algn="l"/>
+            <a:r>
+              <a:rPr sz="1100" b="0">
+                <a:solidFill>
+                  <a:srgbClr val="E9EDEF"/>
+                </a:solidFill>
+                <a:latin typeface="Calibri"/>
+              </a:rPr>
+              <a:t>50,000</a:t>
+            </a:r>
+          </a:p>
+        </p:txBody>
+      </p:sp>
+      <p:sp>
+        <p:nvSpPr>
+          <p:cNvPr id="25" name="TextBox 24"/>
+          <p:cNvSpPr txBox="1"/>
+          <p:nvPr/>
+        </p:nvSpPr>
+        <p:spPr>
+          <a:xfrm>
+            <a:off x="8823960" y="4169663"/>
+            <a:ext cx="2651760" cy="475488"/>
+          </a:xfrm>
+          <a:prstGeom prst="rect">
+            <a:avLst/>
+          </a:prstGeom>
+          <a:noFill/>
+        </p:spPr>
+        <p:txBody>
+          <a:bodyPr wrap="square">
+            <a:spAutoFit/>
+          </a:bodyPr>
+          <a:lstStyle/>
+          <a:p>
+            <a:pPr algn="l"/>
+            <a:r>
+              <a:rPr sz="1100" b="1">
+                <a:solidFill>
+                  <a:srgbClr val="E9EDEF"/>
+                </a:solidFill>
+                <a:latin typeface="Calibri"/>
+              </a:rPr>
+              <a:t>Strong maths reasoning</a:t>
+            </a:r>
+          </a:p>
+        </p:txBody>
+      </p:sp>
+      <p:sp>
+        <p:nvSpPr>
+          <p:cNvPr id="26" name="Rounded Rectangle 25"/>
+          <p:cNvSpPr/>
+          <p:nvPr/>
+        </p:nvSpPr>
+        <p:spPr>
+          <a:xfrm>
+            <a:off x="548640" y="4736592"/>
+            <a:ext cx="11064240" cy="658368"/>
+          </a:xfrm>
+          <a:prstGeom prst="roundRect">
+            <a:avLst/>
+          </a:prstGeom>
+          <a:solidFill>
+            <a:srgbClr val="111B21"/>
+          </a:solidFill>
+          <a:ln w="12700">
+            <a:solidFill>
+              <a:srgbClr val="8696A0"/>
+            </a:solidFill>
+          </a:ln>
+        </p:spPr>
+        <p:style>
+          <a:lnRef idx="1">
+            <a:schemeClr val="accent1"/>
+          </a:lnRef>
+          <a:fillRef idx="3">
+            <a:schemeClr val="accent1"/>
+          </a:fillRef>
+          <a:effectRef idx="2">
+            <a:schemeClr val="accent1"/>
+          </a:effectRef>
+          <a:fontRef idx="minor">
+            <a:schemeClr val="lt1"/>
+          </a:fontRef>
+        </p:style>
+        <p:txBody>
+          <a:bodyPr rtlCol="0" anchor="ctr"/>
+          <a:lstStyle/>
+          <a:p/>
+        </p:txBody>
+      </p:sp>
+      <p:sp>
+        <p:nvSpPr>
+          <p:cNvPr id="27" name="TextBox 26"/>
+          <p:cNvSpPr txBox="1"/>
+          <p:nvPr/>
+        </p:nvSpPr>
+        <p:spPr>
+          <a:xfrm>
+            <a:off x="685800" y="4901183"/>
+            <a:ext cx="4114800" cy="475488"/>
+          </a:xfrm>
+          <a:prstGeom prst="rect">
+            <a:avLst/>
+          </a:prstGeom>
+          <a:noFill/>
+        </p:spPr>
+        <p:txBody>
+          <a:bodyPr wrap="square">
+            <a:spAutoFit/>
+          </a:bodyPr>
+          <a:lstStyle/>
+          <a:p>
+            <a:pPr algn="l"/>
+            <a:r>
+              <a:rPr sz="1100" b="1">
+                <a:solidFill>
+                  <a:srgbClr val="E9EDEF"/>
+                </a:solidFill>
+                <a:latin typeface="Calibri"/>
+              </a:rPr>
+              <a:t>Qwen 3.6 27B · Groq</a:t>
+            </a:r>
+          </a:p>
+        </p:txBody>
+      </p:sp>
+      <p:sp>
+        <p:nvSpPr>
+          <p:cNvPr id="28" name="TextBox 27"/>
+          <p:cNvSpPr txBox="1"/>
+          <p:nvPr/>
+        </p:nvSpPr>
+        <p:spPr>
+          <a:xfrm>
+            <a:off x="5074920" y="4901183"/>
+            <a:ext cx="1737360" cy="475488"/>
+          </a:xfrm>
+          <a:prstGeom prst="rect">
+            <a:avLst/>
+          </a:prstGeom>
+          <a:noFill/>
+        </p:spPr>
+        <p:txBody>
+          <a:bodyPr wrap="square">
+            <a:spAutoFit/>
+          </a:bodyPr>
+          <a:lstStyle/>
+          <a:p>
+            <a:pPr algn="l"/>
+            <a:r>
+              <a:rPr sz="1100" b="0">
+                <a:solidFill>
+                  <a:srgbClr val="E9EDEF"/>
+                </a:solidFill>
+                <a:latin typeface="Calibri"/>
+              </a:rPr>
+              <a:t>Free · dev tier</a:t>
+            </a:r>
+          </a:p>
+        </p:txBody>
+      </p:sp>
+      <p:sp>
+        <p:nvSpPr>
+          <p:cNvPr id="29" name="TextBox 28"/>
+          <p:cNvSpPr txBox="1"/>
+          <p:nvPr/>
+        </p:nvSpPr>
+        <p:spPr>
+          <a:xfrm>
+            <a:off x="7086600" y="4901183"/>
+            <a:ext cx="1463039" cy="475488"/>
+          </a:xfrm>
+          <a:prstGeom prst="rect">
+            <a:avLst/>
+          </a:prstGeom>
+          <a:noFill/>
+        </p:spPr>
+        <p:txBody>
+          <a:bodyPr wrap="square">
+            <a:spAutoFit/>
+          </a:bodyPr>
+          <a:lstStyle/>
+          <a:p>
+            <a:pPr algn="l"/>
+            <a:r>
+              <a:rPr sz="1100" b="0">
+                <a:solidFill>
+                  <a:srgbClr val="E9EDEF"/>
+                </a:solidFill>
+                <a:latin typeface="Calibri"/>
+              </a:rPr>
+              <a:t>8,000</a:t>
+            </a:r>
+          </a:p>
+        </p:txBody>
+      </p:sp>
+      <p:sp>
+        <p:nvSpPr>
+          <p:cNvPr id="30" name="TextBox 29"/>
+          <p:cNvSpPr txBox="1"/>
+          <p:nvPr/>
+        </p:nvSpPr>
+        <p:spPr>
+          <a:xfrm>
+            <a:off x="8823960" y="4901183"/>
+            <a:ext cx="2651760" cy="475488"/>
+          </a:xfrm>
+          <a:prstGeom prst="rect">
+            <a:avLst/>
+          </a:prstGeom>
+          <a:noFill/>
+        </p:spPr>
+        <p:txBody>
+          <a:bodyPr wrap="square">
+            <a:spAutoFit/>
+          </a:bodyPr>
+          <a:lstStyle/>
+          <a:p>
+            <a:pPr algn="l"/>
+            <a:r>
+              <a:rPr sz="1100" b="1">
+                <a:solidFill>
+                  <a:srgbClr val="E9EDEF"/>
+                </a:solidFill>
+                <a:latin typeface="Calibri"/>
+              </a:rPr>
+              <a:t>Fastest inference, tight quota</a:t>
+            </a:r>
+          </a:p>
+        </p:txBody>
+      </p:sp>
+      <p:sp>
+        <p:nvSpPr>
+          <p:cNvPr id="31" name="Rounded Rectangle 30"/>
+          <p:cNvSpPr/>
+          <p:nvPr/>
+        </p:nvSpPr>
+        <p:spPr>
+          <a:xfrm>
+            <a:off x="548640" y="5468112"/>
+            <a:ext cx="11064240" cy="658368"/>
+          </a:xfrm>
+          <a:prstGeom prst="roundRect">
+            <a:avLst/>
+          </a:prstGeom>
+          <a:solidFill>
+            <a:srgbClr val="FFB347"/>
+          </a:solidFill>
+          <a:ln w="12700">
+            <a:solidFill>
+              <a:srgbClr val="FFE9B8"/>
+            </a:solidFill>
+          </a:ln>
+        </p:spPr>
+        <p:style>
+          <a:lnRef idx="1">
+            <a:schemeClr val="accent1"/>
+          </a:lnRef>
+          <a:fillRef idx="3">
+            <a:schemeClr val="accent1"/>
+          </a:fillRef>
+          <a:effectRef idx="2">
+            <a:schemeClr val="accent1"/>
+          </a:effectRef>
+          <a:fontRef idx="minor">
+            <a:schemeClr val="lt1"/>
+          </a:fontRef>
+        </p:style>
+        <p:txBody>
+          <a:bodyPr rtlCol="0" anchor="ctr"/>
+          <a:lstStyle/>
+          <a:p/>
+        </p:txBody>
+      </p:sp>
+      <p:sp>
+        <p:nvSpPr>
+          <p:cNvPr id="32" name="TextBox 31"/>
+          <p:cNvSpPr txBox="1"/>
+          <p:nvPr/>
+        </p:nvSpPr>
+        <p:spPr>
+          <a:xfrm>
+            <a:off x="685800" y="5632703"/>
+            <a:ext cx="4114800" cy="475488"/>
+          </a:xfrm>
+          <a:prstGeom prst="rect">
+            <a:avLst/>
+          </a:prstGeom>
+          <a:noFill/>
+        </p:spPr>
+        <p:txBody>
+          <a:bodyPr wrap="square">
+            <a:spAutoFit/>
+          </a:bodyPr>
+          <a:lstStyle/>
+          <a:p>
+            <a:pPr algn="l"/>
+            <a:r>
+              <a:rPr sz="1100" b="1">
+                <a:solidFill>
+                  <a:srgbClr val="03110D"/>
+                </a:solidFill>
+                <a:latin typeface="Calibri"/>
+              </a:rPr>
+              <a:t>Llama 4 / Qwen · Dell AI Factory NIM</a:t>
+            </a:r>
+          </a:p>
+        </p:txBody>
+      </p:sp>
+      <p:sp>
+        <p:nvSpPr>
+          <p:cNvPr id="33" name="TextBox 32"/>
+          <p:cNvSpPr txBox="1"/>
+          <p:nvPr/>
+        </p:nvSpPr>
+        <p:spPr>
+          <a:xfrm>
+            <a:off x="5074920" y="5632703"/>
+            <a:ext cx="1737360" cy="475488"/>
+          </a:xfrm>
+          <a:prstGeom prst="rect">
+            <a:avLst/>
+          </a:prstGeom>
+          <a:noFill/>
+        </p:spPr>
+        <p:txBody>
+          <a:bodyPr wrap="square">
+            <a:spAutoFit/>
+          </a:bodyPr>
+          <a:lstStyle/>
+          <a:p>
+            <a:pPr algn="l"/>
+            <a:r>
+              <a:rPr sz="1100" b="0">
+                <a:solidFill>
+                  <a:srgbClr val="03110D"/>
+                </a:solidFill>
+                <a:latin typeface="Calibri"/>
+              </a:rPr>
+              <a:t>Hardware only</a:t>
+            </a:r>
+          </a:p>
+        </p:txBody>
+      </p:sp>
+      <p:sp>
+        <p:nvSpPr>
+          <p:cNvPr id="34" name="TextBox 33"/>
+          <p:cNvSpPr txBox="1"/>
+          <p:nvPr/>
+        </p:nvSpPr>
+        <p:spPr>
+          <a:xfrm>
+            <a:off x="7086600" y="5632703"/>
+            <a:ext cx="1463039" cy="475488"/>
+          </a:xfrm>
+          <a:prstGeom prst="rect">
+            <a:avLst/>
+          </a:prstGeom>
+          <a:noFill/>
+        </p:spPr>
+        <p:txBody>
+          <a:bodyPr wrap="square">
+            <a:spAutoFit/>
+          </a:bodyPr>
+          <a:lstStyle/>
+          <a:p>
+            <a:pPr algn="l"/>
+            <a:r>
+              <a:rPr sz="1100" b="0">
+                <a:solidFill>
+                  <a:srgbClr val="03110D"/>
+                </a:solidFill>
+                <a:latin typeface="Calibri"/>
+              </a:rPr>
+              <a:t>self-hosted</a:t>
+            </a:r>
+          </a:p>
+        </p:txBody>
+      </p:sp>
+      <p:sp>
+        <p:nvSpPr>
+          <p:cNvPr id="35" name="TextBox 34"/>
+          <p:cNvSpPr txBox="1"/>
+          <p:nvPr/>
+        </p:nvSpPr>
+        <p:spPr>
+          <a:xfrm>
+            <a:off x="8823960" y="5632703"/>
+            <a:ext cx="2651760" cy="475488"/>
+          </a:xfrm>
+          <a:prstGeom prst="rect">
+            <a:avLst/>
+          </a:prstGeom>
+          <a:noFill/>
+        </p:spPr>
+        <p:txBody>
+          <a:bodyPr wrap="square">
+            <a:spAutoFit/>
+          </a:bodyPr>
+          <a:lstStyle/>
+          <a:p>
+            <a:pPr algn="l"/>
+            <a:r>
+              <a:rPr sz="1100" b="1">
+                <a:solidFill>
+                  <a:srgbClr val="03110D"/>
+                </a:solidFill>
+                <a:latin typeface="Calibri"/>
+              </a:rPr>
+              <a:t>PRODUCTION · POPIA-sovereign</a:t>
+            </a:r>
+          </a:p>
+        </p:txBody>
+      </p:sp>
+      <p:sp>
+        <p:nvSpPr>
+          <p:cNvPr id="36" name="Rounded Rectangle 35"/>
+          <p:cNvSpPr/>
+          <p:nvPr/>
+        </p:nvSpPr>
+        <p:spPr>
+          <a:xfrm>
+            <a:off x="548640" y="6172200"/>
+            <a:ext cx="11064240" cy="502920"/>
+          </a:xfrm>
+          <a:prstGeom prst="roundRect">
+            <a:avLst/>
+          </a:prstGeom>
+          <a:solidFill>
+            <a:srgbClr val="111B21"/>
+          </a:solidFill>
+          <a:ln w="19050">
+            <a:solidFill>
+              <a:srgbClr val="00A884"/>
+            </a:solidFill>
+          </a:ln>
+        </p:spPr>
+        <p:style>
+          <a:lnRef idx="1">
+            <a:schemeClr val="accent1"/>
+          </a:lnRef>
+          <a:fillRef idx="3">
+            <a:schemeClr val="accent1"/>
+          </a:fillRef>
+          <a:effectRef idx="2">
+            <a:schemeClr val="accent1"/>
+          </a:effectRef>
+          <a:fontRef idx="minor">
+            <a:schemeClr val="lt1"/>
+          </a:fontRef>
+        </p:style>
+        <p:txBody>
+          <a:bodyPr rtlCol="0" anchor="ctr"/>
+          <a:lstStyle/>
+          <a:p/>
+        </p:txBody>
+      </p:sp>
+      <p:sp>
+        <p:nvSpPr>
+          <p:cNvPr id="37" name="TextBox 36"/>
+          <p:cNvSpPr txBox="1"/>
+          <p:nvPr/>
+        </p:nvSpPr>
+        <p:spPr>
+          <a:xfrm>
+            <a:off x="685800" y="6227064"/>
+            <a:ext cx="2011680" cy="228600"/>
+          </a:xfrm>
+          <a:prstGeom prst="rect">
+            <a:avLst/>
+          </a:prstGeom>
+          <a:noFill/>
+        </p:spPr>
+        <p:txBody>
+          <a:bodyPr wrap="square">
+            <a:spAutoFit/>
+          </a:bodyPr>
+          <a:lstStyle/>
+          <a:p>
+            <a:pPr algn="l"/>
+            <a:r>
+              <a:rPr sz="1000" b="1">
+                <a:solidFill>
+                  <a:srgbClr val="9CFF8C"/>
+                </a:solidFill>
+                <a:latin typeface="Calibri"/>
+              </a:rPr>
+              <a:t>MIGRATION PATH</a:t>
+            </a:r>
+          </a:p>
+        </p:txBody>
+      </p:sp>
+      <p:sp>
+        <p:nvSpPr>
+          <p:cNvPr id="38" name="TextBox 37"/>
+          <p:cNvSpPr txBox="1"/>
+          <p:nvPr/>
+        </p:nvSpPr>
+        <p:spPr>
+          <a:xfrm>
+            <a:off x="685800" y="6428232"/>
+            <a:ext cx="10881360" cy="256032"/>
+          </a:xfrm>
+          <a:prstGeom prst="rect">
+            <a:avLst/>
+          </a:prstGeom>
+          <a:noFill/>
+        </p:spPr>
+        <p:txBody>
+          <a:bodyPr wrap="square">
+            <a:spAutoFit/>
+          </a:bodyPr>
+          <a:lstStyle/>
+          <a:p>
+            <a:pPr algn="l"/>
+            <a:r>
+              <a:rPr sz="1100" b="1">
+                <a:solidFill>
+                  <a:srgbClr val="E9EDEF"/>
+                </a:solidFill>
+                <a:latin typeface="Calibri"/>
+              </a:rPr>
+              <a:t>Pilot → Production is a 6-env-var swap. Same OpenAI-compatible API on every provider. Zero code changes. Zero downtime. Same day.</a:t>
+            </a:r>
+          </a:p>
+        </p:txBody>
+      </p:sp>
+    </p:spTree>
+  </p:cSld>
+  <p:clrMapOvr>
+    <a:masterClrMapping/>
+  </p:clrMapOvr>
+</p:sld>
+</file>
+
+<file path=ppt/slides/slide18.xml><?xml version="1.0" encoding="utf-8"?>
+<p:sld xmlns:a="http://schemas.openxmlformats.org/drawingml/2006/main" xmlns:p="http://schemas.openxmlformats.org/presentationml/2006/main" xmlns:r="http://schemas.openxmlformats.org/officeDocument/2006/relationships">
+  <p:cSld>
+    <p:bg>
+      <p:bgPr>
+        <a:solidFill>
+          <a:srgbClr val="0B141A"/>
+        </a:solidFill>
+        <a:effectLst/>
+      </p:bgPr>
+    </p:bg>
+    <p:spTree>
+      <p:nvGrpSpPr>
+        <p:cNvPr id="1" name=""/>
+        <p:cNvGrpSpPr/>
+        <p:nvPr/>
+      </p:nvGrpSpPr>
+      <p:grpSpPr/>
+      <p:sp>
+        <p:nvSpPr>
+          <p:cNvPr id="2" name="TextBox 1"/>
+          <p:cNvSpPr txBox="1"/>
+          <p:nvPr/>
+        </p:nvSpPr>
+        <p:spPr>
+          <a:xfrm>
+            <a:off x="548640" y="365760"/>
+            <a:ext cx="11064240" cy="457200"/>
+          </a:xfrm>
+          <a:prstGeom prst="rect">
+            <a:avLst/>
+          </a:prstGeom>
+          <a:noFill/>
+        </p:spPr>
+        <p:txBody>
+          <a:bodyPr wrap="square">
+            <a:spAutoFit/>
+          </a:bodyPr>
+          <a:lstStyle/>
+          <a:p>
+            <a:pPr algn="l"/>
+            <a:r>
+              <a:rPr sz="1400" b="1">
+                <a:solidFill>
+                  <a:srgbClr val="00A884"/>
+                </a:solidFill>
+                <a:latin typeface="Calibri"/>
+              </a:rPr>
+              <a:t>Integration strategy</a:t>
+            </a:r>
+          </a:p>
+        </p:txBody>
+      </p:sp>
+      <p:sp>
+        <p:nvSpPr>
+          <p:cNvPr id="3" name="TextBox 2"/>
+          <p:cNvSpPr txBox="1"/>
+          <p:nvPr/>
+        </p:nvSpPr>
+        <p:spPr>
+          <a:xfrm>
+            <a:off x="548640" y="777240"/>
+            <a:ext cx="11064240" cy="548640"/>
+          </a:xfrm>
+          <a:prstGeom prst="rect">
+            <a:avLst/>
+          </a:prstGeom>
+          <a:noFill/>
+        </p:spPr>
+        <p:txBody>
+          <a:bodyPr wrap="square">
+            <a:spAutoFit/>
+          </a:bodyPr>
+          <a:lstStyle/>
+          <a:p>
+            <a:pPr algn="l"/>
+            <a:r>
+              <a:rPr sz="2600" b="1">
+                <a:solidFill>
+                  <a:srgbClr val="FFFFFF"/>
+                </a:solidFill>
+                <a:latin typeface="Calibri"/>
+              </a:rPr>
+              <a:t>We don't compete with e-School. We complete it.</a:t>
+            </a:r>
+          </a:p>
+        </p:txBody>
+      </p:sp>
+      <p:sp>
+        <p:nvSpPr>
+          <p:cNvPr id="4" name="Rectangle 3"/>
+          <p:cNvSpPr/>
+          <p:nvPr/>
+        </p:nvSpPr>
+        <p:spPr>
+          <a:xfrm>
+            <a:off x="548640" y="1508760"/>
+            <a:ext cx="3657600" cy="50800"/>
+          </a:xfrm>
+          <a:prstGeom prst="rect">
             <a:avLst/>
           </a:prstGeom>
           <a:solidFill>
@@ -8306,31 +11401,23 @@
           </a:fontRef>
         </p:style>
         <p:txBody>
-          <a:bodyPr rtlCol="0" anchor="ctr" lIns="137160" rIns="137160"/>
+          <a:bodyPr rtlCol="0" anchor="ctr"/>
           <a:lstStyle/>
           <a:p>
             <a:pPr algn="ctr"/>
-            <a:r>
-              <a:rPr sz="1400" b="1">
-                <a:solidFill>
-                  <a:srgbClr val="03110D"/>
-                </a:solidFill>
-              </a:rPr>
-              <a:t>Educators</a:t>
-            </a:r>
-          </a:p>
-        </p:txBody>
-      </p:sp>
-      <p:sp>
-        <p:nvSpPr>
-          <p:cNvPr id="12" name="TextBox 11"/>
+          </a:p>
+        </p:txBody>
+      </p:sp>
+      <p:sp>
+        <p:nvSpPr>
+          <p:cNvPr id="5" name="TextBox 4"/>
           <p:cNvSpPr txBox="1"/>
           <p:nvPr/>
         </p:nvSpPr>
         <p:spPr>
           <a:xfrm>
-            <a:off x="2651760" y="4846320"/>
-            <a:ext cx="8961120" cy="548640"/>
+            <a:off x="548640" y="1737360"/>
+            <a:ext cx="11064240" cy="320040"/>
           </a:xfrm>
           <a:prstGeom prst="rect">
             <a:avLst/>
@@ -8345,27 +11432,70 @@
           <a:p>
             <a:pPr algn="l"/>
             <a:r>
-              <a:rPr sz="1600" b="0">
-                <a:solidFill>
-                  <a:srgbClr val="E9EDEF"/>
-                </a:solidFill>
-                <a:latin typeface="Calibri"/>
-              </a:rPr>
-              <a:t>4–6 practising SA Maths teachers (multi-lingual) to form the advisory board.</a:t>
-            </a:r>
-          </a:p>
-        </p:txBody>
-      </p:sp>
-      <p:sp>
-        <p:nvSpPr>
-          <p:cNvPr id="13" name="TextBox 12"/>
+              <a:rPr sz="1300" b="1">
+                <a:solidFill>
+                  <a:srgbClr val="9CFF8C"/>
+                </a:solidFill>
+                <a:latin typeface="Calibri"/>
+              </a:rPr>
+              <a:t>The gap in SA e-learning today</a:t>
+            </a:r>
+          </a:p>
+        </p:txBody>
+      </p:sp>
+      <p:sp>
+        <p:nvSpPr>
+          <p:cNvPr id="6" name="Rounded Rectangle 5"/>
+          <p:cNvSpPr/>
+          <p:nvPr/>
+        </p:nvSpPr>
+        <p:spPr>
+          <a:xfrm>
+            <a:off x="548640" y="2103120"/>
+            <a:ext cx="2108606" cy="1005840"/>
+          </a:xfrm>
+          <a:prstGeom prst="roundRect">
+            <a:avLst/>
+          </a:prstGeom>
+          <a:solidFill>
+            <a:srgbClr val="111B21"/>
+          </a:solidFill>
+          <a:ln w="12700">
+            <a:solidFill>
+              <a:srgbClr val="8696A0"/>
+            </a:solidFill>
+          </a:ln>
+        </p:spPr>
+        <p:style>
+          <a:lnRef idx="1">
+            <a:schemeClr val="accent1"/>
+          </a:lnRef>
+          <a:fillRef idx="3">
+            <a:schemeClr val="accent1"/>
+          </a:fillRef>
+          <a:effectRef idx="2">
+            <a:schemeClr val="accent1"/>
+          </a:effectRef>
+          <a:fontRef idx="minor">
+            <a:schemeClr val="lt1"/>
+          </a:fontRef>
+        </p:style>
+        <p:txBody>
+          <a:bodyPr rtlCol="0" anchor="ctr"/>
+          <a:lstStyle/>
+          <a:p/>
+        </p:txBody>
+      </p:sp>
+      <p:sp>
+        <p:nvSpPr>
+          <p:cNvPr id="7" name="TextBox 6"/>
           <p:cNvSpPr txBox="1"/>
           <p:nvPr/>
         </p:nvSpPr>
         <p:spPr>
           <a:xfrm>
-            <a:off x="548640" y="6035040"/>
-            <a:ext cx="11064240" cy="457200"/>
+            <a:off x="640080" y="2240279"/>
+            <a:ext cx="1925726" cy="365760"/>
           </a:xfrm>
           <a:prstGeom prst="rect">
             <a:avLst/>
@@ -8380,13 +11510,2258 @@
           <a:p>
             <a:pPr algn="ctr"/>
             <a:r>
-              <a:rPr sz="1400" b="0">
+              <a:rPr sz="1200" b="1">
+                <a:solidFill>
+                  <a:srgbClr val="FFFFFF"/>
+                </a:solidFill>
+                <a:latin typeface="Calibri"/>
+              </a:rPr>
+              <a:t>Vodacom e-School</a:t>
+            </a:r>
+          </a:p>
+        </p:txBody>
+      </p:sp>
+      <p:sp>
+        <p:nvSpPr>
+          <p:cNvPr id="8" name="TextBox 7"/>
+          <p:cNvSpPr txBox="1"/>
+          <p:nvPr/>
+        </p:nvSpPr>
+        <p:spPr>
+          <a:xfrm>
+            <a:off x="640080" y="2651760"/>
+            <a:ext cx="1925726" cy="365760"/>
+          </a:xfrm>
+          <a:prstGeom prst="rect">
+            <a:avLst/>
+          </a:prstGeom>
+          <a:noFill/>
+        </p:spPr>
+        <p:txBody>
+          <a:bodyPr wrap="square">
+            <a:spAutoFit/>
+          </a:bodyPr>
+          <a:lstStyle/>
+          <a:p>
+            <a:pPr algn="ctr"/>
+            <a:r>
+              <a:rPr sz="1000" b="0">
                 <a:solidFill>
                   <a:srgbClr val="8696A0"/>
                 </a:solidFill>
-                <a:latin typeface="Consolas"/>
-              </a:rPr>
-              <a:t>github.com/snerantie/Dell-Prototype---AI-Integration</a:t>
+                <a:latin typeface="Calibri"/>
+              </a:rPr>
+              <a:t>200k users · content</a:t>
+            </a:r>
+          </a:p>
+        </p:txBody>
+      </p:sp>
+      <p:sp>
+        <p:nvSpPr>
+          <p:cNvPr id="9" name="Rounded Rectangle 8"/>
+          <p:cNvSpPr/>
+          <p:nvPr/>
+        </p:nvSpPr>
+        <p:spPr>
+          <a:xfrm>
+            <a:off x="2794406" y="2103120"/>
+            <a:ext cx="2108606" cy="1005840"/>
+          </a:xfrm>
+          <a:prstGeom prst="roundRect">
+            <a:avLst/>
+          </a:prstGeom>
+          <a:solidFill>
+            <a:srgbClr val="111B21"/>
+          </a:solidFill>
+          <a:ln w="12700">
+            <a:solidFill>
+              <a:srgbClr val="8696A0"/>
+            </a:solidFill>
+          </a:ln>
+        </p:spPr>
+        <p:style>
+          <a:lnRef idx="1">
+            <a:schemeClr val="accent1"/>
+          </a:lnRef>
+          <a:fillRef idx="3">
+            <a:schemeClr val="accent1"/>
+          </a:fillRef>
+          <a:effectRef idx="2">
+            <a:schemeClr val="accent1"/>
+          </a:effectRef>
+          <a:fontRef idx="minor">
+            <a:schemeClr val="lt1"/>
+          </a:fontRef>
+        </p:style>
+        <p:txBody>
+          <a:bodyPr rtlCol="0" anchor="ctr"/>
+          <a:lstStyle/>
+          <a:p/>
+        </p:txBody>
+      </p:sp>
+      <p:sp>
+        <p:nvSpPr>
+          <p:cNvPr id="10" name="TextBox 9"/>
+          <p:cNvSpPr txBox="1"/>
+          <p:nvPr/>
+        </p:nvSpPr>
+        <p:spPr>
+          <a:xfrm>
+            <a:off x="2885846" y="2240279"/>
+            <a:ext cx="1925726" cy="365760"/>
+          </a:xfrm>
+          <a:prstGeom prst="rect">
+            <a:avLst/>
+          </a:prstGeom>
+          <a:noFill/>
+        </p:spPr>
+        <p:txBody>
+          <a:bodyPr wrap="square">
+            <a:spAutoFit/>
+          </a:bodyPr>
+          <a:lstStyle/>
+          <a:p>
+            <a:pPr algn="ctr"/>
+            <a:r>
+              <a:rPr sz="1200" b="1">
+                <a:solidFill>
+                  <a:srgbClr val="FFFFFF"/>
+                </a:solidFill>
+                <a:latin typeface="Calibri"/>
+              </a:rPr>
+              <a:t>DBE Kolibri</a:t>
+            </a:r>
+          </a:p>
+        </p:txBody>
+      </p:sp>
+      <p:sp>
+        <p:nvSpPr>
+          <p:cNvPr id="11" name="TextBox 10"/>
+          <p:cNvSpPr txBox="1"/>
+          <p:nvPr/>
+        </p:nvSpPr>
+        <p:spPr>
+          <a:xfrm>
+            <a:off x="2885846" y="2651760"/>
+            <a:ext cx="1925726" cy="365760"/>
+          </a:xfrm>
+          <a:prstGeom prst="rect">
+            <a:avLst/>
+          </a:prstGeom>
+          <a:noFill/>
+        </p:spPr>
+        <p:txBody>
+          <a:bodyPr wrap="square">
+            <a:spAutoFit/>
+          </a:bodyPr>
+          <a:lstStyle/>
+          <a:p>
+            <a:pPr algn="ctr"/>
+            <a:r>
+              <a:rPr sz="1000" b="0">
+                <a:solidFill>
+                  <a:srgbClr val="8696A0"/>
+                </a:solidFill>
+                <a:latin typeface="Calibri"/>
+              </a:rPr>
+              <a:t>gov't content · quiet</a:t>
+            </a:r>
+          </a:p>
+        </p:txBody>
+      </p:sp>
+      <p:sp>
+        <p:nvSpPr>
+          <p:cNvPr id="12" name="Rounded Rectangle 11"/>
+          <p:cNvSpPr/>
+          <p:nvPr/>
+        </p:nvSpPr>
+        <p:spPr>
+          <a:xfrm>
+            <a:off x="5040172" y="2103120"/>
+            <a:ext cx="2108606" cy="1005840"/>
+          </a:xfrm>
+          <a:prstGeom prst="roundRect">
+            <a:avLst/>
+          </a:prstGeom>
+          <a:solidFill>
+            <a:srgbClr val="111B21"/>
+          </a:solidFill>
+          <a:ln w="12700">
+            <a:solidFill>
+              <a:srgbClr val="8696A0"/>
+            </a:solidFill>
+          </a:ln>
+        </p:spPr>
+        <p:style>
+          <a:lnRef idx="1">
+            <a:schemeClr val="accent1"/>
+          </a:lnRef>
+          <a:fillRef idx="3">
+            <a:schemeClr val="accent1"/>
+          </a:fillRef>
+          <a:effectRef idx="2">
+            <a:schemeClr val="accent1"/>
+          </a:effectRef>
+          <a:fontRef idx="minor">
+            <a:schemeClr val="lt1"/>
+          </a:fontRef>
+        </p:style>
+        <p:txBody>
+          <a:bodyPr rtlCol="0" anchor="ctr"/>
+          <a:lstStyle/>
+          <a:p/>
+        </p:txBody>
+      </p:sp>
+      <p:sp>
+        <p:nvSpPr>
+          <p:cNvPr id="13" name="TextBox 12"/>
+          <p:cNvSpPr txBox="1"/>
+          <p:nvPr/>
+        </p:nvSpPr>
+        <p:spPr>
+          <a:xfrm>
+            <a:off x="5131612" y="2240279"/>
+            <a:ext cx="1925726" cy="365760"/>
+          </a:xfrm>
+          <a:prstGeom prst="rect">
+            <a:avLst/>
+          </a:prstGeom>
+          <a:noFill/>
+        </p:spPr>
+        <p:txBody>
+          <a:bodyPr wrap="square">
+            <a:spAutoFit/>
+          </a:bodyPr>
+          <a:lstStyle/>
+          <a:p>
+            <a:pPr algn="ctr"/>
+            <a:r>
+              <a:rPr sz="1200" b="1">
+                <a:solidFill>
+                  <a:srgbClr val="FFFFFF"/>
+                </a:solidFill>
+                <a:latin typeface="Calibri"/>
+              </a:rPr>
+              <a:t>Siyavula Practice</a:t>
+            </a:r>
+          </a:p>
+        </p:txBody>
+      </p:sp>
+      <p:sp>
+        <p:nvSpPr>
+          <p:cNvPr id="14" name="TextBox 13"/>
+          <p:cNvSpPr txBox="1"/>
+          <p:nvPr/>
+        </p:nvSpPr>
+        <p:spPr>
+          <a:xfrm>
+            <a:off x="5131612" y="2651760"/>
+            <a:ext cx="1925726" cy="365760"/>
+          </a:xfrm>
+          <a:prstGeom prst="rect">
+            <a:avLst/>
+          </a:prstGeom>
+          <a:noFill/>
+        </p:spPr>
+        <p:txBody>
+          <a:bodyPr wrap="square">
+            <a:spAutoFit/>
+          </a:bodyPr>
+          <a:lstStyle/>
+          <a:p>
+            <a:pPr algn="ctr"/>
+            <a:r>
+              <a:rPr sz="1000" b="0">
+                <a:solidFill>
+                  <a:srgbClr val="8696A0"/>
+                </a:solidFill>
+                <a:latin typeface="Calibri"/>
+              </a:rPr>
+              <a:t>quizzes · commercial</a:t>
+            </a:r>
+          </a:p>
+        </p:txBody>
+      </p:sp>
+      <p:sp>
+        <p:nvSpPr>
+          <p:cNvPr id="15" name="Rounded Rectangle 14"/>
+          <p:cNvSpPr/>
+          <p:nvPr/>
+        </p:nvSpPr>
+        <p:spPr>
+          <a:xfrm>
+            <a:off x="7285939" y="2103120"/>
+            <a:ext cx="2108606" cy="1005840"/>
+          </a:xfrm>
+          <a:prstGeom prst="roundRect">
+            <a:avLst/>
+          </a:prstGeom>
+          <a:solidFill>
+            <a:srgbClr val="111B21"/>
+          </a:solidFill>
+          <a:ln w="12700">
+            <a:solidFill>
+              <a:srgbClr val="8696A0"/>
+            </a:solidFill>
+          </a:ln>
+        </p:spPr>
+        <p:style>
+          <a:lnRef idx="1">
+            <a:schemeClr val="accent1"/>
+          </a:lnRef>
+          <a:fillRef idx="3">
+            <a:schemeClr val="accent1"/>
+          </a:fillRef>
+          <a:effectRef idx="2">
+            <a:schemeClr val="accent1"/>
+          </a:effectRef>
+          <a:fontRef idx="minor">
+            <a:schemeClr val="lt1"/>
+          </a:fontRef>
+        </p:style>
+        <p:txBody>
+          <a:bodyPr rtlCol="0" anchor="ctr"/>
+          <a:lstStyle/>
+          <a:p/>
+        </p:txBody>
+      </p:sp>
+      <p:sp>
+        <p:nvSpPr>
+          <p:cNvPr id="16" name="TextBox 15"/>
+          <p:cNvSpPr txBox="1"/>
+          <p:nvPr/>
+        </p:nvSpPr>
+        <p:spPr>
+          <a:xfrm>
+            <a:off x="7377379" y="2240279"/>
+            <a:ext cx="1925726" cy="365760"/>
+          </a:xfrm>
+          <a:prstGeom prst="rect">
+            <a:avLst/>
+          </a:prstGeom>
+          <a:noFill/>
+        </p:spPr>
+        <p:txBody>
+          <a:bodyPr wrap="square">
+            <a:spAutoFit/>
+          </a:bodyPr>
+          <a:lstStyle/>
+          <a:p>
+            <a:pPr algn="ctr"/>
+            <a:r>
+              <a:rPr sz="1200" b="1">
+                <a:solidFill>
+                  <a:srgbClr val="FFFFFF"/>
+                </a:solidFill>
+                <a:latin typeface="Calibri"/>
+              </a:rPr>
+              <a:t>Snapplify</a:t>
+            </a:r>
+          </a:p>
+        </p:txBody>
+      </p:sp>
+      <p:sp>
+        <p:nvSpPr>
+          <p:cNvPr id="17" name="TextBox 16"/>
+          <p:cNvSpPr txBox="1"/>
+          <p:nvPr/>
+        </p:nvSpPr>
+        <p:spPr>
+          <a:xfrm>
+            <a:off x="7377379" y="2651760"/>
+            <a:ext cx="1925726" cy="365760"/>
+          </a:xfrm>
+          <a:prstGeom prst="rect">
+            <a:avLst/>
+          </a:prstGeom>
+          <a:noFill/>
+        </p:spPr>
+        <p:txBody>
+          <a:bodyPr wrap="square">
+            <a:spAutoFit/>
+          </a:bodyPr>
+          <a:lstStyle/>
+          <a:p>
+            <a:pPr algn="ctr"/>
+            <a:r>
+              <a:rPr sz="1000" b="0">
+                <a:solidFill>
+                  <a:srgbClr val="8696A0"/>
+                </a:solidFill>
+                <a:latin typeface="Calibri"/>
+              </a:rPr>
+              <a:t>textbooks · paid</a:t>
+            </a:r>
+          </a:p>
+        </p:txBody>
+      </p:sp>
+      <p:sp>
+        <p:nvSpPr>
+          <p:cNvPr id="18" name="Rounded Rectangle 17"/>
+          <p:cNvSpPr/>
+          <p:nvPr/>
+        </p:nvSpPr>
+        <p:spPr>
+          <a:xfrm>
+            <a:off x="9531705" y="2103120"/>
+            <a:ext cx="2108606" cy="1005840"/>
+          </a:xfrm>
+          <a:prstGeom prst="roundRect">
+            <a:avLst/>
+          </a:prstGeom>
+          <a:solidFill>
+            <a:srgbClr val="111B21"/>
+          </a:solidFill>
+          <a:ln w="12700">
+            <a:solidFill>
+              <a:srgbClr val="8696A0"/>
+            </a:solidFill>
+          </a:ln>
+        </p:spPr>
+        <p:style>
+          <a:lnRef idx="1">
+            <a:schemeClr val="accent1"/>
+          </a:lnRef>
+          <a:fillRef idx="3">
+            <a:schemeClr val="accent1"/>
+          </a:fillRef>
+          <a:effectRef idx="2">
+            <a:schemeClr val="accent1"/>
+          </a:effectRef>
+          <a:fontRef idx="minor">
+            <a:schemeClr val="lt1"/>
+          </a:fontRef>
+        </p:style>
+        <p:txBody>
+          <a:bodyPr rtlCol="0" anchor="ctr"/>
+          <a:lstStyle/>
+          <a:p/>
+        </p:txBody>
+      </p:sp>
+      <p:sp>
+        <p:nvSpPr>
+          <p:cNvPr id="19" name="TextBox 18"/>
+          <p:cNvSpPr txBox="1"/>
+          <p:nvPr/>
+        </p:nvSpPr>
+        <p:spPr>
+          <a:xfrm>
+            <a:off x="9623145" y="2240279"/>
+            <a:ext cx="1925726" cy="365760"/>
+          </a:xfrm>
+          <a:prstGeom prst="rect">
+            <a:avLst/>
+          </a:prstGeom>
+          <a:noFill/>
+        </p:spPr>
+        <p:txBody>
+          <a:bodyPr wrap="square">
+            <a:spAutoFit/>
+          </a:bodyPr>
+          <a:lstStyle/>
+          <a:p>
+            <a:pPr algn="ctr"/>
+            <a:r>
+              <a:rPr sz="1200" b="1">
+                <a:solidFill>
+                  <a:srgbClr val="FFFFFF"/>
+                </a:solidFill>
+                <a:latin typeface="Calibri"/>
+              </a:rPr>
+              <a:t>WCED ePortal</a:t>
+            </a:r>
+          </a:p>
+        </p:txBody>
+      </p:sp>
+      <p:sp>
+        <p:nvSpPr>
+          <p:cNvPr id="20" name="TextBox 19"/>
+          <p:cNvSpPr txBox="1"/>
+          <p:nvPr/>
+        </p:nvSpPr>
+        <p:spPr>
+          <a:xfrm>
+            <a:off x="9623145" y="2651760"/>
+            <a:ext cx="1925726" cy="365760"/>
+          </a:xfrm>
+          <a:prstGeom prst="rect">
+            <a:avLst/>
+          </a:prstGeom>
+          <a:noFill/>
+        </p:spPr>
+        <p:txBody>
+          <a:bodyPr wrap="square">
+            <a:spAutoFit/>
+          </a:bodyPr>
+          <a:lstStyle/>
+          <a:p>
+            <a:pPr algn="ctr"/>
+            <a:r>
+              <a:rPr sz="1000" b="0">
+                <a:solidFill>
+                  <a:srgbClr val="8696A0"/>
+                </a:solidFill>
+                <a:latin typeface="Calibri"/>
+              </a:rPr>
+              <a:t>provincial · content</a:t>
+            </a:r>
+          </a:p>
+        </p:txBody>
+      </p:sp>
+      <p:sp>
+        <p:nvSpPr>
+          <p:cNvPr id="21" name="TextBox 20"/>
+          <p:cNvSpPr txBox="1"/>
+          <p:nvPr/>
+        </p:nvSpPr>
+        <p:spPr>
+          <a:xfrm>
+            <a:off x="548640" y="3246120"/>
+            <a:ext cx="11064240" cy="320040"/>
+          </a:xfrm>
+          <a:prstGeom prst="rect">
+            <a:avLst/>
+          </a:prstGeom>
+          <a:noFill/>
+        </p:spPr>
+        <p:txBody>
+          <a:bodyPr wrap="square">
+            <a:spAutoFit/>
+          </a:bodyPr>
+          <a:lstStyle/>
+          <a:p>
+            <a:pPr algn="ctr"/>
+            <a:r>
+              <a:rPr sz="1300" b="1">
+                <a:solidFill>
+                  <a:srgbClr val="FFE9B8"/>
+                </a:solidFill>
+                <a:latin typeface="Calibri"/>
+              </a:rPr>
+              <a:t>None of them has a live 1-on-1 tutor. That's the layer we plug in.</a:t>
+            </a:r>
+          </a:p>
+        </p:txBody>
+      </p:sp>
+      <p:sp>
+        <p:nvSpPr>
+          <p:cNvPr id="22" name="Rounded Rectangle 21"/>
+          <p:cNvSpPr/>
+          <p:nvPr/>
+        </p:nvSpPr>
+        <p:spPr>
+          <a:xfrm>
+            <a:off x="548640" y="4023360"/>
+            <a:ext cx="3544824" cy="1691640"/>
+          </a:xfrm>
+          <a:prstGeom prst="roundRect">
+            <a:avLst/>
+          </a:prstGeom>
+          <a:solidFill>
+            <a:srgbClr val="111B21"/>
+          </a:solidFill>
+          <a:ln w="19050">
+            <a:solidFill>
+              <a:srgbClr val="00A884"/>
+            </a:solidFill>
+          </a:ln>
+        </p:spPr>
+        <p:style>
+          <a:lnRef idx="1">
+            <a:schemeClr val="accent1"/>
+          </a:lnRef>
+          <a:fillRef idx="3">
+            <a:schemeClr val="accent1"/>
+          </a:fillRef>
+          <a:effectRef idx="2">
+            <a:schemeClr val="accent1"/>
+          </a:effectRef>
+          <a:fontRef idx="minor">
+            <a:schemeClr val="lt1"/>
+          </a:fontRef>
+        </p:style>
+        <p:txBody>
+          <a:bodyPr rtlCol="0" anchor="ctr"/>
+          <a:lstStyle/>
+          <a:p/>
+        </p:txBody>
+      </p:sp>
+      <p:sp>
+        <p:nvSpPr>
+          <p:cNvPr id="23" name="TextBox 22"/>
+          <p:cNvSpPr txBox="1"/>
+          <p:nvPr/>
+        </p:nvSpPr>
+        <p:spPr>
+          <a:xfrm>
+            <a:off x="685800" y="4114800"/>
+            <a:ext cx="3270504" cy="274320"/>
+          </a:xfrm>
+          <a:prstGeom prst="rect">
+            <a:avLst/>
+          </a:prstGeom>
+          <a:noFill/>
+        </p:spPr>
+        <p:txBody>
+          <a:bodyPr wrap="square">
+            <a:spAutoFit/>
+          </a:bodyPr>
+          <a:lstStyle/>
+          <a:p>
+            <a:pPr algn="l"/>
+            <a:r>
+              <a:rPr sz="1000" b="1">
+                <a:solidFill>
+                  <a:srgbClr val="00A884"/>
+                </a:solidFill>
+                <a:latin typeface="Calibri"/>
+              </a:rPr>
+              <a:t>Phase 1 · Months 1-2</a:t>
+            </a:r>
+          </a:p>
+        </p:txBody>
+      </p:sp>
+      <p:sp>
+        <p:nvSpPr>
+          <p:cNvPr id="24" name="TextBox 23"/>
+          <p:cNvSpPr txBox="1"/>
+          <p:nvPr/>
+        </p:nvSpPr>
+        <p:spPr>
+          <a:xfrm>
+            <a:off x="685800" y="4434840"/>
+            <a:ext cx="3270504" cy="365760"/>
+          </a:xfrm>
+          <a:prstGeom prst="rect">
+            <a:avLst/>
+          </a:prstGeom>
+          <a:noFill/>
+        </p:spPr>
+        <p:txBody>
+          <a:bodyPr wrap="square">
+            <a:spAutoFit/>
+          </a:bodyPr>
+          <a:lstStyle/>
+          <a:p>
+            <a:pPr algn="l"/>
+            <a:r>
+              <a:rPr sz="1500" b="1">
+                <a:solidFill>
+                  <a:srgbClr val="FFFFFF"/>
+                </a:solidFill>
+                <a:latin typeface="Calibri"/>
+              </a:rPr>
+              <a:t>Content ingestion</a:t>
+            </a:r>
+          </a:p>
+        </p:txBody>
+      </p:sp>
+      <p:sp>
+        <p:nvSpPr>
+          <p:cNvPr id="25" name="TextBox 24"/>
+          <p:cNvSpPr txBox="1"/>
+          <p:nvPr/>
+        </p:nvSpPr>
+        <p:spPr>
+          <a:xfrm>
+            <a:off x="685800" y="4892040"/>
+            <a:ext cx="3270504" cy="731520"/>
+          </a:xfrm>
+          <a:prstGeom prst="rect">
+            <a:avLst/>
+          </a:prstGeom>
+          <a:noFill/>
+        </p:spPr>
+        <p:txBody>
+          <a:bodyPr wrap="square">
+            <a:spAutoFit/>
+          </a:bodyPr>
+          <a:lstStyle/>
+          <a:p>
+            <a:pPr algn="l"/>
+            <a:r>
+              <a:rPr sz="1000" b="0">
+                <a:solidFill>
+                  <a:srgbClr val="E9EDEF"/>
+                </a:solidFill>
+                <a:latin typeface="Calibri"/>
+              </a:rPr>
+              <a:t>Index e-School CAPS content into RAG · every answer cites the e-School lesson it draws from</a:t>
+            </a:r>
+          </a:p>
+        </p:txBody>
+      </p:sp>
+      <p:sp>
+        <p:nvSpPr>
+          <p:cNvPr id="26" name="Rounded Rectangle 25"/>
+          <p:cNvSpPr/>
+          <p:nvPr/>
+        </p:nvSpPr>
+        <p:spPr>
+          <a:xfrm>
+            <a:off x="4322064" y="4023360"/>
+            <a:ext cx="3544824" cy="1691640"/>
+          </a:xfrm>
+          <a:prstGeom prst="roundRect">
+            <a:avLst/>
+          </a:prstGeom>
+          <a:solidFill>
+            <a:srgbClr val="111B21"/>
+          </a:solidFill>
+          <a:ln w="19050">
+            <a:solidFill>
+              <a:srgbClr val="FFB347"/>
+            </a:solidFill>
+          </a:ln>
+        </p:spPr>
+        <p:style>
+          <a:lnRef idx="1">
+            <a:schemeClr val="accent1"/>
+          </a:lnRef>
+          <a:fillRef idx="3">
+            <a:schemeClr val="accent1"/>
+          </a:fillRef>
+          <a:effectRef idx="2">
+            <a:schemeClr val="accent1"/>
+          </a:effectRef>
+          <a:fontRef idx="minor">
+            <a:schemeClr val="lt1"/>
+          </a:fontRef>
+        </p:style>
+        <p:txBody>
+          <a:bodyPr rtlCol="0" anchor="ctr"/>
+          <a:lstStyle/>
+          <a:p/>
+        </p:txBody>
+      </p:sp>
+      <p:sp>
+        <p:nvSpPr>
+          <p:cNvPr id="27" name="TextBox 26"/>
+          <p:cNvSpPr txBox="1"/>
+          <p:nvPr/>
+        </p:nvSpPr>
+        <p:spPr>
+          <a:xfrm>
+            <a:off x="4459224" y="4114800"/>
+            <a:ext cx="3270504" cy="274320"/>
+          </a:xfrm>
+          <a:prstGeom prst="rect">
+            <a:avLst/>
+          </a:prstGeom>
+          <a:noFill/>
+        </p:spPr>
+        <p:txBody>
+          <a:bodyPr wrap="square">
+            <a:spAutoFit/>
+          </a:bodyPr>
+          <a:lstStyle/>
+          <a:p>
+            <a:pPr algn="l"/>
+            <a:r>
+              <a:rPr sz="1000" b="1">
+                <a:solidFill>
+                  <a:srgbClr val="FFB347"/>
+                </a:solidFill>
+                <a:latin typeface="Calibri"/>
+              </a:rPr>
+              <a:t>Phase 2 · Months 2-4</a:t>
+            </a:r>
+          </a:p>
+        </p:txBody>
+      </p:sp>
+      <p:sp>
+        <p:nvSpPr>
+          <p:cNvPr id="28" name="TextBox 27"/>
+          <p:cNvSpPr txBox="1"/>
+          <p:nvPr/>
+        </p:nvSpPr>
+        <p:spPr>
+          <a:xfrm>
+            <a:off x="4459224" y="4434840"/>
+            <a:ext cx="3270504" cy="365760"/>
+          </a:xfrm>
+          <a:prstGeom prst="rect">
+            <a:avLst/>
+          </a:prstGeom>
+          <a:noFill/>
+        </p:spPr>
+        <p:txBody>
+          <a:bodyPr wrap="square">
+            <a:spAutoFit/>
+          </a:bodyPr>
+          <a:lstStyle/>
+          <a:p>
+            <a:pPr algn="l"/>
+            <a:r>
+              <a:rPr sz="1500" b="1">
+                <a:solidFill>
+                  <a:srgbClr val="FFFFFF"/>
+                </a:solidFill>
+                <a:latin typeface="Calibri"/>
+              </a:rPr>
+              <a:t>API + widget</a:t>
+            </a:r>
+          </a:p>
+        </p:txBody>
+      </p:sp>
+      <p:sp>
+        <p:nvSpPr>
+          <p:cNvPr id="29" name="TextBox 28"/>
+          <p:cNvSpPr txBox="1"/>
+          <p:nvPr/>
+        </p:nvSpPr>
+        <p:spPr>
+          <a:xfrm>
+            <a:off x="4459224" y="4892040"/>
+            <a:ext cx="3270504" cy="731520"/>
+          </a:xfrm>
+          <a:prstGeom prst="rect">
+            <a:avLst/>
+          </a:prstGeom>
+          <a:noFill/>
+        </p:spPr>
+        <p:txBody>
+          <a:bodyPr wrap="square">
+            <a:spAutoFit/>
+          </a:bodyPr>
+          <a:lstStyle/>
+          <a:p>
+            <a:pPr algn="l"/>
+            <a:r>
+              <a:rPr sz="1000" b="0">
+                <a:solidFill>
+                  <a:srgbClr val="E9EDEF"/>
+                </a:solidFill>
+                <a:latin typeface="Calibri"/>
+              </a:rPr>
+              <a:t>'Ask the tutor' button embedded in e-School · SSO from learner profile · same zero-rated network</a:t>
+            </a:r>
+          </a:p>
+        </p:txBody>
+      </p:sp>
+      <p:sp>
+        <p:nvSpPr>
+          <p:cNvPr id="30" name="Rounded Rectangle 29"/>
+          <p:cNvSpPr/>
+          <p:nvPr/>
+        </p:nvSpPr>
+        <p:spPr>
+          <a:xfrm>
+            <a:off x="8095488" y="4023360"/>
+            <a:ext cx="3544824" cy="1691640"/>
+          </a:xfrm>
+          <a:prstGeom prst="roundRect">
+            <a:avLst/>
+          </a:prstGeom>
+          <a:solidFill>
+            <a:srgbClr val="111B21"/>
+          </a:solidFill>
+          <a:ln w="19050">
+            <a:solidFill>
+              <a:srgbClr val="9CFF8C"/>
+            </a:solidFill>
+          </a:ln>
+        </p:spPr>
+        <p:style>
+          <a:lnRef idx="1">
+            <a:schemeClr val="accent1"/>
+          </a:lnRef>
+          <a:fillRef idx="3">
+            <a:schemeClr val="accent1"/>
+          </a:fillRef>
+          <a:effectRef idx="2">
+            <a:schemeClr val="accent1"/>
+          </a:effectRef>
+          <a:fontRef idx="minor">
+            <a:schemeClr val="lt1"/>
+          </a:fontRef>
+        </p:style>
+        <p:txBody>
+          <a:bodyPr rtlCol="0" anchor="ctr"/>
+          <a:lstStyle/>
+          <a:p/>
+        </p:txBody>
+      </p:sp>
+      <p:sp>
+        <p:nvSpPr>
+          <p:cNvPr id="31" name="TextBox 30"/>
+          <p:cNvSpPr txBox="1"/>
+          <p:nvPr/>
+        </p:nvSpPr>
+        <p:spPr>
+          <a:xfrm>
+            <a:off x="8232648" y="4114800"/>
+            <a:ext cx="3270504" cy="274320"/>
+          </a:xfrm>
+          <a:prstGeom prst="rect">
+            <a:avLst/>
+          </a:prstGeom>
+          <a:noFill/>
+        </p:spPr>
+        <p:txBody>
+          <a:bodyPr wrap="square">
+            <a:spAutoFit/>
+          </a:bodyPr>
+          <a:lstStyle/>
+          <a:p>
+            <a:pPr algn="l"/>
+            <a:r>
+              <a:rPr sz="1000" b="1">
+                <a:solidFill>
+                  <a:srgbClr val="9CFF8C"/>
+                </a:solidFill>
+                <a:latin typeface="Calibri"/>
+              </a:rPr>
+              <a:t>Phase 3 · Months 4-6</a:t>
+            </a:r>
+          </a:p>
+        </p:txBody>
+      </p:sp>
+      <p:sp>
+        <p:nvSpPr>
+          <p:cNvPr id="32" name="TextBox 31"/>
+          <p:cNvSpPr txBox="1"/>
+          <p:nvPr/>
+        </p:nvSpPr>
+        <p:spPr>
+          <a:xfrm>
+            <a:off x="8232648" y="4434840"/>
+            <a:ext cx="3270504" cy="365760"/>
+          </a:xfrm>
+          <a:prstGeom prst="rect">
+            <a:avLst/>
+          </a:prstGeom>
+          <a:noFill/>
+        </p:spPr>
+        <p:txBody>
+          <a:bodyPr wrap="square">
+            <a:spAutoFit/>
+          </a:bodyPr>
+          <a:lstStyle/>
+          <a:p>
+            <a:pPr algn="l"/>
+            <a:r>
+              <a:rPr sz="1500" b="1">
+                <a:solidFill>
+                  <a:srgbClr val="FFFFFF"/>
+                </a:solidFill>
+                <a:latin typeface="Calibri"/>
+              </a:rPr>
+              <a:t>Analytics cross-flow</a:t>
+            </a:r>
+          </a:p>
+        </p:txBody>
+      </p:sp>
+      <p:sp>
+        <p:nvSpPr>
+          <p:cNvPr id="33" name="TextBox 32"/>
+          <p:cNvSpPr txBox="1"/>
+          <p:nvPr/>
+        </p:nvSpPr>
+        <p:spPr>
+          <a:xfrm>
+            <a:off x="8232648" y="4892040"/>
+            <a:ext cx="3270504" cy="731520"/>
+          </a:xfrm>
+          <a:prstGeom prst="rect">
+            <a:avLst/>
+          </a:prstGeom>
+          <a:noFill/>
+        </p:spPr>
+        <p:txBody>
+          <a:bodyPr wrap="square">
+            <a:spAutoFit/>
+          </a:bodyPr>
+          <a:lstStyle/>
+          <a:p>
+            <a:pPr algn="l"/>
+            <a:r>
+              <a:rPr sz="1000" b="0">
+                <a:solidFill>
+                  <a:srgbClr val="E9EDEF"/>
+                </a:solidFill>
+                <a:latin typeface="Calibri"/>
+              </a:rPr>
+              <a:t>Where do learners get stuck? Feed EduConnect's misconception data back into e-School content roadmap</a:t>
+            </a:r>
+          </a:p>
+        </p:txBody>
+      </p:sp>
+      <p:sp>
+        <p:nvSpPr>
+          <p:cNvPr id="34" name="Rounded Rectangle 33"/>
+          <p:cNvSpPr/>
+          <p:nvPr/>
+        </p:nvSpPr>
+        <p:spPr>
+          <a:xfrm>
+            <a:off x="548640" y="6263640"/>
+            <a:ext cx="11064240" cy="411480"/>
+          </a:xfrm>
+          <a:prstGeom prst="roundRect">
+            <a:avLst/>
+          </a:prstGeom>
+          <a:solidFill>
+            <a:srgbClr val="111B21"/>
+          </a:solidFill>
+          <a:ln w="19050">
+            <a:solidFill>
+              <a:srgbClr val="FFB347"/>
+            </a:solidFill>
+          </a:ln>
+        </p:spPr>
+        <p:style>
+          <a:lnRef idx="1">
+            <a:schemeClr val="accent1"/>
+          </a:lnRef>
+          <a:fillRef idx="3">
+            <a:schemeClr val="accent1"/>
+          </a:fillRef>
+          <a:effectRef idx="2">
+            <a:schemeClr val="accent1"/>
+          </a:effectRef>
+          <a:fontRef idx="minor">
+            <a:schemeClr val="lt1"/>
+          </a:fontRef>
+        </p:style>
+        <p:txBody>
+          <a:bodyPr rtlCol="0" anchor="ctr"/>
+          <a:lstStyle/>
+          <a:p/>
+        </p:txBody>
+      </p:sp>
+      <p:sp>
+        <p:nvSpPr>
+          <p:cNvPr id="35" name="TextBox 34"/>
+          <p:cNvSpPr txBox="1"/>
+          <p:nvPr/>
+        </p:nvSpPr>
+        <p:spPr>
+          <a:xfrm>
+            <a:off x="548640" y="6318503"/>
+            <a:ext cx="11064240" cy="320040"/>
+          </a:xfrm>
+          <a:prstGeom prst="rect">
+            <a:avLst/>
+          </a:prstGeom>
+          <a:noFill/>
+        </p:spPr>
+        <p:txBody>
+          <a:bodyPr wrap="square">
+            <a:spAutoFit/>
+          </a:bodyPr>
+          <a:lstStyle/>
+          <a:p>
+            <a:pPr algn="ctr"/>
+            <a:r>
+              <a:rPr sz="1100" b="1">
+                <a:solidFill>
+                  <a:srgbClr val="FFE9B8"/>
+                </a:solidFill>
+                <a:latin typeface="Calibri"/>
+              </a:rPr>
+              <a:t>6 engineer-months to merge · ~R1.6M budget. Building the tutor inside Vodacom from scratch: 12–18 months · ~R15–25M. 10× cheaper to plug us in.</a:t>
+            </a:r>
+          </a:p>
+        </p:txBody>
+      </p:sp>
+    </p:spTree>
+  </p:cSld>
+  <p:clrMapOvr>
+    <a:masterClrMapping/>
+  </p:clrMapOvr>
+</p:sld>
+</file>
+
+<file path=ppt/slides/slide19.xml><?xml version="1.0" encoding="utf-8"?>
+<p:sld xmlns:a="http://schemas.openxmlformats.org/drawingml/2006/main" xmlns:p="http://schemas.openxmlformats.org/presentationml/2006/main" xmlns:r="http://schemas.openxmlformats.org/officeDocument/2006/relationships">
+  <p:cSld>
+    <p:bg>
+      <p:bgPr>
+        <a:solidFill>
+          <a:srgbClr val="0B141A"/>
+        </a:solidFill>
+        <a:effectLst/>
+      </p:bgPr>
+    </p:bg>
+    <p:spTree>
+      <p:nvGrpSpPr>
+        <p:cNvPr id="1" name=""/>
+        <p:cNvGrpSpPr/>
+        <p:nvPr/>
+      </p:nvGrpSpPr>
+      <p:grpSpPr/>
+      <p:sp>
+        <p:nvSpPr>
+          <p:cNvPr id="2" name="TextBox 1"/>
+          <p:cNvSpPr txBox="1"/>
+          <p:nvPr/>
+        </p:nvSpPr>
+        <p:spPr>
+          <a:xfrm>
+            <a:off x="548640" y="365760"/>
+            <a:ext cx="11064240" cy="457200"/>
+          </a:xfrm>
+          <a:prstGeom prst="rect">
+            <a:avLst/>
+          </a:prstGeom>
+          <a:noFill/>
+        </p:spPr>
+        <p:txBody>
+          <a:bodyPr wrap="square">
+            <a:spAutoFit/>
+          </a:bodyPr>
+          <a:lstStyle/>
+          <a:p>
+            <a:pPr algn="l"/>
+            <a:r>
+              <a:rPr sz="1400" b="1">
+                <a:solidFill>
+                  <a:srgbClr val="00A884"/>
+                </a:solidFill>
+                <a:latin typeface="Calibri"/>
+              </a:rPr>
+              <a:t>Why Vodacom wins</a:t>
+            </a:r>
+          </a:p>
+        </p:txBody>
+      </p:sp>
+      <p:sp>
+        <p:nvSpPr>
+          <p:cNvPr id="3" name="TextBox 2"/>
+          <p:cNvSpPr txBox="1"/>
+          <p:nvPr/>
+        </p:nvSpPr>
+        <p:spPr>
+          <a:xfrm>
+            <a:off x="548640" y="777240"/>
+            <a:ext cx="11064240" cy="548640"/>
+          </a:xfrm>
+          <a:prstGeom prst="rect">
+            <a:avLst/>
+          </a:prstGeom>
+          <a:noFill/>
+        </p:spPr>
+        <p:txBody>
+          <a:bodyPr wrap="square">
+            <a:spAutoFit/>
+          </a:bodyPr>
+          <a:lstStyle/>
+          <a:p>
+            <a:pPr algn="l"/>
+            <a:r>
+              <a:rPr sz="2600" b="1">
+                <a:solidFill>
+                  <a:srgbClr val="FFFFFF"/>
+                </a:solidFill>
+                <a:latin typeface="Calibri"/>
+              </a:rPr>
+              <a:t>Purpose scores. Commercial wins. Both, in one bet.</a:t>
+            </a:r>
+          </a:p>
+        </p:txBody>
+      </p:sp>
+      <p:sp>
+        <p:nvSpPr>
+          <p:cNvPr id="4" name="Rectangle 3"/>
+          <p:cNvSpPr/>
+          <p:nvPr/>
+        </p:nvSpPr>
+        <p:spPr>
+          <a:xfrm>
+            <a:off x="548640" y="1508760"/>
+            <a:ext cx="3657600" cy="50800"/>
+          </a:xfrm>
+          <a:prstGeom prst="rect">
+            <a:avLst/>
+          </a:prstGeom>
+          <a:solidFill>
+            <a:srgbClr val="00A884"/>
+          </a:solidFill>
+          <a:ln>
+            <a:noFill/>
+          </a:ln>
+        </p:spPr>
+        <p:style>
+          <a:lnRef idx="1">
+            <a:schemeClr val="accent1"/>
+          </a:lnRef>
+          <a:fillRef idx="3">
+            <a:schemeClr val="accent1"/>
+          </a:fillRef>
+          <a:effectRef idx="2">
+            <a:schemeClr val="accent1"/>
+          </a:effectRef>
+          <a:fontRef idx="minor">
+            <a:schemeClr val="lt1"/>
+          </a:fontRef>
+        </p:style>
+        <p:txBody>
+          <a:bodyPr rtlCol="0" anchor="ctr"/>
+          <a:lstStyle/>
+          <a:p>
+            <a:pPr algn="ctr"/>
+          </a:p>
+        </p:txBody>
+      </p:sp>
+      <p:sp>
+        <p:nvSpPr>
+          <p:cNvPr id="5" name="Rounded Rectangle 4"/>
+          <p:cNvSpPr/>
+          <p:nvPr/>
+        </p:nvSpPr>
+        <p:spPr>
+          <a:xfrm>
+            <a:off x="548640" y="1783080"/>
+            <a:ext cx="3566160" cy="2057400"/>
+          </a:xfrm>
+          <a:prstGeom prst="roundRect">
+            <a:avLst/>
+          </a:prstGeom>
+          <a:solidFill>
+            <a:srgbClr val="111B21"/>
+          </a:solidFill>
+          <a:ln w="19050">
+            <a:solidFill>
+              <a:srgbClr val="00A884"/>
+            </a:solidFill>
+          </a:ln>
+        </p:spPr>
+        <p:style>
+          <a:lnRef idx="1">
+            <a:schemeClr val="accent1"/>
+          </a:lnRef>
+          <a:fillRef idx="3">
+            <a:schemeClr val="accent1"/>
+          </a:fillRef>
+          <a:effectRef idx="2">
+            <a:schemeClr val="accent1"/>
+          </a:effectRef>
+          <a:fontRef idx="minor">
+            <a:schemeClr val="lt1"/>
+          </a:fontRef>
+        </p:style>
+        <p:txBody>
+          <a:bodyPr rtlCol="0" anchor="ctr"/>
+          <a:lstStyle/>
+          <a:p/>
+        </p:txBody>
+      </p:sp>
+      <p:sp>
+        <p:nvSpPr>
+          <p:cNvPr id="6" name="Rounded Rectangle 5"/>
+          <p:cNvSpPr/>
+          <p:nvPr/>
+        </p:nvSpPr>
+        <p:spPr>
+          <a:xfrm>
+            <a:off x="685800" y="1920240"/>
+            <a:ext cx="1554480" cy="320040"/>
+          </a:xfrm>
+          <a:prstGeom prst="roundRect">
+            <a:avLst/>
+          </a:prstGeom>
+          <a:solidFill>
+            <a:srgbClr val="00A884"/>
+          </a:solidFill>
+          <a:ln>
+            <a:noFill/>
+          </a:ln>
+        </p:spPr>
+        <p:style>
+          <a:lnRef idx="1">
+            <a:schemeClr val="accent1"/>
+          </a:lnRef>
+          <a:fillRef idx="3">
+            <a:schemeClr val="accent1"/>
+          </a:fillRef>
+          <a:effectRef idx="2">
+            <a:schemeClr val="accent1"/>
+          </a:effectRef>
+          <a:fontRef idx="minor">
+            <a:schemeClr val="lt1"/>
+          </a:fontRef>
+        </p:style>
+        <p:txBody>
+          <a:bodyPr rtlCol="0" anchor="ctr" lIns="137160" rIns="137160"/>
+          <a:lstStyle/>
+          <a:p>
+            <a:pPr algn="ctr"/>
+            <a:r>
+              <a:rPr sz="1000" b="1">
+                <a:solidFill>
+                  <a:srgbClr val="03110D"/>
+                </a:solidFill>
+              </a:rPr>
+              <a:t>PURPOSE KPI</a:t>
+            </a:r>
+          </a:p>
+        </p:txBody>
+      </p:sp>
+      <p:sp>
+        <p:nvSpPr>
+          <p:cNvPr id="7" name="TextBox 6"/>
+          <p:cNvSpPr txBox="1"/>
+          <p:nvPr/>
+        </p:nvSpPr>
+        <p:spPr>
+          <a:xfrm>
+            <a:off x="685800" y="2331720"/>
+            <a:ext cx="3291840" cy="457200"/>
+          </a:xfrm>
+          <a:prstGeom prst="rect">
+            <a:avLst/>
+          </a:prstGeom>
+          <a:noFill/>
+        </p:spPr>
+        <p:txBody>
+          <a:bodyPr wrap="square">
+            <a:spAutoFit/>
+          </a:bodyPr>
+          <a:lstStyle/>
+          <a:p>
+            <a:pPr algn="l"/>
+            <a:r>
+              <a:rPr sz="1800" b="1">
+                <a:solidFill>
+                  <a:srgbClr val="FFFFFF"/>
+                </a:solidFill>
+                <a:latin typeface="Calibri"/>
+              </a:rPr>
+              <a:t>50M-by-2030 target</a:t>
+            </a:r>
+          </a:p>
+        </p:txBody>
+      </p:sp>
+      <p:sp>
+        <p:nvSpPr>
+          <p:cNvPr id="8" name="TextBox 7"/>
+          <p:cNvSpPr txBox="1"/>
+          <p:nvPr/>
+        </p:nvSpPr>
+        <p:spPr>
+          <a:xfrm>
+            <a:off x="685800" y="2834639"/>
+            <a:ext cx="3291840" cy="914400"/>
+          </a:xfrm>
+          <a:prstGeom prst="rect">
+            <a:avLst/>
+          </a:prstGeom>
+          <a:noFill/>
+        </p:spPr>
+        <p:txBody>
+          <a:bodyPr wrap="square">
+            <a:spAutoFit/>
+          </a:bodyPr>
+          <a:lstStyle/>
+          <a:p>
+            <a:pPr algn="l"/>
+            <a:r>
+              <a:rPr sz="1000" b="0">
+                <a:solidFill>
+                  <a:srgbClr val="E9EDEF"/>
+                </a:solidFill>
+                <a:latin typeface="Calibri"/>
+              </a:rPr>
+              <a:t>Media-friendly, measurable slice of Vodafone Group's Purpose commitment. Every learner served = a countable data point in the annual report.</a:t>
+            </a:r>
+          </a:p>
+        </p:txBody>
+      </p:sp>
+      <p:sp>
+        <p:nvSpPr>
+          <p:cNvPr id="9" name="Rounded Rectangle 8"/>
+          <p:cNvSpPr/>
+          <p:nvPr/>
+        </p:nvSpPr>
+        <p:spPr>
+          <a:xfrm>
+            <a:off x="4297679" y="1783080"/>
+            <a:ext cx="3566160" cy="2057400"/>
+          </a:xfrm>
+          <a:prstGeom prst="roundRect">
+            <a:avLst/>
+          </a:prstGeom>
+          <a:solidFill>
+            <a:srgbClr val="111B21"/>
+          </a:solidFill>
+          <a:ln w="19050">
+            <a:solidFill>
+              <a:srgbClr val="FFB347"/>
+            </a:solidFill>
+          </a:ln>
+        </p:spPr>
+        <p:style>
+          <a:lnRef idx="1">
+            <a:schemeClr val="accent1"/>
+          </a:lnRef>
+          <a:fillRef idx="3">
+            <a:schemeClr val="accent1"/>
+          </a:fillRef>
+          <a:effectRef idx="2">
+            <a:schemeClr val="accent1"/>
+          </a:effectRef>
+          <a:fontRef idx="minor">
+            <a:schemeClr val="lt1"/>
+          </a:fontRef>
+        </p:style>
+        <p:txBody>
+          <a:bodyPr rtlCol="0" anchor="ctr"/>
+          <a:lstStyle/>
+          <a:p/>
+        </p:txBody>
+      </p:sp>
+      <p:sp>
+        <p:nvSpPr>
+          <p:cNvPr id="10" name="Rounded Rectangle 9"/>
+          <p:cNvSpPr/>
+          <p:nvPr/>
+        </p:nvSpPr>
+        <p:spPr>
+          <a:xfrm>
+            <a:off x="4434840" y="1920240"/>
+            <a:ext cx="1554480" cy="320040"/>
+          </a:xfrm>
+          <a:prstGeom prst="roundRect">
+            <a:avLst/>
+          </a:prstGeom>
+          <a:solidFill>
+            <a:srgbClr val="FFB347"/>
+          </a:solidFill>
+          <a:ln>
+            <a:noFill/>
+          </a:ln>
+        </p:spPr>
+        <p:style>
+          <a:lnRef idx="1">
+            <a:schemeClr val="accent1"/>
+          </a:lnRef>
+          <a:fillRef idx="3">
+            <a:schemeClr val="accent1"/>
+          </a:fillRef>
+          <a:effectRef idx="2">
+            <a:schemeClr val="accent1"/>
+          </a:effectRef>
+          <a:fontRef idx="minor">
+            <a:schemeClr val="lt1"/>
+          </a:fontRef>
+        </p:style>
+        <p:txBody>
+          <a:bodyPr rtlCol="0" anchor="ctr" lIns="137160" rIns="137160"/>
+          <a:lstStyle/>
+          <a:p>
+            <a:pPr algn="ctr"/>
+            <a:r>
+              <a:rPr sz="1000" b="1">
+                <a:solidFill>
+                  <a:srgbClr val="03110D"/>
+                </a:solidFill>
+              </a:rPr>
+              <a:t>YOUTH CAC</a:t>
+            </a:r>
+          </a:p>
+        </p:txBody>
+      </p:sp>
+      <p:sp>
+        <p:nvSpPr>
+          <p:cNvPr id="11" name="TextBox 10"/>
+          <p:cNvSpPr txBox="1"/>
+          <p:nvPr/>
+        </p:nvSpPr>
+        <p:spPr>
+          <a:xfrm>
+            <a:off x="4434840" y="2331720"/>
+            <a:ext cx="3291840" cy="457200"/>
+          </a:xfrm>
+          <a:prstGeom prst="rect">
+            <a:avLst/>
+          </a:prstGeom>
+          <a:noFill/>
+        </p:spPr>
+        <p:txBody>
+          <a:bodyPr wrap="square">
+            <a:spAutoFit/>
+          </a:bodyPr>
+          <a:lstStyle/>
+          <a:p>
+            <a:pPr algn="l"/>
+            <a:r>
+              <a:rPr sz="1800" b="1">
+                <a:solidFill>
+                  <a:srgbClr val="FFFFFF"/>
+                </a:solidFill>
+                <a:latin typeface="Calibri"/>
+              </a:rPr>
+              <a:t>25× cheaper</a:t>
+            </a:r>
+          </a:p>
+        </p:txBody>
+      </p:sp>
+      <p:sp>
+        <p:nvSpPr>
+          <p:cNvPr id="12" name="TextBox 11"/>
+          <p:cNvSpPr txBox="1"/>
+          <p:nvPr/>
+        </p:nvSpPr>
+        <p:spPr>
+          <a:xfrm>
+            <a:off x="4434840" y="2834639"/>
+            <a:ext cx="3291840" cy="914400"/>
+          </a:xfrm>
+          <a:prstGeom prst="rect">
+            <a:avLst/>
+          </a:prstGeom>
+          <a:noFill/>
+        </p:spPr>
+        <p:txBody>
+          <a:bodyPr wrap="square">
+            <a:spAutoFit/>
+          </a:bodyPr>
+          <a:lstStyle/>
+          <a:p>
+            <a:pPr algn="l"/>
+            <a:r>
+              <a:rPr sz="1000" b="0">
+                <a:solidFill>
+                  <a:srgbClr val="E9EDEF"/>
+                </a:solidFill>
+                <a:latin typeface="Calibri"/>
+              </a:rPr>
+              <a:t>R200k/yr LLM cost vs R5–8M/yr in ad spend to reach the same 100k SA teens. The network that helps you pass matric is the network you stay with for a decade.</a:t>
+            </a:r>
+          </a:p>
+        </p:txBody>
+      </p:sp>
+      <p:sp>
+        <p:nvSpPr>
+          <p:cNvPr id="13" name="Rounded Rectangle 12"/>
+          <p:cNvSpPr/>
+          <p:nvPr/>
+        </p:nvSpPr>
+        <p:spPr>
+          <a:xfrm>
+            <a:off x="8046719" y="1783080"/>
+            <a:ext cx="3566160" cy="2057400"/>
+          </a:xfrm>
+          <a:prstGeom prst="roundRect">
+            <a:avLst/>
+          </a:prstGeom>
+          <a:solidFill>
+            <a:srgbClr val="111B21"/>
+          </a:solidFill>
+          <a:ln w="19050">
+            <a:solidFill>
+              <a:srgbClr val="00A884"/>
+            </a:solidFill>
+          </a:ln>
+        </p:spPr>
+        <p:style>
+          <a:lnRef idx="1">
+            <a:schemeClr val="accent1"/>
+          </a:lnRef>
+          <a:fillRef idx="3">
+            <a:schemeClr val="accent1"/>
+          </a:fillRef>
+          <a:effectRef idx="2">
+            <a:schemeClr val="accent1"/>
+          </a:effectRef>
+          <a:fontRef idx="minor">
+            <a:schemeClr val="lt1"/>
+          </a:fontRef>
+        </p:style>
+        <p:txBody>
+          <a:bodyPr rtlCol="0" anchor="ctr"/>
+          <a:lstStyle/>
+          <a:p/>
+        </p:txBody>
+      </p:sp>
+      <p:sp>
+        <p:nvSpPr>
+          <p:cNvPr id="14" name="Rounded Rectangle 13"/>
+          <p:cNvSpPr/>
+          <p:nvPr/>
+        </p:nvSpPr>
+        <p:spPr>
+          <a:xfrm>
+            <a:off x="8183879" y="1920240"/>
+            <a:ext cx="1554480" cy="320040"/>
+          </a:xfrm>
+          <a:prstGeom prst="roundRect">
+            <a:avLst/>
+          </a:prstGeom>
+          <a:solidFill>
+            <a:srgbClr val="00A884"/>
+          </a:solidFill>
+          <a:ln>
+            <a:noFill/>
+          </a:ln>
+        </p:spPr>
+        <p:style>
+          <a:lnRef idx="1">
+            <a:schemeClr val="accent1"/>
+          </a:lnRef>
+          <a:fillRef idx="3">
+            <a:schemeClr val="accent1"/>
+          </a:fillRef>
+          <a:effectRef idx="2">
+            <a:schemeClr val="accent1"/>
+          </a:effectRef>
+          <a:fontRef idx="minor">
+            <a:schemeClr val="lt1"/>
+          </a:fontRef>
+        </p:style>
+        <p:txBody>
+          <a:bodyPr rtlCol="0" anchor="ctr" lIns="137160" rIns="137160"/>
+          <a:lstStyle/>
+          <a:p>
+            <a:pPr algn="ctr"/>
+            <a:r>
+              <a:rPr sz="1000" b="1">
+                <a:solidFill>
+                  <a:srgbClr val="03110D"/>
+                </a:solidFill>
+              </a:rPr>
+              <a:t>BUNDLE REVENUE</a:t>
+            </a:r>
+          </a:p>
+        </p:txBody>
+      </p:sp>
+      <p:sp>
+        <p:nvSpPr>
+          <p:cNvPr id="15" name="TextBox 14"/>
+          <p:cNvSpPr txBox="1"/>
+          <p:nvPr/>
+        </p:nvSpPr>
+        <p:spPr>
+          <a:xfrm>
+            <a:off x="8183879" y="2331720"/>
+            <a:ext cx="3291840" cy="457200"/>
+          </a:xfrm>
+          <a:prstGeom prst="rect">
+            <a:avLst/>
+          </a:prstGeom>
+          <a:noFill/>
+        </p:spPr>
+        <p:txBody>
+          <a:bodyPr wrap="square">
+            <a:spAutoFit/>
+          </a:bodyPr>
+          <a:lstStyle/>
+          <a:p>
+            <a:pPr algn="l"/>
+            <a:r>
+              <a:rPr sz="1800" b="1">
+                <a:solidFill>
+                  <a:srgbClr val="FFFFFF"/>
+                </a:solidFill>
+                <a:latin typeface="Calibri"/>
+              </a:rPr>
+              <a:t>R1.5M/mo direct</a:t>
+            </a:r>
+          </a:p>
+        </p:txBody>
+      </p:sp>
+      <p:sp>
+        <p:nvSpPr>
+          <p:cNvPr id="16" name="TextBox 15"/>
+          <p:cNvSpPr txBox="1"/>
+          <p:nvPr/>
+        </p:nvSpPr>
+        <p:spPr>
+          <a:xfrm>
+            <a:off x="8183879" y="2834639"/>
+            <a:ext cx="3291840" cy="914400"/>
+          </a:xfrm>
+          <a:prstGeom prst="rect">
+            <a:avLst/>
+          </a:prstGeom>
+          <a:noFill/>
+        </p:spPr>
+        <p:txBody>
+          <a:bodyPr wrap="square">
+            <a:spAutoFit/>
+          </a:bodyPr>
+          <a:lstStyle/>
+          <a:p>
+            <a:pPr algn="l"/>
+            <a:r>
+              <a:rPr sz="1000" b="0">
+                <a:solidFill>
+                  <a:srgbClr val="E9EDEF"/>
+                </a:solidFill>
+                <a:latin typeface="Calibri"/>
+              </a:rPr>
+              <a:t>100k learners × 30% conversion × R5/mo WhatsApp bundle. Zero marketing spend — the tutor itself drives the buy.</a:t>
+            </a:r>
+          </a:p>
+        </p:txBody>
+      </p:sp>
+      <p:sp>
+        <p:nvSpPr>
+          <p:cNvPr id="17" name="Rounded Rectangle 16"/>
+          <p:cNvSpPr/>
+          <p:nvPr/>
+        </p:nvSpPr>
+        <p:spPr>
+          <a:xfrm>
+            <a:off x="548640" y="4023360"/>
+            <a:ext cx="3566160" cy="2057400"/>
+          </a:xfrm>
+          <a:prstGeom prst="roundRect">
+            <a:avLst/>
+          </a:prstGeom>
+          <a:solidFill>
+            <a:srgbClr val="111B21"/>
+          </a:solidFill>
+          <a:ln w="19050">
+            <a:solidFill>
+              <a:srgbClr val="FFB347"/>
+            </a:solidFill>
+          </a:ln>
+        </p:spPr>
+        <p:style>
+          <a:lnRef idx="1">
+            <a:schemeClr val="accent1"/>
+          </a:lnRef>
+          <a:fillRef idx="3">
+            <a:schemeClr val="accent1"/>
+          </a:fillRef>
+          <a:effectRef idx="2">
+            <a:schemeClr val="accent1"/>
+          </a:effectRef>
+          <a:fontRef idx="minor">
+            <a:schemeClr val="lt1"/>
+          </a:fontRef>
+        </p:style>
+        <p:txBody>
+          <a:bodyPr rtlCol="0" anchor="ctr"/>
+          <a:lstStyle/>
+          <a:p/>
+        </p:txBody>
+      </p:sp>
+      <p:sp>
+        <p:nvSpPr>
+          <p:cNvPr id="18" name="Rounded Rectangle 17"/>
+          <p:cNvSpPr/>
+          <p:nvPr/>
+        </p:nvSpPr>
+        <p:spPr>
+          <a:xfrm>
+            <a:off x="685800" y="4160520"/>
+            <a:ext cx="1554480" cy="320040"/>
+          </a:xfrm>
+          <a:prstGeom prst="roundRect">
+            <a:avLst/>
+          </a:prstGeom>
+          <a:solidFill>
+            <a:srgbClr val="FFB347"/>
+          </a:solidFill>
+          <a:ln>
+            <a:noFill/>
+          </a:ln>
+        </p:spPr>
+        <p:style>
+          <a:lnRef idx="1">
+            <a:schemeClr val="accent1"/>
+          </a:lnRef>
+          <a:fillRef idx="3">
+            <a:schemeClr val="accent1"/>
+          </a:fillRef>
+          <a:effectRef idx="2">
+            <a:schemeClr val="accent1"/>
+          </a:effectRef>
+          <a:fontRef idx="minor">
+            <a:schemeClr val="lt1"/>
+          </a:fontRef>
+        </p:style>
+        <p:txBody>
+          <a:bodyPr rtlCol="0" anchor="ctr" lIns="137160" rIns="137160"/>
+          <a:lstStyle/>
+          <a:p>
+            <a:pPr algn="ctr"/>
+            <a:r>
+              <a:rPr sz="1000" b="1">
+                <a:solidFill>
+                  <a:srgbClr val="03110D"/>
+                </a:solidFill>
+              </a:rPr>
+              <a:t>USSD REV-SHARE</a:t>
+            </a:r>
+          </a:p>
+        </p:txBody>
+      </p:sp>
+      <p:sp>
+        <p:nvSpPr>
+          <p:cNvPr id="19" name="TextBox 18"/>
+          <p:cNvSpPr txBox="1"/>
+          <p:nvPr/>
+        </p:nvSpPr>
+        <p:spPr>
+          <a:xfrm>
+            <a:off x="685800" y="4572000"/>
+            <a:ext cx="3291840" cy="457200"/>
+          </a:xfrm>
+          <a:prstGeom prst="rect">
+            <a:avLst/>
+          </a:prstGeom>
+          <a:noFill/>
+        </p:spPr>
+        <p:txBody>
+          <a:bodyPr wrap="square">
+            <a:spAutoFit/>
+          </a:bodyPr>
+          <a:lstStyle/>
+          <a:p>
+            <a:pPr algn="l"/>
+            <a:r>
+              <a:rPr sz="1800" b="1">
+                <a:solidFill>
+                  <a:srgbClr val="FFFFFF"/>
+                </a:solidFill>
+                <a:latin typeface="Calibri"/>
+              </a:rPr>
+              <a:t>Micro-revenue at scale</a:t>
+            </a:r>
+          </a:p>
+        </p:txBody>
+      </p:sp>
+      <p:sp>
+        <p:nvSpPr>
+          <p:cNvPr id="20" name="TextBox 19"/>
+          <p:cNvSpPr txBox="1"/>
+          <p:nvPr/>
+        </p:nvSpPr>
+        <p:spPr>
+          <a:xfrm>
+            <a:off x="685800" y="5074920"/>
+            <a:ext cx="3291840" cy="914400"/>
+          </a:xfrm>
+          <a:prstGeom prst="rect">
+            <a:avLst/>
+          </a:prstGeom>
+          <a:noFill/>
+        </p:spPr>
+        <p:txBody>
+          <a:bodyPr wrap="square">
+            <a:spAutoFit/>
+          </a:bodyPr>
+          <a:lstStyle/>
+          <a:p>
+            <a:pPr algn="l"/>
+            <a:r>
+              <a:rPr sz="1000" b="0">
+                <a:solidFill>
+                  <a:srgbClr val="E9EDEF"/>
+                </a:solidFill>
+                <a:latin typeface="Calibri"/>
+              </a:rPr>
+              <a:t>Millions of USSD sessions per month, all through Vodacom core. Aggregator revenue share on education tier adds up faster than you'd expect.</a:t>
+            </a:r>
+          </a:p>
+        </p:txBody>
+      </p:sp>
+      <p:sp>
+        <p:nvSpPr>
+          <p:cNvPr id="21" name="Rounded Rectangle 20"/>
+          <p:cNvSpPr/>
+          <p:nvPr/>
+        </p:nvSpPr>
+        <p:spPr>
+          <a:xfrm>
+            <a:off x="4297679" y="4023360"/>
+            <a:ext cx="3566160" cy="2057400"/>
+          </a:xfrm>
+          <a:prstGeom prst="roundRect">
+            <a:avLst/>
+          </a:prstGeom>
+          <a:solidFill>
+            <a:srgbClr val="111B21"/>
+          </a:solidFill>
+          <a:ln w="19050">
+            <a:solidFill>
+              <a:srgbClr val="00A884"/>
+            </a:solidFill>
+          </a:ln>
+        </p:spPr>
+        <p:style>
+          <a:lnRef idx="1">
+            <a:schemeClr val="accent1"/>
+          </a:lnRef>
+          <a:fillRef idx="3">
+            <a:schemeClr val="accent1"/>
+          </a:fillRef>
+          <a:effectRef idx="2">
+            <a:schemeClr val="accent1"/>
+          </a:effectRef>
+          <a:fontRef idx="minor">
+            <a:schemeClr val="lt1"/>
+          </a:fontRef>
+        </p:style>
+        <p:txBody>
+          <a:bodyPr rtlCol="0" anchor="ctr"/>
+          <a:lstStyle/>
+          <a:p/>
+        </p:txBody>
+      </p:sp>
+      <p:sp>
+        <p:nvSpPr>
+          <p:cNvPr id="22" name="Rounded Rectangle 21"/>
+          <p:cNvSpPr/>
+          <p:nvPr/>
+        </p:nvSpPr>
+        <p:spPr>
+          <a:xfrm>
+            <a:off x="4434840" y="4160520"/>
+            <a:ext cx="1554480" cy="320040"/>
+          </a:xfrm>
+          <a:prstGeom prst="roundRect">
+            <a:avLst/>
+          </a:prstGeom>
+          <a:solidFill>
+            <a:srgbClr val="00A884"/>
+          </a:solidFill>
+          <a:ln>
+            <a:noFill/>
+          </a:ln>
+        </p:spPr>
+        <p:style>
+          <a:lnRef idx="1">
+            <a:schemeClr val="accent1"/>
+          </a:lnRef>
+          <a:fillRef idx="3">
+            <a:schemeClr val="accent1"/>
+          </a:fillRef>
+          <a:effectRef idx="2">
+            <a:schemeClr val="accent1"/>
+          </a:effectRef>
+          <a:fontRef idx="minor">
+            <a:schemeClr val="lt1"/>
+          </a:fontRef>
+        </p:style>
+        <p:txBody>
+          <a:bodyPr rtlCol="0" anchor="ctr" lIns="137160" rIns="137160"/>
+          <a:lstStyle/>
+          <a:p>
+            <a:pPr algn="ctr"/>
+            <a:r>
+              <a:rPr sz="1000" b="1">
+                <a:solidFill>
+                  <a:srgbClr val="03110D"/>
+                </a:solidFill>
+              </a:rPr>
+              <a:t>REGULATORY</a:t>
+            </a:r>
+          </a:p>
+        </p:txBody>
+      </p:sp>
+      <p:sp>
+        <p:nvSpPr>
+          <p:cNvPr id="23" name="TextBox 22"/>
+          <p:cNvSpPr txBox="1"/>
+          <p:nvPr/>
+        </p:nvSpPr>
+        <p:spPr>
+          <a:xfrm>
+            <a:off x="4434840" y="4572000"/>
+            <a:ext cx="3291840" cy="457200"/>
+          </a:xfrm>
+          <a:prstGeom prst="rect">
+            <a:avLst/>
+          </a:prstGeom>
+          <a:noFill/>
+        </p:spPr>
+        <p:txBody>
+          <a:bodyPr wrap="square">
+            <a:spAutoFit/>
+          </a:bodyPr>
+          <a:lstStyle/>
+          <a:p>
+            <a:pPr algn="l"/>
+            <a:r>
+              <a:rPr sz="1800" b="1">
+                <a:solidFill>
+                  <a:srgbClr val="FFFFFF"/>
+                </a:solidFill>
+                <a:latin typeface="Calibri"/>
+              </a:rPr>
+              <a:t>ICASA / DoC credit</a:t>
+            </a:r>
+          </a:p>
+        </p:txBody>
+      </p:sp>
+      <p:sp>
+        <p:nvSpPr>
+          <p:cNvPr id="24" name="TextBox 23"/>
+          <p:cNvSpPr txBox="1"/>
+          <p:nvPr/>
+        </p:nvSpPr>
+        <p:spPr>
+          <a:xfrm>
+            <a:off x="4434840" y="5074920"/>
+            <a:ext cx="3291840" cy="914400"/>
+          </a:xfrm>
+          <a:prstGeom prst="rect">
+            <a:avLst/>
+          </a:prstGeom>
+          <a:noFill/>
+        </p:spPr>
+        <p:txBody>
+          <a:bodyPr wrap="square">
+            <a:spAutoFit/>
+          </a:bodyPr>
+          <a:lstStyle/>
+          <a:p>
+            <a:pPr algn="l"/>
+            <a:r>
+              <a:rPr sz="1000" b="0">
+                <a:solidFill>
+                  <a:srgbClr val="E9EDEF"/>
+                </a:solidFill>
+                <a:latin typeface="Calibri"/>
+              </a:rPr>
+              <a:t>Rural + low-income service obligations are tightening every year. A live public-good tutor is worth millions in reduced license-condition friction.</a:t>
+            </a:r>
+          </a:p>
+        </p:txBody>
+      </p:sp>
+      <p:sp>
+        <p:nvSpPr>
+          <p:cNvPr id="25" name="Rounded Rectangle 24"/>
+          <p:cNvSpPr/>
+          <p:nvPr/>
+        </p:nvSpPr>
+        <p:spPr>
+          <a:xfrm>
+            <a:off x="8046719" y="4023360"/>
+            <a:ext cx="3566160" cy="2057400"/>
+          </a:xfrm>
+          <a:prstGeom prst="roundRect">
+            <a:avLst/>
+          </a:prstGeom>
+          <a:solidFill>
+            <a:srgbClr val="111B21"/>
+          </a:solidFill>
+          <a:ln w="19050">
+            <a:solidFill>
+              <a:srgbClr val="FFB347"/>
+            </a:solidFill>
+          </a:ln>
+        </p:spPr>
+        <p:style>
+          <a:lnRef idx="1">
+            <a:schemeClr val="accent1"/>
+          </a:lnRef>
+          <a:fillRef idx="3">
+            <a:schemeClr val="accent1"/>
+          </a:fillRef>
+          <a:effectRef idx="2">
+            <a:schemeClr val="accent1"/>
+          </a:effectRef>
+          <a:fontRef idx="minor">
+            <a:schemeClr val="lt1"/>
+          </a:fontRef>
+        </p:style>
+        <p:txBody>
+          <a:bodyPr rtlCol="0" anchor="ctr"/>
+          <a:lstStyle/>
+          <a:p/>
+        </p:txBody>
+      </p:sp>
+      <p:sp>
+        <p:nvSpPr>
+          <p:cNvPr id="26" name="Rounded Rectangle 25"/>
+          <p:cNvSpPr/>
+          <p:nvPr/>
+        </p:nvSpPr>
+        <p:spPr>
+          <a:xfrm>
+            <a:off x="8183879" y="4160520"/>
+            <a:ext cx="1554480" cy="320040"/>
+          </a:xfrm>
+          <a:prstGeom prst="roundRect">
+            <a:avLst/>
+          </a:prstGeom>
+          <a:solidFill>
+            <a:srgbClr val="FFB347"/>
+          </a:solidFill>
+          <a:ln>
+            <a:noFill/>
+          </a:ln>
+        </p:spPr>
+        <p:style>
+          <a:lnRef idx="1">
+            <a:schemeClr val="accent1"/>
+          </a:lnRef>
+          <a:fillRef idx="3">
+            <a:schemeClr val="accent1"/>
+          </a:fillRef>
+          <a:effectRef idx="2">
+            <a:schemeClr val="accent1"/>
+          </a:effectRef>
+          <a:fontRef idx="minor">
+            <a:schemeClr val="lt1"/>
+          </a:fontRef>
+        </p:style>
+        <p:txBody>
+          <a:bodyPr rtlCol="0" anchor="ctr" lIns="137160" rIns="137160"/>
+          <a:lstStyle/>
+          <a:p>
+            <a:pPr algn="ctr"/>
+            <a:r>
+              <a:rPr sz="1000" b="1">
+                <a:solidFill>
+                  <a:srgbClr val="03110D"/>
+                </a:solidFill>
+              </a:rPr>
+              <a:t>DATA INSIGHTS</a:t>
+            </a:r>
+          </a:p>
+        </p:txBody>
+      </p:sp>
+      <p:sp>
+        <p:nvSpPr>
+          <p:cNvPr id="27" name="TextBox 26"/>
+          <p:cNvSpPr txBox="1"/>
+          <p:nvPr/>
+        </p:nvSpPr>
+        <p:spPr>
+          <a:xfrm>
+            <a:off x="8183879" y="4572000"/>
+            <a:ext cx="3291840" cy="457200"/>
+          </a:xfrm>
+          <a:prstGeom prst="rect">
+            <a:avLst/>
+          </a:prstGeom>
+          <a:noFill/>
+        </p:spPr>
+        <p:txBody>
+          <a:bodyPr wrap="square">
+            <a:spAutoFit/>
+          </a:bodyPr>
+          <a:lstStyle/>
+          <a:p>
+            <a:pPr algn="l"/>
+            <a:r>
+              <a:rPr sz="1800" b="1">
+                <a:solidFill>
+                  <a:srgbClr val="FFFFFF"/>
+                </a:solidFill>
+                <a:latin typeface="Calibri"/>
+              </a:rPr>
+              <a:t>VBS upsell fuel</a:t>
+            </a:r>
+          </a:p>
+        </p:txBody>
+      </p:sp>
+      <p:sp>
+        <p:nvSpPr>
+          <p:cNvPr id="28" name="TextBox 27"/>
+          <p:cNvSpPr txBox="1"/>
+          <p:nvPr/>
+        </p:nvSpPr>
+        <p:spPr>
+          <a:xfrm>
+            <a:off x="8183879" y="5074920"/>
+            <a:ext cx="3291840" cy="914400"/>
+          </a:xfrm>
+          <a:prstGeom prst="rect">
+            <a:avLst/>
+          </a:prstGeom>
+          <a:noFill/>
+        </p:spPr>
+        <p:txBody>
+          <a:bodyPr wrap="square">
+            <a:spAutoFit/>
+          </a:bodyPr>
+          <a:lstStyle/>
+          <a:p>
+            <a:pPr algn="l"/>
+            <a:r>
+              <a:rPr sz="1000" b="0">
+                <a:solidFill>
+                  <a:srgbClr val="E9EDEF"/>
+                </a:solidFill>
+                <a:latin typeface="Calibri"/>
+              </a:rPr>
+              <a:t>Anonymised learner-interaction patterns are gold for Vodacom Business Solutions when pitching education contracts to DBE, WCED, GDE.</a:t>
+            </a:r>
+          </a:p>
+        </p:txBody>
+      </p:sp>
+      <p:sp>
+        <p:nvSpPr>
+          <p:cNvPr id="29" name="Rounded Rectangle 28"/>
+          <p:cNvSpPr/>
+          <p:nvPr/>
+        </p:nvSpPr>
+        <p:spPr>
+          <a:xfrm>
+            <a:off x="548640" y="6263640"/>
+            <a:ext cx="11064240" cy="411480"/>
+          </a:xfrm>
+          <a:prstGeom prst="roundRect">
+            <a:avLst/>
+          </a:prstGeom>
+          <a:solidFill>
+            <a:srgbClr val="111B21"/>
+          </a:solidFill>
+          <a:ln w="19050">
+            <a:solidFill>
+              <a:srgbClr val="00A884"/>
+            </a:solidFill>
+          </a:ln>
+        </p:spPr>
+        <p:style>
+          <a:lnRef idx="1">
+            <a:schemeClr val="accent1"/>
+          </a:lnRef>
+          <a:fillRef idx="3">
+            <a:schemeClr val="accent1"/>
+          </a:fillRef>
+          <a:effectRef idx="2">
+            <a:schemeClr val="accent1"/>
+          </a:effectRef>
+          <a:fontRef idx="minor">
+            <a:schemeClr val="lt1"/>
+          </a:fontRef>
+        </p:style>
+        <p:txBody>
+          <a:bodyPr rtlCol="0" anchor="ctr"/>
+          <a:lstStyle/>
+          <a:p/>
+        </p:txBody>
+      </p:sp>
+      <p:sp>
+        <p:nvSpPr>
+          <p:cNvPr id="30" name="TextBox 29"/>
+          <p:cNvSpPr txBox="1"/>
+          <p:nvPr/>
+        </p:nvSpPr>
+        <p:spPr>
+          <a:xfrm>
+            <a:off x="548640" y="6318503"/>
+            <a:ext cx="11064240" cy="320040"/>
+          </a:xfrm>
+          <a:prstGeom prst="rect">
+            <a:avLst/>
+          </a:prstGeom>
+          <a:noFill/>
+        </p:spPr>
+        <p:txBody>
+          <a:bodyPr wrap="square">
+            <a:spAutoFit/>
+          </a:bodyPr>
+          <a:lstStyle/>
+          <a:p>
+            <a:pPr algn="ctr"/>
+            <a:r>
+              <a:rPr sz="1100" b="1">
+                <a:solidFill>
+                  <a:srgbClr val="9CFF8C"/>
+                </a:solidFill>
+                <a:latin typeface="Calibri"/>
+              </a:rPr>
+              <a:t>R1.5M/mo bundle uplift · 25× cheaper youth CAC · a media-worthy Purpose story — for less than the cost of a Sunday-supplement print ad.</a:t>
             </a:r>
           </a:p>
         </p:txBody>
@@ -8646,7 +14021,525 @@
                 </a:solidFill>
                 <a:latin typeface="Calibri"/>
               </a:rPr>
-              <a:t>Powered by Dell AI Factory  ·  Zero-rated on Vodacom</a:t>
+              <a:t>Powered by Dell AI Factory  ·  Zero-rate-ready on Vodacom</a:t>
+            </a:r>
+          </a:p>
+        </p:txBody>
+      </p:sp>
+    </p:spTree>
+  </p:cSld>
+  <p:clrMapOvr>
+    <a:masterClrMapping/>
+  </p:clrMapOvr>
+</p:sld>
+</file>
+
+<file path=ppt/slides/slide20.xml><?xml version="1.0" encoding="utf-8"?>
+<p:sld xmlns:a="http://schemas.openxmlformats.org/drawingml/2006/main" xmlns:p="http://schemas.openxmlformats.org/presentationml/2006/main" xmlns:r="http://schemas.openxmlformats.org/officeDocument/2006/relationships">
+  <p:cSld>
+    <p:bg>
+      <p:bgPr>
+        <a:solidFill>
+          <a:srgbClr val="0B141A"/>
+        </a:solidFill>
+        <a:effectLst/>
+      </p:bgPr>
+    </p:bg>
+    <p:spTree>
+      <p:nvGrpSpPr>
+        <p:cNvPr id="1" name=""/>
+        <p:cNvGrpSpPr/>
+        <p:nvPr/>
+      </p:nvGrpSpPr>
+      <p:grpSpPr/>
+      <p:sp>
+        <p:nvSpPr>
+          <p:cNvPr id="2" name="TextBox 1"/>
+          <p:cNvSpPr txBox="1"/>
+          <p:nvPr/>
+        </p:nvSpPr>
+        <p:spPr>
+          <a:xfrm>
+            <a:off x="548640" y="457200"/>
+            <a:ext cx="11064240" cy="548640"/>
+          </a:xfrm>
+          <a:prstGeom prst="rect">
+            <a:avLst/>
+          </a:prstGeom>
+          <a:noFill/>
+        </p:spPr>
+        <p:txBody>
+          <a:bodyPr wrap="square">
+            <a:spAutoFit/>
+          </a:bodyPr>
+          <a:lstStyle/>
+          <a:p>
+            <a:pPr algn="l"/>
+            <a:r>
+              <a:rPr sz="1400" b="1">
+                <a:solidFill>
+                  <a:srgbClr val="FFB347"/>
+                </a:solidFill>
+                <a:latin typeface="Calibri"/>
+              </a:rPr>
+              <a:t>The ask</a:t>
+            </a:r>
+          </a:p>
+        </p:txBody>
+      </p:sp>
+      <p:sp>
+        <p:nvSpPr>
+          <p:cNvPr id="3" name="TextBox 2"/>
+          <p:cNvSpPr txBox="1"/>
+          <p:nvPr/>
+        </p:nvSpPr>
+        <p:spPr>
+          <a:xfrm>
+            <a:off x="548640" y="914400"/>
+            <a:ext cx="11064240" cy="914400"/>
+          </a:xfrm>
+          <a:prstGeom prst="rect">
+            <a:avLst/>
+          </a:prstGeom>
+          <a:noFill/>
+        </p:spPr>
+        <p:txBody>
+          <a:bodyPr wrap="square">
+            <a:spAutoFit/>
+          </a:bodyPr>
+          <a:lstStyle/>
+          <a:p>
+            <a:pPr algn="l"/>
+            <a:r>
+              <a:rPr sz="3200" b="1">
+                <a:solidFill>
+                  <a:srgbClr val="FFFFFF"/>
+                </a:solidFill>
+                <a:latin typeface="Calibri"/>
+              </a:rPr>
+              <a:t>What we need to go from finalist to pilot.</a:t>
+            </a:r>
+          </a:p>
+        </p:txBody>
+      </p:sp>
+      <p:sp>
+        <p:nvSpPr>
+          <p:cNvPr id="4" name="Rectangle 3"/>
+          <p:cNvSpPr/>
+          <p:nvPr/>
+        </p:nvSpPr>
+        <p:spPr>
+          <a:xfrm>
+            <a:off x="548640" y="2011680"/>
+            <a:ext cx="3657600" cy="50800"/>
+          </a:xfrm>
+          <a:prstGeom prst="rect">
+            <a:avLst/>
+          </a:prstGeom>
+          <a:solidFill>
+            <a:srgbClr val="FFB347"/>
+          </a:solidFill>
+          <a:ln>
+            <a:noFill/>
+          </a:ln>
+        </p:spPr>
+        <p:style>
+          <a:lnRef idx="1">
+            <a:schemeClr val="accent1"/>
+          </a:lnRef>
+          <a:fillRef idx="3">
+            <a:schemeClr val="accent1"/>
+          </a:fillRef>
+          <a:effectRef idx="2">
+            <a:schemeClr val="accent1"/>
+          </a:effectRef>
+          <a:fontRef idx="minor">
+            <a:schemeClr val="lt1"/>
+          </a:fontRef>
+        </p:style>
+        <p:txBody>
+          <a:bodyPr rtlCol="0" anchor="ctr"/>
+          <a:lstStyle/>
+          <a:p>
+            <a:pPr algn="ctr"/>
+          </a:p>
+        </p:txBody>
+      </p:sp>
+      <p:sp>
+        <p:nvSpPr>
+          <p:cNvPr id="5" name="Rounded Rectangle 4"/>
+          <p:cNvSpPr/>
+          <p:nvPr/>
+        </p:nvSpPr>
+        <p:spPr>
+          <a:xfrm>
+            <a:off x="548640" y="2468880"/>
+            <a:ext cx="1828800" cy="502920"/>
+          </a:xfrm>
+          <a:prstGeom prst="roundRect">
+            <a:avLst/>
+          </a:prstGeom>
+          <a:solidFill>
+            <a:srgbClr val="00A884"/>
+          </a:solidFill>
+          <a:ln>
+            <a:noFill/>
+          </a:ln>
+        </p:spPr>
+        <p:style>
+          <a:lnRef idx="1">
+            <a:schemeClr val="accent1"/>
+          </a:lnRef>
+          <a:fillRef idx="3">
+            <a:schemeClr val="accent1"/>
+          </a:fillRef>
+          <a:effectRef idx="2">
+            <a:schemeClr val="accent1"/>
+          </a:effectRef>
+          <a:fontRef idx="minor">
+            <a:schemeClr val="lt1"/>
+          </a:fontRef>
+        </p:style>
+        <p:txBody>
+          <a:bodyPr rtlCol="0" anchor="ctr" lIns="137160" rIns="137160"/>
+          <a:lstStyle/>
+          <a:p>
+            <a:pPr algn="ctr"/>
+            <a:r>
+              <a:rPr sz="1400" b="1">
+                <a:solidFill>
+                  <a:srgbClr val="03110D"/>
+                </a:solidFill>
+              </a:rPr>
+              <a:t>Dell</a:t>
+            </a:r>
+          </a:p>
+        </p:txBody>
+      </p:sp>
+      <p:sp>
+        <p:nvSpPr>
+          <p:cNvPr id="6" name="TextBox 5"/>
+          <p:cNvSpPr txBox="1"/>
+          <p:nvPr/>
+        </p:nvSpPr>
+        <p:spPr>
+          <a:xfrm>
+            <a:off x="2651760" y="2514600"/>
+            <a:ext cx="8961120" cy="548640"/>
+          </a:xfrm>
+          <a:prstGeom prst="rect">
+            <a:avLst/>
+          </a:prstGeom>
+          <a:noFill/>
+        </p:spPr>
+        <p:txBody>
+          <a:bodyPr wrap="square">
+            <a:spAutoFit/>
+          </a:bodyPr>
+          <a:lstStyle/>
+          <a:p>
+            <a:pPr algn="l"/>
+            <a:r>
+              <a:rPr sz="1600" b="0">
+                <a:solidFill>
+                  <a:srgbClr val="E9EDEF"/>
+                </a:solidFill>
+                <a:latin typeface="Calibri"/>
+              </a:rPr>
+              <a:t>AI Factory hardware sponsorship + NIM endpoints (reasoning LLM + vision VLM in country).</a:t>
+            </a:r>
+          </a:p>
+        </p:txBody>
+      </p:sp>
+      <p:sp>
+        <p:nvSpPr>
+          <p:cNvPr id="7" name="Rounded Rectangle 6"/>
+          <p:cNvSpPr/>
+          <p:nvPr/>
+        </p:nvSpPr>
+        <p:spPr>
+          <a:xfrm>
+            <a:off x="548640" y="3246120"/>
+            <a:ext cx="1828800" cy="502920"/>
+          </a:xfrm>
+          <a:prstGeom prst="roundRect">
+            <a:avLst/>
+          </a:prstGeom>
+          <a:solidFill>
+            <a:srgbClr val="00A884"/>
+          </a:solidFill>
+          <a:ln>
+            <a:noFill/>
+          </a:ln>
+        </p:spPr>
+        <p:style>
+          <a:lnRef idx="1">
+            <a:schemeClr val="accent1"/>
+          </a:lnRef>
+          <a:fillRef idx="3">
+            <a:schemeClr val="accent1"/>
+          </a:fillRef>
+          <a:effectRef idx="2">
+            <a:schemeClr val="accent1"/>
+          </a:effectRef>
+          <a:fontRef idx="minor">
+            <a:schemeClr val="lt1"/>
+          </a:fontRef>
+        </p:style>
+        <p:txBody>
+          <a:bodyPr rtlCol="0" anchor="ctr" lIns="137160" rIns="137160"/>
+          <a:lstStyle/>
+          <a:p>
+            <a:pPr algn="ctr"/>
+            <a:r>
+              <a:rPr sz="1400" b="1">
+                <a:solidFill>
+                  <a:srgbClr val="03110D"/>
+                </a:solidFill>
+              </a:rPr>
+              <a:t>Vodacom</a:t>
+            </a:r>
+          </a:p>
+        </p:txBody>
+      </p:sp>
+      <p:sp>
+        <p:nvSpPr>
+          <p:cNvPr id="8" name="TextBox 7"/>
+          <p:cNvSpPr txBox="1"/>
+          <p:nvPr/>
+        </p:nvSpPr>
+        <p:spPr>
+          <a:xfrm>
+            <a:off x="2651760" y="3291840"/>
+            <a:ext cx="8961120" cy="548640"/>
+          </a:xfrm>
+          <a:prstGeom prst="rect">
+            <a:avLst/>
+          </a:prstGeom>
+          <a:noFill/>
+        </p:spPr>
+        <p:txBody>
+          <a:bodyPr wrap="square">
+            <a:spAutoFit/>
+          </a:bodyPr>
+          <a:lstStyle/>
+          <a:p>
+            <a:pPr algn="l"/>
+            <a:r>
+              <a:rPr sz="1600" b="0">
+                <a:solidFill>
+                  <a:srgbClr val="E9EDEF"/>
+                </a:solidFill>
+                <a:latin typeface="Calibri"/>
+              </a:rPr>
+              <a:t>WhatsApp Business Cloud number whitelisted for zero-rating; USSD shortcode partnership.</a:t>
+            </a:r>
+          </a:p>
+        </p:txBody>
+      </p:sp>
+      <p:sp>
+        <p:nvSpPr>
+          <p:cNvPr id="9" name="Rounded Rectangle 8"/>
+          <p:cNvSpPr/>
+          <p:nvPr/>
+        </p:nvSpPr>
+        <p:spPr>
+          <a:xfrm>
+            <a:off x="548640" y="4023360"/>
+            <a:ext cx="1828800" cy="502920"/>
+          </a:xfrm>
+          <a:prstGeom prst="roundRect">
+            <a:avLst/>
+          </a:prstGeom>
+          <a:solidFill>
+            <a:srgbClr val="00A884"/>
+          </a:solidFill>
+          <a:ln>
+            <a:noFill/>
+          </a:ln>
+        </p:spPr>
+        <p:style>
+          <a:lnRef idx="1">
+            <a:schemeClr val="accent1"/>
+          </a:lnRef>
+          <a:fillRef idx="3">
+            <a:schemeClr val="accent1"/>
+          </a:fillRef>
+          <a:effectRef idx="2">
+            <a:schemeClr val="accent1"/>
+          </a:effectRef>
+          <a:fontRef idx="minor">
+            <a:schemeClr val="lt1"/>
+          </a:fontRef>
+        </p:style>
+        <p:txBody>
+          <a:bodyPr rtlCol="0" anchor="ctr" lIns="137160" rIns="137160"/>
+          <a:lstStyle/>
+          <a:p>
+            <a:pPr algn="ctr"/>
+            <a:r>
+              <a:rPr sz="1400" b="1">
+                <a:solidFill>
+                  <a:srgbClr val="03110D"/>
+                </a:solidFill>
+              </a:rPr>
+              <a:t>DBE / Province</a:t>
+            </a:r>
+          </a:p>
+        </p:txBody>
+      </p:sp>
+      <p:sp>
+        <p:nvSpPr>
+          <p:cNvPr id="10" name="TextBox 9"/>
+          <p:cNvSpPr txBox="1"/>
+          <p:nvPr/>
+        </p:nvSpPr>
+        <p:spPr>
+          <a:xfrm>
+            <a:off x="2651760" y="4069080"/>
+            <a:ext cx="8961120" cy="548640"/>
+          </a:xfrm>
+          <a:prstGeom prst="rect">
+            <a:avLst/>
+          </a:prstGeom>
+          <a:noFill/>
+        </p:spPr>
+        <p:txBody>
+          <a:bodyPr wrap="square">
+            <a:spAutoFit/>
+          </a:bodyPr>
+          <a:lstStyle/>
+          <a:p>
+            <a:pPr algn="l"/>
+            <a:r>
+              <a:rPr sz="1600" b="0">
+                <a:solidFill>
+                  <a:srgbClr val="E9EDEF"/>
+                </a:solidFill>
+                <a:latin typeface="Calibri"/>
+              </a:rPr>
+              <a:t>Pilot endorsement at 5 schools across 2 provinces. Anonymous outcome data sharing.</a:t>
+            </a:r>
+          </a:p>
+        </p:txBody>
+      </p:sp>
+      <p:sp>
+        <p:nvSpPr>
+          <p:cNvPr id="11" name="Rounded Rectangle 10"/>
+          <p:cNvSpPr/>
+          <p:nvPr/>
+        </p:nvSpPr>
+        <p:spPr>
+          <a:xfrm>
+            <a:off x="548640" y="4800600"/>
+            <a:ext cx="1828800" cy="502920"/>
+          </a:xfrm>
+          <a:prstGeom prst="roundRect">
+            <a:avLst/>
+          </a:prstGeom>
+          <a:solidFill>
+            <a:srgbClr val="00A884"/>
+          </a:solidFill>
+          <a:ln>
+            <a:noFill/>
+          </a:ln>
+        </p:spPr>
+        <p:style>
+          <a:lnRef idx="1">
+            <a:schemeClr val="accent1"/>
+          </a:lnRef>
+          <a:fillRef idx="3">
+            <a:schemeClr val="accent1"/>
+          </a:fillRef>
+          <a:effectRef idx="2">
+            <a:schemeClr val="accent1"/>
+          </a:effectRef>
+          <a:fontRef idx="minor">
+            <a:schemeClr val="lt1"/>
+          </a:fontRef>
+        </p:style>
+        <p:txBody>
+          <a:bodyPr rtlCol="0" anchor="ctr" lIns="137160" rIns="137160"/>
+          <a:lstStyle/>
+          <a:p>
+            <a:pPr algn="ctr"/>
+            <a:r>
+              <a:rPr sz="1400" b="1">
+                <a:solidFill>
+                  <a:srgbClr val="03110D"/>
+                </a:solidFill>
+              </a:rPr>
+              <a:t>Educators</a:t>
+            </a:r>
+          </a:p>
+        </p:txBody>
+      </p:sp>
+      <p:sp>
+        <p:nvSpPr>
+          <p:cNvPr id="12" name="TextBox 11"/>
+          <p:cNvSpPr txBox="1"/>
+          <p:nvPr/>
+        </p:nvSpPr>
+        <p:spPr>
+          <a:xfrm>
+            <a:off x="2651760" y="4846320"/>
+            <a:ext cx="8961120" cy="548640"/>
+          </a:xfrm>
+          <a:prstGeom prst="rect">
+            <a:avLst/>
+          </a:prstGeom>
+          <a:noFill/>
+        </p:spPr>
+        <p:txBody>
+          <a:bodyPr wrap="square">
+            <a:spAutoFit/>
+          </a:bodyPr>
+          <a:lstStyle/>
+          <a:p>
+            <a:pPr algn="l"/>
+            <a:r>
+              <a:rPr sz="1600" b="0">
+                <a:solidFill>
+                  <a:srgbClr val="E9EDEF"/>
+                </a:solidFill>
+                <a:latin typeface="Calibri"/>
+              </a:rPr>
+              <a:t>4–6 practising SA Maths teachers (multi-lingual) to form the advisory board.</a:t>
+            </a:r>
+          </a:p>
+        </p:txBody>
+      </p:sp>
+      <p:sp>
+        <p:nvSpPr>
+          <p:cNvPr id="13" name="TextBox 12"/>
+          <p:cNvSpPr txBox="1"/>
+          <p:nvPr/>
+        </p:nvSpPr>
+        <p:spPr>
+          <a:xfrm>
+            <a:off x="548640" y="6035040"/>
+            <a:ext cx="11064240" cy="457200"/>
+          </a:xfrm>
+          <a:prstGeom prst="rect">
+            <a:avLst/>
+          </a:prstGeom>
+          <a:noFill/>
+        </p:spPr>
+        <p:txBody>
+          <a:bodyPr wrap="square">
+            <a:spAutoFit/>
+          </a:bodyPr>
+          <a:lstStyle/>
+          <a:p>
+            <a:pPr algn="ctr"/>
+            <a:r>
+              <a:rPr sz="1400" b="0">
+                <a:solidFill>
+                  <a:srgbClr val="8696A0"/>
+                </a:solidFill>
+                <a:latin typeface="Consolas"/>
+              </a:rPr>
+              <a:t>github.com/snerantie/Dell-Prototype---AI-Integration</a:t>
             </a:r>
           </a:p>
         </p:txBody>
@@ -9232,7 +15125,7 @@
                 </a:solidFill>
                 <a:latin typeface="Calibri"/>
               </a:rPr>
-              <a:t>• Zero-rated via Vodacom WhatsApp bundles</a:t>
+              <a:t>• Vodacom WhatsApp bundle R5/mo · zero-rate-ready via Purpose</a:t>
             </a:r>
           </a:p>
         </p:txBody>
@@ -9402,7 +15295,7 @@
                 </a:solidFill>
                 <a:latin typeface="Calibri"/>
               </a:rPr>
-              <a:t>• Zero-rated by definition (aggregator path)</a:t>
+              <a:t>• Effectively zero-rated via aggregator education tier</a:t>
             </a:r>
           </a:p>
           <a:p>

--- a/pitch/AI_Tutor_Pitch.pptx
+++ b/pitch/AI_Tutor_Pitch.pptx
@@ -1011,7 +1011,7 @@
           <a:lstStyle/>
           <a:p>
             <a:r>
-              <a:t>The R2/learner/year number is the pitch's killer stat. Break it down so the CFO in the room can audit it. Costs are today's Gemini Flash-Lite pilot pricing — they DROP to ~R0.80 on Dell AI Factory NIM (hardware-only cost, no per-token bill). The private-tutor comparison isn't hypothetical — R250-500/hour × ~60 hours/year is the going rate in SA. The break-even framing is roadmap, not shipped: we haven't run the pilot yet, so uplift is a target, not a claim. Rehearse the R2-vs-R16,000 line — that's the mic drop.</a:t>
+              <a:t>Two numbers on this slide, both honest. R15–R25 is TODAY: real Gemini Flash-Lite pricing, real aggregator USSD rates (~R0.05–R0.10 per session), real Meta WhatsApp Cloud rates, real Render/Postgres hosting. R2 is the TARGET — it lands only when Dell donates NIM hardware (drops LLM cost to hardware amortisation only) AND Vodacom absorbs USSD + data charges through the Purpose partnership. Neither is signed. The ~100 sessions/learner/year figure is our modelling assumption — we don't have pilot data yet, so it could be 20 or 300. If a CFO in the room challenges the R2, the honest answer is: 'That's our target with signed partnerships. Unsubsidised today, we're at R15–R25 — and even at 10× that, we're still ~80× cheaper than a private tutor. The economics work at any point in that range.' Don't oversell R2 — the R2-vs-R25 framing is what makes this credible in Q&amp;A.</a:t>
             </a:r>
           </a:p>
         </p:txBody>
@@ -8902,13 +8902,13 @@
           <a:p>
             <a:pPr algn="l"/>
             <a:r>
-              <a:rPr sz="2800" b="1">
+              <a:rPr sz="2400" b="1">
                 <a:solidFill>
                   <a:srgbClr val="FFFFFF"/>
                 </a:solidFill>
                 <a:latin typeface="Calibri"/>
               </a:rPr>
-              <a:t>R2 per learner per year. At scale.</a:t>
+              <a:t>R15–R25 today. R2 target — with Dell + Vodacom in place.</a:t>
             </a:r>
           </a:p>
         </p:txBody>
@@ -9029,7 +9029,7 @@
                 </a:solidFill>
                 <a:latin typeface="Calibri"/>
               </a:rPr>
-              <a:t>COST PER LEARNER / YEAR</a:t>
+              <a:t>TODAY · UNSUBSIDISED PILOT</a:t>
             </a:r>
           </a:p>
         </p:txBody>
@@ -9058,13 +9058,13 @@
           <a:p>
             <a:pPr algn="ctr"/>
             <a:r>
-              <a:rPr sz="4400" b="1">
-                <a:solidFill>
-                  <a:srgbClr val="9CFF8C"/>
-                </a:solidFill>
-                <a:latin typeface="Calibri"/>
-              </a:rPr>
-              <a:t>≈ R2</a:t>
+              <a:rPr sz="3200" b="1">
+                <a:solidFill>
+                  <a:srgbClr val="FFFFFF"/>
+                </a:solidFill>
+                <a:latin typeface="Calibri"/>
+              </a:rPr>
+              <a:t>~R15–R25 / yr</a:t>
             </a:r>
           </a:p>
         </p:txBody>
@@ -9099,7 +9099,7 @@
                 </a:solidFill>
                 <a:latin typeface="Calibri"/>
               </a:rPr>
-              <a:t>100,000 LEARNERS</a:t>
+              <a:t>TARGET · DELL + VODACOM</a:t>
             </a:r>
           </a:p>
         </p:txBody>
@@ -9128,13 +9128,13 @@
           <a:p>
             <a:pPr algn="ctr"/>
             <a:r>
-              <a:rPr sz="3600" b="1">
-                <a:solidFill>
-                  <a:srgbClr val="FFFFFF"/>
-                </a:solidFill>
-                <a:latin typeface="Calibri"/>
-              </a:rPr>
-              <a:t>≈ R200k / yr</a:t>
+              <a:rPr sz="4400" b="1">
+                <a:solidFill>
+                  <a:srgbClr val="9CFF8C"/>
+                </a:solidFill>
+                <a:latin typeface="Calibri"/>
+              </a:rPr>
+              <a:t>~R2 / yr</a:t>
             </a:r>
           </a:p>
         </p:txBody>
@@ -9198,7 +9198,7 @@
           <a:p>
             <a:pPr algn="ctr"/>
             <a:r>
-              <a:rPr sz="3600" b="1">
+              <a:rPr sz="3200" b="1">
                 <a:solidFill>
                   <a:srgbClr val="FFE9B8"/>
                 </a:solidFill>
@@ -9217,7 +9217,7 @@
         </p:nvSpPr>
         <p:spPr>
           <a:xfrm>
-            <a:off x="548640" y="3337560"/>
+            <a:off x="548640" y="3291840"/>
             <a:ext cx="5303520" cy="365760"/>
           </a:xfrm>
           <a:prstGeom prst="rect">
@@ -9233,13 +9233,13 @@
           <a:p>
             <a:pPr algn="l"/>
             <a:r>
-              <a:rPr sz="1500" b="1">
+              <a:rPr sz="1400" b="1">
                 <a:solidFill>
                   <a:srgbClr val="9CFF8C"/>
                 </a:solidFill>
                 <a:latin typeface="Calibri"/>
               </a:rPr>
-              <a:t>What makes up the R2</a:t>
+              <a:t>Today's cost breakdown (unsubsidised)</a:t>
             </a:r>
           </a:p>
         </p:txBody>
@@ -9252,8 +9252,8 @@
         </p:nvSpPr>
         <p:spPr>
           <a:xfrm>
-            <a:off x="548640" y="3794760"/>
-            <a:ext cx="5303520" cy="2743200"/>
+            <a:off x="548640" y="3703320"/>
+            <a:ext cx="5303520" cy="2560320"/>
           </a:xfrm>
           <a:prstGeom prst="rect">
             <a:avLst/>
@@ -9268,97 +9268,97 @@
           <a:p>
             <a:pPr algn="l">
               <a:spcBef>
-                <a:spcPts val="500"/>
+                <a:spcPts val="400"/>
               </a:spcBef>
             </a:pPr>
             <a:r>
-              <a:rPr sz="1200">
+              <a:rPr sz="1100">
                 <a:solidFill>
                   <a:srgbClr val="E9EDEF"/>
                 </a:solidFill>
                 <a:latin typeface="Calibri"/>
               </a:rPr>
-              <a:t>• LLM tokens (Gemini Flash-Lite): ~R1.10 / learner / yr</a:t>
+              <a:t>• LLM tokens (Gemini Flash-Lite): ~R3–R10 / learner / yr</a:t>
             </a:r>
           </a:p>
           <a:p>
             <a:pPr algn="l">
               <a:spcBef>
-                <a:spcPts val="500"/>
+                <a:spcPts val="400"/>
               </a:spcBef>
             </a:pPr>
             <a:r>
-              <a:rPr sz="1200">
+              <a:rPr sz="1100">
                 <a:solidFill>
                   <a:srgbClr val="E9EDEF"/>
                 </a:solidFill>
                 <a:latin typeface="Calibri"/>
               </a:rPr>
-              <a:t>• USSD aggregator (per session): ~R0.40 / learner / yr</a:t>
+              <a:t>• USSD aggregator (per session): ~R5–R10 / learner / yr</a:t>
             </a:r>
           </a:p>
           <a:p>
             <a:pPr algn="l">
               <a:spcBef>
-                <a:spcPts val="500"/>
+                <a:spcPts val="400"/>
               </a:spcBef>
             </a:pPr>
             <a:r>
-              <a:rPr sz="1200">
+              <a:rPr sz="1100">
                 <a:solidFill>
                   <a:srgbClr val="E9EDEF"/>
                 </a:solidFill>
                 <a:latin typeface="Calibri"/>
               </a:rPr>
-              <a:t>• WhatsApp Cloud API + hosting: ~R0.30 / learner / yr</a:t>
+              <a:t>• WhatsApp Cloud API: ~R2–R4 / learner / yr</a:t>
             </a:r>
           </a:p>
           <a:p>
             <a:pPr algn="l">
               <a:spcBef>
-                <a:spcPts val="500"/>
+                <a:spcPts val="400"/>
               </a:spcBef>
             </a:pPr>
             <a:r>
-              <a:rPr sz="1200">
+              <a:rPr sz="1100">
                 <a:solidFill>
                   <a:srgbClr val="E9EDEF"/>
                 </a:solidFill>
                 <a:latin typeface="Calibri"/>
               </a:rPr>
-              <a:t>• Analytics + monitoring + SMS OTP: ~R0.20 / learner / yr</a:t>
+              <a:t>• Hosting + Postgres + Redis: ~R2–R4 / learner / yr</a:t>
             </a:r>
           </a:p>
           <a:p>
             <a:pPr algn="l">
               <a:spcBef>
-                <a:spcPts val="500"/>
+                <a:spcPts val="400"/>
               </a:spcBef>
             </a:pPr>
             <a:r>
-              <a:rPr sz="1200">
+              <a:rPr sz="1100">
                 <a:solidFill>
                   <a:srgbClr val="E9EDEF"/>
                 </a:solidFill>
                 <a:latin typeface="Calibri"/>
               </a:rPr>
-              <a:t>• Assumes: ~100 sessions/learner/year, mixed channels</a:t>
+              <a:t>• Analytics + monitoring + SMS OTP: ~R1–R2 / learner / yr</a:t>
             </a:r>
           </a:p>
           <a:p>
             <a:pPr algn="l">
               <a:spcBef>
-                <a:spcPts val="500"/>
+                <a:spcPts val="400"/>
               </a:spcBef>
             </a:pPr>
             <a:r>
-              <a:rPr sz="1200">
+              <a:rPr sz="1100">
                 <a:solidFill>
                   <a:srgbClr val="E9EDEF"/>
                 </a:solidFill>
                 <a:latin typeface="Calibri"/>
               </a:rPr>
-              <a:t>• At production scale on Dell AI Factory NIM: ~R0.80 / yr</a:t>
+              <a:t>• Path to R2: Dell NIM hardware + Vodacom absorbs USSD/data</a:t>
             </a:r>
           </a:p>
         </p:txBody>
@@ -9371,7 +9371,7 @@
         </p:nvSpPr>
         <p:spPr>
           <a:xfrm>
-            <a:off x="6400800" y="3337560"/>
+            <a:off x="6400800" y="3291840"/>
             <a:ext cx="5303520" cy="365760"/>
           </a:xfrm>
           <a:prstGeom prst="rect">
@@ -9387,7 +9387,7 @@
           <a:p>
             <a:pPr algn="l"/>
             <a:r>
-              <a:rPr sz="1500" b="1">
+              <a:rPr sz="1400" b="1">
                 <a:solidFill>
                   <a:srgbClr val="9CFF8C"/>
                 </a:solidFill>
@@ -9406,8 +9406,8 @@
         </p:nvSpPr>
         <p:spPr>
           <a:xfrm>
-            <a:off x="6400800" y="3794760"/>
-            <a:ext cx="2834640" cy="411480"/>
+            <a:off x="6400800" y="3703320"/>
+            <a:ext cx="2834640" cy="347472"/>
           </a:xfrm>
           <a:prstGeom prst="roundRect">
             <a:avLst/>
@@ -9439,7 +9439,7 @@
           <a:p>
             <a:pPr algn="ctr"/>
             <a:r>
-              <a:rPr sz="1200" b="1">
+              <a:rPr sz="1100" b="1">
                 <a:solidFill>
                   <a:srgbClr val="E9EDEF"/>
                 </a:solidFill>
@@ -9457,8 +9457,8 @@
         </p:nvSpPr>
         <p:spPr>
           <a:xfrm>
-            <a:off x="9326880" y="3794760"/>
-            <a:ext cx="2377440" cy="411480"/>
+            <a:off x="9326880" y="3703320"/>
+            <a:ext cx="2377440" cy="347472"/>
           </a:xfrm>
           <a:prstGeom prst="roundRect">
             <a:avLst/>
@@ -9490,7 +9490,7 @@
           <a:p>
             <a:pPr algn="ctr"/>
             <a:r>
-              <a:rPr sz="1200" b="1">
+              <a:rPr sz="1100" b="1">
                 <a:solidFill>
                   <a:srgbClr val="03110D"/>
                 </a:solidFill>
@@ -9508,8 +9508,8 @@
         </p:nvSpPr>
         <p:spPr>
           <a:xfrm>
-            <a:off x="6400800" y="4343400"/>
-            <a:ext cx="2834640" cy="411480"/>
+            <a:off x="6400800" y="4151376"/>
+            <a:ext cx="2834640" cy="347472"/>
           </a:xfrm>
           <a:prstGeom prst="roundRect">
             <a:avLst/>
@@ -9541,7 +9541,7 @@
           <a:p>
             <a:pPr algn="ctr"/>
             <a:r>
-              <a:rPr sz="1200" b="1">
+              <a:rPr sz="1100" b="1">
                 <a:solidFill>
                   <a:srgbClr val="E9EDEF"/>
                 </a:solidFill>
@@ -9559,8 +9559,8 @@
         </p:nvSpPr>
         <p:spPr>
           <a:xfrm>
-            <a:off x="9326880" y="4343400"/>
-            <a:ext cx="2377440" cy="411480"/>
+            <a:off x="9326880" y="4151376"/>
+            <a:ext cx="2377440" cy="347472"/>
           </a:xfrm>
           <a:prstGeom prst="roundRect">
             <a:avLst/>
@@ -9592,7 +9592,7 @@
           <a:p>
             <a:pPr algn="ctr"/>
             <a:r>
-              <a:rPr sz="1200" b="1">
+              <a:rPr sz="1100" b="1">
                 <a:solidFill>
                   <a:srgbClr val="03110D"/>
                 </a:solidFill>
@@ -9610,8 +9610,8 @@
         </p:nvSpPr>
         <p:spPr>
           <a:xfrm>
-            <a:off x="6400800" y="4892040"/>
-            <a:ext cx="2834640" cy="411480"/>
+            <a:off x="6400800" y="4599432"/>
+            <a:ext cx="2834640" cy="347472"/>
           </a:xfrm>
           <a:prstGeom prst="roundRect">
             <a:avLst/>
@@ -9643,7 +9643,7 @@
           <a:p>
             <a:pPr algn="ctr"/>
             <a:r>
-              <a:rPr sz="1200" b="1">
+              <a:rPr sz="1100" b="1">
                 <a:solidFill>
                   <a:srgbClr val="E9EDEF"/>
                 </a:solidFill>
@@ -9661,8 +9661,8 @@
         </p:nvSpPr>
         <p:spPr>
           <a:xfrm>
-            <a:off x="9326880" y="4892040"/>
-            <a:ext cx="2377440" cy="411480"/>
+            <a:off x="9326880" y="4599432"/>
+            <a:ext cx="2377440" cy="347472"/>
           </a:xfrm>
           <a:prstGeom prst="roundRect">
             <a:avLst/>
@@ -9694,7 +9694,7 @@
           <a:p>
             <a:pPr algn="ctr"/>
             <a:r>
-              <a:rPr sz="1200" b="1">
+              <a:rPr sz="1100" b="1">
                 <a:solidFill>
                   <a:srgbClr val="03110D"/>
                 </a:solidFill>
@@ -9712,8 +9712,8 @@
         </p:nvSpPr>
         <p:spPr>
           <a:xfrm>
-            <a:off x="6400800" y="5440679"/>
-            <a:ext cx="2834640" cy="411480"/>
+            <a:off x="6400800" y="5047488"/>
+            <a:ext cx="2834640" cy="347472"/>
           </a:xfrm>
           <a:prstGeom prst="roundRect">
             <a:avLst/>
@@ -9745,12 +9745,12 @@
           <a:p>
             <a:pPr algn="ctr"/>
             <a:r>
-              <a:rPr sz="1200" b="1">
+              <a:rPr sz="1100" b="1">
                 <a:solidFill>
                   <a:srgbClr val="E9EDEF"/>
                 </a:solidFill>
               </a:rPr>
-              <a:t>EduConnect</a:t>
+              <a:t>EduConnect (today)</a:t>
             </a:r>
           </a:p>
         </p:txBody>
@@ -9763,8 +9763,8 @@
         </p:nvSpPr>
         <p:spPr>
           <a:xfrm>
-            <a:off x="9326880" y="5440679"/>
-            <a:ext cx="2377440" cy="411480"/>
+            <a:off x="9326880" y="5047488"/>
+            <a:ext cx="2377440" cy="347472"/>
           </a:xfrm>
           <a:prstGeom prst="roundRect">
             <a:avLst/>
@@ -9796,11 +9796,113 @@
           <a:p>
             <a:pPr algn="ctr"/>
             <a:r>
-              <a:rPr sz="1200" b="1">
+              <a:rPr sz="1100" b="1">
                 <a:solidFill>
                   <a:srgbClr val="03110D"/>
                 </a:solidFill>
               </a:rPr>
+              <a:t>~R20 / yr</a:t>
+            </a:r>
+          </a:p>
+        </p:txBody>
+      </p:sp>
+      <p:sp>
+        <p:nvSpPr>
+          <p:cNvPr id="23" name="Rounded Rectangle 22"/>
+          <p:cNvSpPr/>
+          <p:nvPr/>
+        </p:nvSpPr>
+        <p:spPr>
+          <a:xfrm>
+            <a:off x="6400800" y="5495544"/>
+            <a:ext cx="2834640" cy="347472"/>
+          </a:xfrm>
+          <a:prstGeom prst="roundRect">
+            <a:avLst/>
+          </a:prstGeom>
+          <a:solidFill>
+            <a:srgbClr val="111B21"/>
+          </a:solidFill>
+          <a:ln>
+            <a:noFill/>
+          </a:ln>
+        </p:spPr>
+        <p:style>
+          <a:lnRef idx="1">
+            <a:schemeClr val="accent1"/>
+          </a:lnRef>
+          <a:fillRef idx="3">
+            <a:schemeClr val="accent1"/>
+          </a:fillRef>
+          <a:effectRef idx="2">
+            <a:schemeClr val="accent1"/>
+          </a:effectRef>
+          <a:fontRef idx="minor">
+            <a:schemeClr val="lt1"/>
+          </a:fontRef>
+        </p:style>
+        <p:txBody>
+          <a:bodyPr rtlCol="0" anchor="ctr" lIns="137160" rIns="137160"/>
+          <a:lstStyle/>
+          <a:p>
+            <a:pPr algn="ctr"/>
+            <a:r>
+              <a:rPr sz="1100" b="1">
+                <a:solidFill>
+                  <a:srgbClr val="E9EDEF"/>
+                </a:solidFill>
+              </a:rPr>
+              <a:t>EduConnect (target)</a:t>
+            </a:r>
+          </a:p>
+        </p:txBody>
+      </p:sp>
+      <p:sp>
+        <p:nvSpPr>
+          <p:cNvPr id="24" name="Rounded Rectangle 23"/>
+          <p:cNvSpPr/>
+          <p:nvPr/>
+        </p:nvSpPr>
+        <p:spPr>
+          <a:xfrm>
+            <a:off x="9326880" y="5495544"/>
+            <a:ext cx="2377440" cy="347472"/>
+          </a:xfrm>
+          <a:prstGeom prst="roundRect">
+            <a:avLst/>
+          </a:prstGeom>
+          <a:solidFill>
+            <a:srgbClr val="00A884"/>
+          </a:solidFill>
+          <a:ln>
+            <a:noFill/>
+          </a:ln>
+        </p:spPr>
+        <p:style>
+          <a:lnRef idx="1">
+            <a:schemeClr val="accent1"/>
+          </a:lnRef>
+          <a:fillRef idx="3">
+            <a:schemeClr val="accent1"/>
+          </a:fillRef>
+          <a:effectRef idx="2">
+            <a:schemeClr val="accent1"/>
+          </a:effectRef>
+          <a:fontRef idx="minor">
+            <a:schemeClr val="lt1"/>
+          </a:fontRef>
+        </p:style>
+        <p:txBody>
+          <a:bodyPr rtlCol="0" anchor="ctr" lIns="137160" rIns="137160"/>
+          <a:lstStyle/>
+          <a:p>
+            <a:pPr algn="ctr"/>
+            <a:r>
+              <a:rPr sz="1100" b="1">
+                <a:solidFill>
+                  <a:srgbClr val="03110D"/>
+                </a:solidFill>
+              </a:rPr>
               <a:t>R2 / yr</a:t>
             </a:r>
           </a:p>
@@ -9808,7 +9910,42 @@
       </p:sp>
       <p:sp>
         <p:nvSpPr>
-          <p:cNvPr id="23" name="Rounded Rectangle 22"/>
+          <p:cNvPr id="25" name="TextBox 24"/>
+          <p:cNvSpPr txBox="1"/>
+          <p:nvPr/>
+        </p:nvSpPr>
+        <p:spPr>
+          <a:xfrm>
+            <a:off x="548640" y="5989320"/>
+            <a:ext cx="11064240" cy="256032"/>
+          </a:xfrm>
+          <a:prstGeom prst="rect">
+            <a:avLst/>
+          </a:prstGeom>
+          <a:noFill/>
+        </p:spPr>
+        <p:txBody>
+          <a:bodyPr wrap="square">
+            <a:spAutoFit/>
+          </a:bodyPr>
+          <a:lstStyle/>
+          <a:p>
+            <a:pPr algn="ctr"/>
+            <a:r>
+              <a:rPr sz="900" b="0">
+                <a:solidFill>
+                  <a:srgbClr val="8696A0"/>
+                </a:solidFill>
+                <a:latin typeface="Calibri"/>
+              </a:rPr>
+              <a:t>Assumes: ~100 sessions/learner/year (unvalidated) · Dell hardware sponsorship + Vodacom absorbing USSD/data to reach the R2 target</a:t>
+            </a:r>
+          </a:p>
+        </p:txBody>
+      </p:sp>
+      <p:sp>
+        <p:nvSpPr>
+          <p:cNvPr id="26" name="Rounded Rectangle 25"/>
           <p:cNvSpPr/>
           <p:nvPr/>
         </p:nvSpPr>
@@ -9851,7 +9988,7 @@
       </p:sp>
       <p:sp>
         <p:nvSpPr>
-          <p:cNvPr id="24" name="TextBox 23"/>
+          <p:cNvPr id="27" name="TextBox 26"/>
           <p:cNvSpPr txBox="1"/>
           <p:nvPr/>
         </p:nvSpPr>
@@ -9879,7 +10016,7 @@
                 </a:solidFill>
                 <a:latin typeface="Calibri"/>
               </a:rPr>
-              <a:t>1 extra matric pass generates ~R150k lifetime earnings uplift. Break-even at ~1 additional pass per 75,000 learners served.</a:t>
+              <a:t>Even at 10× today's cost (~R200/yr), we're still 80× cheaper than a tutor. 1 extra matric pass = ~R150k lifetime earnings uplift — break-even at ~1 pass per 75k learners.</a:t>
             </a:r>
           </a:p>
         </p:txBody>
